--- a/strategy/AI社員5人_発表_20260426.pptx
+++ b/strategy/AI社員5人_発表_20260426.pptx
@@ -14,6 +14,8 @@
     <p:sldId id="262" r:id="rId13"/>
     <p:sldId id="263" r:id="rId14"/>
     <p:sldId id="264" r:id="rId15"/>
+    <p:sldId id="265" r:id="rId16"/>
+    <p:sldId id="266" r:id="rId17"/>
   </p:sldIdLst>
   <p:sldSz cx="12188952" cy="6858000" type="screen4x3"/>
   <p:notesSz cx="6858000" cy="9144000"/>
@@ -3147,45 +3149,38 @@
         </p:nvSpPr>
         <p:spPr>
           <a:xfrm>
-            <a:off x="457200" y="1828800"/>
-            <a:ext cx="11274552" cy="1371600"/>
+            <a:off x="5029200" y="2103120"/>
+            <a:ext cx="2130552" cy="73152"/>
           </a:xfrm>
           <a:prstGeom prst="rect">
             <a:avLst/>
           </a:prstGeom>
-          <a:noFill/>
-          <a:ln>
-            <a:noFill/>
-          </a:ln>
-        </p:spPr>
-        <p:style>
-          <a:lnRef idx="1">
-            <a:schemeClr val="accent1"/>
-          </a:lnRef>
-          <a:fillRef idx="3">
-            <a:schemeClr val="accent1"/>
-          </a:fillRef>
-          <a:effectRef idx="2">
-            <a:schemeClr val="accent1"/>
-          </a:effectRef>
-          <a:fontRef idx="minor">
-            <a:schemeClr val="lt1"/>
-          </a:fontRef>
-        </p:style>
-        <p:txBody>
-          <a:bodyPr rtlCol="0" anchor="ctr" wrap="square" lIns="137160" rIns="137160" tIns="73152" bIns="73152"/>
+          <a:solidFill>
+            <a:srgbClr val="2563EB"/>
+          </a:solidFill>
+          <a:ln>
+            <a:noFill/>
+          </a:ln>
+        </p:spPr>
+        <p:style>
+          <a:lnRef idx="1">
+            <a:schemeClr val="accent1"/>
+          </a:lnRef>
+          <a:fillRef idx="3">
+            <a:schemeClr val="accent1"/>
+          </a:fillRef>
+          <a:effectRef idx="2">
+            <a:schemeClr val="accent1"/>
+          </a:effectRef>
+          <a:fontRef idx="minor">
+            <a:schemeClr val="lt1"/>
+          </a:fontRef>
+        </p:style>
+        <p:txBody>
+          <a:bodyPr rtlCol="0" anchor="ctr"/>
           <a:lstStyle/>
           <a:p>
             <a:pPr algn="ctr"/>
-            <a:r>
-              <a:rPr sz="3600" b="1">
-                <a:solidFill>
-                  <a:srgbClr val="1C3557"/>
-                </a:solidFill>
-                <a:latin typeface="Noto Sans JP"/>
-              </a:rPr>
-              <a:t>私たちは「コストダウン」の話ができません</a:t>
-            </a:r>
           </a:p>
         </p:txBody>
       </p:sp>
@@ -3197,8 +3192,8 @@
         </p:nvSpPr>
         <p:spPr>
           <a:xfrm>
-            <a:off x="457200" y="3200400"/>
-            <a:ext cx="11274552" cy="457200"/>
+            <a:off x="457200" y="2286000"/>
+            <a:ext cx="11274552" cy="1280160"/>
           </a:xfrm>
           <a:prstGeom prst="rect">
             <a:avLst/>
@@ -3223,32 +3218,1513 @@
           </a:fontRef>
         </p:style>
         <p:txBody>
+          <a:bodyPr rtlCol="0" anchor="ctr" wrap="square" lIns="137160" rIns="137160" tIns="73152" bIns="73152"/>
+          <a:lstStyle/>
+          <a:p>
+            <a:pPr algn="ctr"/>
+            <a:r>
+              <a:rPr sz="4800" b="1">
+                <a:solidFill>
+                  <a:srgbClr val="2563EB"/>
+                </a:solidFill>
+                <a:latin typeface="Noto Sans JP"/>
+              </a:rPr>
+              <a:t>AIハッカソン</a:t>
+            </a:r>
+          </a:p>
+        </p:txBody>
+      </p:sp>
+      <p:sp>
+        <p:nvSpPr>
+          <p:cNvPr id="5" name="Rectangle 4"/>
+          <p:cNvSpPr/>
+          <p:nvPr/>
+        </p:nvSpPr>
+        <p:spPr>
+          <a:xfrm>
+            <a:off x="5029200" y="3657600"/>
+            <a:ext cx="2130552" cy="36576"/>
+          </a:xfrm>
+          <a:prstGeom prst="rect">
+            <a:avLst/>
+          </a:prstGeom>
+          <a:solidFill>
+            <a:srgbClr val="E5E7EB"/>
+          </a:solidFill>
+          <a:ln>
+            <a:noFill/>
+          </a:ln>
+        </p:spPr>
+        <p:style>
+          <a:lnRef idx="1">
+            <a:schemeClr val="accent1"/>
+          </a:lnRef>
+          <a:fillRef idx="3">
+            <a:schemeClr val="accent1"/>
+          </a:fillRef>
+          <a:effectRef idx="2">
+            <a:schemeClr val="accent1"/>
+          </a:effectRef>
+          <a:fontRef idx="minor">
+            <a:schemeClr val="lt1"/>
+          </a:fontRef>
+        </p:style>
+        <p:txBody>
+          <a:bodyPr rtlCol="0" anchor="ctr"/>
+          <a:lstStyle/>
+          <a:p>
+            <a:pPr algn="ctr"/>
+          </a:p>
+        </p:txBody>
+      </p:sp>
+      <p:sp>
+        <p:nvSpPr>
+          <p:cNvPr id="6" name="Rectangle 5"/>
+          <p:cNvSpPr/>
+          <p:nvPr/>
+        </p:nvSpPr>
+        <p:spPr>
+          <a:xfrm>
+            <a:off x="457200" y="3840480"/>
+            <a:ext cx="11274552" cy="640080"/>
+          </a:xfrm>
+          <a:prstGeom prst="rect">
+            <a:avLst/>
+          </a:prstGeom>
+          <a:noFill/>
+          <a:ln>
+            <a:noFill/>
+          </a:ln>
+        </p:spPr>
+        <p:style>
+          <a:lnRef idx="1">
+            <a:schemeClr val="accent1"/>
+          </a:lnRef>
+          <a:fillRef idx="3">
+            <a:schemeClr val="accent1"/>
+          </a:fillRef>
+          <a:effectRef idx="2">
+            <a:schemeClr val="accent1"/>
+          </a:effectRef>
+          <a:fontRef idx="minor">
+            <a:schemeClr val="lt1"/>
+          </a:fontRef>
+        </p:style>
+        <p:txBody>
+          <a:bodyPr rtlCol="0" anchor="ctr" wrap="square" lIns="137160" rIns="137160" tIns="73152" bIns="73152"/>
+          <a:lstStyle/>
+          <a:p>
+            <a:pPr algn="ctr"/>
+            <a:r>
+              <a:rPr sz="2400" b="1">
+                <a:solidFill>
+                  <a:srgbClr val="1C3557"/>
+                </a:solidFill>
+                <a:latin typeface="Noto Sans JP"/>
+              </a:rPr>
+              <a:t>Kawaru事業部</a:t>
+            </a:r>
+          </a:p>
+        </p:txBody>
+      </p:sp>
+      <p:sp>
+        <p:nvSpPr>
+          <p:cNvPr id="7" name="Rectangle 6"/>
+          <p:cNvSpPr/>
+          <p:nvPr/>
+        </p:nvSpPr>
+        <p:spPr>
+          <a:xfrm>
+            <a:off x="457200" y="4572000"/>
+            <a:ext cx="11274552" cy="640080"/>
+          </a:xfrm>
+          <a:prstGeom prst="rect">
+            <a:avLst/>
+          </a:prstGeom>
+          <a:noFill/>
+          <a:ln>
+            <a:noFill/>
+          </a:ln>
+        </p:spPr>
+        <p:style>
+          <a:lnRef idx="1">
+            <a:schemeClr val="accent1"/>
+          </a:lnRef>
+          <a:fillRef idx="3">
+            <a:schemeClr val="accent1"/>
+          </a:fillRef>
+          <a:effectRef idx="2">
+            <a:schemeClr val="accent1"/>
+          </a:effectRef>
+          <a:fontRef idx="minor">
+            <a:schemeClr val="lt1"/>
+          </a:fontRef>
+        </p:style>
+        <p:txBody>
+          <a:bodyPr rtlCol="0" anchor="ctr" wrap="square" lIns="137160" rIns="137160" tIns="73152" bIns="73152"/>
+          <a:lstStyle/>
+          <a:p>
+            <a:pPr algn="ctr"/>
+            <a:r>
+              <a:rPr sz="2000" b="0">
+                <a:solidFill>
+                  <a:srgbClr val="1C3557"/>
+                </a:solidFill>
+                <a:latin typeface="Noto Sans JP"/>
+              </a:rPr>
+              <a:t>大川 龍之介</a:t>
+            </a:r>
+          </a:p>
+        </p:txBody>
+      </p:sp>
+      <p:sp>
+        <p:nvSpPr>
+          <p:cNvPr id="8" name="Rectangle 7"/>
+          <p:cNvSpPr/>
+          <p:nvPr/>
+        </p:nvSpPr>
+        <p:spPr>
+          <a:xfrm>
+            <a:off x="457200" y="5943600"/>
+            <a:ext cx="11274552" cy="365760"/>
+          </a:xfrm>
+          <a:prstGeom prst="rect">
+            <a:avLst/>
+          </a:prstGeom>
+          <a:noFill/>
+          <a:ln>
+            <a:noFill/>
+          </a:ln>
+        </p:spPr>
+        <p:style>
+          <a:lnRef idx="1">
+            <a:schemeClr val="accent1"/>
+          </a:lnRef>
+          <a:fillRef idx="3">
+            <a:schemeClr val="accent1"/>
+          </a:fillRef>
+          <a:effectRef idx="2">
+            <a:schemeClr val="accent1"/>
+          </a:effectRef>
+          <a:fontRef idx="minor">
+            <a:schemeClr val="lt1"/>
+          </a:fontRef>
+        </p:style>
+        <p:txBody>
           <a:bodyPr rtlCol="0" anchor="t" wrap="square" lIns="137160" rIns="137160" tIns="73152" bIns="73152"/>
           <a:lstStyle/>
           <a:p>
             <a:pPr algn="ctr"/>
             <a:r>
-              <a:rPr sz="1400" b="0">
+              <a:rPr sz="1300" b="0">
                 <a:solidFill>
                   <a:srgbClr val="6B7280"/>
                 </a:solidFill>
                 <a:latin typeface="Noto Sans JP"/>
               </a:rPr>
-              <a:t>Kawaru事業部の前提</a:t>
-            </a:r>
-          </a:p>
-        </p:txBody>
-      </p:sp>
-      <p:sp>
-        <p:nvSpPr>
-          <p:cNvPr id="5" name="Rounded Rectangle 4"/>
-          <p:cNvSpPr/>
-          <p:nvPr/>
-        </p:nvSpPr>
-        <p:spPr>
-          <a:xfrm>
-            <a:off x="1371600" y="4297680"/>
-            <a:ext cx="4114800" cy="1371600"/>
+              <a:t>2026.04</a:t>
+            </a:r>
+          </a:p>
+        </p:txBody>
+      </p:sp>
+    </p:spTree>
+  </p:cSld>
+  <p:clrMapOvr>
+    <a:masterClrMapping/>
+  </p:clrMapOvr>
+</p:sld>
+</file>
+
+<file path=ppt/slides/slide10.xml><?xml version="1.0" encoding="utf-8"?>
+<p:sld xmlns:a="http://schemas.openxmlformats.org/drawingml/2006/main" xmlns:p="http://schemas.openxmlformats.org/presentationml/2006/main" xmlns:r="http://schemas.openxmlformats.org/officeDocument/2006/relationships">
+  <p:cSld>
+    <p:spTree>
+      <p:nvGrpSpPr>
+        <p:cNvPr id="1" name=""/>
+        <p:cNvGrpSpPr/>
+        <p:nvPr/>
+      </p:nvGrpSpPr>
+      <p:grpSpPr/>
+      <p:sp>
+        <p:nvSpPr>
+          <p:cNvPr id="2" name="Rectangle 1"/>
+          <p:cNvSpPr/>
+          <p:nvPr/>
+        </p:nvSpPr>
+        <p:spPr>
+          <a:xfrm>
+            <a:off x="0" y="0"/>
+            <a:ext cx="12188952" cy="6858000"/>
+          </a:xfrm>
+          <a:prstGeom prst="rect">
+            <a:avLst/>
+          </a:prstGeom>
+          <a:solidFill>
+            <a:srgbClr val="FFFFFF"/>
+          </a:solidFill>
+          <a:ln>
+            <a:noFill/>
+          </a:ln>
+        </p:spPr>
+        <p:style>
+          <a:lnRef idx="1">
+            <a:schemeClr val="accent1"/>
+          </a:lnRef>
+          <a:fillRef idx="3">
+            <a:schemeClr val="accent1"/>
+          </a:fillRef>
+          <a:effectRef idx="2">
+            <a:schemeClr val="accent1"/>
+          </a:effectRef>
+          <a:fontRef idx="minor">
+            <a:schemeClr val="lt1"/>
+          </a:fontRef>
+        </p:style>
+        <p:txBody>
+          <a:bodyPr rtlCol="0" anchor="ctr"/>
+          <a:lstStyle/>
+          <a:p>
+            <a:pPr algn="ctr"/>
+          </a:p>
+        </p:txBody>
+      </p:sp>
+      <p:sp>
+        <p:nvSpPr>
+          <p:cNvPr id="3" name="Rectangle 2"/>
+          <p:cNvSpPr/>
+          <p:nvPr/>
+        </p:nvSpPr>
+        <p:spPr>
+          <a:xfrm>
+            <a:off x="10972800" y="274320"/>
+            <a:ext cx="1005840" cy="274320"/>
+          </a:xfrm>
+          <a:prstGeom prst="rect">
+            <a:avLst/>
+          </a:prstGeom>
+          <a:noFill/>
+          <a:ln>
+            <a:noFill/>
+          </a:ln>
+        </p:spPr>
+        <p:style>
+          <a:lnRef idx="1">
+            <a:schemeClr val="accent1"/>
+          </a:lnRef>
+          <a:fillRef idx="3">
+            <a:schemeClr val="accent1"/>
+          </a:fillRef>
+          <a:effectRef idx="2">
+            <a:schemeClr val="accent1"/>
+          </a:effectRef>
+          <a:fontRef idx="minor">
+            <a:schemeClr val="lt1"/>
+          </a:fontRef>
+        </p:style>
+        <p:txBody>
+          <a:bodyPr rtlCol="0" anchor="t" wrap="square" lIns="137160" rIns="137160" tIns="73152" bIns="73152"/>
+          <a:lstStyle/>
+          <a:p>
+            <a:pPr algn="r"/>
+            <a:r>
+              <a:rPr sz="1000" b="0">
+                <a:solidFill>
+                  <a:srgbClr val="6B7280"/>
+                </a:solidFill>
+                <a:latin typeface="Noto Sans JP"/>
+              </a:rPr>
+              <a:t>10 / 11</a:t>
+            </a:r>
+          </a:p>
+        </p:txBody>
+      </p:sp>
+      <p:sp>
+        <p:nvSpPr>
+          <p:cNvPr id="4" name="Rectangle 3"/>
+          <p:cNvSpPr/>
+          <p:nvPr/>
+        </p:nvSpPr>
+        <p:spPr>
+          <a:xfrm>
+            <a:off x="457200" y="365760"/>
+            <a:ext cx="10515600" cy="640080"/>
+          </a:xfrm>
+          <a:prstGeom prst="rect">
+            <a:avLst/>
+          </a:prstGeom>
+          <a:noFill/>
+          <a:ln>
+            <a:noFill/>
+          </a:ln>
+        </p:spPr>
+        <p:style>
+          <a:lnRef idx="1">
+            <a:schemeClr val="accent1"/>
+          </a:lnRef>
+          <a:fillRef idx="3">
+            <a:schemeClr val="accent1"/>
+          </a:fillRef>
+          <a:effectRef idx="2">
+            <a:schemeClr val="accent1"/>
+          </a:effectRef>
+          <a:fontRef idx="minor">
+            <a:schemeClr val="lt1"/>
+          </a:fontRef>
+        </p:style>
+        <p:txBody>
+          <a:bodyPr rtlCol="0" anchor="t" wrap="square" lIns="137160" rIns="137160" tIns="73152" bIns="73152"/>
+          <a:lstStyle/>
+          <a:p>
+            <a:pPr algn="l"/>
+            <a:r>
+              <a:rPr sz="2200" b="1">
+                <a:solidFill>
+                  <a:srgbClr val="1C3557"/>
+                </a:solidFill>
+                <a:latin typeface="Noto Sans JP"/>
+              </a:rPr>
+              <a:t>6月末2人分 → 9月末5人分、Agent Teams も並走で構築</a:t>
+            </a:r>
+          </a:p>
+        </p:txBody>
+      </p:sp>
+      <p:sp>
+        <p:nvSpPr>
+          <p:cNvPr id="5" name="Rectangle 4"/>
+          <p:cNvSpPr/>
+          <p:nvPr/>
+        </p:nvSpPr>
+        <p:spPr>
+          <a:xfrm>
+            <a:off x="457200" y="1051560"/>
+            <a:ext cx="1371600" cy="54864"/>
+          </a:xfrm>
+          <a:prstGeom prst="rect">
+            <a:avLst/>
+          </a:prstGeom>
+          <a:solidFill>
+            <a:srgbClr val="2563EB"/>
+          </a:solidFill>
+          <a:ln>
+            <a:noFill/>
+          </a:ln>
+        </p:spPr>
+        <p:style>
+          <a:lnRef idx="1">
+            <a:schemeClr val="accent1"/>
+          </a:lnRef>
+          <a:fillRef idx="3">
+            <a:schemeClr val="accent1"/>
+          </a:fillRef>
+          <a:effectRef idx="2">
+            <a:schemeClr val="accent1"/>
+          </a:effectRef>
+          <a:fontRef idx="minor">
+            <a:schemeClr val="lt1"/>
+          </a:fontRef>
+        </p:style>
+        <p:txBody>
+          <a:bodyPr rtlCol="0" anchor="ctr"/>
+          <a:lstStyle/>
+          <a:p>
+            <a:pPr algn="ctr"/>
+          </a:p>
+        </p:txBody>
+      </p:sp>
+      <p:sp>
+        <p:nvSpPr>
+          <p:cNvPr id="6" name="Rectangle 5"/>
+          <p:cNvSpPr/>
+          <p:nvPr/>
+        </p:nvSpPr>
+        <p:spPr>
+          <a:xfrm>
+            <a:off x="457200" y="1371600"/>
+            <a:ext cx="2286000" cy="640080"/>
+          </a:xfrm>
+          <a:prstGeom prst="rect">
+            <a:avLst/>
+          </a:prstGeom>
+          <a:solidFill>
+            <a:srgbClr val="1C3557"/>
+          </a:solidFill>
+          <a:ln>
+            <a:noFill/>
+          </a:ln>
+        </p:spPr>
+        <p:style>
+          <a:lnRef idx="1">
+            <a:schemeClr val="accent1"/>
+          </a:lnRef>
+          <a:fillRef idx="3">
+            <a:schemeClr val="accent1"/>
+          </a:fillRef>
+          <a:effectRef idx="2">
+            <a:schemeClr val="accent1"/>
+          </a:effectRef>
+          <a:fontRef idx="minor">
+            <a:schemeClr val="lt1"/>
+          </a:fontRef>
+        </p:style>
+        <p:txBody>
+          <a:bodyPr rtlCol="0" anchor="ctr" wrap="square" lIns="137160" rIns="137160" tIns="73152" bIns="73152"/>
+          <a:lstStyle/>
+          <a:p>
+            <a:pPr algn="ctr"/>
+            <a:r>
+              <a:rPr sz="1400" b="1">
+                <a:solidFill>
+                  <a:srgbClr val="FFFFFF"/>
+                </a:solidFill>
+                <a:latin typeface="Noto Sans JP"/>
+              </a:rPr>
+              <a:t>月</a:t>
+            </a:r>
+          </a:p>
+        </p:txBody>
+      </p:sp>
+      <p:sp>
+        <p:nvSpPr>
+          <p:cNvPr id="7" name="Rectangle 6"/>
+          <p:cNvSpPr/>
+          <p:nvPr/>
+        </p:nvSpPr>
+        <p:spPr>
+          <a:xfrm>
+            <a:off x="2788920" y="1371600"/>
+            <a:ext cx="1828800" cy="640080"/>
+          </a:xfrm>
+          <a:prstGeom prst="rect">
+            <a:avLst/>
+          </a:prstGeom>
+          <a:solidFill>
+            <a:srgbClr val="1C3557"/>
+          </a:solidFill>
+          <a:ln>
+            <a:noFill/>
+          </a:ln>
+        </p:spPr>
+        <p:style>
+          <a:lnRef idx="1">
+            <a:schemeClr val="accent1"/>
+          </a:lnRef>
+          <a:fillRef idx="3">
+            <a:schemeClr val="accent1"/>
+          </a:fillRef>
+          <a:effectRef idx="2">
+            <a:schemeClr val="accent1"/>
+          </a:effectRef>
+          <a:fontRef idx="minor">
+            <a:schemeClr val="lt1"/>
+          </a:fontRef>
+        </p:style>
+        <p:txBody>
+          <a:bodyPr rtlCol="0" anchor="ctr" wrap="square" lIns="137160" rIns="137160" tIns="73152" bIns="73152"/>
+          <a:lstStyle/>
+          <a:p>
+            <a:pPr algn="ctr"/>
+            <a:r>
+              <a:rPr sz="1400" b="1">
+                <a:solidFill>
+                  <a:srgbClr val="FFFFFF"/>
+                </a:solidFill>
+                <a:latin typeface="Noto Sans JP"/>
+              </a:rPr>
+              <a:t>達成水準</a:t>
+            </a:r>
+          </a:p>
+        </p:txBody>
+      </p:sp>
+      <p:sp>
+        <p:nvSpPr>
+          <p:cNvPr id="8" name="Rectangle 7"/>
+          <p:cNvSpPr/>
+          <p:nvPr/>
+        </p:nvSpPr>
+        <p:spPr>
+          <a:xfrm>
+            <a:off x="4663440" y="1371600"/>
+            <a:ext cx="7040880" cy="640080"/>
+          </a:xfrm>
+          <a:prstGeom prst="rect">
+            <a:avLst/>
+          </a:prstGeom>
+          <a:solidFill>
+            <a:srgbClr val="1C3557"/>
+          </a:solidFill>
+          <a:ln>
+            <a:noFill/>
+          </a:ln>
+        </p:spPr>
+        <p:style>
+          <a:lnRef idx="1">
+            <a:schemeClr val="accent1"/>
+          </a:lnRef>
+          <a:fillRef idx="3">
+            <a:schemeClr val="accent1"/>
+          </a:fillRef>
+          <a:effectRef idx="2">
+            <a:schemeClr val="accent1"/>
+          </a:effectRef>
+          <a:fontRef idx="minor">
+            <a:schemeClr val="lt1"/>
+          </a:fontRef>
+        </p:style>
+        <p:txBody>
+          <a:bodyPr rtlCol="0" anchor="ctr" wrap="square" lIns="137160" rIns="137160" tIns="73152" bIns="73152"/>
+          <a:lstStyle/>
+          <a:p>
+            <a:pPr algn="ctr"/>
+            <a:r>
+              <a:rPr sz="1400" b="1">
+                <a:solidFill>
+                  <a:srgbClr val="FFFFFF"/>
+                </a:solidFill>
+                <a:latin typeface="Noto Sans JP"/>
+              </a:rPr>
+              <a:t>動き</a:t>
+            </a:r>
+          </a:p>
+        </p:txBody>
+      </p:sp>
+      <p:sp>
+        <p:nvSpPr>
+          <p:cNvPr id="9" name="Rectangle 8"/>
+          <p:cNvSpPr/>
+          <p:nvPr/>
+        </p:nvSpPr>
+        <p:spPr>
+          <a:xfrm>
+            <a:off x="457200" y="2103120"/>
+            <a:ext cx="2286000" cy="640080"/>
+          </a:xfrm>
+          <a:prstGeom prst="rect">
+            <a:avLst/>
+          </a:prstGeom>
+          <a:solidFill>
+            <a:srgbClr val="F3F4F6"/>
+          </a:solidFill>
+          <a:ln>
+            <a:noFill/>
+          </a:ln>
+        </p:spPr>
+        <p:style>
+          <a:lnRef idx="1">
+            <a:schemeClr val="accent1"/>
+          </a:lnRef>
+          <a:fillRef idx="3">
+            <a:schemeClr val="accent1"/>
+          </a:fillRef>
+          <a:effectRef idx="2">
+            <a:schemeClr val="accent1"/>
+          </a:effectRef>
+          <a:fontRef idx="minor">
+            <a:schemeClr val="lt1"/>
+          </a:fontRef>
+        </p:style>
+        <p:txBody>
+          <a:bodyPr rtlCol="0" anchor="ctr" wrap="square" lIns="137160" rIns="137160" tIns="73152" bIns="73152"/>
+          <a:lstStyle/>
+          <a:p>
+            <a:pPr algn="ctr"/>
+            <a:r>
+              <a:rPr sz="1300" b="0">
+                <a:solidFill>
+                  <a:srgbClr val="1C3557"/>
+                </a:solidFill>
+                <a:latin typeface="Noto Sans JP"/>
+              </a:rPr>
+              <a:t>4月 (現在)</a:t>
+            </a:r>
+          </a:p>
+        </p:txBody>
+      </p:sp>
+      <p:sp>
+        <p:nvSpPr>
+          <p:cNvPr id="10" name="Rectangle 9"/>
+          <p:cNvSpPr/>
+          <p:nvPr/>
+        </p:nvSpPr>
+        <p:spPr>
+          <a:xfrm>
+            <a:off x="2788920" y="2103120"/>
+            <a:ext cx="1828800" cy="640080"/>
+          </a:xfrm>
+          <a:prstGeom prst="rect">
+            <a:avLst/>
+          </a:prstGeom>
+          <a:solidFill>
+            <a:srgbClr val="F3F4F6"/>
+          </a:solidFill>
+          <a:ln>
+            <a:noFill/>
+          </a:ln>
+        </p:spPr>
+        <p:style>
+          <a:lnRef idx="1">
+            <a:schemeClr val="accent1"/>
+          </a:lnRef>
+          <a:fillRef idx="3">
+            <a:schemeClr val="accent1"/>
+          </a:fillRef>
+          <a:effectRef idx="2">
+            <a:schemeClr val="accent1"/>
+          </a:effectRef>
+          <a:fontRef idx="minor">
+            <a:schemeClr val="lt1"/>
+          </a:fontRef>
+        </p:style>
+        <p:txBody>
+          <a:bodyPr rtlCol="0" anchor="ctr" wrap="square" lIns="137160" rIns="137160" tIns="73152" bIns="73152"/>
+          <a:lstStyle/>
+          <a:p>
+            <a:pPr algn="ctr"/>
+            <a:r>
+              <a:rPr sz="1600" b="1">
+                <a:solidFill>
+                  <a:srgbClr val="1C3557"/>
+                </a:solidFill>
+                <a:latin typeface="Noto Sans JP"/>
+              </a:rPr>
+              <a:t>1.3人分</a:t>
+            </a:r>
+          </a:p>
+        </p:txBody>
+      </p:sp>
+      <p:sp>
+        <p:nvSpPr>
+          <p:cNvPr id="11" name="Rectangle 10"/>
+          <p:cNvSpPr/>
+          <p:nvPr/>
+        </p:nvSpPr>
+        <p:spPr>
+          <a:xfrm>
+            <a:off x="4663440" y="2103120"/>
+            <a:ext cx="7040880" cy="640080"/>
+          </a:xfrm>
+          <a:prstGeom prst="rect">
+            <a:avLst/>
+          </a:prstGeom>
+          <a:solidFill>
+            <a:srgbClr val="F3F4F6"/>
+          </a:solidFill>
+          <a:ln>
+            <a:noFill/>
+          </a:ln>
+        </p:spPr>
+        <p:style>
+          <a:lnRef idx="1">
+            <a:schemeClr val="accent1"/>
+          </a:lnRef>
+          <a:fillRef idx="3">
+            <a:schemeClr val="accent1"/>
+          </a:fillRef>
+          <a:effectRef idx="2">
+            <a:schemeClr val="accent1"/>
+          </a:effectRef>
+          <a:fontRef idx="minor">
+            <a:schemeClr val="lt1"/>
+          </a:fontRef>
+        </p:style>
+        <p:txBody>
+          <a:bodyPr rtlCol="0" anchor="ctr" wrap="square" lIns="137160" rIns="137160" tIns="73152" bIns="73152"/>
+          <a:lstStyle/>
+          <a:p>
+            <a:pPr algn="l"/>
+            <a:r>
+              <a:rPr sz="1200" b="0">
+                <a:solidFill>
+                  <a:srgbClr val="1C3557"/>
+                </a:solidFill>
+                <a:latin typeface="Noto Sans JP"/>
+              </a:rPr>
+              <a:t>デリバリーAI + 戦略AI が稼働中</a:t>
+            </a:r>
+          </a:p>
+        </p:txBody>
+      </p:sp>
+      <p:sp>
+        <p:nvSpPr>
+          <p:cNvPr id="12" name="Rectangle 11"/>
+          <p:cNvSpPr/>
+          <p:nvPr/>
+        </p:nvSpPr>
+        <p:spPr>
+          <a:xfrm>
+            <a:off x="457200" y="2834639"/>
+            <a:ext cx="2286000" cy="640080"/>
+          </a:xfrm>
+          <a:prstGeom prst="rect">
+            <a:avLst/>
+          </a:prstGeom>
+          <a:solidFill>
+            <a:srgbClr val="2563EB"/>
+          </a:solidFill>
+          <a:ln>
+            <a:noFill/>
+          </a:ln>
+        </p:spPr>
+        <p:style>
+          <a:lnRef idx="1">
+            <a:schemeClr val="accent1"/>
+          </a:lnRef>
+          <a:fillRef idx="3">
+            <a:schemeClr val="accent1"/>
+          </a:fillRef>
+          <a:effectRef idx="2">
+            <a:schemeClr val="accent1"/>
+          </a:effectRef>
+          <a:fontRef idx="minor">
+            <a:schemeClr val="lt1"/>
+          </a:fontRef>
+        </p:style>
+        <p:txBody>
+          <a:bodyPr rtlCol="0" anchor="ctr" wrap="square" lIns="137160" rIns="137160" tIns="73152" bIns="73152"/>
+          <a:lstStyle/>
+          <a:p>
+            <a:pPr algn="ctr"/>
+            <a:r>
+              <a:rPr sz="1300" b="1">
+                <a:solidFill>
+                  <a:srgbClr val="FFFFFF"/>
+                </a:solidFill>
+                <a:latin typeface="Noto Sans JP"/>
+              </a:rPr>
+              <a:t>6月末 (中間発表)</a:t>
+            </a:r>
+          </a:p>
+        </p:txBody>
+      </p:sp>
+      <p:sp>
+        <p:nvSpPr>
+          <p:cNvPr id="13" name="Rectangle 12"/>
+          <p:cNvSpPr/>
+          <p:nvPr/>
+        </p:nvSpPr>
+        <p:spPr>
+          <a:xfrm>
+            <a:off x="2788920" y="2834639"/>
+            <a:ext cx="1828800" cy="640080"/>
+          </a:xfrm>
+          <a:prstGeom prst="rect">
+            <a:avLst/>
+          </a:prstGeom>
+          <a:solidFill>
+            <a:srgbClr val="2563EB"/>
+          </a:solidFill>
+          <a:ln>
+            <a:noFill/>
+          </a:ln>
+        </p:spPr>
+        <p:style>
+          <a:lnRef idx="1">
+            <a:schemeClr val="accent1"/>
+          </a:lnRef>
+          <a:fillRef idx="3">
+            <a:schemeClr val="accent1"/>
+          </a:fillRef>
+          <a:effectRef idx="2">
+            <a:schemeClr val="accent1"/>
+          </a:effectRef>
+          <a:fontRef idx="minor">
+            <a:schemeClr val="lt1"/>
+          </a:fontRef>
+        </p:style>
+        <p:txBody>
+          <a:bodyPr rtlCol="0" anchor="ctr" wrap="square" lIns="137160" rIns="137160" tIns="73152" bIns="73152"/>
+          <a:lstStyle/>
+          <a:p>
+            <a:pPr algn="ctr"/>
+            <a:r>
+              <a:rPr sz="1600" b="1">
+                <a:solidFill>
+                  <a:srgbClr val="FFFFFF"/>
+                </a:solidFill>
+                <a:latin typeface="Noto Sans JP"/>
+              </a:rPr>
+              <a:t>2人分</a:t>
+            </a:r>
+          </a:p>
+        </p:txBody>
+      </p:sp>
+      <p:sp>
+        <p:nvSpPr>
+          <p:cNvPr id="14" name="Rectangle 13"/>
+          <p:cNvSpPr/>
+          <p:nvPr/>
+        </p:nvSpPr>
+        <p:spPr>
+          <a:xfrm>
+            <a:off x="4663440" y="2834639"/>
+            <a:ext cx="7040880" cy="640080"/>
+          </a:xfrm>
+          <a:prstGeom prst="rect">
+            <a:avLst/>
+          </a:prstGeom>
+          <a:solidFill>
+            <a:srgbClr val="DBEAFE"/>
+          </a:solidFill>
+          <a:ln>
+            <a:noFill/>
+          </a:ln>
+        </p:spPr>
+        <p:style>
+          <a:lnRef idx="1">
+            <a:schemeClr val="accent1"/>
+          </a:lnRef>
+          <a:fillRef idx="3">
+            <a:schemeClr val="accent1"/>
+          </a:fillRef>
+          <a:effectRef idx="2">
+            <a:schemeClr val="accent1"/>
+          </a:effectRef>
+          <a:fontRef idx="minor">
+            <a:schemeClr val="lt1"/>
+          </a:fontRef>
+        </p:style>
+        <p:txBody>
+          <a:bodyPr rtlCol="0" anchor="ctr" wrap="square" lIns="137160" rIns="137160" tIns="73152" bIns="73152"/>
+          <a:lstStyle/>
+          <a:p>
+            <a:pPr algn="l"/>
+            <a:r>
+              <a:rPr sz="1200" b="0">
+                <a:solidFill>
+                  <a:srgbClr val="1C3557"/>
+                </a:solidFill>
+                <a:latin typeface="Noto Sans JP"/>
+              </a:rPr>
+              <a:t>5人全員が同時進行で立ち上がり / Agent Teams 初期構築</a:t>
+            </a:r>
+          </a:p>
+        </p:txBody>
+      </p:sp>
+      <p:sp>
+        <p:nvSpPr>
+          <p:cNvPr id="15" name="Rectangle 14"/>
+          <p:cNvSpPr/>
+          <p:nvPr/>
+        </p:nvSpPr>
+        <p:spPr>
+          <a:xfrm>
+            <a:off x="457200" y="3566159"/>
+            <a:ext cx="2286000" cy="640080"/>
+          </a:xfrm>
+          <a:prstGeom prst="rect">
+            <a:avLst/>
+          </a:prstGeom>
+          <a:solidFill>
+            <a:srgbClr val="F3F4F6"/>
+          </a:solidFill>
+          <a:ln>
+            <a:noFill/>
+          </a:ln>
+        </p:spPr>
+        <p:style>
+          <a:lnRef idx="1">
+            <a:schemeClr val="accent1"/>
+          </a:lnRef>
+          <a:fillRef idx="3">
+            <a:schemeClr val="accent1"/>
+          </a:fillRef>
+          <a:effectRef idx="2">
+            <a:schemeClr val="accent1"/>
+          </a:effectRef>
+          <a:fontRef idx="minor">
+            <a:schemeClr val="lt1"/>
+          </a:fontRef>
+        </p:style>
+        <p:txBody>
+          <a:bodyPr rtlCol="0" anchor="ctr" wrap="square" lIns="137160" rIns="137160" tIns="73152" bIns="73152"/>
+          <a:lstStyle/>
+          <a:p>
+            <a:pPr algn="ctr"/>
+            <a:r>
+              <a:rPr sz="1300" b="0">
+                <a:solidFill>
+                  <a:srgbClr val="1C3557"/>
+                </a:solidFill>
+                <a:latin typeface="Noto Sans JP"/>
+              </a:rPr>
+              <a:t>7-8月</a:t>
+            </a:r>
+          </a:p>
+        </p:txBody>
+      </p:sp>
+      <p:sp>
+        <p:nvSpPr>
+          <p:cNvPr id="16" name="Rectangle 15"/>
+          <p:cNvSpPr/>
+          <p:nvPr/>
+        </p:nvSpPr>
+        <p:spPr>
+          <a:xfrm>
+            <a:off x="2788920" y="3566159"/>
+            <a:ext cx="1828800" cy="640080"/>
+          </a:xfrm>
+          <a:prstGeom prst="rect">
+            <a:avLst/>
+          </a:prstGeom>
+          <a:solidFill>
+            <a:srgbClr val="F3F4F6"/>
+          </a:solidFill>
+          <a:ln>
+            <a:noFill/>
+          </a:ln>
+        </p:spPr>
+        <p:style>
+          <a:lnRef idx="1">
+            <a:schemeClr val="accent1"/>
+          </a:lnRef>
+          <a:fillRef idx="3">
+            <a:schemeClr val="accent1"/>
+          </a:fillRef>
+          <a:effectRef idx="2">
+            <a:schemeClr val="accent1"/>
+          </a:effectRef>
+          <a:fontRef idx="minor">
+            <a:schemeClr val="lt1"/>
+          </a:fontRef>
+        </p:style>
+        <p:txBody>
+          <a:bodyPr rtlCol="0" anchor="ctr" wrap="square" lIns="137160" rIns="137160" tIns="73152" bIns="73152"/>
+          <a:lstStyle/>
+          <a:p>
+            <a:pPr algn="ctr"/>
+            <a:r>
+              <a:rPr sz="1600" b="1">
+                <a:solidFill>
+                  <a:srgbClr val="1C3557"/>
+                </a:solidFill>
+                <a:latin typeface="Noto Sans JP"/>
+              </a:rPr>
+              <a:t>3〜4人分</a:t>
+            </a:r>
+          </a:p>
+        </p:txBody>
+      </p:sp>
+      <p:sp>
+        <p:nvSpPr>
+          <p:cNvPr id="17" name="Rectangle 16"/>
+          <p:cNvSpPr/>
+          <p:nvPr/>
+        </p:nvSpPr>
+        <p:spPr>
+          <a:xfrm>
+            <a:off x="4663440" y="3566159"/>
+            <a:ext cx="7040880" cy="640080"/>
+          </a:xfrm>
+          <a:prstGeom prst="rect">
+            <a:avLst/>
+          </a:prstGeom>
+          <a:solidFill>
+            <a:srgbClr val="F3F4F6"/>
+          </a:solidFill>
+          <a:ln>
+            <a:noFill/>
+          </a:ln>
+        </p:spPr>
+        <p:style>
+          <a:lnRef idx="1">
+            <a:schemeClr val="accent1"/>
+          </a:lnRef>
+          <a:fillRef idx="3">
+            <a:schemeClr val="accent1"/>
+          </a:fillRef>
+          <a:effectRef idx="2">
+            <a:schemeClr val="accent1"/>
+          </a:effectRef>
+          <a:fontRef idx="minor">
+            <a:schemeClr val="lt1"/>
+          </a:fontRef>
+        </p:style>
+        <p:txBody>
+          <a:bodyPr rtlCol="0" anchor="ctr" wrap="square" lIns="137160" rIns="137160" tIns="73152" bIns="73152"/>
+          <a:lstStyle/>
+          <a:p>
+            <a:pPr algn="l"/>
+            <a:r>
+              <a:rPr sz="1200" b="0">
+                <a:solidFill>
+                  <a:srgbClr val="1C3557"/>
+                </a:solidFill>
+                <a:latin typeface="Noto Sans JP"/>
+              </a:rPr>
+              <a:t>各領域で深化 / Agent Teams 連携テスト</a:t>
+            </a:r>
+          </a:p>
+        </p:txBody>
+      </p:sp>
+      <p:sp>
+        <p:nvSpPr>
+          <p:cNvPr id="18" name="Rectangle 17"/>
+          <p:cNvSpPr/>
+          <p:nvPr/>
+        </p:nvSpPr>
+        <p:spPr>
+          <a:xfrm>
+            <a:off x="457200" y="4297679"/>
+            <a:ext cx="2286000" cy="640080"/>
+          </a:xfrm>
+          <a:prstGeom prst="rect">
+            <a:avLst/>
+          </a:prstGeom>
+          <a:solidFill>
+            <a:srgbClr val="2563EB"/>
+          </a:solidFill>
+          <a:ln>
+            <a:noFill/>
+          </a:ln>
+        </p:spPr>
+        <p:style>
+          <a:lnRef idx="1">
+            <a:schemeClr val="accent1"/>
+          </a:lnRef>
+          <a:fillRef idx="3">
+            <a:schemeClr val="accent1"/>
+          </a:fillRef>
+          <a:effectRef idx="2">
+            <a:schemeClr val="accent1"/>
+          </a:effectRef>
+          <a:fontRef idx="minor">
+            <a:schemeClr val="lt1"/>
+          </a:fontRef>
+        </p:style>
+        <p:txBody>
+          <a:bodyPr rtlCol="0" anchor="ctr" wrap="square" lIns="137160" rIns="137160" tIns="73152" bIns="73152"/>
+          <a:lstStyle/>
+          <a:p>
+            <a:pPr algn="ctr"/>
+            <a:r>
+              <a:rPr sz="1300" b="1">
+                <a:solidFill>
+                  <a:srgbClr val="FFFFFF"/>
+                </a:solidFill>
+                <a:latin typeface="Noto Sans JP"/>
+              </a:rPr>
+              <a:t>9月末 (最終)</a:t>
+            </a:r>
+          </a:p>
+        </p:txBody>
+      </p:sp>
+      <p:sp>
+        <p:nvSpPr>
+          <p:cNvPr id="19" name="Rectangle 18"/>
+          <p:cNvSpPr/>
+          <p:nvPr/>
+        </p:nvSpPr>
+        <p:spPr>
+          <a:xfrm>
+            <a:off x="2788920" y="4297679"/>
+            <a:ext cx="1828800" cy="640080"/>
+          </a:xfrm>
+          <a:prstGeom prst="rect">
+            <a:avLst/>
+          </a:prstGeom>
+          <a:solidFill>
+            <a:srgbClr val="2563EB"/>
+          </a:solidFill>
+          <a:ln>
+            <a:noFill/>
+          </a:ln>
+        </p:spPr>
+        <p:style>
+          <a:lnRef idx="1">
+            <a:schemeClr val="accent1"/>
+          </a:lnRef>
+          <a:fillRef idx="3">
+            <a:schemeClr val="accent1"/>
+          </a:fillRef>
+          <a:effectRef idx="2">
+            <a:schemeClr val="accent1"/>
+          </a:effectRef>
+          <a:fontRef idx="minor">
+            <a:schemeClr val="lt1"/>
+          </a:fontRef>
+        </p:style>
+        <p:txBody>
+          <a:bodyPr rtlCol="0" anchor="ctr" wrap="square" lIns="137160" rIns="137160" tIns="73152" bIns="73152"/>
+          <a:lstStyle/>
+          <a:p>
+            <a:pPr algn="ctr"/>
+            <a:r>
+              <a:rPr sz="1600" b="1">
+                <a:solidFill>
+                  <a:srgbClr val="FFFFFF"/>
+                </a:solidFill>
+                <a:latin typeface="Noto Sans JP"/>
+              </a:rPr>
+              <a:t>5人分</a:t>
+            </a:r>
+          </a:p>
+        </p:txBody>
+      </p:sp>
+      <p:sp>
+        <p:nvSpPr>
+          <p:cNvPr id="20" name="Rectangle 19"/>
+          <p:cNvSpPr/>
+          <p:nvPr/>
+        </p:nvSpPr>
+        <p:spPr>
+          <a:xfrm>
+            <a:off x="4663440" y="4297679"/>
+            <a:ext cx="7040880" cy="640080"/>
+          </a:xfrm>
+          <a:prstGeom prst="rect">
+            <a:avLst/>
+          </a:prstGeom>
+          <a:solidFill>
+            <a:srgbClr val="DBEAFE"/>
+          </a:solidFill>
+          <a:ln>
+            <a:noFill/>
+          </a:ln>
+        </p:spPr>
+        <p:style>
+          <a:lnRef idx="1">
+            <a:schemeClr val="accent1"/>
+          </a:lnRef>
+          <a:fillRef idx="3">
+            <a:schemeClr val="accent1"/>
+          </a:fillRef>
+          <a:effectRef idx="2">
+            <a:schemeClr val="accent1"/>
+          </a:effectRef>
+          <a:fontRef idx="minor">
+            <a:schemeClr val="lt1"/>
+          </a:fontRef>
+        </p:style>
+        <p:txBody>
+          <a:bodyPr rtlCol="0" anchor="ctr" wrap="square" lIns="137160" rIns="137160" tIns="73152" bIns="73152"/>
+          <a:lstStyle/>
+          <a:p>
+            <a:pPr algn="l"/>
+            <a:r>
+              <a:rPr sz="1200" b="0">
+                <a:solidFill>
+                  <a:srgbClr val="1C3557"/>
+                </a:solidFill>
+                <a:latin typeface="Noto Sans JP"/>
+              </a:rPr>
+              <a:t>5人フル稼働 + Agent Teams で協働</a:t>
+            </a:r>
+          </a:p>
+        </p:txBody>
+      </p:sp>
+      <p:sp>
+        <p:nvSpPr>
+          <p:cNvPr id="21" name="Rectangle 20"/>
+          <p:cNvSpPr/>
+          <p:nvPr/>
+        </p:nvSpPr>
+        <p:spPr>
+          <a:xfrm>
+            <a:off x="457200" y="5486400"/>
+            <a:ext cx="11274552" cy="822960"/>
+          </a:xfrm>
+          <a:prstGeom prst="rect">
+            <a:avLst/>
+          </a:prstGeom>
+          <a:noFill/>
+          <a:ln>
+            <a:noFill/>
+          </a:ln>
+        </p:spPr>
+        <p:style>
+          <a:lnRef idx="1">
+            <a:schemeClr val="accent1"/>
+          </a:lnRef>
+          <a:fillRef idx="3">
+            <a:schemeClr val="accent1"/>
+          </a:fillRef>
+          <a:effectRef idx="2">
+            <a:schemeClr val="accent1"/>
+          </a:effectRef>
+          <a:fontRef idx="minor">
+            <a:schemeClr val="lt1"/>
+          </a:fontRef>
+        </p:style>
+        <p:txBody>
+          <a:bodyPr rtlCol="0" anchor="ctr" wrap="square" lIns="137160" rIns="137160" tIns="73152" bIns="73152"/>
+          <a:lstStyle/>
+          <a:p>
+            <a:pPr algn="ctr"/>
+            <a:r>
+              <a:rPr sz="1800" b="1">
+                <a:solidFill>
+                  <a:srgbClr val="2563EB"/>
+                </a:solidFill>
+                <a:latin typeface="Noto Sans JP"/>
+              </a:rPr>
+              <a:t>5人を網羅的に同時進行で育てる</a:t>
+            </a:r>
+          </a:p>
+        </p:txBody>
+      </p:sp>
+    </p:spTree>
+  </p:cSld>
+  <p:clrMapOvr>
+    <a:masterClrMapping/>
+  </p:clrMapOvr>
+</p:sld>
+</file>
+
+<file path=ppt/slides/slide11.xml><?xml version="1.0" encoding="utf-8"?>
+<p:sld xmlns:a="http://schemas.openxmlformats.org/drawingml/2006/main" xmlns:p="http://schemas.openxmlformats.org/presentationml/2006/main" xmlns:r="http://schemas.openxmlformats.org/officeDocument/2006/relationships">
+  <p:cSld>
+    <p:spTree>
+      <p:nvGrpSpPr>
+        <p:cNvPr id="1" name=""/>
+        <p:cNvGrpSpPr/>
+        <p:nvPr/>
+      </p:nvGrpSpPr>
+      <p:grpSpPr/>
+      <p:sp>
+        <p:nvSpPr>
+          <p:cNvPr id="2" name="Rectangle 1"/>
+          <p:cNvSpPr/>
+          <p:nvPr/>
+        </p:nvSpPr>
+        <p:spPr>
+          <a:xfrm>
+            <a:off x="0" y="0"/>
+            <a:ext cx="12188952" cy="6858000"/>
+          </a:xfrm>
+          <a:prstGeom prst="rect">
+            <a:avLst/>
+          </a:prstGeom>
+          <a:solidFill>
+            <a:srgbClr val="FFFFFF"/>
+          </a:solidFill>
+          <a:ln>
+            <a:noFill/>
+          </a:ln>
+        </p:spPr>
+        <p:style>
+          <a:lnRef idx="1">
+            <a:schemeClr val="accent1"/>
+          </a:lnRef>
+          <a:fillRef idx="3">
+            <a:schemeClr val="accent1"/>
+          </a:fillRef>
+          <a:effectRef idx="2">
+            <a:schemeClr val="accent1"/>
+          </a:effectRef>
+          <a:fontRef idx="minor">
+            <a:schemeClr val="lt1"/>
+          </a:fontRef>
+        </p:style>
+        <p:txBody>
+          <a:bodyPr rtlCol="0" anchor="ctr"/>
+          <a:lstStyle/>
+          <a:p>
+            <a:pPr algn="ctr"/>
+          </a:p>
+        </p:txBody>
+      </p:sp>
+      <p:sp>
+        <p:nvSpPr>
+          <p:cNvPr id="3" name="Rectangle 2"/>
+          <p:cNvSpPr/>
+          <p:nvPr/>
+        </p:nvSpPr>
+        <p:spPr>
+          <a:xfrm>
+            <a:off x="457200" y="1280160"/>
+            <a:ext cx="11274552" cy="1280160"/>
+          </a:xfrm>
+          <a:prstGeom prst="rect">
+            <a:avLst/>
+          </a:prstGeom>
+          <a:noFill/>
+          <a:ln>
+            <a:noFill/>
+          </a:ln>
+        </p:spPr>
+        <p:style>
+          <a:lnRef idx="1">
+            <a:schemeClr val="accent1"/>
+          </a:lnRef>
+          <a:fillRef idx="3">
+            <a:schemeClr val="accent1"/>
+          </a:fillRef>
+          <a:effectRef idx="2">
+            <a:schemeClr val="accent1"/>
+          </a:effectRef>
+          <a:fontRef idx="minor">
+            <a:schemeClr val="lt1"/>
+          </a:fontRef>
+        </p:style>
+        <p:txBody>
+          <a:bodyPr rtlCol="0" anchor="ctr" wrap="square" lIns="137160" rIns="137160" tIns="73152" bIns="73152"/>
+          <a:lstStyle/>
+          <a:p>
+            <a:pPr algn="ctr"/>
+            <a:r>
+              <a:rPr sz="3600" b="1">
+                <a:solidFill>
+                  <a:srgbClr val="1C3557"/>
+                </a:solidFill>
+                <a:latin typeface="Noto Sans JP"/>
+              </a:rPr>
+              <a:t>AI社員を動かして、</a:t>
+            </a:r>
+          </a:p>
+        </p:txBody>
+      </p:sp>
+      <p:sp>
+        <p:nvSpPr>
+          <p:cNvPr id="4" name="Rectangle 3"/>
+          <p:cNvSpPr/>
+          <p:nvPr/>
+        </p:nvSpPr>
+        <p:spPr>
+          <a:xfrm>
+            <a:off x="457200" y="2468880"/>
+            <a:ext cx="11274552" cy="1371600"/>
+          </a:xfrm>
+          <a:prstGeom prst="rect">
+            <a:avLst/>
+          </a:prstGeom>
+          <a:noFill/>
+          <a:ln>
+            <a:noFill/>
+          </a:ln>
+        </p:spPr>
+        <p:style>
+          <a:lnRef idx="1">
+            <a:schemeClr val="accent1"/>
+          </a:lnRef>
+          <a:fillRef idx="3">
+            <a:schemeClr val="accent1"/>
+          </a:fillRef>
+          <a:effectRef idx="2">
+            <a:schemeClr val="accent1"/>
+          </a:effectRef>
+          <a:fontRef idx="minor">
+            <a:schemeClr val="lt1"/>
+          </a:fontRef>
+        </p:style>
+        <p:txBody>
+          <a:bodyPr rtlCol="0" anchor="ctr" wrap="square" lIns="137160" rIns="137160" tIns="73152" bIns="73152"/>
+          <a:lstStyle/>
+          <a:p>
+            <a:pPr algn="ctr"/>
+            <a:r>
+              <a:rPr sz="4400" b="1">
+                <a:solidFill>
+                  <a:srgbClr val="2563EB"/>
+                </a:solidFill>
+                <a:latin typeface="Noto Sans JP"/>
+              </a:rPr>
+              <a:t>Kawaru事業部の事業を推進する</a:t>
+            </a:r>
+          </a:p>
+        </p:txBody>
+      </p:sp>
+      <p:sp>
+        <p:nvSpPr>
+          <p:cNvPr id="5" name="Rectangle 4"/>
+          <p:cNvSpPr/>
+          <p:nvPr/>
+        </p:nvSpPr>
+        <p:spPr>
+          <a:xfrm>
+            <a:off x="5029200" y="4023360"/>
+            <a:ext cx="2130552" cy="54864"/>
+          </a:xfrm>
+          <a:prstGeom prst="rect">
+            <a:avLst/>
+          </a:prstGeom>
+          <a:solidFill>
+            <a:srgbClr val="2563EB"/>
+          </a:solidFill>
+          <a:ln>
+            <a:noFill/>
+          </a:ln>
+        </p:spPr>
+        <p:style>
+          <a:lnRef idx="1">
+            <a:schemeClr val="accent1"/>
+          </a:lnRef>
+          <a:fillRef idx="3">
+            <a:schemeClr val="accent1"/>
+          </a:fillRef>
+          <a:effectRef idx="2">
+            <a:schemeClr val="accent1"/>
+          </a:effectRef>
+          <a:fontRef idx="minor">
+            <a:schemeClr val="lt1"/>
+          </a:fontRef>
+        </p:style>
+        <p:txBody>
+          <a:bodyPr rtlCol="0" anchor="ctr"/>
+          <a:lstStyle/>
+          <a:p>
+            <a:pPr algn="ctr"/>
+          </a:p>
+        </p:txBody>
+      </p:sp>
+      <p:sp>
+        <p:nvSpPr>
+          <p:cNvPr id="6" name="Rectangle 5"/>
+          <p:cNvSpPr/>
+          <p:nvPr/>
+        </p:nvSpPr>
+        <p:spPr>
+          <a:xfrm>
+            <a:off x="457200" y="4480560"/>
+            <a:ext cx="11274552" cy="548640"/>
+          </a:xfrm>
+          <a:prstGeom prst="rect">
+            <a:avLst/>
+          </a:prstGeom>
+          <a:noFill/>
+          <a:ln>
+            <a:noFill/>
+          </a:ln>
+        </p:spPr>
+        <p:style>
+          <a:lnRef idx="1">
+            <a:schemeClr val="accent1"/>
+          </a:lnRef>
+          <a:fillRef idx="3">
+            <a:schemeClr val="accent1"/>
+          </a:fillRef>
+          <a:effectRef idx="2">
+            <a:schemeClr val="accent1"/>
+          </a:effectRef>
+          <a:fontRef idx="minor">
+            <a:schemeClr val="lt1"/>
+          </a:fontRef>
+        </p:style>
+        <p:txBody>
+          <a:bodyPr rtlCol="0" anchor="ctr" wrap="square" lIns="137160" rIns="137160" tIns="73152" bIns="73152"/>
+          <a:lstStyle/>
+          <a:p>
+            <a:pPr algn="ctr"/>
+            <a:r>
+              <a:rPr sz="1800" b="1">
+                <a:solidFill>
+                  <a:srgbClr val="1C3557"/>
+                </a:solidFill>
+                <a:latin typeface="Noto Sans JP"/>
+              </a:rPr>
+              <a:t>2人 + AI社員5人 + Agent Teams で、Kawaru事業部を動かす</a:t>
+            </a:r>
+          </a:p>
+        </p:txBody>
+      </p:sp>
+      <p:sp>
+        <p:nvSpPr>
+          <p:cNvPr id="7" name="Rounded Rectangle 6"/>
+          <p:cNvSpPr/>
+          <p:nvPr/>
+        </p:nvSpPr>
+        <p:spPr>
+          <a:xfrm>
+            <a:off x="914400" y="5303520"/>
+            <a:ext cx="3200400" cy="731520"/>
           </a:xfrm>
           <a:prstGeom prst="roundRect">
             <a:avLst>
@@ -3256,7 +4732,7 @@
             </a:avLst>
           </a:prstGeom>
           <a:solidFill>
-            <a:srgbClr val="F3F4F6"/>
+            <a:srgbClr val="2563EB"/>
           </a:solidFill>
           <a:ln>
             <a:noFill/>
@@ -3282,101 +4758,27 @@
           <a:p>
             <a:pPr algn="ctr"/>
             <a:r>
-              <a:rPr sz="1600" b="0">
-                <a:solidFill>
-                  <a:srgbClr val="6B7280"/>
-                </a:solidFill>
-                <a:latin typeface="Noto Sans JP"/>
-              </a:rPr>
-              <a:t>既存事業</a:t>
-            </a:r>
-          </a:p>
-          <a:p>
-            <a:pPr algn="ctr"/>
-            <a:r>
-              <a:rPr sz="1600" b="0">
-                <a:solidFill>
-                  <a:srgbClr val="6B7280"/>
-                </a:solidFill>
-                <a:latin typeface="Noto Sans JP"/>
-              </a:rPr>
-              <a:t>固定業務がある</a:t>
-            </a:r>
-          </a:p>
-          <a:p>
-            <a:pPr algn="ctr"/>
-            <a:r>
-              <a:rPr sz="1600" b="0">
-                <a:solidFill>
-                  <a:srgbClr val="6B7280"/>
-                </a:solidFill>
-                <a:latin typeface="Noto Sans JP"/>
-              </a:rPr>
-              <a:t>削減対象が見える</a:t>
-            </a:r>
-          </a:p>
-        </p:txBody>
-      </p:sp>
-      <p:sp>
-        <p:nvSpPr>
-          <p:cNvPr id="6" name="Rectangle 5"/>
-          <p:cNvSpPr/>
-          <p:nvPr/>
-        </p:nvSpPr>
-        <p:spPr>
-          <a:xfrm>
-            <a:off x="5486400" y="4297680"/>
-            <a:ext cx="1216152" cy="1371600"/>
-          </a:xfrm>
-          <a:prstGeom prst="rect">
-            <a:avLst/>
-          </a:prstGeom>
-          <a:noFill/>
-          <a:ln>
-            <a:noFill/>
-          </a:ln>
-        </p:spPr>
-        <p:style>
-          <a:lnRef idx="1">
-            <a:schemeClr val="accent1"/>
-          </a:lnRef>
-          <a:fillRef idx="3">
-            <a:schemeClr val="accent1"/>
-          </a:fillRef>
-          <a:effectRef idx="2">
-            <a:schemeClr val="accent1"/>
-          </a:effectRef>
-          <a:fontRef idx="minor">
-            <a:schemeClr val="lt1"/>
-          </a:fontRef>
-        </p:style>
-        <p:txBody>
-          <a:bodyPr rtlCol="0" anchor="ctr" wrap="square" lIns="137160" rIns="137160" tIns="73152" bIns="73152"/>
-          <a:lstStyle/>
-          <a:p>
-            <a:pPr algn="ctr"/>
-            <a:r>
-              <a:rPr sz="2800" b="1">
-                <a:solidFill>
-                  <a:srgbClr val="2563EB"/>
-                </a:solidFill>
-                <a:latin typeface="Noto Sans JP"/>
-              </a:rPr>
-              <a:t>←→</a:t>
-            </a:r>
-          </a:p>
-        </p:txBody>
-      </p:sp>
-      <p:sp>
-        <p:nvSpPr>
-          <p:cNvPr id="7" name="Rounded Rectangle 6"/>
-          <p:cNvSpPr/>
-          <p:nvPr/>
-        </p:nvSpPr>
-        <p:spPr>
-          <a:xfrm>
-            <a:off x="6702552" y="4297680"/>
-            <a:ext cx="4114800" cy="1371600"/>
+              <a:rPr sz="1400" b="1">
+                <a:solidFill>
+                  <a:srgbClr val="FFFFFF"/>
+                </a:solidFill>
+                <a:latin typeface="Noto Sans JP"/>
+              </a:rPr>
+              <a:t>Kawaru</a:t>
+            </a:r>
+          </a:p>
+        </p:txBody>
+      </p:sp>
+      <p:sp>
+        <p:nvSpPr>
+          <p:cNvPr id="8" name="Rounded Rectangle 7"/>
+          <p:cNvSpPr/>
+          <p:nvPr/>
+        </p:nvSpPr>
+        <p:spPr>
+          <a:xfrm>
+            <a:off x="4297680" y="5303520"/>
+            <a:ext cx="2377440" cy="731520"/>
           </a:xfrm>
           <a:prstGeom prst="roundRect">
             <a:avLst>
@@ -3384,7 +4786,7 @@
             </a:avLst>
           </a:prstGeom>
           <a:solidFill>
-            <a:srgbClr val="DBEAFE"/>
+            <a:srgbClr val="FF6600"/>
           </a:solidFill>
           <a:ln>
             <a:noFill/>
@@ -3410,51 +4812,135 @@
           <a:p>
             <a:pPr algn="ctr"/>
             <a:r>
-              <a:rPr sz="1600" b="1">
-                <a:solidFill>
-                  <a:srgbClr val="1C3557"/>
-                </a:solidFill>
-                <a:latin typeface="Noto Sans JP"/>
-              </a:rPr>
-              <a:t>Kawaru事業部</a:t>
-            </a:r>
-          </a:p>
+              <a:rPr sz="1300" b="1">
+                <a:solidFill>
+                  <a:srgbClr val="FFFFFF"/>
+                </a:solidFill>
+                <a:latin typeface="Noto Sans JP"/>
+              </a:rPr>
+              <a:t>Kawaru Team</a:t>
+            </a:r>
+          </a:p>
+        </p:txBody>
+      </p:sp>
+      <p:sp>
+        <p:nvSpPr>
+          <p:cNvPr id="9" name="Rounded Rectangle 8"/>
+          <p:cNvSpPr/>
+          <p:nvPr/>
+        </p:nvSpPr>
+        <p:spPr>
+          <a:xfrm>
+            <a:off x="6766560" y="5303520"/>
+            <a:ext cx="2377440" cy="731520"/>
+          </a:xfrm>
+          <a:prstGeom prst="roundRect">
+            <a:avLst>
+              <a:gd name="adj" fmla="val 5000"/>
+            </a:avLst>
+          </a:prstGeom>
+          <a:solidFill>
+            <a:srgbClr val="7C3AED"/>
+          </a:solidFill>
+          <a:ln>
+            <a:noFill/>
+          </a:ln>
+        </p:spPr>
+        <p:style>
+          <a:lnRef idx="1">
+            <a:schemeClr val="accent1"/>
+          </a:lnRef>
+          <a:fillRef idx="3">
+            <a:schemeClr val="accent1"/>
+          </a:fillRef>
+          <a:effectRef idx="2">
+            <a:schemeClr val="accent1"/>
+          </a:effectRef>
+          <a:fontRef idx="minor">
+            <a:schemeClr val="lt1"/>
+          </a:fontRef>
+        </p:style>
+        <p:txBody>
+          <a:bodyPr rtlCol="0" anchor="ctr" wrap="square" lIns="137160" rIns="137160" tIns="73152" bIns="73152"/>
+          <a:lstStyle/>
           <a:p>
             <a:pPr algn="ctr"/>
             <a:r>
-              <a:rPr sz="1600" b="1">
-                <a:solidFill>
-                  <a:srgbClr val="1C3557"/>
-                </a:solidFill>
-                <a:latin typeface="Noto Sans JP"/>
-              </a:rPr>
-              <a:t>業務が毎月変わる</a:t>
-            </a:r>
-          </a:p>
+              <a:rPr sz="1300" b="1">
+                <a:solidFill>
+                  <a:srgbClr val="FFFFFF"/>
+                </a:solidFill>
+                <a:latin typeface="Noto Sans JP"/>
+              </a:rPr>
+              <a:t>Kawaru Coach</a:t>
+            </a:r>
+          </a:p>
+        </p:txBody>
+      </p:sp>
+      <p:sp>
+        <p:nvSpPr>
+          <p:cNvPr id="10" name="Rounded Rectangle 9"/>
+          <p:cNvSpPr/>
+          <p:nvPr/>
+        </p:nvSpPr>
+        <p:spPr>
+          <a:xfrm>
+            <a:off x="9235440" y="5303520"/>
+            <a:ext cx="2194560" cy="731520"/>
+          </a:xfrm>
+          <a:prstGeom prst="roundRect">
+            <a:avLst>
+              <a:gd name="adj" fmla="val 5000"/>
+            </a:avLst>
+          </a:prstGeom>
+          <a:solidFill>
+            <a:srgbClr val="10BF16"/>
+          </a:solidFill>
+          <a:ln>
+            <a:noFill/>
+          </a:ln>
+        </p:spPr>
+        <p:style>
+          <a:lnRef idx="1">
+            <a:schemeClr val="accent1"/>
+          </a:lnRef>
+          <a:fillRef idx="3">
+            <a:schemeClr val="accent1"/>
+          </a:fillRef>
+          <a:effectRef idx="2">
+            <a:schemeClr val="accent1"/>
+          </a:effectRef>
+          <a:fontRef idx="minor">
+            <a:schemeClr val="lt1"/>
+          </a:fontRef>
+        </p:style>
+        <p:txBody>
+          <a:bodyPr rtlCol="0" anchor="ctr" wrap="square" lIns="137160" rIns="137160" tIns="73152" bIns="73152"/>
+          <a:lstStyle/>
           <a:p>
             <a:pPr algn="ctr"/>
             <a:r>
-              <a:rPr sz="1600" b="1">
-                <a:solidFill>
-                  <a:srgbClr val="1C3557"/>
-                </a:solidFill>
-                <a:latin typeface="Noto Sans JP"/>
-              </a:rPr>
-              <a:t>削減対象がない</a:t>
-            </a:r>
-          </a:p>
-        </p:txBody>
-      </p:sp>
-      <p:sp>
-        <p:nvSpPr>
-          <p:cNvPr id="8" name="Rectangle 7"/>
-          <p:cNvSpPr/>
-          <p:nvPr/>
-        </p:nvSpPr>
-        <p:spPr>
-          <a:xfrm>
-            <a:off x="11247120" y="6492240"/>
-            <a:ext cx="731520" cy="274320"/>
+              <a:rPr sz="1300" b="1">
+                <a:solidFill>
+                  <a:srgbClr val="FFFFFF"/>
+                </a:solidFill>
+                <a:latin typeface="Noto Sans JP"/>
+              </a:rPr>
+              <a:t>Kawaru BPO</a:t>
+            </a:r>
+          </a:p>
+        </p:txBody>
+      </p:sp>
+      <p:sp>
+        <p:nvSpPr>
+          <p:cNvPr id="11" name="Rectangle 10"/>
+          <p:cNvSpPr/>
+          <p:nvPr/>
+        </p:nvSpPr>
+        <p:spPr>
+          <a:xfrm>
+            <a:off x="10972800" y="6492240"/>
+            <a:ext cx="1005840" cy="274320"/>
           </a:xfrm>
           <a:prstGeom prst="rect">
             <a:avLst/>
@@ -3490,7 +4976,7 @@
                 </a:solidFill>
                 <a:latin typeface="Noto Sans JP"/>
               </a:rPr>
-              <a:t>1 / 9</a:t>
+              <a:t>11 / 11</a:t>
             </a:r>
           </a:p>
         </p:txBody>
@@ -3564,8 +5050,8 @@
         </p:nvSpPr>
         <p:spPr>
           <a:xfrm>
-            <a:off x="11247120" y="274320"/>
-            <a:ext cx="731520" cy="274320"/>
+            <a:off x="457200" y="1828800"/>
+            <a:ext cx="11274552" cy="1371600"/>
           </a:xfrm>
           <a:prstGeom prst="rect">
             <a:avLst/>
@@ -3590,18 +5076,18 @@
           </a:fontRef>
         </p:style>
         <p:txBody>
-          <a:bodyPr rtlCol="0" anchor="t" wrap="square" lIns="137160" rIns="137160" tIns="73152" bIns="73152"/>
-          <a:lstStyle/>
-          <a:p>
-            <a:pPr algn="r"/>
-            <a:r>
-              <a:rPr sz="1000" b="0">
-                <a:solidFill>
-                  <a:srgbClr val="6B7280"/>
-                </a:solidFill>
-                <a:latin typeface="Noto Sans JP"/>
-              </a:rPr>
-              <a:t>2 / 9</a:t>
+          <a:bodyPr rtlCol="0" anchor="ctr" wrap="square" lIns="137160" rIns="137160" tIns="73152" bIns="73152"/>
+          <a:lstStyle/>
+          <a:p>
+            <a:pPr algn="ctr"/>
+            <a:r>
+              <a:rPr sz="3600" b="1">
+                <a:solidFill>
+                  <a:srgbClr val="1C3557"/>
+                </a:solidFill>
+                <a:latin typeface="Noto Sans JP"/>
+              </a:rPr>
+              <a:t>私たちは「コストダウン」の話ができません</a:t>
             </a:r>
           </a:p>
         </p:txBody>
@@ -3614,8 +5100,8 @@
         </p:nvSpPr>
         <p:spPr>
           <a:xfrm>
-            <a:off x="457200" y="365760"/>
-            <a:ext cx="10972800" cy="640080"/>
+            <a:off x="457200" y="3200400"/>
+            <a:ext cx="11274552" cy="457200"/>
           </a:xfrm>
           <a:prstGeom prst="rect">
             <a:avLst/>
@@ -3643,72 +5129,29 @@
           <a:bodyPr rtlCol="0" anchor="t" wrap="square" lIns="137160" rIns="137160" tIns="73152" bIns="73152"/>
           <a:lstStyle/>
           <a:p>
-            <a:pPr algn="l"/>
-            <a:r>
-              <a:rPr sz="2200" b="1">
-                <a:solidFill>
-                  <a:srgbClr val="1C3557"/>
-                </a:solidFill>
-                <a:latin typeface="Noto Sans JP"/>
-              </a:rPr>
-              <a:t>AI社員を動かして、Kawaruプロダクト作りを前に進める</a:t>
-            </a:r>
-          </a:p>
-        </p:txBody>
-      </p:sp>
-      <p:sp>
-        <p:nvSpPr>
-          <p:cNvPr id="5" name="Rectangle 4"/>
-          <p:cNvSpPr/>
-          <p:nvPr/>
-        </p:nvSpPr>
-        <p:spPr>
-          <a:xfrm>
-            <a:off x="457200" y="1051560"/>
-            <a:ext cx="1371600" cy="54864"/>
-          </a:xfrm>
-          <a:prstGeom prst="rect">
-            <a:avLst/>
-          </a:prstGeom>
-          <a:solidFill>
-            <a:srgbClr val="2563EB"/>
-          </a:solidFill>
-          <a:ln>
-            <a:noFill/>
-          </a:ln>
-        </p:spPr>
-        <p:style>
-          <a:lnRef idx="1">
-            <a:schemeClr val="accent1"/>
-          </a:lnRef>
-          <a:fillRef idx="3">
-            <a:schemeClr val="accent1"/>
-          </a:fillRef>
-          <a:effectRef idx="2">
-            <a:schemeClr val="accent1"/>
-          </a:effectRef>
-          <a:fontRef idx="minor">
-            <a:schemeClr val="lt1"/>
-          </a:fontRef>
-        </p:style>
-        <p:txBody>
-          <a:bodyPr rtlCol="0" anchor="ctr"/>
-          <a:lstStyle/>
-          <a:p>
             <a:pPr algn="ctr"/>
-          </a:p>
-        </p:txBody>
-      </p:sp>
-      <p:sp>
-        <p:nvSpPr>
-          <p:cNvPr id="6" name="Rounded Rectangle 5"/>
-          <p:cNvSpPr/>
-          <p:nvPr/>
-        </p:nvSpPr>
-        <p:spPr>
-          <a:xfrm>
-            <a:off x="3657600" y="1554480"/>
-            <a:ext cx="4873752" cy="1280160"/>
+            <a:r>
+              <a:rPr sz="1400" b="0">
+                <a:solidFill>
+                  <a:srgbClr val="6B7280"/>
+                </a:solidFill>
+                <a:latin typeface="Noto Sans JP"/>
+              </a:rPr>
+              <a:t>Kawaru事業部の前提</a:t>
+            </a:r>
+          </a:p>
+        </p:txBody>
+      </p:sp>
+      <p:sp>
+        <p:nvSpPr>
+          <p:cNvPr id="5" name="Rounded Rectangle 4"/>
+          <p:cNvSpPr/>
+          <p:nvPr/>
+        </p:nvSpPr>
+        <p:spPr>
+          <a:xfrm>
+            <a:off x="1371600" y="4297680"/>
+            <a:ext cx="4114800" cy="1371600"/>
           </a:xfrm>
           <a:prstGeom prst="roundRect">
             <a:avLst>
@@ -3716,7 +5159,7 @@
             </a:avLst>
           </a:prstGeom>
           <a:solidFill>
-            <a:srgbClr val="2563EB"/>
+            <a:srgbClr val="F3F4F6"/>
           </a:solidFill>
           <a:ln>
             <a:noFill/>
@@ -3742,39 +5185,51 @@
           <a:p>
             <a:pPr algn="ctr"/>
             <a:r>
-              <a:rPr sz="2000" b="1">
-                <a:solidFill>
-                  <a:srgbClr val="FFFFFF"/>
-                </a:solidFill>
-                <a:latin typeface="Noto Sans JP"/>
-              </a:rPr>
-              <a:t>Kawaru プロダクト作り</a:t>
+              <a:rPr sz="1600" b="0">
+                <a:solidFill>
+                  <a:srgbClr val="6B7280"/>
+                </a:solidFill>
+                <a:latin typeface="Noto Sans JP"/>
+              </a:rPr>
+              <a:t>既存事業</a:t>
             </a:r>
           </a:p>
           <a:p>
             <a:pPr algn="ctr"/>
             <a:r>
-              <a:rPr sz="2000" b="1">
-                <a:solidFill>
-                  <a:srgbClr val="FFFFFF"/>
-                </a:solidFill>
-                <a:latin typeface="Noto Sans JP"/>
-              </a:rPr>
-              <a:t>★ フォーカス ★</a:t>
-            </a:r>
-          </a:p>
-        </p:txBody>
-      </p:sp>
-      <p:sp>
-        <p:nvSpPr>
-          <p:cNvPr id="7" name="Rectangle 6"/>
-          <p:cNvSpPr/>
-          <p:nvPr/>
-        </p:nvSpPr>
-        <p:spPr>
-          <a:xfrm>
-            <a:off x="3657600" y="2926080"/>
-            <a:ext cx="4873752" cy="457200"/>
+              <a:rPr sz="1600" b="0">
+                <a:solidFill>
+                  <a:srgbClr val="6B7280"/>
+                </a:solidFill>
+                <a:latin typeface="Noto Sans JP"/>
+              </a:rPr>
+              <a:t>固定業務がある</a:t>
+            </a:r>
+          </a:p>
+          <a:p>
+            <a:pPr algn="ctr"/>
+            <a:r>
+              <a:rPr sz="1600" b="0">
+                <a:solidFill>
+                  <a:srgbClr val="6B7280"/>
+                </a:solidFill>
+                <a:latin typeface="Noto Sans JP"/>
+              </a:rPr>
+              <a:t>削減対象が見える</a:t>
+            </a:r>
+          </a:p>
+        </p:txBody>
+      </p:sp>
+      <p:sp>
+        <p:nvSpPr>
+          <p:cNvPr id="6" name="Rectangle 5"/>
+          <p:cNvSpPr/>
+          <p:nvPr/>
+        </p:nvSpPr>
+        <p:spPr>
+          <a:xfrm>
+            <a:off x="5486400" y="4297680"/>
+            <a:ext cx="1216152" cy="1371600"/>
           </a:xfrm>
           <a:prstGeom prst="rect">
             <a:avLst/>
@@ -3804,77 +5259,27 @@
           <a:p>
             <a:pPr algn="ctr"/>
             <a:r>
-              <a:rPr sz="1600" b="1">
-                <a:solidFill>
-                  <a:srgbClr val="1C3557"/>
-                </a:solidFill>
-                <a:latin typeface="Noto Sans JP"/>
-              </a:rPr>
-              <a:t>↓ AI社員を動かす ↓</a:t>
-            </a:r>
-          </a:p>
-        </p:txBody>
-      </p:sp>
-      <p:sp>
-        <p:nvSpPr>
-          <p:cNvPr id="8" name="Rectangle 7"/>
-          <p:cNvSpPr/>
-          <p:nvPr/>
-        </p:nvSpPr>
-        <p:spPr>
-          <a:xfrm>
-            <a:off x="457200" y="3566160"/>
-            <a:ext cx="11274552" cy="365760"/>
-          </a:xfrm>
-          <a:prstGeom prst="rect">
-            <a:avLst/>
-          </a:prstGeom>
-          <a:noFill/>
-          <a:ln>
-            <a:noFill/>
-          </a:ln>
-        </p:spPr>
-        <p:style>
-          <a:lnRef idx="1">
-            <a:schemeClr val="accent1"/>
-          </a:lnRef>
-          <a:fillRef idx="3">
-            <a:schemeClr val="accent1"/>
-          </a:fillRef>
-          <a:effectRef idx="2">
-            <a:schemeClr val="accent1"/>
-          </a:effectRef>
-          <a:fontRef idx="minor">
-            <a:schemeClr val="lt1"/>
-          </a:fontRef>
-        </p:style>
-        <p:txBody>
-          <a:bodyPr rtlCol="0" anchor="t" wrap="square" lIns="137160" rIns="137160" tIns="73152" bIns="73152"/>
-          <a:lstStyle/>
-          <a:p>
-            <a:pPr algn="ctr"/>
-            <a:r>
-              <a:rPr sz="1300" b="0">
-                <a:solidFill>
-                  <a:srgbClr val="6B7280"/>
-                </a:solidFill>
-                <a:latin typeface="Noto Sans JP"/>
-              </a:rPr>
-              <a:t>─ 同時進行 ─</a:t>
-            </a:r>
-          </a:p>
-        </p:txBody>
-      </p:sp>
-      <p:sp>
-        <p:nvSpPr>
-          <p:cNvPr id="9" name="Rounded Rectangle 8"/>
-          <p:cNvSpPr/>
-          <p:nvPr/>
-        </p:nvSpPr>
-        <p:spPr>
-          <a:xfrm>
-            <a:off x="640080" y="4114800"/>
-            <a:ext cx="3566160" cy="1371600"/>
+              <a:rPr sz="2800" b="1">
+                <a:solidFill>
+                  <a:srgbClr val="2563EB"/>
+                </a:solidFill>
+                <a:latin typeface="Noto Sans JP"/>
+              </a:rPr>
+              <a:t>←→</a:t>
+            </a:r>
+          </a:p>
+        </p:txBody>
+      </p:sp>
+      <p:sp>
+        <p:nvSpPr>
+          <p:cNvPr id="7" name="Rounded Rectangle 6"/>
+          <p:cNvSpPr/>
+          <p:nvPr/>
+        </p:nvSpPr>
+        <p:spPr>
+          <a:xfrm>
+            <a:off x="6702552" y="4297680"/>
+            <a:ext cx="4114800" cy="1371600"/>
           </a:xfrm>
           <a:prstGeom prst="roundRect">
             <a:avLst>
@@ -3882,7 +5287,7 @@
             </a:avLst>
           </a:prstGeom>
           <a:solidFill>
-            <a:srgbClr val="FF6600"/>
+            <a:srgbClr val="DBEAFE"/>
           </a:solidFill>
           <a:ln>
             <a:noFill/>
@@ -3908,135 +5313,51 @@
           <a:p>
             <a:pPr algn="ctr"/>
             <a:r>
-              <a:rPr sz="2000" b="1">
-                <a:solidFill>
-                  <a:srgbClr val="FFFFFF"/>
-                </a:solidFill>
-                <a:latin typeface="Noto Sans JP"/>
-              </a:rPr>
-              <a:t>Kawaru Team</a:t>
-            </a:r>
-          </a:p>
-        </p:txBody>
-      </p:sp>
-      <p:sp>
-        <p:nvSpPr>
-          <p:cNvPr id="10" name="Rounded Rectangle 9"/>
-          <p:cNvSpPr/>
-          <p:nvPr/>
-        </p:nvSpPr>
-        <p:spPr>
-          <a:xfrm>
-            <a:off x="4315968" y="4114800"/>
-            <a:ext cx="3566160" cy="1371600"/>
-          </a:xfrm>
-          <a:prstGeom prst="roundRect">
-            <a:avLst>
-              <a:gd name="adj" fmla="val 5000"/>
-            </a:avLst>
-          </a:prstGeom>
-          <a:solidFill>
-            <a:srgbClr val="7C3AED"/>
-          </a:solidFill>
-          <a:ln>
-            <a:noFill/>
-          </a:ln>
-        </p:spPr>
-        <p:style>
-          <a:lnRef idx="1">
-            <a:schemeClr val="accent1"/>
-          </a:lnRef>
-          <a:fillRef idx="3">
-            <a:schemeClr val="accent1"/>
-          </a:fillRef>
-          <a:effectRef idx="2">
-            <a:schemeClr val="accent1"/>
-          </a:effectRef>
-          <a:fontRef idx="minor">
-            <a:schemeClr val="lt1"/>
-          </a:fontRef>
-        </p:style>
-        <p:txBody>
-          <a:bodyPr rtlCol="0" anchor="ctr" wrap="square" lIns="137160" rIns="137160" tIns="73152" bIns="73152"/>
-          <a:lstStyle/>
+              <a:rPr sz="1600" b="1">
+                <a:solidFill>
+                  <a:srgbClr val="1C3557"/>
+                </a:solidFill>
+                <a:latin typeface="Noto Sans JP"/>
+              </a:rPr>
+              <a:t>Kawaru事業部</a:t>
+            </a:r>
+          </a:p>
           <a:p>
             <a:pPr algn="ctr"/>
             <a:r>
-              <a:rPr sz="2000" b="1">
-                <a:solidFill>
-                  <a:srgbClr val="FFFFFF"/>
-                </a:solidFill>
-                <a:latin typeface="Noto Sans JP"/>
-              </a:rPr>
-              <a:t>Kawaru Coach</a:t>
-            </a:r>
-          </a:p>
-        </p:txBody>
-      </p:sp>
-      <p:sp>
-        <p:nvSpPr>
-          <p:cNvPr id="11" name="Rounded Rectangle 10"/>
-          <p:cNvSpPr/>
-          <p:nvPr/>
-        </p:nvSpPr>
-        <p:spPr>
-          <a:xfrm>
-            <a:off x="7991856" y="4114800"/>
-            <a:ext cx="3566160" cy="1371600"/>
-          </a:xfrm>
-          <a:prstGeom prst="roundRect">
-            <a:avLst>
-              <a:gd name="adj" fmla="val 5000"/>
-            </a:avLst>
-          </a:prstGeom>
-          <a:solidFill>
-            <a:srgbClr val="10BF16"/>
-          </a:solidFill>
-          <a:ln>
-            <a:noFill/>
-          </a:ln>
-        </p:spPr>
-        <p:style>
-          <a:lnRef idx="1">
-            <a:schemeClr val="accent1"/>
-          </a:lnRef>
-          <a:fillRef idx="3">
-            <a:schemeClr val="accent1"/>
-          </a:fillRef>
-          <a:effectRef idx="2">
-            <a:schemeClr val="accent1"/>
-          </a:effectRef>
-          <a:fontRef idx="minor">
-            <a:schemeClr val="lt1"/>
-          </a:fontRef>
-        </p:style>
-        <p:txBody>
-          <a:bodyPr rtlCol="0" anchor="ctr" wrap="square" lIns="137160" rIns="137160" tIns="73152" bIns="73152"/>
-          <a:lstStyle/>
+              <a:rPr sz="1600" b="1">
+                <a:solidFill>
+                  <a:srgbClr val="1C3557"/>
+                </a:solidFill>
+                <a:latin typeface="Noto Sans JP"/>
+              </a:rPr>
+              <a:t>業務が毎月変わる</a:t>
+            </a:r>
+          </a:p>
           <a:p>
             <a:pPr algn="ctr"/>
             <a:r>
-              <a:rPr sz="2000" b="1">
-                <a:solidFill>
-                  <a:srgbClr val="FFFFFF"/>
-                </a:solidFill>
-                <a:latin typeface="Noto Sans JP"/>
-              </a:rPr>
-              <a:t>Kawaru BPO</a:t>
-            </a:r>
-          </a:p>
-        </p:txBody>
-      </p:sp>
-      <p:sp>
-        <p:nvSpPr>
-          <p:cNvPr id="12" name="Rectangle 11"/>
-          <p:cNvSpPr/>
-          <p:nvPr/>
-        </p:nvSpPr>
-        <p:spPr>
-          <a:xfrm>
-            <a:off x="457200" y="5669280"/>
-            <a:ext cx="11274552" cy="457200"/>
+              <a:rPr sz="1600" b="1">
+                <a:solidFill>
+                  <a:srgbClr val="1C3557"/>
+                </a:solidFill>
+                <a:latin typeface="Noto Sans JP"/>
+              </a:rPr>
+              <a:t>削減対象がない</a:t>
+            </a:r>
+          </a:p>
+        </p:txBody>
+      </p:sp>
+      <p:sp>
+        <p:nvSpPr>
+          <p:cNvPr id="8" name="Rectangle 7"/>
+          <p:cNvSpPr/>
+          <p:nvPr/>
+        </p:nvSpPr>
+        <p:spPr>
+          <a:xfrm>
+            <a:off x="10972800" y="6492240"/>
+            <a:ext cx="1005840" cy="274320"/>
           </a:xfrm>
           <a:prstGeom prst="rect">
             <a:avLst/>
@@ -4064,65 +5385,15 @@
           <a:bodyPr rtlCol="0" anchor="t" wrap="square" lIns="137160" rIns="137160" tIns="73152" bIns="73152"/>
           <a:lstStyle/>
           <a:p>
-            <a:pPr algn="ctr"/>
-            <a:r>
-              <a:rPr sz="1400" b="0">
+            <a:pPr algn="r"/>
+            <a:r>
+              <a:rPr sz="1000" b="0">
                 <a:solidFill>
                   <a:srgbClr val="6B7280"/>
                 </a:solidFill>
                 <a:latin typeface="Noto Sans JP"/>
               </a:rPr>
-              <a:t>3つのデリバリーサービスも動かす</a:t>
-            </a:r>
-          </a:p>
-        </p:txBody>
-      </p:sp>
-      <p:sp>
-        <p:nvSpPr>
-          <p:cNvPr id="13" name="Rectangle 12"/>
-          <p:cNvSpPr/>
-          <p:nvPr/>
-        </p:nvSpPr>
-        <p:spPr>
-          <a:xfrm>
-            <a:off x="457200" y="6126480"/>
-            <a:ext cx="11274552" cy="365760"/>
-          </a:xfrm>
-          <a:prstGeom prst="rect">
-            <a:avLst/>
-          </a:prstGeom>
-          <a:noFill/>
-          <a:ln>
-            <a:noFill/>
-          </a:ln>
-        </p:spPr>
-        <p:style>
-          <a:lnRef idx="1">
-            <a:schemeClr val="accent1"/>
-          </a:lnRef>
-          <a:fillRef idx="3">
-            <a:schemeClr val="accent1"/>
-          </a:fillRef>
-          <a:effectRef idx="2">
-            <a:schemeClr val="accent1"/>
-          </a:effectRef>
-          <a:fontRef idx="minor">
-            <a:schemeClr val="lt1"/>
-          </a:fontRef>
-        </p:style>
-        <p:txBody>
-          <a:bodyPr rtlCol="0" anchor="t" wrap="square" lIns="137160" rIns="137160" tIns="73152" bIns="73152"/>
-          <a:lstStyle/>
-          <a:p>
-            <a:pPr algn="ctr"/>
-            <a:r>
-              <a:rPr sz="1100" b="0">
-                <a:solidFill>
-                  <a:srgbClr val="6B7280"/>
-                </a:solidFill>
-                <a:latin typeface="Noto Sans JP"/>
-              </a:rPr>
-              <a:t>プロダクト作りとデリバリーは同時進行、フォーカスはプロダクト作り</a:t>
+              <a:t>2 / 11</a:t>
             </a:r>
           </a:p>
         </p:txBody>
@@ -4196,8 +5467,8 @@
         </p:nvSpPr>
         <p:spPr>
           <a:xfrm>
-            <a:off x="11247120" y="274320"/>
-            <a:ext cx="731520" cy="274320"/>
+            <a:off x="10972800" y="274320"/>
+            <a:ext cx="1005840" cy="274320"/>
           </a:xfrm>
           <a:prstGeom prst="rect">
             <a:avLst/>
@@ -4233,7 +5504,7 @@
                 </a:solidFill>
                 <a:latin typeface="Noto Sans JP"/>
               </a:rPr>
-              <a:t>3 / 9</a:t>
+              <a:t>3 / 11</a:t>
             </a:r>
           </a:p>
         </p:txBody>
@@ -4247,7 +5518,7 @@
         <p:spPr>
           <a:xfrm>
             <a:off x="457200" y="365760"/>
-            <a:ext cx="10972800" cy="640080"/>
+            <a:ext cx="10515600" cy="640080"/>
           </a:xfrm>
           <a:prstGeom prst="rect">
             <a:avLst/>
@@ -4283,7 +5554,7 @@
                 </a:solidFill>
                 <a:latin typeface="Noto Sans JP"/>
               </a:rPr>
-              <a:t>AI社員5人の構成</a:t>
+              <a:t>Kawaru事業部の4サービス</a:t>
             </a:r>
           </a:p>
         </p:txBody>
@@ -4339,8 +5610,8 @@
         </p:nvSpPr>
         <p:spPr>
           <a:xfrm>
-            <a:off x="457200" y="1371600"/>
-            <a:ext cx="3200400" cy="777240"/>
+            <a:off x="640080" y="1463040"/>
+            <a:ext cx="5029200" cy="2194560"/>
           </a:xfrm>
           <a:prstGeom prst="roundRect">
             <a:avLst>
@@ -4374,13 +5645,13 @@
           <a:p>
             <a:pPr algn="ctr"/>
             <a:r>
-              <a:rPr sz="1600" b="1">
+              <a:rPr sz="3600" b="1">
                 <a:solidFill>
                   <a:srgbClr val="FFFFFF"/>
                 </a:solidFill>
                 <a:latin typeface="Noto Sans JP"/>
               </a:rPr>
-              <a:t>マーケAI</a:t>
+              <a:t>Kawaru</a:t>
             </a:r>
           </a:p>
         </p:txBody>
@@ -4393,8 +5664,8 @@
         </p:nvSpPr>
         <p:spPr>
           <a:xfrm>
-            <a:off x="3749039" y="1371600"/>
-            <a:ext cx="7955279" cy="777240"/>
+            <a:off x="5943600" y="1463040"/>
+            <a:ext cx="5029200" cy="2194560"/>
           </a:xfrm>
           <a:prstGeom prst="roundRect">
             <a:avLst>
@@ -4402,7 +5673,7 @@
             </a:avLst>
           </a:prstGeom>
           <a:solidFill>
-            <a:srgbClr val="F3F4F6"/>
+            <a:srgbClr val="FF6600"/>
           </a:solidFill>
           <a:ln>
             <a:noFill/>
@@ -4426,15 +5697,15 @@
           <a:bodyPr rtlCol="0" anchor="ctr" wrap="square" lIns="137160" rIns="137160" tIns="73152" bIns="73152"/>
           <a:lstStyle/>
           <a:p>
-            <a:pPr algn="l"/>
-            <a:r>
-              <a:rPr sz="1400" b="0">
-                <a:solidFill>
-                  <a:srgbClr val="1C3557"/>
-                </a:solidFill>
-                <a:latin typeface="Noto Sans JP"/>
-              </a:rPr>
-              <a:t>LP / SNS / 展示会 / LINE配信 / 事例記事</a:t>
+            <a:pPr algn="ctr"/>
+            <a:r>
+              <a:rPr sz="3600" b="1">
+                <a:solidFill>
+                  <a:srgbClr val="FFFFFF"/>
+                </a:solidFill>
+                <a:latin typeface="Noto Sans JP"/>
+              </a:rPr>
+              <a:t>Kawaru Team</a:t>
             </a:r>
           </a:p>
         </p:txBody>
@@ -4447,8 +5718,8 @@
         </p:nvSpPr>
         <p:spPr>
           <a:xfrm>
-            <a:off x="457200" y="2240280"/>
-            <a:ext cx="3200400" cy="777240"/>
+            <a:off x="640080" y="3931920"/>
+            <a:ext cx="5029200" cy="2194560"/>
           </a:xfrm>
           <a:prstGeom prst="roundRect">
             <a:avLst>
@@ -4456,7 +5727,7 @@
             </a:avLst>
           </a:prstGeom>
           <a:solidFill>
-            <a:srgbClr val="2563EB"/>
+            <a:srgbClr val="7C3AED"/>
           </a:solidFill>
           <a:ln>
             <a:noFill/>
@@ -4482,13 +5753,13 @@
           <a:p>
             <a:pPr algn="ctr"/>
             <a:r>
-              <a:rPr sz="1600" b="1">
+              <a:rPr sz="3600" b="1">
                 <a:solidFill>
                   <a:srgbClr val="FFFFFF"/>
                 </a:solidFill>
                 <a:latin typeface="Noto Sans JP"/>
               </a:rPr>
-              <a:t>営業AI</a:t>
+              <a:t>Kawaru Coach</a:t>
             </a:r>
           </a:p>
         </p:txBody>
@@ -4501,8 +5772,8 @@
         </p:nvSpPr>
         <p:spPr>
           <a:xfrm>
-            <a:off x="3749039" y="2240280"/>
-            <a:ext cx="7955279" cy="777240"/>
+            <a:off x="5943600" y="3931920"/>
+            <a:ext cx="5029200" cy="2194560"/>
           </a:xfrm>
           <a:prstGeom prst="roundRect">
             <a:avLst>
@@ -4510,7 +5781,7 @@
             </a:avLst>
           </a:prstGeom>
           <a:solidFill>
-            <a:srgbClr val="F3F4F6"/>
+            <a:srgbClr val="10BF16"/>
           </a:solidFill>
           <a:ln>
             <a:noFill/>
@@ -4534,353 +5805,29 @@
           <a:bodyPr rtlCol="0" anchor="ctr" wrap="square" lIns="137160" rIns="137160" tIns="73152" bIns="73152"/>
           <a:lstStyle/>
           <a:p>
-            <a:pPr algn="l"/>
-            <a:r>
-              <a:rPr sz="1400" b="0">
-                <a:solidFill>
-                  <a:srgbClr val="1C3557"/>
-                </a:solidFill>
-                <a:latin typeface="Noto Sans JP"/>
-              </a:rPr>
-              <a:t>商談前準備 / 要件ヒアリング / 提案書 / フォロー</a:t>
-            </a:r>
-          </a:p>
-        </p:txBody>
-      </p:sp>
-      <p:sp>
-        <p:nvSpPr>
-          <p:cNvPr id="10" name="Rounded Rectangle 9"/>
-          <p:cNvSpPr/>
-          <p:nvPr/>
-        </p:nvSpPr>
-        <p:spPr>
-          <a:xfrm>
-            <a:off x="457200" y="3108960"/>
-            <a:ext cx="3200400" cy="777240"/>
-          </a:xfrm>
-          <a:prstGeom prst="roundRect">
-            <a:avLst>
-              <a:gd name="adj" fmla="val 5000"/>
-            </a:avLst>
-          </a:prstGeom>
-          <a:solidFill>
-            <a:srgbClr val="2563EB"/>
-          </a:solidFill>
-          <a:ln>
-            <a:noFill/>
-          </a:ln>
-        </p:spPr>
-        <p:style>
-          <a:lnRef idx="1">
-            <a:schemeClr val="accent1"/>
-          </a:lnRef>
-          <a:fillRef idx="3">
-            <a:schemeClr val="accent1"/>
-          </a:fillRef>
-          <a:effectRef idx="2">
-            <a:schemeClr val="accent1"/>
-          </a:effectRef>
-          <a:fontRef idx="minor">
-            <a:schemeClr val="lt1"/>
-          </a:fontRef>
-        </p:style>
-        <p:txBody>
-          <a:bodyPr rtlCol="0" anchor="ctr" wrap="square" lIns="137160" rIns="137160" tIns="73152" bIns="73152"/>
-          <a:lstStyle/>
-          <a:p>
             <a:pPr algn="ctr"/>
             <a:r>
-              <a:rPr sz="1600" b="1">
+              <a:rPr sz="3600" b="1">
                 <a:solidFill>
                   <a:srgbClr val="FFFFFF"/>
                 </a:solidFill>
                 <a:latin typeface="Noto Sans JP"/>
               </a:rPr>
-              <a:t>デリバリーAI</a:t>
-            </a:r>
-          </a:p>
-        </p:txBody>
-      </p:sp>
-      <p:sp>
-        <p:nvSpPr>
-          <p:cNvPr id="11" name="Rounded Rectangle 10"/>
-          <p:cNvSpPr/>
-          <p:nvPr/>
-        </p:nvSpPr>
-        <p:spPr>
-          <a:xfrm>
-            <a:off x="3749039" y="3108960"/>
-            <a:ext cx="7955279" cy="777240"/>
-          </a:xfrm>
-          <a:prstGeom prst="roundRect">
-            <a:avLst>
-              <a:gd name="adj" fmla="val 5000"/>
-            </a:avLst>
-          </a:prstGeom>
-          <a:solidFill>
-            <a:srgbClr val="F3F4F6"/>
-          </a:solidFill>
-          <a:ln>
-            <a:noFill/>
-          </a:ln>
-        </p:spPr>
-        <p:style>
-          <a:lnRef idx="1">
-            <a:schemeClr val="accent1"/>
-          </a:lnRef>
-          <a:fillRef idx="3">
-            <a:schemeClr val="accent1"/>
-          </a:fillRef>
-          <a:effectRef idx="2">
-            <a:schemeClr val="accent1"/>
-          </a:effectRef>
-          <a:fontRef idx="minor">
-            <a:schemeClr val="lt1"/>
-          </a:fontRef>
-        </p:style>
-        <p:txBody>
-          <a:bodyPr rtlCol="0" anchor="ctr" wrap="square" lIns="137160" rIns="137160" tIns="73152" bIns="73152"/>
-          <a:lstStyle/>
-          <a:p>
-            <a:pPr algn="l"/>
-            <a:r>
-              <a:rPr sz="1400" b="0">
-                <a:solidFill>
-                  <a:srgbClr val="1C3557"/>
-                </a:solidFill>
-                <a:latin typeface="Noto Sans JP"/>
-              </a:rPr>
-              <a:t>研修運営 / Dify・N8N・GAS構築 / CSコンサル / PM</a:t>
-            </a:r>
-          </a:p>
-        </p:txBody>
-      </p:sp>
-      <p:sp>
-        <p:nvSpPr>
-          <p:cNvPr id="12" name="Rounded Rectangle 11"/>
-          <p:cNvSpPr/>
-          <p:nvPr/>
-        </p:nvSpPr>
-        <p:spPr>
-          <a:xfrm>
-            <a:off x="457200" y="3977640"/>
-            <a:ext cx="3200400" cy="777240"/>
-          </a:xfrm>
-          <a:prstGeom prst="roundRect">
-            <a:avLst>
-              <a:gd name="adj" fmla="val 5000"/>
-            </a:avLst>
-          </a:prstGeom>
-          <a:solidFill>
-            <a:srgbClr val="2563EB"/>
-          </a:solidFill>
-          <a:ln>
-            <a:noFill/>
-          </a:ln>
-        </p:spPr>
-        <p:style>
-          <a:lnRef idx="1">
-            <a:schemeClr val="accent1"/>
-          </a:lnRef>
-          <a:fillRef idx="3">
-            <a:schemeClr val="accent1"/>
-          </a:fillRef>
-          <a:effectRef idx="2">
-            <a:schemeClr val="accent1"/>
-          </a:effectRef>
-          <a:fontRef idx="minor">
-            <a:schemeClr val="lt1"/>
-          </a:fontRef>
-        </p:style>
-        <p:txBody>
-          <a:bodyPr rtlCol="0" anchor="ctr" wrap="square" lIns="137160" rIns="137160" tIns="73152" bIns="73152"/>
-          <a:lstStyle/>
-          <a:p>
-            <a:pPr algn="ctr"/>
-            <a:r>
-              <a:rPr sz="1600" b="1">
-                <a:solidFill>
-                  <a:srgbClr val="FFFFFF"/>
-                </a:solidFill>
-                <a:latin typeface="Noto Sans JP"/>
-              </a:rPr>
-              <a:t>事務・法務AI</a:t>
-            </a:r>
-          </a:p>
-        </p:txBody>
-      </p:sp>
-      <p:sp>
-        <p:nvSpPr>
-          <p:cNvPr id="13" name="Rounded Rectangle 12"/>
-          <p:cNvSpPr/>
-          <p:nvPr/>
-        </p:nvSpPr>
-        <p:spPr>
-          <a:xfrm>
-            <a:off x="3749039" y="3977640"/>
-            <a:ext cx="7955279" cy="777240"/>
-          </a:xfrm>
-          <a:prstGeom prst="roundRect">
-            <a:avLst>
-              <a:gd name="adj" fmla="val 5000"/>
-            </a:avLst>
-          </a:prstGeom>
-          <a:solidFill>
-            <a:srgbClr val="F3F4F6"/>
-          </a:solidFill>
-          <a:ln>
-            <a:noFill/>
-          </a:ln>
-        </p:spPr>
-        <p:style>
-          <a:lnRef idx="1">
-            <a:schemeClr val="accent1"/>
-          </a:lnRef>
-          <a:fillRef idx="3">
-            <a:schemeClr val="accent1"/>
-          </a:fillRef>
-          <a:effectRef idx="2">
-            <a:schemeClr val="accent1"/>
-          </a:effectRef>
-          <a:fontRef idx="minor">
-            <a:schemeClr val="lt1"/>
-          </a:fontRef>
-        </p:style>
-        <p:txBody>
-          <a:bodyPr rtlCol="0" anchor="ctr" wrap="square" lIns="137160" rIns="137160" tIns="73152" bIns="73152"/>
-          <a:lstStyle/>
-          <a:p>
-            <a:pPr algn="l"/>
-            <a:r>
-              <a:rPr sz="1400" b="0">
-                <a:solidFill>
-                  <a:srgbClr val="1C3557"/>
-                </a:solidFill>
-                <a:latin typeface="Noto Sans JP"/>
-              </a:rPr>
-              <a:t>契約 / 請求 / PL / 利用規約</a:t>
-            </a:r>
-          </a:p>
-        </p:txBody>
-      </p:sp>
-      <p:sp>
-        <p:nvSpPr>
-          <p:cNvPr id="14" name="Rounded Rectangle 13"/>
-          <p:cNvSpPr/>
-          <p:nvPr/>
-        </p:nvSpPr>
-        <p:spPr>
-          <a:xfrm>
-            <a:off x="457200" y="4846320"/>
-            <a:ext cx="3200400" cy="777240"/>
-          </a:xfrm>
-          <a:prstGeom prst="roundRect">
-            <a:avLst>
-              <a:gd name="adj" fmla="val 5000"/>
-            </a:avLst>
-          </a:prstGeom>
-          <a:solidFill>
-            <a:srgbClr val="2563EB"/>
-          </a:solidFill>
-          <a:ln>
-            <a:noFill/>
-          </a:ln>
-        </p:spPr>
-        <p:style>
-          <a:lnRef idx="1">
-            <a:schemeClr val="accent1"/>
-          </a:lnRef>
-          <a:fillRef idx="3">
-            <a:schemeClr val="accent1"/>
-          </a:fillRef>
-          <a:effectRef idx="2">
-            <a:schemeClr val="accent1"/>
-          </a:effectRef>
-          <a:fontRef idx="minor">
-            <a:schemeClr val="lt1"/>
-          </a:fontRef>
-        </p:style>
-        <p:txBody>
-          <a:bodyPr rtlCol="0" anchor="ctr" wrap="square" lIns="137160" rIns="137160" tIns="73152" bIns="73152"/>
-          <a:lstStyle/>
-          <a:p>
-            <a:pPr algn="ctr"/>
-            <a:r>
-              <a:rPr sz="1600" b="1">
-                <a:solidFill>
-                  <a:srgbClr val="FFFFFF"/>
-                </a:solidFill>
-                <a:latin typeface="Noto Sans JP"/>
-              </a:rPr>
-              <a:t>戦略・プロダクトAI</a:t>
-            </a:r>
-          </a:p>
-        </p:txBody>
-      </p:sp>
-      <p:sp>
-        <p:nvSpPr>
-          <p:cNvPr id="15" name="Rounded Rectangle 14"/>
-          <p:cNvSpPr/>
-          <p:nvPr/>
-        </p:nvSpPr>
-        <p:spPr>
-          <a:xfrm>
-            <a:off x="3749039" y="4846320"/>
-            <a:ext cx="7955279" cy="777240"/>
-          </a:xfrm>
-          <a:prstGeom prst="roundRect">
-            <a:avLst>
-              <a:gd name="adj" fmla="val 5000"/>
-            </a:avLst>
-          </a:prstGeom>
-          <a:solidFill>
-            <a:srgbClr val="F3F4F6"/>
-          </a:solidFill>
-          <a:ln>
-            <a:noFill/>
-          </a:ln>
-        </p:spPr>
-        <p:style>
-          <a:lnRef idx="1">
-            <a:schemeClr val="accent1"/>
-          </a:lnRef>
-          <a:fillRef idx="3">
-            <a:schemeClr val="accent1"/>
-          </a:fillRef>
-          <a:effectRef idx="2">
-            <a:schemeClr val="accent1"/>
-          </a:effectRef>
-          <a:fontRef idx="minor">
-            <a:schemeClr val="lt1"/>
-          </a:fontRef>
-        </p:style>
-        <p:txBody>
-          <a:bodyPr rtlCol="0" anchor="ctr" wrap="square" lIns="137160" rIns="137160" tIns="73152" bIns="73152"/>
-          <a:lstStyle/>
-          <a:p>
-            <a:pPr algn="l"/>
-            <a:r>
-              <a:rPr sz="1400" b="0">
-                <a:solidFill>
-                  <a:srgbClr val="1C3557"/>
-                </a:solidFill>
-                <a:latin typeface="Noto Sans JP"/>
-              </a:rPr>
-              <a:t>競合・市場・料金・データ分析(リサーチ・分析担当)</a:t>
-            </a:r>
-          </a:p>
-        </p:txBody>
-      </p:sp>
-      <p:sp>
-        <p:nvSpPr>
-          <p:cNvPr id="16" name="Rectangle 15"/>
-          <p:cNvSpPr/>
-          <p:nvPr/>
-        </p:nvSpPr>
-        <p:spPr>
-          <a:xfrm>
-            <a:off x="457200" y="5989320"/>
-            <a:ext cx="11274552" cy="365760"/>
+              <a:t>Kawaru BPO</a:t>
+            </a:r>
+          </a:p>
+        </p:txBody>
+      </p:sp>
+      <p:sp>
+        <p:nvSpPr>
+          <p:cNvPr id="10" name="Rectangle 9"/>
+          <p:cNvSpPr/>
+          <p:nvPr/>
+        </p:nvSpPr>
+        <p:spPr>
+          <a:xfrm>
+            <a:off x="457200" y="6263640"/>
+            <a:ext cx="11274552" cy="457200"/>
           </a:xfrm>
           <a:prstGeom prst="rect">
             <a:avLst/>
@@ -4910,13 +5857,13 @@
           <a:p>
             <a:pPr algn="ctr"/>
             <a:r>
-              <a:rPr sz="1100" b="1">
-                <a:solidFill>
-                  <a:srgbClr val="6B7280"/>
-                </a:solidFill>
-                <a:latin typeface="Noto Sans JP"/>
-              </a:rPr>
-              <a:t>マーケから事務までの4人 = 各領域の戦略 + 実行  /  戦略・プロダクトAI = 全体のリサーチ・分析担当</a:t>
+              <a:rPr sz="1600" b="1">
+                <a:solidFill>
+                  <a:srgbClr val="1C3557"/>
+                </a:solidFill>
+                <a:latin typeface="Noto Sans JP"/>
+              </a:rPr>
+              <a:t>この4つのサービスを動かしている</a:t>
             </a:r>
           </a:p>
         </p:txBody>
@@ -4990,8 +5937,8 @@
         </p:nvSpPr>
         <p:spPr>
           <a:xfrm>
-            <a:off x="11247120" y="274320"/>
-            <a:ext cx="731520" cy="274320"/>
+            <a:off x="10972800" y="274320"/>
+            <a:ext cx="1005840" cy="274320"/>
           </a:xfrm>
           <a:prstGeom prst="rect">
             <a:avLst/>
@@ -5027,7 +5974,7 @@
                 </a:solidFill>
                 <a:latin typeface="Noto Sans JP"/>
               </a:rPr>
-              <a:t>4 / 9</a:t>
+              <a:t>4 / 11</a:t>
             </a:r>
           </a:p>
         </p:txBody>
@@ -5041,7 +5988,7 @@
         <p:spPr>
           <a:xfrm>
             <a:off x="457200" y="365760"/>
-            <a:ext cx="10972800" cy="640080"/>
+            <a:ext cx="10515600" cy="640080"/>
           </a:xfrm>
           <a:prstGeom prst="rect">
             <a:avLst/>
@@ -5077,7 +6024,7 @@
                 </a:solidFill>
                 <a:latin typeface="Noto Sans JP"/>
               </a:rPr>
-              <a:t>なぜこの構成にしたか</a:t>
+              <a:t>でもフルコミットは2人だけ。だからAI社員5人で動かす</a:t>
             </a:r>
           </a:p>
         </p:txBody>
@@ -5127,64 +6074,14 @@
       </p:sp>
       <p:sp>
         <p:nvSpPr>
-          <p:cNvPr id="6" name="Rectangle 5"/>
-          <p:cNvSpPr/>
-          <p:nvPr/>
-        </p:nvSpPr>
-        <p:spPr>
-          <a:xfrm>
-            <a:off x="457200" y="1554480"/>
-            <a:ext cx="2286000" cy="365760"/>
-          </a:xfrm>
-          <a:prstGeom prst="rect">
-            <a:avLst/>
-          </a:prstGeom>
-          <a:noFill/>
-          <a:ln>
-            <a:noFill/>
-          </a:ln>
-        </p:spPr>
-        <p:style>
-          <a:lnRef idx="1">
-            <a:schemeClr val="accent1"/>
-          </a:lnRef>
-          <a:fillRef idx="3">
-            <a:schemeClr val="accent1"/>
-          </a:fillRef>
-          <a:effectRef idx="2">
-            <a:schemeClr val="accent1"/>
-          </a:effectRef>
-          <a:fontRef idx="minor">
-            <a:schemeClr val="lt1"/>
-          </a:fontRef>
-        </p:style>
-        <p:txBody>
-          <a:bodyPr rtlCol="0" anchor="t" wrap="square" lIns="137160" rIns="137160" tIns="73152" bIns="73152"/>
-          <a:lstStyle/>
-          <a:p>
-            <a:pPr algn="l"/>
-            <a:r>
-              <a:rPr sz="1300" b="1">
-                <a:solidFill>
-                  <a:srgbClr val="2563EB"/>
-                </a:solidFill>
-                <a:latin typeface="Noto Sans JP"/>
-              </a:rPr>
-              <a:t>【縦軸】コア能力</a:t>
-            </a:r>
-          </a:p>
-        </p:txBody>
-      </p:sp>
-      <p:sp>
-        <p:nvSpPr>
-          <p:cNvPr id="7" name="Rounded Rectangle 6"/>
-          <p:cNvSpPr/>
-          <p:nvPr/>
-        </p:nvSpPr>
-        <p:spPr>
-          <a:xfrm>
-            <a:off x="457200" y="2011680"/>
-            <a:ext cx="2286000" cy="2011680"/>
+          <p:cNvPr id="6" name="Rounded Rectangle 5"/>
+          <p:cNvSpPr/>
+          <p:nvPr/>
+        </p:nvSpPr>
+        <p:spPr>
+          <a:xfrm>
+            <a:off x="3200400" y="1554480"/>
+            <a:ext cx="2286000" cy="914400"/>
           </a:xfrm>
           <a:prstGeom prst="roundRect">
             <a:avLst>
@@ -5192,7 +6089,7 @@
             </a:avLst>
           </a:prstGeom>
           <a:solidFill>
-            <a:srgbClr val="DBEAFE"/>
+            <a:srgbClr val="1C3557"/>
           </a:solidFill>
           <a:ln>
             <a:noFill/>
@@ -5218,125 +6115,27 @@
           <a:p>
             <a:pPr algn="ctr"/>
             <a:r>
-              <a:rPr sz="1500" b="0">
-                <a:solidFill>
-                  <a:srgbClr val="1C3557"/>
-                </a:solidFill>
-                <a:latin typeface="Noto Sans JP"/>
-              </a:rPr>
-              <a:t>作る</a:t>
-            </a:r>
-          </a:p>
-          <a:p>
-            <a:pPr algn="ctr"/>
-            <a:r>
-              <a:rPr sz="1500" b="0">
-                <a:solidFill>
-                  <a:srgbClr val="1C3557"/>
-                </a:solidFill>
-                <a:latin typeface="Noto Sans JP"/>
-              </a:rPr>
-              <a:t>調べる</a:t>
-            </a:r>
-          </a:p>
-          <a:p>
-            <a:pPr algn="ctr"/>
-            <a:r>
-              <a:rPr sz="1500" b="0">
-                <a:solidFill>
-                  <a:srgbClr val="1C3557"/>
-                </a:solidFill>
-                <a:latin typeface="Noto Sans JP"/>
-              </a:rPr>
-              <a:t>設計する</a:t>
-            </a:r>
-          </a:p>
-          <a:p>
-            <a:pPr algn="ctr"/>
-            <a:r>
-              <a:rPr sz="1500" b="0">
-                <a:solidFill>
-                  <a:srgbClr val="1C3557"/>
-                </a:solidFill>
-                <a:latin typeface="Noto Sans JP"/>
-              </a:rPr>
-              <a:t>整理する</a:t>
-            </a:r>
-          </a:p>
-          <a:p>
-            <a:pPr algn="ctr"/>
-            <a:r>
-              <a:rPr sz="1500" b="0">
-                <a:solidFill>
-                  <a:srgbClr val="1C3557"/>
-                </a:solidFill>
-                <a:latin typeface="Noto Sans JP"/>
-              </a:rPr>
-              <a:t>考える</a:t>
-            </a:r>
-          </a:p>
-        </p:txBody>
-      </p:sp>
-      <p:sp>
-        <p:nvSpPr>
-          <p:cNvPr id="8" name="Rectangle 7"/>
-          <p:cNvSpPr/>
-          <p:nvPr/>
-        </p:nvSpPr>
-        <p:spPr>
-          <a:xfrm>
-            <a:off x="3200400" y="1554480"/>
-            <a:ext cx="8503920" cy="365760"/>
-          </a:xfrm>
-          <a:prstGeom prst="rect">
-            <a:avLst/>
-          </a:prstGeom>
-          <a:noFill/>
-          <a:ln>
-            <a:noFill/>
-          </a:ln>
-        </p:spPr>
-        <p:style>
-          <a:lnRef idx="1">
-            <a:schemeClr val="accent1"/>
-          </a:lnRef>
-          <a:fillRef idx="3">
-            <a:schemeClr val="accent1"/>
-          </a:fillRef>
-          <a:effectRef idx="2">
-            <a:schemeClr val="accent1"/>
-          </a:effectRef>
-          <a:fontRef idx="minor">
-            <a:schemeClr val="lt1"/>
-          </a:fontRef>
-        </p:style>
-        <p:txBody>
-          <a:bodyPr rtlCol="0" anchor="t" wrap="square" lIns="137160" rIns="137160" tIns="73152" bIns="73152"/>
-          <a:lstStyle/>
-          <a:p>
-            <a:pPr algn="l"/>
-            <a:r>
-              <a:rPr sz="1300" b="1">
-                <a:solidFill>
-                  <a:srgbClr val="2563EB"/>
-                </a:solidFill>
-                <a:latin typeface="Noto Sans JP"/>
-              </a:rPr>
-              <a:t>【横軸】機能でMECEに網羅</a:t>
-            </a:r>
-          </a:p>
-        </p:txBody>
-      </p:sp>
-      <p:sp>
-        <p:nvSpPr>
-          <p:cNvPr id="9" name="Rounded Rectangle 8"/>
-          <p:cNvSpPr/>
-          <p:nvPr/>
-        </p:nvSpPr>
-        <p:spPr>
-          <a:xfrm>
-            <a:off x="3200400" y="2011680"/>
-            <a:ext cx="1536192" cy="2011680"/>
+              <a:rPr sz="2200" b="1">
+                <a:solidFill>
+                  <a:srgbClr val="FFFFFF"/>
+                </a:solidFill>
+                <a:latin typeface="Noto Sans JP"/>
+              </a:rPr>
+              <a:t>髙橋</a:t>
+            </a:r>
+          </a:p>
+        </p:txBody>
+      </p:sp>
+      <p:sp>
+        <p:nvSpPr>
+          <p:cNvPr id="7" name="Rounded Rectangle 6"/>
+          <p:cNvSpPr/>
+          <p:nvPr/>
+        </p:nvSpPr>
+        <p:spPr>
+          <a:xfrm>
+            <a:off x="6702552" y="1554480"/>
+            <a:ext cx="2286000" cy="914400"/>
           </a:xfrm>
           <a:prstGeom prst="roundRect">
             <a:avLst>
@@ -5344,7 +6143,7 @@
             </a:avLst>
           </a:prstGeom>
           <a:solidFill>
-            <a:srgbClr val="F3F4F6"/>
+            <a:srgbClr val="2563EB"/>
           </a:solidFill>
           <a:ln>
             <a:noFill/>
@@ -5370,27 +6169,77 @@
           <a:p>
             <a:pPr algn="ctr"/>
             <a:r>
+              <a:rPr sz="2200" b="1">
+                <a:solidFill>
+                  <a:srgbClr val="FFFFFF"/>
+                </a:solidFill>
+                <a:latin typeface="Noto Sans JP"/>
+              </a:rPr>
+              <a:t>大川</a:t>
+            </a:r>
+          </a:p>
+        </p:txBody>
+      </p:sp>
+      <p:sp>
+        <p:nvSpPr>
+          <p:cNvPr id="8" name="Rectangle 7"/>
+          <p:cNvSpPr/>
+          <p:nvPr/>
+        </p:nvSpPr>
+        <p:spPr>
+          <a:xfrm>
+            <a:off x="457200" y="2743200"/>
+            <a:ext cx="11274552" cy="548640"/>
+          </a:xfrm>
+          <a:prstGeom prst="rect">
+            <a:avLst/>
+          </a:prstGeom>
+          <a:noFill/>
+          <a:ln>
+            <a:noFill/>
+          </a:ln>
+        </p:spPr>
+        <p:style>
+          <a:lnRef idx="1">
+            <a:schemeClr val="accent1"/>
+          </a:lnRef>
+          <a:fillRef idx="3">
+            <a:schemeClr val="accent1"/>
+          </a:fillRef>
+          <a:effectRef idx="2">
+            <a:schemeClr val="accent1"/>
+          </a:effectRef>
+          <a:fontRef idx="minor">
+            <a:schemeClr val="lt1"/>
+          </a:fontRef>
+        </p:style>
+        <p:txBody>
+          <a:bodyPr rtlCol="0" anchor="ctr" wrap="square" lIns="137160" rIns="137160" tIns="73152" bIns="73152"/>
+          <a:lstStyle/>
+          <a:p>
+            <a:pPr algn="ctr"/>
+            <a:r>
               <a:rPr sz="1600" b="1">
                 <a:solidFill>
-                  <a:srgbClr val="1C3557"/>
-                </a:solidFill>
-                <a:latin typeface="Noto Sans JP"/>
-              </a:rPr>
-              <a:t>マーケ</a:t>
-            </a:r>
-          </a:p>
-        </p:txBody>
-      </p:sp>
-      <p:sp>
-        <p:nvSpPr>
-          <p:cNvPr id="10" name="Rounded Rectangle 9"/>
-          <p:cNvSpPr/>
-          <p:nvPr/>
-        </p:nvSpPr>
-        <p:spPr>
-          <a:xfrm>
-            <a:off x="4828032" y="2011680"/>
-            <a:ext cx="1536192" cy="2011680"/>
+                  <a:srgbClr val="2563EB"/>
+                </a:solidFill>
+                <a:latin typeface="Noto Sans JP"/>
+              </a:rPr>
+              <a:t>↓ AI社員に動いてもらう ↓</a:t>
+            </a:r>
+          </a:p>
+        </p:txBody>
+      </p:sp>
+      <p:sp>
+        <p:nvSpPr>
+          <p:cNvPr id="9" name="Rounded Rectangle 8"/>
+          <p:cNvSpPr/>
+          <p:nvPr/>
+        </p:nvSpPr>
+        <p:spPr>
+          <a:xfrm>
+            <a:off x="640080" y="3566160"/>
+            <a:ext cx="2103120" cy="1280160"/>
           </a:xfrm>
           <a:prstGeom prst="roundRect">
             <a:avLst>
@@ -5398,7 +6247,7 @@
             </a:avLst>
           </a:prstGeom>
           <a:solidFill>
-            <a:srgbClr val="F3F4F6"/>
+            <a:srgbClr val="2563EB"/>
           </a:solidFill>
           <a:ln>
             <a:noFill/>
@@ -5424,27 +6273,27 @@
           <a:p>
             <a:pPr algn="ctr"/>
             <a:r>
-              <a:rPr sz="1600" b="1">
-                <a:solidFill>
-                  <a:srgbClr val="1C3557"/>
-                </a:solidFill>
-                <a:latin typeface="Noto Sans JP"/>
-              </a:rPr>
-              <a:t>営業</a:t>
-            </a:r>
-          </a:p>
-        </p:txBody>
-      </p:sp>
-      <p:sp>
-        <p:nvSpPr>
-          <p:cNvPr id="11" name="Rounded Rectangle 10"/>
-          <p:cNvSpPr/>
-          <p:nvPr/>
-        </p:nvSpPr>
-        <p:spPr>
-          <a:xfrm>
-            <a:off x="6455664" y="2011680"/>
-            <a:ext cx="1536192" cy="2011680"/>
+              <a:rPr sz="1400" b="1">
+                <a:solidFill>
+                  <a:srgbClr val="FFFFFF"/>
+                </a:solidFill>
+                <a:latin typeface="Noto Sans JP"/>
+              </a:rPr>
+              <a:t>マーケAI</a:t>
+            </a:r>
+          </a:p>
+        </p:txBody>
+      </p:sp>
+      <p:sp>
+        <p:nvSpPr>
+          <p:cNvPr id="10" name="Rounded Rectangle 9"/>
+          <p:cNvSpPr/>
+          <p:nvPr/>
+        </p:nvSpPr>
+        <p:spPr>
+          <a:xfrm>
+            <a:off x="2926080" y="3566160"/>
+            <a:ext cx="2103120" cy="1280160"/>
           </a:xfrm>
           <a:prstGeom prst="roundRect">
             <a:avLst>
@@ -5452,7 +6301,7 @@
             </a:avLst>
           </a:prstGeom>
           <a:solidFill>
-            <a:srgbClr val="F3F4F6"/>
+            <a:srgbClr val="2563EB"/>
           </a:solidFill>
           <a:ln>
             <a:noFill/>
@@ -5478,27 +6327,27 @@
           <a:p>
             <a:pPr algn="ctr"/>
             <a:r>
-              <a:rPr sz="1600" b="1">
-                <a:solidFill>
-                  <a:srgbClr val="1C3557"/>
-                </a:solidFill>
-                <a:latin typeface="Noto Sans JP"/>
-              </a:rPr>
-              <a:t>デリバリー</a:t>
-            </a:r>
-          </a:p>
-        </p:txBody>
-      </p:sp>
-      <p:sp>
-        <p:nvSpPr>
-          <p:cNvPr id="12" name="Rounded Rectangle 11"/>
-          <p:cNvSpPr/>
-          <p:nvPr/>
-        </p:nvSpPr>
-        <p:spPr>
-          <a:xfrm>
-            <a:off x="8083296" y="2011680"/>
-            <a:ext cx="1536192" cy="2011680"/>
+              <a:rPr sz="1400" b="1">
+                <a:solidFill>
+                  <a:srgbClr val="FFFFFF"/>
+                </a:solidFill>
+                <a:latin typeface="Noto Sans JP"/>
+              </a:rPr>
+              <a:t>営業AI</a:t>
+            </a:r>
+          </a:p>
+        </p:txBody>
+      </p:sp>
+      <p:sp>
+        <p:nvSpPr>
+          <p:cNvPr id="11" name="Rounded Rectangle 10"/>
+          <p:cNvSpPr/>
+          <p:nvPr/>
+        </p:nvSpPr>
+        <p:spPr>
+          <a:xfrm>
+            <a:off x="5212080" y="3566160"/>
+            <a:ext cx="2103120" cy="1280160"/>
           </a:xfrm>
           <a:prstGeom prst="roundRect">
             <a:avLst>
@@ -5506,7 +6355,7 @@
             </a:avLst>
           </a:prstGeom>
           <a:solidFill>
-            <a:srgbClr val="F3F4F6"/>
+            <a:srgbClr val="2563EB"/>
           </a:solidFill>
           <a:ln>
             <a:noFill/>
@@ -5532,27 +6381,27 @@
           <a:p>
             <a:pPr algn="ctr"/>
             <a:r>
-              <a:rPr sz="1600" b="1">
-                <a:solidFill>
-                  <a:srgbClr val="1C3557"/>
-                </a:solidFill>
-                <a:latin typeface="Noto Sans JP"/>
-              </a:rPr>
-              <a:t>事務法務</a:t>
-            </a:r>
-          </a:p>
-        </p:txBody>
-      </p:sp>
-      <p:sp>
-        <p:nvSpPr>
-          <p:cNvPr id="13" name="Rounded Rectangle 12"/>
-          <p:cNvSpPr/>
-          <p:nvPr/>
-        </p:nvSpPr>
-        <p:spPr>
-          <a:xfrm>
-            <a:off x="9710928" y="2011680"/>
-            <a:ext cx="1536192" cy="2011680"/>
+              <a:rPr sz="1400" b="1">
+                <a:solidFill>
+                  <a:srgbClr val="FFFFFF"/>
+                </a:solidFill>
+                <a:latin typeface="Noto Sans JP"/>
+              </a:rPr>
+              <a:t>デリバリーAI</a:t>
+            </a:r>
+          </a:p>
+        </p:txBody>
+      </p:sp>
+      <p:sp>
+        <p:nvSpPr>
+          <p:cNvPr id="12" name="Rounded Rectangle 11"/>
+          <p:cNvSpPr/>
+          <p:nvPr/>
+        </p:nvSpPr>
+        <p:spPr>
+          <a:xfrm>
+            <a:off x="7498079" y="3566160"/>
+            <a:ext cx="2103120" cy="1280160"/>
           </a:xfrm>
           <a:prstGeom prst="roundRect">
             <a:avLst>
@@ -5560,7 +6409,7 @@
             </a:avLst>
           </a:prstGeom>
           <a:solidFill>
-            <a:srgbClr val="F3F4F6"/>
+            <a:srgbClr val="2563EB"/>
           </a:solidFill>
           <a:ln>
             <a:noFill/>
@@ -5586,27 +6435,27 @@
           <a:p>
             <a:pPr algn="ctr"/>
             <a:r>
-              <a:rPr sz="1600" b="1">
-                <a:solidFill>
-                  <a:srgbClr val="1C3557"/>
-                </a:solidFill>
-                <a:latin typeface="Noto Sans JP"/>
-              </a:rPr>
-              <a:t>戦略</a:t>
-            </a:r>
-          </a:p>
-        </p:txBody>
-      </p:sp>
-      <p:sp>
-        <p:nvSpPr>
-          <p:cNvPr id="14" name="Rounded Rectangle 13"/>
-          <p:cNvSpPr/>
-          <p:nvPr/>
-        </p:nvSpPr>
-        <p:spPr>
-          <a:xfrm>
-            <a:off x="457200" y="4572000"/>
-            <a:ext cx="11274552" cy="1097280"/>
+              <a:rPr sz="1400" b="1">
+                <a:solidFill>
+                  <a:srgbClr val="FFFFFF"/>
+                </a:solidFill>
+                <a:latin typeface="Noto Sans JP"/>
+              </a:rPr>
+              <a:t>事務法務AI</a:t>
+            </a:r>
+          </a:p>
+        </p:txBody>
+      </p:sp>
+      <p:sp>
+        <p:nvSpPr>
+          <p:cNvPr id="13" name="Rounded Rectangle 12"/>
+          <p:cNvSpPr/>
+          <p:nvPr/>
+        </p:nvSpPr>
+        <p:spPr>
+          <a:xfrm>
+            <a:off x="9784080" y="3566160"/>
+            <a:ext cx="2103120" cy="1280160"/>
           </a:xfrm>
           <a:prstGeom prst="roundRect">
             <a:avLst>
@@ -5614,6 +6463,60 @@
             </a:avLst>
           </a:prstGeom>
           <a:solidFill>
+            <a:srgbClr val="2563EB"/>
+          </a:solidFill>
+          <a:ln>
+            <a:noFill/>
+          </a:ln>
+        </p:spPr>
+        <p:style>
+          <a:lnRef idx="1">
+            <a:schemeClr val="accent1"/>
+          </a:lnRef>
+          <a:fillRef idx="3">
+            <a:schemeClr val="accent1"/>
+          </a:fillRef>
+          <a:effectRef idx="2">
+            <a:schemeClr val="accent1"/>
+          </a:effectRef>
+          <a:fontRef idx="minor">
+            <a:schemeClr val="lt1"/>
+          </a:fontRef>
+        </p:style>
+        <p:txBody>
+          <a:bodyPr rtlCol="0" anchor="ctr" wrap="square" lIns="137160" rIns="137160" tIns="73152" bIns="73152"/>
+          <a:lstStyle/>
+          <a:p>
+            <a:pPr algn="ctr"/>
+            <a:r>
+              <a:rPr sz="1400" b="1">
+                <a:solidFill>
+                  <a:srgbClr val="FFFFFF"/>
+                </a:solidFill>
+                <a:latin typeface="Noto Sans JP"/>
+              </a:rPr>
+              <a:t>戦略AI</a:t>
+            </a:r>
+          </a:p>
+        </p:txBody>
+      </p:sp>
+      <p:sp>
+        <p:nvSpPr>
+          <p:cNvPr id="14" name="Rounded Rectangle 13"/>
+          <p:cNvSpPr/>
+          <p:nvPr/>
+        </p:nvSpPr>
+        <p:spPr>
+          <a:xfrm>
+            <a:off x="457200" y="5212080"/>
+            <a:ext cx="11274552" cy="1005840"/>
+          </a:xfrm>
+          <a:prstGeom prst="roundRect">
+            <a:avLst>
+              <a:gd name="adj" fmla="val 5000"/>
+            </a:avLst>
+          </a:prstGeom>
+          <a:solidFill>
             <a:srgbClr val="DBEAFE"/>
           </a:solidFill>
           <a:ln>
@@ -5642,11 +6545,11 @@
             <a:r>
               <a:rPr sz="2200" b="1">
                 <a:solidFill>
-                  <a:srgbClr val="2563EB"/>
-                </a:solidFill>
-                <a:latin typeface="Noto Sans JP"/>
-              </a:rPr>
-              <a:t>案件が変わっても、5人それぞれが受け止められる設計</a:t>
+                  <a:srgbClr val="1C3557"/>
+                </a:solidFill>
+                <a:latin typeface="Noto Sans JP"/>
+              </a:rPr>
+              <a:t>2人で4サービスは難しい。AI社員5人で動かす</a:t>
             </a:r>
           </a:p>
         </p:txBody>
@@ -5720,8 +6623,8 @@
         </p:nvSpPr>
         <p:spPr>
           <a:xfrm>
-            <a:off x="11247120" y="274320"/>
-            <a:ext cx="731520" cy="274320"/>
+            <a:off x="10972800" y="274320"/>
+            <a:ext cx="1005840" cy="274320"/>
           </a:xfrm>
           <a:prstGeom prst="rect">
             <a:avLst/>
@@ -5757,7 +6660,7 @@
                 </a:solidFill>
                 <a:latin typeface="Noto Sans JP"/>
               </a:rPr>
-              <a:t>5 / 9</a:t>
+              <a:t>5 / 11</a:t>
             </a:r>
           </a:p>
         </p:txBody>
@@ -5771,7 +6674,7 @@
         <p:spPr>
           <a:xfrm>
             <a:off x="457200" y="365760"/>
-            <a:ext cx="10972800" cy="640080"/>
+            <a:ext cx="10515600" cy="640080"/>
           </a:xfrm>
           <a:prstGeom prst="rect">
             <a:avLst/>
@@ -5807,7 +6710,7 @@
                 </a:solidFill>
                 <a:latin typeface="Noto Sans JP"/>
               </a:rPr>
-              <a:t>Kawaru事業部のフルコミットは2人。AI社員5人で動かす</a:t>
+              <a:t>AI社員5人の構成</a:t>
             </a:r>
           </a:p>
         </p:txBody>
@@ -5863,8 +6766,8 @@
         </p:nvSpPr>
         <p:spPr>
           <a:xfrm>
-            <a:off x="4727448" y="1371600"/>
-            <a:ext cx="2743200" cy="640080"/>
+            <a:off x="457200" y="1371600"/>
+            <a:ext cx="3200400" cy="777240"/>
           </a:xfrm>
           <a:prstGeom prst="roundRect">
             <a:avLst>
@@ -5872,7 +6775,7 @@
             </a:avLst>
           </a:prstGeom>
           <a:solidFill>
-            <a:srgbClr val="1C3557"/>
+            <a:srgbClr val="2563EB"/>
           </a:solidFill>
           <a:ln>
             <a:noFill/>
@@ -5898,77 +6801,27 @@
           <a:p>
             <a:pPr algn="ctr"/>
             <a:r>
-              <a:rPr sz="1800" b="1">
+              <a:rPr sz="1600" b="1">
                 <a:solidFill>
                   <a:srgbClr val="FFFFFF"/>
                 </a:solidFill>
                 <a:latin typeface="Noto Sans JP"/>
               </a:rPr>
-              <a:t>髙橋COO</a:t>
-            </a:r>
-          </a:p>
-        </p:txBody>
-      </p:sp>
-      <p:sp>
-        <p:nvSpPr>
-          <p:cNvPr id="7" name="Rectangle 6"/>
-          <p:cNvSpPr/>
-          <p:nvPr/>
-        </p:nvSpPr>
-        <p:spPr>
-          <a:xfrm>
-            <a:off x="5641848" y="2057400"/>
-            <a:ext cx="914400" cy="365760"/>
-          </a:xfrm>
-          <a:prstGeom prst="rect">
-            <a:avLst/>
-          </a:prstGeom>
-          <a:noFill/>
-          <a:ln>
-            <a:noFill/>
-          </a:ln>
-        </p:spPr>
-        <p:style>
-          <a:lnRef idx="1">
-            <a:schemeClr val="accent1"/>
-          </a:lnRef>
-          <a:fillRef idx="3">
-            <a:schemeClr val="accent1"/>
-          </a:fillRef>
-          <a:effectRef idx="2">
-            <a:schemeClr val="accent1"/>
-          </a:effectRef>
-          <a:fontRef idx="minor">
-            <a:schemeClr val="lt1"/>
-          </a:fontRef>
-        </p:style>
-        <p:txBody>
-          <a:bodyPr rtlCol="0" anchor="ctr" wrap="square" lIns="137160" rIns="137160" tIns="73152" bIns="73152"/>
-          <a:lstStyle/>
-          <a:p>
-            <a:pPr algn="ctr"/>
-            <a:r>
-              <a:rPr sz="1800" b="0">
-                <a:solidFill>
-                  <a:srgbClr val="6B7280"/>
-                </a:solidFill>
-                <a:latin typeface="Noto Sans JP"/>
-              </a:rPr>
-              <a:t>↓</a:t>
-            </a:r>
-          </a:p>
-        </p:txBody>
-      </p:sp>
-      <p:sp>
-        <p:nvSpPr>
-          <p:cNvPr id="8" name="Rounded Rectangle 7"/>
-          <p:cNvSpPr/>
-          <p:nvPr/>
-        </p:nvSpPr>
-        <p:spPr>
-          <a:xfrm>
-            <a:off x="4727448" y="2468880"/>
-            <a:ext cx="2743200" cy="640080"/>
+              <a:t>マーケAI</a:t>
+            </a:r>
+          </a:p>
+        </p:txBody>
+      </p:sp>
+      <p:sp>
+        <p:nvSpPr>
+          <p:cNvPr id="7" name="Rounded Rectangle 6"/>
+          <p:cNvSpPr/>
+          <p:nvPr/>
+        </p:nvSpPr>
+        <p:spPr>
+          <a:xfrm>
+            <a:off x="3749039" y="1371600"/>
+            <a:ext cx="7955279" cy="777240"/>
           </a:xfrm>
           <a:prstGeom prst="roundRect">
             <a:avLst>
@@ -5976,7 +6829,7 @@
             </a:avLst>
           </a:prstGeom>
           <a:solidFill>
-            <a:srgbClr val="2563EB"/>
+            <a:srgbClr val="F3F4F6"/>
           </a:solidFill>
           <a:ln>
             <a:noFill/>
@@ -6000,79 +6853,29 @@
           <a:bodyPr rtlCol="0" anchor="ctr" wrap="square" lIns="137160" rIns="137160" tIns="73152" bIns="73152"/>
           <a:lstStyle/>
           <a:p>
-            <a:pPr algn="ctr"/>
-            <a:r>
-              <a:rPr sz="1800" b="1">
-                <a:solidFill>
-                  <a:srgbClr val="FFFFFF"/>
-                </a:solidFill>
-                <a:latin typeface="Noto Sans JP"/>
-              </a:rPr>
-              <a:t>大川</a:t>
-            </a:r>
-          </a:p>
-        </p:txBody>
-      </p:sp>
-      <p:sp>
-        <p:nvSpPr>
-          <p:cNvPr id="9" name="Rectangle 8"/>
-          <p:cNvSpPr/>
-          <p:nvPr/>
-        </p:nvSpPr>
-        <p:spPr>
-          <a:xfrm>
-            <a:off x="5641848" y="3154680"/>
-            <a:ext cx="914400" cy="365760"/>
-          </a:xfrm>
-          <a:prstGeom prst="rect">
-            <a:avLst/>
-          </a:prstGeom>
-          <a:noFill/>
-          <a:ln>
-            <a:noFill/>
-          </a:ln>
-        </p:spPr>
-        <p:style>
-          <a:lnRef idx="1">
-            <a:schemeClr val="accent1"/>
-          </a:lnRef>
-          <a:fillRef idx="3">
-            <a:schemeClr val="accent1"/>
-          </a:fillRef>
-          <a:effectRef idx="2">
-            <a:schemeClr val="accent1"/>
-          </a:effectRef>
-          <a:fontRef idx="minor">
-            <a:schemeClr val="lt1"/>
-          </a:fontRef>
-        </p:style>
-        <p:txBody>
-          <a:bodyPr rtlCol="0" anchor="ctr" wrap="square" lIns="137160" rIns="137160" tIns="73152" bIns="73152"/>
-          <a:lstStyle/>
-          <a:p>
-            <a:pPr algn="ctr"/>
-            <a:r>
-              <a:rPr sz="1800" b="0">
-                <a:solidFill>
-                  <a:srgbClr val="6B7280"/>
-                </a:solidFill>
-                <a:latin typeface="Noto Sans JP"/>
-              </a:rPr>
-              <a:t>↓</a:t>
-            </a:r>
-          </a:p>
-        </p:txBody>
-      </p:sp>
-      <p:sp>
-        <p:nvSpPr>
-          <p:cNvPr id="10" name="Rounded Rectangle 9"/>
-          <p:cNvSpPr/>
-          <p:nvPr/>
-        </p:nvSpPr>
-        <p:spPr>
-          <a:xfrm>
-            <a:off x="640080" y="3611880"/>
-            <a:ext cx="2103120" cy="1097280"/>
+            <a:pPr algn="l"/>
+            <a:r>
+              <a:rPr sz="1400" b="0">
+                <a:solidFill>
+                  <a:srgbClr val="1C3557"/>
+                </a:solidFill>
+                <a:latin typeface="Noto Sans JP"/>
+              </a:rPr>
+              <a:t>LP / SNS / 展示会 / LINE配信 / 事例記事</a:t>
+            </a:r>
+          </a:p>
+        </p:txBody>
+      </p:sp>
+      <p:sp>
+        <p:nvSpPr>
+          <p:cNvPr id="8" name="Rounded Rectangle 7"/>
+          <p:cNvSpPr/>
+          <p:nvPr/>
+        </p:nvSpPr>
+        <p:spPr>
+          <a:xfrm>
+            <a:off x="457200" y="2240280"/>
+            <a:ext cx="3200400" cy="777240"/>
           </a:xfrm>
           <a:prstGeom prst="roundRect">
             <a:avLst>
@@ -6106,39 +6909,27 @@
           <a:p>
             <a:pPr algn="ctr"/>
             <a:r>
-              <a:rPr sz="1400" b="1">
+              <a:rPr sz="1600" b="1">
                 <a:solidFill>
                   <a:srgbClr val="FFFFFF"/>
                 </a:solidFill>
                 <a:latin typeface="Noto Sans JP"/>
               </a:rPr>
-              <a:t>AI社員</a:t>
-            </a:r>
-          </a:p>
-          <a:p>
-            <a:pPr algn="ctr"/>
-            <a:r>
-              <a:rPr sz="1400" b="1">
-                <a:solidFill>
-                  <a:srgbClr val="FFFFFF"/>
-                </a:solidFill>
-                <a:latin typeface="Noto Sans JP"/>
-              </a:rPr>
-              <a:t>マーケ</a:t>
-            </a:r>
-          </a:p>
-        </p:txBody>
-      </p:sp>
-      <p:sp>
-        <p:nvSpPr>
-          <p:cNvPr id="11" name="Rounded Rectangle 10"/>
-          <p:cNvSpPr/>
-          <p:nvPr/>
-        </p:nvSpPr>
-        <p:spPr>
-          <a:xfrm>
-            <a:off x="2926080" y="3611880"/>
-            <a:ext cx="2103120" cy="1097280"/>
+              <a:t>営業AI</a:t>
+            </a:r>
+          </a:p>
+        </p:txBody>
+      </p:sp>
+      <p:sp>
+        <p:nvSpPr>
+          <p:cNvPr id="9" name="Rounded Rectangle 8"/>
+          <p:cNvSpPr/>
+          <p:nvPr/>
+        </p:nvSpPr>
+        <p:spPr>
+          <a:xfrm>
+            <a:off x="3749039" y="2240280"/>
+            <a:ext cx="7955279" cy="777240"/>
           </a:xfrm>
           <a:prstGeom prst="roundRect">
             <a:avLst>
@@ -6146,7 +6937,7 @@
             </a:avLst>
           </a:prstGeom>
           <a:solidFill>
-            <a:srgbClr val="2563EB"/>
+            <a:srgbClr val="F3F4F6"/>
           </a:solidFill>
           <a:ln>
             <a:noFill/>
@@ -6170,41 +6961,29 @@
           <a:bodyPr rtlCol="0" anchor="ctr" wrap="square" lIns="137160" rIns="137160" tIns="73152" bIns="73152"/>
           <a:lstStyle/>
           <a:p>
-            <a:pPr algn="ctr"/>
-            <a:r>
-              <a:rPr sz="1400" b="1">
-                <a:solidFill>
-                  <a:srgbClr val="FFFFFF"/>
-                </a:solidFill>
-                <a:latin typeface="Noto Sans JP"/>
-              </a:rPr>
-              <a:t>AI社員</a:t>
-            </a:r>
-          </a:p>
-          <a:p>
-            <a:pPr algn="ctr"/>
-            <a:r>
-              <a:rPr sz="1400" b="1">
-                <a:solidFill>
-                  <a:srgbClr val="FFFFFF"/>
-                </a:solidFill>
-                <a:latin typeface="Noto Sans JP"/>
-              </a:rPr>
-              <a:t>営業</a:t>
-            </a:r>
-          </a:p>
-        </p:txBody>
-      </p:sp>
-      <p:sp>
-        <p:nvSpPr>
-          <p:cNvPr id="12" name="Rounded Rectangle 11"/>
-          <p:cNvSpPr/>
-          <p:nvPr/>
-        </p:nvSpPr>
-        <p:spPr>
-          <a:xfrm>
-            <a:off x="5212080" y="3611880"/>
-            <a:ext cx="2103120" cy="1097280"/>
+            <a:pPr algn="l"/>
+            <a:r>
+              <a:rPr sz="1400" b="0">
+                <a:solidFill>
+                  <a:srgbClr val="1C3557"/>
+                </a:solidFill>
+                <a:latin typeface="Noto Sans JP"/>
+              </a:rPr>
+              <a:t>商談前準備 / 要件ヒアリング / 提案書 / フォロー</a:t>
+            </a:r>
+          </a:p>
+        </p:txBody>
+      </p:sp>
+      <p:sp>
+        <p:nvSpPr>
+          <p:cNvPr id="10" name="Rounded Rectangle 9"/>
+          <p:cNvSpPr/>
+          <p:nvPr/>
+        </p:nvSpPr>
+        <p:spPr>
+          <a:xfrm>
+            <a:off x="457200" y="3108960"/>
+            <a:ext cx="3200400" cy="777240"/>
           </a:xfrm>
           <a:prstGeom prst="roundRect">
             <a:avLst>
@@ -6238,39 +7017,27 @@
           <a:p>
             <a:pPr algn="ctr"/>
             <a:r>
-              <a:rPr sz="1400" b="1">
+              <a:rPr sz="1600" b="1">
                 <a:solidFill>
                   <a:srgbClr val="FFFFFF"/>
                 </a:solidFill>
                 <a:latin typeface="Noto Sans JP"/>
               </a:rPr>
-              <a:t>AI社員</a:t>
-            </a:r>
-          </a:p>
-          <a:p>
-            <a:pPr algn="ctr"/>
-            <a:r>
-              <a:rPr sz="1400" b="1">
-                <a:solidFill>
-                  <a:srgbClr val="FFFFFF"/>
-                </a:solidFill>
-                <a:latin typeface="Noto Sans JP"/>
-              </a:rPr>
-              <a:t>デリバリー</a:t>
-            </a:r>
-          </a:p>
-        </p:txBody>
-      </p:sp>
-      <p:sp>
-        <p:nvSpPr>
-          <p:cNvPr id="13" name="Rounded Rectangle 12"/>
-          <p:cNvSpPr/>
-          <p:nvPr/>
-        </p:nvSpPr>
-        <p:spPr>
-          <a:xfrm>
-            <a:off x="7498079" y="3611880"/>
-            <a:ext cx="2103120" cy="1097280"/>
+              <a:t>デリバリーAI</a:t>
+            </a:r>
+          </a:p>
+        </p:txBody>
+      </p:sp>
+      <p:sp>
+        <p:nvSpPr>
+          <p:cNvPr id="11" name="Rounded Rectangle 10"/>
+          <p:cNvSpPr/>
+          <p:nvPr/>
+        </p:nvSpPr>
+        <p:spPr>
+          <a:xfrm>
+            <a:off x="3749039" y="3108960"/>
+            <a:ext cx="7955279" cy="777240"/>
           </a:xfrm>
           <a:prstGeom prst="roundRect">
             <a:avLst>
@@ -6278,7 +7045,7 @@
             </a:avLst>
           </a:prstGeom>
           <a:solidFill>
-            <a:srgbClr val="2563EB"/>
+            <a:srgbClr val="F3F4F6"/>
           </a:solidFill>
           <a:ln>
             <a:noFill/>
@@ -6302,41 +7069,29 @@
           <a:bodyPr rtlCol="0" anchor="ctr" wrap="square" lIns="137160" rIns="137160" tIns="73152" bIns="73152"/>
           <a:lstStyle/>
           <a:p>
-            <a:pPr algn="ctr"/>
-            <a:r>
-              <a:rPr sz="1400" b="1">
-                <a:solidFill>
-                  <a:srgbClr val="FFFFFF"/>
-                </a:solidFill>
-                <a:latin typeface="Noto Sans JP"/>
-              </a:rPr>
-              <a:t>AI社員</a:t>
-            </a:r>
-          </a:p>
-          <a:p>
-            <a:pPr algn="ctr"/>
-            <a:r>
-              <a:rPr sz="1400" b="1">
-                <a:solidFill>
-                  <a:srgbClr val="FFFFFF"/>
-                </a:solidFill>
-                <a:latin typeface="Noto Sans JP"/>
-              </a:rPr>
-              <a:t>事務法務</a:t>
-            </a:r>
-          </a:p>
-        </p:txBody>
-      </p:sp>
-      <p:sp>
-        <p:nvSpPr>
-          <p:cNvPr id="14" name="Rounded Rectangle 13"/>
-          <p:cNvSpPr/>
-          <p:nvPr/>
-        </p:nvSpPr>
-        <p:spPr>
-          <a:xfrm>
-            <a:off x="9784080" y="3611880"/>
-            <a:ext cx="2103120" cy="1097280"/>
+            <a:pPr algn="l"/>
+            <a:r>
+              <a:rPr sz="1400" b="0">
+                <a:solidFill>
+                  <a:srgbClr val="1C3557"/>
+                </a:solidFill>
+                <a:latin typeface="Noto Sans JP"/>
+              </a:rPr>
+              <a:t>研修運営 / Dify・N8N・GAS構築 / CSコンサル / PM</a:t>
+            </a:r>
+          </a:p>
+        </p:txBody>
+      </p:sp>
+      <p:sp>
+        <p:nvSpPr>
+          <p:cNvPr id="12" name="Rounded Rectangle 11"/>
+          <p:cNvSpPr/>
+          <p:nvPr/>
+        </p:nvSpPr>
+        <p:spPr>
+          <a:xfrm>
+            <a:off x="457200" y="3977640"/>
+            <a:ext cx="3200400" cy="777240"/>
           </a:xfrm>
           <a:prstGeom prst="roundRect">
             <a:avLst>
@@ -6370,38 +7125,188 @@
           <a:p>
             <a:pPr algn="ctr"/>
             <a:r>
-              <a:rPr sz="1400" b="1">
+              <a:rPr sz="1600" b="1">
                 <a:solidFill>
                   <a:srgbClr val="FFFFFF"/>
                 </a:solidFill>
                 <a:latin typeface="Noto Sans JP"/>
               </a:rPr>
-              <a:t>AI社員</a:t>
-            </a:r>
-          </a:p>
+              <a:t>事務・法務AI</a:t>
+            </a:r>
+          </a:p>
+        </p:txBody>
+      </p:sp>
+      <p:sp>
+        <p:nvSpPr>
+          <p:cNvPr id="13" name="Rounded Rectangle 12"/>
+          <p:cNvSpPr/>
+          <p:nvPr/>
+        </p:nvSpPr>
+        <p:spPr>
+          <a:xfrm>
+            <a:off x="3749039" y="3977640"/>
+            <a:ext cx="7955279" cy="777240"/>
+          </a:xfrm>
+          <a:prstGeom prst="roundRect">
+            <a:avLst>
+              <a:gd name="adj" fmla="val 5000"/>
+            </a:avLst>
+          </a:prstGeom>
+          <a:solidFill>
+            <a:srgbClr val="F3F4F6"/>
+          </a:solidFill>
+          <a:ln>
+            <a:noFill/>
+          </a:ln>
+        </p:spPr>
+        <p:style>
+          <a:lnRef idx="1">
+            <a:schemeClr val="accent1"/>
+          </a:lnRef>
+          <a:fillRef idx="3">
+            <a:schemeClr val="accent1"/>
+          </a:fillRef>
+          <a:effectRef idx="2">
+            <a:schemeClr val="accent1"/>
+          </a:effectRef>
+          <a:fontRef idx="minor">
+            <a:schemeClr val="lt1"/>
+          </a:fontRef>
+        </p:style>
+        <p:txBody>
+          <a:bodyPr rtlCol="0" anchor="ctr" wrap="square" lIns="137160" rIns="137160" tIns="73152" bIns="73152"/>
+          <a:lstStyle/>
+          <a:p>
+            <a:pPr algn="l"/>
+            <a:r>
+              <a:rPr sz="1400" b="0">
+                <a:solidFill>
+                  <a:srgbClr val="1C3557"/>
+                </a:solidFill>
+                <a:latin typeface="Noto Sans JP"/>
+              </a:rPr>
+              <a:t>契約 / 請求 / PL / 利用規約</a:t>
+            </a:r>
+          </a:p>
+        </p:txBody>
+      </p:sp>
+      <p:sp>
+        <p:nvSpPr>
+          <p:cNvPr id="14" name="Rounded Rectangle 13"/>
+          <p:cNvSpPr/>
+          <p:nvPr/>
+        </p:nvSpPr>
+        <p:spPr>
+          <a:xfrm>
+            <a:off x="457200" y="4846320"/>
+            <a:ext cx="3200400" cy="777240"/>
+          </a:xfrm>
+          <a:prstGeom prst="roundRect">
+            <a:avLst>
+              <a:gd name="adj" fmla="val 5000"/>
+            </a:avLst>
+          </a:prstGeom>
+          <a:solidFill>
+            <a:srgbClr val="2563EB"/>
+          </a:solidFill>
+          <a:ln>
+            <a:noFill/>
+          </a:ln>
+        </p:spPr>
+        <p:style>
+          <a:lnRef idx="1">
+            <a:schemeClr val="accent1"/>
+          </a:lnRef>
+          <a:fillRef idx="3">
+            <a:schemeClr val="accent1"/>
+          </a:fillRef>
+          <a:effectRef idx="2">
+            <a:schemeClr val="accent1"/>
+          </a:effectRef>
+          <a:fontRef idx="minor">
+            <a:schemeClr val="lt1"/>
+          </a:fontRef>
+        </p:style>
+        <p:txBody>
+          <a:bodyPr rtlCol="0" anchor="ctr" wrap="square" lIns="137160" rIns="137160" tIns="73152" bIns="73152"/>
+          <a:lstStyle/>
           <a:p>
             <a:pPr algn="ctr"/>
             <a:r>
-              <a:rPr sz="1400" b="1">
+              <a:rPr sz="1600" b="1">
                 <a:solidFill>
                   <a:srgbClr val="FFFFFF"/>
                 </a:solidFill>
                 <a:latin typeface="Noto Sans JP"/>
               </a:rPr>
-              <a:t>戦略</a:t>
-            </a:r>
-          </a:p>
-        </p:txBody>
-      </p:sp>
-      <p:sp>
-        <p:nvSpPr>
-          <p:cNvPr id="15" name="Rectangle 14"/>
-          <p:cNvSpPr/>
-          <p:nvPr/>
-        </p:nvSpPr>
-        <p:spPr>
-          <a:xfrm>
-            <a:off x="457200" y="5029200"/>
+              <a:t>戦略・プロダクトAI</a:t>
+            </a:r>
+          </a:p>
+        </p:txBody>
+      </p:sp>
+      <p:sp>
+        <p:nvSpPr>
+          <p:cNvPr id="15" name="Rounded Rectangle 14"/>
+          <p:cNvSpPr/>
+          <p:nvPr/>
+        </p:nvSpPr>
+        <p:spPr>
+          <a:xfrm>
+            <a:off x="3749039" y="4846320"/>
+            <a:ext cx="7955279" cy="777240"/>
+          </a:xfrm>
+          <a:prstGeom prst="roundRect">
+            <a:avLst>
+              <a:gd name="adj" fmla="val 5000"/>
+            </a:avLst>
+          </a:prstGeom>
+          <a:solidFill>
+            <a:srgbClr val="F3F4F6"/>
+          </a:solidFill>
+          <a:ln>
+            <a:noFill/>
+          </a:ln>
+        </p:spPr>
+        <p:style>
+          <a:lnRef idx="1">
+            <a:schemeClr val="accent1"/>
+          </a:lnRef>
+          <a:fillRef idx="3">
+            <a:schemeClr val="accent1"/>
+          </a:fillRef>
+          <a:effectRef idx="2">
+            <a:schemeClr val="accent1"/>
+          </a:effectRef>
+          <a:fontRef idx="minor">
+            <a:schemeClr val="lt1"/>
+          </a:fontRef>
+        </p:style>
+        <p:txBody>
+          <a:bodyPr rtlCol="0" anchor="ctr" wrap="square" lIns="137160" rIns="137160" tIns="73152" bIns="73152"/>
+          <a:lstStyle/>
+          <a:p>
+            <a:pPr algn="l"/>
+            <a:r>
+              <a:rPr sz="1400" b="0">
+                <a:solidFill>
+                  <a:srgbClr val="1C3557"/>
+                </a:solidFill>
+                <a:latin typeface="Noto Sans JP"/>
+              </a:rPr>
+              <a:t>競合・市場・料金・データ分析(リサーチ・分析担当)</a:t>
+            </a:r>
+          </a:p>
+        </p:txBody>
+      </p:sp>
+      <p:sp>
+        <p:nvSpPr>
+          <p:cNvPr id="16" name="Rectangle 15"/>
+          <p:cNvSpPr/>
+          <p:nvPr/>
+        </p:nvSpPr>
+        <p:spPr>
+          <a:xfrm>
+            <a:off x="457200" y="5989320"/>
             <a:ext cx="11274552" cy="365760"/>
           </a:xfrm>
           <a:prstGeom prst="rect">
@@ -6432,63 +7337,13 @@
           <a:p>
             <a:pPr algn="ctr"/>
             <a:r>
-              <a:rPr sz="1200" b="0">
+              <a:rPr sz="1100" b="1">
                 <a:solidFill>
                   <a:srgbClr val="6B7280"/>
                 </a:solidFill>
                 <a:latin typeface="Noto Sans JP"/>
               </a:rPr>
-              <a:t>業務委託は別途活用、フルコミットはこの2人</a:t>
-            </a:r>
-          </a:p>
-        </p:txBody>
-      </p:sp>
-      <p:sp>
-        <p:nvSpPr>
-          <p:cNvPr id="16" name="Rectangle 15"/>
-          <p:cNvSpPr/>
-          <p:nvPr/>
-        </p:nvSpPr>
-        <p:spPr>
-          <a:xfrm>
-            <a:off x="457200" y="5577840"/>
-            <a:ext cx="11274552" cy="822960"/>
-          </a:xfrm>
-          <a:prstGeom prst="rect">
-            <a:avLst/>
-          </a:prstGeom>
-          <a:noFill/>
-          <a:ln>
-            <a:noFill/>
-          </a:ln>
-        </p:spPr>
-        <p:style>
-          <a:lnRef idx="1">
-            <a:schemeClr val="accent1"/>
-          </a:lnRef>
-          <a:fillRef idx="3">
-            <a:schemeClr val="accent1"/>
-          </a:fillRef>
-          <a:effectRef idx="2">
-            <a:schemeClr val="accent1"/>
-          </a:effectRef>
-          <a:fontRef idx="minor">
-            <a:schemeClr val="lt1"/>
-          </a:fontRef>
-        </p:style>
-        <p:txBody>
-          <a:bodyPr rtlCol="0" anchor="ctr" wrap="square" lIns="137160" rIns="137160" tIns="73152" bIns="73152"/>
-          <a:lstStyle/>
-          <a:p>
-            <a:pPr algn="ctr"/>
-            <a:r>
-              <a:rPr sz="2000" b="1">
-                <a:solidFill>
-                  <a:srgbClr val="2563EB"/>
-                </a:solidFill>
-                <a:latin typeface="Noto Sans JP"/>
-              </a:rPr>
-              <a:t>2人だけだから、AI社員5人で事業部を動かす</a:t>
+              <a:t>4人 = 各領域の戦略 + 実行  /  戦略・プロダクトAI = リサーチ・分析担当</a:t>
             </a:r>
           </a:p>
         </p:txBody>
@@ -6562,8 +7417,8 @@
         </p:nvSpPr>
         <p:spPr>
           <a:xfrm>
-            <a:off x="11247120" y="274320"/>
-            <a:ext cx="731520" cy="274320"/>
+            <a:off x="10972800" y="274320"/>
+            <a:ext cx="1005840" cy="274320"/>
           </a:xfrm>
           <a:prstGeom prst="rect">
             <a:avLst/>
@@ -6599,7 +7454,7 @@
                 </a:solidFill>
                 <a:latin typeface="Noto Sans JP"/>
               </a:rPr>
-              <a:t>6 / 9</a:t>
+              <a:t>6 / 11</a:t>
             </a:r>
           </a:p>
         </p:txBody>
@@ -6613,7 +7468,7 @@
         <p:spPr>
           <a:xfrm>
             <a:off x="457200" y="365760"/>
-            <a:ext cx="10972800" cy="640080"/>
+            <a:ext cx="10515600" cy="640080"/>
           </a:xfrm>
           <a:prstGeom prst="rect">
             <a:avLst/>
@@ -6649,7 +7504,7 @@
                 </a:solidFill>
                 <a:latin typeface="Noto Sans JP"/>
               </a:rPr>
-              <a:t>半期 ¥6,710,000、4案件すべてにAI社員が動いている</a:t>
+              <a:t>これが事業でやるべき仕事のすべて</a:t>
             </a:r>
           </a:p>
         </p:txBody>
@@ -6699,638 +7554,14 @@
       </p:sp>
       <p:sp>
         <p:nvSpPr>
-          <p:cNvPr id="6" name="Rectangle 5"/>
-          <p:cNvSpPr/>
-          <p:nvPr/>
-        </p:nvSpPr>
-        <p:spPr>
-          <a:xfrm>
-            <a:off x="457200" y="1554480"/>
-            <a:ext cx="4572000" cy="640080"/>
-          </a:xfrm>
-          <a:prstGeom prst="rect">
-            <a:avLst/>
-          </a:prstGeom>
-          <a:solidFill>
-            <a:srgbClr val="1C3557"/>
-          </a:solidFill>
-          <a:ln>
-            <a:noFill/>
-          </a:ln>
-        </p:spPr>
-        <p:style>
-          <a:lnRef idx="1">
-            <a:schemeClr val="accent1"/>
-          </a:lnRef>
-          <a:fillRef idx="3">
-            <a:schemeClr val="accent1"/>
-          </a:fillRef>
-          <a:effectRef idx="2">
-            <a:schemeClr val="accent1"/>
-          </a:effectRef>
-          <a:fontRef idx="minor">
-            <a:schemeClr val="lt1"/>
-          </a:fontRef>
-        </p:style>
-        <p:txBody>
-          <a:bodyPr rtlCol="0" anchor="ctr" wrap="square" lIns="137160" rIns="137160" tIns="73152" bIns="73152"/>
-          <a:lstStyle/>
-          <a:p>
-            <a:pPr algn="ctr"/>
-            <a:r>
-              <a:rPr sz="1400" b="1">
-                <a:solidFill>
-                  <a:srgbClr val="FFFFFF"/>
-                </a:solidFill>
-                <a:latin typeface="Noto Sans JP"/>
-              </a:rPr>
-              <a:t>案件</a:t>
-            </a:r>
-          </a:p>
-        </p:txBody>
-      </p:sp>
-      <p:sp>
-        <p:nvSpPr>
-          <p:cNvPr id="7" name="Rectangle 6"/>
-          <p:cNvSpPr/>
-          <p:nvPr/>
-        </p:nvSpPr>
-        <p:spPr>
-          <a:xfrm>
-            <a:off x="5074920" y="1554480"/>
-            <a:ext cx="2743200" cy="640080"/>
-          </a:xfrm>
-          <a:prstGeom prst="rect">
-            <a:avLst/>
-          </a:prstGeom>
-          <a:solidFill>
-            <a:srgbClr val="1C3557"/>
-          </a:solidFill>
-          <a:ln>
-            <a:noFill/>
-          </a:ln>
-        </p:spPr>
-        <p:style>
-          <a:lnRef idx="1">
-            <a:schemeClr val="accent1"/>
-          </a:lnRef>
-          <a:fillRef idx="3">
-            <a:schemeClr val="accent1"/>
-          </a:fillRef>
-          <a:effectRef idx="2">
-            <a:schemeClr val="accent1"/>
-          </a:effectRef>
-          <a:fontRef idx="minor">
-            <a:schemeClr val="lt1"/>
-          </a:fontRef>
-        </p:style>
-        <p:txBody>
-          <a:bodyPr rtlCol="0" anchor="ctr" wrap="square" lIns="137160" rIns="137160" tIns="73152" bIns="73152"/>
-          <a:lstStyle/>
-          <a:p>
-            <a:pPr algn="ctr"/>
-            <a:r>
-              <a:rPr sz="1400" b="1">
-                <a:solidFill>
-                  <a:srgbClr val="FFFFFF"/>
-                </a:solidFill>
-                <a:latin typeface="Noto Sans JP"/>
-              </a:rPr>
-              <a:t>売上 (税抜)</a:t>
-            </a:r>
-          </a:p>
-        </p:txBody>
-      </p:sp>
-      <p:sp>
-        <p:nvSpPr>
-          <p:cNvPr id="8" name="Rectangle 7"/>
-          <p:cNvSpPr/>
-          <p:nvPr/>
-        </p:nvSpPr>
-        <p:spPr>
-          <a:xfrm>
-            <a:off x="457200" y="2240280"/>
-            <a:ext cx="4572000" cy="640080"/>
-          </a:xfrm>
-          <a:prstGeom prst="rect">
-            <a:avLst/>
-          </a:prstGeom>
-          <a:solidFill>
-            <a:srgbClr val="F3F4F6"/>
-          </a:solidFill>
-          <a:ln>
-            <a:noFill/>
-          </a:ln>
-        </p:spPr>
-        <p:style>
-          <a:lnRef idx="1">
-            <a:schemeClr val="accent1"/>
-          </a:lnRef>
-          <a:fillRef idx="3">
-            <a:schemeClr val="accent1"/>
-          </a:fillRef>
-          <a:effectRef idx="2">
-            <a:schemeClr val="accent1"/>
-          </a:effectRef>
-          <a:fontRef idx="minor">
-            <a:schemeClr val="lt1"/>
-          </a:fontRef>
-        </p:style>
-        <p:txBody>
-          <a:bodyPr rtlCol="0" anchor="ctr" wrap="square" lIns="137160" rIns="137160" tIns="73152" bIns="73152"/>
-          <a:lstStyle/>
-          <a:p>
-            <a:pPr algn="l"/>
-            <a:r>
-              <a:rPr sz="1400" b="0">
-                <a:solidFill>
-                  <a:srgbClr val="1C3557"/>
-                </a:solidFill>
-                <a:latin typeface="Noto Sans JP"/>
-              </a:rPr>
-              <a:t>NTTネクシア</a:t>
-            </a:r>
-          </a:p>
-        </p:txBody>
-      </p:sp>
-      <p:sp>
-        <p:nvSpPr>
-          <p:cNvPr id="9" name="Rectangle 8"/>
-          <p:cNvSpPr/>
-          <p:nvPr/>
-        </p:nvSpPr>
-        <p:spPr>
-          <a:xfrm>
-            <a:off x="5074920" y="2240280"/>
-            <a:ext cx="2743200" cy="640080"/>
-          </a:xfrm>
-          <a:prstGeom prst="rect">
-            <a:avLst/>
-          </a:prstGeom>
-          <a:solidFill>
-            <a:srgbClr val="F3F4F6"/>
-          </a:solidFill>
-          <a:ln>
-            <a:noFill/>
-          </a:ln>
-        </p:spPr>
-        <p:style>
-          <a:lnRef idx="1">
-            <a:schemeClr val="accent1"/>
-          </a:lnRef>
-          <a:fillRef idx="3">
-            <a:schemeClr val="accent1"/>
-          </a:fillRef>
-          <a:effectRef idx="2">
-            <a:schemeClr val="accent1"/>
-          </a:effectRef>
-          <a:fontRef idx="minor">
-            <a:schemeClr val="lt1"/>
-          </a:fontRef>
-        </p:style>
-        <p:txBody>
-          <a:bodyPr rtlCol="0" anchor="ctr" wrap="square" lIns="137160" rIns="137160" tIns="73152" bIns="73152"/>
-          <a:lstStyle/>
-          <a:p>
-            <a:pPr algn="r"/>
-            <a:r>
-              <a:rPr sz="1400" b="0">
-                <a:solidFill>
-                  <a:srgbClr val="1C3557"/>
-                </a:solidFill>
-                <a:latin typeface="Noto Sans JP"/>
-              </a:rPr>
-              <a:t>¥5,000,000</a:t>
-            </a:r>
-          </a:p>
-        </p:txBody>
-      </p:sp>
-      <p:sp>
-        <p:nvSpPr>
-          <p:cNvPr id="10" name="Rectangle 9"/>
-          <p:cNvSpPr/>
-          <p:nvPr/>
-        </p:nvSpPr>
-        <p:spPr>
-          <a:xfrm>
-            <a:off x="457200" y="2926080"/>
-            <a:ext cx="4572000" cy="640080"/>
-          </a:xfrm>
-          <a:prstGeom prst="rect">
-            <a:avLst/>
-          </a:prstGeom>
-          <a:solidFill>
-            <a:srgbClr val="F3F4F6"/>
-          </a:solidFill>
-          <a:ln>
-            <a:noFill/>
-          </a:ln>
-        </p:spPr>
-        <p:style>
-          <a:lnRef idx="1">
-            <a:schemeClr val="accent1"/>
-          </a:lnRef>
-          <a:fillRef idx="3">
-            <a:schemeClr val="accent1"/>
-          </a:fillRef>
-          <a:effectRef idx="2">
-            <a:schemeClr val="accent1"/>
-          </a:effectRef>
-          <a:fontRef idx="minor">
-            <a:schemeClr val="lt1"/>
-          </a:fontRef>
-        </p:style>
-        <p:txBody>
-          <a:bodyPr rtlCol="0" anchor="ctr" wrap="square" lIns="137160" rIns="137160" tIns="73152" bIns="73152"/>
-          <a:lstStyle/>
-          <a:p>
-            <a:pPr algn="l"/>
-            <a:r>
-              <a:rPr sz="1400" b="0">
-                <a:solidFill>
-                  <a:srgbClr val="1C3557"/>
-                </a:solidFill>
-                <a:latin typeface="Noto Sans JP"/>
-              </a:rPr>
-              <a:t>中西製作所</a:t>
-            </a:r>
-          </a:p>
-        </p:txBody>
-      </p:sp>
-      <p:sp>
-        <p:nvSpPr>
-          <p:cNvPr id="11" name="Rectangle 10"/>
-          <p:cNvSpPr/>
-          <p:nvPr/>
-        </p:nvSpPr>
-        <p:spPr>
-          <a:xfrm>
-            <a:off x="5074920" y="2926080"/>
-            <a:ext cx="2743200" cy="640080"/>
-          </a:xfrm>
-          <a:prstGeom prst="rect">
-            <a:avLst/>
-          </a:prstGeom>
-          <a:solidFill>
-            <a:srgbClr val="F3F4F6"/>
-          </a:solidFill>
-          <a:ln>
-            <a:noFill/>
-          </a:ln>
-        </p:spPr>
-        <p:style>
-          <a:lnRef idx="1">
-            <a:schemeClr val="accent1"/>
-          </a:lnRef>
-          <a:fillRef idx="3">
-            <a:schemeClr val="accent1"/>
-          </a:fillRef>
-          <a:effectRef idx="2">
-            <a:schemeClr val="accent1"/>
-          </a:effectRef>
-          <a:fontRef idx="minor">
-            <a:schemeClr val="lt1"/>
-          </a:fontRef>
-        </p:style>
-        <p:txBody>
-          <a:bodyPr rtlCol="0" anchor="ctr" wrap="square" lIns="137160" rIns="137160" tIns="73152" bIns="73152"/>
-          <a:lstStyle/>
-          <a:p>
-            <a:pPr algn="r"/>
-            <a:r>
-              <a:rPr sz="1400" b="0">
-                <a:solidFill>
-                  <a:srgbClr val="1C3557"/>
-                </a:solidFill>
-                <a:latin typeface="Noto Sans JP"/>
-              </a:rPr>
-              <a:t>¥1,000,000</a:t>
-            </a:r>
-          </a:p>
-        </p:txBody>
-      </p:sp>
-      <p:sp>
-        <p:nvSpPr>
-          <p:cNvPr id="12" name="Rectangle 11"/>
-          <p:cNvSpPr/>
-          <p:nvPr/>
-        </p:nvSpPr>
-        <p:spPr>
-          <a:xfrm>
-            <a:off x="457200" y="3611880"/>
-            <a:ext cx="4572000" cy="640080"/>
-          </a:xfrm>
-          <a:prstGeom prst="rect">
-            <a:avLst/>
-          </a:prstGeom>
-          <a:solidFill>
-            <a:srgbClr val="F3F4F6"/>
-          </a:solidFill>
-          <a:ln>
-            <a:noFill/>
-          </a:ln>
-        </p:spPr>
-        <p:style>
-          <a:lnRef idx="1">
-            <a:schemeClr val="accent1"/>
-          </a:lnRef>
-          <a:fillRef idx="3">
-            <a:schemeClr val="accent1"/>
-          </a:fillRef>
-          <a:effectRef idx="2">
-            <a:schemeClr val="accent1"/>
-          </a:effectRef>
-          <a:fontRef idx="minor">
-            <a:schemeClr val="lt1"/>
-          </a:fontRef>
-        </p:style>
-        <p:txBody>
-          <a:bodyPr rtlCol="0" anchor="ctr" wrap="square" lIns="137160" rIns="137160" tIns="73152" bIns="73152"/>
-          <a:lstStyle/>
-          <a:p>
-            <a:pPr algn="l"/>
-            <a:r>
-              <a:rPr sz="1400" b="0">
-                <a:solidFill>
-                  <a:srgbClr val="1C3557"/>
-                </a:solidFill>
-                <a:latin typeface="Noto Sans JP"/>
-              </a:rPr>
-              <a:t>中部キリンビバレッジ</a:t>
-            </a:r>
-          </a:p>
-        </p:txBody>
-      </p:sp>
-      <p:sp>
-        <p:nvSpPr>
-          <p:cNvPr id="13" name="Rectangle 12"/>
-          <p:cNvSpPr/>
-          <p:nvPr/>
-        </p:nvSpPr>
-        <p:spPr>
-          <a:xfrm>
-            <a:off x="5074920" y="3611880"/>
-            <a:ext cx="2743200" cy="640080"/>
-          </a:xfrm>
-          <a:prstGeom prst="rect">
-            <a:avLst/>
-          </a:prstGeom>
-          <a:solidFill>
-            <a:srgbClr val="F3F4F6"/>
-          </a:solidFill>
-          <a:ln>
-            <a:noFill/>
-          </a:ln>
-        </p:spPr>
-        <p:style>
-          <a:lnRef idx="1">
-            <a:schemeClr val="accent1"/>
-          </a:lnRef>
-          <a:fillRef idx="3">
-            <a:schemeClr val="accent1"/>
-          </a:fillRef>
-          <a:effectRef idx="2">
-            <a:schemeClr val="accent1"/>
-          </a:effectRef>
-          <a:fontRef idx="minor">
-            <a:schemeClr val="lt1"/>
-          </a:fontRef>
-        </p:style>
-        <p:txBody>
-          <a:bodyPr rtlCol="0" anchor="ctr" wrap="square" lIns="137160" rIns="137160" tIns="73152" bIns="73152"/>
-          <a:lstStyle/>
-          <a:p>
-            <a:pPr algn="r"/>
-            <a:r>
-              <a:rPr sz="1400" b="0">
-                <a:solidFill>
-                  <a:srgbClr val="1C3557"/>
-                </a:solidFill>
-                <a:latin typeface="Noto Sans JP"/>
-              </a:rPr>
-              <a:t>¥450,000</a:t>
-            </a:r>
-          </a:p>
-        </p:txBody>
-      </p:sp>
-      <p:sp>
-        <p:nvSpPr>
-          <p:cNvPr id="14" name="Rectangle 13"/>
-          <p:cNvSpPr/>
-          <p:nvPr/>
-        </p:nvSpPr>
-        <p:spPr>
-          <a:xfrm>
-            <a:off x="457200" y="4297680"/>
-            <a:ext cx="4572000" cy="640080"/>
-          </a:xfrm>
-          <a:prstGeom prst="rect">
-            <a:avLst/>
-          </a:prstGeom>
-          <a:solidFill>
-            <a:srgbClr val="F3F4F6"/>
-          </a:solidFill>
-          <a:ln>
-            <a:noFill/>
-          </a:ln>
-        </p:spPr>
-        <p:style>
-          <a:lnRef idx="1">
-            <a:schemeClr val="accent1"/>
-          </a:lnRef>
-          <a:fillRef idx="3">
-            <a:schemeClr val="accent1"/>
-          </a:fillRef>
-          <a:effectRef idx="2">
-            <a:schemeClr val="accent1"/>
-          </a:effectRef>
-          <a:fontRef idx="minor">
-            <a:schemeClr val="lt1"/>
-          </a:fontRef>
-        </p:style>
-        <p:txBody>
-          <a:bodyPr rtlCol="0" anchor="ctr" wrap="square" lIns="137160" rIns="137160" tIns="73152" bIns="73152"/>
-          <a:lstStyle/>
-          <a:p>
-            <a:pPr algn="l"/>
-            <a:r>
-              <a:rPr sz="1400" b="0">
-                <a:solidFill>
-                  <a:srgbClr val="1C3557"/>
-                </a:solidFill>
-                <a:latin typeface="Noto Sans JP"/>
-              </a:rPr>
-              <a:t>ブロードリンク</a:t>
-            </a:r>
-          </a:p>
-        </p:txBody>
-      </p:sp>
-      <p:sp>
-        <p:nvSpPr>
-          <p:cNvPr id="15" name="Rectangle 14"/>
-          <p:cNvSpPr/>
-          <p:nvPr/>
-        </p:nvSpPr>
-        <p:spPr>
-          <a:xfrm>
-            <a:off x="5074920" y="4297680"/>
-            <a:ext cx="2743200" cy="640080"/>
-          </a:xfrm>
-          <a:prstGeom prst="rect">
-            <a:avLst/>
-          </a:prstGeom>
-          <a:solidFill>
-            <a:srgbClr val="F3F4F6"/>
-          </a:solidFill>
-          <a:ln>
-            <a:noFill/>
-          </a:ln>
-        </p:spPr>
-        <p:style>
-          <a:lnRef idx="1">
-            <a:schemeClr val="accent1"/>
-          </a:lnRef>
-          <a:fillRef idx="3">
-            <a:schemeClr val="accent1"/>
-          </a:fillRef>
-          <a:effectRef idx="2">
-            <a:schemeClr val="accent1"/>
-          </a:effectRef>
-          <a:fontRef idx="minor">
-            <a:schemeClr val="lt1"/>
-          </a:fontRef>
-        </p:style>
-        <p:txBody>
-          <a:bodyPr rtlCol="0" anchor="ctr" wrap="square" lIns="137160" rIns="137160" tIns="73152" bIns="73152"/>
-          <a:lstStyle/>
-          <a:p>
-            <a:pPr algn="r"/>
-            <a:r>
-              <a:rPr sz="1400" b="0">
-                <a:solidFill>
-                  <a:srgbClr val="1C3557"/>
-                </a:solidFill>
-                <a:latin typeface="Noto Sans JP"/>
-              </a:rPr>
-              <a:t>¥260,000</a:t>
-            </a:r>
-          </a:p>
-        </p:txBody>
-      </p:sp>
-      <p:sp>
-        <p:nvSpPr>
-          <p:cNvPr id="16" name="Rectangle 15"/>
-          <p:cNvSpPr/>
-          <p:nvPr/>
-        </p:nvSpPr>
-        <p:spPr>
-          <a:xfrm>
-            <a:off x="457200" y="4983480"/>
-            <a:ext cx="4572000" cy="640080"/>
-          </a:xfrm>
-          <a:prstGeom prst="rect">
-            <a:avLst/>
-          </a:prstGeom>
-          <a:solidFill>
-            <a:srgbClr val="2563EB"/>
-          </a:solidFill>
-          <a:ln>
-            <a:noFill/>
-          </a:ln>
-        </p:spPr>
-        <p:style>
-          <a:lnRef idx="1">
-            <a:schemeClr val="accent1"/>
-          </a:lnRef>
-          <a:fillRef idx="3">
-            <a:schemeClr val="accent1"/>
-          </a:fillRef>
-          <a:effectRef idx="2">
-            <a:schemeClr val="accent1"/>
-          </a:effectRef>
-          <a:fontRef idx="minor">
-            <a:schemeClr val="lt1"/>
-          </a:fontRef>
-        </p:style>
-        <p:txBody>
-          <a:bodyPr rtlCol="0" anchor="ctr" wrap="square" lIns="137160" rIns="137160" tIns="73152" bIns="73152"/>
-          <a:lstStyle/>
-          <a:p>
-            <a:pPr algn="l"/>
-            <a:r>
-              <a:rPr sz="1600" b="1">
-                <a:solidFill>
-                  <a:srgbClr val="FFFFFF"/>
-                </a:solidFill>
-                <a:latin typeface="Noto Sans JP"/>
-              </a:rPr>
-              <a:t>半期合計</a:t>
-            </a:r>
-          </a:p>
-        </p:txBody>
-      </p:sp>
-      <p:sp>
-        <p:nvSpPr>
-          <p:cNvPr id="17" name="Rectangle 16"/>
-          <p:cNvSpPr/>
-          <p:nvPr/>
-        </p:nvSpPr>
-        <p:spPr>
-          <a:xfrm>
-            <a:off x="5074920" y="4983480"/>
-            <a:ext cx="2743200" cy="640080"/>
-          </a:xfrm>
-          <a:prstGeom prst="rect">
-            <a:avLst/>
-          </a:prstGeom>
-          <a:solidFill>
-            <a:srgbClr val="2563EB"/>
-          </a:solidFill>
-          <a:ln>
-            <a:noFill/>
-          </a:ln>
-        </p:spPr>
-        <p:style>
-          <a:lnRef idx="1">
-            <a:schemeClr val="accent1"/>
-          </a:lnRef>
-          <a:fillRef idx="3">
-            <a:schemeClr val="accent1"/>
-          </a:fillRef>
-          <a:effectRef idx="2">
-            <a:schemeClr val="accent1"/>
-          </a:effectRef>
-          <a:fontRef idx="minor">
-            <a:schemeClr val="lt1"/>
-          </a:fontRef>
-        </p:style>
-        <p:txBody>
-          <a:bodyPr rtlCol="0" anchor="ctr" wrap="square" lIns="137160" rIns="137160" tIns="73152" bIns="73152"/>
-          <a:lstStyle/>
-          <a:p>
-            <a:pPr algn="r"/>
-            <a:r>
-              <a:rPr sz="1600" b="1">
-                <a:solidFill>
-                  <a:srgbClr val="FFFFFF"/>
-                </a:solidFill>
-                <a:latin typeface="Noto Sans JP"/>
-              </a:rPr>
-              <a:t>¥6,710,000</a:t>
-            </a:r>
-          </a:p>
-        </p:txBody>
-      </p:sp>
-      <p:sp>
-        <p:nvSpPr>
-          <p:cNvPr id="18" name="Rounded Rectangle 17"/>
-          <p:cNvSpPr/>
-          <p:nvPr/>
-        </p:nvSpPr>
-        <p:spPr>
-          <a:xfrm>
-            <a:off x="8229600" y="1554480"/>
-            <a:ext cx="3502152" cy="4160520"/>
+          <p:cNvPr id="6" name="Rounded Rectangle 5"/>
+          <p:cNvSpPr/>
+          <p:nvPr/>
+        </p:nvSpPr>
+        <p:spPr>
+          <a:xfrm>
+            <a:off x="457200" y="2011680"/>
+            <a:ext cx="2194560" cy="1280160"/>
           </a:xfrm>
           <a:prstGeom prst="roundRect">
             <a:avLst>
@@ -7364,97 +7595,553 @@
           <a:p>
             <a:pPr algn="ctr"/>
             <a:r>
-              <a:rPr sz="2000" b="1">
+              <a:rPr sz="1800" b="1">
                 <a:solidFill>
                   <a:srgbClr val="FFFFFF"/>
                 </a:solidFill>
                 <a:latin typeface="Noto Sans JP"/>
               </a:rPr>
-              <a:t>月換算</a:t>
-            </a:r>
-          </a:p>
+              <a:t>マーケ</a:t>
+            </a:r>
+          </a:p>
+        </p:txBody>
+      </p:sp>
+      <p:sp>
+        <p:nvSpPr>
+          <p:cNvPr id="7" name="Rounded Rectangle 6"/>
+          <p:cNvSpPr/>
+          <p:nvPr/>
+        </p:nvSpPr>
+        <p:spPr>
+          <a:xfrm>
+            <a:off x="457200" y="3337560"/>
+            <a:ext cx="2194560" cy="640080"/>
+          </a:xfrm>
+          <a:prstGeom prst="roundRect">
+            <a:avLst>
+              <a:gd name="adj" fmla="val 5000"/>
+            </a:avLst>
+          </a:prstGeom>
+          <a:solidFill>
+            <a:srgbClr val="F3F4F6"/>
+          </a:solidFill>
+          <a:ln>
+            <a:noFill/>
+          </a:ln>
+        </p:spPr>
+        <p:style>
+          <a:lnRef idx="1">
+            <a:schemeClr val="accent1"/>
+          </a:lnRef>
+          <a:fillRef idx="3">
+            <a:schemeClr val="accent1"/>
+          </a:fillRef>
+          <a:effectRef idx="2">
+            <a:schemeClr val="accent1"/>
+          </a:effectRef>
+          <a:fontRef idx="minor">
+            <a:schemeClr val="lt1"/>
+          </a:fontRef>
+        </p:style>
+        <p:txBody>
+          <a:bodyPr rtlCol="0" anchor="ctr" wrap="square" lIns="137160" rIns="137160" tIns="73152" bIns="73152"/>
+          <a:lstStyle/>
           <a:p>
             <a:pPr algn="ctr"/>
             <a:r>
-              <a:rPr sz="2000" b="1">
+              <a:rPr sz="1300" b="0">
+                <a:solidFill>
+                  <a:srgbClr val="1C3557"/>
+                </a:solidFill>
+                <a:latin typeface="Noto Sans JP"/>
+              </a:rPr>
+              <a:t>認知獲得</a:t>
+            </a:r>
+          </a:p>
+        </p:txBody>
+      </p:sp>
+      <p:sp>
+        <p:nvSpPr>
+          <p:cNvPr id="8" name="Rounded Rectangle 7"/>
+          <p:cNvSpPr/>
+          <p:nvPr/>
+        </p:nvSpPr>
+        <p:spPr>
+          <a:xfrm>
+            <a:off x="2715768" y="2011680"/>
+            <a:ext cx="2194560" cy="1280160"/>
+          </a:xfrm>
+          <a:prstGeom prst="roundRect">
+            <a:avLst>
+              <a:gd name="adj" fmla="val 5000"/>
+            </a:avLst>
+          </a:prstGeom>
+          <a:solidFill>
+            <a:srgbClr val="2563EB"/>
+          </a:solidFill>
+          <a:ln>
+            <a:noFill/>
+          </a:ln>
+        </p:spPr>
+        <p:style>
+          <a:lnRef idx="1">
+            <a:schemeClr val="accent1"/>
+          </a:lnRef>
+          <a:fillRef idx="3">
+            <a:schemeClr val="accent1"/>
+          </a:fillRef>
+          <a:effectRef idx="2">
+            <a:schemeClr val="accent1"/>
+          </a:effectRef>
+          <a:fontRef idx="minor">
+            <a:schemeClr val="lt1"/>
+          </a:fontRef>
+        </p:style>
+        <p:txBody>
+          <a:bodyPr rtlCol="0" anchor="ctr" wrap="square" lIns="137160" rIns="137160" tIns="73152" bIns="73152"/>
+          <a:lstStyle/>
+          <a:p>
+            <a:pPr algn="ctr"/>
+            <a:r>
+              <a:rPr sz="1800" b="1">
                 <a:solidFill>
                   <a:srgbClr val="FFFFFF"/>
                 </a:solidFill>
                 <a:latin typeface="Noto Sans JP"/>
               </a:rPr>
-              <a:t>¥464,000</a:t>
-            </a:r>
-          </a:p>
+              <a:t>営業</a:t>
+            </a:r>
+          </a:p>
+        </p:txBody>
+      </p:sp>
+      <p:sp>
+        <p:nvSpPr>
+          <p:cNvPr id="9" name="Rounded Rectangle 8"/>
+          <p:cNvSpPr/>
+          <p:nvPr/>
+        </p:nvSpPr>
+        <p:spPr>
+          <a:xfrm>
+            <a:off x="2715768" y="3337560"/>
+            <a:ext cx="2194560" cy="640080"/>
+          </a:xfrm>
+          <a:prstGeom prst="roundRect">
+            <a:avLst>
+              <a:gd name="adj" fmla="val 5000"/>
+            </a:avLst>
+          </a:prstGeom>
+          <a:solidFill>
+            <a:srgbClr val="F3F4F6"/>
+          </a:solidFill>
+          <a:ln>
+            <a:noFill/>
+          </a:ln>
+        </p:spPr>
+        <p:style>
+          <a:lnRef idx="1">
+            <a:schemeClr val="accent1"/>
+          </a:lnRef>
+          <a:fillRef idx="3">
+            <a:schemeClr val="accent1"/>
+          </a:fillRef>
+          <a:effectRef idx="2">
+            <a:schemeClr val="accent1"/>
+          </a:effectRef>
+          <a:fontRef idx="minor">
+            <a:schemeClr val="lt1"/>
+          </a:fontRef>
+        </p:style>
+        <p:txBody>
+          <a:bodyPr rtlCol="0" anchor="ctr" wrap="square" lIns="137160" rIns="137160" tIns="73152" bIns="73152"/>
+          <a:lstStyle/>
           <a:p>
             <a:pPr algn="ctr"/>
             <a:r>
-              <a:rPr sz="2000" b="1">
+              <a:rPr sz="1300" b="0">
+                <a:solidFill>
+                  <a:srgbClr val="1C3557"/>
+                </a:solidFill>
+                <a:latin typeface="Noto Sans JP"/>
+              </a:rPr>
+              <a:t>商談・受注</a:t>
+            </a:r>
+          </a:p>
+        </p:txBody>
+      </p:sp>
+      <p:sp>
+        <p:nvSpPr>
+          <p:cNvPr id="10" name="Rounded Rectangle 9"/>
+          <p:cNvSpPr/>
+          <p:nvPr/>
+        </p:nvSpPr>
+        <p:spPr>
+          <a:xfrm>
+            <a:off x="4974336" y="2011680"/>
+            <a:ext cx="2194560" cy="1280160"/>
+          </a:xfrm>
+          <a:prstGeom prst="roundRect">
+            <a:avLst>
+              <a:gd name="adj" fmla="val 5000"/>
+            </a:avLst>
+          </a:prstGeom>
+          <a:solidFill>
+            <a:srgbClr val="2563EB"/>
+          </a:solidFill>
+          <a:ln>
+            <a:noFill/>
+          </a:ln>
+        </p:spPr>
+        <p:style>
+          <a:lnRef idx="1">
+            <a:schemeClr val="accent1"/>
+          </a:lnRef>
+          <a:fillRef idx="3">
+            <a:schemeClr val="accent1"/>
+          </a:fillRef>
+          <a:effectRef idx="2">
+            <a:schemeClr val="accent1"/>
+          </a:effectRef>
+          <a:fontRef idx="minor">
+            <a:schemeClr val="lt1"/>
+          </a:fontRef>
+        </p:style>
+        <p:txBody>
+          <a:bodyPr rtlCol="0" anchor="ctr" wrap="square" lIns="137160" rIns="137160" tIns="73152" bIns="73152"/>
+          <a:lstStyle/>
+          <a:p>
+            <a:pPr algn="ctr"/>
+            <a:r>
+              <a:rPr sz="1800" b="1">
                 <a:solidFill>
                   <a:srgbClr val="FFFFFF"/>
                 </a:solidFill>
                 <a:latin typeface="Noto Sans JP"/>
               </a:rPr>
-              <a:t/>
-            </a:r>
-          </a:p>
+              <a:t>デリバリー</a:t>
+            </a:r>
+          </a:p>
+        </p:txBody>
+      </p:sp>
+      <p:sp>
+        <p:nvSpPr>
+          <p:cNvPr id="11" name="Rounded Rectangle 10"/>
+          <p:cNvSpPr/>
+          <p:nvPr/>
+        </p:nvSpPr>
+        <p:spPr>
+          <a:xfrm>
+            <a:off x="4974336" y="3337560"/>
+            <a:ext cx="2194560" cy="640080"/>
+          </a:xfrm>
+          <a:prstGeom prst="roundRect">
+            <a:avLst>
+              <a:gd name="adj" fmla="val 5000"/>
+            </a:avLst>
+          </a:prstGeom>
+          <a:solidFill>
+            <a:srgbClr val="F3F4F6"/>
+          </a:solidFill>
+          <a:ln>
+            <a:noFill/>
+          </a:ln>
+        </p:spPr>
+        <p:style>
+          <a:lnRef idx="1">
+            <a:schemeClr val="accent1"/>
+          </a:lnRef>
+          <a:fillRef idx="3">
+            <a:schemeClr val="accent1"/>
+          </a:fillRef>
+          <a:effectRef idx="2">
+            <a:schemeClr val="accent1"/>
+          </a:effectRef>
+          <a:fontRef idx="minor">
+            <a:schemeClr val="lt1"/>
+          </a:fontRef>
+        </p:style>
+        <p:txBody>
+          <a:bodyPr rtlCol="0" anchor="ctr" wrap="square" lIns="137160" rIns="137160" tIns="73152" bIns="73152"/>
+          <a:lstStyle/>
           <a:p>
             <a:pPr algn="ctr"/>
             <a:r>
-              <a:rPr sz="2000" b="1">
+              <a:rPr sz="1300" b="0">
+                <a:solidFill>
+                  <a:srgbClr val="1C3557"/>
+                </a:solidFill>
+                <a:latin typeface="Noto Sans JP"/>
+              </a:rPr>
+              <a:t>納品</a:t>
+            </a:r>
+          </a:p>
+        </p:txBody>
+      </p:sp>
+      <p:sp>
+        <p:nvSpPr>
+          <p:cNvPr id="12" name="Rounded Rectangle 11"/>
+          <p:cNvSpPr/>
+          <p:nvPr/>
+        </p:nvSpPr>
+        <p:spPr>
+          <a:xfrm>
+            <a:off x="7232903" y="2011680"/>
+            <a:ext cx="2194560" cy="1280160"/>
+          </a:xfrm>
+          <a:prstGeom prst="roundRect">
+            <a:avLst>
+              <a:gd name="adj" fmla="val 5000"/>
+            </a:avLst>
+          </a:prstGeom>
+          <a:solidFill>
+            <a:srgbClr val="2563EB"/>
+          </a:solidFill>
+          <a:ln>
+            <a:noFill/>
+          </a:ln>
+        </p:spPr>
+        <p:style>
+          <a:lnRef idx="1">
+            <a:schemeClr val="accent1"/>
+          </a:lnRef>
+          <a:fillRef idx="3">
+            <a:schemeClr val="accent1"/>
+          </a:fillRef>
+          <a:effectRef idx="2">
+            <a:schemeClr val="accent1"/>
+          </a:effectRef>
+          <a:fontRef idx="minor">
+            <a:schemeClr val="lt1"/>
+          </a:fontRef>
+        </p:style>
+        <p:txBody>
+          <a:bodyPr rtlCol="0" anchor="ctr" wrap="square" lIns="137160" rIns="137160" tIns="73152" bIns="73152"/>
+          <a:lstStyle/>
+          <a:p>
+            <a:pPr algn="ctr"/>
+            <a:r>
+              <a:rPr sz="1800" b="1">
                 <a:solidFill>
                   <a:srgbClr val="FFFFFF"/>
                 </a:solidFill>
                 <a:latin typeface="Noto Sans JP"/>
               </a:rPr>
-              <a:t>=</a:t>
-            </a:r>
-          </a:p>
+              <a:t>事務・法務</a:t>
+            </a:r>
+          </a:p>
+        </p:txBody>
+      </p:sp>
+      <p:sp>
+        <p:nvSpPr>
+          <p:cNvPr id="13" name="Rounded Rectangle 12"/>
+          <p:cNvSpPr/>
+          <p:nvPr/>
+        </p:nvSpPr>
+        <p:spPr>
+          <a:xfrm>
+            <a:off x="7232903" y="3337560"/>
+            <a:ext cx="2194560" cy="640080"/>
+          </a:xfrm>
+          <a:prstGeom prst="roundRect">
+            <a:avLst>
+              <a:gd name="adj" fmla="val 5000"/>
+            </a:avLst>
+          </a:prstGeom>
+          <a:solidFill>
+            <a:srgbClr val="F3F4F6"/>
+          </a:solidFill>
+          <a:ln>
+            <a:noFill/>
+          </a:ln>
+        </p:spPr>
+        <p:style>
+          <a:lnRef idx="1">
+            <a:schemeClr val="accent1"/>
+          </a:lnRef>
+          <a:fillRef idx="3">
+            <a:schemeClr val="accent1"/>
+          </a:fillRef>
+          <a:effectRef idx="2">
+            <a:schemeClr val="accent1"/>
+          </a:effectRef>
+          <a:fontRef idx="minor">
+            <a:schemeClr val="lt1"/>
+          </a:fontRef>
+        </p:style>
+        <p:txBody>
+          <a:bodyPr rtlCol="0" anchor="ctr" wrap="square" lIns="137160" rIns="137160" tIns="73152" bIns="73152"/>
+          <a:lstStyle/>
           <a:p>
             <a:pPr algn="ctr"/>
             <a:r>
-              <a:rPr sz="2000" b="1">
+              <a:rPr sz="1300" b="0">
+                <a:solidFill>
+                  <a:srgbClr val="1C3557"/>
+                </a:solidFill>
+                <a:latin typeface="Noto Sans JP"/>
+              </a:rPr>
+              <a:t>管理・記録</a:t>
+            </a:r>
+          </a:p>
+        </p:txBody>
+      </p:sp>
+      <p:sp>
+        <p:nvSpPr>
+          <p:cNvPr id="14" name="Rounded Rectangle 13"/>
+          <p:cNvSpPr/>
+          <p:nvPr/>
+        </p:nvSpPr>
+        <p:spPr>
+          <a:xfrm>
+            <a:off x="9491472" y="2011680"/>
+            <a:ext cx="2194560" cy="1280160"/>
+          </a:xfrm>
+          <a:prstGeom prst="roundRect">
+            <a:avLst>
+              <a:gd name="adj" fmla="val 5000"/>
+            </a:avLst>
+          </a:prstGeom>
+          <a:solidFill>
+            <a:srgbClr val="2563EB"/>
+          </a:solidFill>
+          <a:ln>
+            <a:noFill/>
+          </a:ln>
+        </p:spPr>
+        <p:style>
+          <a:lnRef idx="1">
+            <a:schemeClr val="accent1"/>
+          </a:lnRef>
+          <a:fillRef idx="3">
+            <a:schemeClr val="accent1"/>
+          </a:fillRef>
+          <a:effectRef idx="2">
+            <a:schemeClr val="accent1"/>
+          </a:effectRef>
+          <a:fontRef idx="minor">
+            <a:schemeClr val="lt1"/>
+          </a:fontRef>
+        </p:style>
+        <p:txBody>
+          <a:bodyPr rtlCol="0" anchor="ctr" wrap="square" lIns="137160" rIns="137160" tIns="73152" bIns="73152"/>
+          <a:lstStyle/>
+          <a:p>
+            <a:pPr algn="ctr"/>
+            <a:r>
+              <a:rPr sz="1800" b="1">
                 <a:solidFill>
                   <a:srgbClr val="FFFFFF"/>
                 </a:solidFill>
                 <a:latin typeface="Noto Sans JP"/>
               </a:rPr>
-              <a:t/>
-            </a:r>
-          </a:p>
+              <a:t>戦略</a:t>
+            </a:r>
+          </a:p>
+        </p:txBody>
+      </p:sp>
+      <p:sp>
+        <p:nvSpPr>
+          <p:cNvPr id="15" name="Rounded Rectangle 14"/>
+          <p:cNvSpPr/>
+          <p:nvPr/>
+        </p:nvSpPr>
+        <p:spPr>
+          <a:xfrm>
+            <a:off x="9491472" y="3337560"/>
+            <a:ext cx="2194560" cy="640080"/>
+          </a:xfrm>
+          <a:prstGeom prst="roundRect">
+            <a:avLst>
+              <a:gd name="adj" fmla="val 5000"/>
+            </a:avLst>
+          </a:prstGeom>
+          <a:solidFill>
+            <a:srgbClr val="F3F4F6"/>
+          </a:solidFill>
+          <a:ln>
+            <a:noFill/>
+          </a:ln>
+        </p:spPr>
+        <p:style>
+          <a:lnRef idx="1">
+            <a:schemeClr val="accent1"/>
+          </a:lnRef>
+          <a:fillRef idx="3">
+            <a:schemeClr val="accent1"/>
+          </a:fillRef>
+          <a:effectRef idx="2">
+            <a:schemeClr val="accent1"/>
+          </a:effectRef>
+          <a:fontRef idx="minor">
+            <a:schemeClr val="lt1"/>
+          </a:fontRef>
+        </p:style>
+        <p:txBody>
+          <a:bodyPr rtlCol="0" anchor="ctr" wrap="square" lIns="137160" rIns="137160" tIns="73152" bIns="73152"/>
+          <a:lstStyle/>
           <a:p>
             <a:pPr algn="ctr"/>
             <a:r>
-              <a:rPr sz="2000" b="1">
-                <a:solidFill>
-                  <a:srgbClr val="FFFFFF"/>
-                </a:solidFill>
-                <a:latin typeface="Noto Sans JP"/>
-              </a:rPr>
-              <a:t>AI社員</a:t>
-            </a:r>
-          </a:p>
+              <a:rPr sz="1300" b="0">
+                <a:solidFill>
+                  <a:srgbClr val="1C3557"/>
+                </a:solidFill>
+                <a:latin typeface="Noto Sans JP"/>
+              </a:rPr>
+              <a:t>リサーチ・分析</a:t>
+            </a:r>
+          </a:p>
+        </p:txBody>
+      </p:sp>
+      <p:sp>
+        <p:nvSpPr>
+          <p:cNvPr id="16" name="Rounded Rectangle 15"/>
+          <p:cNvSpPr/>
+          <p:nvPr/>
+        </p:nvSpPr>
+        <p:spPr>
+          <a:xfrm>
+            <a:off x="457200" y="4572000"/>
+            <a:ext cx="11274552" cy="1280160"/>
+          </a:xfrm>
+          <a:prstGeom prst="roundRect">
+            <a:avLst>
+              <a:gd name="adj" fmla="val 5000"/>
+            </a:avLst>
+          </a:prstGeom>
+          <a:solidFill>
+            <a:srgbClr val="DBEAFE"/>
+          </a:solidFill>
+          <a:ln>
+            <a:noFill/>
+          </a:ln>
+        </p:spPr>
+        <p:style>
+          <a:lnRef idx="1">
+            <a:schemeClr val="accent1"/>
+          </a:lnRef>
+          <a:fillRef idx="3">
+            <a:schemeClr val="accent1"/>
+          </a:fillRef>
+          <a:effectRef idx="2">
+            <a:schemeClr val="accent1"/>
+          </a:effectRef>
+          <a:fontRef idx="minor">
+            <a:schemeClr val="lt1"/>
+          </a:fontRef>
+        </p:style>
+        <p:txBody>
+          <a:bodyPr rtlCol="0" anchor="ctr" wrap="square" lIns="137160" rIns="137160" tIns="73152" bIns="73152"/>
+          <a:lstStyle/>
           <a:p>
             <a:pPr algn="ctr"/>
             <a:r>
-              <a:rPr sz="2000" b="1">
-                <a:solidFill>
-                  <a:srgbClr val="FFFFFF"/>
-                </a:solidFill>
-                <a:latin typeface="Noto Sans JP"/>
-              </a:rPr>
-              <a:t>1.3人分</a:t>
-            </a:r>
-          </a:p>
-          <a:p>
-            <a:pPr algn="ctr"/>
-            <a:r>
-              <a:rPr sz="2000" b="1">
-                <a:solidFill>
-                  <a:srgbClr val="FFFFFF"/>
-                </a:solidFill>
-                <a:latin typeface="Noto Sans JP"/>
-              </a:rPr>
-              <a:t>稼働中</a:t>
+              <a:rPr sz="2200" b="1">
+                <a:solidFill>
+                  <a:srgbClr val="2563EB"/>
+                </a:solidFill>
+                <a:latin typeface="Noto Sans JP"/>
+              </a:rPr>
+              <a:t>マーケから戦略まで、事業の全部の仕事を 5人 で網羅している</a:t>
             </a:r>
           </a:p>
         </p:txBody>
@@ -7528,8 +8215,8 @@
         </p:nvSpPr>
         <p:spPr>
           <a:xfrm>
-            <a:off x="11247120" y="274320"/>
-            <a:ext cx="731520" cy="274320"/>
+            <a:off x="10972800" y="274320"/>
+            <a:ext cx="1005840" cy="274320"/>
           </a:xfrm>
           <a:prstGeom prst="rect">
             <a:avLst/>
@@ -7565,7 +8252,7 @@
                 </a:solidFill>
                 <a:latin typeface="Noto Sans JP"/>
               </a:rPr>
-              <a:t>7 / 9</a:t>
+              <a:t>7 / 11</a:t>
             </a:r>
           </a:p>
         </p:txBody>
@@ -7579,7 +8266,7 @@
         <p:spPr>
           <a:xfrm>
             <a:off x="457200" y="365760"/>
-            <a:ext cx="10972800" cy="640080"/>
+            <a:ext cx="10515600" cy="640080"/>
           </a:xfrm>
           <a:prstGeom prst="rect">
             <a:avLst/>
@@ -7615,7 +8302,7 @@
                 </a:solidFill>
                 <a:latin typeface="Noto Sans JP"/>
               </a:rPr>
-              <a:t>上流業務でAI社員を使い倒す</a:t>
+              <a:t>AI社員をこう使っているイメージ</a:t>
             </a:r>
           </a:p>
         </p:txBody>
@@ -8068,13 +8755,13 @@
           <a:p>
             <a:pPr algn="ctr"/>
             <a:r>
-              <a:rPr sz="1400" b="1">
+              <a:rPr sz="1600" b="1">
                 <a:solidFill>
                   <a:srgbClr val="FFFFFF"/>
                 </a:solidFill>
                 <a:latin typeface="Noto Sans JP"/>
               </a:rPr>
-              <a:t>Kawaru Team / Coach / BPO のデリバリー</a:t>
+              <a:t>Kawaru Team / Coach / BPO</a:t>
             </a:r>
           </a:p>
         </p:txBody>
@@ -8400,7 +9087,7 @@
         <p:spPr>
           <a:xfrm>
             <a:off x="457200" y="5029200"/>
-            <a:ext cx="11274552" cy="1005840"/>
+            <a:ext cx="11274552" cy="914400"/>
           </a:xfrm>
           <a:prstGeom prst="roundRect">
             <a:avLst>
@@ -8440,7 +9127,7 @@
                 </a:solidFill>
                 <a:latin typeface="Noto Sans JP"/>
               </a:rPr>
-              <a:t>時給 3,000〜5,000円帯の上流領域で AI を使い倒している</a:t>
+              <a:t>いろんな領域で AI社員を使っている</a:t>
             </a:r>
           </a:p>
         </p:txBody>
@@ -8514,8 +9201,8 @@
         </p:nvSpPr>
         <p:spPr>
           <a:xfrm>
-            <a:off x="11247120" y="274320"/>
-            <a:ext cx="731520" cy="274320"/>
+            <a:off x="10972800" y="274320"/>
+            <a:ext cx="1005840" cy="274320"/>
           </a:xfrm>
           <a:prstGeom prst="rect">
             <a:avLst/>
@@ -8551,7 +9238,7 @@
                 </a:solidFill>
                 <a:latin typeface="Noto Sans JP"/>
               </a:rPr>
-              <a:t>8 / 9</a:t>
+              <a:t>8 / 11</a:t>
             </a:r>
           </a:p>
         </p:txBody>
@@ -8565,7 +9252,7 @@
         <p:spPr>
           <a:xfrm>
             <a:off x="457200" y="365760"/>
-            <a:ext cx="10972800" cy="640080"/>
+            <a:ext cx="10515600" cy="640080"/>
           </a:xfrm>
           <a:prstGeom prst="rect">
             <a:avLst/>
@@ -8601,7 +9288,7 @@
                 </a:solidFill>
                 <a:latin typeface="Noto Sans JP"/>
               </a:rPr>
-              <a:t>6月末2人分 → 9月末5人分、Agent Teams も並走で構築</a:t>
+              <a:t>半期 ¥6,710,000、4案件すべてにAI社員が動いている</a:t>
             </a:r>
           </a:p>
         </p:txBody>
@@ -8657,8 +9344,8 @@
         </p:nvSpPr>
         <p:spPr>
           <a:xfrm>
-            <a:off x="457200" y="1371600"/>
-            <a:ext cx="2286000" cy="640080"/>
+            <a:off x="457200" y="1554480"/>
+            <a:ext cx="4572000" cy="640080"/>
           </a:xfrm>
           <a:prstGeom prst="rect">
             <a:avLst/>
@@ -8696,7 +9383,7 @@
                 </a:solidFill>
                 <a:latin typeface="Noto Sans JP"/>
               </a:rPr>
-              <a:t>月</a:t>
+              <a:t>案件</a:t>
             </a:r>
           </a:p>
         </p:txBody>
@@ -8709,8 +9396,8 @@
         </p:nvSpPr>
         <p:spPr>
           <a:xfrm>
-            <a:off x="2788920" y="1371600"/>
-            <a:ext cx="1828800" cy="640080"/>
+            <a:off x="5074920" y="1554480"/>
+            <a:ext cx="2743200" cy="640080"/>
           </a:xfrm>
           <a:prstGeom prst="rect">
             <a:avLst/>
@@ -8748,7 +9435,7 @@
                 </a:solidFill>
                 <a:latin typeface="Noto Sans JP"/>
               </a:rPr>
-              <a:t>達成水準</a:t>
+              <a:t>売上 (税抜)</a:t>
             </a:r>
           </a:p>
         </p:txBody>
@@ -8761,14 +9448,14 @@
         </p:nvSpPr>
         <p:spPr>
           <a:xfrm>
-            <a:off x="4663440" y="1371600"/>
-            <a:ext cx="7040880" cy="640080"/>
+            <a:off x="457200" y="2240280"/>
+            <a:ext cx="4572000" cy="640080"/>
           </a:xfrm>
           <a:prstGeom prst="rect">
             <a:avLst/>
           </a:prstGeom>
           <a:solidFill>
-            <a:srgbClr val="1C3557"/>
+            <a:srgbClr val="F3F4F6"/>
           </a:solidFill>
           <a:ln>
             <a:noFill/>
@@ -8792,15 +9479,15 @@
           <a:bodyPr rtlCol="0" anchor="ctr" wrap="square" lIns="137160" rIns="137160" tIns="73152" bIns="73152"/>
           <a:lstStyle/>
           <a:p>
-            <a:pPr algn="ctr"/>
-            <a:r>
-              <a:rPr sz="1400" b="1">
-                <a:solidFill>
-                  <a:srgbClr val="FFFFFF"/>
-                </a:solidFill>
-                <a:latin typeface="Noto Sans JP"/>
-              </a:rPr>
-              <a:t>動き</a:t>
+            <a:pPr algn="l"/>
+            <a:r>
+              <a:rPr sz="1400" b="0">
+                <a:solidFill>
+                  <a:srgbClr val="1C3557"/>
+                </a:solidFill>
+                <a:latin typeface="Noto Sans JP"/>
+              </a:rPr>
+              <a:t>NTTネクシア</a:t>
             </a:r>
           </a:p>
         </p:txBody>
@@ -8813,8 +9500,8 @@
         </p:nvSpPr>
         <p:spPr>
           <a:xfrm>
-            <a:off x="457200" y="2103120"/>
-            <a:ext cx="2286000" cy="640080"/>
+            <a:off x="5074920" y="2240280"/>
+            <a:ext cx="2743200" cy="640080"/>
           </a:xfrm>
           <a:prstGeom prst="rect">
             <a:avLst/>
@@ -8844,15 +9531,15 @@
           <a:bodyPr rtlCol="0" anchor="ctr" wrap="square" lIns="137160" rIns="137160" tIns="73152" bIns="73152"/>
           <a:lstStyle/>
           <a:p>
-            <a:pPr algn="ctr"/>
-            <a:r>
-              <a:rPr sz="1300" b="0">
+            <a:pPr algn="r"/>
+            <a:r>
+              <a:rPr sz="1400" b="0">
                 <a:solidFill>
                   <a:srgbClr val="1C3557"/>
                 </a:solidFill>
                 <a:latin typeface="Noto Sans JP"/>
               </a:rPr>
-              <a:t>4月 (現在)</a:t>
+              <a:t>¥5,000,000</a:t>
             </a:r>
           </a:p>
         </p:txBody>
@@ -8865,8 +9552,8 @@
         </p:nvSpPr>
         <p:spPr>
           <a:xfrm>
-            <a:off x="2788920" y="2103120"/>
-            <a:ext cx="1828800" cy="640080"/>
+            <a:off x="457200" y="2926080"/>
+            <a:ext cx="4572000" cy="640080"/>
           </a:xfrm>
           <a:prstGeom prst="rect">
             <a:avLst/>
@@ -8896,15 +9583,15 @@
           <a:bodyPr rtlCol="0" anchor="ctr" wrap="square" lIns="137160" rIns="137160" tIns="73152" bIns="73152"/>
           <a:lstStyle/>
           <a:p>
-            <a:pPr algn="ctr"/>
-            <a:r>
-              <a:rPr sz="1600" b="1">
+            <a:pPr algn="l"/>
+            <a:r>
+              <a:rPr sz="1400" b="0">
                 <a:solidFill>
                   <a:srgbClr val="1C3557"/>
                 </a:solidFill>
                 <a:latin typeface="Noto Sans JP"/>
               </a:rPr>
-              <a:t>1.3人分</a:t>
+              <a:t>中西製作所</a:t>
             </a:r>
           </a:p>
         </p:txBody>
@@ -8917,8 +9604,8 @@
         </p:nvSpPr>
         <p:spPr>
           <a:xfrm>
-            <a:off x="4663440" y="2103120"/>
-            <a:ext cx="7040880" cy="640080"/>
+            <a:off x="5074920" y="2926080"/>
+            <a:ext cx="2743200" cy="640080"/>
           </a:xfrm>
           <a:prstGeom prst="rect">
             <a:avLst/>
@@ -8948,15 +9635,15 @@
           <a:bodyPr rtlCol="0" anchor="ctr" wrap="square" lIns="137160" rIns="137160" tIns="73152" bIns="73152"/>
           <a:lstStyle/>
           <a:p>
-            <a:pPr algn="l"/>
-            <a:r>
-              <a:rPr sz="1200" b="0">
+            <a:pPr algn="r"/>
+            <a:r>
+              <a:rPr sz="1400" b="0">
                 <a:solidFill>
                   <a:srgbClr val="1C3557"/>
                 </a:solidFill>
                 <a:latin typeface="Noto Sans JP"/>
               </a:rPr>
-              <a:t>デリバリーAI + 戦略AI が稼働中</a:t>
+              <a:t>¥1,000,000</a:t>
             </a:r>
           </a:p>
         </p:txBody>
@@ -8969,14 +9656,14 @@
         </p:nvSpPr>
         <p:spPr>
           <a:xfrm>
-            <a:off x="457200" y="2834639"/>
-            <a:ext cx="2286000" cy="640080"/>
+            <a:off x="457200" y="3611880"/>
+            <a:ext cx="4572000" cy="640080"/>
           </a:xfrm>
           <a:prstGeom prst="rect">
             <a:avLst/>
           </a:prstGeom>
           <a:solidFill>
-            <a:srgbClr val="2563EB"/>
+            <a:srgbClr val="F3F4F6"/>
           </a:solidFill>
           <a:ln>
             <a:noFill/>
@@ -9000,15 +9687,15 @@
           <a:bodyPr rtlCol="0" anchor="ctr" wrap="square" lIns="137160" rIns="137160" tIns="73152" bIns="73152"/>
           <a:lstStyle/>
           <a:p>
-            <a:pPr algn="ctr"/>
-            <a:r>
-              <a:rPr sz="1300" b="1">
-                <a:solidFill>
-                  <a:srgbClr val="FFFFFF"/>
-                </a:solidFill>
-                <a:latin typeface="Noto Sans JP"/>
-              </a:rPr>
-              <a:t>6月末 (中間発表)</a:t>
+            <a:pPr algn="l"/>
+            <a:r>
+              <a:rPr sz="1400" b="0">
+                <a:solidFill>
+                  <a:srgbClr val="1C3557"/>
+                </a:solidFill>
+                <a:latin typeface="Noto Sans JP"/>
+              </a:rPr>
+              <a:t>中部キリンビバレッジ</a:t>
             </a:r>
           </a:p>
         </p:txBody>
@@ -9021,14 +9708,14 @@
         </p:nvSpPr>
         <p:spPr>
           <a:xfrm>
-            <a:off x="2788920" y="2834639"/>
-            <a:ext cx="1828800" cy="640080"/>
+            <a:off x="5074920" y="3611880"/>
+            <a:ext cx="2743200" cy="640080"/>
           </a:xfrm>
           <a:prstGeom prst="rect">
             <a:avLst/>
           </a:prstGeom>
           <a:solidFill>
-            <a:srgbClr val="2563EB"/>
+            <a:srgbClr val="F3F4F6"/>
           </a:solidFill>
           <a:ln>
             <a:noFill/>
@@ -9052,15 +9739,15 @@
           <a:bodyPr rtlCol="0" anchor="ctr" wrap="square" lIns="137160" rIns="137160" tIns="73152" bIns="73152"/>
           <a:lstStyle/>
           <a:p>
-            <a:pPr algn="ctr"/>
-            <a:r>
-              <a:rPr sz="1600" b="1">
-                <a:solidFill>
-                  <a:srgbClr val="FFFFFF"/>
-                </a:solidFill>
-                <a:latin typeface="Noto Sans JP"/>
-              </a:rPr>
-              <a:t>2人分</a:t>
+            <a:pPr algn="r"/>
+            <a:r>
+              <a:rPr sz="1400" b="0">
+                <a:solidFill>
+                  <a:srgbClr val="1C3557"/>
+                </a:solidFill>
+                <a:latin typeface="Noto Sans JP"/>
+              </a:rPr>
+              <a:t>¥450,000</a:t>
             </a:r>
           </a:p>
         </p:txBody>
@@ -9073,14 +9760,14 @@
         </p:nvSpPr>
         <p:spPr>
           <a:xfrm>
-            <a:off x="4663440" y="2834639"/>
-            <a:ext cx="7040880" cy="640080"/>
+            <a:off x="457200" y="4297680"/>
+            <a:ext cx="4572000" cy="640080"/>
           </a:xfrm>
           <a:prstGeom prst="rect">
             <a:avLst/>
           </a:prstGeom>
           <a:solidFill>
-            <a:srgbClr val="DBEAFE"/>
+            <a:srgbClr val="F3F4F6"/>
           </a:solidFill>
           <a:ln>
             <a:noFill/>
@@ -9106,13 +9793,13 @@
           <a:p>
             <a:pPr algn="l"/>
             <a:r>
-              <a:rPr sz="1200" b="0">
+              <a:rPr sz="1400" b="0">
                 <a:solidFill>
                   <a:srgbClr val="1C3557"/>
                 </a:solidFill>
                 <a:latin typeface="Noto Sans JP"/>
               </a:rPr>
-              <a:t>5人全員が同時進行で立ち上がり / Agent Teams 初期構築</a:t>
+              <a:t>ブロードリンク</a:t>
             </a:r>
           </a:p>
         </p:txBody>
@@ -9125,8 +9812,8 @@
         </p:nvSpPr>
         <p:spPr>
           <a:xfrm>
-            <a:off x="457200" y="3566159"/>
-            <a:ext cx="2286000" cy="640080"/>
+            <a:off x="5074920" y="4297680"/>
+            <a:ext cx="2743200" cy="640080"/>
           </a:xfrm>
           <a:prstGeom prst="rect">
             <a:avLst/>
@@ -9156,15 +9843,15 @@
           <a:bodyPr rtlCol="0" anchor="ctr" wrap="square" lIns="137160" rIns="137160" tIns="73152" bIns="73152"/>
           <a:lstStyle/>
           <a:p>
-            <a:pPr algn="ctr"/>
-            <a:r>
-              <a:rPr sz="1300" b="0">
+            <a:pPr algn="r"/>
+            <a:r>
+              <a:rPr sz="1400" b="0">
                 <a:solidFill>
                   <a:srgbClr val="1C3557"/>
                 </a:solidFill>
                 <a:latin typeface="Noto Sans JP"/>
               </a:rPr>
-              <a:t>7-8月</a:t>
+              <a:t>¥260,000</a:t>
             </a:r>
           </a:p>
         </p:txBody>
@@ -9177,14 +9864,14 @@
         </p:nvSpPr>
         <p:spPr>
           <a:xfrm>
-            <a:off x="2788920" y="3566159"/>
-            <a:ext cx="1828800" cy="640080"/>
+            <a:off x="457200" y="4983480"/>
+            <a:ext cx="4572000" cy="640080"/>
           </a:xfrm>
           <a:prstGeom prst="rect">
             <a:avLst/>
           </a:prstGeom>
           <a:solidFill>
-            <a:srgbClr val="F3F4F6"/>
+            <a:srgbClr val="2563EB"/>
           </a:solidFill>
           <a:ln>
             <a:noFill/>
@@ -9208,15 +9895,15 @@
           <a:bodyPr rtlCol="0" anchor="ctr" wrap="square" lIns="137160" rIns="137160" tIns="73152" bIns="73152"/>
           <a:lstStyle/>
           <a:p>
-            <a:pPr algn="ctr"/>
+            <a:pPr algn="l"/>
             <a:r>
               <a:rPr sz="1600" b="1">
                 <a:solidFill>
-                  <a:srgbClr val="1C3557"/>
-                </a:solidFill>
-                <a:latin typeface="Noto Sans JP"/>
-              </a:rPr>
-              <a:t>3〜4人分</a:t>
+                  <a:srgbClr val="FFFFFF"/>
+                </a:solidFill>
+                <a:latin typeface="Noto Sans JP"/>
+              </a:rPr>
+              <a:t>半期合計</a:t>
             </a:r>
           </a:p>
         </p:txBody>
@@ -9229,14 +9916,14 @@
         </p:nvSpPr>
         <p:spPr>
           <a:xfrm>
-            <a:off x="4663440" y="3566159"/>
-            <a:ext cx="7040880" cy="640080"/>
+            <a:off x="5074920" y="4983480"/>
+            <a:ext cx="2743200" cy="640080"/>
           </a:xfrm>
           <a:prstGeom prst="rect">
             <a:avLst/>
           </a:prstGeom>
           <a:solidFill>
-            <a:srgbClr val="F3F4F6"/>
+            <a:srgbClr val="2563EB"/>
           </a:solidFill>
           <a:ln>
             <a:noFill/>
@@ -9260,32 +9947,34 @@
           <a:bodyPr rtlCol="0" anchor="ctr" wrap="square" lIns="137160" rIns="137160" tIns="73152" bIns="73152"/>
           <a:lstStyle/>
           <a:p>
-            <a:pPr algn="l"/>
-            <a:r>
-              <a:rPr sz="1200" b="0">
-                <a:solidFill>
-                  <a:srgbClr val="1C3557"/>
-                </a:solidFill>
-                <a:latin typeface="Noto Sans JP"/>
-              </a:rPr>
-              <a:t>各領域で深化 / Agent Teams 連携テスト</a:t>
-            </a:r>
-          </a:p>
-        </p:txBody>
-      </p:sp>
-      <p:sp>
-        <p:nvSpPr>
-          <p:cNvPr id="18" name="Rectangle 17"/>
-          <p:cNvSpPr/>
-          <p:nvPr/>
-        </p:nvSpPr>
-        <p:spPr>
-          <a:xfrm>
-            <a:off x="457200" y="4297679"/>
-            <a:ext cx="2286000" cy="640080"/>
-          </a:xfrm>
-          <a:prstGeom prst="rect">
-            <a:avLst/>
+            <a:pPr algn="r"/>
+            <a:r>
+              <a:rPr sz="1600" b="1">
+                <a:solidFill>
+                  <a:srgbClr val="FFFFFF"/>
+                </a:solidFill>
+                <a:latin typeface="Noto Sans JP"/>
+              </a:rPr>
+              <a:t>¥6,710,000</a:t>
+            </a:r>
+          </a:p>
+        </p:txBody>
+      </p:sp>
+      <p:sp>
+        <p:nvSpPr>
+          <p:cNvPr id="18" name="Rounded Rectangle 17"/>
+          <p:cNvSpPr/>
+          <p:nvPr/>
+        </p:nvSpPr>
+        <p:spPr>
+          <a:xfrm>
+            <a:off x="8229600" y="1554480"/>
+            <a:ext cx="3502152" cy="4160520"/>
+          </a:xfrm>
+          <a:prstGeom prst="roundRect">
+            <a:avLst>
+              <a:gd name="adj" fmla="val 5000"/>
+            </a:avLst>
           </a:prstGeom>
           <a:solidFill>
             <a:srgbClr val="2563EB"/>
@@ -9314,167 +10003,97 @@
           <a:p>
             <a:pPr algn="ctr"/>
             <a:r>
-              <a:rPr sz="1300" b="1">
+              <a:rPr sz="2000" b="1">
                 <a:solidFill>
                   <a:srgbClr val="FFFFFF"/>
                 </a:solidFill>
                 <a:latin typeface="Noto Sans JP"/>
               </a:rPr>
-              <a:t>9月末 (最終)</a:t>
-            </a:r>
-          </a:p>
-        </p:txBody>
-      </p:sp>
-      <p:sp>
-        <p:nvSpPr>
-          <p:cNvPr id="19" name="Rectangle 18"/>
-          <p:cNvSpPr/>
-          <p:nvPr/>
-        </p:nvSpPr>
-        <p:spPr>
-          <a:xfrm>
-            <a:off x="2788920" y="4297679"/>
-            <a:ext cx="1828800" cy="640080"/>
-          </a:xfrm>
-          <a:prstGeom prst="rect">
-            <a:avLst/>
-          </a:prstGeom>
-          <a:solidFill>
-            <a:srgbClr val="2563EB"/>
-          </a:solidFill>
-          <a:ln>
-            <a:noFill/>
-          </a:ln>
-        </p:spPr>
-        <p:style>
-          <a:lnRef idx="1">
-            <a:schemeClr val="accent1"/>
-          </a:lnRef>
-          <a:fillRef idx="3">
-            <a:schemeClr val="accent1"/>
-          </a:fillRef>
-          <a:effectRef idx="2">
-            <a:schemeClr val="accent1"/>
-          </a:effectRef>
-          <a:fontRef idx="minor">
-            <a:schemeClr val="lt1"/>
-          </a:fontRef>
-        </p:style>
-        <p:txBody>
-          <a:bodyPr rtlCol="0" anchor="ctr" wrap="square" lIns="137160" rIns="137160" tIns="73152" bIns="73152"/>
-          <a:lstStyle/>
+              <a:t>月換算</a:t>
+            </a:r>
+          </a:p>
           <a:p>
             <a:pPr algn="ctr"/>
             <a:r>
-              <a:rPr sz="1600" b="1">
+              <a:rPr sz="2000" b="1">
                 <a:solidFill>
                   <a:srgbClr val="FFFFFF"/>
                 </a:solidFill>
                 <a:latin typeface="Noto Sans JP"/>
               </a:rPr>
-              <a:t>5人分</a:t>
-            </a:r>
-          </a:p>
-        </p:txBody>
-      </p:sp>
-      <p:sp>
-        <p:nvSpPr>
-          <p:cNvPr id="20" name="Rectangle 19"/>
-          <p:cNvSpPr/>
-          <p:nvPr/>
-        </p:nvSpPr>
-        <p:spPr>
-          <a:xfrm>
-            <a:off x="4663440" y="4297679"/>
-            <a:ext cx="7040880" cy="640080"/>
-          </a:xfrm>
-          <a:prstGeom prst="rect">
-            <a:avLst/>
-          </a:prstGeom>
-          <a:solidFill>
-            <a:srgbClr val="DBEAFE"/>
-          </a:solidFill>
-          <a:ln>
-            <a:noFill/>
-          </a:ln>
-        </p:spPr>
-        <p:style>
-          <a:lnRef idx="1">
-            <a:schemeClr val="accent1"/>
-          </a:lnRef>
-          <a:fillRef idx="3">
-            <a:schemeClr val="accent1"/>
-          </a:fillRef>
-          <a:effectRef idx="2">
-            <a:schemeClr val="accent1"/>
-          </a:effectRef>
-          <a:fontRef idx="minor">
-            <a:schemeClr val="lt1"/>
-          </a:fontRef>
-        </p:style>
-        <p:txBody>
-          <a:bodyPr rtlCol="0" anchor="ctr" wrap="square" lIns="137160" rIns="137160" tIns="73152" bIns="73152"/>
-          <a:lstStyle/>
-          <a:p>
-            <a:pPr algn="l"/>
-            <a:r>
-              <a:rPr sz="1200" b="0">
-                <a:solidFill>
-                  <a:srgbClr val="1C3557"/>
-                </a:solidFill>
-                <a:latin typeface="Noto Sans JP"/>
-              </a:rPr>
-              <a:t>5人フル稼働 + Agent Teams で協働</a:t>
-            </a:r>
-          </a:p>
-        </p:txBody>
-      </p:sp>
-      <p:sp>
-        <p:nvSpPr>
-          <p:cNvPr id="21" name="Rectangle 20"/>
-          <p:cNvSpPr/>
-          <p:nvPr/>
-        </p:nvSpPr>
-        <p:spPr>
-          <a:xfrm>
-            <a:off x="457200" y="5486400"/>
-            <a:ext cx="11274552" cy="822960"/>
-          </a:xfrm>
-          <a:prstGeom prst="rect">
-            <a:avLst/>
-          </a:prstGeom>
-          <a:noFill/>
-          <a:ln>
-            <a:noFill/>
-          </a:ln>
-        </p:spPr>
-        <p:style>
-          <a:lnRef idx="1">
-            <a:schemeClr val="accent1"/>
-          </a:lnRef>
-          <a:fillRef idx="3">
-            <a:schemeClr val="accent1"/>
-          </a:fillRef>
-          <a:effectRef idx="2">
-            <a:schemeClr val="accent1"/>
-          </a:effectRef>
-          <a:fontRef idx="minor">
-            <a:schemeClr val="lt1"/>
-          </a:fontRef>
-        </p:style>
-        <p:txBody>
-          <a:bodyPr rtlCol="0" anchor="ctr" wrap="square" lIns="137160" rIns="137160" tIns="73152" bIns="73152"/>
-          <a:lstStyle/>
+              <a:t>¥464,000</a:t>
+            </a:r>
+          </a:p>
           <a:p>
             <a:pPr algn="ctr"/>
             <a:r>
-              <a:rPr sz="1800" b="1">
-                <a:solidFill>
-                  <a:srgbClr val="2563EB"/>
-                </a:solidFill>
-                <a:latin typeface="Noto Sans JP"/>
-              </a:rPr>
-              <a:t>特定の1人を完成させるのではなく、5人を網羅的に育てる</a:t>
+              <a:rPr sz="2000" b="1">
+                <a:solidFill>
+                  <a:srgbClr val="FFFFFF"/>
+                </a:solidFill>
+                <a:latin typeface="Noto Sans JP"/>
+              </a:rPr>
+              <a:t/>
+            </a:r>
+          </a:p>
+          <a:p>
+            <a:pPr algn="ctr"/>
+            <a:r>
+              <a:rPr sz="2000" b="1">
+                <a:solidFill>
+                  <a:srgbClr val="FFFFFF"/>
+                </a:solidFill>
+                <a:latin typeface="Noto Sans JP"/>
+              </a:rPr>
+              <a:t>=</a:t>
+            </a:r>
+          </a:p>
+          <a:p>
+            <a:pPr algn="ctr"/>
+            <a:r>
+              <a:rPr sz="2000" b="1">
+                <a:solidFill>
+                  <a:srgbClr val="FFFFFF"/>
+                </a:solidFill>
+                <a:latin typeface="Noto Sans JP"/>
+              </a:rPr>
+              <a:t/>
+            </a:r>
+          </a:p>
+          <a:p>
+            <a:pPr algn="ctr"/>
+            <a:r>
+              <a:rPr sz="2000" b="1">
+                <a:solidFill>
+                  <a:srgbClr val="FFFFFF"/>
+                </a:solidFill>
+                <a:latin typeface="Noto Sans JP"/>
+              </a:rPr>
+              <a:t>AI社員</a:t>
+            </a:r>
+          </a:p>
+          <a:p>
+            <a:pPr algn="ctr"/>
+            <a:r>
+              <a:rPr sz="2000" b="1">
+                <a:solidFill>
+                  <a:srgbClr val="FFFFFF"/>
+                </a:solidFill>
+                <a:latin typeface="Noto Sans JP"/>
+              </a:rPr>
+              <a:t>1.3人分</a:t>
+            </a:r>
+          </a:p>
+          <a:p>
+            <a:pPr algn="ctr"/>
+            <a:r>
+              <a:rPr sz="2000" b="1">
+                <a:solidFill>
+                  <a:srgbClr val="FFFFFF"/>
+                </a:solidFill>
+                <a:latin typeface="Noto Sans JP"/>
+              </a:rPr>
+              <a:t>稼働中</a:t>
             </a:r>
           </a:p>
         </p:txBody>
@@ -9548,45 +10167,38 @@
         </p:nvSpPr>
         <p:spPr>
           <a:xfrm>
-            <a:off x="457200" y="1280160"/>
-            <a:ext cx="11274552" cy="1280160"/>
+            <a:off x="5029200" y="1371600"/>
+            <a:ext cx="2130552" cy="54864"/>
           </a:xfrm>
           <a:prstGeom prst="rect">
             <a:avLst/>
           </a:prstGeom>
-          <a:noFill/>
-          <a:ln>
-            <a:noFill/>
-          </a:ln>
-        </p:spPr>
-        <p:style>
-          <a:lnRef idx="1">
-            <a:schemeClr val="accent1"/>
-          </a:lnRef>
-          <a:fillRef idx="3">
-            <a:schemeClr val="accent1"/>
-          </a:fillRef>
-          <a:effectRef idx="2">
-            <a:schemeClr val="accent1"/>
-          </a:effectRef>
-          <a:fontRef idx="minor">
-            <a:schemeClr val="lt1"/>
-          </a:fontRef>
-        </p:style>
-        <p:txBody>
-          <a:bodyPr rtlCol="0" anchor="ctr" wrap="square" lIns="137160" rIns="137160" tIns="73152" bIns="73152"/>
+          <a:solidFill>
+            <a:srgbClr val="2563EB"/>
+          </a:solidFill>
+          <a:ln>
+            <a:noFill/>
+          </a:ln>
+        </p:spPr>
+        <p:style>
+          <a:lnRef idx="1">
+            <a:schemeClr val="accent1"/>
+          </a:lnRef>
+          <a:fillRef idx="3">
+            <a:schemeClr val="accent1"/>
+          </a:fillRef>
+          <a:effectRef idx="2">
+            <a:schemeClr val="accent1"/>
+          </a:effectRef>
+          <a:fontRef idx="minor">
+            <a:schemeClr val="lt1"/>
+          </a:fontRef>
+        </p:style>
+        <p:txBody>
+          <a:bodyPr rtlCol="0" anchor="ctr"/>
           <a:lstStyle/>
           <a:p>
             <a:pPr algn="ctr"/>
-            <a:r>
-              <a:rPr sz="3600" b="1">
-                <a:solidFill>
-                  <a:srgbClr val="1C3557"/>
-                </a:solidFill>
-                <a:latin typeface="Noto Sans JP"/>
-              </a:rPr>
-              <a:t>AI社員を動かして、</a:t>
-            </a:r>
           </a:p>
         </p:txBody>
       </p:sp>
@@ -9598,8 +10210,8 @@
         </p:nvSpPr>
         <p:spPr>
           <a:xfrm>
-            <a:off x="457200" y="2468880"/>
-            <a:ext cx="11274552" cy="1371600"/>
+            <a:off x="457200" y="1828800"/>
+            <a:ext cx="11274552" cy="1097280"/>
           </a:xfrm>
           <a:prstGeom prst="rect">
             <a:avLst/>
@@ -9629,13 +10241,13 @@
           <a:p>
             <a:pPr algn="ctr"/>
             <a:r>
-              <a:rPr sz="4400" b="1">
-                <a:solidFill>
-                  <a:srgbClr val="2563EB"/>
-                </a:solidFill>
-                <a:latin typeface="Noto Sans JP"/>
-              </a:rPr>
-              <a:t>Kawaru事業部の事業を推進する</a:t>
+              <a:rPr sz="3200" b="1">
+                <a:solidFill>
+                  <a:srgbClr val="6B7280"/>
+                </a:solidFill>
+                <a:latin typeface="Noto Sans JP"/>
+              </a:rPr>
+              <a:t>ここまでが現状の話</a:t>
             </a:r>
           </a:p>
         </p:txBody>
@@ -9648,38 +10260,45 @@
         </p:nvSpPr>
         <p:spPr>
           <a:xfrm>
-            <a:off x="5029200" y="4023360"/>
-            <a:ext cx="2130552" cy="54864"/>
+            <a:off x="457200" y="3017520"/>
+            <a:ext cx="11274552" cy="640080"/>
           </a:xfrm>
           <a:prstGeom prst="rect">
             <a:avLst/>
           </a:prstGeom>
-          <a:solidFill>
-            <a:srgbClr val="2563EB"/>
-          </a:solidFill>
-          <a:ln>
-            <a:noFill/>
-          </a:ln>
-        </p:spPr>
-        <p:style>
-          <a:lnRef idx="1">
-            <a:schemeClr val="accent1"/>
-          </a:lnRef>
-          <a:fillRef idx="3">
-            <a:schemeClr val="accent1"/>
-          </a:fillRef>
-          <a:effectRef idx="2">
-            <a:schemeClr val="accent1"/>
-          </a:effectRef>
-          <a:fontRef idx="minor">
-            <a:schemeClr val="lt1"/>
-          </a:fontRef>
-        </p:style>
-        <p:txBody>
-          <a:bodyPr rtlCol="0" anchor="ctr"/>
+          <a:noFill/>
+          <a:ln>
+            <a:noFill/>
+          </a:ln>
+        </p:spPr>
+        <p:style>
+          <a:lnRef idx="1">
+            <a:schemeClr val="accent1"/>
+          </a:lnRef>
+          <a:fillRef idx="3">
+            <a:schemeClr val="accent1"/>
+          </a:fillRef>
+          <a:effectRef idx="2">
+            <a:schemeClr val="accent1"/>
+          </a:effectRef>
+          <a:fontRef idx="minor">
+            <a:schemeClr val="lt1"/>
+          </a:fontRef>
+        </p:style>
+        <p:txBody>
+          <a:bodyPr rtlCol="0" anchor="ctr" wrap="square" lIns="137160" rIns="137160" tIns="73152" bIns="73152"/>
           <a:lstStyle/>
           <a:p>
             <a:pPr algn="ctr"/>
+            <a:r>
+              <a:rPr sz="3600" b="1">
+                <a:solidFill>
+                  <a:srgbClr val="2563EB"/>
+                </a:solidFill>
+                <a:latin typeface="Noto Sans JP"/>
+              </a:rPr>
+              <a:t>↓</a:t>
+            </a:r>
           </a:p>
         </p:txBody>
       </p:sp>
@@ -9691,8 +10310,8 @@
         </p:nvSpPr>
         <p:spPr>
           <a:xfrm>
-            <a:off x="457200" y="4480560"/>
-            <a:ext cx="11274552" cy="548640"/>
+            <a:off x="457200" y="3840480"/>
+            <a:ext cx="11274552" cy="1371600"/>
           </a:xfrm>
           <a:prstGeom prst="rect">
             <a:avLst/>
@@ -9722,243 +10341,27 @@
           <a:p>
             <a:pPr algn="ctr"/>
             <a:r>
-              <a:rPr sz="1800" b="1">
-                <a:solidFill>
-                  <a:srgbClr val="1C3557"/>
-                </a:solidFill>
-                <a:latin typeface="Noto Sans JP"/>
-              </a:rPr>
-              <a:t>2人 + AI社員5人 + Agent Teams で、Kawaru事業部を動かす</a:t>
-            </a:r>
-          </a:p>
-        </p:txBody>
-      </p:sp>
-      <p:sp>
-        <p:nvSpPr>
-          <p:cNvPr id="7" name="Rounded Rectangle 6"/>
-          <p:cNvSpPr/>
-          <p:nvPr/>
-        </p:nvSpPr>
-        <p:spPr>
-          <a:xfrm>
-            <a:off x="914400" y="5303520"/>
-            <a:ext cx="3200400" cy="731520"/>
-          </a:xfrm>
-          <a:prstGeom prst="roundRect">
-            <a:avLst>
-              <a:gd name="adj" fmla="val 5000"/>
-            </a:avLst>
-          </a:prstGeom>
-          <a:solidFill>
-            <a:srgbClr val="2563EB"/>
-          </a:solidFill>
-          <a:ln>
-            <a:noFill/>
-          </a:ln>
-        </p:spPr>
-        <p:style>
-          <a:lnRef idx="1">
-            <a:schemeClr val="accent1"/>
-          </a:lnRef>
-          <a:fillRef idx="3">
-            <a:schemeClr val="accent1"/>
-          </a:fillRef>
-          <a:effectRef idx="2">
-            <a:schemeClr val="accent1"/>
-          </a:effectRef>
-          <a:fontRef idx="minor">
-            <a:schemeClr val="lt1"/>
-          </a:fontRef>
-        </p:style>
-        <p:txBody>
-          <a:bodyPr rtlCol="0" anchor="ctr" wrap="square" lIns="137160" rIns="137160" tIns="73152" bIns="73152"/>
-          <a:lstStyle/>
-          <a:p>
-            <a:pPr algn="ctr"/>
-            <a:r>
-              <a:rPr sz="1400" b="1">
-                <a:solidFill>
-                  <a:srgbClr val="FFFFFF"/>
-                </a:solidFill>
-                <a:latin typeface="Noto Sans JP"/>
-              </a:rPr>
-              <a:t>Kawaru プロダクト</a:t>
-            </a:r>
-          </a:p>
-        </p:txBody>
-      </p:sp>
-      <p:sp>
-        <p:nvSpPr>
-          <p:cNvPr id="8" name="Rounded Rectangle 7"/>
-          <p:cNvSpPr/>
-          <p:nvPr/>
-        </p:nvSpPr>
-        <p:spPr>
-          <a:xfrm>
-            <a:off x="4297680" y="5303520"/>
-            <a:ext cx="2377440" cy="731520"/>
-          </a:xfrm>
-          <a:prstGeom prst="roundRect">
-            <a:avLst>
-              <a:gd name="adj" fmla="val 5000"/>
-            </a:avLst>
-          </a:prstGeom>
-          <a:solidFill>
-            <a:srgbClr val="FF6600"/>
-          </a:solidFill>
-          <a:ln>
-            <a:noFill/>
-          </a:ln>
-        </p:spPr>
-        <p:style>
-          <a:lnRef idx="1">
-            <a:schemeClr val="accent1"/>
-          </a:lnRef>
-          <a:fillRef idx="3">
-            <a:schemeClr val="accent1"/>
-          </a:fillRef>
-          <a:effectRef idx="2">
-            <a:schemeClr val="accent1"/>
-          </a:effectRef>
-          <a:fontRef idx="minor">
-            <a:schemeClr val="lt1"/>
-          </a:fontRef>
-        </p:style>
-        <p:txBody>
-          <a:bodyPr rtlCol="0" anchor="ctr" wrap="square" lIns="137160" rIns="137160" tIns="73152" bIns="73152"/>
-          <a:lstStyle/>
-          <a:p>
-            <a:pPr algn="ctr"/>
-            <a:r>
-              <a:rPr sz="1300" b="1">
-                <a:solidFill>
-                  <a:srgbClr val="FFFFFF"/>
-                </a:solidFill>
-                <a:latin typeface="Noto Sans JP"/>
-              </a:rPr>
-              <a:t>Kawaru Team</a:t>
-            </a:r>
-          </a:p>
-        </p:txBody>
-      </p:sp>
-      <p:sp>
-        <p:nvSpPr>
-          <p:cNvPr id="9" name="Rounded Rectangle 8"/>
-          <p:cNvSpPr/>
-          <p:nvPr/>
-        </p:nvSpPr>
-        <p:spPr>
-          <a:xfrm>
-            <a:off x="6766560" y="5303520"/>
-            <a:ext cx="2377440" cy="731520"/>
-          </a:xfrm>
-          <a:prstGeom prst="roundRect">
-            <a:avLst>
-              <a:gd name="adj" fmla="val 5000"/>
-            </a:avLst>
-          </a:prstGeom>
-          <a:solidFill>
-            <a:srgbClr val="7C3AED"/>
-          </a:solidFill>
-          <a:ln>
-            <a:noFill/>
-          </a:ln>
-        </p:spPr>
-        <p:style>
-          <a:lnRef idx="1">
-            <a:schemeClr val="accent1"/>
-          </a:lnRef>
-          <a:fillRef idx="3">
-            <a:schemeClr val="accent1"/>
-          </a:fillRef>
-          <a:effectRef idx="2">
-            <a:schemeClr val="accent1"/>
-          </a:effectRef>
-          <a:fontRef idx="minor">
-            <a:schemeClr val="lt1"/>
-          </a:fontRef>
-        </p:style>
-        <p:txBody>
-          <a:bodyPr rtlCol="0" anchor="ctr" wrap="square" lIns="137160" rIns="137160" tIns="73152" bIns="73152"/>
-          <a:lstStyle/>
-          <a:p>
-            <a:pPr algn="ctr"/>
-            <a:r>
-              <a:rPr sz="1300" b="1">
-                <a:solidFill>
-                  <a:srgbClr val="FFFFFF"/>
-                </a:solidFill>
-                <a:latin typeface="Noto Sans JP"/>
-              </a:rPr>
-              <a:t>Kawaru Coach</a:t>
-            </a:r>
-          </a:p>
-        </p:txBody>
-      </p:sp>
-      <p:sp>
-        <p:nvSpPr>
-          <p:cNvPr id="10" name="Rounded Rectangle 9"/>
-          <p:cNvSpPr/>
-          <p:nvPr/>
-        </p:nvSpPr>
-        <p:spPr>
-          <a:xfrm>
-            <a:off x="9235440" y="5303520"/>
-            <a:ext cx="2194560" cy="731520"/>
-          </a:xfrm>
-          <a:prstGeom prst="roundRect">
-            <a:avLst>
-              <a:gd name="adj" fmla="val 5000"/>
-            </a:avLst>
-          </a:prstGeom>
-          <a:solidFill>
-            <a:srgbClr val="10BF16"/>
-          </a:solidFill>
-          <a:ln>
-            <a:noFill/>
-          </a:ln>
-        </p:spPr>
-        <p:style>
-          <a:lnRef idx="1">
-            <a:schemeClr val="accent1"/>
-          </a:lnRef>
-          <a:fillRef idx="3">
-            <a:schemeClr val="accent1"/>
-          </a:fillRef>
-          <a:effectRef idx="2">
-            <a:schemeClr val="accent1"/>
-          </a:effectRef>
-          <a:fontRef idx="minor">
-            <a:schemeClr val="lt1"/>
-          </a:fontRef>
-        </p:style>
-        <p:txBody>
-          <a:bodyPr rtlCol="0" anchor="ctr" wrap="square" lIns="137160" rIns="137160" tIns="73152" bIns="73152"/>
-          <a:lstStyle/>
-          <a:p>
-            <a:pPr algn="ctr"/>
-            <a:r>
-              <a:rPr sz="1300" b="1">
-                <a:solidFill>
-                  <a:srgbClr val="FFFFFF"/>
-                </a:solidFill>
-                <a:latin typeface="Noto Sans JP"/>
-              </a:rPr>
-              <a:t>Kawaru BPO</a:t>
-            </a:r>
-          </a:p>
-        </p:txBody>
-      </p:sp>
-      <p:sp>
-        <p:nvSpPr>
-          <p:cNvPr id="11" name="Rectangle 10"/>
-          <p:cNvSpPr/>
-          <p:nvPr/>
-        </p:nvSpPr>
-        <p:spPr>
-          <a:xfrm>
-            <a:off x="11247120" y="6492240"/>
-            <a:ext cx="731520" cy="274320"/>
+              <a:rPr sz="4400" b="1">
+                <a:solidFill>
+                  <a:srgbClr val="2563EB"/>
+                </a:solidFill>
+                <a:latin typeface="Noto Sans JP"/>
+              </a:rPr>
+              <a:t>ここから今後の話</a:t>
+            </a:r>
+          </a:p>
+        </p:txBody>
+      </p:sp>
+      <p:sp>
+        <p:nvSpPr>
+          <p:cNvPr id="7" name="Rectangle 6"/>
+          <p:cNvSpPr/>
+          <p:nvPr/>
+        </p:nvSpPr>
+        <p:spPr>
+          <a:xfrm>
+            <a:off x="457200" y="5394960"/>
+            <a:ext cx="11274552" cy="548640"/>
           </a:xfrm>
           <a:prstGeom prst="rect">
             <a:avLst/>
@@ -9983,6 +10386,56 @@
           </a:fontRef>
         </p:style>
         <p:txBody>
+          <a:bodyPr rtlCol="0" anchor="ctr" wrap="square" lIns="137160" rIns="137160" tIns="73152" bIns="73152"/>
+          <a:lstStyle/>
+          <a:p>
+            <a:pPr algn="ctr"/>
+            <a:r>
+              <a:rPr sz="1600" b="0">
+                <a:solidFill>
+                  <a:srgbClr val="1C3557"/>
+                </a:solidFill>
+                <a:latin typeface="Noto Sans JP"/>
+              </a:rPr>
+              <a:t>9月末までにAI社員5人を完成させる、その道筋</a:t>
+            </a:r>
+          </a:p>
+        </p:txBody>
+      </p:sp>
+      <p:sp>
+        <p:nvSpPr>
+          <p:cNvPr id="8" name="Rectangle 7"/>
+          <p:cNvSpPr/>
+          <p:nvPr/>
+        </p:nvSpPr>
+        <p:spPr>
+          <a:xfrm>
+            <a:off x="10972800" y="6492240"/>
+            <a:ext cx="1005840" cy="274320"/>
+          </a:xfrm>
+          <a:prstGeom prst="rect">
+            <a:avLst/>
+          </a:prstGeom>
+          <a:noFill/>
+          <a:ln>
+            <a:noFill/>
+          </a:ln>
+        </p:spPr>
+        <p:style>
+          <a:lnRef idx="1">
+            <a:schemeClr val="accent1"/>
+          </a:lnRef>
+          <a:fillRef idx="3">
+            <a:schemeClr val="accent1"/>
+          </a:fillRef>
+          <a:effectRef idx="2">
+            <a:schemeClr val="accent1"/>
+          </a:effectRef>
+          <a:fontRef idx="minor">
+            <a:schemeClr val="lt1"/>
+          </a:fontRef>
+        </p:style>
+        <p:txBody>
           <a:bodyPr rtlCol="0" anchor="t" wrap="square" lIns="137160" rIns="137160" tIns="73152" bIns="73152"/>
           <a:lstStyle/>
           <a:p>
@@ -9994,7 +10447,7 @@
                 </a:solidFill>
                 <a:latin typeface="Noto Sans JP"/>
               </a:rPr>
-              <a:t>9 / 9</a:t>
+              <a:t>9 / 11</a:t>
             </a:r>
           </a:p>
         </p:txBody>

--- a/strategy/AI社員5人_発表_20260426.pptx
+++ b/strategy/AI社員5人_発表_20260426.pptx
@@ -16,6 +16,8 @@
     <p:sldId id="264" r:id="rId15"/>
     <p:sldId id="265" r:id="rId16"/>
     <p:sldId id="266" r:id="rId17"/>
+    <p:sldId id="267" r:id="rId18"/>
+    <p:sldId id="268" r:id="rId19"/>
   </p:sldIdLst>
   <p:sldSz cx="12188952" cy="6858000" type="screen4x3"/>
   <p:notesSz cx="6858000" cy="9144000"/>
@@ -3149,8 +3151,8 @@
         </p:nvSpPr>
         <p:spPr>
           <a:xfrm>
-            <a:off x="5029200" y="2103120"/>
-            <a:ext cx="2130552" cy="73152"/>
+            <a:off x="0" y="0"/>
+            <a:ext cx="12188952" cy="137160"/>
           </a:xfrm>
           <a:prstGeom prst="rect">
             <a:avLst/>
@@ -3186,14 +3188,100 @@
       </p:sp>
       <p:sp>
         <p:nvSpPr>
-          <p:cNvPr id="4" name="Rectangle 3"/>
+          <p:cNvPr id="4" name="Oval 3"/>
+          <p:cNvSpPr/>
+          <p:nvPr/>
+        </p:nvSpPr>
+        <p:spPr>
+          <a:xfrm>
+            <a:off x="9601200" y="457200"/>
+            <a:ext cx="2103120" cy="2103120"/>
+          </a:xfrm>
+          <a:prstGeom prst="ellipse">
+            <a:avLst/>
+          </a:prstGeom>
+          <a:solidFill>
+            <a:srgbClr val="DBEAFE"/>
+          </a:solidFill>
+          <a:ln>
+            <a:noFill/>
+          </a:ln>
+        </p:spPr>
+        <p:style>
+          <a:lnRef idx="1">
+            <a:schemeClr val="accent1"/>
+          </a:lnRef>
+          <a:fillRef idx="3">
+            <a:schemeClr val="accent1"/>
+          </a:fillRef>
+          <a:effectRef idx="2">
+            <a:schemeClr val="accent1"/>
+          </a:effectRef>
+          <a:fontRef idx="minor">
+            <a:schemeClr val="lt1"/>
+          </a:fontRef>
+        </p:style>
+        <p:txBody>
+          <a:bodyPr rtlCol="0" anchor="ctr"/>
+          <a:lstStyle/>
+          <a:p>
+            <a:pPr algn="ctr"/>
+          </a:p>
+        </p:txBody>
+      </p:sp>
+      <p:sp>
+        <p:nvSpPr>
+          <p:cNvPr id="5" name="Oval 4"/>
+          <p:cNvSpPr/>
+          <p:nvPr/>
+        </p:nvSpPr>
+        <p:spPr>
+          <a:xfrm>
+            <a:off x="457200" y="5029200"/>
+            <a:ext cx="1645920" cy="1645920"/>
+          </a:xfrm>
+          <a:prstGeom prst="ellipse">
+            <a:avLst/>
+          </a:prstGeom>
+          <a:solidFill>
+            <a:srgbClr val="DBEAFE"/>
+          </a:solidFill>
+          <a:ln>
+            <a:noFill/>
+          </a:ln>
+        </p:spPr>
+        <p:style>
+          <a:lnRef idx="1">
+            <a:schemeClr val="accent1"/>
+          </a:lnRef>
+          <a:fillRef idx="3">
+            <a:schemeClr val="accent1"/>
+          </a:fillRef>
+          <a:effectRef idx="2">
+            <a:schemeClr val="accent1"/>
+          </a:effectRef>
+          <a:fontRef idx="minor">
+            <a:schemeClr val="lt1"/>
+          </a:fontRef>
+        </p:style>
+        <p:txBody>
+          <a:bodyPr rtlCol="0" anchor="ctr"/>
+          <a:lstStyle/>
+          <a:p>
+            <a:pPr algn="ctr"/>
+          </a:p>
+        </p:txBody>
+      </p:sp>
+      <p:sp>
+        <p:nvSpPr>
+          <p:cNvPr id="6" name="Rectangle 5"/>
           <p:cNvSpPr/>
           <p:nvPr/>
         </p:nvSpPr>
         <p:spPr>
           <a:xfrm>
             <a:off x="457200" y="2286000"/>
-            <a:ext cx="11274552" cy="1280160"/>
+            <a:ext cx="11274552" cy="1463040"/>
           </a:xfrm>
           <a:prstGeom prst="rect">
             <a:avLst/>
@@ -3223,7 +3311,7 @@
           <a:p>
             <a:pPr algn="ctr"/>
             <a:r>
-              <a:rPr sz="4800" b="1">
+              <a:rPr sz="6000" b="1">
                 <a:solidFill>
                   <a:srgbClr val="2563EB"/>
                 </a:solidFill>
@@ -3236,20 +3324,20 @@
       </p:sp>
       <p:sp>
         <p:nvSpPr>
-          <p:cNvPr id="5" name="Rectangle 4"/>
-          <p:cNvSpPr/>
-          <p:nvPr/>
-        </p:nvSpPr>
-        <p:spPr>
-          <a:xfrm>
-            <a:off x="5029200" y="3657600"/>
-            <a:ext cx="2130552" cy="36576"/>
+          <p:cNvPr id="7" name="Rectangle 6"/>
+          <p:cNvSpPr/>
+          <p:nvPr/>
+        </p:nvSpPr>
+        <p:spPr>
+          <a:xfrm>
+            <a:off x="5029200" y="3931920"/>
+            <a:ext cx="2130552" cy="54864"/>
           </a:xfrm>
           <a:prstGeom prst="rect">
             <a:avLst/>
           </a:prstGeom>
           <a:solidFill>
-            <a:srgbClr val="E5E7EB"/>
+            <a:srgbClr val="1C3557"/>
           </a:solidFill>
           <a:ln>
             <a:noFill/>
@@ -3279,14 +3367,14 @@
       </p:sp>
       <p:sp>
         <p:nvSpPr>
-          <p:cNvPr id="6" name="Rectangle 5"/>
-          <p:cNvSpPr/>
-          <p:nvPr/>
-        </p:nvSpPr>
-        <p:spPr>
-          <a:xfrm>
-            <a:off x="457200" y="3840480"/>
-            <a:ext cx="11274552" cy="640080"/>
+          <p:cNvPr id="8" name="Rectangle 7"/>
+          <p:cNvSpPr/>
+          <p:nvPr/>
+        </p:nvSpPr>
+        <p:spPr>
+          <a:xfrm>
+            <a:off x="457200" y="4114800"/>
+            <a:ext cx="11274552" cy="731520"/>
           </a:xfrm>
           <a:prstGeom prst="rect">
             <a:avLst/>
@@ -3316,7 +3404,7 @@
           <a:p>
             <a:pPr algn="ctr"/>
             <a:r>
-              <a:rPr sz="2400" b="1">
+              <a:rPr sz="2800" b="1">
                 <a:solidFill>
                   <a:srgbClr val="1C3557"/>
                 </a:solidFill>
@@ -3329,13 +3417,13 @@
       </p:sp>
       <p:sp>
         <p:nvSpPr>
-          <p:cNvPr id="7" name="Rectangle 6"/>
-          <p:cNvSpPr/>
-          <p:nvPr/>
-        </p:nvSpPr>
-        <p:spPr>
-          <a:xfrm>
-            <a:off x="457200" y="4572000"/>
+          <p:cNvPr id="9" name="Rectangle 8"/>
+          <p:cNvSpPr/>
+          <p:nvPr/>
+        </p:nvSpPr>
+        <p:spPr>
+          <a:xfrm>
+            <a:off x="457200" y="4937760"/>
             <a:ext cx="11274552" cy="640080"/>
           </a:xfrm>
           <a:prstGeom prst="rect">
@@ -3366,7 +3454,7 @@
           <a:p>
             <a:pPr algn="ctr"/>
             <a:r>
-              <a:rPr sz="2000" b="0">
+              <a:rPr sz="2200" b="0">
                 <a:solidFill>
                   <a:srgbClr val="1C3557"/>
                 </a:solidFill>
@@ -3379,13 +3467,13 @@
       </p:sp>
       <p:sp>
         <p:nvSpPr>
-          <p:cNvPr id="8" name="Rectangle 7"/>
-          <p:cNvSpPr/>
-          <p:nvPr/>
-        </p:nvSpPr>
-        <p:spPr>
-          <a:xfrm>
-            <a:off x="457200" y="5943600"/>
+          <p:cNvPr id="10" name="Rectangle 9"/>
+          <p:cNvSpPr/>
+          <p:nvPr/>
+        </p:nvSpPr>
+        <p:spPr>
+          <a:xfrm>
+            <a:off x="457200" y="6217920"/>
             <a:ext cx="11274552" cy="365760"/>
           </a:xfrm>
           <a:prstGeom prst="rect">
@@ -3416,7 +3504,7 @@
           <a:p>
             <a:pPr algn="ctr"/>
             <a:r>
-              <a:rPr sz="1300" b="0">
+              <a:rPr sz="1400" b="0">
                 <a:solidFill>
                   <a:srgbClr val="6B7280"/>
                 </a:solidFill>
@@ -3527,13 +3615,13 @@
           <a:p>
             <a:pPr algn="r"/>
             <a:r>
-              <a:rPr sz="1000" b="0">
+              <a:rPr sz="1100" b="0">
                 <a:solidFill>
                   <a:srgbClr val="6B7280"/>
                 </a:solidFill>
                 <a:latin typeface="Noto Sans JP"/>
               </a:rPr>
-              <a:t>10 / 11</a:t>
+              <a:t>10 / 13</a:t>
             </a:r>
           </a:p>
         </p:txBody>
@@ -3577,13 +3665,13 @@
           <a:p>
             <a:pPr algn="l"/>
             <a:r>
-              <a:rPr sz="2200" b="1">
+              <a:rPr sz="2400" b="1">
                 <a:solidFill>
                   <a:srgbClr val="1C3557"/>
                 </a:solidFill>
                 <a:latin typeface="Noto Sans JP"/>
               </a:rPr>
-              <a:t>6月末2人分 → 9月末5人分、Agent Teams も並走で構築</a:t>
+              <a:t>半期 ¥6,710,000、4案件すべてにAI社員が動いている</a:t>
             </a:r>
           </a:p>
         </p:txBody>
@@ -3597,7 +3685,7 @@
         <p:spPr>
           <a:xfrm>
             <a:off x="457200" y="1051560"/>
-            <a:ext cx="1371600" cy="54864"/>
+            <a:ext cx="1645920" cy="64008"/>
           </a:xfrm>
           <a:prstGeom prst="rect">
             <a:avLst/>
@@ -3639,8 +3727,8 @@
         </p:nvSpPr>
         <p:spPr>
           <a:xfrm>
-            <a:off x="457200" y="1371600"/>
-            <a:ext cx="2286000" cy="640080"/>
+            <a:off x="457200" y="1554480"/>
+            <a:ext cx="4572000" cy="640080"/>
           </a:xfrm>
           <a:prstGeom prst="rect">
             <a:avLst/>
@@ -3672,13 +3760,13 @@
           <a:p>
             <a:pPr algn="ctr"/>
             <a:r>
-              <a:rPr sz="1400" b="1">
+              <a:rPr sz="1600" b="1">
                 <a:solidFill>
                   <a:srgbClr val="FFFFFF"/>
                 </a:solidFill>
                 <a:latin typeface="Noto Sans JP"/>
               </a:rPr>
-              <a:t>月</a:t>
+              <a:t>案件</a:t>
             </a:r>
           </a:p>
         </p:txBody>
@@ -3691,8 +3779,8 @@
         </p:nvSpPr>
         <p:spPr>
           <a:xfrm>
-            <a:off x="2788920" y="1371600"/>
-            <a:ext cx="1828800" cy="640080"/>
+            <a:off x="5074920" y="1554480"/>
+            <a:ext cx="2743200" cy="640080"/>
           </a:xfrm>
           <a:prstGeom prst="rect">
             <a:avLst/>
@@ -3724,13 +3812,13 @@
           <a:p>
             <a:pPr algn="ctr"/>
             <a:r>
-              <a:rPr sz="1400" b="1">
+              <a:rPr sz="1600" b="1">
                 <a:solidFill>
                   <a:srgbClr val="FFFFFF"/>
                 </a:solidFill>
                 <a:latin typeface="Noto Sans JP"/>
               </a:rPr>
-              <a:t>達成水準</a:t>
+              <a:t>売上 (税抜)</a:t>
             </a:r>
           </a:p>
         </p:txBody>
@@ -3743,14 +3831,14 @@
         </p:nvSpPr>
         <p:spPr>
           <a:xfrm>
-            <a:off x="4663440" y="1371600"/>
-            <a:ext cx="7040880" cy="640080"/>
+            <a:off x="457200" y="2267712"/>
+            <a:ext cx="4572000" cy="640080"/>
           </a:xfrm>
           <a:prstGeom prst="rect">
             <a:avLst/>
           </a:prstGeom>
           <a:solidFill>
-            <a:srgbClr val="1C3557"/>
+            <a:srgbClr val="F3F4F6"/>
           </a:solidFill>
           <a:ln>
             <a:noFill/>
@@ -3774,15 +3862,15 @@
           <a:bodyPr rtlCol="0" anchor="ctr" wrap="square" lIns="137160" rIns="137160" tIns="73152" bIns="73152"/>
           <a:lstStyle/>
           <a:p>
-            <a:pPr algn="ctr"/>
-            <a:r>
-              <a:rPr sz="1400" b="1">
-                <a:solidFill>
-                  <a:srgbClr val="FFFFFF"/>
-                </a:solidFill>
-                <a:latin typeface="Noto Sans JP"/>
-              </a:rPr>
-              <a:t>動き</a:t>
+            <a:pPr algn="l"/>
+            <a:r>
+              <a:rPr sz="1600" b="0">
+                <a:solidFill>
+                  <a:srgbClr val="1C3557"/>
+                </a:solidFill>
+                <a:latin typeface="Noto Sans JP"/>
+              </a:rPr>
+              <a:t>NTTネクシア</a:t>
             </a:r>
           </a:p>
         </p:txBody>
@@ -3795,8 +3883,8 @@
         </p:nvSpPr>
         <p:spPr>
           <a:xfrm>
-            <a:off x="457200" y="2103120"/>
-            <a:ext cx="2286000" cy="640080"/>
+            <a:off x="5074920" y="2267712"/>
+            <a:ext cx="2743200" cy="640080"/>
           </a:xfrm>
           <a:prstGeom prst="rect">
             <a:avLst/>
@@ -3826,15 +3914,15 @@
           <a:bodyPr rtlCol="0" anchor="ctr" wrap="square" lIns="137160" rIns="137160" tIns="73152" bIns="73152"/>
           <a:lstStyle/>
           <a:p>
-            <a:pPr algn="ctr"/>
-            <a:r>
-              <a:rPr sz="1300" b="0">
+            <a:pPr algn="r"/>
+            <a:r>
+              <a:rPr sz="1600" b="0">
                 <a:solidFill>
                   <a:srgbClr val="1C3557"/>
                 </a:solidFill>
                 <a:latin typeface="Noto Sans JP"/>
               </a:rPr>
-              <a:t>4月 (現在)</a:t>
+              <a:t>¥5,000,000</a:t>
             </a:r>
           </a:p>
         </p:txBody>
@@ -3847,8 +3935,8 @@
         </p:nvSpPr>
         <p:spPr>
           <a:xfrm>
-            <a:off x="2788920" y="2103120"/>
-            <a:ext cx="1828800" cy="640080"/>
+            <a:off x="457200" y="2980944"/>
+            <a:ext cx="4572000" cy="640080"/>
           </a:xfrm>
           <a:prstGeom prst="rect">
             <a:avLst/>
@@ -3878,15 +3966,15 @@
           <a:bodyPr rtlCol="0" anchor="ctr" wrap="square" lIns="137160" rIns="137160" tIns="73152" bIns="73152"/>
           <a:lstStyle/>
           <a:p>
-            <a:pPr algn="ctr"/>
-            <a:r>
-              <a:rPr sz="1600" b="1">
+            <a:pPr algn="l"/>
+            <a:r>
+              <a:rPr sz="1600" b="0">
                 <a:solidFill>
                   <a:srgbClr val="1C3557"/>
                 </a:solidFill>
                 <a:latin typeface="Noto Sans JP"/>
               </a:rPr>
-              <a:t>1.3人分</a:t>
+              <a:t>中西製作所</a:t>
             </a:r>
           </a:p>
         </p:txBody>
@@ -3899,8 +3987,8 @@
         </p:nvSpPr>
         <p:spPr>
           <a:xfrm>
-            <a:off x="4663440" y="2103120"/>
-            <a:ext cx="7040880" cy="640080"/>
+            <a:off x="5074920" y="2980944"/>
+            <a:ext cx="2743200" cy="640080"/>
           </a:xfrm>
           <a:prstGeom prst="rect">
             <a:avLst/>
@@ -3930,15 +4018,15 @@
           <a:bodyPr rtlCol="0" anchor="ctr" wrap="square" lIns="137160" rIns="137160" tIns="73152" bIns="73152"/>
           <a:lstStyle/>
           <a:p>
-            <a:pPr algn="l"/>
-            <a:r>
-              <a:rPr sz="1200" b="0">
+            <a:pPr algn="r"/>
+            <a:r>
+              <a:rPr sz="1600" b="0">
                 <a:solidFill>
                   <a:srgbClr val="1C3557"/>
                 </a:solidFill>
                 <a:latin typeface="Noto Sans JP"/>
               </a:rPr>
-              <a:t>デリバリーAI + 戦略AI が稼働中</a:t>
+              <a:t>¥1,000,000</a:t>
             </a:r>
           </a:p>
         </p:txBody>
@@ -3951,14 +4039,14 @@
         </p:nvSpPr>
         <p:spPr>
           <a:xfrm>
-            <a:off x="457200" y="2834639"/>
-            <a:ext cx="2286000" cy="640080"/>
+            <a:off x="457200" y="3694176"/>
+            <a:ext cx="4572000" cy="640080"/>
           </a:xfrm>
           <a:prstGeom prst="rect">
             <a:avLst/>
           </a:prstGeom>
           <a:solidFill>
-            <a:srgbClr val="2563EB"/>
+            <a:srgbClr val="F3F4F6"/>
           </a:solidFill>
           <a:ln>
             <a:noFill/>
@@ -3982,15 +4070,15 @@
           <a:bodyPr rtlCol="0" anchor="ctr" wrap="square" lIns="137160" rIns="137160" tIns="73152" bIns="73152"/>
           <a:lstStyle/>
           <a:p>
-            <a:pPr algn="ctr"/>
-            <a:r>
-              <a:rPr sz="1300" b="1">
-                <a:solidFill>
-                  <a:srgbClr val="FFFFFF"/>
-                </a:solidFill>
-                <a:latin typeface="Noto Sans JP"/>
-              </a:rPr>
-              <a:t>6月末 (中間発表)</a:t>
+            <a:pPr algn="l"/>
+            <a:r>
+              <a:rPr sz="1600" b="0">
+                <a:solidFill>
+                  <a:srgbClr val="1C3557"/>
+                </a:solidFill>
+                <a:latin typeface="Noto Sans JP"/>
+              </a:rPr>
+              <a:t>中部キリンビバレッジ</a:t>
             </a:r>
           </a:p>
         </p:txBody>
@@ -4003,14 +4091,14 @@
         </p:nvSpPr>
         <p:spPr>
           <a:xfrm>
-            <a:off x="2788920" y="2834639"/>
-            <a:ext cx="1828800" cy="640080"/>
+            <a:off x="5074920" y="3694176"/>
+            <a:ext cx="2743200" cy="640080"/>
           </a:xfrm>
           <a:prstGeom prst="rect">
             <a:avLst/>
           </a:prstGeom>
           <a:solidFill>
-            <a:srgbClr val="2563EB"/>
+            <a:srgbClr val="F3F4F6"/>
           </a:solidFill>
           <a:ln>
             <a:noFill/>
@@ -4034,15 +4122,15 @@
           <a:bodyPr rtlCol="0" anchor="ctr" wrap="square" lIns="137160" rIns="137160" tIns="73152" bIns="73152"/>
           <a:lstStyle/>
           <a:p>
-            <a:pPr algn="ctr"/>
-            <a:r>
-              <a:rPr sz="1600" b="1">
-                <a:solidFill>
-                  <a:srgbClr val="FFFFFF"/>
-                </a:solidFill>
-                <a:latin typeface="Noto Sans JP"/>
-              </a:rPr>
-              <a:t>2人分</a:t>
+            <a:pPr algn="r"/>
+            <a:r>
+              <a:rPr sz="1600" b="0">
+                <a:solidFill>
+                  <a:srgbClr val="1C3557"/>
+                </a:solidFill>
+                <a:latin typeface="Noto Sans JP"/>
+              </a:rPr>
+              <a:t>¥450,000</a:t>
             </a:r>
           </a:p>
         </p:txBody>
@@ -4055,14 +4143,14 @@
         </p:nvSpPr>
         <p:spPr>
           <a:xfrm>
-            <a:off x="4663440" y="2834639"/>
-            <a:ext cx="7040880" cy="640080"/>
+            <a:off x="457200" y="4407408"/>
+            <a:ext cx="4572000" cy="640080"/>
           </a:xfrm>
           <a:prstGeom prst="rect">
             <a:avLst/>
           </a:prstGeom>
           <a:solidFill>
-            <a:srgbClr val="DBEAFE"/>
+            <a:srgbClr val="F3F4F6"/>
           </a:solidFill>
           <a:ln>
             <a:noFill/>
@@ -4088,13 +4176,13 @@
           <a:p>
             <a:pPr algn="l"/>
             <a:r>
-              <a:rPr sz="1200" b="0">
+              <a:rPr sz="1600" b="0">
                 <a:solidFill>
                   <a:srgbClr val="1C3557"/>
                 </a:solidFill>
                 <a:latin typeface="Noto Sans JP"/>
               </a:rPr>
-              <a:t>5人全員が同時進行で立ち上がり / Agent Teams 初期構築</a:t>
+              <a:t>ブロードリンク</a:t>
             </a:r>
           </a:p>
         </p:txBody>
@@ -4107,8 +4195,8 @@
         </p:nvSpPr>
         <p:spPr>
           <a:xfrm>
-            <a:off x="457200" y="3566159"/>
-            <a:ext cx="2286000" cy="640080"/>
+            <a:off x="5074920" y="4407408"/>
+            <a:ext cx="2743200" cy="640080"/>
           </a:xfrm>
           <a:prstGeom prst="rect">
             <a:avLst/>
@@ -4138,15 +4226,15 @@
           <a:bodyPr rtlCol="0" anchor="ctr" wrap="square" lIns="137160" rIns="137160" tIns="73152" bIns="73152"/>
           <a:lstStyle/>
           <a:p>
-            <a:pPr algn="ctr"/>
-            <a:r>
-              <a:rPr sz="1300" b="0">
+            <a:pPr algn="r"/>
+            <a:r>
+              <a:rPr sz="1600" b="0">
                 <a:solidFill>
                   <a:srgbClr val="1C3557"/>
                 </a:solidFill>
                 <a:latin typeface="Noto Sans JP"/>
               </a:rPr>
-              <a:t>7-8月</a:t>
+              <a:t>¥260,000</a:t>
             </a:r>
           </a:p>
         </p:txBody>
@@ -4159,14 +4247,14 @@
         </p:nvSpPr>
         <p:spPr>
           <a:xfrm>
-            <a:off x="2788920" y="3566159"/>
-            <a:ext cx="1828800" cy="640080"/>
+            <a:off x="457200" y="5120640"/>
+            <a:ext cx="4572000" cy="640080"/>
           </a:xfrm>
           <a:prstGeom prst="rect">
             <a:avLst/>
           </a:prstGeom>
           <a:solidFill>
-            <a:srgbClr val="F3F4F6"/>
+            <a:srgbClr val="2563EB"/>
           </a:solidFill>
           <a:ln>
             <a:noFill/>
@@ -4190,15 +4278,15 @@
           <a:bodyPr rtlCol="0" anchor="ctr" wrap="square" lIns="137160" rIns="137160" tIns="73152" bIns="73152"/>
           <a:lstStyle/>
           <a:p>
-            <a:pPr algn="ctr"/>
-            <a:r>
-              <a:rPr sz="1600" b="1">
-                <a:solidFill>
-                  <a:srgbClr val="1C3557"/>
-                </a:solidFill>
-                <a:latin typeface="Noto Sans JP"/>
-              </a:rPr>
-              <a:t>3〜4人分</a:t>
+            <a:pPr algn="l"/>
+            <a:r>
+              <a:rPr sz="1800" b="1">
+                <a:solidFill>
+                  <a:srgbClr val="FFFFFF"/>
+                </a:solidFill>
+                <a:latin typeface="Noto Sans JP"/>
+              </a:rPr>
+              <a:t>半期合計</a:t>
             </a:r>
           </a:p>
         </p:txBody>
@@ -4211,14 +4299,14 @@
         </p:nvSpPr>
         <p:spPr>
           <a:xfrm>
-            <a:off x="4663440" y="3566159"/>
-            <a:ext cx="7040880" cy="640080"/>
+            <a:off x="5074920" y="5120640"/>
+            <a:ext cx="2743200" cy="640080"/>
           </a:xfrm>
           <a:prstGeom prst="rect">
             <a:avLst/>
           </a:prstGeom>
           <a:solidFill>
-            <a:srgbClr val="F3F4F6"/>
+            <a:srgbClr val="2563EB"/>
           </a:solidFill>
           <a:ln>
             <a:noFill/>
@@ -4242,32 +4330,34 @@
           <a:bodyPr rtlCol="0" anchor="ctr" wrap="square" lIns="137160" rIns="137160" tIns="73152" bIns="73152"/>
           <a:lstStyle/>
           <a:p>
-            <a:pPr algn="l"/>
-            <a:r>
-              <a:rPr sz="1200" b="0">
-                <a:solidFill>
-                  <a:srgbClr val="1C3557"/>
-                </a:solidFill>
-                <a:latin typeface="Noto Sans JP"/>
-              </a:rPr>
-              <a:t>各領域で深化 / Agent Teams 連携テスト</a:t>
-            </a:r>
-          </a:p>
-        </p:txBody>
-      </p:sp>
-      <p:sp>
-        <p:nvSpPr>
-          <p:cNvPr id="18" name="Rectangle 17"/>
-          <p:cNvSpPr/>
-          <p:nvPr/>
-        </p:nvSpPr>
-        <p:spPr>
-          <a:xfrm>
-            <a:off x="457200" y="4297679"/>
-            <a:ext cx="2286000" cy="640080"/>
-          </a:xfrm>
-          <a:prstGeom prst="rect">
-            <a:avLst/>
+            <a:pPr algn="r"/>
+            <a:r>
+              <a:rPr sz="1800" b="1">
+                <a:solidFill>
+                  <a:srgbClr val="FFFFFF"/>
+                </a:solidFill>
+                <a:latin typeface="Noto Sans JP"/>
+              </a:rPr>
+              <a:t>¥6,710,000</a:t>
+            </a:r>
+          </a:p>
+        </p:txBody>
+      </p:sp>
+      <p:sp>
+        <p:nvSpPr>
+          <p:cNvPr id="18" name="Rounded Rectangle 17"/>
+          <p:cNvSpPr/>
+          <p:nvPr/>
+        </p:nvSpPr>
+        <p:spPr>
+          <a:xfrm>
+            <a:off x="8229600" y="1554480"/>
+            <a:ext cx="3502152" cy="4206240"/>
+          </a:xfrm>
+          <a:prstGeom prst="roundRect">
+            <a:avLst>
+              <a:gd name="adj" fmla="val 5000"/>
+            </a:avLst>
           </a:prstGeom>
           <a:solidFill>
             <a:srgbClr val="2563EB"/>
@@ -4296,167 +4386,109 @@
           <a:p>
             <a:pPr algn="ctr"/>
             <a:r>
-              <a:rPr sz="1300" b="1">
+              <a:rPr sz="2200" b="1">
                 <a:solidFill>
                   <a:srgbClr val="FFFFFF"/>
                 </a:solidFill>
                 <a:latin typeface="Noto Sans JP"/>
               </a:rPr>
-              <a:t>9月末 (最終)</a:t>
-            </a:r>
-          </a:p>
-        </p:txBody>
-      </p:sp>
-      <p:sp>
-        <p:nvSpPr>
-          <p:cNvPr id="19" name="Rectangle 18"/>
-          <p:cNvSpPr/>
-          <p:nvPr/>
-        </p:nvSpPr>
-        <p:spPr>
-          <a:xfrm>
-            <a:off x="2788920" y="4297679"/>
-            <a:ext cx="1828800" cy="640080"/>
-          </a:xfrm>
-          <a:prstGeom prst="rect">
-            <a:avLst/>
-          </a:prstGeom>
-          <a:solidFill>
-            <a:srgbClr val="2563EB"/>
-          </a:solidFill>
-          <a:ln>
-            <a:noFill/>
-          </a:ln>
-        </p:spPr>
-        <p:style>
-          <a:lnRef idx="1">
-            <a:schemeClr val="accent1"/>
-          </a:lnRef>
-          <a:fillRef idx="3">
-            <a:schemeClr val="accent1"/>
-          </a:fillRef>
-          <a:effectRef idx="2">
-            <a:schemeClr val="accent1"/>
-          </a:effectRef>
-          <a:fontRef idx="minor">
-            <a:schemeClr val="lt1"/>
-          </a:fontRef>
-        </p:style>
-        <p:txBody>
-          <a:bodyPr rtlCol="0" anchor="ctr" wrap="square" lIns="137160" rIns="137160" tIns="73152" bIns="73152"/>
-          <a:lstStyle/>
-          <a:p>
-            <a:pPr algn="ctr"/>
-            <a:r>
-              <a:rPr sz="1600" b="1">
+              <a:t>月換算</a:t>
+            </a:r>
+          </a:p>
+          <a:p>
+            <a:pPr algn="ctr"/>
+            <a:r>
+              <a:rPr sz="2200" b="1">
                 <a:solidFill>
                   <a:srgbClr val="FFFFFF"/>
                 </a:solidFill>
                 <a:latin typeface="Noto Sans JP"/>
               </a:rPr>
-              <a:t>5人分</a:t>
-            </a:r>
-          </a:p>
-        </p:txBody>
-      </p:sp>
-      <p:sp>
-        <p:nvSpPr>
-          <p:cNvPr id="20" name="Rectangle 19"/>
-          <p:cNvSpPr/>
-          <p:nvPr/>
-        </p:nvSpPr>
-        <p:spPr>
-          <a:xfrm>
-            <a:off x="4663440" y="4297679"/>
-            <a:ext cx="7040880" cy="640080"/>
-          </a:xfrm>
-          <a:prstGeom prst="rect">
-            <a:avLst/>
-          </a:prstGeom>
-          <a:solidFill>
-            <a:srgbClr val="DBEAFE"/>
-          </a:solidFill>
-          <a:ln>
-            <a:noFill/>
-          </a:ln>
-        </p:spPr>
-        <p:style>
-          <a:lnRef idx="1">
-            <a:schemeClr val="accent1"/>
-          </a:lnRef>
-          <a:fillRef idx="3">
-            <a:schemeClr val="accent1"/>
-          </a:fillRef>
-          <a:effectRef idx="2">
-            <a:schemeClr val="accent1"/>
-          </a:effectRef>
-          <a:fontRef idx="minor">
-            <a:schemeClr val="lt1"/>
-          </a:fontRef>
-        </p:style>
-        <p:txBody>
-          <a:bodyPr rtlCol="0" anchor="ctr" wrap="square" lIns="137160" rIns="137160" tIns="73152" bIns="73152"/>
-          <a:lstStyle/>
-          <a:p>
-            <a:pPr algn="l"/>
-            <a:r>
-              <a:rPr sz="1200" b="0">
-                <a:solidFill>
-                  <a:srgbClr val="1C3557"/>
-                </a:solidFill>
-                <a:latin typeface="Noto Sans JP"/>
-              </a:rPr>
-              <a:t>5人フル稼働 + Agent Teams で協働</a:t>
-            </a:r>
-          </a:p>
-        </p:txBody>
-      </p:sp>
-      <p:sp>
-        <p:nvSpPr>
-          <p:cNvPr id="21" name="Rectangle 20"/>
-          <p:cNvSpPr/>
-          <p:nvPr/>
-        </p:nvSpPr>
-        <p:spPr>
-          <a:xfrm>
-            <a:off x="457200" y="5486400"/>
-            <a:ext cx="11274552" cy="822960"/>
-          </a:xfrm>
-          <a:prstGeom prst="rect">
-            <a:avLst/>
-          </a:prstGeom>
-          <a:noFill/>
-          <a:ln>
-            <a:noFill/>
-          </a:ln>
-        </p:spPr>
-        <p:style>
-          <a:lnRef idx="1">
-            <a:schemeClr val="accent1"/>
-          </a:lnRef>
-          <a:fillRef idx="3">
-            <a:schemeClr val="accent1"/>
-          </a:fillRef>
-          <a:effectRef idx="2">
-            <a:schemeClr val="accent1"/>
-          </a:effectRef>
-          <a:fontRef idx="minor">
-            <a:schemeClr val="lt1"/>
-          </a:fontRef>
-        </p:style>
-        <p:txBody>
-          <a:bodyPr rtlCol="0" anchor="ctr" wrap="square" lIns="137160" rIns="137160" tIns="73152" bIns="73152"/>
-          <a:lstStyle/>
-          <a:p>
-            <a:pPr algn="ctr"/>
-            <a:r>
-              <a:rPr sz="1800" b="1">
-                <a:solidFill>
-                  <a:srgbClr val="2563EB"/>
-                </a:solidFill>
-                <a:latin typeface="Noto Sans JP"/>
-              </a:rPr>
-              <a:t>5人を網羅的に同時進行で育てる</a:t>
+              <a:t/>
+            </a:r>
+          </a:p>
+          <a:p>
+            <a:pPr algn="ctr"/>
+            <a:r>
+              <a:rPr sz="2200" b="1">
+                <a:solidFill>
+                  <a:srgbClr val="FFFFFF"/>
+                </a:solidFill>
+                <a:latin typeface="Noto Sans JP"/>
+              </a:rPr>
+              <a:t>¥464,000</a:t>
+            </a:r>
+          </a:p>
+          <a:p>
+            <a:pPr algn="ctr"/>
+            <a:r>
+              <a:rPr sz="2200" b="1">
+                <a:solidFill>
+                  <a:srgbClr val="FFFFFF"/>
+                </a:solidFill>
+                <a:latin typeface="Noto Sans JP"/>
+              </a:rPr>
+              <a:t/>
+            </a:r>
+          </a:p>
+          <a:p>
+            <a:pPr algn="ctr"/>
+            <a:r>
+              <a:rPr sz="2200" b="1">
+                <a:solidFill>
+                  <a:srgbClr val="FFFFFF"/>
+                </a:solidFill>
+                <a:latin typeface="Noto Sans JP"/>
+              </a:rPr>
+              <a:t>=</a:t>
+            </a:r>
+          </a:p>
+          <a:p>
+            <a:pPr algn="ctr"/>
+            <a:r>
+              <a:rPr sz="2200" b="1">
+                <a:solidFill>
+                  <a:srgbClr val="FFFFFF"/>
+                </a:solidFill>
+                <a:latin typeface="Noto Sans JP"/>
+              </a:rPr>
+              <a:t/>
+            </a:r>
+          </a:p>
+          <a:p>
+            <a:pPr algn="ctr"/>
+            <a:r>
+              <a:rPr sz="2200" b="1">
+                <a:solidFill>
+                  <a:srgbClr val="FFFFFF"/>
+                </a:solidFill>
+                <a:latin typeface="Noto Sans JP"/>
+              </a:rPr>
+              <a:t>AI社員</a:t>
+            </a:r>
+          </a:p>
+          <a:p>
+            <a:pPr algn="ctr"/>
+            <a:r>
+              <a:rPr sz="2200" b="1">
+                <a:solidFill>
+                  <a:srgbClr val="FFFFFF"/>
+                </a:solidFill>
+                <a:latin typeface="Noto Sans JP"/>
+              </a:rPr>
+              <a:t>1.3人分</a:t>
+            </a:r>
+          </a:p>
+          <a:p>
+            <a:pPr algn="ctr"/>
+            <a:r>
+              <a:rPr sz="2200" b="1">
+                <a:solidFill>
+                  <a:srgbClr val="FFFFFF"/>
+                </a:solidFill>
+                <a:latin typeface="Noto Sans JP"/>
+              </a:rPr>
+              <a:t>稼働中</a:t>
             </a:r>
           </a:p>
         </p:txBody>
@@ -4530,45 +4562,38 @@
         </p:nvSpPr>
         <p:spPr>
           <a:xfrm>
-            <a:off x="457200" y="1280160"/>
-            <a:ext cx="11274552" cy="1280160"/>
+            <a:off x="5029200" y="1371600"/>
+            <a:ext cx="2130552" cy="73152"/>
           </a:xfrm>
           <a:prstGeom prst="rect">
             <a:avLst/>
           </a:prstGeom>
-          <a:noFill/>
-          <a:ln>
-            <a:noFill/>
-          </a:ln>
-        </p:spPr>
-        <p:style>
-          <a:lnRef idx="1">
-            <a:schemeClr val="accent1"/>
-          </a:lnRef>
-          <a:fillRef idx="3">
-            <a:schemeClr val="accent1"/>
-          </a:fillRef>
-          <a:effectRef idx="2">
-            <a:schemeClr val="accent1"/>
-          </a:effectRef>
-          <a:fontRef idx="minor">
-            <a:schemeClr val="lt1"/>
-          </a:fontRef>
-        </p:style>
-        <p:txBody>
-          <a:bodyPr rtlCol="0" anchor="ctr" wrap="square" lIns="137160" rIns="137160" tIns="73152" bIns="73152"/>
-          <a:lstStyle/>
-          <a:p>
-            <a:pPr algn="ctr"/>
-            <a:r>
-              <a:rPr sz="3600" b="1">
-                <a:solidFill>
-                  <a:srgbClr val="1C3557"/>
-                </a:solidFill>
-                <a:latin typeface="Noto Sans JP"/>
-              </a:rPr>
-              <a:t>AI社員を動かして、</a:t>
-            </a:r>
+          <a:solidFill>
+            <a:srgbClr val="2563EB"/>
+          </a:solidFill>
+          <a:ln>
+            <a:noFill/>
+          </a:ln>
+        </p:spPr>
+        <p:style>
+          <a:lnRef idx="1">
+            <a:schemeClr val="accent1"/>
+          </a:lnRef>
+          <a:fillRef idx="3">
+            <a:schemeClr val="accent1"/>
+          </a:fillRef>
+          <a:effectRef idx="2">
+            <a:schemeClr val="accent1"/>
+          </a:effectRef>
+          <a:fontRef idx="minor">
+            <a:schemeClr val="lt1"/>
+          </a:fontRef>
+        </p:style>
+        <p:txBody>
+          <a:bodyPr rtlCol="0" anchor="ctr"/>
+          <a:lstStyle/>
+          <a:p>
+            <a:pPr algn="ctr"/>
           </a:p>
         </p:txBody>
       </p:sp>
@@ -4580,8 +4605,8 @@
         </p:nvSpPr>
         <p:spPr>
           <a:xfrm>
-            <a:off x="457200" y="2468880"/>
-            <a:ext cx="11274552" cy="1371600"/>
+            <a:off x="457200" y="1828800"/>
+            <a:ext cx="11274552" cy="1097280"/>
           </a:xfrm>
           <a:prstGeom prst="rect">
             <a:avLst/>
@@ -4611,69 +4636,119 @@
           <a:p>
             <a:pPr algn="ctr"/>
             <a:r>
-              <a:rPr sz="4400" b="1">
-                <a:solidFill>
-                  <a:srgbClr val="2563EB"/>
-                </a:solidFill>
-                <a:latin typeface="Noto Sans JP"/>
-              </a:rPr>
-              <a:t>Kawaru事業部の事業を推進する</a:t>
-            </a:r>
-          </a:p>
-        </p:txBody>
-      </p:sp>
-      <p:sp>
-        <p:nvSpPr>
-          <p:cNvPr id="5" name="Rectangle 4"/>
-          <p:cNvSpPr/>
-          <p:nvPr/>
-        </p:nvSpPr>
-        <p:spPr>
-          <a:xfrm>
-            <a:off x="5029200" y="4023360"/>
-            <a:ext cx="2130552" cy="54864"/>
+              <a:rPr sz="3400" b="1">
+                <a:solidFill>
+                  <a:srgbClr val="6B7280"/>
+                </a:solidFill>
+                <a:latin typeface="Noto Sans JP"/>
+              </a:rPr>
+              <a:t>ここまでが現状の話</a:t>
+            </a:r>
+          </a:p>
+        </p:txBody>
+      </p:sp>
+      <p:sp>
+        <p:nvSpPr>
+          <p:cNvPr id="5" name="Down Arrow 4"/>
+          <p:cNvSpPr/>
+          <p:nvPr/>
+        </p:nvSpPr>
+        <p:spPr>
+          <a:xfrm>
+            <a:off x="5641848" y="3108960"/>
+            <a:ext cx="914400" cy="731520"/>
+          </a:xfrm>
+          <a:prstGeom prst="downArrow">
+            <a:avLst/>
+          </a:prstGeom>
+          <a:solidFill>
+            <a:srgbClr val="2563EB"/>
+          </a:solidFill>
+          <a:ln>
+            <a:noFill/>
+          </a:ln>
+        </p:spPr>
+        <p:style>
+          <a:lnRef idx="1">
+            <a:schemeClr val="accent1"/>
+          </a:lnRef>
+          <a:fillRef idx="3">
+            <a:schemeClr val="accent1"/>
+          </a:fillRef>
+          <a:effectRef idx="2">
+            <a:schemeClr val="accent1"/>
+          </a:effectRef>
+          <a:fontRef idx="minor">
+            <a:schemeClr val="lt1"/>
+          </a:fontRef>
+        </p:style>
+        <p:txBody>
+          <a:bodyPr rtlCol="0" anchor="ctr"/>
+          <a:lstStyle/>
+          <a:p>
+            <a:pPr algn="ctr"/>
+          </a:p>
+        </p:txBody>
+      </p:sp>
+      <p:sp>
+        <p:nvSpPr>
+          <p:cNvPr id="6" name="Rectangle 5"/>
+          <p:cNvSpPr/>
+          <p:nvPr/>
+        </p:nvSpPr>
+        <p:spPr>
+          <a:xfrm>
+            <a:off x="457200" y="4023360"/>
+            <a:ext cx="11274552" cy="1371600"/>
           </a:xfrm>
           <a:prstGeom prst="rect">
             <a:avLst/>
           </a:prstGeom>
-          <a:solidFill>
-            <a:srgbClr val="2563EB"/>
-          </a:solidFill>
-          <a:ln>
-            <a:noFill/>
-          </a:ln>
-        </p:spPr>
-        <p:style>
-          <a:lnRef idx="1">
-            <a:schemeClr val="accent1"/>
-          </a:lnRef>
-          <a:fillRef idx="3">
-            <a:schemeClr val="accent1"/>
-          </a:fillRef>
-          <a:effectRef idx="2">
-            <a:schemeClr val="accent1"/>
-          </a:effectRef>
-          <a:fontRef idx="minor">
-            <a:schemeClr val="lt1"/>
-          </a:fontRef>
-        </p:style>
-        <p:txBody>
-          <a:bodyPr rtlCol="0" anchor="ctr"/>
-          <a:lstStyle/>
-          <a:p>
-            <a:pPr algn="ctr"/>
-          </a:p>
-        </p:txBody>
-      </p:sp>
-      <p:sp>
-        <p:nvSpPr>
-          <p:cNvPr id="6" name="Rectangle 5"/>
-          <p:cNvSpPr/>
-          <p:nvPr/>
-        </p:nvSpPr>
-        <p:spPr>
-          <a:xfrm>
-            <a:off x="457200" y="4480560"/>
+          <a:noFill/>
+          <a:ln>
+            <a:noFill/>
+          </a:ln>
+        </p:spPr>
+        <p:style>
+          <a:lnRef idx="1">
+            <a:schemeClr val="accent1"/>
+          </a:lnRef>
+          <a:fillRef idx="3">
+            <a:schemeClr val="accent1"/>
+          </a:fillRef>
+          <a:effectRef idx="2">
+            <a:schemeClr val="accent1"/>
+          </a:effectRef>
+          <a:fontRef idx="minor">
+            <a:schemeClr val="lt1"/>
+          </a:fontRef>
+        </p:style>
+        <p:txBody>
+          <a:bodyPr rtlCol="0" anchor="ctr" wrap="square" lIns="137160" rIns="137160" tIns="73152" bIns="73152"/>
+          <a:lstStyle/>
+          <a:p>
+            <a:pPr algn="ctr"/>
+            <a:r>
+              <a:rPr sz="5000" b="1">
+                <a:solidFill>
+                  <a:srgbClr val="2563EB"/>
+                </a:solidFill>
+                <a:latin typeface="Noto Sans JP"/>
+              </a:rPr>
+              <a:t>ここから今後の話</a:t>
+            </a:r>
+          </a:p>
+        </p:txBody>
+      </p:sp>
+      <p:sp>
+        <p:nvSpPr>
+          <p:cNvPr id="7" name="Rectangle 6"/>
+          <p:cNvSpPr/>
+          <p:nvPr/>
+        </p:nvSpPr>
+        <p:spPr>
+          <a:xfrm>
+            <a:off x="457200" y="5486400"/>
             <a:ext cx="11274552" cy="548640"/>
           </a:xfrm>
           <a:prstGeom prst="rect">
@@ -4710,20 +4785,1487 @@
                 </a:solidFill>
                 <a:latin typeface="Noto Sans JP"/>
               </a:rPr>
-              <a:t>2人 + AI社員5人 + Agent Teams で、Kawaru事業部を動かす</a:t>
-            </a:r>
-          </a:p>
-        </p:txBody>
-      </p:sp>
-      <p:sp>
-        <p:nvSpPr>
-          <p:cNvPr id="7" name="Rounded Rectangle 6"/>
-          <p:cNvSpPr/>
-          <p:nvPr/>
-        </p:nvSpPr>
-        <p:spPr>
-          <a:xfrm>
-            <a:off x="914400" y="5303520"/>
+              <a:t>9月末までにAI社員5人を完成させる</a:t>
+            </a:r>
+          </a:p>
+        </p:txBody>
+      </p:sp>
+      <p:sp>
+        <p:nvSpPr>
+          <p:cNvPr id="8" name="Rectangle 7"/>
+          <p:cNvSpPr/>
+          <p:nvPr/>
+        </p:nvSpPr>
+        <p:spPr>
+          <a:xfrm>
+            <a:off x="10972800" y="6492240"/>
+            <a:ext cx="1005840" cy="274320"/>
+          </a:xfrm>
+          <a:prstGeom prst="rect">
+            <a:avLst/>
+          </a:prstGeom>
+          <a:noFill/>
+          <a:ln>
+            <a:noFill/>
+          </a:ln>
+        </p:spPr>
+        <p:style>
+          <a:lnRef idx="1">
+            <a:schemeClr val="accent1"/>
+          </a:lnRef>
+          <a:fillRef idx="3">
+            <a:schemeClr val="accent1"/>
+          </a:fillRef>
+          <a:effectRef idx="2">
+            <a:schemeClr val="accent1"/>
+          </a:effectRef>
+          <a:fontRef idx="minor">
+            <a:schemeClr val="lt1"/>
+          </a:fontRef>
+        </p:style>
+        <p:txBody>
+          <a:bodyPr rtlCol="0" anchor="t" wrap="square" lIns="137160" rIns="137160" tIns="73152" bIns="73152"/>
+          <a:lstStyle/>
+          <a:p>
+            <a:pPr algn="r"/>
+            <a:r>
+              <a:rPr sz="1100" b="0">
+                <a:solidFill>
+                  <a:srgbClr val="6B7280"/>
+                </a:solidFill>
+                <a:latin typeface="Noto Sans JP"/>
+              </a:rPr>
+              <a:t>11 / 13</a:t>
+            </a:r>
+          </a:p>
+        </p:txBody>
+      </p:sp>
+    </p:spTree>
+  </p:cSld>
+  <p:clrMapOvr>
+    <a:masterClrMapping/>
+  </p:clrMapOvr>
+</p:sld>
+</file>
+
+<file path=ppt/slides/slide12.xml><?xml version="1.0" encoding="utf-8"?>
+<p:sld xmlns:a="http://schemas.openxmlformats.org/drawingml/2006/main" xmlns:p="http://schemas.openxmlformats.org/presentationml/2006/main" xmlns:r="http://schemas.openxmlformats.org/officeDocument/2006/relationships">
+  <p:cSld>
+    <p:spTree>
+      <p:nvGrpSpPr>
+        <p:cNvPr id="1" name=""/>
+        <p:cNvGrpSpPr/>
+        <p:nvPr/>
+      </p:nvGrpSpPr>
+      <p:grpSpPr/>
+      <p:sp>
+        <p:nvSpPr>
+          <p:cNvPr id="2" name="Rectangle 1"/>
+          <p:cNvSpPr/>
+          <p:nvPr/>
+        </p:nvSpPr>
+        <p:spPr>
+          <a:xfrm>
+            <a:off x="0" y="0"/>
+            <a:ext cx="12188952" cy="6858000"/>
+          </a:xfrm>
+          <a:prstGeom prst="rect">
+            <a:avLst/>
+          </a:prstGeom>
+          <a:solidFill>
+            <a:srgbClr val="FFFFFF"/>
+          </a:solidFill>
+          <a:ln>
+            <a:noFill/>
+          </a:ln>
+        </p:spPr>
+        <p:style>
+          <a:lnRef idx="1">
+            <a:schemeClr val="accent1"/>
+          </a:lnRef>
+          <a:fillRef idx="3">
+            <a:schemeClr val="accent1"/>
+          </a:fillRef>
+          <a:effectRef idx="2">
+            <a:schemeClr val="accent1"/>
+          </a:effectRef>
+          <a:fontRef idx="minor">
+            <a:schemeClr val="lt1"/>
+          </a:fontRef>
+        </p:style>
+        <p:txBody>
+          <a:bodyPr rtlCol="0" anchor="ctr"/>
+          <a:lstStyle/>
+          <a:p>
+            <a:pPr algn="ctr"/>
+          </a:p>
+        </p:txBody>
+      </p:sp>
+      <p:sp>
+        <p:nvSpPr>
+          <p:cNvPr id="3" name="Rectangle 2"/>
+          <p:cNvSpPr/>
+          <p:nvPr/>
+        </p:nvSpPr>
+        <p:spPr>
+          <a:xfrm>
+            <a:off x="10972800" y="274320"/>
+            <a:ext cx="1005840" cy="274320"/>
+          </a:xfrm>
+          <a:prstGeom prst="rect">
+            <a:avLst/>
+          </a:prstGeom>
+          <a:noFill/>
+          <a:ln>
+            <a:noFill/>
+          </a:ln>
+        </p:spPr>
+        <p:style>
+          <a:lnRef idx="1">
+            <a:schemeClr val="accent1"/>
+          </a:lnRef>
+          <a:fillRef idx="3">
+            <a:schemeClr val="accent1"/>
+          </a:fillRef>
+          <a:effectRef idx="2">
+            <a:schemeClr val="accent1"/>
+          </a:effectRef>
+          <a:fontRef idx="minor">
+            <a:schemeClr val="lt1"/>
+          </a:fontRef>
+        </p:style>
+        <p:txBody>
+          <a:bodyPr rtlCol="0" anchor="t" wrap="square" lIns="137160" rIns="137160" tIns="73152" bIns="73152"/>
+          <a:lstStyle/>
+          <a:p>
+            <a:pPr algn="r"/>
+            <a:r>
+              <a:rPr sz="1100" b="0">
+                <a:solidFill>
+                  <a:srgbClr val="6B7280"/>
+                </a:solidFill>
+                <a:latin typeface="Noto Sans JP"/>
+              </a:rPr>
+              <a:t>12 / 13</a:t>
+            </a:r>
+          </a:p>
+        </p:txBody>
+      </p:sp>
+      <p:sp>
+        <p:nvSpPr>
+          <p:cNvPr id="4" name="Rectangle 3"/>
+          <p:cNvSpPr/>
+          <p:nvPr/>
+        </p:nvSpPr>
+        <p:spPr>
+          <a:xfrm>
+            <a:off x="457200" y="365760"/>
+            <a:ext cx="10515600" cy="640080"/>
+          </a:xfrm>
+          <a:prstGeom prst="rect">
+            <a:avLst/>
+          </a:prstGeom>
+          <a:noFill/>
+          <a:ln>
+            <a:noFill/>
+          </a:ln>
+        </p:spPr>
+        <p:style>
+          <a:lnRef idx="1">
+            <a:schemeClr val="accent1"/>
+          </a:lnRef>
+          <a:fillRef idx="3">
+            <a:schemeClr val="accent1"/>
+          </a:fillRef>
+          <a:effectRef idx="2">
+            <a:schemeClr val="accent1"/>
+          </a:effectRef>
+          <a:fontRef idx="minor">
+            <a:schemeClr val="lt1"/>
+          </a:fontRef>
+        </p:style>
+        <p:txBody>
+          <a:bodyPr rtlCol="0" anchor="t" wrap="square" lIns="137160" rIns="137160" tIns="73152" bIns="73152"/>
+          <a:lstStyle/>
+          <a:p>
+            <a:pPr algn="l"/>
+            <a:r>
+              <a:rPr sz="2400" b="1">
+                <a:solidFill>
+                  <a:srgbClr val="1C3557"/>
+                </a:solidFill>
+                <a:latin typeface="Noto Sans JP"/>
+              </a:rPr>
+              <a:t>6月末 2人分 → 9月末 5人分、Agent Teamsも並走</a:t>
+            </a:r>
+          </a:p>
+        </p:txBody>
+      </p:sp>
+      <p:sp>
+        <p:nvSpPr>
+          <p:cNvPr id="5" name="Rectangle 4"/>
+          <p:cNvSpPr/>
+          <p:nvPr/>
+        </p:nvSpPr>
+        <p:spPr>
+          <a:xfrm>
+            <a:off x="457200" y="1051560"/>
+            <a:ext cx="1645920" cy="64008"/>
+          </a:xfrm>
+          <a:prstGeom prst="rect">
+            <a:avLst/>
+          </a:prstGeom>
+          <a:solidFill>
+            <a:srgbClr val="2563EB"/>
+          </a:solidFill>
+          <a:ln>
+            <a:noFill/>
+          </a:ln>
+        </p:spPr>
+        <p:style>
+          <a:lnRef idx="1">
+            <a:schemeClr val="accent1"/>
+          </a:lnRef>
+          <a:fillRef idx="3">
+            <a:schemeClr val="accent1"/>
+          </a:fillRef>
+          <a:effectRef idx="2">
+            <a:schemeClr val="accent1"/>
+          </a:effectRef>
+          <a:fontRef idx="minor">
+            <a:schemeClr val="lt1"/>
+          </a:fontRef>
+        </p:style>
+        <p:txBody>
+          <a:bodyPr rtlCol="0" anchor="ctr"/>
+          <a:lstStyle/>
+          <a:p>
+            <a:pPr algn="ctr"/>
+          </a:p>
+        </p:txBody>
+      </p:sp>
+      <p:sp>
+        <p:nvSpPr>
+          <p:cNvPr id="6" name="Rectangle 5"/>
+          <p:cNvSpPr/>
+          <p:nvPr/>
+        </p:nvSpPr>
+        <p:spPr>
+          <a:xfrm>
+            <a:off x="457200" y="1371600"/>
+            <a:ext cx="2286000" cy="685800"/>
+          </a:xfrm>
+          <a:prstGeom prst="rect">
+            <a:avLst/>
+          </a:prstGeom>
+          <a:solidFill>
+            <a:srgbClr val="1C3557"/>
+          </a:solidFill>
+          <a:ln>
+            <a:noFill/>
+          </a:ln>
+        </p:spPr>
+        <p:style>
+          <a:lnRef idx="1">
+            <a:schemeClr val="accent1"/>
+          </a:lnRef>
+          <a:fillRef idx="3">
+            <a:schemeClr val="accent1"/>
+          </a:fillRef>
+          <a:effectRef idx="2">
+            <a:schemeClr val="accent1"/>
+          </a:effectRef>
+          <a:fontRef idx="minor">
+            <a:schemeClr val="lt1"/>
+          </a:fontRef>
+        </p:style>
+        <p:txBody>
+          <a:bodyPr rtlCol="0" anchor="ctr" wrap="square" lIns="137160" rIns="137160" tIns="73152" bIns="73152"/>
+          <a:lstStyle/>
+          <a:p>
+            <a:pPr algn="ctr"/>
+            <a:r>
+              <a:rPr sz="1600" b="1">
+                <a:solidFill>
+                  <a:srgbClr val="FFFFFF"/>
+                </a:solidFill>
+                <a:latin typeface="Noto Sans JP"/>
+              </a:rPr>
+              <a:t>月</a:t>
+            </a:r>
+          </a:p>
+        </p:txBody>
+      </p:sp>
+      <p:sp>
+        <p:nvSpPr>
+          <p:cNvPr id="7" name="Rectangle 6"/>
+          <p:cNvSpPr/>
+          <p:nvPr/>
+        </p:nvSpPr>
+        <p:spPr>
+          <a:xfrm>
+            <a:off x="2788920" y="1371600"/>
+            <a:ext cx="1828800" cy="685800"/>
+          </a:xfrm>
+          <a:prstGeom prst="rect">
+            <a:avLst/>
+          </a:prstGeom>
+          <a:solidFill>
+            <a:srgbClr val="1C3557"/>
+          </a:solidFill>
+          <a:ln>
+            <a:noFill/>
+          </a:ln>
+        </p:spPr>
+        <p:style>
+          <a:lnRef idx="1">
+            <a:schemeClr val="accent1"/>
+          </a:lnRef>
+          <a:fillRef idx="3">
+            <a:schemeClr val="accent1"/>
+          </a:fillRef>
+          <a:effectRef idx="2">
+            <a:schemeClr val="accent1"/>
+          </a:effectRef>
+          <a:fontRef idx="minor">
+            <a:schemeClr val="lt1"/>
+          </a:fontRef>
+        </p:style>
+        <p:txBody>
+          <a:bodyPr rtlCol="0" anchor="ctr" wrap="square" lIns="137160" rIns="137160" tIns="73152" bIns="73152"/>
+          <a:lstStyle/>
+          <a:p>
+            <a:pPr algn="ctr"/>
+            <a:r>
+              <a:rPr sz="1600" b="1">
+                <a:solidFill>
+                  <a:srgbClr val="FFFFFF"/>
+                </a:solidFill>
+                <a:latin typeface="Noto Sans JP"/>
+              </a:rPr>
+              <a:t>達成水準</a:t>
+            </a:r>
+          </a:p>
+        </p:txBody>
+      </p:sp>
+      <p:sp>
+        <p:nvSpPr>
+          <p:cNvPr id="8" name="Rectangle 7"/>
+          <p:cNvSpPr/>
+          <p:nvPr/>
+        </p:nvSpPr>
+        <p:spPr>
+          <a:xfrm>
+            <a:off x="4663440" y="1371600"/>
+            <a:ext cx="7040880" cy="685800"/>
+          </a:xfrm>
+          <a:prstGeom prst="rect">
+            <a:avLst/>
+          </a:prstGeom>
+          <a:solidFill>
+            <a:srgbClr val="1C3557"/>
+          </a:solidFill>
+          <a:ln>
+            <a:noFill/>
+          </a:ln>
+        </p:spPr>
+        <p:style>
+          <a:lnRef idx="1">
+            <a:schemeClr val="accent1"/>
+          </a:lnRef>
+          <a:fillRef idx="3">
+            <a:schemeClr val="accent1"/>
+          </a:fillRef>
+          <a:effectRef idx="2">
+            <a:schemeClr val="accent1"/>
+          </a:effectRef>
+          <a:fontRef idx="minor">
+            <a:schemeClr val="lt1"/>
+          </a:fontRef>
+        </p:style>
+        <p:txBody>
+          <a:bodyPr rtlCol="0" anchor="ctr" wrap="square" lIns="137160" rIns="137160" tIns="73152" bIns="73152"/>
+          <a:lstStyle/>
+          <a:p>
+            <a:pPr algn="ctr"/>
+            <a:r>
+              <a:rPr sz="1600" b="1">
+                <a:solidFill>
+                  <a:srgbClr val="FFFFFF"/>
+                </a:solidFill>
+                <a:latin typeface="Noto Sans JP"/>
+              </a:rPr>
+              <a:t>動き</a:t>
+            </a:r>
+          </a:p>
+        </p:txBody>
+      </p:sp>
+      <p:sp>
+        <p:nvSpPr>
+          <p:cNvPr id="9" name="Rectangle 8"/>
+          <p:cNvSpPr/>
+          <p:nvPr/>
+        </p:nvSpPr>
+        <p:spPr>
+          <a:xfrm>
+            <a:off x="457200" y="2130552"/>
+            <a:ext cx="2286000" cy="685800"/>
+          </a:xfrm>
+          <a:prstGeom prst="rect">
+            <a:avLst/>
+          </a:prstGeom>
+          <a:solidFill>
+            <a:srgbClr val="F3F4F6"/>
+          </a:solidFill>
+          <a:ln>
+            <a:noFill/>
+          </a:ln>
+        </p:spPr>
+        <p:style>
+          <a:lnRef idx="1">
+            <a:schemeClr val="accent1"/>
+          </a:lnRef>
+          <a:fillRef idx="3">
+            <a:schemeClr val="accent1"/>
+          </a:fillRef>
+          <a:effectRef idx="2">
+            <a:schemeClr val="accent1"/>
+          </a:effectRef>
+          <a:fontRef idx="minor">
+            <a:schemeClr val="lt1"/>
+          </a:fontRef>
+        </p:style>
+        <p:txBody>
+          <a:bodyPr rtlCol="0" anchor="ctr" wrap="square" lIns="137160" rIns="137160" tIns="73152" bIns="73152"/>
+          <a:lstStyle/>
+          <a:p>
+            <a:pPr algn="ctr"/>
+            <a:r>
+              <a:rPr sz="1400" b="0">
+                <a:solidFill>
+                  <a:srgbClr val="1C3557"/>
+                </a:solidFill>
+                <a:latin typeface="Noto Sans JP"/>
+              </a:rPr>
+              <a:t>4月 (現在)</a:t>
+            </a:r>
+          </a:p>
+        </p:txBody>
+      </p:sp>
+      <p:sp>
+        <p:nvSpPr>
+          <p:cNvPr id="10" name="Rectangle 9"/>
+          <p:cNvSpPr/>
+          <p:nvPr/>
+        </p:nvSpPr>
+        <p:spPr>
+          <a:xfrm>
+            <a:off x="2788920" y="2130552"/>
+            <a:ext cx="1828800" cy="685800"/>
+          </a:xfrm>
+          <a:prstGeom prst="rect">
+            <a:avLst/>
+          </a:prstGeom>
+          <a:solidFill>
+            <a:srgbClr val="F3F4F6"/>
+          </a:solidFill>
+          <a:ln>
+            <a:noFill/>
+          </a:ln>
+        </p:spPr>
+        <p:style>
+          <a:lnRef idx="1">
+            <a:schemeClr val="accent1"/>
+          </a:lnRef>
+          <a:fillRef idx="3">
+            <a:schemeClr val="accent1"/>
+          </a:fillRef>
+          <a:effectRef idx="2">
+            <a:schemeClr val="accent1"/>
+          </a:effectRef>
+          <a:fontRef idx="minor">
+            <a:schemeClr val="lt1"/>
+          </a:fontRef>
+        </p:style>
+        <p:txBody>
+          <a:bodyPr rtlCol="0" anchor="ctr" wrap="square" lIns="137160" rIns="137160" tIns="73152" bIns="73152"/>
+          <a:lstStyle/>
+          <a:p>
+            <a:pPr algn="ctr"/>
+            <a:r>
+              <a:rPr sz="1800" b="1">
+                <a:solidFill>
+                  <a:srgbClr val="1C3557"/>
+                </a:solidFill>
+                <a:latin typeface="Noto Sans JP"/>
+              </a:rPr>
+              <a:t>1.3人分</a:t>
+            </a:r>
+          </a:p>
+        </p:txBody>
+      </p:sp>
+      <p:sp>
+        <p:nvSpPr>
+          <p:cNvPr id="11" name="Rectangle 10"/>
+          <p:cNvSpPr/>
+          <p:nvPr/>
+        </p:nvSpPr>
+        <p:spPr>
+          <a:xfrm>
+            <a:off x="4663440" y="2130552"/>
+            <a:ext cx="7040880" cy="685800"/>
+          </a:xfrm>
+          <a:prstGeom prst="rect">
+            <a:avLst/>
+          </a:prstGeom>
+          <a:solidFill>
+            <a:srgbClr val="F3F4F6"/>
+          </a:solidFill>
+          <a:ln>
+            <a:noFill/>
+          </a:ln>
+        </p:spPr>
+        <p:style>
+          <a:lnRef idx="1">
+            <a:schemeClr val="accent1"/>
+          </a:lnRef>
+          <a:fillRef idx="3">
+            <a:schemeClr val="accent1"/>
+          </a:fillRef>
+          <a:effectRef idx="2">
+            <a:schemeClr val="accent1"/>
+          </a:effectRef>
+          <a:fontRef idx="minor">
+            <a:schemeClr val="lt1"/>
+          </a:fontRef>
+        </p:style>
+        <p:txBody>
+          <a:bodyPr rtlCol="0" anchor="ctr" wrap="square" lIns="137160" rIns="137160" tIns="73152" bIns="73152"/>
+          <a:lstStyle/>
+          <a:p>
+            <a:pPr algn="l"/>
+            <a:r>
+              <a:rPr sz="1300" b="0">
+                <a:solidFill>
+                  <a:srgbClr val="1C3557"/>
+                </a:solidFill>
+                <a:latin typeface="Noto Sans JP"/>
+              </a:rPr>
+              <a:t>デリバリーAI + 戦略AI が稼働中</a:t>
+            </a:r>
+          </a:p>
+        </p:txBody>
+      </p:sp>
+      <p:sp>
+        <p:nvSpPr>
+          <p:cNvPr id="12" name="Rectangle 11"/>
+          <p:cNvSpPr/>
+          <p:nvPr/>
+        </p:nvSpPr>
+        <p:spPr>
+          <a:xfrm>
+            <a:off x="457200" y="2889504"/>
+            <a:ext cx="2286000" cy="685800"/>
+          </a:xfrm>
+          <a:prstGeom prst="rect">
+            <a:avLst/>
+          </a:prstGeom>
+          <a:solidFill>
+            <a:srgbClr val="2563EB"/>
+          </a:solidFill>
+          <a:ln>
+            <a:noFill/>
+          </a:ln>
+        </p:spPr>
+        <p:style>
+          <a:lnRef idx="1">
+            <a:schemeClr val="accent1"/>
+          </a:lnRef>
+          <a:fillRef idx="3">
+            <a:schemeClr val="accent1"/>
+          </a:fillRef>
+          <a:effectRef idx="2">
+            <a:schemeClr val="accent1"/>
+          </a:effectRef>
+          <a:fontRef idx="minor">
+            <a:schemeClr val="lt1"/>
+          </a:fontRef>
+        </p:style>
+        <p:txBody>
+          <a:bodyPr rtlCol="0" anchor="ctr" wrap="square" lIns="137160" rIns="137160" tIns="73152" bIns="73152"/>
+          <a:lstStyle/>
+          <a:p>
+            <a:pPr algn="ctr"/>
+            <a:r>
+              <a:rPr sz="1400" b="1">
+                <a:solidFill>
+                  <a:srgbClr val="FFFFFF"/>
+                </a:solidFill>
+                <a:latin typeface="Noto Sans JP"/>
+              </a:rPr>
+              <a:t>6月末 (中間発表)</a:t>
+            </a:r>
+          </a:p>
+        </p:txBody>
+      </p:sp>
+      <p:sp>
+        <p:nvSpPr>
+          <p:cNvPr id="13" name="Rectangle 12"/>
+          <p:cNvSpPr/>
+          <p:nvPr/>
+        </p:nvSpPr>
+        <p:spPr>
+          <a:xfrm>
+            <a:off x="2788920" y="2889504"/>
+            <a:ext cx="1828800" cy="685800"/>
+          </a:xfrm>
+          <a:prstGeom prst="rect">
+            <a:avLst/>
+          </a:prstGeom>
+          <a:solidFill>
+            <a:srgbClr val="2563EB"/>
+          </a:solidFill>
+          <a:ln>
+            <a:noFill/>
+          </a:ln>
+        </p:spPr>
+        <p:style>
+          <a:lnRef idx="1">
+            <a:schemeClr val="accent1"/>
+          </a:lnRef>
+          <a:fillRef idx="3">
+            <a:schemeClr val="accent1"/>
+          </a:fillRef>
+          <a:effectRef idx="2">
+            <a:schemeClr val="accent1"/>
+          </a:effectRef>
+          <a:fontRef idx="minor">
+            <a:schemeClr val="lt1"/>
+          </a:fontRef>
+        </p:style>
+        <p:txBody>
+          <a:bodyPr rtlCol="0" anchor="ctr" wrap="square" lIns="137160" rIns="137160" tIns="73152" bIns="73152"/>
+          <a:lstStyle/>
+          <a:p>
+            <a:pPr algn="ctr"/>
+            <a:r>
+              <a:rPr sz="1800" b="1">
+                <a:solidFill>
+                  <a:srgbClr val="FFFFFF"/>
+                </a:solidFill>
+                <a:latin typeface="Noto Sans JP"/>
+              </a:rPr>
+              <a:t>2人分</a:t>
+            </a:r>
+          </a:p>
+        </p:txBody>
+      </p:sp>
+      <p:sp>
+        <p:nvSpPr>
+          <p:cNvPr id="14" name="Rectangle 13"/>
+          <p:cNvSpPr/>
+          <p:nvPr/>
+        </p:nvSpPr>
+        <p:spPr>
+          <a:xfrm>
+            <a:off x="4663440" y="2889504"/>
+            <a:ext cx="7040880" cy="685800"/>
+          </a:xfrm>
+          <a:prstGeom prst="rect">
+            <a:avLst/>
+          </a:prstGeom>
+          <a:solidFill>
+            <a:srgbClr val="DBEAFE"/>
+          </a:solidFill>
+          <a:ln>
+            <a:noFill/>
+          </a:ln>
+        </p:spPr>
+        <p:style>
+          <a:lnRef idx="1">
+            <a:schemeClr val="accent1"/>
+          </a:lnRef>
+          <a:fillRef idx="3">
+            <a:schemeClr val="accent1"/>
+          </a:fillRef>
+          <a:effectRef idx="2">
+            <a:schemeClr val="accent1"/>
+          </a:effectRef>
+          <a:fontRef idx="minor">
+            <a:schemeClr val="lt1"/>
+          </a:fontRef>
+        </p:style>
+        <p:txBody>
+          <a:bodyPr rtlCol="0" anchor="ctr" wrap="square" lIns="137160" rIns="137160" tIns="73152" bIns="73152"/>
+          <a:lstStyle/>
+          <a:p>
+            <a:pPr algn="l"/>
+            <a:r>
+              <a:rPr sz="1300" b="0">
+                <a:solidFill>
+                  <a:srgbClr val="1C3557"/>
+                </a:solidFill>
+                <a:latin typeface="Noto Sans JP"/>
+              </a:rPr>
+              <a:t>5人全員が同時進行で立ち上がり / Agent Teams 初期構築</a:t>
+            </a:r>
+          </a:p>
+        </p:txBody>
+      </p:sp>
+      <p:sp>
+        <p:nvSpPr>
+          <p:cNvPr id="15" name="Rectangle 14"/>
+          <p:cNvSpPr/>
+          <p:nvPr/>
+        </p:nvSpPr>
+        <p:spPr>
+          <a:xfrm>
+            <a:off x="457200" y="3648456"/>
+            <a:ext cx="2286000" cy="685800"/>
+          </a:xfrm>
+          <a:prstGeom prst="rect">
+            <a:avLst/>
+          </a:prstGeom>
+          <a:solidFill>
+            <a:srgbClr val="F3F4F6"/>
+          </a:solidFill>
+          <a:ln>
+            <a:noFill/>
+          </a:ln>
+        </p:spPr>
+        <p:style>
+          <a:lnRef idx="1">
+            <a:schemeClr val="accent1"/>
+          </a:lnRef>
+          <a:fillRef idx="3">
+            <a:schemeClr val="accent1"/>
+          </a:fillRef>
+          <a:effectRef idx="2">
+            <a:schemeClr val="accent1"/>
+          </a:effectRef>
+          <a:fontRef idx="minor">
+            <a:schemeClr val="lt1"/>
+          </a:fontRef>
+        </p:style>
+        <p:txBody>
+          <a:bodyPr rtlCol="0" anchor="ctr" wrap="square" lIns="137160" rIns="137160" tIns="73152" bIns="73152"/>
+          <a:lstStyle/>
+          <a:p>
+            <a:pPr algn="ctr"/>
+            <a:r>
+              <a:rPr sz="1400" b="0">
+                <a:solidFill>
+                  <a:srgbClr val="1C3557"/>
+                </a:solidFill>
+                <a:latin typeface="Noto Sans JP"/>
+              </a:rPr>
+              <a:t>7-8月</a:t>
+            </a:r>
+          </a:p>
+        </p:txBody>
+      </p:sp>
+      <p:sp>
+        <p:nvSpPr>
+          <p:cNvPr id="16" name="Rectangle 15"/>
+          <p:cNvSpPr/>
+          <p:nvPr/>
+        </p:nvSpPr>
+        <p:spPr>
+          <a:xfrm>
+            <a:off x="2788920" y="3648456"/>
+            <a:ext cx="1828800" cy="685800"/>
+          </a:xfrm>
+          <a:prstGeom prst="rect">
+            <a:avLst/>
+          </a:prstGeom>
+          <a:solidFill>
+            <a:srgbClr val="F3F4F6"/>
+          </a:solidFill>
+          <a:ln>
+            <a:noFill/>
+          </a:ln>
+        </p:spPr>
+        <p:style>
+          <a:lnRef idx="1">
+            <a:schemeClr val="accent1"/>
+          </a:lnRef>
+          <a:fillRef idx="3">
+            <a:schemeClr val="accent1"/>
+          </a:fillRef>
+          <a:effectRef idx="2">
+            <a:schemeClr val="accent1"/>
+          </a:effectRef>
+          <a:fontRef idx="minor">
+            <a:schemeClr val="lt1"/>
+          </a:fontRef>
+        </p:style>
+        <p:txBody>
+          <a:bodyPr rtlCol="0" anchor="ctr" wrap="square" lIns="137160" rIns="137160" tIns="73152" bIns="73152"/>
+          <a:lstStyle/>
+          <a:p>
+            <a:pPr algn="ctr"/>
+            <a:r>
+              <a:rPr sz="1800" b="1">
+                <a:solidFill>
+                  <a:srgbClr val="1C3557"/>
+                </a:solidFill>
+                <a:latin typeface="Noto Sans JP"/>
+              </a:rPr>
+              <a:t>3〜4人分</a:t>
+            </a:r>
+          </a:p>
+        </p:txBody>
+      </p:sp>
+      <p:sp>
+        <p:nvSpPr>
+          <p:cNvPr id="17" name="Rectangle 16"/>
+          <p:cNvSpPr/>
+          <p:nvPr/>
+        </p:nvSpPr>
+        <p:spPr>
+          <a:xfrm>
+            <a:off x="4663440" y="3648456"/>
+            <a:ext cx="7040880" cy="685800"/>
+          </a:xfrm>
+          <a:prstGeom prst="rect">
+            <a:avLst/>
+          </a:prstGeom>
+          <a:solidFill>
+            <a:srgbClr val="F3F4F6"/>
+          </a:solidFill>
+          <a:ln>
+            <a:noFill/>
+          </a:ln>
+        </p:spPr>
+        <p:style>
+          <a:lnRef idx="1">
+            <a:schemeClr val="accent1"/>
+          </a:lnRef>
+          <a:fillRef idx="3">
+            <a:schemeClr val="accent1"/>
+          </a:fillRef>
+          <a:effectRef idx="2">
+            <a:schemeClr val="accent1"/>
+          </a:effectRef>
+          <a:fontRef idx="minor">
+            <a:schemeClr val="lt1"/>
+          </a:fontRef>
+        </p:style>
+        <p:txBody>
+          <a:bodyPr rtlCol="0" anchor="ctr" wrap="square" lIns="137160" rIns="137160" tIns="73152" bIns="73152"/>
+          <a:lstStyle/>
+          <a:p>
+            <a:pPr algn="l"/>
+            <a:r>
+              <a:rPr sz="1300" b="0">
+                <a:solidFill>
+                  <a:srgbClr val="1C3557"/>
+                </a:solidFill>
+                <a:latin typeface="Noto Sans JP"/>
+              </a:rPr>
+              <a:t>各領域で深化 / Agent Teams 連携テスト</a:t>
+            </a:r>
+          </a:p>
+        </p:txBody>
+      </p:sp>
+      <p:sp>
+        <p:nvSpPr>
+          <p:cNvPr id="18" name="Rectangle 17"/>
+          <p:cNvSpPr/>
+          <p:nvPr/>
+        </p:nvSpPr>
+        <p:spPr>
+          <a:xfrm>
+            <a:off x="457200" y="4407408"/>
+            <a:ext cx="2286000" cy="685800"/>
+          </a:xfrm>
+          <a:prstGeom prst="rect">
+            <a:avLst/>
+          </a:prstGeom>
+          <a:solidFill>
+            <a:srgbClr val="2563EB"/>
+          </a:solidFill>
+          <a:ln>
+            <a:noFill/>
+          </a:ln>
+        </p:spPr>
+        <p:style>
+          <a:lnRef idx="1">
+            <a:schemeClr val="accent1"/>
+          </a:lnRef>
+          <a:fillRef idx="3">
+            <a:schemeClr val="accent1"/>
+          </a:fillRef>
+          <a:effectRef idx="2">
+            <a:schemeClr val="accent1"/>
+          </a:effectRef>
+          <a:fontRef idx="minor">
+            <a:schemeClr val="lt1"/>
+          </a:fontRef>
+        </p:style>
+        <p:txBody>
+          <a:bodyPr rtlCol="0" anchor="ctr" wrap="square" lIns="137160" rIns="137160" tIns="73152" bIns="73152"/>
+          <a:lstStyle/>
+          <a:p>
+            <a:pPr algn="ctr"/>
+            <a:r>
+              <a:rPr sz="1400" b="1">
+                <a:solidFill>
+                  <a:srgbClr val="FFFFFF"/>
+                </a:solidFill>
+                <a:latin typeface="Noto Sans JP"/>
+              </a:rPr>
+              <a:t>9月末 (最終)</a:t>
+            </a:r>
+          </a:p>
+        </p:txBody>
+      </p:sp>
+      <p:sp>
+        <p:nvSpPr>
+          <p:cNvPr id="19" name="Rectangle 18"/>
+          <p:cNvSpPr/>
+          <p:nvPr/>
+        </p:nvSpPr>
+        <p:spPr>
+          <a:xfrm>
+            <a:off x="2788920" y="4407408"/>
+            <a:ext cx="1828800" cy="685800"/>
+          </a:xfrm>
+          <a:prstGeom prst="rect">
+            <a:avLst/>
+          </a:prstGeom>
+          <a:solidFill>
+            <a:srgbClr val="2563EB"/>
+          </a:solidFill>
+          <a:ln>
+            <a:noFill/>
+          </a:ln>
+        </p:spPr>
+        <p:style>
+          <a:lnRef idx="1">
+            <a:schemeClr val="accent1"/>
+          </a:lnRef>
+          <a:fillRef idx="3">
+            <a:schemeClr val="accent1"/>
+          </a:fillRef>
+          <a:effectRef idx="2">
+            <a:schemeClr val="accent1"/>
+          </a:effectRef>
+          <a:fontRef idx="minor">
+            <a:schemeClr val="lt1"/>
+          </a:fontRef>
+        </p:style>
+        <p:txBody>
+          <a:bodyPr rtlCol="0" anchor="ctr" wrap="square" lIns="137160" rIns="137160" tIns="73152" bIns="73152"/>
+          <a:lstStyle/>
+          <a:p>
+            <a:pPr algn="ctr"/>
+            <a:r>
+              <a:rPr sz="1800" b="1">
+                <a:solidFill>
+                  <a:srgbClr val="FFFFFF"/>
+                </a:solidFill>
+                <a:latin typeface="Noto Sans JP"/>
+              </a:rPr>
+              <a:t>5人分</a:t>
+            </a:r>
+          </a:p>
+        </p:txBody>
+      </p:sp>
+      <p:sp>
+        <p:nvSpPr>
+          <p:cNvPr id="20" name="Rectangle 19"/>
+          <p:cNvSpPr/>
+          <p:nvPr/>
+        </p:nvSpPr>
+        <p:spPr>
+          <a:xfrm>
+            <a:off x="4663440" y="4407408"/>
+            <a:ext cx="7040880" cy="685800"/>
+          </a:xfrm>
+          <a:prstGeom prst="rect">
+            <a:avLst/>
+          </a:prstGeom>
+          <a:solidFill>
+            <a:srgbClr val="DBEAFE"/>
+          </a:solidFill>
+          <a:ln>
+            <a:noFill/>
+          </a:ln>
+        </p:spPr>
+        <p:style>
+          <a:lnRef idx="1">
+            <a:schemeClr val="accent1"/>
+          </a:lnRef>
+          <a:fillRef idx="3">
+            <a:schemeClr val="accent1"/>
+          </a:fillRef>
+          <a:effectRef idx="2">
+            <a:schemeClr val="accent1"/>
+          </a:effectRef>
+          <a:fontRef idx="minor">
+            <a:schemeClr val="lt1"/>
+          </a:fontRef>
+        </p:style>
+        <p:txBody>
+          <a:bodyPr rtlCol="0" anchor="ctr" wrap="square" lIns="137160" rIns="137160" tIns="73152" bIns="73152"/>
+          <a:lstStyle/>
+          <a:p>
+            <a:pPr algn="l"/>
+            <a:r>
+              <a:rPr sz="1300" b="0">
+                <a:solidFill>
+                  <a:srgbClr val="1C3557"/>
+                </a:solidFill>
+                <a:latin typeface="Noto Sans JP"/>
+              </a:rPr>
+              <a:t>5人フル稼働 + Agent Teams で協働</a:t>
+            </a:r>
+          </a:p>
+        </p:txBody>
+      </p:sp>
+      <p:sp>
+        <p:nvSpPr>
+          <p:cNvPr id="21" name="Rectangle 20"/>
+          <p:cNvSpPr/>
+          <p:nvPr/>
+        </p:nvSpPr>
+        <p:spPr>
+          <a:xfrm>
+            <a:off x="457200" y="5760720"/>
+            <a:ext cx="11274552" cy="731520"/>
+          </a:xfrm>
+          <a:prstGeom prst="rect">
+            <a:avLst/>
+          </a:prstGeom>
+          <a:noFill/>
+          <a:ln>
+            <a:noFill/>
+          </a:ln>
+        </p:spPr>
+        <p:style>
+          <a:lnRef idx="1">
+            <a:schemeClr val="accent1"/>
+          </a:lnRef>
+          <a:fillRef idx="3">
+            <a:schemeClr val="accent1"/>
+          </a:fillRef>
+          <a:effectRef idx="2">
+            <a:schemeClr val="accent1"/>
+          </a:effectRef>
+          <a:fontRef idx="minor">
+            <a:schemeClr val="lt1"/>
+          </a:fontRef>
+        </p:style>
+        <p:txBody>
+          <a:bodyPr rtlCol="0" anchor="ctr" wrap="square" lIns="137160" rIns="137160" tIns="73152" bIns="73152"/>
+          <a:lstStyle/>
+          <a:p>
+            <a:pPr algn="ctr"/>
+            <a:r>
+              <a:rPr sz="2000" b="1">
+                <a:solidFill>
+                  <a:srgbClr val="2563EB"/>
+                </a:solidFill>
+                <a:latin typeface="Noto Sans JP"/>
+              </a:rPr>
+              <a:t>5人を網羅的に同時進行で育てる</a:t>
+            </a:r>
+          </a:p>
+        </p:txBody>
+      </p:sp>
+    </p:spTree>
+  </p:cSld>
+  <p:clrMapOvr>
+    <a:masterClrMapping/>
+  </p:clrMapOvr>
+</p:sld>
+</file>
+
+<file path=ppt/slides/slide13.xml><?xml version="1.0" encoding="utf-8"?>
+<p:sld xmlns:a="http://schemas.openxmlformats.org/drawingml/2006/main" xmlns:p="http://schemas.openxmlformats.org/presentationml/2006/main" xmlns:r="http://schemas.openxmlformats.org/officeDocument/2006/relationships">
+  <p:cSld>
+    <p:spTree>
+      <p:nvGrpSpPr>
+        <p:cNvPr id="1" name=""/>
+        <p:cNvGrpSpPr/>
+        <p:nvPr/>
+      </p:nvGrpSpPr>
+      <p:grpSpPr/>
+      <p:sp>
+        <p:nvSpPr>
+          <p:cNvPr id="2" name="Rectangle 1"/>
+          <p:cNvSpPr/>
+          <p:nvPr/>
+        </p:nvSpPr>
+        <p:spPr>
+          <a:xfrm>
+            <a:off x="0" y="0"/>
+            <a:ext cx="12188952" cy="6858000"/>
+          </a:xfrm>
+          <a:prstGeom prst="rect">
+            <a:avLst/>
+          </a:prstGeom>
+          <a:solidFill>
+            <a:srgbClr val="FFFFFF"/>
+          </a:solidFill>
+          <a:ln>
+            <a:noFill/>
+          </a:ln>
+        </p:spPr>
+        <p:style>
+          <a:lnRef idx="1">
+            <a:schemeClr val="accent1"/>
+          </a:lnRef>
+          <a:fillRef idx="3">
+            <a:schemeClr val="accent1"/>
+          </a:fillRef>
+          <a:effectRef idx="2">
+            <a:schemeClr val="accent1"/>
+          </a:effectRef>
+          <a:fontRef idx="minor">
+            <a:schemeClr val="lt1"/>
+          </a:fontRef>
+        </p:style>
+        <p:txBody>
+          <a:bodyPr rtlCol="0" anchor="ctr"/>
+          <a:lstStyle/>
+          <a:p>
+            <a:pPr algn="ctr"/>
+          </a:p>
+        </p:txBody>
+      </p:sp>
+      <p:sp>
+        <p:nvSpPr>
+          <p:cNvPr id="3" name="Rectangle 2"/>
+          <p:cNvSpPr/>
+          <p:nvPr/>
+        </p:nvSpPr>
+        <p:spPr>
+          <a:xfrm>
+            <a:off x="0" y="0"/>
+            <a:ext cx="12188952" cy="137160"/>
+          </a:xfrm>
+          <a:prstGeom prst="rect">
+            <a:avLst/>
+          </a:prstGeom>
+          <a:solidFill>
+            <a:srgbClr val="2563EB"/>
+          </a:solidFill>
+          <a:ln>
+            <a:noFill/>
+          </a:ln>
+        </p:spPr>
+        <p:style>
+          <a:lnRef idx="1">
+            <a:schemeClr val="accent1"/>
+          </a:lnRef>
+          <a:fillRef idx="3">
+            <a:schemeClr val="accent1"/>
+          </a:fillRef>
+          <a:effectRef idx="2">
+            <a:schemeClr val="accent1"/>
+          </a:effectRef>
+          <a:fontRef idx="minor">
+            <a:schemeClr val="lt1"/>
+          </a:fontRef>
+        </p:style>
+        <p:txBody>
+          <a:bodyPr rtlCol="0" anchor="ctr"/>
+          <a:lstStyle/>
+          <a:p>
+            <a:pPr algn="ctr"/>
+          </a:p>
+        </p:txBody>
+      </p:sp>
+      <p:sp>
+        <p:nvSpPr>
+          <p:cNvPr id="4" name="Oval 3"/>
+          <p:cNvSpPr/>
+          <p:nvPr/>
+        </p:nvSpPr>
+        <p:spPr>
+          <a:xfrm>
+            <a:off x="9601200" y="731520"/>
+            <a:ext cx="1828800" cy="1828800"/>
+          </a:xfrm>
+          <a:prstGeom prst="ellipse">
+            <a:avLst/>
+          </a:prstGeom>
+          <a:solidFill>
+            <a:srgbClr val="DBEAFE"/>
+          </a:solidFill>
+          <a:ln>
+            <a:noFill/>
+          </a:ln>
+        </p:spPr>
+        <p:style>
+          <a:lnRef idx="1">
+            <a:schemeClr val="accent1"/>
+          </a:lnRef>
+          <a:fillRef idx="3">
+            <a:schemeClr val="accent1"/>
+          </a:fillRef>
+          <a:effectRef idx="2">
+            <a:schemeClr val="accent1"/>
+          </a:effectRef>
+          <a:fontRef idx="minor">
+            <a:schemeClr val="lt1"/>
+          </a:fontRef>
+        </p:style>
+        <p:txBody>
+          <a:bodyPr rtlCol="0" anchor="ctr"/>
+          <a:lstStyle/>
+          <a:p>
+            <a:pPr algn="ctr"/>
+          </a:p>
+        </p:txBody>
+      </p:sp>
+      <p:sp>
+        <p:nvSpPr>
+          <p:cNvPr id="5" name="Oval 4"/>
+          <p:cNvSpPr/>
+          <p:nvPr/>
+        </p:nvSpPr>
+        <p:spPr>
+          <a:xfrm>
+            <a:off x="640080" y="5029200"/>
+            <a:ext cx="1463040" cy="1463040"/>
+          </a:xfrm>
+          <a:prstGeom prst="ellipse">
+            <a:avLst/>
+          </a:prstGeom>
+          <a:solidFill>
+            <a:srgbClr val="DBEAFE"/>
+          </a:solidFill>
+          <a:ln>
+            <a:noFill/>
+          </a:ln>
+        </p:spPr>
+        <p:style>
+          <a:lnRef idx="1">
+            <a:schemeClr val="accent1"/>
+          </a:lnRef>
+          <a:fillRef idx="3">
+            <a:schemeClr val="accent1"/>
+          </a:fillRef>
+          <a:effectRef idx="2">
+            <a:schemeClr val="accent1"/>
+          </a:effectRef>
+          <a:fontRef idx="minor">
+            <a:schemeClr val="lt1"/>
+          </a:fontRef>
+        </p:style>
+        <p:txBody>
+          <a:bodyPr rtlCol="0" anchor="ctr"/>
+          <a:lstStyle/>
+          <a:p>
+            <a:pPr algn="ctr"/>
+          </a:p>
+        </p:txBody>
+      </p:sp>
+      <p:sp>
+        <p:nvSpPr>
+          <p:cNvPr id="6" name="Rectangle 5"/>
+          <p:cNvSpPr/>
+          <p:nvPr/>
+        </p:nvSpPr>
+        <p:spPr>
+          <a:xfrm>
+            <a:off x="457200" y="1371600"/>
+            <a:ext cx="11274552" cy="1371600"/>
+          </a:xfrm>
+          <a:prstGeom prst="rect">
+            <a:avLst/>
+          </a:prstGeom>
+          <a:noFill/>
+          <a:ln>
+            <a:noFill/>
+          </a:ln>
+        </p:spPr>
+        <p:style>
+          <a:lnRef idx="1">
+            <a:schemeClr val="accent1"/>
+          </a:lnRef>
+          <a:fillRef idx="3">
+            <a:schemeClr val="accent1"/>
+          </a:fillRef>
+          <a:effectRef idx="2">
+            <a:schemeClr val="accent1"/>
+          </a:effectRef>
+          <a:fontRef idx="minor">
+            <a:schemeClr val="lt1"/>
+          </a:fontRef>
+        </p:style>
+        <p:txBody>
+          <a:bodyPr rtlCol="0" anchor="ctr" wrap="square" lIns="137160" rIns="137160" tIns="73152" bIns="73152"/>
+          <a:lstStyle/>
+          <a:p>
+            <a:pPr algn="ctr"/>
+            <a:r>
+              <a:rPr sz="4000" b="1">
+                <a:solidFill>
+                  <a:srgbClr val="1C3557"/>
+                </a:solidFill>
+                <a:latin typeface="Noto Sans JP"/>
+              </a:rPr>
+              <a:t>AI社員を動かして、</a:t>
+            </a:r>
+          </a:p>
+        </p:txBody>
+      </p:sp>
+      <p:sp>
+        <p:nvSpPr>
+          <p:cNvPr id="7" name="Rectangle 6"/>
+          <p:cNvSpPr/>
+          <p:nvPr/>
+        </p:nvSpPr>
+        <p:spPr>
+          <a:xfrm>
+            <a:off x="457200" y="2651760"/>
+            <a:ext cx="11274552" cy="1463040"/>
+          </a:xfrm>
+          <a:prstGeom prst="rect">
+            <a:avLst/>
+          </a:prstGeom>
+          <a:noFill/>
+          <a:ln>
+            <a:noFill/>
+          </a:ln>
+        </p:spPr>
+        <p:style>
+          <a:lnRef idx="1">
+            <a:schemeClr val="accent1"/>
+          </a:lnRef>
+          <a:fillRef idx="3">
+            <a:schemeClr val="accent1"/>
+          </a:fillRef>
+          <a:effectRef idx="2">
+            <a:schemeClr val="accent1"/>
+          </a:effectRef>
+          <a:fontRef idx="minor">
+            <a:schemeClr val="lt1"/>
+          </a:fontRef>
+        </p:style>
+        <p:txBody>
+          <a:bodyPr rtlCol="0" anchor="ctr" wrap="square" lIns="137160" rIns="137160" tIns="73152" bIns="73152"/>
+          <a:lstStyle/>
+          <a:p>
+            <a:pPr algn="ctr"/>
+            <a:r>
+              <a:rPr sz="5000" b="1">
+                <a:solidFill>
+                  <a:srgbClr val="2563EB"/>
+                </a:solidFill>
+                <a:latin typeface="Noto Sans JP"/>
+              </a:rPr>
+              <a:t>Kawaru事業部の事業を推進する</a:t>
+            </a:r>
+          </a:p>
+        </p:txBody>
+      </p:sp>
+      <p:sp>
+        <p:nvSpPr>
+          <p:cNvPr id="8" name="Rectangle 7"/>
+          <p:cNvSpPr/>
+          <p:nvPr/>
+        </p:nvSpPr>
+        <p:spPr>
+          <a:xfrm>
+            <a:off x="5029200" y="4389120"/>
+            <a:ext cx="2130552" cy="64008"/>
+          </a:xfrm>
+          <a:prstGeom prst="rect">
+            <a:avLst/>
+          </a:prstGeom>
+          <a:solidFill>
+            <a:srgbClr val="2563EB"/>
+          </a:solidFill>
+          <a:ln>
+            <a:noFill/>
+          </a:ln>
+        </p:spPr>
+        <p:style>
+          <a:lnRef idx="1">
+            <a:schemeClr val="accent1"/>
+          </a:lnRef>
+          <a:fillRef idx="3">
+            <a:schemeClr val="accent1"/>
+          </a:fillRef>
+          <a:effectRef idx="2">
+            <a:schemeClr val="accent1"/>
+          </a:effectRef>
+          <a:fontRef idx="minor">
+            <a:schemeClr val="lt1"/>
+          </a:fontRef>
+        </p:style>
+        <p:txBody>
+          <a:bodyPr rtlCol="0" anchor="ctr"/>
+          <a:lstStyle/>
+          <a:p>
+            <a:pPr algn="ctr"/>
+          </a:p>
+        </p:txBody>
+      </p:sp>
+      <p:sp>
+        <p:nvSpPr>
+          <p:cNvPr id="9" name="Rectangle 8"/>
+          <p:cNvSpPr/>
+          <p:nvPr/>
+        </p:nvSpPr>
+        <p:spPr>
+          <a:xfrm>
+            <a:off x="457200" y="4572000"/>
+            <a:ext cx="11274552" cy="548640"/>
+          </a:xfrm>
+          <a:prstGeom prst="rect">
+            <a:avLst/>
+          </a:prstGeom>
+          <a:noFill/>
+          <a:ln>
+            <a:noFill/>
+          </a:ln>
+        </p:spPr>
+        <p:style>
+          <a:lnRef idx="1">
+            <a:schemeClr val="accent1"/>
+          </a:lnRef>
+          <a:fillRef idx="3">
+            <a:schemeClr val="accent1"/>
+          </a:fillRef>
+          <a:effectRef idx="2">
+            <a:schemeClr val="accent1"/>
+          </a:effectRef>
+          <a:fontRef idx="minor">
+            <a:schemeClr val="lt1"/>
+          </a:fontRef>
+        </p:style>
+        <p:txBody>
+          <a:bodyPr rtlCol="0" anchor="ctr" wrap="square" lIns="137160" rIns="137160" tIns="73152" bIns="73152"/>
+          <a:lstStyle/>
+          <a:p>
+            <a:pPr algn="ctr"/>
+            <a:r>
+              <a:rPr sz="2000" b="1">
+                <a:solidFill>
+                  <a:srgbClr val="1C3557"/>
+                </a:solidFill>
+                <a:latin typeface="Noto Sans JP"/>
+              </a:rPr>
+              <a:t>2人 + AI社員5人 + Agent Teams で動かす</a:t>
+            </a:r>
+          </a:p>
+        </p:txBody>
+      </p:sp>
+      <p:sp>
+        <p:nvSpPr>
+          <p:cNvPr id="10" name="Rounded Rectangle 9"/>
+          <p:cNvSpPr/>
+          <p:nvPr/>
+        </p:nvSpPr>
+        <p:spPr>
+          <a:xfrm>
+            <a:off x="914400" y="5486400"/>
             <a:ext cx="3200400" cy="731520"/>
           </a:xfrm>
           <a:prstGeom prst="roundRect">
@@ -4758,7 +6300,7 @@
           <a:p>
             <a:pPr algn="ctr"/>
             <a:r>
-              <a:rPr sz="1400" b="1">
+              <a:rPr sz="1500" b="1">
                 <a:solidFill>
                   <a:srgbClr val="FFFFFF"/>
                 </a:solidFill>
@@ -4771,13 +6313,13 @@
       </p:sp>
       <p:sp>
         <p:nvSpPr>
-          <p:cNvPr id="8" name="Rounded Rectangle 7"/>
-          <p:cNvSpPr/>
-          <p:nvPr/>
-        </p:nvSpPr>
-        <p:spPr>
-          <a:xfrm>
-            <a:off x="4297680" y="5303520"/>
+          <p:cNvPr id="11" name="Rounded Rectangle 10"/>
+          <p:cNvSpPr/>
+          <p:nvPr/>
+        </p:nvSpPr>
+        <p:spPr>
+          <a:xfrm>
+            <a:off x="4297680" y="5486400"/>
             <a:ext cx="2377440" cy="731520"/>
           </a:xfrm>
           <a:prstGeom prst="roundRect">
@@ -4812,7 +6354,7 @@
           <a:p>
             <a:pPr algn="ctr"/>
             <a:r>
-              <a:rPr sz="1300" b="1">
+              <a:rPr sz="1400" b="1">
                 <a:solidFill>
                   <a:srgbClr val="FFFFFF"/>
                 </a:solidFill>
@@ -4825,13 +6367,13 @@
       </p:sp>
       <p:sp>
         <p:nvSpPr>
-          <p:cNvPr id="9" name="Rounded Rectangle 8"/>
-          <p:cNvSpPr/>
-          <p:nvPr/>
-        </p:nvSpPr>
-        <p:spPr>
-          <a:xfrm>
-            <a:off x="6766560" y="5303520"/>
+          <p:cNvPr id="12" name="Rounded Rectangle 11"/>
+          <p:cNvSpPr/>
+          <p:nvPr/>
+        </p:nvSpPr>
+        <p:spPr>
+          <a:xfrm>
+            <a:off x="6766560" y="5486400"/>
             <a:ext cx="2377440" cy="731520"/>
           </a:xfrm>
           <a:prstGeom prst="roundRect">
@@ -4866,7 +6408,7 @@
           <a:p>
             <a:pPr algn="ctr"/>
             <a:r>
-              <a:rPr sz="1300" b="1">
+              <a:rPr sz="1400" b="1">
                 <a:solidFill>
                   <a:srgbClr val="FFFFFF"/>
                 </a:solidFill>
@@ -4879,13 +6421,13 @@
       </p:sp>
       <p:sp>
         <p:nvSpPr>
-          <p:cNvPr id="10" name="Rounded Rectangle 9"/>
-          <p:cNvSpPr/>
-          <p:nvPr/>
-        </p:nvSpPr>
-        <p:spPr>
-          <a:xfrm>
-            <a:off x="9235440" y="5303520"/>
+          <p:cNvPr id="13" name="Rounded Rectangle 12"/>
+          <p:cNvSpPr/>
+          <p:nvPr/>
+        </p:nvSpPr>
+        <p:spPr>
+          <a:xfrm>
+            <a:off x="9235440" y="5486400"/>
             <a:ext cx="2194560" cy="731520"/>
           </a:xfrm>
           <a:prstGeom prst="roundRect">
@@ -4920,7 +6462,7 @@
           <a:p>
             <a:pPr algn="ctr"/>
             <a:r>
-              <a:rPr sz="1300" b="1">
+              <a:rPr sz="1400" b="1">
                 <a:solidFill>
                   <a:srgbClr val="FFFFFF"/>
                 </a:solidFill>
@@ -4933,7 +6475,7 @@
       </p:sp>
       <p:sp>
         <p:nvSpPr>
-          <p:cNvPr id="11" name="Rectangle 10"/>
+          <p:cNvPr id="14" name="Rectangle 13"/>
           <p:cNvSpPr/>
           <p:nvPr/>
         </p:nvSpPr>
@@ -4970,13 +6512,13 @@
           <a:p>
             <a:pPr algn="r"/>
             <a:r>
-              <a:rPr sz="1000" b="0">
+              <a:rPr sz="1100" b="0">
                 <a:solidFill>
                   <a:srgbClr val="6B7280"/>
                 </a:solidFill>
                 <a:latin typeface="Noto Sans JP"/>
               </a:rPr>
-              <a:t>11 / 11</a:t>
+              <a:t>13 / 13</a:t>
             </a:r>
           </a:p>
         </p:txBody>
@@ -5050,8 +6592,8 @@
         </p:nvSpPr>
         <p:spPr>
           <a:xfrm>
-            <a:off x="457200" y="1828800"/>
-            <a:ext cx="11274552" cy="1371600"/>
+            <a:off x="457200" y="365760"/>
+            <a:ext cx="11274552" cy="457200"/>
           </a:xfrm>
           <a:prstGeom prst="rect">
             <a:avLst/>
@@ -5076,18 +6618,18 @@
           </a:fontRef>
         </p:style>
         <p:txBody>
-          <a:bodyPr rtlCol="0" anchor="ctr" wrap="square" lIns="137160" rIns="137160" tIns="73152" bIns="73152"/>
-          <a:lstStyle/>
-          <a:p>
-            <a:pPr algn="ctr"/>
-            <a:r>
-              <a:rPr sz="3600" b="1">
-                <a:solidFill>
-                  <a:srgbClr val="1C3557"/>
-                </a:solidFill>
-                <a:latin typeface="Noto Sans JP"/>
-              </a:rPr>
-              <a:t>私たちは「コストダウン」の話ができません</a:t>
+          <a:bodyPr rtlCol="0" anchor="t" wrap="square" lIns="137160" rIns="137160" tIns="73152" bIns="73152"/>
+          <a:lstStyle/>
+          <a:p>
+            <a:pPr algn="ctr"/>
+            <a:r>
+              <a:rPr sz="1400" b="1">
+                <a:solidFill>
+                  <a:srgbClr val="6B7280"/>
+                </a:solidFill>
+                <a:latin typeface="Noto Sans JP"/>
+              </a:rPr>
+              <a:t>前提</a:t>
             </a:r>
           </a:p>
         </p:txBody>
@@ -5100,12 +6642,55 @@
         </p:nvSpPr>
         <p:spPr>
           <a:xfrm>
-            <a:off x="457200" y="3200400"/>
-            <a:ext cx="11274552" cy="457200"/>
+            <a:off x="5486400" y="914400"/>
+            <a:ext cx="1216152" cy="54864"/>
           </a:xfrm>
           <a:prstGeom prst="rect">
             <a:avLst/>
           </a:prstGeom>
+          <a:solidFill>
+            <a:srgbClr val="2563EB"/>
+          </a:solidFill>
+          <a:ln>
+            <a:noFill/>
+          </a:ln>
+        </p:spPr>
+        <p:style>
+          <a:lnRef idx="1">
+            <a:schemeClr val="accent1"/>
+          </a:lnRef>
+          <a:fillRef idx="3">
+            <a:schemeClr val="accent1"/>
+          </a:fillRef>
+          <a:effectRef idx="2">
+            <a:schemeClr val="accent1"/>
+          </a:effectRef>
+          <a:fontRef idx="minor">
+            <a:schemeClr val="lt1"/>
+          </a:fontRef>
+        </p:style>
+        <p:txBody>
+          <a:bodyPr rtlCol="0" anchor="ctr"/>
+          <a:lstStyle/>
+          <a:p>
+            <a:pPr algn="ctr"/>
+          </a:p>
+        </p:txBody>
+      </p:sp>
+      <p:sp>
+        <p:nvSpPr>
+          <p:cNvPr id="5" name="Rectangle 4"/>
+          <p:cNvSpPr/>
+          <p:nvPr/>
+        </p:nvSpPr>
+        <p:spPr>
+          <a:xfrm>
+            <a:off x="457200" y="1463040"/>
+            <a:ext cx="11274552" cy="1280160"/>
+          </a:xfrm>
+          <a:prstGeom prst="rect">
+            <a:avLst/>
+          </a:prstGeom>
           <a:noFill/>
           <a:ln>
             <a:noFill/>
@@ -5126,32 +6711,82 @@
           </a:fontRef>
         </p:style>
         <p:txBody>
-          <a:bodyPr rtlCol="0" anchor="t" wrap="square" lIns="137160" rIns="137160" tIns="73152" bIns="73152"/>
-          <a:lstStyle/>
-          <a:p>
-            <a:pPr algn="ctr"/>
-            <a:r>
-              <a:rPr sz="1400" b="0">
-                <a:solidFill>
-                  <a:srgbClr val="6B7280"/>
-                </a:solidFill>
-                <a:latin typeface="Noto Sans JP"/>
-              </a:rPr>
-              <a:t>Kawaru事業部の前提</a:t>
-            </a:r>
-          </a:p>
-        </p:txBody>
-      </p:sp>
-      <p:sp>
-        <p:nvSpPr>
-          <p:cNvPr id="5" name="Rounded Rectangle 4"/>
-          <p:cNvSpPr/>
-          <p:nvPr/>
-        </p:nvSpPr>
-        <p:spPr>
-          <a:xfrm>
-            <a:off x="1371600" y="4297680"/>
-            <a:ext cx="4114800" cy="1371600"/>
+          <a:bodyPr rtlCol="0" anchor="ctr" wrap="square" lIns="137160" rIns="137160" tIns="73152" bIns="73152"/>
+          <a:lstStyle/>
+          <a:p>
+            <a:pPr algn="ctr"/>
+            <a:r>
+              <a:rPr sz="2800" b="0">
+                <a:solidFill>
+                  <a:srgbClr val="1C3557"/>
+                </a:solidFill>
+                <a:latin typeface="Noto Sans JP"/>
+              </a:rPr>
+              <a:t>Kawaru事業部は</a:t>
+            </a:r>
+          </a:p>
+        </p:txBody>
+      </p:sp>
+      <p:sp>
+        <p:nvSpPr>
+          <p:cNvPr id="6" name="Rectangle 5"/>
+          <p:cNvSpPr/>
+          <p:nvPr/>
+        </p:nvSpPr>
+        <p:spPr>
+          <a:xfrm>
+            <a:off x="457200" y="2468880"/>
+            <a:ext cx="11274552" cy="1097280"/>
+          </a:xfrm>
+          <a:prstGeom prst="rect">
+            <a:avLst/>
+          </a:prstGeom>
+          <a:noFill/>
+          <a:ln>
+            <a:noFill/>
+          </a:ln>
+        </p:spPr>
+        <p:style>
+          <a:lnRef idx="1">
+            <a:schemeClr val="accent1"/>
+          </a:lnRef>
+          <a:fillRef idx="3">
+            <a:schemeClr val="accent1"/>
+          </a:fillRef>
+          <a:effectRef idx="2">
+            <a:schemeClr val="accent1"/>
+          </a:effectRef>
+          <a:fontRef idx="minor">
+            <a:schemeClr val="lt1"/>
+          </a:fontRef>
+        </p:style>
+        <p:txBody>
+          <a:bodyPr rtlCol="0" anchor="ctr" wrap="square" lIns="137160" rIns="137160" tIns="73152" bIns="73152"/>
+          <a:lstStyle/>
+          <a:p>
+            <a:pPr algn="ctr"/>
+            <a:r>
+              <a:rPr sz="4400" b="1">
+                <a:solidFill>
+                  <a:srgbClr val="2563EB"/>
+                </a:solidFill>
+                <a:latin typeface="Noto Sans JP"/>
+              </a:rPr>
+              <a:t>コストの話がしにくい</a:t>
+            </a:r>
+          </a:p>
+        </p:txBody>
+      </p:sp>
+      <p:sp>
+        <p:nvSpPr>
+          <p:cNvPr id="7" name="Rounded Rectangle 6"/>
+          <p:cNvSpPr/>
+          <p:nvPr/>
+        </p:nvSpPr>
+        <p:spPr>
+          <a:xfrm>
+            <a:off x="640080" y="4206240"/>
+            <a:ext cx="5029200" cy="1828800"/>
           </a:xfrm>
           <a:prstGeom prst="roundRect">
             <a:avLst>
@@ -5180,12 +6815,12 @@
           </a:fontRef>
         </p:style>
         <p:txBody>
-          <a:bodyPr rtlCol="0" anchor="ctr" wrap="square" lIns="137160" rIns="137160" tIns="73152" bIns="73152"/>
-          <a:lstStyle/>
-          <a:p>
-            <a:pPr algn="ctr"/>
-            <a:r>
-              <a:rPr sz="1600" b="0">
+          <a:bodyPr rtlCol="0" anchor="t" wrap="square" lIns="137160" rIns="137160" tIns="73152" bIns="73152"/>
+          <a:lstStyle/>
+          <a:p>
+            <a:pPr algn="ctr"/>
+            <a:r>
+              <a:rPr sz="1800" b="1">
                 <a:solidFill>
                   <a:srgbClr val="6B7280"/>
                 </a:solidFill>
@@ -5194,42 +6829,18 @@
               <a:t>既存事業</a:t>
             </a:r>
           </a:p>
-          <a:p>
-            <a:pPr algn="ctr"/>
-            <a:r>
-              <a:rPr sz="1600" b="0">
-                <a:solidFill>
-                  <a:srgbClr val="6B7280"/>
-                </a:solidFill>
-                <a:latin typeface="Noto Sans JP"/>
-              </a:rPr>
-              <a:t>固定業務がある</a:t>
-            </a:r>
-          </a:p>
-          <a:p>
-            <a:pPr algn="ctr"/>
-            <a:r>
-              <a:rPr sz="1600" b="0">
-                <a:solidFill>
-                  <a:srgbClr val="6B7280"/>
-                </a:solidFill>
-                <a:latin typeface="Noto Sans JP"/>
-              </a:rPr>
-              <a:t>削減対象が見える</a:t>
-            </a:r>
-          </a:p>
-        </p:txBody>
-      </p:sp>
-      <p:sp>
-        <p:nvSpPr>
-          <p:cNvPr id="6" name="Rectangle 5"/>
-          <p:cNvSpPr/>
-          <p:nvPr/>
-        </p:nvSpPr>
-        <p:spPr>
-          <a:xfrm>
-            <a:off x="5486400" y="4297680"/>
-            <a:ext cx="1216152" cy="1371600"/>
+        </p:txBody>
+      </p:sp>
+      <p:sp>
+        <p:nvSpPr>
+          <p:cNvPr id="8" name="Rectangle 7"/>
+          <p:cNvSpPr/>
+          <p:nvPr/>
+        </p:nvSpPr>
+        <p:spPr>
+          <a:xfrm>
+            <a:off x="640080" y="4754880"/>
+            <a:ext cx="5029200" cy="1280160"/>
           </a:xfrm>
           <a:prstGeom prst="rect">
             <a:avLst/>
@@ -5259,27 +6870,82 @@
           <a:p>
             <a:pPr algn="ctr"/>
             <a:r>
-              <a:rPr sz="2800" b="1">
-                <a:solidFill>
-                  <a:srgbClr val="2563EB"/>
-                </a:solidFill>
-                <a:latin typeface="Noto Sans JP"/>
-              </a:rPr>
-              <a:t>←→</a:t>
-            </a:r>
-          </a:p>
-        </p:txBody>
-      </p:sp>
-      <p:sp>
-        <p:nvSpPr>
-          <p:cNvPr id="7" name="Rounded Rectangle 6"/>
-          <p:cNvSpPr/>
-          <p:nvPr/>
-        </p:nvSpPr>
-        <p:spPr>
-          <a:xfrm>
-            <a:off x="6702552" y="4297680"/>
-            <a:ext cx="4114800" cy="1371600"/>
+              <a:rPr sz="1600" b="0">
+                <a:solidFill>
+                  <a:srgbClr val="6B7280"/>
+                </a:solidFill>
+                <a:latin typeface="Noto Sans JP"/>
+              </a:rPr>
+              <a:t>固定業務がある</a:t>
+            </a:r>
+          </a:p>
+          <a:p>
+            <a:pPr algn="ctr"/>
+            <a:r>
+              <a:rPr sz="1600" b="0">
+                <a:solidFill>
+                  <a:srgbClr val="6B7280"/>
+                </a:solidFill>
+                <a:latin typeface="Noto Sans JP"/>
+              </a:rPr>
+              <a:t>削減対象が見える</a:t>
+            </a:r>
+          </a:p>
+        </p:txBody>
+      </p:sp>
+      <p:sp>
+        <p:nvSpPr>
+          <p:cNvPr id="9" name="Right Arrow 8"/>
+          <p:cNvSpPr/>
+          <p:nvPr/>
+        </p:nvSpPr>
+        <p:spPr>
+          <a:xfrm>
+            <a:off x="5852160" y="4846320"/>
+            <a:ext cx="731520" cy="640080"/>
+          </a:xfrm>
+          <a:prstGeom prst="rightArrow">
+            <a:avLst/>
+          </a:prstGeom>
+          <a:solidFill>
+            <a:srgbClr val="2563EB"/>
+          </a:solidFill>
+          <a:ln>
+            <a:noFill/>
+          </a:ln>
+        </p:spPr>
+        <p:style>
+          <a:lnRef idx="1">
+            <a:schemeClr val="accent1"/>
+          </a:lnRef>
+          <a:fillRef idx="3">
+            <a:schemeClr val="accent1"/>
+          </a:fillRef>
+          <a:effectRef idx="2">
+            <a:schemeClr val="accent1"/>
+          </a:effectRef>
+          <a:fontRef idx="minor">
+            <a:schemeClr val="lt1"/>
+          </a:fontRef>
+        </p:style>
+        <p:txBody>
+          <a:bodyPr rtlCol="0" anchor="ctr"/>
+          <a:lstStyle/>
+          <a:p>
+            <a:pPr algn="ctr"/>
+          </a:p>
+        </p:txBody>
+      </p:sp>
+      <p:sp>
+        <p:nvSpPr>
+          <p:cNvPr id="10" name="Rounded Rectangle 9"/>
+          <p:cNvSpPr/>
+          <p:nvPr/>
+        </p:nvSpPr>
+        <p:spPr>
+          <a:xfrm>
+            <a:off x="6766560" y="4206240"/>
+            <a:ext cx="4846320" cy="1828800"/>
           </a:xfrm>
           <a:prstGeom prst="roundRect">
             <a:avLst>
@@ -5287,8 +6953,58 @@
             </a:avLst>
           </a:prstGeom>
           <a:solidFill>
-            <a:srgbClr val="DBEAFE"/>
-          </a:solidFill>
+            <a:srgbClr val="2563EB"/>
+          </a:solidFill>
+          <a:ln>
+            <a:noFill/>
+          </a:ln>
+        </p:spPr>
+        <p:style>
+          <a:lnRef idx="1">
+            <a:schemeClr val="accent1"/>
+          </a:lnRef>
+          <a:fillRef idx="3">
+            <a:schemeClr val="accent1"/>
+          </a:fillRef>
+          <a:effectRef idx="2">
+            <a:schemeClr val="accent1"/>
+          </a:effectRef>
+          <a:fontRef idx="minor">
+            <a:schemeClr val="lt1"/>
+          </a:fontRef>
+        </p:style>
+        <p:txBody>
+          <a:bodyPr rtlCol="0" anchor="t" wrap="square" lIns="137160" rIns="137160" tIns="73152" bIns="73152"/>
+          <a:lstStyle/>
+          <a:p>
+            <a:pPr algn="ctr"/>
+            <a:r>
+              <a:rPr sz="1800" b="1">
+                <a:solidFill>
+                  <a:srgbClr val="FFFFFF"/>
+                </a:solidFill>
+                <a:latin typeface="Noto Sans JP"/>
+              </a:rPr>
+              <a:t>Kawaru事業部</a:t>
+            </a:r>
+          </a:p>
+        </p:txBody>
+      </p:sp>
+      <p:sp>
+        <p:nvSpPr>
+          <p:cNvPr id="11" name="Rectangle 10"/>
+          <p:cNvSpPr/>
+          <p:nvPr/>
+        </p:nvSpPr>
+        <p:spPr>
+          <a:xfrm>
+            <a:off x="6766560" y="4754880"/>
+            <a:ext cx="4846320" cy="1280160"/>
+          </a:xfrm>
+          <a:prstGeom prst="rect">
+            <a:avLst/>
+          </a:prstGeom>
+          <a:noFill/>
           <a:ln>
             <a:noFill/>
           </a:ln>
@@ -5315,11 +7031,11 @@
             <a:r>
               <a:rPr sz="1600" b="1">
                 <a:solidFill>
-                  <a:srgbClr val="1C3557"/>
-                </a:solidFill>
-                <a:latin typeface="Noto Sans JP"/>
-              </a:rPr>
-              <a:t>Kawaru事業部</a:t>
+                  <a:srgbClr val="FFFFFF"/>
+                </a:solidFill>
+                <a:latin typeface="Noto Sans JP"/>
+              </a:rPr>
+              <a:t>業務が毎月変わる</a:t>
             </a:r>
           </a:p>
           <a:p>
@@ -5327,30 +7043,18 @@
             <a:r>
               <a:rPr sz="1600" b="1">
                 <a:solidFill>
-                  <a:srgbClr val="1C3557"/>
-                </a:solidFill>
-                <a:latin typeface="Noto Sans JP"/>
-              </a:rPr>
-              <a:t>業務が毎月変わる</a:t>
-            </a:r>
-          </a:p>
-          <a:p>
-            <a:pPr algn="ctr"/>
-            <a:r>
-              <a:rPr sz="1600" b="1">
-                <a:solidFill>
-                  <a:srgbClr val="1C3557"/>
-                </a:solidFill>
-                <a:latin typeface="Noto Sans JP"/>
-              </a:rPr>
-              <a:t>削減対象がない</a:t>
-            </a:r>
-          </a:p>
-        </p:txBody>
-      </p:sp>
-      <p:sp>
-        <p:nvSpPr>
-          <p:cNvPr id="8" name="Rectangle 7"/>
+                  <a:srgbClr val="FFFFFF"/>
+                </a:solidFill>
+                <a:latin typeface="Noto Sans JP"/>
+              </a:rPr>
+              <a:t>削減対象がそもそもない</a:t>
+            </a:r>
+          </a:p>
+        </p:txBody>
+      </p:sp>
+      <p:sp>
+        <p:nvSpPr>
+          <p:cNvPr id="12" name="Rectangle 11"/>
           <p:cNvSpPr/>
           <p:nvPr/>
         </p:nvSpPr>
@@ -5387,13 +7091,13 @@
           <a:p>
             <a:pPr algn="r"/>
             <a:r>
-              <a:rPr sz="1000" b="0">
+              <a:rPr sz="1100" b="0">
                 <a:solidFill>
                   <a:srgbClr val="6B7280"/>
                 </a:solidFill>
                 <a:latin typeface="Noto Sans JP"/>
               </a:rPr>
-              <a:t>2 / 11</a:t>
+              <a:t>2 / 13</a:t>
             </a:r>
           </a:p>
         </p:txBody>
@@ -5498,13 +7202,13 @@
           <a:p>
             <a:pPr algn="r"/>
             <a:r>
-              <a:rPr sz="1000" b="0">
+              <a:rPr sz="1100" b="0">
                 <a:solidFill>
                   <a:srgbClr val="6B7280"/>
                 </a:solidFill>
                 <a:latin typeface="Noto Sans JP"/>
               </a:rPr>
-              <a:t>3 / 11</a:t>
+              <a:t>3 / 13</a:t>
             </a:r>
           </a:p>
         </p:txBody>
@@ -5548,13 +7252,13 @@
           <a:p>
             <a:pPr algn="l"/>
             <a:r>
-              <a:rPr sz="2200" b="1">
+              <a:rPr sz="2400" b="1">
                 <a:solidFill>
                   <a:srgbClr val="1C3557"/>
                 </a:solidFill>
                 <a:latin typeface="Noto Sans JP"/>
               </a:rPr>
-              <a:t>Kawaru事業部の4サービス</a:t>
+              <a:t>Kawaru事業部の現状</a:t>
             </a:r>
           </a:p>
         </p:txBody>
@@ -5568,7 +7272,7 @@
         <p:spPr>
           <a:xfrm>
             <a:off x="457200" y="1051560"/>
-            <a:ext cx="1371600" cy="54864"/>
+            <a:ext cx="1645920" cy="64008"/>
           </a:xfrm>
           <a:prstGeom prst="rect">
             <a:avLst/>
@@ -5604,14 +7308,64 @@
       </p:sp>
       <p:sp>
         <p:nvSpPr>
-          <p:cNvPr id="6" name="Rounded Rectangle 5"/>
-          <p:cNvSpPr/>
-          <p:nvPr/>
-        </p:nvSpPr>
-        <p:spPr>
-          <a:xfrm>
-            <a:off x="640080" y="1463040"/>
-            <a:ext cx="5029200" cy="2194560"/>
+          <p:cNvPr id="6" name="Rectangle 5"/>
+          <p:cNvSpPr/>
+          <p:nvPr/>
+        </p:nvSpPr>
+        <p:spPr>
+          <a:xfrm>
+            <a:off x="457200" y="1554480"/>
+            <a:ext cx="5303520" cy="548640"/>
+          </a:xfrm>
+          <a:prstGeom prst="rect">
+            <a:avLst/>
+          </a:prstGeom>
+          <a:noFill/>
+          <a:ln>
+            <a:noFill/>
+          </a:ln>
+        </p:spPr>
+        <p:style>
+          <a:lnRef idx="1">
+            <a:schemeClr val="accent1"/>
+          </a:lnRef>
+          <a:fillRef idx="3">
+            <a:schemeClr val="accent1"/>
+          </a:fillRef>
+          <a:effectRef idx="2">
+            <a:schemeClr val="accent1"/>
+          </a:effectRef>
+          <a:fontRef idx="minor">
+            <a:schemeClr val="lt1"/>
+          </a:fontRef>
+        </p:style>
+        <p:txBody>
+          <a:bodyPr rtlCol="0" anchor="t" wrap="square" lIns="137160" rIns="137160" tIns="73152" bIns="73152"/>
+          <a:lstStyle/>
+          <a:p>
+            <a:pPr algn="ctr"/>
+            <a:r>
+              <a:rPr sz="1600" b="1">
+                <a:solidFill>
+                  <a:srgbClr val="6B7280"/>
+                </a:solidFill>
+                <a:latin typeface="Noto Sans JP"/>
+              </a:rPr>
+              <a:t>体制</a:t>
+            </a:r>
+          </a:p>
+        </p:txBody>
+      </p:sp>
+      <p:sp>
+        <p:nvSpPr>
+          <p:cNvPr id="7" name="Rounded Rectangle 6"/>
+          <p:cNvSpPr/>
+          <p:nvPr/>
+        </p:nvSpPr>
+        <p:spPr>
+          <a:xfrm>
+            <a:off x="914400" y="2286000"/>
+            <a:ext cx="2103120" cy="1371600"/>
           </a:xfrm>
           <a:prstGeom prst="roundRect">
             <a:avLst>
@@ -5619,7 +7373,7 @@
             </a:avLst>
           </a:prstGeom>
           <a:solidFill>
-            <a:srgbClr val="2563EB"/>
+            <a:srgbClr val="1C3557"/>
           </a:solidFill>
           <a:ln>
             <a:noFill/>
@@ -5645,27 +7399,27 @@
           <a:p>
             <a:pPr algn="ctr"/>
             <a:r>
-              <a:rPr sz="3600" b="1">
+              <a:rPr sz="2600" b="1">
                 <a:solidFill>
                   <a:srgbClr val="FFFFFF"/>
                 </a:solidFill>
                 <a:latin typeface="Noto Sans JP"/>
               </a:rPr>
-              <a:t>Kawaru</a:t>
-            </a:r>
-          </a:p>
-        </p:txBody>
-      </p:sp>
-      <p:sp>
-        <p:nvSpPr>
-          <p:cNvPr id="7" name="Rounded Rectangle 6"/>
-          <p:cNvSpPr/>
-          <p:nvPr/>
-        </p:nvSpPr>
-        <p:spPr>
-          <a:xfrm>
-            <a:off x="5943600" y="1463040"/>
-            <a:ext cx="5029200" cy="2194560"/>
+              <a:t>髙橋</a:t>
+            </a:r>
+          </a:p>
+        </p:txBody>
+      </p:sp>
+      <p:sp>
+        <p:nvSpPr>
+          <p:cNvPr id="8" name="Rounded Rectangle 7"/>
+          <p:cNvSpPr/>
+          <p:nvPr/>
+        </p:nvSpPr>
+        <p:spPr>
+          <a:xfrm>
+            <a:off x="3200400" y="2286000"/>
+            <a:ext cx="2103120" cy="1371600"/>
           </a:xfrm>
           <a:prstGeom prst="roundRect">
             <a:avLst>
@@ -5673,7 +7427,7 @@
             </a:avLst>
           </a:prstGeom>
           <a:solidFill>
-            <a:srgbClr val="FF6600"/>
+            <a:srgbClr val="2563EB"/>
           </a:solidFill>
           <a:ln>
             <a:noFill/>
@@ -5699,27 +7453,227 @@
           <a:p>
             <a:pPr algn="ctr"/>
             <a:r>
+              <a:rPr sz="2600" b="1">
+                <a:solidFill>
+                  <a:srgbClr val="FFFFFF"/>
+                </a:solidFill>
+                <a:latin typeface="Noto Sans JP"/>
+              </a:rPr>
+              <a:t>大川</a:t>
+            </a:r>
+          </a:p>
+        </p:txBody>
+      </p:sp>
+      <p:sp>
+        <p:nvSpPr>
+          <p:cNvPr id="9" name="Rectangle 8"/>
+          <p:cNvSpPr/>
+          <p:nvPr/>
+        </p:nvSpPr>
+        <p:spPr>
+          <a:xfrm>
+            <a:off x="457200" y="3931920"/>
+            <a:ext cx="5303520" cy="1371600"/>
+          </a:xfrm>
+          <a:prstGeom prst="rect">
+            <a:avLst/>
+          </a:prstGeom>
+          <a:noFill/>
+          <a:ln>
+            <a:noFill/>
+          </a:ln>
+        </p:spPr>
+        <p:style>
+          <a:lnRef idx="1">
+            <a:schemeClr val="accent1"/>
+          </a:lnRef>
+          <a:fillRef idx="3">
+            <a:schemeClr val="accent1"/>
+          </a:fillRef>
+          <a:effectRef idx="2">
+            <a:schemeClr val="accent1"/>
+          </a:effectRef>
+          <a:fontRef idx="minor">
+            <a:schemeClr val="lt1"/>
+          </a:fontRef>
+        </p:style>
+        <p:txBody>
+          <a:bodyPr rtlCol="0" anchor="ctr" wrap="square" lIns="137160" rIns="137160" tIns="73152" bIns="73152"/>
+          <a:lstStyle/>
+          <a:p>
+            <a:pPr algn="ctr"/>
+            <a:r>
+              <a:rPr sz="7200" b="1">
+                <a:solidFill>
+                  <a:srgbClr val="2563EB"/>
+                </a:solidFill>
+                <a:latin typeface="Noto Sans JP"/>
+              </a:rPr>
+              <a:t>2人</a:t>
+            </a:r>
+          </a:p>
+        </p:txBody>
+      </p:sp>
+      <p:sp>
+        <p:nvSpPr>
+          <p:cNvPr id="10" name="Rectangle 9"/>
+          <p:cNvSpPr/>
+          <p:nvPr/>
+        </p:nvSpPr>
+        <p:spPr>
+          <a:xfrm>
+            <a:off x="457200" y="5303520"/>
+            <a:ext cx="5303520" cy="457200"/>
+          </a:xfrm>
+          <a:prstGeom prst="rect">
+            <a:avLst/>
+          </a:prstGeom>
+          <a:noFill/>
+          <a:ln>
+            <a:noFill/>
+          </a:ln>
+        </p:spPr>
+        <p:style>
+          <a:lnRef idx="1">
+            <a:schemeClr val="accent1"/>
+          </a:lnRef>
+          <a:fillRef idx="3">
+            <a:schemeClr val="accent1"/>
+          </a:fillRef>
+          <a:effectRef idx="2">
+            <a:schemeClr val="accent1"/>
+          </a:effectRef>
+          <a:fontRef idx="minor">
+            <a:schemeClr val="lt1"/>
+          </a:fontRef>
+        </p:style>
+        <p:txBody>
+          <a:bodyPr rtlCol="0" anchor="t" wrap="square" lIns="137160" rIns="137160" tIns="73152" bIns="73152"/>
+          <a:lstStyle/>
+          <a:p>
+            <a:pPr algn="ctr"/>
+            <a:r>
+              <a:rPr sz="1400" b="0">
+                <a:solidFill>
+                  <a:srgbClr val="6B7280"/>
+                </a:solidFill>
+                <a:latin typeface="Noto Sans JP"/>
+              </a:rPr>
+              <a:t>フルコミットメンバー</a:t>
+            </a:r>
+          </a:p>
+        </p:txBody>
+      </p:sp>
+      <p:sp>
+        <p:nvSpPr>
+          <p:cNvPr id="11" name="Rectangle 10"/>
+          <p:cNvSpPr/>
+          <p:nvPr/>
+        </p:nvSpPr>
+        <p:spPr>
+          <a:xfrm>
+            <a:off x="5760720" y="3017520"/>
+            <a:ext cx="731520" cy="731520"/>
+          </a:xfrm>
+          <a:prstGeom prst="rect">
+            <a:avLst/>
+          </a:prstGeom>
+          <a:noFill/>
+          <a:ln>
+            <a:noFill/>
+          </a:ln>
+        </p:spPr>
+        <p:style>
+          <a:lnRef idx="1">
+            <a:schemeClr val="accent1"/>
+          </a:lnRef>
+          <a:fillRef idx="3">
+            <a:schemeClr val="accent1"/>
+          </a:fillRef>
+          <a:effectRef idx="2">
+            <a:schemeClr val="accent1"/>
+          </a:effectRef>
+          <a:fontRef idx="minor">
+            <a:schemeClr val="lt1"/>
+          </a:fontRef>
+        </p:style>
+        <p:txBody>
+          <a:bodyPr rtlCol="0" anchor="ctr" wrap="square" lIns="137160" rIns="137160" tIns="73152" bIns="73152"/>
+          <a:lstStyle/>
+          <a:p>
+            <a:pPr algn="ctr"/>
+            <a:r>
               <a:rPr sz="3600" b="1">
                 <a:solidFill>
-                  <a:srgbClr val="FFFFFF"/>
-                </a:solidFill>
-                <a:latin typeface="Noto Sans JP"/>
-              </a:rPr>
-              <a:t>Kawaru Team</a:t>
-            </a:r>
-          </a:p>
-        </p:txBody>
-      </p:sp>
-      <p:sp>
-        <p:nvSpPr>
-          <p:cNvPr id="8" name="Rounded Rectangle 7"/>
-          <p:cNvSpPr/>
-          <p:nvPr/>
-        </p:nvSpPr>
-        <p:spPr>
-          <a:xfrm>
-            <a:off x="640080" y="3931920"/>
-            <a:ext cx="5029200" cy="2194560"/>
+                  <a:srgbClr val="6B7280"/>
+                </a:solidFill>
+                <a:latin typeface="Noto Sans JP"/>
+              </a:rPr>
+              <a:t>×</a:t>
+            </a:r>
+          </a:p>
+        </p:txBody>
+      </p:sp>
+      <p:sp>
+        <p:nvSpPr>
+          <p:cNvPr id="12" name="Rectangle 11"/>
+          <p:cNvSpPr/>
+          <p:nvPr/>
+        </p:nvSpPr>
+        <p:spPr>
+          <a:xfrm>
+            <a:off x="6583680" y="1554480"/>
+            <a:ext cx="5120640" cy="548640"/>
+          </a:xfrm>
+          <a:prstGeom prst="rect">
+            <a:avLst/>
+          </a:prstGeom>
+          <a:noFill/>
+          <a:ln>
+            <a:noFill/>
+          </a:ln>
+        </p:spPr>
+        <p:style>
+          <a:lnRef idx="1">
+            <a:schemeClr val="accent1"/>
+          </a:lnRef>
+          <a:fillRef idx="3">
+            <a:schemeClr val="accent1"/>
+          </a:fillRef>
+          <a:effectRef idx="2">
+            <a:schemeClr val="accent1"/>
+          </a:effectRef>
+          <a:fontRef idx="minor">
+            <a:schemeClr val="lt1"/>
+          </a:fontRef>
+        </p:style>
+        <p:txBody>
+          <a:bodyPr rtlCol="0" anchor="t" wrap="square" lIns="137160" rIns="137160" tIns="73152" bIns="73152"/>
+          <a:lstStyle/>
+          <a:p>
+            <a:pPr algn="ctr"/>
+            <a:r>
+              <a:rPr sz="1600" b="1">
+                <a:solidFill>
+                  <a:srgbClr val="6B7280"/>
+                </a:solidFill>
+                <a:latin typeface="Noto Sans JP"/>
+              </a:rPr>
+              <a:t>サービス</a:t>
+            </a:r>
+          </a:p>
+        </p:txBody>
+      </p:sp>
+      <p:sp>
+        <p:nvSpPr>
+          <p:cNvPr id="13" name="Rounded Rectangle 12"/>
+          <p:cNvSpPr/>
+          <p:nvPr/>
+        </p:nvSpPr>
+        <p:spPr>
+          <a:xfrm>
+            <a:off x="6766560" y="2286000"/>
+            <a:ext cx="2377440" cy="914400"/>
           </a:xfrm>
           <a:prstGeom prst="roundRect">
             <a:avLst>
@@ -5727,7 +7681,7 @@
             </a:avLst>
           </a:prstGeom>
           <a:solidFill>
-            <a:srgbClr val="7C3AED"/>
+            <a:srgbClr val="2563EB"/>
           </a:solidFill>
           <a:ln>
             <a:noFill/>
@@ -5753,27 +7707,27 @@
           <a:p>
             <a:pPr algn="ctr"/>
             <a:r>
-              <a:rPr sz="3600" b="1">
+              <a:rPr sz="1600" b="1">
                 <a:solidFill>
                   <a:srgbClr val="FFFFFF"/>
                 </a:solidFill>
                 <a:latin typeface="Noto Sans JP"/>
               </a:rPr>
-              <a:t>Kawaru Coach</a:t>
-            </a:r>
-          </a:p>
-        </p:txBody>
-      </p:sp>
-      <p:sp>
-        <p:nvSpPr>
-          <p:cNvPr id="9" name="Rounded Rectangle 8"/>
-          <p:cNvSpPr/>
-          <p:nvPr/>
-        </p:nvSpPr>
-        <p:spPr>
-          <a:xfrm>
-            <a:off x="5943600" y="3931920"/>
-            <a:ext cx="5029200" cy="2194560"/>
+              <a:t>Kawaru</a:t>
+            </a:r>
+          </a:p>
+        </p:txBody>
+      </p:sp>
+      <p:sp>
+        <p:nvSpPr>
+          <p:cNvPr id="14" name="Rounded Rectangle 13"/>
+          <p:cNvSpPr/>
+          <p:nvPr/>
+        </p:nvSpPr>
+        <p:spPr>
+          <a:xfrm>
+            <a:off x="9235440" y="2286000"/>
+            <a:ext cx="2377440" cy="914400"/>
           </a:xfrm>
           <a:prstGeom prst="roundRect">
             <a:avLst>
@@ -5781,6 +7735,114 @@
             </a:avLst>
           </a:prstGeom>
           <a:solidFill>
+            <a:srgbClr val="FF6600"/>
+          </a:solidFill>
+          <a:ln>
+            <a:noFill/>
+          </a:ln>
+        </p:spPr>
+        <p:style>
+          <a:lnRef idx="1">
+            <a:schemeClr val="accent1"/>
+          </a:lnRef>
+          <a:fillRef idx="3">
+            <a:schemeClr val="accent1"/>
+          </a:fillRef>
+          <a:effectRef idx="2">
+            <a:schemeClr val="accent1"/>
+          </a:effectRef>
+          <a:fontRef idx="minor">
+            <a:schemeClr val="lt1"/>
+          </a:fontRef>
+        </p:style>
+        <p:txBody>
+          <a:bodyPr rtlCol="0" anchor="ctr" wrap="square" lIns="137160" rIns="137160" tIns="73152" bIns="73152"/>
+          <a:lstStyle/>
+          <a:p>
+            <a:pPr algn="ctr"/>
+            <a:r>
+              <a:rPr sz="1400" b="1">
+                <a:solidFill>
+                  <a:srgbClr val="FFFFFF"/>
+                </a:solidFill>
+                <a:latin typeface="Noto Sans JP"/>
+              </a:rPr>
+              <a:t>Kawaru Team</a:t>
+            </a:r>
+          </a:p>
+        </p:txBody>
+      </p:sp>
+      <p:sp>
+        <p:nvSpPr>
+          <p:cNvPr id="15" name="Rounded Rectangle 14"/>
+          <p:cNvSpPr/>
+          <p:nvPr/>
+        </p:nvSpPr>
+        <p:spPr>
+          <a:xfrm>
+            <a:off x="6766560" y="3291840"/>
+            <a:ext cx="2377440" cy="914400"/>
+          </a:xfrm>
+          <a:prstGeom prst="roundRect">
+            <a:avLst>
+              <a:gd name="adj" fmla="val 5000"/>
+            </a:avLst>
+          </a:prstGeom>
+          <a:solidFill>
+            <a:srgbClr val="7C3AED"/>
+          </a:solidFill>
+          <a:ln>
+            <a:noFill/>
+          </a:ln>
+        </p:spPr>
+        <p:style>
+          <a:lnRef idx="1">
+            <a:schemeClr val="accent1"/>
+          </a:lnRef>
+          <a:fillRef idx="3">
+            <a:schemeClr val="accent1"/>
+          </a:fillRef>
+          <a:effectRef idx="2">
+            <a:schemeClr val="accent1"/>
+          </a:effectRef>
+          <a:fontRef idx="minor">
+            <a:schemeClr val="lt1"/>
+          </a:fontRef>
+        </p:style>
+        <p:txBody>
+          <a:bodyPr rtlCol="0" anchor="ctr" wrap="square" lIns="137160" rIns="137160" tIns="73152" bIns="73152"/>
+          <a:lstStyle/>
+          <a:p>
+            <a:pPr algn="ctr"/>
+            <a:r>
+              <a:rPr sz="1400" b="1">
+                <a:solidFill>
+                  <a:srgbClr val="FFFFFF"/>
+                </a:solidFill>
+                <a:latin typeface="Noto Sans JP"/>
+              </a:rPr>
+              <a:t>Kawaru Coach</a:t>
+            </a:r>
+          </a:p>
+        </p:txBody>
+      </p:sp>
+      <p:sp>
+        <p:nvSpPr>
+          <p:cNvPr id="16" name="Rounded Rectangle 15"/>
+          <p:cNvSpPr/>
+          <p:nvPr/>
+        </p:nvSpPr>
+        <p:spPr>
+          <a:xfrm>
+            <a:off x="9235440" y="3291840"/>
+            <a:ext cx="2377440" cy="914400"/>
+          </a:xfrm>
+          <a:prstGeom prst="roundRect">
+            <a:avLst>
+              <a:gd name="adj" fmla="val 5000"/>
+            </a:avLst>
+          </a:prstGeom>
+          <a:solidFill>
             <a:srgbClr val="10BF16"/>
           </a:solidFill>
           <a:ln>
@@ -5807,7 +7869,7 @@
           <a:p>
             <a:pPr algn="ctr"/>
             <a:r>
-              <a:rPr sz="3600" b="1">
+              <a:rPr sz="1400" b="1">
                 <a:solidFill>
                   <a:srgbClr val="FFFFFF"/>
                 </a:solidFill>
@@ -5820,14 +7882,14 @@
       </p:sp>
       <p:sp>
         <p:nvSpPr>
-          <p:cNvPr id="10" name="Rectangle 9"/>
-          <p:cNvSpPr/>
-          <p:nvPr/>
-        </p:nvSpPr>
-        <p:spPr>
-          <a:xfrm>
-            <a:off x="457200" y="6263640"/>
-            <a:ext cx="11274552" cy="457200"/>
+          <p:cNvPr id="17" name="Rectangle 16"/>
+          <p:cNvSpPr/>
+          <p:nvPr/>
+        </p:nvSpPr>
+        <p:spPr>
+          <a:xfrm>
+            <a:off x="6400800" y="3931920"/>
+            <a:ext cx="5303520" cy="1371600"/>
           </a:xfrm>
           <a:prstGeom prst="rect">
             <a:avLst/>
@@ -5852,18 +7914,118 @@
           </a:fontRef>
         </p:style>
         <p:txBody>
+          <a:bodyPr rtlCol="0" anchor="ctr" wrap="square" lIns="137160" rIns="137160" tIns="73152" bIns="73152"/>
+          <a:lstStyle/>
+          <a:p>
+            <a:pPr algn="ctr"/>
+            <a:r>
+              <a:rPr sz="7200" b="1">
+                <a:solidFill>
+                  <a:srgbClr val="2563EB"/>
+                </a:solidFill>
+                <a:latin typeface="Noto Sans JP"/>
+              </a:rPr>
+              <a:t>4</a:t>
+            </a:r>
+          </a:p>
+        </p:txBody>
+      </p:sp>
+      <p:sp>
+        <p:nvSpPr>
+          <p:cNvPr id="18" name="Rectangle 17"/>
+          <p:cNvSpPr/>
+          <p:nvPr/>
+        </p:nvSpPr>
+        <p:spPr>
+          <a:xfrm>
+            <a:off x="6400800" y="5303520"/>
+            <a:ext cx="5303520" cy="457200"/>
+          </a:xfrm>
+          <a:prstGeom prst="rect">
+            <a:avLst/>
+          </a:prstGeom>
+          <a:noFill/>
+          <a:ln>
+            <a:noFill/>
+          </a:ln>
+        </p:spPr>
+        <p:style>
+          <a:lnRef idx="1">
+            <a:schemeClr val="accent1"/>
+          </a:lnRef>
+          <a:fillRef idx="3">
+            <a:schemeClr val="accent1"/>
+          </a:fillRef>
+          <a:effectRef idx="2">
+            <a:schemeClr val="accent1"/>
+          </a:effectRef>
+          <a:fontRef idx="minor">
+            <a:schemeClr val="lt1"/>
+          </a:fontRef>
+        </p:style>
+        <p:txBody>
           <a:bodyPr rtlCol="0" anchor="t" wrap="square" lIns="137160" rIns="137160" tIns="73152" bIns="73152"/>
           <a:lstStyle/>
           <a:p>
             <a:pPr algn="ctr"/>
             <a:r>
-              <a:rPr sz="1600" b="1">
+              <a:rPr sz="1400" b="0">
+                <a:solidFill>
+                  <a:srgbClr val="6B7280"/>
+                </a:solidFill>
+                <a:latin typeface="Noto Sans JP"/>
+              </a:rPr>
+              <a:t>事業部のサービス</a:t>
+            </a:r>
+          </a:p>
+        </p:txBody>
+      </p:sp>
+      <p:sp>
+        <p:nvSpPr>
+          <p:cNvPr id="19" name="Rectangle 18"/>
+          <p:cNvSpPr/>
+          <p:nvPr/>
+        </p:nvSpPr>
+        <p:spPr>
+          <a:xfrm>
+            <a:off x="457200" y="5943600"/>
+            <a:ext cx="11274552" cy="640080"/>
+          </a:xfrm>
+          <a:prstGeom prst="rect">
+            <a:avLst/>
+          </a:prstGeom>
+          <a:noFill/>
+          <a:ln>
+            <a:noFill/>
+          </a:ln>
+        </p:spPr>
+        <p:style>
+          <a:lnRef idx="1">
+            <a:schemeClr val="accent1"/>
+          </a:lnRef>
+          <a:fillRef idx="3">
+            <a:schemeClr val="accent1"/>
+          </a:fillRef>
+          <a:effectRef idx="2">
+            <a:schemeClr val="accent1"/>
+          </a:effectRef>
+          <a:fontRef idx="minor">
+            <a:schemeClr val="lt1"/>
+          </a:fontRef>
+        </p:style>
+        <p:txBody>
+          <a:bodyPr rtlCol="0" anchor="ctr" wrap="square" lIns="137160" rIns="137160" tIns="73152" bIns="73152"/>
+          <a:lstStyle/>
+          <a:p>
+            <a:pPr algn="ctr"/>
+            <a:r>
+              <a:rPr sz="2200" b="1">
                 <a:solidFill>
                   <a:srgbClr val="1C3557"/>
                 </a:solidFill>
                 <a:latin typeface="Noto Sans JP"/>
               </a:rPr>
-              <a:t>この4つのサービスを動かしている</a:t>
+              <a:t>2人で 4つのサービス を動かしている</a:t>
             </a:r>
           </a:p>
         </p:txBody>
@@ -5968,13 +8130,13 @@
           <a:p>
             <a:pPr algn="r"/>
             <a:r>
-              <a:rPr sz="1000" b="0">
+              <a:rPr sz="1100" b="0">
                 <a:solidFill>
                   <a:srgbClr val="6B7280"/>
                 </a:solidFill>
                 <a:latin typeface="Noto Sans JP"/>
               </a:rPr>
-              <a:t>4 / 11</a:t>
+              <a:t>4 / 13</a:t>
             </a:r>
           </a:p>
         </p:txBody>
@@ -6018,13 +8180,13 @@
           <a:p>
             <a:pPr algn="l"/>
             <a:r>
-              <a:rPr sz="2200" b="1">
+              <a:rPr sz="2400" b="1">
                 <a:solidFill>
                   <a:srgbClr val="1C3557"/>
                 </a:solidFill>
                 <a:latin typeface="Noto Sans JP"/>
               </a:rPr>
-              <a:t>でもフルコミットは2人だけ。だからAI社員5人で動かす</a:t>
+              <a:t>Kawaru事業部の4サービス</a:t>
             </a:r>
           </a:p>
         </p:txBody>
@@ -6038,7 +8200,7 @@
         <p:spPr>
           <a:xfrm>
             <a:off x="457200" y="1051560"/>
-            <a:ext cx="1371600" cy="54864"/>
+            <a:ext cx="1645920" cy="64008"/>
           </a:xfrm>
           <a:prstGeom prst="rect">
             <a:avLst/>
@@ -6080,8 +8242,8 @@
         </p:nvSpPr>
         <p:spPr>
           <a:xfrm>
-            <a:off x="3200400" y="1554480"/>
-            <a:ext cx="2286000" cy="914400"/>
+            <a:off x="640080" y="1463040"/>
+            <a:ext cx="5029200" cy="2194560"/>
           </a:xfrm>
           <a:prstGeom prst="roundRect">
             <a:avLst>
@@ -6089,7 +8251,7 @@
             </a:avLst>
           </a:prstGeom>
           <a:solidFill>
-            <a:srgbClr val="1C3557"/>
+            <a:srgbClr val="2563EB"/>
           </a:solidFill>
           <a:ln>
             <a:noFill/>
@@ -6115,13 +8277,13 @@
           <a:p>
             <a:pPr algn="ctr"/>
             <a:r>
-              <a:rPr sz="2200" b="1">
+              <a:rPr sz="4400" b="1">
                 <a:solidFill>
                   <a:srgbClr val="FFFFFF"/>
                 </a:solidFill>
                 <a:latin typeface="Noto Sans JP"/>
               </a:rPr>
-              <a:t>髙橋</a:t>
+              <a:t>Kawaru</a:t>
             </a:r>
           </a:p>
         </p:txBody>
@@ -6134,8 +8296,8 @@
         </p:nvSpPr>
         <p:spPr>
           <a:xfrm>
-            <a:off x="6702552" y="1554480"/>
-            <a:ext cx="2286000" cy="914400"/>
+            <a:off x="5943600" y="1463040"/>
+            <a:ext cx="5029200" cy="2194560"/>
           </a:xfrm>
           <a:prstGeom prst="roundRect">
             <a:avLst>
@@ -6143,7 +8305,7 @@
             </a:avLst>
           </a:prstGeom>
           <a:solidFill>
-            <a:srgbClr val="2563EB"/>
+            <a:srgbClr val="FF6600"/>
           </a:solidFill>
           <a:ln>
             <a:noFill/>
@@ -6169,77 +8331,27 @@
           <a:p>
             <a:pPr algn="ctr"/>
             <a:r>
-              <a:rPr sz="2200" b="1">
+              <a:rPr sz="4000" b="1">
                 <a:solidFill>
                   <a:srgbClr val="FFFFFF"/>
                 </a:solidFill>
                 <a:latin typeface="Noto Sans JP"/>
               </a:rPr>
-              <a:t>大川</a:t>
-            </a:r>
-          </a:p>
-        </p:txBody>
-      </p:sp>
-      <p:sp>
-        <p:nvSpPr>
-          <p:cNvPr id="8" name="Rectangle 7"/>
-          <p:cNvSpPr/>
-          <p:nvPr/>
-        </p:nvSpPr>
-        <p:spPr>
-          <a:xfrm>
-            <a:off x="457200" y="2743200"/>
-            <a:ext cx="11274552" cy="548640"/>
-          </a:xfrm>
-          <a:prstGeom prst="rect">
-            <a:avLst/>
-          </a:prstGeom>
-          <a:noFill/>
-          <a:ln>
-            <a:noFill/>
-          </a:ln>
-        </p:spPr>
-        <p:style>
-          <a:lnRef idx="1">
-            <a:schemeClr val="accent1"/>
-          </a:lnRef>
-          <a:fillRef idx="3">
-            <a:schemeClr val="accent1"/>
-          </a:fillRef>
-          <a:effectRef idx="2">
-            <a:schemeClr val="accent1"/>
-          </a:effectRef>
-          <a:fontRef idx="minor">
-            <a:schemeClr val="lt1"/>
-          </a:fontRef>
-        </p:style>
-        <p:txBody>
-          <a:bodyPr rtlCol="0" anchor="ctr" wrap="square" lIns="137160" rIns="137160" tIns="73152" bIns="73152"/>
-          <a:lstStyle/>
-          <a:p>
-            <a:pPr algn="ctr"/>
-            <a:r>
-              <a:rPr sz="1600" b="1">
-                <a:solidFill>
-                  <a:srgbClr val="2563EB"/>
-                </a:solidFill>
-                <a:latin typeface="Noto Sans JP"/>
-              </a:rPr>
-              <a:t>↓ AI社員に動いてもらう ↓</a:t>
-            </a:r>
-          </a:p>
-        </p:txBody>
-      </p:sp>
-      <p:sp>
-        <p:nvSpPr>
-          <p:cNvPr id="9" name="Rounded Rectangle 8"/>
-          <p:cNvSpPr/>
-          <p:nvPr/>
-        </p:nvSpPr>
-        <p:spPr>
-          <a:xfrm>
-            <a:off x="640080" y="3566160"/>
-            <a:ext cx="2103120" cy="1280160"/>
+              <a:t>Kawaru Team</a:t>
+            </a:r>
+          </a:p>
+        </p:txBody>
+      </p:sp>
+      <p:sp>
+        <p:nvSpPr>
+          <p:cNvPr id="8" name="Rounded Rectangle 7"/>
+          <p:cNvSpPr/>
+          <p:nvPr/>
+        </p:nvSpPr>
+        <p:spPr>
+          <a:xfrm>
+            <a:off x="640080" y="3931920"/>
+            <a:ext cx="5029200" cy="2194560"/>
           </a:xfrm>
           <a:prstGeom prst="roundRect">
             <a:avLst>
@@ -6247,7 +8359,7 @@
             </a:avLst>
           </a:prstGeom>
           <a:solidFill>
-            <a:srgbClr val="2563EB"/>
+            <a:srgbClr val="7C3AED"/>
           </a:solidFill>
           <a:ln>
             <a:noFill/>
@@ -6273,27 +8385,27 @@
           <a:p>
             <a:pPr algn="ctr"/>
             <a:r>
-              <a:rPr sz="1400" b="1">
+              <a:rPr sz="4000" b="1">
                 <a:solidFill>
                   <a:srgbClr val="FFFFFF"/>
                 </a:solidFill>
                 <a:latin typeface="Noto Sans JP"/>
               </a:rPr>
-              <a:t>マーケAI</a:t>
-            </a:r>
-          </a:p>
-        </p:txBody>
-      </p:sp>
-      <p:sp>
-        <p:nvSpPr>
-          <p:cNvPr id="10" name="Rounded Rectangle 9"/>
-          <p:cNvSpPr/>
-          <p:nvPr/>
-        </p:nvSpPr>
-        <p:spPr>
-          <a:xfrm>
-            <a:off x="2926080" y="3566160"/>
-            <a:ext cx="2103120" cy="1280160"/>
+              <a:t>Kawaru Coach</a:t>
+            </a:r>
+          </a:p>
+        </p:txBody>
+      </p:sp>
+      <p:sp>
+        <p:nvSpPr>
+          <p:cNvPr id="9" name="Rounded Rectangle 8"/>
+          <p:cNvSpPr/>
+          <p:nvPr/>
+        </p:nvSpPr>
+        <p:spPr>
+          <a:xfrm>
+            <a:off x="5943600" y="3931920"/>
+            <a:ext cx="5029200" cy="2194560"/>
           </a:xfrm>
           <a:prstGeom prst="roundRect">
             <a:avLst>
@@ -6301,7 +8413,7 @@
             </a:avLst>
           </a:prstGeom>
           <a:solidFill>
-            <a:srgbClr val="2563EB"/>
+            <a:srgbClr val="10BF16"/>
           </a:solidFill>
           <a:ln>
             <a:noFill/>
@@ -6327,229 +8439,63 @@
           <a:p>
             <a:pPr algn="ctr"/>
             <a:r>
-              <a:rPr sz="1400" b="1">
+              <a:rPr sz="4000" b="1">
                 <a:solidFill>
                   <a:srgbClr val="FFFFFF"/>
                 </a:solidFill>
                 <a:latin typeface="Noto Sans JP"/>
               </a:rPr>
-              <a:t>営業AI</a:t>
-            </a:r>
-          </a:p>
-        </p:txBody>
-      </p:sp>
-      <p:sp>
-        <p:nvSpPr>
-          <p:cNvPr id="11" name="Rounded Rectangle 10"/>
-          <p:cNvSpPr/>
-          <p:nvPr/>
-        </p:nvSpPr>
-        <p:spPr>
-          <a:xfrm>
-            <a:off x="5212080" y="3566160"/>
-            <a:ext cx="2103120" cy="1280160"/>
-          </a:xfrm>
-          <a:prstGeom prst="roundRect">
-            <a:avLst>
-              <a:gd name="adj" fmla="val 5000"/>
-            </a:avLst>
-          </a:prstGeom>
-          <a:solidFill>
-            <a:srgbClr val="2563EB"/>
-          </a:solidFill>
-          <a:ln>
-            <a:noFill/>
-          </a:ln>
-        </p:spPr>
-        <p:style>
-          <a:lnRef idx="1">
-            <a:schemeClr val="accent1"/>
-          </a:lnRef>
-          <a:fillRef idx="3">
-            <a:schemeClr val="accent1"/>
-          </a:fillRef>
-          <a:effectRef idx="2">
-            <a:schemeClr val="accent1"/>
-          </a:effectRef>
-          <a:fontRef idx="minor">
-            <a:schemeClr val="lt1"/>
-          </a:fontRef>
-        </p:style>
-        <p:txBody>
-          <a:bodyPr rtlCol="0" anchor="ctr" wrap="square" lIns="137160" rIns="137160" tIns="73152" bIns="73152"/>
-          <a:lstStyle/>
-          <a:p>
-            <a:pPr algn="ctr"/>
-            <a:r>
-              <a:rPr sz="1400" b="1">
-                <a:solidFill>
-                  <a:srgbClr val="FFFFFF"/>
-                </a:solidFill>
-                <a:latin typeface="Noto Sans JP"/>
-              </a:rPr>
-              <a:t>デリバリーAI</a:t>
-            </a:r>
-          </a:p>
-        </p:txBody>
-      </p:sp>
-      <p:sp>
-        <p:nvSpPr>
-          <p:cNvPr id="12" name="Rounded Rectangle 11"/>
-          <p:cNvSpPr/>
-          <p:nvPr/>
-        </p:nvSpPr>
-        <p:spPr>
-          <a:xfrm>
-            <a:off x="7498079" y="3566160"/>
-            <a:ext cx="2103120" cy="1280160"/>
-          </a:xfrm>
-          <a:prstGeom prst="roundRect">
-            <a:avLst>
-              <a:gd name="adj" fmla="val 5000"/>
-            </a:avLst>
-          </a:prstGeom>
-          <a:solidFill>
-            <a:srgbClr val="2563EB"/>
-          </a:solidFill>
-          <a:ln>
-            <a:noFill/>
-          </a:ln>
-        </p:spPr>
-        <p:style>
-          <a:lnRef idx="1">
-            <a:schemeClr val="accent1"/>
-          </a:lnRef>
-          <a:fillRef idx="3">
-            <a:schemeClr val="accent1"/>
-          </a:fillRef>
-          <a:effectRef idx="2">
-            <a:schemeClr val="accent1"/>
-          </a:effectRef>
-          <a:fontRef idx="minor">
-            <a:schemeClr val="lt1"/>
-          </a:fontRef>
-        </p:style>
-        <p:txBody>
-          <a:bodyPr rtlCol="0" anchor="ctr" wrap="square" lIns="137160" rIns="137160" tIns="73152" bIns="73152"/>
-          <a:lstStyle/>
-          <a:p>
-            <a:pPr algn="ctr"/>
-            <a:r>
-              <a:rPr sz="1400" b="1">
-                <a:solidFill>
-                  <a:srgbClr val="FFFFFF"/>
-                </a:solidFill>
-                <a:latin typeface="Noto Sans JP"/>
-              </a:rPr>
-              <a:t>事務法務AI</a:t>
-            </a:r>
-          </a:p>
-        </p:txBody>
-      </p:sp>
-      <p:sp>
-        <p:nvSpPr>
-          <p:cNvPr id="13" name="Rounded Rectangle 12"/>
-          <p:cNvSpPr/>
-          <p:nvPr/>
-        </p:nvSpPr>
-        <p:spPr>
-          <a:xfrm>
-            <a:off x="9784080" y="3566160"/>
-            <a:ext cx="2103120" cy="1280160"/>
-          </a:xfrm>
-          <a:prstGeom prst="roundRect">
-            <a:avLst>
-              <a:gd name="adj" fmla="val 5000"/>
-            </a:avLst>
-          </a:prstGeom>
-          <a:solidFill>
-            <a:srgbClr val="2563EB"/>
-          </a:solidFill>
-          <a:ln>
-            <a:noFill/>
-          </a:ln>
-        </p:spPr>
-        <p:style>
-          <a:lnRef idx="1">
-            <a:schemeClr val="accent1"/>
-          </a:lnRef>
-          <a:fillRef idx="3">
-            <a:schemeClr val="accent1"/>
-          </a:fillRef>
-          <a:effectRef idx="2">
-            <a:schemeClr val="accent1"/>
-          </a:effectRef>
-          <a:fontRef idx="minor">
-            <a:schemeClr val="lt1"/>
-          </a:fontRef>
-        </p:style>
-        <p:txBody>
-          <a:bodyPr rtlCol="0" anchor="ctr" wrap="square" lIns="137160" rIns="137160" tIns="73152" bIns="73152"/>
-          <a:lstStyle/>
-          <a:p>
-            <a:pPr algn="ctr"/>
-            <a:r>
-              <a:rPr sz="1400" b="1">
-                <a:solidFill>
-                  <a:srgbClr val="FFFFFF"/>
-                </a:solidFill>
-                <a:latin typeface="Noto Sans JP"/>
-              </a:rPr>
-              <a:t>戦略AI</a:t>
-            </a:r>
-          </a:p>
-        </p:txBody>
-      </p:sp>
-      <p:sp>
-        <p:nvSpPr>
-          <p:cNvPr id="14" name="Rounded Rectangle 13"/>
-          <p:cNvSpPr/>
-          <p:nvPr/>
-        </p:nvSpPr>
-        <p:spPr>
-          <a:xfrm>
-            <a:off x="457200" y="5212080"/>
-            <a:ext cx="11274552" cy="1005840"/>
-          </a:xfrm>
-          <a:prstGeom prst="roundRect">
-            <a:avLst>
-              <a:gd name="adj" fmla="val 5000"/>
-            </a:avLst>
-          </a:prstGeom>
-          <a:solidFill>
-            <a:srgbClr val="DBEAFE"/>
-          </a:solidFill>
-          <a:ln>
-            <a:noFill/>
-          </a:ln>
-        </p:spPr>
-        <p:style>
-          <a:lnRef idx="1">
-            <a:schemeClr val="accent1"/>
-          </a:lnRef>
-          <a:fillRef idx="3">
-            <a:schemeClr val="accent1"/>
-          </a:fillRef>
-          <a:effectRef idx="2">
-            <a:schemeClr val="accent1"/>
-          </a:effectRef>
-          <a:fontRef idx="minor">
-            <a:schemeClr val="lt1"/>
-          </a:fontRef>
-        </p:style>
-        <p:txBody>
-          <a:bodyPr rtlCol="0" anchor="ctr" wrap="square" lIns="137160" rIns="137160" tIns="73152" bIns="73152"/>
-          <a:lstStyle/>
-          <a:p>
-            <a:pPr algn="ctr"/>
-            <a:r>
-              <a:rPr sz="2200" b="1">
+              <a:t>Kawaru BPO</a:t>
+            </a:r>
+          </a:p>
+        </p:txBody>
+      </p:sp>
+      <p:sp>
+        <p:nvSpPr>
+          <p:cNvPr id="10" name="Rectangle 9"/>
+          <p:cNvSpPr/>
+          <p:nvPr/>
+        </p:nvSpPr>
+        <p:spPr>
+          <a:xfrm>
+            <a:off x="457200" y="6263640"/>
+            <a:ext cx="11274552" cy="457200"/>
+          </a:xfrm>
+          <a:prstGeom prst="rect">
+            <a:avLst/>
+          </a:prstGeom>
+          <a:noFill/>
+          <a:ln>
+            <a:noFill/>
+          </a:ln>
+        </p:spPr>
+        <p:style>
+          <a:lnRef idx="1">
+            <a:schemeClr val="accent1"/>
+          </a:lnRef>
+          <a:fillRef idx="3">
+            <a:schemeClr val="accent1"/>
+          </a:fillRef>
+          <a:effectRef idx="2">
+            <a:schemeClr val="accent1"/>
+          </a:effectRef>
+          <a:fontRef idx="minor">
+            <a:schemeClr val="lt1"/>
+          </a:fontRef>
+        </p:style>
+        <p:txBody>
+          <a:bodyPr rtlCol="0" anchor="t" wrap="square" lIns="137160" rIns="137160" tIns="73152" bIns="73152"/>
+          <a:lstStyle/>
+          <a:p>
+            <a:pPr algn="ctr"/>
+            <a:r>
+              <a:rPr sz="1800" b="1">
                 <a:solidFill>
                   <a:srgbClr val="1C3557"/>
                 </a:solidFill>
                 <a:latin typeface="Noto Sans JP"/>
               </a:rPr>
-              <a:t>2人で4サービスは難しい。AI社員5人で動かす</a:t>
+              <a:t>この4つのサービスを動かしている</a:t>
             </a:r>
           </a:p>
         </p:txBody>
@@ -6654,13 +8600,13 @@
           <a:p>
             <a:pPr algn="r"/>
             <a:r>
-              <a:rPr sz="1000" b="0">
+              <a:rPr sz="1100" b="0">
                 <a:solidFill>
                   <a:srgbClr val="6B7280"/>
                 </a:solidFill>
                 <a:latin typeface="Noto Sans JP"/>
               </a:rPr>
-              <a:t>5 / 11</a:t>
+              <a:t>5 / 13</a:t>
             </a:r>
           </a:p>
         </p:txBody>
@@ -6704,13 +8650,13 @@
           <a:p>
             <a:pPr algn="l"/>
             <a:r>
-              <a:rPr sz="2200" b="1">
+              <a:rPr sz="2400" b="1">
                 <a:solidFill>
                   <a:srgbClr val="1C3557"/>
                 </a:solidFill>
                 <a:latin typeface="Noto Sans JP"/>
               </a:rPr>
-              <a:t>AI社員5人の構成</a:t>
+              <a:t>すでにAI社員5人を動かしている</a:t>
             </a:r>
           </a:p>
         </p:txBody>
@@ -6724,7 +8670,7 @@
         <p:spPr>
           <a:xfrm>
             <a:off x="457200" y="1051560"/>
-            <a:ext cx="1371600" cy="54864"/>
+            <a:ext cx="1645920" cy="64008"/>
           </a:xfrm>
           <a:prstGeom prst="rect">
             <a:avLst/>
@@ -6766,8 +8712,8 @@
         </p:nvSpPr>
         <p:spPr>
           <a:xfrm>
-            <a:off x="457200" y="1371600"/>
-            <a:ext cx="3200400" cy="777240"/>
+            <a:off x="5184648" y="1280160"/>
+            <a:ext cx="1828800" cy="548640"/>
           </a:xfrm>
           <a:prstGeom prst="roundRect">
             <a:avLst>
@@ -6775,7 +8721,7 @@
             </a:avLst>
           </a:prstGeom>
           <a:solidFill>
-            <a:srgbClr val="2563EB"/>
+            <a:srgbClr val="1C3557"/>
           </a:solidFill>
           <a:ln>
             <a:noFill/>
@@ -6807,21 +8753,64 @@
                 </a:solidFill>
                 <a:latin typeface="Noto Sans JP"/>
               </a:rPr>
-              <a:t>マーケAI</a:t>
-            </a:r>
-          </a:p>
-        </p:txBody>
-      </p:sp>
-      <p:sp>
-        <p:nvSpPr>
-          <p:cNvPr id="7" name="Rounded Rectangle 6"/>
-          <p:cNvSpPr/>
-          <p:nvPr/>
-        </p:nvSpPr>
-        <p:spPr>
-          <a:xfrm>
-            <a:off x="3749039" y="1371600"/>
-            <a:ext cx="7955279" cy="777240"/>
+              <a:t>髙橋</a:t>
+            </a:r>
+          </a:p>
+        </p:txBody>
+      </p:sp>
+      <p:sp>
+        <p:nvSpPr>
+          <p:cNvPr id="7" name="Down Arrow 6"/>
+          <p:cNvSpPr/>
+          <p:nvPr/>
+        </p:nvSpPr>
+        <p:spPr>
+          <a:xfrm>
+            <a:off x="5870448" y="1874519"/>
+            <a:ext cx="457200" cy="365760"/>
+          </a:xfrm>
+          <a:prstGeom prst="downArrow">
+            <a:avLst/>
+          </a:prstGeom>
+          <a:solidFill>
+            <a:srgbClr val="6B7280"/>
+          </a:solidFill>
+          <a:ln>
+            <a:noFill/>
+          </a:ln>
+        </p:spPr>
+        <p:style>
+          <a:lnRef idx="1">
+            <a:schemeClr val="accent1"/>
+          </a:lnRef>
+          <a:fillRef idx="3">
+            <a:schemeClr val="accent1"/>
+          </a:fillRef>
+          <a:effectRef idx="2">
+            <a:schemeClr val="accent1"/>
+          </a:effectRef>
+          <a:fontRef idx="minor">
+            <a:schemeClr val="lt1"/>
+          </a:fontRef>
+        </p:style>
+        <p:txBody>
+          <a:bodyPr rtlCol="0" anchor="ctr"/>
+          <a:lstStyle/>
+          <a:p>
+            <a:pPr algn="ctr"/>
+          </a:p>
+        </p:txBody>
+      </p:sp>
+      <p:sp>
+        <p:nvSpPr>
+          <p:cNvPr id="8" name="Rounded Rectangle 7"/>
+          <p:cNvSpPr/>
+          <p:nvPr/>
+        </p:nvSpPr>
+        <p:spPr>
+          <a:xfrm>
+            <a:off x="4727448" y="2286000"/>
+            <a:ext cx="2743200" cy="914400"/>
           </a:xfrm>
           <a:prstGeom prst="roundRect">
             <a:avLst>
@@ -6829,7 +8818,7 @@
             </a:avLst>
           </a:prstGeom>
           <a:solidFill>
-            <a:srgbClr val="F3F4F6"/>
+            <a:srgbClr val="2563EB"/>
           </a:solidFill>
           <a:ln>
             <a:noFill/>
@@ -6853,29 +8842,79 @@
           <a:bodyPr rtlCol="0" anchor="ctr" wrap="square" lIns="137160" rIns="137160" tIns="73152" bIns="73152"/>
           <a:lstStyle/>
           <a:p>
-            <a:pPr algn="l"/>
-            <a:r>
-              <a:rPr sz="1400" b="0">
-                <a:solidFill>
-                  <a:srgbClr val="1C3557"/>
-                </a:solidFill>
-                <a:latin typeface="Noto Sans JP"/>
-              </a:rPr>
-              <a:t>LP / SNS / 展示会 / LINE配信 / 事例記事</a:t>
-            </a:r>
-          </a:p>
-        </p:txBody>
-      </p:sp>
-      <p:sp>
-        <p:nvSpPr>
-          <p:cNvPr id="8" name="Rounded Rectangle 7"/>
-          <p:cNvSpPr/>
-          <p:nvPr/>
-        </p:nvSpPr>
-        <p:spPr>
-          <a:xfrm>
-            <a:off x="457200" y="2240280"/>
-            <a:ext cx="3200400" cy="777240"/>
+            <a:pPr algn="ctr"/>
+            <a:r>
+              <a:rPr sz="2800" b="1">
+                <a:solidFill>
+                  <a:srgbClr val="FFFFFF"/>
+                </a:solidFill>
+                <a:latin typeface="Noto Sans JP"/>
+              </a:rPr>
+              <a:t>大川</a:t>
+            </a:r>
+          </a:p>
+        </p:txBody>
+      </p:sp>
+      <p:sp>
+        <p:nvSpPr>
+          <p:cNvPr id="9" name="Rectangle 8"/>
+          <p:cNvSpPr/>
+          <p:nvPr/>
+        </p:nvSpPr>
+        <p:spPr>
+          <a:xfrm>
+            <a:off x="1325880" y="3383280"/>
+            <a:ext cx="365760" cy="457200"/>
+          </a:xfrm>
+          <a:prstGeom prst="rect">
+            <a:avLst/>
+          </a:prstGeom>
+          <a:noFill/>
+          <a:ln>
+            <a:noFill/>
+          </a:ln>
+        </p:spPr>
+        <p:style>
+          <a:lnRef idx="1">
+            <a:schemeClr val="accent1"/>
+          </a:lnRef>
+          <a:fillRef idx="3">
+            <a:schemeClr val="accent1"/>
+          </a:fillRef>
+          <a:effectRef idx="2">
+            <a:schemeClr val="accent1"/>
+          </a:effectRef>
+          <a:fontRef idx="minor">
+            <a:schemeClr val="lt1"/>
+          </a:fontRef>
+        </p:style>
+        <p:txBody>
+          <a:bodyPr rtlCol="0" anchor="ctr" wrap="square" lIns="137160" rIns="137160" tIns="73152" bIns="73152"/>
+          <a:lstStyle/>
+          <a:p>
+            <a:pPr algn="ctr"/>
+            <a:r>
+              <a:rPr sz="2400" b="1">
+                <a:solidFill>
+                  <a:srgbClr val="2563EB"/>
+                </a:solidFill>
+                <a:latin typeface="Noto Sans JP"/>
+              </a:rPr>
+              <a:t>↓</a:t>
+            </a:r>
+          </a:p>
+        </p:txBody>
+      </p:sp>
+      <p:sp>
+        <p:nvSpPr>
+          <p:cNvPr id="10" name="Rounded Rectangle 9"/>
+          <p:cNvSpPr/>
+          <p:nvPr/>
+        </p:nvSpPr>
+        <p:spPr>
+          <a:xfrm>
+            <a:off x="457200" y="3931920"/>
+            <a:ext cx="2103120" cy="1371600"/>
           </a:xfrm>
           <a:prstGeom prst="roundRect">
             <a:avLst>
@@ -6915,21 +8954,71 @@
                 </a:solidFill>
                 <a:latin typeface="Noto Sans JP"/>
               </a:rPr>
-              <a:t>営業AI</a:t>
-            </a:r>
-          </a:p>
-        </p:txBody>
-      </p:sp>
-      <p:sp>
-        <p:nvSpPr>
-          <p:cNvPr id="9" name="Rounded Rectangle 8"/>
-          <p:cNvSpPr/>
-          <p:nvPr/>
-        </p:nvSpPr>
-        <p:spPr>
-          <a:xfrm>
-            <a:off x="3749039" y="2240280"/>
-            <a:ext cx="7955279" cy="777240"/>
+              <a:t>マーケAI</a:t>
+            </a:r>
+          </a:p>
+        </p:txBody>
+      </p:sp>
+      <p:sp>
+        <p:nvSpPr>
+          <p:cNvPr id="11" name="Rectangle 10"/>
+          <p:cNvSpPr/>
+          <p:nvPr/>
+        </p:nvSpPr>
+        <p:spPr>
+          <a:xfrm>
+            <a:off x="3657600" y="3383280"/>
+            <a:ext cx="365760" cy="457200"/>
+          </a:xfrm>
+          <a:prstGeom prst="rect">
+            <a:avLst/>
+          </a:prstGeom>
+          <a:noFill/>
+          <a:ln>
+            <a:noFill/>
+          </a:ln>
+        </p:spPr>
+        <p:style>
+          <a:lnRef idx="1">
+            <a:schemeClr val="accent1"/>
+          </a:lnRef>
+          <a:fillRef idx="3">
+            <a:schemeClr val="accent1"/>
+          </a:fillRef>
+          <a:effectRef idx="2">
+            <a:schemeClr val="accent1"/>
+          </a:effectRef>
+          <a:fontRef idx="minor">
+            <a:schemeClr val="lt1"/>
+          </a:fontRef>
+        </p:style>
+        <p:txBody>
+          <a:bodyPr rtlCol="0" anchor="ctr" wrap="square" lIns="137160" rIns="137160" tIns="73152" bIns="73152"/>
+          <a:lstStyle/>
+          <a:p>
+            <a:pPr algn="ctr"/>
+            <a:r>
+              <a:rPr sz="2400" b="1">
+                <a:solidFill>
+                  <a:srgbClr val="2563EB"/>
+                </a:solidFill>
+                <a:latin typeface="Noto Sans JP"/>
+              </a:rPr>
+              <a:t>↓</a:t>
+            </a:r>
+          </a:p>
+        </p:txBody>
+      </p:sp>
+      <p:sp>
+        <p:nvSpPr>
+          <p:cNvPr id="12" name="Rounded Rectangle 11"/>
+          <p:cNvSpPr/>
+          <p:nvPr/>
+        </p:nvSpPr>
+        <p:spPr>
+          <a:xfrm>
+            <a:off x="2788920" y="3931920"/>
+            <a:ext cx="2103120" cy="1371600"/>
           </a:xfrm>
           <a:prstGeom prst="roundRect">
             <a:avLst>
@@ -6937,7 +9026,7 @@
             </a:avLst>
           </a:prstGeom>
           <a:solidFill>
-            <a:srgbClr val="F3F4F6"/>
+            <a:srgbClr val="2563EB"/>
           </a:solidFill>
           <a:ln>
             <a:noFill/>
@@ -6961,29 +9050,79 @@
           <a:bodyPr rtlCol="0" anchor="ctr" wrap="square" lIns="137160" rIns="137160" tIns="73152" bIns="73152"/>
           <a:lstStyle/>
           <a:p>
-            <a:pPr algn="l"/>
-            <a:r>
-              <a:rPr sz="1400" b="0">
-                <a:solidFill>
-                  <a:srgbClr val="1C3557"/>
-                </a:solidFill>
-                <a:latin typeface="Noto Sans JP"/>
-              </a:rPr>
-              <a:t>商談前準備 / 要件ヒアリング / 提案書 / フォロー</a:t>
-            </a:r>
-          </a:p>
-        </p:txBody>
-      </p:sp>
-      <p:sp>
-        <p:nvSpPr>
-          <p:cNvPr id="10" name="Rounded Rectangle 9"/>
-          <p:cNvSpPr/>
-          <p:nvPr/>
-        </p:nvSpPr>
-        <p:spPr>
-          <a:xfrm>
-            <a:off x="457200" y="3108960"/>
-            <a:ext cx="3200400" cy="777240"/>
+            <a:pPr algn="ctr"/>
+            <a:r>
+              <a:rPr sz="1600" b="1">
+                <a:solidFill>
+                  <a:srgbClr val="FFFFFF"/>
+                </a:solidFill>
+                <a:latin typeface="Noto Sans JP"/>
+              </a:rPr>
+              <a:t>営業AI</a:t>
+            </a:r>
+          </a:p>
+        </p:txBody>
+      </p:sp>
+      <p:sp>
+        <p:nvSpPr>
+          <p:cNvPr id="13" name="Rectangle 12"/>
+          <p:cNvSpPr/>
+          <p:nvPr/>
+        </p:nvSpPr>
+        <p:spPr>
+          <a:xfrm>
+            <a:off x="5989320" y="3383280"/>
+            <a:ext cx="365760" cy="457200"/>
+          </a:xfrm>
+          <a:prstGeom prst="rect">
+            <a:avLst/>
+          </a:prstGeom>
+          <a:noFill/>
+          <a:ln>
+            <a:noFill/>
+          </a:ln>
+        </p:spPr>
+        <p:style>
+          <a:lnRef idx="1">
+            <a:schemeClr val="accent1"/>
+          </a:lnRef>
+          <a:fillRef idx="3">
+            <a:schemeClr val="accent1"/>
+          </a:fillRef>
+          <a:effectRef idx="2">
+            <a:schemeClr val="accent1"/>
+          </a:effectRef>
+          <a:fontRef idx="minor">
+            <a:schemeClr val="lt1"/>
+          </a:fontRef>
+        </p:style>
+        <p:txBody>
+          <a:bodyPr rtlCol="0" anchor="ctr" wrap="square" lIns="137160" rIns="137160" tIns="73152" bIns="73152"/>
+          <a:lstStyle/>
+          <a:p>
+            <a:pPr algn="ctr"/>
+            <a:r>
+              <a:rPr sz="2400" b="1">
+                <a:solidFill>
+                  <a:srgbClr val="2563EB"/>
+                </a:solidFill>
+                <a:latin typeface="Noto Sans JP"/>
+              </a:rPr>
+              <a:t>↓</a:t>
+            </a:r>
+          </a:p>
+        </p:txBody>
+      </p:sp>
+      <p:sp>
+        <p:nvSpPr>
+          <p:cNvPr id="14" name="Rounded Rectangle 13"/>
+          <p:cNvSpPr/>
+          <p:nvPr/>
+        </p:nvSpPr>
+        <p:spPr>
+          <a:xfrm>
+            <a:off x="5120640" y="3931920"/>
+            <a:ext cx="2103120" cy="1371600"/>
           </a:xfrm>
           <a:prstGeom prst="roundRect">
             <a:avLst>
@@ -7030,14 +9169,64 @@
       </p:sp>
       <p:sp>
         <p:nvSpPr>
-          <p:cNvPr id="11" name="Rounded Rectangle 10"/>
-          <p:cNvSpPr/>
-          <p:nvPr/>
-        </p:nvSpPr>
-        <p:spPr>
-          <a:xfrm>
-            <a:off x="3749039" y="3108960"/>
-            <a:ext cx="7955279" cy="777240"/>
+          <p:cNvPr id="15" name="Rectangle 14"/>
+          <p:cNvSpPr/>
+          <p:nvPr/>
+        </p:nvSpPr>
+        <p:spPr>
+          <a:xfrm>
+            <a:off x="8321039" y="3383280"/>
+            <a:ext cx="365760" cy="457200"/>
+          </a:xfrm>
+          <a:prstGeom prst="rect">
+            <a:avLst/>
+          </a:prstGeom>
+          <a:noFill/>
+          <a:ln>
+            <a:noFill/>
+          </a:ln>
+        </p:spPr>
+        <p:style>
+          <a:lnRef idx="1">
+            <a:schemeClr val="accent1"/>
+          </a:lnRef>
+          <a:fillRef idx="3">
+            <a:schemeClr val="accent1"/>
+          </a:fillRef>
+          <a:effectRef idx="2">
+            <a:schemeClr val="accent1"/>
+          </a:effectRef>
+          <a:fontRef idx="minor">
+            <a:schemeClr val="lt1"/>
+          </a:fontRef>
+        </p:style>
+        <p:txBody>
+          <a:bodyPr rtlCol="0" anchor="ctr" wrap="square" lIns="137160" rIns="137160" tIns="73152" bIns="73152"/>
+          <a:lstStyle/>
+          <a:p>
+            <a:pPr algn="ctr"/>
+            <a:r>
+              <a:rPr sz="2400" b="1">
+                <a:solidFill>
+                  <a:srgbClr val="2563EB"/>
+                </a:solidFill>
+                <a:latin typeface="Noto Sans JP"/>
+              </a:rPr>
+              <a:t>↓</a:t>
+            </a:r>
+          </a:p>
+        </p:txBody>
+      </p:sp>
+      <p:sp>
+        <p:nvSpPr>
+          <p:cNvPr id="16" name="Rounded Rectangle 15"/>
+          <p:cNvSpPr/>
+          <p:nvPr/>
+        </p:nvSpPr>
+        <p:spPr>
+          <a:xfrm>
+            <a:off x="7452359" y="3931920"/>
+            <a:ext cx="2103120" cy="1371600"/>
           </a:xfrm>
           <a:prstGeom prst="roundRect">
             <a:avLst>
@@ -7045,7 +9234,7 @@
             </a:avLst>
           </a:prstGeom>
           <a:solidFill>
-            <a:srgbClr val="F3F4F6"/>
+            <a:srgbClr val="2563EB"/>
           </a:solidFill>
           <a:ln>
             <a:noFill/>
@@ -7069,29 +9258,79 @@
           <a:bodyPr rtlCol="0" anchor="ctr" wrap="square" lIns="137160" rIns="137160" tIns="73152" bIns="73152"/>
           <a:lstStyle/>
           <a:p>
-            <a:pPr algn="l"/>
-            <a:r>
-              <a:rPr sz="1400" b="0">
-                <a:solidFill>
-                  <a:srgbClr val="1C3557"/>
-                </a:solidFill>
-                <a:latin typeface="Noto Sans JP"/>
-              </a:rPr>
-              <a:t>研修運営 / Dify・N8N・GAS構築 / CSコンサル / PM</a:t>
-            </a:r>
-          </a:p>
-        </p:txBody>
-      </p:sp>
-      <p:sp>
-        <p:nvSpPr>
-          <p:cNvPr id="12" name="Rounded Rectangle 11"/>
-          <p:cNvSpPr/>
-          <p:nvPr/>
-        </p:nvSpPr>
-        <p:spPr>
-          <a:xfrm>
-            <a:off x="457200" y="3977640"/>
-            <a:ext cx="3200400" cy="777240"/>
+            <a:pPr algn="ctr"/>
+            <a:r>
+              <a:rPr sz="1600" b="1">
+                <a:solidFill>
+                  <a:srgbClr val="FFFFFF"/>
+                </a:solidFill>
+                <a:latin typeface="Noto Sans JP"/>
+              </a:rPr>
+              <a:t>事務法務AI</a:t>
+            </a:r>
+          </a:p>
+        </p:txBody>
+      </p:sp>
+      <p:sp>
+        <p:nvSpPr>
+          <p:cNvPr id="17" name="Rectangle 16"/>
+          <p:cNvSpPr/>
+          <p:nvPr/>
+        </p:nvSpPr>
+        <p:spPr>
+          <a:xfrm>
+            <a:off x="10652759" y="3383280"/>
+            <a:ext cx="365760" cy="457200"/>
+          </a:xfrm>
+          <a:prstGeom prst="rect">
+            <a:avLst/>
+          </a:prstGeom>
+          <a:noFill/>
+          <a:ln>
+            <a:noFill/>
+          </a:ln>
+        </p:spPr>
+        <p:style>
+          <a:lnRef idx="1">
+            <a:schemeClr val="accent1"/>
+          </a:lnRef>
+          <a:fillRef idx="3">
+            <a:schemeClr val="accent1"/>
+          </a:fillRef>
+          <a:effectRef idx="2">
+            <a:schemeClr val="accent1"/>
+          </a:effectRef>
+          <a:fontRef idx="minor">
+            <a:schemeClr val="lt1"/>
+          </a:fontRef>
+        </p:style>
+        <p:txBody>
+          <a:bodyPr rtlCol="0" anchor="ctr" wrap="square" lIns="137160" rIns="137160" tIns="73152" bIns="73152"/>
+          <a:lstStyle/>
+          <a:p>
+            <a:pPr algn="ctr"/>
+            <a:r>
+              <a:rPr sz="2400" b="1">
+                <a:solidFill>
+                  <a:srgbClr val="2563EB"/>
+                </a:solidFill>
+                <a:latin typeface="Noto Sans JP"/>
+              </a:rPr>
+              <a:t>↓</a:t>
+            </a:r>
+          </a:p>
+        </p:txBody>
+      </p:sp>
+      <p:sp>
+        <p:nvSpPr>
+          <p:cNvPr id="18" name="Rounded Rectangle 17"/>
+          <p:cNvSpPr/>
+          <p:nvPr/>
+        </p:nvSpPr>
+        <p:spPr>
+          <a:xfrm>
+            <a:off x="9784080" y="3931920"/>
+            <a:ext cx="2103120" cy="1371600"/>
           </a:xfrm>
           <a:prstGeom prst="roundRect">
             <a:avLst>
@@ -7131,21 +9370,21 @@
                 </a:solidFill>
                 <a:latin typeface="Noto Sans JP"/>
               </a:rPr>
-              <a:t>事務・法務AI</a:t>
-            </a:r>
-          </a:p>
-        </p:txBody>
-      </p:sp>
-      <p:sp>
-        <p:nvSpPr>
-          <p:cNvPr id="13" name="Rounded Rectangle 12"/>
-          <p:cNvSpPr/>
-          <p:nvPr/>
-        </p:nvSpPr>
-        <p:spPr>
-          <a:xfrm>
-            <a:off x="3749039" y="3977640"/>
-            <a:ext cx="7955279" cy="777240"/>
+              <a:t>戦略AI</a:t>
+            </a:r>
+          </a:p>
+        </p:txBody>
+      </p:sp>
+      <p:sp>
+        <p:nvSpPr>
+          <p:cNvPr id="19" name="Rounded Rectangle 18"/>
+          <p:cNvSpPr/>
+          <p:nvPr/>
+        </p:nvSpPr>
+        <p:spPr>
+          <a:xfrm>
+            <a:off x="457200" y="5669280"/>
+            <a:ext cx="11274552" cy="914400"/>
           </a:xfrm>
           <a:prstGeom prst="roundRect">
             <a:avLst>
@@ -7153,7 +9392,7 @@
             </a:avLst>
           </a:prstGeom>
           <a:solidFill>
-            <a:srgbClr val="F3F4F6"/>
+            <a:srgbClr val="DBEAFE"/>
           </a:solidFill>
           <a:ln>
             <a:noFill/>
@@ -7177,173 +9416,15 @@
           <a:bodyPr rtlCol="0" anchor="ctr" wrap="square" lIns="137160" rIns="137160" tIns="73152" bIns="73152"/>
           <a:lstStyle/>
           <a:p>
-            <a:pPr algn="l"/>
-            <a:r>
-              <a:rPr sz="1400" b="0">
-                <a:solidFill>
-                  <a:srgbClr val="1C3557"/>
-                </a:solidFill>
-                <a:latin typeface="Noto Sans JP"/>
-              </a:rPr>
-              <a:t>契約 / 請求 / PL / 利用規約</a:t>
-            </a:r>
-          </a:p>
-        </p:txBody>
-      </p:sp>
-      <p:sp>
-        <p:nvSpPr>
-          <p:cNvPr id="14" name="Rounded Rectangle 13"/>
-          <p:cNvSpPr/>
-          <p:nvPr/>
-        </p:nvSpPr>
-        <p:spPr>
-          <a:xfrm>
-            <a:off x="457200" y="4846320"/>
-            <a:ext cx="3200400" cy="777240"/>
-          </a:xfrm>
-          <a:prstGeom prst="roundRect">
-            <a:avLst>
-              <a:gd name="adj" fmla="val 5000"/>
-            </a:avLst>
-          </a:prstGeom>
-          <a:solidFill>
-            <a:srgbClr val="2563EB"/>
-          </a:solidFill>
-          <a:ln>
-            <a:noFill/>
-          </a:ln>
-        </p:spPr>
-        <p:style>
-          <a:lnRef idx="1">
-            <a:schemeClr val="accent1"/>
-          </a:lnRef>
-          <a:fillRef idx="3">
-            <a:schemeClr val="accent1"/>
-          </a:fillRef>
-          <a:effectRef idx="2">
-            <a:schemeClr val="accent1"/>
-          </a:effectRef>
-          <a:fontRef idx="minor">
-            <a:schemeClr val="lt1"/>
-          </a:fontRef>
-        </p:style>
-        <p:txBody>
-          <a:bodyPr rtlCol="0" anchor="ctr" wrap="square" lIns="137160" rIns="137160" tIns="73152" bIns="73152"/>
-          <a:lstStyle/>
-          <a:p>
-            <a:pPr algn="ctr"/>
-            <a:r>
-              <a:rPr sz="1600" b="1">
-                <a:solidFill>
-                  <a:srgbClr val="FFFFFF"/>
-                </a:solidFill>
-                <a:latin typeface="Noto Sans JP"/>
-              </a:rPr>
-              <a:t>戦略・プロダクトAI</a:t>
-            </a:r>
-          </a:p>
-        </p:txBody>
-      </p:sp>
-      <p:sp>
-        <p:nvSpPr>
-          <p:cNvPr id="15" name="Rounded Rectangle 14"/>
-          <p:cNvSpPr/>
-          <p:nvPr/>
-        </p:nvSpPr>
-        <p:spPr>
-          <a:xfrm>
-            <a:off x="3749039" y="4846320"/>
-            <a:ext cx="7955279" cy="777240"/>
-          </a:xfrm>
-          <a:prstGeom prst="roundRect">
-            <a:avLst>
-              <a:gd name="adj" fmla="val 5000"/>
-            </a:avLst>
-          </a:prstGeom>
-          <a:solidFill>
-            <a:srgbClr val="F3F4F6"/>
-          </a:solidFill>
-          <a:ln>
-            <a:noFill/>
-          </a:ln>
-        </p:spPr>
-        <p:style>
-          <a:lnRef idx="1">
-            <a:schemeClr val="accent1"/>
-          </a:lnRef>
-          <a:fillRef idx="3">
-            <a:schemeClr val="accent1"/>
-          </a:fillRef>
-          <a:effectRef idx="2">
-            <a:schemeClr val="accent1"/>
-          </a:effectRef>
-          <a:fontRef idx="minor">
-            <a:schemeClr val="lt1"/>
-          </a:fontRef>
-        </p:style>
-        <p:txBody>
-          <a:bodyPr rtlCol="0" anchor="ctr" wrap="square" lIns="137160" rIns="137160" tIns="73152" bIns="73152"/>
-          <a:lstStyle/>
-          <a:p>
-            <a:pPr algn="l"/>
-            <a:r>
-              <a:rPr sz="1400" b="0">
-                <a:solidFill>
-                  <a:srgbClr val="1C3557"/>
-                </a:solidFill>
-                <a:latin typeface="Noto Sans JP"/>
-              </a:rPr>
-              <a:t>競合・市場・料金・データ分析(リサーチ・分析担当)</a:t>
-            </a:r>
-          </a:p>
-        </p:txBody>
-      </p:sp>
-      <p:sp>
-        <p:nvSpPr>
-          <p:cNvPr id="16" name="Rectangle 15"/>
-          <p:cNvSpPr/>
-          <p:nvPr/>
-        </p:nvSpPr>
-        <p:spPr>
-          <a:xfrm>
-            <a:off x="457200" y="5989320"/>
-            <a:ext cx="11274552" cy="365760"/>
-          </a:xfrm>
-          <a:prstGeom prst="rect">
-            <a:avLst/>
-          </a:prstGeom>
-          <a:noFill/>
-          <a:ln>
-            <a:noFill/>
-          </a:ln>
-        </p:spPr>
-        <p:style>
-          <a:lnRef idx="1">
-            <a:schemeClr val="accent1"/>
-          </a:lnRef>
-          <a:fillRef idx="3">
-            <a:schemeClr val="accent1"/>
-          </a:fillRef>
-          <a:effectRef idx="2">
-            <a:schemeClr val="accent1"/>
-          </a:effectRef>
-          <a:fontRef idx="minor">
-            <a:schemeClr val="lt1"/>
-          </a:fontRef>
-        </p:style>
-        <p:txBody>
-          <a:bodyPr rtlCol="0" anchor="t" wrap="square" lIns="137160" rIns="137160" tIns="73152" bIns="73152"/>
-          <a:lstStyle/>
-          <a:p>
-            <a:pPr algn="ctr"/>
-            <a:r>
-              <a:rPr sz="1100" b="1">
-                <a:solidFill>
-                  <a:srgbClr val="6B7280"/>
-                </a:solidFill>
-                <a:latin typeface="Noto Sans JP"/>
-              </a:rPr>
-              <a:t>4人 = 各領域の戦略 + 実行  /  戦略・プロダクトAI = リサーチ・分析担当</a:t>
+            <a:pPr algn="ctr"/>
+            <a:r>
+              <a:rPr sz="2200" b="1">
+                <a:solidFill>
+                  <a:srgbClr val="2563EB"/>
+                </a:solidFill>
+                <a:latin typeface="Noto Sans JP"/>
+              </a:rPr>
+              <a:t>大川主導で AI社員5人 を動かして事業部を回している</a:t>
             </a:r>
           </a:p>
         </p:txBody>
@@ -7448,13 +9529,13 @@
           <a:p>
             <a:pPr algn="r"/>
             <a:r>
-              <a:rPr sz="1000" b="0">
+              <a:rPr sz="1100" b="0">
                 <a:solidFill>
                   <a:srgbClr val="6B7280"/>
                 </a:solidFill>
                 <a:latin typeface="Noto Sans JP"/>
               </a:rPr>
-              <a:t>6 / 11</a:t>
+              <a:t>6 / 13</a:t>
             </a:r>
           </a:p>
         </p:txBody>
@@ -7498,13 +9579,13 @@
           <a:p>
             <a:pPr algn="l"/>
             <a:r>
-              <a:rPr sz="2200" b="1">
+              <a:rPr sz="2400" b="1">
                 <a:solidFill>
                   <a:srgbClr val="1C3557"/>
                 </a:solidFill>
                 <a:latin typeface="Noto Sans JP"/>
               </a:rPr>
-              <a:t>これが事業でやるべき仕事のすべて</a:t>
+              <a:t>AI社員5人の構成</a:t>
             </a:r>
           </a:p>
         </p:txBody>
@@ -7518,7 +9599,7 @@
         <p:spPr>
           <a:xfrm>
             <a:off x="457200" y="1051560"/>
-            <a:ext cx="1371600" cy="54864"/>
+            <a:ext cx="1645920" cy="64008"/>
           </a:xfrm>
           <a:prstGeom prst="rect">
             <a:avLst/>
@@ -7560,8 +9641,8 @@
         </p:nvSpPr>
         <p:spPr>
           <a:xfrm>
-            <a:off x="457200" y="2011680"/>
-            <a:ext cx="2194560" cy="1280160"/>
+            <a:off x="457200" y="1371600"/>
+            <a:ext cx="3200400" cy="868680"/>
           </a:xfrm>
           <a:prstGeom prst="roundRect">
             <a:avLst>
@@ -7601,7 +9682,7 @@
                 </a:solidFill>
                 <a:latin typeface="Noto Sans JP"/>
               </a:rPr>
-              <a:t>マーケ</a:t>
+              <a:t>マーケAI</a:t>
             </a:r>
           </a:p>
         </p:txBody>
@@ -7614,8 +9695,8 @@
         </p:nvSpPr>
         <p:spPr>
           <a:xfrm>
-            <a:off x="457200" y="3337560"/>
-            <a:ext cx="2194560" cy="640080"/>
+            <a:off x="3749039" y="1371600"/>
+            <a:ext cx="7955279" cy="868680"/>
           </a:xfrm>
           <a:prstGeom prst="roundRect">
             <a:avLst>
@@ -7647,15 +9728,15 @@
           <a:bodyPr rtlCol="0" anchor="ctr" wrap="square" lIns="137160" rIns="137160" tIns="73152" bIns="73152"/>
           <a:lstStyle/>
           <a:p>
-            <a:pPr algn="ctr"/>
-            <a:r>
-              <a:rPr sz="1300" b="0">
+            <a:pPr algn="l"/>
+            <a:r>
+              <a:rPr sz="1400" b="0">
                 <a:solidFill>
                   <a:srgbClr val="1C3557"/>
                 </a:solidFill>
                 <a:latin typeface="Noto Sans JP"/>
               </a:rPr>
-              <a:t>認知獲得</a:t>
+              <a:t>LP / SNS / 展示会 / LINE配信 / 事例記事</a:t>
             </a:r>
           </a:p>
         </p:txBody>
@@ -7668,8 +9749,8 @@
         </p:nvSpPr>
         <p:spPr>
           <a:xfrm>
-            <a:off x="2715768" y="2011680"/>
-            <a:ext cx="2194560" cy="1280160"/>
+            <a:off x="457200" y="2331720"/>
+            <a:ext cx="3200400" cy="868680"/>
           </a:xfrm>
           <a:prstGeom prst="roundRect">
             <a:avLst>
@@ -7709,7 +9790,7 @@
                 </a:solidFill>
                 <a:latin typeface="Noto Sans JP"/>
               </a:rPr>
-              <a:t>営業</a:t>
+              <a:t>営業AI</a:t>
             </a:r>
           </a:p>
         </p:txBody>
@@ -7722,8 +9803,8 @@
         </p:nvSpPr>
         <p:spPr>
           <a:xfrm>
-            <a:off x="2715768" y="3337560"/>
-            <a:ext cx="2194560" cy="640080"/>
+            <a:off x="3749039" y="2331720"/>
+            <a:ext cx="7955279" cy="868680"/>
           </a:xfrm>
           <a:prstGeom prst="roundRect">
             <a:avLst>
@@ -7755,15 +9836,15 @@
           <a:bodyPr rtlCol="0" anchor="ctr" wrap="square" lIns="137160" rIns="137160" tIns="73152" bIns="73152"/>
           <a:lstStyle/>
           <a:p>
-            <a:pPr algn="ctr"/>
-            <a:r>
-              <a:rPr sz="1300" b="0">
+            <a:pPr algn="l"/>
+            <a:r>
+              <a:rPr sz="1400" b="0">
                 <a:solidFill>
                   <a:srgbClr val="1C3557"/>
                 </a:solidFill>
                 <a:latin typeface="Noto Sans JP"/>
               </a:rPr>
-              <a:t>商談・受注</a:t>
+              <a:t>商談前準備 / 要件ヒアリング / 提案書 / フォロー</a:t>
             </a:r>
           </a:p>
         </p:txBody>
@@ -7776,8 +9857,8 @@
         </p:nvSpPr>
         <p:spPr>
           <a:xfrm>
-            <a:off x="4974336" y="2011680"/>
-            <a:ext cx="2194560" cy="1280160"/>
+            <a:off x="457200" y="3291839"/>
+            <a:ext cx="3200400" cy="868680"/>
           </a:xfrm>
           <a:prstGeom prst="roundRect">
             <a:avLst>
@@ -7817,7 +9898,7 @@
                 </a:solidFill>
                 <a:latin typeface="Noto Sans JP"/>
               </a:rPr>
-              <a:t>デリバリー</a:t>
+              <a:t>デリバリーAI</a:t>
             </a:r>
           </a:p>
         </p:txBody>
@@ -7830,8 +9911,8 @@
         </p:nvSpPr>
         <p:spPr>
           <a:xfrm>
-            <a:off x="4974336" y="3337560"/>
-            <a:ext cx="2194560" cy="640080"/>
+            <a:off x="3749039" y="3291839"/>
+            <a:ext cx="7955279" cy="868680"/>
           </a:xfrm>
           <a:prstGeom prst="roundRect">
             <a:avLst>
@@ -7863,15 +9944,15 @@
           <a:bodyPr rtlCol="0" anchor="ctr" wrap="square" lIns="137160" rIns="137160" tIns="73152" bIns="73152"/>
           <a:lstStyle/>
           <a:p>
-            <a:pPr algn="ctr"/>
-            <a:r>
-              <a:rPr sz="1300" b="0">
+            <a:pPr algn="l"/>
+            <a:r>
+              <a:rPr sz="1400" b="0">
                 <a:solidFill>
                   <a:srgbClr val="1C3557"/>
                 </a:solidFill>
                 <a:latin typeface="Noto Sans JP"/>
               </a:rPr>
-              <a:t>納品</a:t>
+              <a:t>研修運営 / Dify・n8n・GAS構築 / CSコンサル / PM</a:t>
             </a:r>
           </a:p>
         </p:txBody>
@@ -7884,8 +9965,8 @@
         </p:nvSpPr>
         <p:spPr>
           <a:xfrm>
-            <a:off x="7232903" y="2011680"/>
-            <a:ext cx="2194560" cy="1280160"/>
+            <a:off x="457200" y="4251959"/>
+            <a:ext cx="3200400" cy="868680"/>
           </a:xfrm>
           <a:prstGeom prst="roundRect">
             <a:avLst>
@@ -7925,7 +10006,7 @@
                 </a:solidFill>
                 <a:latin typeface="Noto Sans JP"/>
               </a:rPr>
-              <a:t>事務・法務</a:t>
+              <a:t>事務・法務AI</a:t>
             </a:r>
           </a:p>
         </p:txBody>
@@ -7938,8 +10019,8 @@
         </p:nvSpPr>
         <p:spPr>
           <a:xfrm>
-            <a:off x="7232903" y="3337560"/>
-            <a:ext cx="2194560" cy="640080"/>
+            <a:off x="3749039" y="4251959"/>
+            <a:ext cx="7955279" cy="868680"/>
           </a:xfrm>
           <a:prstGeom prst="roundRect">
             <a:avLst>
@@ -7971,15 +10052,15 @@
           <a:bodyPr rtlCol="0" anchor="ctr" wrap="square" lIns="137160" rIns="137160" tIns="73152" bIns="73152"/>
           <a:lstStyle/>
           <a:p>
-            <a:pPr algn="ctr"/>
-            <a:r>
-              <a:rPr sz="1300" b="0">
+            <a:pPr algn="l"/>
+            <a:r>
+              <a:rPr sz="1400" b="0">
                 <a:solidFill>
                   <a:srgbClr val="1C3557"/>
                 </a:solidFill>
                 <a:latin typeface="Noto Sans JP"/>
               </a:rPr>
-              <a:t>管理・記録</a:t>
+              <a:t>契約書 / 請求書 / 利用契約書 / プライバシーポリシー / PL</a:t>
             </a:r>
           </a:p>
         </p:txBody>
@@ -7992,8 +10073,8 @@
         </p:nvSpPr>
         <p:spPr>
           <a:xfrm>
-            <a:off x="9491472" y="2011680"/>
-            <a:ext cx="2194560" cy="1280160"/>
+            <a:off x="457200" y="5212079"/>
+            <a:ext cx="3200400" cy="868680"/>
           </a:xfrm>
           <a:prstGeom prst="roundRect">
             <a:avLst>
@@ -8033,7 +10114,7 @@
                 </a:solidFill>
                 <a:latin typeface="Noto Sans JP"/>
               </a:rPr>
-              <a:t>戦略</a:t>
+              <a:t>戦略・プロダクトAI</a:t>
             </a:r>
           </a:p>
         </p:txBody>
@@ -8046,8 +10127,8 @@
         </p:nvSpPr>
         <p:spPr>
           <a:xfrm>
-            <a:off x="9491472" y="3337560"/>
-            <a:ext cx="2194560" cy="640080"/>
+            <a:off x="3749039" y="5212079"/>
+            <a:ext cx="7955279" cy="868680"/>
           </a:xfrm>
           <a:prstGeom prst="roundRect">
             <a:avLst>
@@ -8079,69 +10160,65 @@
           <a:bodyPr rtlCol="0" anchor="ctr" wrap="square" lIns="137160" rIns="137160" tIns="73152" bIns="73152"/>
           <a:lstStyle/>
           <a:p>
-            <a:pPr algn="ctr"/>
-            <a:r>
-              <a:rPr sz="1300" b="0">
+            <a:pPr algn="l"/>
+            <a:r>
+              <a:rPr sz="1400" b="0">
                 <a:solidFill>
                   <a:srgbClr val="1C3557"/>
                 </a:solidFill>
                 <a:latin typeface="Noto Sans JP"/>
               </a:rPr>
-              <a:t>リサーチ・分析</a:t>
-            </a:r>
-          </a:p>
-        </p:txBody>
-      </p:sp>
-      <p:sp>
-        <p:nvSpPr>
-          <p:cNvPr id="16" name="Rounded Rectangle 15"/>
-          <p:cNvSpPr/>
-          <p:nvPr/>
-        </p:nvSpPr>
-        <p:spPr>
-          <a:xfrm>
-            <a:off x="457200" y="4572000"/>
-            <a:ext cx="11274552" cy="1280160"/>
-          </a:xfrm>
-          <a:prstGeom prst="roundRect">
-            <a:avLst>
-              <a:gd name="adj" fmla="val 5000"/>
-            </a:avLst>
-          </a:prstGeom>
-          <a:solidFill>
-            <a:srgbClr val="DBEAFE"/>
-          </a:solidFill>
-          <a:ln>
-            <a:noFill/>
-          </a:ln>
-        </p:spPr>
-        <p:style>
-          <a:lnRef idx="1">
-            <a:schemeClr val="accent1"/>
-          </a:lnRef>
-          <a:fillRef idx="3">
-            <a:schemeClr val="accent1"/>
-          </a:fillRef>
-          <a:effectRef idx="2">
-            <a:schemeClr val="accent1"/>
-          </a:effectRef>
-          <a:fontRef idx="minor">
-            <a:schemeClr val="lt1"/>
-          </a:fontRef>
-        </p:style>
-        <p:txBody>
-          <a:bodyPr rtlCol="0" anchor="ctr" wrap="square" lIns="137160" rIns="137160" tIns="73152" bIns="73152"/>
-          <a:lstStyle/>
-          <a:p>
-            <a:pPr algn="ctr"/>
-            <a:r>
-              <a:rPr sz="2200" b="1">
-                <a:solidFill>
-                  <a:srgbClr val="2563EB"/>
-                </a:solidFill>
-                <a:latin typeface="Noto Sans JP"/>
-              </a:rPr>
-              <a:t>マーケから戦略まで、事業の全部の仕事を 5人 で網羅している</a:t>
+              <a:t>競合調査 / 市場調査 / 料金設計 / データ分析</a:t>
+            </a:r>
+          </a:p>
+        </p:txBody>
+      </p:sp>
+      <p:sp>
+        <p:nvSpPr>
+          <p:cNvPr id="16" name="Rectangle 15"/>
+          <p:cNvSpPr/>
+          <p:nvPr/>
+        </p:nvSpPr>
+        <p:spPr>
+          <a:xfrm>
+            <a:off x="457200" y="6263640"/>
+            <a:ext cx="11274552" cy="365760"/>
+          </a:xfrm>
+          <a:prstGeom prst="rect">
+            <a:avLst/>
+          </a:prstGeom>
+          <a:noFill/>
+          <a:ln>
+            <a:noFill/>
+          </a:ln>
+        </p:spPr>
+        <p:style>
+          <a:lnRef idx="1">
+            <a:schemeClr val="accent1"/>
+          </a:lnRef>
+          <a:fillRef idx="3">
+            <a:schemeClr val="accent1"/>
+          </a:fillRef>
+          <a:effectRef idx="2">
+            <a:schemeClr val="accent1"/>
+          </a:effectRef>
+          <a:fontRef idx="minor">
+            <a:schemeClr val="lt1"/>
+          </a:fontRef>
+        </p:style>
+        <p:txBody>
+          <a:bodyPr rtlCol="0" anchor="t" wrap="square" lIns="137160" rIns="137160" tIns="73152" bIns="73152"/>
+          <a:lstStyle/>
+          <a:p>
+            <a:pPr algn="ctr"/>
+            <a:r>
+              <a:rPr sz="1100" b="1">
+                <a:solidFill>
+                  <a:srgbClr val="6B7280"/>
+                </a:solidFill>
+                <a:latin typeface="Noto Sans JP"/>
+              </a:rPr>
+              <a:t>4人 = 各領域の戦略 + 実行  /  戦略・プロダクトAI = リサーチ・分析担当</a:t>
             </a:r>
           </a:p>
         </p:txBody>
@@ -8246,13 +10323,13 @@
           <a:p>
             <a:pPr algn="r"/>
             <a:r>
-              <a:rPr sz="1000" b="0">
+              <a:rPr sz="1100" b="0">
                 <a:solidFill>
                   <a:srgbClr val="6B7280"/>
                 </a:solidFill>
                 <a:latin typeface="Noto Sans JP"/>
               </a:rPr>
-              <a:t>7 / 11</a:t>
+              <a:t>7 / 13</a:t>
             </a:r>
           </a:p>
         </p:txBody>
@@ -8296,13 +10373,13 @@
           <a:p>
             <a:pPr algn="l"/>
             <a:r>
-              <a:rPr sz="2200" b="1">
+              <a:rPr sz="2400" b="1">
                 <a:solidFill>
                   <a:srgbClr val="1C3557"/>
                 </a:solidFill>
                 <a:latin typeface="Noto Sans JP"/>
               </a:rPr>
-              <a:t>AI社員をこう使っているイメージ</a:t>
+              <a:t>これが事業でやるべき仕事のすべて</a:t>
             </a:r>
           </a:p>
         </p:txBody>
@@ -8316,7 +10393,7 @@
         <p:spPr>
           <a:xfrm>
             <a:off x="457200" y="1051560"/>
-            <a:ext cx="1371600" cy="54864"/>
+            <a:ext cx="1645920" cy="64008"/>
           </a:xfrm>
           <a:prstGeom prst="rect">
             <a:avLst/>
@@ -8352,742 +10429,14 @@
       </p:sp>
       <p:sp>
         <p:nvSpPr>
-          <p:cNvPr id="6" name="Rectangle 5"/>
-          <p:cNvSpPr/>
-          <p:nvPr/>
-        </p:nvSpPr>
-        <p:spPr>
-          <a:xfrm>
-            <a:off x="457200" y="1371600"/>
-            <a:ext cx="5486400" cy="502920"/>
-          </a:xfrm>
-          <a:prstGeom prst="rect">
-            <a:avLst/>
-          </a:prstGeom>
-          <a:solidFill>
-            <a:srgbClr val="2563EB"/>
-          </a:solidFill>
-          <a:ln>
-            <a:noFill/>
-          </a:ln>
-        </p:spPr>
-        <p:style>
-          <a:lnRef idx="1">
-            <a:schemeClr val="accent1"/>
-          </a:lnRef>
-          <a:fillRef idx="3">
-            <a:schemeClr val="accent1"/>
-          </a:fillRef>
-          <a:effectRef idx="2">
-            <a:schemeClr val="accent1"/>
-          </a:effectRef>
-          <a:fontRef idx="minor">
-            <a:schemeClr val="lt1"/>
-          </a:fontRef>
-        </p:style>
-        <p:txBody>
-          <a:bodyPr rtlCol="0" anchor="ctr" wrap="square" lIns="137160" rIns="137160" tIns="73152" bIns="73152"/>
-          <a:lstStyle/>
-          <a:p>
-            <a:pPr algn="ctr"/>
-            <a:r>
-              <a:rPr sz="1600" b="1">
-                <a:solidFill>
-                  <a:srgbClr val="FFFFFF"/>
-                </a:solidFill>
-                <a:latin typeface="Noto Sans JP"/>
-              </a:rPr>
-              <a:t>Kawaru プロダクト作り</a:t>
-            </a:r>
-          </a:p>
-        </p:txBody>
-      </p:sp>
-      <p:sp>
-        <p:nvSpPr>
-          <p:cNvPr id="7" name="Rectangle 6"/>
-          <p:cNvSpPr/>
-          <p:nvPr/>
-        </p:nvSpPr>
-        <p:spPr>
-          <a:xfrm>
-            <a:off x="457200" y="1965960"/>
-            <a:ext cx="3657600" cy="777240"/>
-          </a:xfrm>
-          <a:prstGeom prst="rect">
-            <a:avLst/>
-          </a:prstGeom>
-          <a:solidFill>
-            <a:srgbClr val="DBEAFE"/>
-          </a:solidFill>
-          <a:ln>
-            <a:noFill/>
-          </a:ln>
-        </p:spPr>
-        <p:style>
-          <a:lnRef idx="1">
-            <a:schemeClr val="accent1"/>
-          </a:lnRef>
-          <a:fillRef idx="3">
-            <a:schemeClr val="accent1"/>
-          </a:fillRef>
-          <a:effectRef idx="2">
-            <a:schemeClr val="accent1"/>
-          </a:effectRef>
-          <a:fontRef idx="minor">
-            <a:schemeClr val="lt1"/>
-          </a:fontRef>
-        </p:style>
-        <p:txBody>
-          <a:bodyPr rtlCol="0" anchor="ctr" wrap="square" lIns="137160" rIns="137160" tIns="73152" bIns="73152"/>
-          <a:lstStyle/>
-          <a:p>
-            <a:pPr algn="l"/>
-            <a:r>
-              <a:rPr sz="1300" b="0">
-                <a:solidFill>
-                  <a:srgbClr val="1C3557"/>
-                </a:solidFill>
-                <a:latin typeface="Noto Sans JP"/>
-              </a:rPr>
-              <a:t>プロダクト改善の提案たたき</a:t>
-            </a:r>
-          </a:p>
-        </p:txBody>
-      </p:sp>
-      <p:sp>
-        <p:nvSpPr>
-          <p:cNvPr id="8" name="Rectangle 7"/>
-          <p:cNvSpPr/>
-          <p:nvPr/>
-        </p:nvSpPr>
-        <p:spPr>
-          <a:xfrm>
-            <a:off x="4160520" y="1965960"/>
-            <a:ext cx="1783080" cy="777240"/>
-          </a:xfrm>
-          <a:prstGeom prst="rect">
-            <a:avLst/>
-          </a:prstGeom>
-          <a:solidFill>
-            <a:srgbClr val="FFFFFF"/>
-          </a:solidFill>
-          <a:ln>
-            <a:noFill/>
-          </a:ln>
-        </p:spPr>
-        <p:style>
-          <a:lnRef idx="1">
-            <a:schemeClr val="accent1"/>
-          </a:lnRef>
-          <a:fillRef idx="3">
-            <a:schemeClr val="accent1"/>
-          </a:fillRef>
-          <a:effectRef idx="2">
-            <a:schemeClr val="accent1"/>
-          </a:effectRef>
-          <a:fontRef idx="minor">
-            <a:schemeClr val="lt1"/>
-          </a:fontRef>
-        </p:style>
-        <p:txBody>
-          <a:bodyPr rtlCol="0" anchor="ctr" wrap="square" lIns="137160" rIns="137160" tIns="73152" bIns="73152"/>
-          <a:lstStyle/>
-          <a:p>
-            <a:pPr algn="ctr"/>
-            <a:r>
-              <a:rPr sz="1100" b="1">
-                <a:solidFill>
-                  <a:srgbClr val="2563EB"/>
-                </a:solidFill>
-                <a:latin typeface="Noto Sans JP"/>
-              </a:rPr>
-              <a:t>戦略AI</a:t>
-            </a:r>
-          </a:p>
-        </p:txBody>
-      </p:sp>
-      <p:sp>
-        <p:nvSpPr>
-          <p:cNvPr id="9" name="Rectangle 8"/>
-          <p:cNvSpPr/>
-          <p:nvPr/>
-        </p:nvSpPr>
-        <p:spPr>
-          <a:xfrm>
-            <a:off x="457200" y="2816352"/>
-            <a:ext cx="3657600" cy="777240"/>
-          </a:xfrm>
-          <a:prstGeom prst="rect">
-            <a:avLst/>
-          </a:prstGeom>
-          <a:solidFill>
-            <a:srgbClr val="DBEAFE"/>
-          </a:solidFill>
-          <a:ln>
-            <a:noFill/>
-          </a:ln>
-        </p:spPr>
-        <p:style>
-          <a:lnRef idx="1">
-            <a:schemeClr val="accent1"/>
-          </a:lnRef>
-          <a:fillRef idx="3">
-            <a:schemeClr val="accent1"/>
-          </a:fillRef>
-          <a:effectRef idx="2">
-            <a:schemeClr val="accent1"/>
-          </a:effectRef>
-          <a:fontRef idx="minor">
-            <a:schemeClr val="lt1"/>
-          </a:fontRef>
-        </p:style>
-        <p:txBody>
-          <a:bodyPr rtlCol="0" anchor="ctr" wrap="square" lIns="137160" rIns="137160" tIns="73152" bIns="73152"/>
-          <a:lstStyle/>
-          <a:p>
-            <a:pPr algn="l"/>
-            <a:r>
-              <a:rPr sz="1300" b="0">
-                <a:solidFill>
-                  <a:srgbClr val="1C3557"/>
-                </a:solidFill>
-                <a:latin typeface="Noto Sans JP"/>
-              </a:rPr>
-              <a:t>ローンチPM・LP・LINE配信</a:t>
-            </a:r>
-          </a:p>
-        </p:txBody>
-      </p:sp>
-      <p:sp>
-        <p:nvSpPr>
-          <p:cNvPr id="10" name="Rectangle 9"/>
-          <p:cNvSpPr/>
-          <p:nvPr/>
-        </p:nvSpPr>
-        <p:spPr>
-          <a:xfrm>
-            <a:off x="4160520" y="2816352"/>
-            <a:ext cx="1783080" cy="777240"/>
-          </a:xfrm>
-          <a:prstGeom prst="rect">
-            <a:avLst/>
-          </a:prstGeom>
-          <a:solidFill>
-            <a:srgbClr val="FFFFFF"/>
-          </a:solidFill>
-          <a:ln>
-            <a:noFill/>
-          </a:ln>
-        </p:spPr>
-        <p:style>
-          <a:lnRef idx="1">
-            <a:schemeClr val="accent1"/>
-          </a:lnRef>
-          <a:fillRef idx="3">
-            <a:schemeClr val="accent1"/>
-          </a:fillRef>
-          <a:effectRef idx="2">
-            <a:schemeClr val="accent1"/>
-          </a:effectRef>
-          <a:fontRef idx="minor">
-            <a:schemeClr val="lt1"/>
-          </a:fontRef>
-        </p:style>
-        <p:txBody>
-          <a:bodyPr rtlCol="0" anchor="ctr" wrap="square" lIns="137160" rIns="137160" tIns="73152" bIns="73152"/>
-          <a:lstStyle/>
-          <a:p>
-            <a:pPr algn="ctr"/>
-            <a:r>
-              <a:rPr sz="1100" b="1">
-                <a:solidFill>
-                  <a:srgbClr val="2563EB"/>
-                </a:solidFill>
-                <a:latin typeface="Noto Sans JP"/>
-              </a:rPr>
-              <a:t>マーケAI + 戦略AI</a:t>
-            </a:r>
-          </a:p>
-        </p:txBody>
-      </p:sp>
-      <p:sp>
-        <p:nvSpPr>
-          <p:cNvPr id="11" name="Rectangle 10"/>
-          <p:cNvSpPr/>
-          <p:nvPr/>
-        </p:nvSpPr>
-        <p:spPr>
-          <a:xfrm>
-            <a:off x="457200" y="3666744"/>
-            <a:ext cx="3657600" cy="777240"/>
-          </a:xfrm>
-          <a:prstGeom prst="rect">
-            <a:avLst/>
-          </a:prstGeom>
-          <a:solidFill>
-            <a:srgbClr val="DBEAFE"/>
-          </a:solidFill>
-          <a:ln>
-            <a:noFill/>
-          </a:ln>
-        </p:spPr>
-        <p:style>
-          <a:lnRef idx="1">
-            <a:schemeClr val="accent1"/>
-          </a:lnRef>
-          <a:fillRef idx="3">
-            <a:schemeClr val="accent1"/>
-          </a:fillRef>
-          <a:effectRef idx="2">
-            <a:schemeClr val="accent1"/>
-          </a:effectRef>
-          <a:fontRef idx="minor">
-            <a:schemeClr val="lt1"/>
-          </a:fontRef>
-        </p:style>
-        <p:txBody>
-          <a:bodyPr rtlCol="0" anchor="ctr" wrap="square" lIns="137160" rIns="137160" tIns="73152" bIns="73152"/>
-          <a:lstStyle/>
-          <a:p>
-            <a:pPr algn="l"/>
-            <a:r>
-              <a:rPr sz="1300" b="0">
-                <a:solidFill>
-                  <a:srgbClr val="1C3557"/>
-                </a:solidFill>
-                <a:latin typeface="Noto Sans JP"/>
-              </a:rPr>
-              <a:t>競合・料金・データ分析</a:t>
-            </a:r>
-          </a:p>
-        </p:txBody>
-      </p:sp>
-      <p:sp>
-        <p:nvSpPr>
-          <p:cNvPr id="12" name="Rectangle 11"/>
-          <p:cNvSpPr/>
-          <p:nvPr/>
-        </p:nvSpPr>
-        <p:spPr>
-          <a:xfrm>
-            <a:off x="4160520" y="3666744"/>
-            <a:ext cx="1783080" cy="777240"/>
-          </a:xfrm>
-          <a:prstGeom prst="rect">
-            <a:avLst/>
-          </a:prstGeom>
-          <a:solidFill>
-            <a:srgbClr val="FFFFFF"/>
-          </a:solidFill>
-          <a:ln>
-            <a:noFill/>
-          </a:ln>
-        </p:spPr>
-        <p:style>
-          <a:lnRef idx="1">
-            <a:schemeClr val="accent1"/>
-          </a:lnRef>
-          <a:fillRef idx="3">
-            <a:schemeClr val="accent1"/>
-          </a:fillRef>
-          <a:effectRef idx="2">
-            <a:schemeClr val="accent1"/>
-          </a:effectRef>
-          <a:fontRef idx="minor">
-            <a:schemeClr val="lt1"/>
-          </a:fontRef>
-        </p:style>
-        <p:txBody>
-          <a:bodyPr rtlCol="0" anchor="ctr" wrap="square" lIns="137160" rIns="137160" tIns="73152" bIns="73152"/>
-          <a:lstStyle/>
-          <a:p>
-            <a:pPr algn="ctr"/>
-            <a:r>
-              <a:rPr sz="1100" b="1">
-                <a:solidFill>
-                  <a:srgbClr val="2563EB"/>
-                </a:solidFill>
-                <a:latin typeface="Noto Sans JP"/>
-              </a:rPr>
-              <a:t>戦略AI</a:t>
-            </a:r>
-          </a:p>
-        </p:txBody>
-      </p:sp>
-      <p:sp>
-        <p:nvSpPr>
-          <p:cNvPr id="13" name="Rectangle 12"/>
-          <p:cNvSpPr/>
-          <p:nvPr/>
-        </p:nvSpPr>
-        <p:spPr>
-          <a:xfrm>
-            <a:off x="6245352" y="1371600"/>
-            <a:ext cx="5486400" cy="502920"/>
-          </a:xfrm>
-          <a:prstGeom prst="rect">
-            <a:avLst/>
-          </a:prstGeom>
-          <a:solidFill>
-            <a:srgbClr val="1C3557"/>
-          </a:solidFill>
-          <a:ln>
-            <a:noFill/>
-          </a:ln>
-        </p:spPr>
-        <p:style>
-          <a:lnRef idx="1">
-            <a:schemeClr val="accent1"/>
-          </a:lnRef>
-          <a:fillRef idx="3">
-            <a:schemeClr val="accent1"/>
-          </a:fillRef>
-          <a:effectRef idx="2">
-            <a:schemeClr val="accent1"/>
-          </a:effectRef>
-          <a:fontRef idx="minor">
-            <a:schemeClr val="lt1"/>
-          </a:fontRef>
-        </p:style>
-        <p:txBody>
-          <a:bodyPr rtlCol="0" anchor="ctr" wrap="square" lIns="137160" rIns="137160" tIns="73152" bIns="73152"/>
-          <a:lstStyle/>
-          <a:p>
-            <a:pPr algn="ctr"/>
-            <a:r>
-              <a:rPr sz="1600" b="1">
-                <a:solidFill>
-                  <a:srgbClr val="FFFFFF"/>
-                </a:solidFill>
-                <a:latin typeface="Noto Sans JP"/>
-              </a:rPr>
-              <a:t>Kawaru Team / Coach / BPO</a:t>
-            </a:r>
-          </a:p>
-        </p:txBody>
-      </p:sp>
-      <p:sp>
-        <p:nvSpPr>
-          <p:cNvPr id="14" name="Rectangle 13"/>
-          <p:cNvSpPr/>
-          <p:nvPr/>
-        </p:nvSpPr>
-        <p:spPr>
-          <a:xfrm>
-            <a:off x="6245352" y="1965960"/>
-            <a:ext cx="3657600" cy="777240"/>
-          </a:xfrm>
-          <a:prstGeom prst="rect">
-            <a:avLst/>
-          </a:prstGeom>
-          <a:solidFill>
-            <a:srgbClr val="F3F4F6"/>
-          </a:solidFill>
-          <a:ln>
-            <a:noFill/>
-          </a:ln>
-        </p:spPr>
-        <p:style>
-          <a:lnRef idx="1">
-            <a:schemeClr val="accent1"/>
-          </a:lnRef>
-          <a:fillRef idx="3">
-            <a:schemeClr val="accent1"/>
-          </a:fillRef>
-          <a:effectRef idx="2">
-            <a:schemeClr val="accent1"/>
-          </a:effectRef>
-          <a:fontRef idx="minor">
-            <a:schemeClr val="lt1"/>
-          </a:fontRef>
-        </p:style>
-        <p:txBody>
-          <a:bodyPr rtlCol="0" anchor="ctr" wrap="square" lIns="137160" rIns="137160" tIns="73152" bIns="73152"/>
-          <a:lstStyle/>
-          <a:p>
-            <a:pPr algn="l"/>
-            <a:r>
-              <a:rPr sz="1300" b="0">
-                <a:solidFill>
-                  <a:srgbClr val="1C3557"/>
-                </a:solidFill>
-                <a:latin typeface="Noto Sans JP"/>
-              </a:rPr>
-              <a:t>展示会設計・クリエイティブ</a:t>
-            </a:r>
-          </a:p>
-        </p:txBody>
-      </p:sp>
-      <p:sp>
-        <p:nvSpPr>
-          <p:cNvPr id="15" name="Rectangle 14"/>
-          <p:cNvSpPr/>
-          <p:nvPr/>
-        </p:nvSpPr>
-        <p:spPr>
-          <a:xfrm>
-            <a:off x="9948672" y="1965960"/>
-            <a:ext cx="1783080" cy="777240"/>
-          </a:xfrm>
-          <a:prstGeom prst="rect">
-            <a:avLst/>
-          </a:prstGeom>
-          <a:solidFill>
-            <a:srgbClr val="FFFFFF"/>
-          </a:solidFill>
-          <a:ln>
-            <a:noFill/>
-          </a:ln>
-        </p:spPr>
-        <p:style>
-          <a:lnRef idx="1">
-            <a:schemeClr val="accent1"/>
-          </a:lnRef>
-          <a:fillRef idx="3">
-            <a:schemeClr val="accent1"/>
-          </a:fillRef>
-          <a:effectRef idx="2">
-            <a:schemeClr val="accent1"/>
-          </a:effectRef>
-          <a:fontRef idx="minor">
-            <a:schemeClr val="lt1"/>
-          </a:fontRef>
-        </p:style>
-        <p:txBody>
-          <a:bodyPr rtlCol="0" anchor="ctr" wrap="square" lIns="137160" rIns="137160" tIns="73152" bIns="73152"/>
-          <a:lstStyle/>
-          <a:p>
-            <a:pPr algn="ctr"/>
-            <a:r>
-              <a:rPr sz="1100" b="1">
-                <a:solidFill>
-                  <a:srgbClr val="1C3557"/>
-                </a:solidFill>
-                <a:latin typeface="Noto Sans JP"/>
-              </a:rPr>
-              <a:t>マーケAI</a:t>
-            </a:r>
-          </a:p>
-        </p:txBody>
-      </p:sp>
-      <p:sp>
-        <p:nvSpPr>
-          <p:cNvPr id="16" name="Rectangle 15"/>
-          <p:cNvSpPr/>
-          <p:nvPr/>
-        </p:nvSpPr>
-        <p:spPr>
-          <a:xfrm>
-            <a:off x="6245352" y="2816352"/>
-            <a:ext cx="3657600" cy="777240"/>
-          </a:xfrm>
-          <a:prstGeom prst="rect">
-            <a:avLst/>
-          </a:prstGeom>
-          <a:solidFill>
-            <a:srgbClr val="F3F4F6"/>
-          </a:solidFill>
-          <a:ln>
-            <a:noFill/>
-          </a:ln>
-        </p:spPr>
-        <p:style>
-          <a:lnRef idx="1">
-            <a:schemeClr val="accent1"/>
-          </a:lnRef>
-          <a:fillRef idx="3">
-            <a:schemeClr val="accent1"/>
-          </a:fillRef>
-          <a:effectRef idx="2">
-            <a:schemeClr val="accent1"/>
-          </a:effectRef>
-          <a:fontRef idx="minor">
-            <a:schemeClr val="lt1"/>
-          </a:fontRef>
-        </p:style>
-        <p:txBody>
-          <a:bodyPr rtlCol="0" anchor="ctr" wrap="square" lIns="137160" rIns="137160" tIns="73152" bIns="73152"/>
-          <a:lstStyle/>
-          <a:p>
-            <a:pPr algn="l"/>
-            <a:r>
-              <a:rPr sz="1300" b="0">
-                <a:solidFill>
-                  <a:srgbClr val="1C3557"/>
-                </a:solidFill>
-                <a:latin typeface="Noto Sans JP"/>
-              </a:rPr>
-              <a:t>提案書骨子作成</a:t>
-            </a:r>
-          </a:p>
-        </p:txBody>
-      </p:sp>
-      <p:sp>
-        <p:nvSpPr>
-          <p:cNvPr id="17" name="Rectangle 16"/>
-          <p:cNvSpPr/>
-          <p:nvPr/>
-        </p:nvSpPr>
-        <p:spPr>
-          <a:xfrm>
-            <a:off x="9948672" y="2816352"/>
-            <a:ext cx="1783080" cy="777240"/>
-          </a:xfrm>
-          <a:prstGeom prst="rect">
-            <a:avLst/>
-          </a:prstGeom>
-          <a:solidFill>
-            <a:srgbClr val="FFFFFF"/>
-          </a:solidFill>
-          <a:ln>
-            <a:noFill/>
-          </a:ln>
-        </p:spPr>
-        <p:style>
-          <a:lnRef idx="1">
-            <a:schemeClr val="accent1"/>
-          </a:lnRef>
-          <a:fillRef idx="3">
-            <a:schemeClr val="accent1"/>
-          </a:fillRef>
-          <a:effectRef idx="2">
-            <a:schemeClr val="accent1"/>
-          </a:effectRef>
-          <a:fontRef idx="minor">
-            <a:schemeClr val="lt1"/>
-          </a:fontRef>
-        </p:style>
-        <p:txBody>
-          <a:bodyPr rtlCol="0" anchor="ctr" wrap="square" lIns="137160" rIns="137160" tIns="73152" bIns="73152"/>
-          <a:lstStyle/>
-          <a:p>
-            <a:pPr algn="ctr"/>
-            <a:r>
-              <a:rPr sz="1100" b="1">
-                <a:solidFill>
-                  <a:srgbClr val="1C3557"/>
-                </a:solidFill>
-                <a:latin typeface="Noto Sans JP"/>
-              </a:rPr>
-              <a:t>営業AI</a:t>
-            </a:r>
-          </a:p>
-        </p:txBody>
-      </p:sp>
-      <p:sp>
-        <p:nvSpPr>
-          <p:cNvPr id="18" name="Rectangle 17"/>
-          <p:cNvSpPr/>
-          <p:nvPr/>
-        </p:nvSpPr>
-        <p:spPr>
-          <a:xfrm>
-            <a:off x="6245352" y="3666744"/>
-            <a:ext cx="3657600" cy="777240"/>
-          </a:xfrm>
-          <a:prstGeom prst="rect">
-            <a:avLst/>
-          </a:prstGeom>
-          <a:solidFill>
-            <a:srgbClr val="F3F4F6"/>
-          </a:solidFill>
-          <a:ln>
-            <a:noFill/>
-          </a:ln>
-        </p:spPr>
-        <p:style>
-          <a:lnRef idx="1">
-            <a:schemeClr val="accent1"/>
-          </a:lnRef>
-          <a:fillRef idx="3">
-            <a:schemeClr val="accent1"/>
-          </a:fillRef>
-          <a:effectRef idx="2">
-            <a:schemeClr val="accent1"/>
-          </a:effectRef>
-          <a:fontRef idx="minor">
-            <a:schemeClr val="lt1"/>
-          </a:fontRef>
-        </p:style>
-        <p:txBody>
-          <a:bodyPr rtlCol="0" anchor="ctr" wrap="square" lIns="137160" rIns="137160" tIns="73152" bIns="73152"/>
-          <a:lstStyle/>
-          <a:p>
-            <a:pPr algn="l"/>
-            <a:r>
-              <a:rPr sz="1300" b="0">
-                <a:solidFill>
-                  <a:srgbClr val="1C3557"/>
-                </a:solidFill>
-                <a:latin typeface="Noto Sans JP"/>
-              </a:rPr>
-              <a:t>Dify / N8N / GAS構築</a:t>
-            </a:r>
-          </a:p>
-        </p:txBody>
-      </p:sp>
-      <p:sp>
-        <p:nvSpPr>
-          <p:cNvPr id="19" name="Rectangle 18"/>
-          <p:cNvSpPr/>
-          <p:nvPr/>
-        </p:nvSpPr>
-        <p:spPr>
-          <a:xfrm>
-            <a:off x="9948672" y="3666744"/>
-            <a:ext cx="1783080" cy="777240"/>
-          </a:xfrm>
-          <a:prstGeom prst="rect">
-            <a:avLst/>
-          </a:prstGeom>
-          <a:solidFill>
-            <a:srgbClr val="FFFFFF"/>
-          </a:solidFill>
-          <a:ln>
-            <a:noFill/>
-          </a:ln>
-        </p:spPr>
-        <p:style>
-          <a:lnRef idx="1">
-            <a:schemeClr val="accent1"/>
-          </a:lnRef>
-          <a:fillRef idx="3">
-            <a:schemeClr val="accent1"/>
-          </a:fillRef>
-          <a:effectRef idx="2">
-            <a:schemeClr val="accent1"/>
-          </a:effectRef>
-          <a:fontRef idx="minor">
-            <a:schemeClr val="lt1"/>
-          </a:fontRef>
-        </p:style>
-        <p:txBody>
-          <a:bodyPr rtlCol="0" anchor="ctr" wrap="square" lIns="137160" rIns="137160" tIns="73152" bIns="73152"/>
-          <a:lstStyle/>
-          <a:p>
-            <a:pPr algn="ctr"/>
-            <a:r>
-              <a:rPr sz="1100" b="1">
-                <a:solidFill>
-                  <a:srgbClr val="1C3557"/>
-                </a:solidFill>
-                <a:latin typeface="Noto Sans JP"/>
-              </a:rPr>
-              <a:t>デリバリーAI</a:t>
-            </a:r>
-          </a:p>
-        </p:txBody>
-      </p:sp>
-      <p:sp>
-        <p:nvSpPr>
-          <p:cNvPr id="20" name="Rounded Rectangle 19"/>
-          <p:cNvSpPr/>
-          <p:nvPr/>
-        </p:nvSpPr>
-        <p:spPr>
-          <a:xfrm>
-            <a:off x="457200" y="5029200"/>
-            <a:ext cx="11274552" cy="914400"/>
+          <p:cNvPr id="6" name="Rounded Rectangle 5"/>
+          <p:cNvSpPr/>
+          <p:nvPr/>
+        </p:nvSpPr>
+        <p:spPr>
+          <a:xfrm>
+            <a:off x="457200" y="1828800"/>
+            <a:ext cx="2194560" cy="1463040"/>
           </a:xfrm>
           <a:prstGeom prst="roundRect">
             <a:avLst>
@@ -9095,6 +10444,546 @@
             </a:avLst>
           </a:prstGeom>
           <a:solidFill>
+            <a:srgbClr val="2563EB"/>
+          </a:solidFill>
+          <a:ln>
+            <a:noFill/>
+          </a:ln>
+        </p:spPr>
+        <p:style>
+          <a:lnRef idx="1">
+            <a:schemeClr val="accent1"/>
+          </a:lnRef>
+          <a:fillRef idx="3">
+            <a:schemeClr val="accent1"/>
+          </a:fillRef>
+          <a:effectRef idx="2">
+            <a:schemeClr val="accent1"/>
+          </a:effectRef>
+          <a:fontRef idx="minor">
+            <a:schemeClr val="lt1"/>
+          </a:fontRef>
+        </p:style>
+        <p:txBody>
+          <a:bodyPr rtlCol="0" anchor="ctr" wrap="square" lIns="137160" rIns="137160" tIns="73152" bIns="73152"/>
+          <a:lstStyle/>
+          <a:p>
+            <a:pPr algn="ctr"/>
+            <a:r>
+              <a:rPr sz="2200" b="1">
+                <a:solidFill>
+                  <a:srgbClr val="FFFFFF"/>
+                </a:solidFill>
+                <a:latin typeface="Noto Sans JP"/>
+              </a:rPr>
+              <a:t>マーケ</a:t>
+            </a:r>
+          </a:p>
+        </p:txBody>
+      </p:sp>
+      <p:sp>
+        <p:nvSpPr>
+          <p:cNvPr id="7" name="Rounded Rectangle 6"/>
+          <p:cNvSpPr/>
+          <p:nvPr/>
+        </p:nvSpPr>
+        <p:spPr>
+          <a:xfrm>
+            <a:off x="457200" y="3337560"/>
+            <a:ext cx="2194560" cy="731520"/>
+          </a:xfrm>
+          <a:prstGeom prst="roundRect">
+            <a:avLst>
+              <a:gd name="adj" fmla="val 5000"/>
+            </a:avLst>
+          </a:prstGeom>
+          <a:solidFill>
+            <a:srgbClr val="F3F4F6"/>
+          </a:solidFill>
+          <a:ln>
+            <a:noFill/>
+          </a:ln>
+        </p:spPr>
+        <p:style>
+          <a:lnRef idx="1">
+            <a:schemeClr val="accent1"/>
+          </a:lnRef>
+          <a:fillRef idx="3">
+            <a:schemeClr val="accent1"/>
+          </a:fillRef>
+          <a:effectRef idx="2">
+            <a:schemeClr val="accent1"/>
+          </a:effectRef>
+          <a:fontRef idx="minor">
+            <a:schemeClr val="lt1"/>
+          </a:fontRef>
+        </p:style>
+        <p:txBody>
+          <a:bodyPr rtlCol="0" anchor="ctr" wrap="square" lIns="137160" rIns="137160" tIns="73152" bIns="73152"/>
+          <a:lstStyle/>
+          <a:p>
+            <a:pPr algn="ctr"/>
+            <a:r>
+              <a:rPr sz="1400" b="0">
+                <a:solidFill>
+                  <a:srgbClr val="1C3557"/>
+                </a:solidFill>
+                <a:latin typeface="Noto Sans JP"/>
+              </a:rPr>
+              <a:t>認知獲得</a:t>
+            </a:r>
+          </a:p>
+        </p:txBody>
+      </p:sp>
+      <p:sp>
+        <p:nvSpPr>
+          <p:cNvPr id="8" name="Rounded Rectangle 7"/>
+          <p:cNvSpPr/>
+          <p:nvPr/>
+        </p:nvSpPr>
+        <p:spPr>
+          <a:xfrm>
+            <a:off x="2715768" y="1828800"/>
+            <a:ext cx="2194560" cy="1463040"/>
+          </a:xfrm>
+          <a:prstGeom prst="roundRect">
+            <a:avLst>
+              <a:gd name="adj" fmla="val 5000"/>
+            </a:avLst>
+          </a:prstGeom>
+          <a:solidFill>
+            <a:srgbClr val="2563EB"/>
+          </a:solidFill>
+          <a:ln>
+            <a:noFill/>
+          </a:ln>
+        </p:spPr>
+        <p:style>
+          <a:lnRef idx="1">
+            <a:schemeClr val="accent1"/>
+          </a:lnRef>
+          <a:fillRef idx="3">
+            <a:schemeClr val="accent1"/>
+          </a:fillRef>
+          <a:effectRef idx="2">
+            <a:schemeClr val="accent1"/>
+          </a:effectRef>
+          <a:fontRef idx="minor">
+            <a:schemeClr val="lt1"/>
+          </a:fontRef>
+        </p:style>
+        <p:txBody>
+          <a:bodyPr rtlCol="0" anchor="ctr" wrap="square" lIns="137160" rIns="137160" tIns="73152" bIns="73152"/>
+          <a:lstStyle/>
+          <a:p>
+            <a:pPr algn="ctr"/>
+            <a:r>
+              <a:rPr sz="2200" b="1">
+                <a:solidFill>
+                  <a:srgbClr val="FFFFFF"/>
+                </a:solidFill>
+                <a:latin typeface="Noto Sans JP"/>
+              </a:rPr>
+              <a:t>営業</a:t>
+            </a:r>
+          </a:p>
+        </p:txBody>
+      </p:sp>
+      <p:sp>
+        <p:nvSpPr>
+          <p:cNvPr id="9" name="Rounded Rectangle 8"/>
+          <p:cNvSpPr/>
+          <p:nvPr/>
+        </p:nvSpPr>
+        <p:spPr>
+          <a:xfrm>
+            <a:off x="2715768" y="3337560"/>
+            <a:ext cx="2194560" cy="731520"/>
+          </a:xfrm>
+          <a:prstGeom prst="roundRect">
+            <a:avLst>
+              <a:gd name="adj" fmla="val 5000"/>
+            </a:avLst>
+          </a:prstGeom>
+          <a:solidFill>
+            <a:srgbClr val="F3F4F6"/>
+          </a:solidFill>
+          <a:ln>
+            <a:noFill/>
+          </a:ln>
+        </p:spPr>
+        <p:style>
+          <a:lnRef idx="1">
+            <a:schemeClr val="accent1"/>
+          </a:lnRef>
+          <a:fillRef idx="3">
+            <a:schemeClr val="accent1"/>
+          </a:fillRef>
+          <a:effectRef idx="2">
+            <a:schemeClr val="accent1"/>
+          </a:effectRef>
+          <a:fontRef idx="minor">
+            <a:schemeClr val="lt1"/>
+          </a:fontRef>
+        </p:style>
+        <p:txBody>
+          <a:bodyPr rtlCol="0" anchor="ctr" wrap="square" lIns="137160" rIns="137160" tIns="73152" bIns="73152"/>
+          <a:lstStyle/>
+          <a:p>
+            <a:pPr algn="ctr"/>
+            <a:r>
+              <a:rPr sz="1400" b="0">
+                <a:solidFill>
+                  <a:srgbClr val="1C3557"/>
+                </a:solidFill>
+                <a:latin typeface="Noto Sans JP"/>
+              </a:rPr>
+              <a:t>商談・受注</a:t>
+            </a:r>
+          </a:p>
+        </p:txBody>
+      </p:sp>
+      <p:sp>
+        <p:nvSpPr>
+          <p:cNvPr id="10" name="Rounded Rectangle 9"/>
+          <p:cNvSpPr/>
+          <p:nvPr/>
+        </p:nvSpPr>
+        <p:spPr>
+          <a:xfrm>
+            <a:off x="4974336" y="1828800"/>
+            <a:ext cx="2194560" cy="1463040"/>
+          </a:xfrm>
+          <a:prstGeom prst="roundRect">
+            <a:avLst>
+              <a:gd name="adj" fmla="val 5000"/>
+            </a:avLst>
+          </a:prstGeom>
+          <a:solidFill>
+            <a:srgbClr val="2563EB"/>
+          </a:solidFill>
+          <a:ln>
+            <a:noFill/>
+          </a:ln>
+        </p:spPr>
+        <p:style>
+          <a:lnRef idx="1">
+            <a:schemeClr val="accent1"/>
+          </a:lnRef>
+          <a:fillRef idx="3">
+            <a:schemeClr val="accent1"/>
+          </a:fillRef>
+          <a:effectRef idx="2">
+            <a:schemeClr val="accent1"/>
+          </a:effectRef>
+          <a:fontRef idx="minor">
+            <a:schemeClr val="lt1"/>
+          </a:fontRef>
+        </p:style>
+        <p:txBody>
+          <a:bodyPr rtlCol="0" anchor="ctr" wrap="square" lIns="137160" rIns="137160" tIns="73152" bIns="73152"/>
+          <a:lstStyle/>
+          <a:p>
+            <a:pPr algn="ctr"/>
+            <a:r>
+              <a:rPr sz="2200" b="1">
+                <a:solidFill>
+                  <a:srgbClr val="FFFFFF"/>
+                </a:solidFill>
+                <a:latin typeface="Noto Sans JP"/>
+              </a:rPr>
+              <a:t>デリバリー</a:t>
+            </a:r>
+          </a:p>
+        </p:txBody>
+      </p:sp>
+      <p:sp>
+        <p:nvSpPr>
+          <p:cNvPr id="11" name="Rounded Rectangle 10"/>
+          <p:cNvSpPr/>
+          <p:nvPr/>
+        </p:nvSpPr>
+        <p:spPr>
+          <a:xfrm>
+            <a:off x="4974336" y="3337560"/>
+            <a:ext cx="2194560" cy="731520"/>
+          </a:xfrm>
+          <a:prstGeom prst="roundRect">
+            <a:avLst>
+              <a:gd name="adj" fmla="val 5000"/>
+            </a:avLst>
+          </a:prstGeom>
+          <a:solidFill>
+            <a:srgbClr val="F3F4F6"/>
+          </a:solidFill>
+          <a:ln>
+            <a:noFill/>
+          </a:ln>
+        </p:spPr>
+        <p:style>
+          <a:lnRef idx="1">
+            <a:schemeClr val="accent1"/>
+          </a:lnRef>
+          <a:fillRef idx="3">
+            <a:schemeClr val="accent1"/>
+          </a:fillRef>
+          <a:effectRef idx="2">
+            <a:schemeClr val="accent1"/>
+          </a:effectRef>
+          <a:fontRef idx="minor">
+            <a:schemeClr val="lt1"/>
+          </a:fontRef>
+        </p:style>
+        <p:txBody>
+          <a:bodyPr rtlCol="0" anchor="ctr" wrap="square" lIns="137160" rIns="137160" tIns="73152" bIns="73152"/>
+          <a:lstStyle/>
+          <a:p>
+            <a:pPr algn="ctr"/>
+            <a:r>
+              <a:rPr sz="1400" b="0">
+                <a:solidFill>
+                  <a:srgbClr val="1C3557"/>
+                </a:solidFill>
+                <a:latin typeface="Noto Sans JP"/>
+              </a:rPr>
+              <a:t>納品</a:t>
+            </a:r>
+          </a:p>
+        </p:txBody>
+      </p:sp>
+      <p:sp>
+        <p:nvSpPr>
+          <p:cNvPr id="12" name="Rounded Rectangle 11"/>
+          <p:cNvSpPr/>
+          <p:nvPr/>
+        </p:nvSpPr>
+        <p:spPr>
+          <a:xfrm>
+            <a:off x="7232903" y="1828800"/>
+            <a:ext cx="2194560" cy="1463040"/>
+          </a:xfrm>
+          <a:prstGeom prst="roundRect">
+            <a:avLst>
+              <a:gd name="adj" fmla="val 5000"/>
+            </a:avLst>
+          </a:prstGeom>
+          <a:solidFill>
+            <a:srgbClr val="2563EB"/>
+          </a:solidFill>
+          <a:ln>
+            <a:noFill/>
+          </a:ln>
+        </p:spPr>
+        <p:style>
+          <a:lnRef idx="1">
+            <a:schemeClr val="accent1"/>
+          </a:lnRef>
+          <a:fillRef idx="3">
+            <a:schemeClr val="accent1"/>
+          </a:fillRef>
+          <a:effectRef idx="2">
+            <a:schemeClr val="accent1"/>
+          </a:effectRef>
+          <a:fontRef idx="minor">
+            <a:schemeClr val="lt1"/>
+          </a:fontRef>
+        </p:style>
+        <p:txBody>
+          <a:bodyPr rtlCol="0" anchor="ctr" wrap="square" lIns="137160" rIns="137160" tIns="73152" bIns="73152"/>
+          <a:lstStyle/>
+          <a:p>
+            <a:pPr algn="ctr"/>
+            <a:r>
+              <a:rPr sz="2200" b="1">
+                <a:solidFill>
+                  <a:srgbClr val="FFFFFF"/>
+                </a:solidFill>
+                <a:latin typeface="Noto Sans JP"/>
+              </a:rPr>
+              <a:t>事務・法務</a:t>
+            </a:r>
+          </a:p>
+        </p:txBody>
+      </p:sp>
+      <p:sp>
+        <p:nvSpPr>
+          <p:cNvPr id="13" name="Rounded Rectangle 12"/>
+          <p:cNvSpPr/>
+          <p:nvPr/>
+        </p:nvSpPr>
+        <p:spPr>
+          <a:xfrm>
+            <a:off x="7232903" y="3337560"/>
+            <a:ext cx="2194560" cy="731520"/>
+          </a:xfrm>
+          <a:prstGeom prst="roundRect">
+            <a:avLst>
+              <a:gd name="adj" fmla="val 5000"/>
+            </a:avLst>
+          </a:prstGeom>
+          <a:solidFill>
+            <a:srgbClr val="F3F4F6"/>
+          </a:solidFill>
+          <a:ln>
+            <a:noFill/>
+          </a:ln>
+        </p:spPr>
+        <p:style>
+          <a:lnRef idx="1">
+            <a:schemeClr val="accent1"/>
+          </a:lnRef>
+          <a:fillRef idx="3">
+            <a:schemeClr val="accent1"/>
+          </a:fillRef>
+          <a:effectRef idx="2">
+            <a:schemeClr val="accent1"/>
+          </a:effectRef>
+          <a:fontRef idx="minor">
+            <a:schemeClr val="lt1"/>
+          </a:fontRef>
+        </p:style>
+        <p:txBody>
+          <a:bodyPr rtlCol="0" anchor="ctr" wrap="square" lIns="137160" rIns="137160" tIns="73152" bIns="73152"/>
+          <a:lstStyle/>
+          <a:p>
+            <a:pPr algn="ctr"/>
+            <a:r>
+              <a:rPr sz="1400" b="0">
+                <a:solidFill>
+                  <a:srgbClr val="1C3557"/>
+                </a:solidFill>
+                <a:latin typeface="Noto Sans JP"/>
+              </a:rPr>
+              <a:t>管理・記録</a:t>
+            </a:r>
+          </a:p>
+        </p:txBody>
+      </p:sp>
+      <p:sp>
+        <p:nvSpPr>
+          <p:cNvPr id="14" name="Rounded Rectangle 13"/>
+          <p:cNvSpPr/>
+          <p:nvPr/>
+        </p:nvSpPr>
+        <p:spPr>
+          <a:xfrm>
+            <a:off x="9491472" y="1828800"/>
+            <a:ext cx="2194560" cy="1463040"/>
+          </a:xfrm>
+          <a:prstGeom prst="roundRect">
+            <a:avLst>
+              <a:gd name="adj" fmla="val 5000"/>
+            </a:avLst>
+          </a:prstGeom>
+          <a:solidFill>
+            <a:srgbClr val="2563EB"/>
+          </a:solidFill>
+          <a:ln>
+            <a:noFill/>
+          </a:ln>
+        </p:spPr>
+        <p:style>
+          <a:lnRef idx="1">
+            <a:schemeClr val="accent1"/>
+          </a:lnRef>
+          <a:fillRef idx="3">
+            <a:schemeClr val="accent1"/>
+          </a:fillRef>
+          <a:effectRef idx="2">
+            <a:schemeClr val="accent1"/>
+          </a:effectRef>
+          <a:fontRef idx="minor">
+            <a:schemeClr val="lt1"/>
+          </a:fontRef>
+        </p:style>
+        <p:txBody>
+          <a:bodyPr rtlCol="0" anchor="ctr" wrap="square" lIns="137160" rIns="137160" tIns="73152" bIns="73152"/>
+          <a:lstStyle/>
+          <a:p>
+            <a:pPr algn="ctr"/>
+            <a:r>
+              <a:rPr sz="2200" b="1">
+                <a:solidFill>
+                  <a:srgbClr val="FFFFFF"/>
+                </a:solidFill>
+                <a:latin typeface="Noto Sans JP"/>
+              </a:rPr>
+              <a:t>戦略</a:t>
+            </a:r>
+          </a:p>
+        </p:txBody>
+      </p:sp>
+      <p:sp>
+        <p:nvSpPr>
+          <p:cNvPr id="15" name="Rounded Rectangle 14"/>
+          <p:cNvSpPr/>
+          <p:nvPr/>
+        </p:nvSpPr>
+        <p:spPr>
+          <a:xfrm>
+            <a:off x="9491472" y="3337560"/>
+            <a:ext cx="2194560" cy="731520"/>
+          </a:xfrm>
+          <a:prstGeom prst="roundRect">
+            <a:avLst>
+              <a:gd name="adj" fmla="val 5000"/>
+            </a:avLst>
+          </a:prstGeom>
+          <a:solidFill>
+            <a:srgbClr val="F3F4F6"/>
+          </a:solidFill>
+          <a:ln>
+            <a:noFill/>
+          </a:ln>
+        </p:spPr>
+        <p:style>
+          <a:lnRef idx="1">
+            <a:schemeClr val="accent1"/>
+          </a:lnRef>
+          <a:fillRef idx="3">
+            <a:schemeClr val="accent1"/>
+          </a:fillRef>
+          <a:effectRef idx="2">
+            <a:schemeClr val="accent1"/>
+          </a:effectRef>
+          <a:fontRef idx="minor">
+            <a:schemeClr val="lt1"/>
+          </a:fontRef>
+        </p:style>
+        <p:txBody>
+          <a:bodyPr rtlCol="0" anchor="ctr" wrap="square" lIns="137160" rIns="137160" tIns="73152" bIns="73152"/>
+          <a:lstStyle/>
+          <a:p>
+            <a:pPr algn="ctr"/>
+            <a:r>
+              <a:rPr sz="1400" b="0">
+                <a:solidFill>
+                  <a:srgbClr val="1C3557"/>
+                </a:solidFill>
+                <a:latin typeface="Noto Sans JP"/>
+              </a:rPr>
+              <a:t>リサーチ・分析</a:t>
+            </a:r>
+          </a:p>
+        </p:txBody>
+      </p:sp>
+      <p:sp>
+        <p:nvSpPr>
+          <p:cNvPr id="16" name="Rounded Rectangle 15"/>
+          <p:cNvSpPr/>
+          <p:nvPr/>
+        </p:nvSpPr>
+        <p:spPr>
+          <a:xfrm>
+            <a:off x="457200" y="4572000"/>
+            <a:ext cx="11274552" cy="1463040"/>
+          </a:xfrm>
+          <a:prstGeom prst="roundRect">
+            <a:avLst>
+              <a:gd name="adj" fmla="val 5000"/>
+            </a:avLst>
+          </a:prstGeom>
+          <a:solidFill>
             <a:srgbClr val="DBEAFE"/>
           </a:solidFill>
           <a:ln>
@@ -9121,13 +11010,13 @@
           <a:p>
             <a:pPr algn="ctr"/>
             <a:r>
-              <a:rPr sz="2200" b="1">
+              <a:rPr sz="2600" b="1">
                 <a:solidFill>
                   <a:srgbClr val="2563EB"/>
                 </a:solidFill>
                 <a:latin typeface="Noto Sans JP"/>
               </a:rPr>
-              <a:t>いろんな領域で AI社員を使っている</a:t>
+              <a:t>事業の全部の仕事を 5人で網羅している</a:t>
             </a:r>
           </a:p>
         </p:txBody>
@@ -9232,13 +11121,13 @@
           <a:p>
             <a:pPr algn="r"/>
             <a:r>
-              <a:rPr sz="1000" b="0">
+              <a:rPr sz="1100" b="0">
                 <a:solidFill>
                   <a:srgbClr val="6B7280"/>
                 </a:solidFill>
                 <a:latin typeface="Noto Sans JP"/>
               </a:rPr>
-              <a:t>8 / 11</a:t>
+              <a:t>8 / 13</a:t>
             </a:r>
           </a:p>
         </p:txBody>
@@ -9282,13 +11171,13 @@
           <a:p>
             <a:pPr algn="l"/>
             <a:r>
-              <a:rPr sz="2200" b="1">
+              <a:rPr sz="2400" b="1">
                 <a:solidFill>
                   <a:srgbClr val="1C3557"/>
                 </a:solidFill>
                 <a:latin typeface="Noto Sans JP"/>
               </a:rPr>
-              <a:t>半期 ¥6,710,000、4案件すべてにAI社員が動いている</a:t>
+              <a:t>今こう使ってます</a:t>
             </a:r>
           </a:p>
         </p:txBody>
@@ -9302,7 +11191,7 @@
         <p:spPr>
           <a:xfrm>
             <a:off x="457200" y="1051560"/>
-            <a:ext cx="1371600" cy="54864"/>
+            <a:ext cx="1645920" cy="64008"/>
           </a:xfrm>
           <a:prstGeom prst="rect">
             <a:avLst/>
@@ -9338,638 +11227,14 @@
       </p:sp>
       <p:sp>
         <p:nvSpPr>
-          <p:cNvPr id="6" name="Rectangle 5"/>
-          <p:cNvSpPr/>
-          <p:nvPr/>
-        </p:nvSpPr>
-        <p:spPr>
-          <a:xfrm>
-            <a:off x="457200" y="1554480"/>
-            <a:ext cx="4572000" cy="640080"/>
-          </a:xfrm>
-          <a:prstGeom prst="rect">
-            <a:avLst/>
-          </a:prstGeom>
-          <a:solidFill>
-            <a:srgbClr val="1C3557"/>
-          </a:solidFill>
-          <a:ln>
-            <a:noFill/>
-          </a:ln>
-        </p:spPr>
-        <p:style>
-          <a:lnRef idx="1">
-            <a:schemeClr val="accent1"/>
-          </a:lnRef>
-          <a:fillRef idx="3">
-            <a:schemeClr val="accent1"/>
-          </a:fillRef>
-          <a:effectRef idx="2">
-            <a:schemeClr val="accent1"/>
-          </a:effectRef>
-          <a:fontRef idx="minor">
-            <a:schemeClr val="lt1"/>
-          </a:fontRef>
-        </p:style>
-        <p:txBody>
-          <a:bodyPr rtlCol="0" anchor="ctr" wrap="square" lIns="137160" rIns="137160" tIns="73152" bIns="73152"/>
-          <a:lstStyle/>
-          <a:p>
-            <a:pPr algn="ctr"/>
-            <a:r>
-              <a:rPr sz="1400" b="1">
-                <a:solidFill>
-                  <a:srgbClr val="FFFFFF"/>
-                </a:solidFill>
-                <a:latin typeface="Noto Sans JP"/>
-              </a:rPr>
-              <a:t>案件</a:t>
-            </a:r>
-          </a:p>
-        </p:txBody>
-      </p:sp>
-      <p:sp>
-        <p:nvSpPr>
-          <p:cNvPr id="7" name="Rectangle 6"/>
-          <p:cNvSpPr/>
-          <p:nvPr/>
-        </p:nvSpPr>
-        <p:spPr>
-          <a:xfrm>
-            <a:off x="5074920" y="1554480"/>
-            <a:ext cx="2743200" cy="640080"/>
-          </a:xfrm>
-          <a:prstGeom prst="rect">
-            <a:avLst/>
-          </a:prstGeom>
-          <a:solidFill>
-            <a:srgbClr val="1C3557"/>
-          </a:solidFill>
-          <a:ln>
-            <a:noFill/>
-          </a:ln>
-        </p:spPr>
-        <p:style>
-          <a:lnRef idx="1">
-            <a:schemeClr val="accent1"/>
-          </a:lnRef>
-          <a:fillRef idx="3">
-            <a:schemeClr val="accent1"/>
-          </a:fillRef>
-          <a:effectRef idx="2">
-            <a:schemeClr val="accent1"/>
-          </a:effectRef>
-          <a:fontRef idx="minor">
-            <a:schemeClr val="lt1"/>
-          </a:fontRef>
-        </p:style>
-        <p:txBody>
-          <a:bodyPr rtlCol="0" anchor="ctr" wrap="square" lIns="137160" rIns="137160" tIns="73152" bIns="73152"/>
-          <a:lstStyle/>
-          <a:p>
-            <a:pPr algn="ctr"/>
-            <a:r>
-              <a:rPr sz="1400" b="1">
-                <a:solidFill>
-                  <a:srgbClr val="FFFFFF"/>
-                </a:solidFill>
-                <a:latin typeface="Noto Sans JP"/>
-              </a:rPr>
-              <a:t>売上 (税抜)</a:t>
-            </a:r>
-          </a:p>
-        </p:txBody>
-      </p:sp>
-      <p:sp>
-        <p:nvSpPr>
-          <p:cNvPr id="8" name="Rectangle 7"/>
-          <p:cNvSpPr/>
-          <p:nvPr/>
-        </p:nvSpPr>
-        <p:spPr>
-          <a:xfrm>
-            <a:off x="457200" y="2240280"/>
-            <a:ext cx="4572000" cy="640080"/>
-          </a:xfrm>
-          <a:prstGeom prst="rect">
-            <a:avLst/>
-          </a:prstGeom>
-          <a:solidFill>
-            <a:srgbClr val="F3F4F6"/>
-          </a:solidFill>
-          <a:ln>
-            <a:noFill/>
-          </a:ln>
-        </p:spPr>
-        <p:style>
-          <a:lnRef idx="1">
-            <a:schemeClr val="accent1"/>
-          </a:lnRef>
-          <a:fillRef idx="3">
-            <a:schemeClr val="accent1"/>
-          </a:fillRef>
-          <a:effectRef idx="2">
-            <a:schemeClr val="accent1"/>
-          </a:effectRef>
-          <a:fontRef idx="minor">
-            <a:schemeClr val="lt1"/>
-          </a:fontRef>
-        </p:style>
-        <p:txBody>
-          <a:bodyPr rtlCol="0" anchor="ctr" wrap="square" lIns="137160" rIns="137160" tIns="73152" bIns="73152"/>
-          <a:lstStyle/>
-          <a:p>
-            <a:pPr algn="l"/>
-            <a:r>
-              <a:rPr sz="1400" b="0">
-                <a:solidFill>
-                  <a:srgbClr val="1C3557"/>
-                </a:solidFill>
-                <a:latin typeface="Noto Sans JP"/>
-              </a:rPr>
-              <a:t>NTTネクシア</a:t>
-            </a:r>
-          </a:p>
-        </p:txBody>
-      </p:sp>
-      <p:sp>
-        <p:nvSpPr>
-          <p:cNvPr id="9" name="Rectangle 8"/>
-          <p:cNvSpPr/>
-          <p:nvPr/>
-        </p:nvSpPr>
-        <p:spPr>
-          <a:xfrm>
-            <a:off x="5074920" y="2240280"/>
-            <a:ext cx="2743200" cy="640080"/>
-          </a:xfrm>
-          <a:prstGeom prst="rect">
-            <a:avLst/>
-          </a:prstGeom>
-          <a:solidFill>
-            <a:srgbClr val="F3F4F6"/>
-          </a:solidFill>
-          <a:ln>
-            <a:noFill/>
-          </a:ln>
-        </p:spPr>
-        <p:style>
-          <a:lnRef idx="1">
-            <a:schemeClr val="accent1"/>
-          </a:lnRef>
-          <a:fillRef idx="3">
-            <a:schemeClr val="accent1"/>
-          </a:fillRef>
-          <a:effectRef idx="2">
-            <a:schemeClr val="accent1"/>
-          </a:effectRef>
-          <a:fontRef idx="minor">
-            <a:schemeClr val="lt1"/>
-          </a:fontRef>
-        </p:style>
-        <p:txBody>
-          <a:bodyPr rtlCol="0" anchor="ctr" wrap="square" lIns="137160" rIns="137160" tIns="73152" bIns="73152"/>
-          <a:lstStyle/>
-          <a:p>
-            <a:pPr algn="r"/>
-            <a:r>
-              <a:rPr sz="1400" b="0">
-                <a:solidFill>
-                  <a:srgbClr val="1C3557"/>
-                </a:solidFill>
-                <a:latin typeface="Noto Sans JP"/>
-              </a:rPr>
-              <a:t>¥5,000,000</a:t>
-            </a:r>
-          </a:p>
-        </p:txBody>
-      </p:sp>
-      <p:sp>
-        <p:nvSpPr>
-          <p:cNvPr id="10" name="Rectangle 9"/>
-          <p:cNvSpPr/>
-          <p:nvPr/>
-        </p:nvSpPr>
-        <p:spPr>
-          <a:xfrm>
-            <a:off x="457200" y="2926080"/>
-            <a:ext cx="4572000" cy="640080"/>
-          </a:xfrm>
-          <a:prstGeom prst="rect">
-            <a:avLst/>
-          </a:prstGeom>
-          <a:solidFill>
-            <a:srgbClr val="F3F4F6"/>
-          </a:solidFill>
-          <a:ln>
-            <a:noFill/>
-          </a:ln>
-        </p:spPr>
-        <p:style>
-          <a:lnRef idx="1">
-            <a:schemeClr val="accent1"/>
-          </a:lnRef>
-          <a:fillRef idx="3">
-            <a:schemeClr val="accent1"/>
-          </a:fillRef>
-          <a:effectRef idx="2">
-            <a:schemeClr val="accent1"/>
-          </a:effectRef>
-          <a:fontRef idx="minor">
-            <a:schemeClr val="lt1"/>
-          </a:fontRef>
-        </p:style>
-        <p:txBody>
-          <a:bodyPr rtlCol="0" anchor="ctr" wrap="square" lIns="137160" rIns="137160" tIns="73152" bIns="73152"/>
-          <a:lstStyle/>
-          <a:p>
-            <a:pPr algn="l"/>
-            <a:r>
-              <a:rPr sz="1400" b="0">
-                <a:solidFill>
-                  <a:srgbClr val="1C3557"/>
-                </a:solidFill>
-                <a:latin typeface="Noto Sans JP"/>
-              </a:rPr>
-              <a:t>中西製作所</a:t>
-            </a:r>
-          </a:p>
-        </p:txBody>
-      </p:sp>
-      <p:sp>
-        <p:nvSpPr>
-          <p:cNvPr id="11" name="Rectangle 10"/>
-          <p:cNvSpPr/>
-          <p:nvPr/>
-        </p:nvSpPr>
-        <p:spPr>
-          <a:xfrm>
-            <a:off x="5074920" y="2926080"/>
-            <a:ext cx="2743200" cy="640080"/>
-          </a:xfrm>
-          <a:prstGeom prst="rect">
-            <a:avLst/>
-          </a:prstGeom>
-          <a:solidFill>
-            <a:srgbClr val="F3F4F6"/>
-          </a:solidFill>
-          <a:ln>
-            <a:noFill/>
-          </a:ln>
-        </p:spPr>
-        <p:style>
-          <a:lnRef idx="1">
-            <a:schemeClr val="accent1"/>
-          </a:lnRef>
-          <a:fillRef idx="3">
-            <a:schemeClr val="accent1"/>
-          </a:fillRef>
-          <a:effectRef idx="2">
-            <a:schemeClr val="accent1"/>
-          </a:effectRef>
-          <a:fontRef idx="minor">
-            <a:schemeClr val="lt1"/>
-          </a:fontRef>
-        </p:style>
-        <p:txBody>
-          <a:bodyPr rtlCol="0" anchor="ctr" wrap="square" lIns="137160" rIns="137160" tIns="73152" bIns="73152"/>
-          <a:lstStyle/>
-          <a:p>
-            <a:pPr algn="r"/>
-            <a:r>
-              <a:rPr sz="1400" b="0">
-                <a:solidFill>
-                  <a:srgbClr val="1C3557"/>
-                </a:solidFill>
-                <a:latin typeface="Noto Sans JP"/>
-              </a:rPr>
-              <a:t>¥1,000,000</a:t>
-            </a:r>
-          </a:p>
-        </p:txBody>
-      </p:sp>
-      <p:sp>
-        <p:nvSpPr>
-          <p:cNvPr id="12" name="Rectangle 11"/>
-          <p:cNvSpPr/>
-          <p:nvPr/>
-        </p:nvSpPr>
-        <p:spPr>
-          <a:xfrm>
-            <a:off x="457200" y="3611880"/>
-            <a:ext cx="4572000" cy="640080"/>
-          </a:xfrm>
-          <a:prstGeom prst="rect">
-            <a:avLst/>
-          </a:prstGeom>
-          <a:solidFill>
-            <a:srgbClr val="F3F4F6"/>
-          </a:solidFill>
-          <a:ln>
-            <a:noFill/>
-          </a:ln>
-        </p:spPr>
-        <p:style>
-          <a:lnRef idx="1">
-            <a:schemeClr val="accent1"/>
-          </a:lnRef>
-          <a:fillRef idx="3">
-            <a:schemeClr val="accent1"/>
-          </a:fillRef>
-          <a:effectRef idx="2">
-            <a:schemeClr val="accent1"/>
-          </a:effectRef>
-          <a:fontRef idx="minor">
-            <a:schemeClr val="lt1"/>
-          </a:fontRef>
-        </p:style>
-        <p:txBody>
-          <a:bodyPr rtlCol="0" anchor="ctr" wrap="square" lIns="137160" rIns="137160" tIns="73152" bIns="73152"/>
-          <a:lstStyle/>
-          <a:p>
-            <a:pPr algn="l"/>
-            <a:r>
-              <a:rPr sz="1400" b="0">
-                <a:solidFill>
-                  <a:srgbClr val="1C3557"/>
-                </a:solidFill>
-                <a:latin typeface="Noto Sans JP"/>
-              </a:rPr>
-              <a:t>中部キリンビバレッジ</a:t>
-            </a:r>
-          </a:p>
-        </p:txBody>
-      </p:sp>
-      <p:sp>
-        <p:nvSpPr>
-          <p:cNvPr id="13" name="Rectangle 12"/>
-          <p:cNvSpPr/>
-          <p:nvPr/>
-        </p:nvSpPr>
-        <p:spPr>
-          <a:xfrm>
-            <a:off x="5074920" y="3611880"/>
-            <a:ext cx="2743200" cy="640080"/>
-          </a:xfrm>
-          <a:prstGeom prst="rect">
-            <a:avLst/>
-          </a:prstGeom>
-          <a:solidFill>
-            <a:srgbClr val="F3F4F6"/>
-          </a:solidFill>
-          <a:ln>
-            <a:noFill/>
-          </a:ln>
-        </p:spPr>
-        <p:style>
-          <a:lnRef idx="1">
-            <a:schemeClr val="accent1"/>
-          </a:lnRef>
-          <a:fillRef idx="3">
-            <a:schemeClr val="accent1"/>
-          </a:fillRef>
-          <a:effectRef idx="2">
-            <a:schemeClr val="accent1"/>
-          </a:effectRef>
-          <a:fontRef idx="minor">
-            <a:schemeClr val="lt1"/>
-          </a:fontRef>
-        </p:style>
-        <p:txBody>
-          <a:bodyPr rtlCol="0" anchor="ctr" wrap="square" lIns="137160" rIns="137160" tIns="73152" bIns="73152"/>
-          <a:lstStyle/>
-          <a:p>
-            <a:pPr algn="r"/>
-            <a:r>
-              <a:rPr sz="1400" b="0">
-                <a:solidFill>
-                  <a:srgbClr val="1C3557"/>
-                </a:solidFill>
-                <a:latin typeface="Noto Sans JP"/>
-              </a:rPr>
-              <a:t>¥450,000</a:t>
-            </a:r>
-          </a:p>
-        </p:txBody>
-      </p:sp>
-      <p:sp>
-        <p:nvSpPr>
-          <p:cNvPr id="14" name="Rectangle 13"/>
-          <p:cNvSpPr/>
-          <p:nvPr/>
-        </p:nvSpPr>
-        <p:spPr>
-          <a:xfrm>
-            <a:off x="457200" y="4297680"/>
-            <a:ext cx="4572000" cy="640080"/>
-          </a:xfrm>
-          <a:prstGeom prst="rect">
-            <a:avLst/>
-          </a:prstGeom>
-          <a:solidFill>
-            <a:srgbClr val="F3F4F6"/>
-          </a:solidFill>
-          <a:ln>
-            <a:noFill/>
-          </a:ln>
-        </p:spPr>
-        <p:style>
-          <a:lnRef idx="1">
-            <a:schemeClr val="accent1"/>
-          </a:lnRef>
-          <a:fillRef idx="3">
-            <a:schemeClr val="accent1"/>
-          </a:fillRef>
-          <a:effectRef idx="2">
-            <a:schemeClr val="accent1"/>
-          </a:effectRef>
-          <a:fontRef idx="minor">
-            <a:schemeClr val="lt1"/>
-          </a:fontRef>
-        </p:style>
-        <p:txBody>
-          <a:bodyPr rtlCol="0" anchor="ctr" wrap="square" lIns="137160" rIns="137160" tIns="73152" bIns="73152"/>
-          <a:lstStyle/>
-          <a:p>
-            <a:pPr algn="l"/>
-            <a:r>
-              <a:rPr sz="1400" b="0">
-                <a:solidFill>
-                  <a:srgbClr val="1C3557"/>
-                </a:solidFill>
-                <a:latin typeface="Noto Sans JP"/>
-              </a:rPr>
-              <a:t>ブロードリンク</a:t>
-            </a:r>
-          </a:p>
-        </p:txBody>
-      </p:sp>
-      <p:sp>
-        <p:nvSpPr>
-          <p:cNvPr id="15" name="Rectangle 14"/>
-          <p:cNvSpPr/>
-          <p:nvPr/>
-        </p:nvSpPr>
-        <p:spPr>
-          <a:xfrm>
-            <a:off x="5074920" y="4297680"/>
-            <a:ext cx="2743200" cy="640080"/>
-          </a:xfrm>
-          <a:prstGeom prst="rect">
-            <a:avLst/>
-          </a:prstGeom>
-          <a:solidFill>
-            <a:srgbClr val="F3F4F6"/>
-          </a:solidFill>
-          <a:ln>
-            <a:noFill/>
-          </a:ln>
-        </p:spPr>
-        <p:style>
-          <a:lnRef idx="1">
-            <a:schemeClr val="accent1"/>
-          </a:lnRef>
-          <a:fillRef idx="3">
-            <a:schemeClr val="accent1"/>
-          </a:fillRef>
-          <a:effectRef idx="2">
-            <a:schemeClr val="accent1"/>
-          </a:effectRef>
-          <a:fontRef idx="minor">
-            <a:schemeClr val="lt1"/>
-          </a:fontRef>
-        </p:style>
-        <p:txBody>
-          <a:bodyPr rtlCol="0" anchor="ctr" wrap="square" lIns="137160" rIns="137160" tIns="73152" bIns="73152"/>
-          <a:lstStyle/>
-          <a:p>
-            <a:pPr algn="r"/>
-            <a:r>
-              <a:rPr sz="1400" b="0">
-                <a:solidFill>
-                  <a:srgbClr val="1C3557"/>
-                </a:solidFill>
-                <a:latin typeface="Noto Sans JP"/>
-              </a:rPr>
-              <a:t>¥260,000</a:t>
-            </a:r>
-          </a:p>
-        </p:txBody>
-      </p:sp>
-      <p:sp>
-        <p:nvSpPr>
-          <p:cNvPr id="16" name="Rectangle 15"/>
-          <p:cNvSpPr/>
-          <p:nvPr/>
-        </p:nvSpPr>
-        <p:spPr>
-          <a:xfrm>
-            <a:off x="457200" y="4983480"/>
-            <a:ext cx="4572000" cy="640080"/>
-          </a:xfrm>
-          <a:prstGeom prst="rect">
-            <a:avLst/>
-          </a:prstGeom>
-          <a:solidFill>
-            <a:srgbClr val="2563EB"/>
-          </a:solidFill>
-          <a:ln>
-            <a:noFill/>
-          </a:ln>
-        </p:spPr>
-        <p:style>
-          <a:lnRef idx="1">
-            <a:schemeClr val="accent1"/>
-          </a:lnRef>
-          <a:fillRef idx="3">
-            <a:schemeClr val="accent1"/>
-          </a:fillRef>
-          <a:effectRef idx="2">
-            <a:schemeClr val="accent1"/>
-          </a:effectRef>
-          <a:fontRef idx="minor">
-            <a:schemeClr val="lt1"/>
-          </a:fontRef>
-        </p:style>
-        <p:txBody>
-          <a:bodyPr rtlCol="0" anchor="ctr" wrap="square" lIns="137160" rIns="137160" tIns="73152" bIns="73152"/>
-          <a:lstStyle/>
-          <a:p>
-            <a:pPr algn="l"/>
-            <a:r>
-              <a:rPr sz="1600" b="1">
-                <a:solidFill>
-                  <a:srgbClr val="FFFFFF"/>
-                </a:solidFill>
-                <a:latin typeface="Noto Sans JP"/>
-              </a:rPr>
-              <a:t>半期合計</a:t>
-            </a:r>
-          </a:p>
-        </p:txBody>
-      </p:sp>
-      <p:sp>
-        <p:nvSpPr>
-          <p:cNvPr id="17" name="Rectangle 16"/>
-          <p:cNvSpPr/>
-          <p:nvPr/>
-        </p:nvSpPr>
-        <p:spPr>
-          <a:xfrm>
-            <a:off x="5074920" y="4983480"/>
-            <a:ext cx="2743200" cy="640080"/>
-          </a:xfrm>
-          <a:prstGeom prst="rect">
-            <a:avLst/>
-          </a:prstGeom>
-          <a:solidFill>
-            <a:srgbClr val="2563EB"/>
-          </a:solidFill>
-          <a:ln>
-            <a:noFill/>
-          </a:ln>
-        </p:spPr>
-        <p:style>
-          <a:lnRef idx="1">
-            <a:schemeClr val="accent1"/>
-          </a:lnRef>
-          <a:fillRef idx="3">
-            <a:schemeClr val="accent1"/>
-          </a:fillRef>
-          <a:effectRef idx="2">
-            <a:schemeClr val="accent1"/>
-          </a:effectRef>
-          <a:fontRef idx="minor">
-            <a:schemeClr val="lt1"/>
-          </a:fontRef>
-        </p:style>
-        <p:txBody>
-          <a:bodyPr rtlCol="0" anchor="ctr" wrap="square" lIns="137160" rIns="137160" tIns="73152" bIns="73152"/>
-          <a:lstStyle/>
-          <a:p>
-            <a:pPr algn="r"/>
-            <a:r>
-              <a:rPr sz="1600" b="1">
-                <a:solidFill>
-                  <a:srgbClr val="FFFFFF"/>
-                </a:solidFill>
-                <a:latin typeface="Noto Sans JP"/>
-              </a:rPr>
-              <a:t>¥6,710,000</a:t>
-            </a:r>
-          </a:p>
-        </p:txBody>
-      </p:sp>
-      <p:sp>
-        <p:nvSpPr>
-          <p:cNvPr id="18" name="Rounded Rectangle 17"/>
-          <p:cNvSpPr/>
-          <p:nvPr/>
-        </p:nvSpPr>
-        <p:spPr>
-          <a:xfrm>
-            <a:off x="8229600" y="1554480"/>
-            <a:ext cx="3502152" cy="4160520"/>
+          <p:cNvPr id="6" name="Rounded Rectangle 5"/>
+          <p:cNvSpPr/>
+          <p:nvPr/>
+        </p:nvSpPr>
+        <p:spPr>
+          <a:xfrm>
+            <a:off x="457200" y="1371600"/>
+            <a:ext cx="2194560" cy="640080"/>
           </a:xfrm>
           <a:prstGeom prst="roundRect">
             <a:avLst>
@@ -10003,97 +11268,673 @@
           <a:p>
             <a:pPr algn="ctr"/>
             <a:r>
-              <a:rPr sz="2000" b="1">
+              <a:rPr sz="1400" b="1">
                 <a:solidFill>
                   <a:srgbClr val="FFFFFF"/>
                 </a:solidFill>
                 <a:latin typeface="Noto Sans JP"/>
               </a:rPr>
-              <a:t>月換算</a:t>
-            </a:r>
-          </a:p>
-          <a:p>
-            <a:pPr algn="ctr"/>
-            <a:r>
-              <a:rPr sz="2000" b="1">
+              <a:t>マーケAI</a:t>
+            </a:r>
+          </a:p>
+        </p:txBody>
+      </p:sp>
+      <p:sp>
+        <p:nvSpPr>
+          <p:cNvPr id="7" name="Rounded Rectangle 6"/>
+          <p:cNvSpPr/>
+          <p:nvPr/>
+        </p:nvSpPr>
+        <p:spPr>
+          <a:xfrm>
+            <a:off x="457200" y="2103120"/>
+            <a:ext cx="2194560" cy="2743200"/>
+          </a:xfrm>
+          <a:prstGeom prst="roundRect">
+            <a:avLst>
+              <a:gd name="adj" fmla="val 5000"/>
+            </a:avLst>
+          </a:prstGeom>
+          <a:solidFill>
+            <a:srgbClr val="DBEAFE"/>
+          </a:solidFill>
+          <a:ln>
+            <a:noFill/>
+          </a:ln>
+        </p:spPr>
+        <p:style>
+          <a:lnRef idx="1">
+            <a:schemeClr val="accent1"/>
+          </a:lnRef>
+          <a:fillRef idx="3">
+            <a:schemeClr val="accent1"/>
+          </a:fillRef>
+          <a:effectRef idx="2">
+            <a:schemeClr val="accent1"/>
+          </a:effectRef>
+          <a:fontRef idx="minor">
+            <a:schemeClr val="lt1"/>
+          </a:fontRef>
+        </p:style>
+        <p:txBody>
+          <a:bodyPr rtlCol="0" anchor="ctr" wrap="square" lIns="137160" rIns="137160" tIns="73152" bIns="73152"/>
+          <a:lstStyle/>
+          <a:p>
+            <a:pPr algn="ctr"/>
+            <a:r>
+              <a:rPr sz="1300" b="0">
+                <a:solidFill>
+                  <a:srgbClr val="1C3557"/>
+                </a:solidFill>
+                <a:latin typeface="Noto Sans JP"/>
+              </a:rPr>
+              <a:t>LP・展示会クリエイティブ</a:t>
+            </a:r>
+          </a:p>
+          <a:p>
+            <a:pPr algn="ctr"/>
+            <a:r>
+              <a:rPr sz="1300" b="0">
+                <a:solidFill>
+                  <a:srgbClr val="1C3557"/>
+                </a:solidFill>
+                <a:latin typeface="Noto Sans JP"/>
+              </a:rPr>
+              <a:t>LINE配信シナリオ</a:t>
+            </a:r>
+          </a:p>
+          <a:p>
+            <a:pPr algn="ctr"/>
+            <a:r>
+              <a:rPr sz="1300" b="0">
+                <a:solidFill>
+                  <a:srgbClr val="1C3557"/>
+                </a:solidFill>
+                <a:latin typeface="Noto Sans JP"/>
+              </a:rPr>
+              <a:t>SNS投稿生成</a:t>
+            </a:r>
+          </a:p>
+        </p:txBody>
+      </p:sp>
+      <p:sp>
+        <p:nvSpPr>
+          <p:cNvPr id="8" name="Rounded Rectangle 7"/>
+          <p:cNvSpPr/>
+          <p:nvPr/>
+        </p:nvSpPr>
+        <p:spPr>
+          <a:xfrm>
+            <a:off x="2743200" y="1371600"/>
+            <a:ext cx="2194560" cy="640080"/>
+          </a:xfrm>
+          <a:prstGeom prst="roundRect">
+            <a:avLst>
+              <a:gd name="adj" fmla="val 5000"/>
+            </a:avLst>
+          </a:prstGeom>
+          <a:solidFill>
+            <a:srgbClr val="2563EB"/>
+          </a:solidFill>
+          <a:ln>
+            <a:noFill/>
+          </a:ln>
+        </p:spPr>
+        <p:style>
+          <a:lnRef idx="1">
+            <a:schemeClr val="accent1"/>
+          </a:lnRef>
+          <a:fillRef idx="3">
+            <a:schemeClr val="accent1"/>
+          </a:fillRef>
+          <a:effectRef idx="2">
+            <a:schemeClr val="accent1"/>
+          </a:effectRef>
+          <a:fontRef idx="minor">
+            <a:schemeClr val="lt1"/>
+          </a:fontRef>
+        </p:style>
+        <p:txBody>
+          <a:bodyPr rtlCol="0" anchor="ctr" wrap="square" lIns="137160" rIns="137160" tIns="73152" bIns="73152"/>
+          <a:lstStyle/>
+          <a:p>
+            <a:pPr algn="ctr"/>
+            <a:r>
+              <a:rPr sz="1400" b="1">
                 <a:solidFill>
                   <a:srgbClr val="FFFFFF"/>
                 </a:solidFill>
                 <a:latin typeface="Noto Sans JP"/>
               </a:rPr>
-              <a:t>¥464,000</a:t>
-            </a:r>
-          </a:p>
-          <a:p>
-            <a:pPr algn="ctr"/>
-            <a:r>
-              <a:rPr sz="2000" b="1">
+              <a:t>営業AI</a:t>
+            </a:r>
+          </a:p>
+        </p:txBody>
+      </p:sp>
+      <p:sp>
+        <p:nvSpPr>
+          <p:cNvPr id="9" name="Rounded Rectangle 8"/>
+          <p:cNvSpPr/>
+          <p:nvPr/>
+        </p:nvSpPr>
+        <p:spPr>
+          <a:xfrm>
+            <a:off x="2743200" y="2103120"/>
+            <a:ext cx="2194560" cy="2743200"/>
+          </a:xfrm>
+          <a:prstGeom prst="roundRect">
+            <a:avLst>
+              <a:gd name="adj" fmla="val 5000"/>
+            </a:avLst>
+          </a:prstGeom>
+          <a:solidFill>
+            <a:srgbClr val="DBEAFE"/>
+          </a:solidFill>
+          <a:ln>
+            <a:noFill/>
+          </a:ln>
+        </p:spPr>
+        <p:style>
+          <a:lnRef idx="1">
+            <a:schemeClr val="accent1"/>
+          </a:lnRef>
+          <a:fillRef idx="3">
+            <a:schemeClr val="accent1"/>
+          </a:fillRef>
+          <a:effectRef idx="2">
+            <a:schemeClr val="accent1"/>
+          </a:effectRef>
+          <a:fontRef idx="minor">
+            <a:schemeClr val="lt1"/>
+          </a:fontRef>
+        </p:style>
+        <p:txBody>
+          <a:bodyPr rtlCol="0" anchor="ctr" wrap="square" lIns="137160" rIns="137160" tIns="73152" bIns="73152"/>
+          <a:lstStyle/>
+          <a:p>
+            <a:pPr algn="ctr"/>
+            <a:r>
+              <a:rPr sz="1300" b="0">
+                <a:solidFill>
+                  <a:srgbClr val="1C3557"/>
+                </a:solidFill>
+                <a:latin typeface="Noto Sans JP"/>
+              </a:rPr>
+              <a:t>商談前ブリーフィング</a:t>
+            </a:r>
+          </a:p>
+          <a:p>
+            <a:pPr algn="ctr"/>
+            <a:r>
+              <a:rPr sz="1300" b="0">
+                <a:solidFill>
+                  <a:srgbClr val="1C3557"/>
+                </a:solidFill>
+                <a:latin typeface="Noto Sans JP"/>
+              </a:rPr>
+              <a:t>提案書骨子</a:t>
+            </a:r>
+          </a:p>
+          <a:p>
+            <a:pPr algn="ctr"/>
+            <a:r>
+              <a:rPr sz="1300" b="0">
+                <a:solidFill>
+                  <a:srgbClr val="1C3557"/>
+                </a:solidFill>
+                <a:latin typeface="Noto Sans JP"/>
+              </a:rPr>
+              <a:t>フォローメール</a:t>
+            </a:r>
+          </a:p>
+        </p:txBody>
+      </p:sp>
+      <p:sp>
+        <p:nvSpPr>
+          <p:cNvPr id="10" name="Rounded Rectangle 9"/>
+          <p:cNvSpPr/>
+          <p:nvPr/>
+        </p:nvSpPr>
+        <p:spPr>
+          <a:xfrm>
+            <a:off x="5029200" y="1371600"/>
+            <a:ext cx="2194560" cy="640080"/>
+          </a:xfrm>
+          <a:prstGeom prst="roundRect">
+            <a:avLst>
+              <a:gd name="adj" fmla="val 5000"/>
+            </a:avLst>
+          </a:prstGeom>
+          <a:solidFill>
+            <a:srgbClr val="2563EB"/>
+          </a:solidFill>
+          <a:ln>
+            <a:noFill/>
+          </a:ln>
+        </p:spPr>
+        <p:style>
+          <a:lnRef idx="1">
+            <a:schemeClr val="accent1"/>
+          </a:lnRef>
+          <a:fillRef idx="3">
+            <a:schemeClr val="accent1"/>
+          </a:fillRef>
+          <a:effectRef idx="2">
+            <a:schemeClr val="accent1"/>
+          </a:effectRef>
+          <a:fontRef idx="minor">
+            <a:schemeClr val="lt1"/>
+          </a:fontRef>
+        </p:style>
+        <p:txBody>
+          <a:bodyPr rtlCol="0" anchor="ctr" wrap="square" lIns="137160" rIns="137160" tIns="73152" bIns="73152"/>
+          <a:lstStyle/>
+          <a:p>
+            <a:pPr algn="ctr"/>
+            <a:r>
+              <a:rPr sz="1400" b="1">
                 <a:solidFill>
                   <a:srgbClr val="FFFFFF"/>
                 </a:solidFill>
                 <a:latin typeface="Noto Sans JP"/>
               </a:rPr>
-              <a:t/>
-            </a:r>
-          </a:p>
-          <a:p>
-            <a:pPr algn="ctr"/>
-            <a:r>
-              <a:rPr sz="2000" b="1">
+              <a:t>デリバリーAI</a:t>
+            </a:r>
+          </a:p>
+        </p:txBody>
+      </p:sp>
+      <p:sp>
+        <p:nvSpPr>
+          <p:cNvPr id="11" name="Rounded Rectangle 10"/>
+          <p:cNvSpPr/>
+          <p:nvPr/>
+        </p:nvSpPr>
+        <p:spPr>
+          <a:xfrm>
+            <a:off x="5029200" y="2103120"/>
+            <a:ext cx="2194560" cy="2743200"/>
+          </a:xfrm>
+          <a:prstGeom prst="roundRect">
+            <a:avLst>
+              <a:gd name="adj" fmla="val 5000"/>
+            </a:avLst>
+          </a:prstGeom>
+          <a:solidFill>
+            <a:srgbClr val="DBEAFE"/>
+          </a:solidFill>
+          <a:ln>
+            <a:noFill/>
+          </a:ln>
+        </p:spPr>
+        <p:style>
+          <a:lnRef idx="1">
+            <a:schemeClr val="accent1"/>
+          </a:lnRef>
+          <a:fillRef idx="3">
+            <a:schemeClr val="accent1"/>
+          </a:fillRef>
+          <a:effectRef idx="2">
+            <a:schemeClr val="accent1"/>
+          </a:effectRef>
+          <a:fontRef idx="minor">
+            <a:schemeClr val="lt1"/>
+          </a:fontRef>
+        </p:style>
+        <p:txBody>
+          <a:bodyPr rtlCol="0" anchor="ctr" wrap="square" lIns="137160" rIns="137160" tIns="73152" bIns="73152"/>
+          <a:lstStyle/>
+          <a:p>
+            <a:pPr algn="ctr"/>
+            <a:r>
+              <a:rPr sz="1300" b="0">
+                <a:solidFill>
+                  <a:srgbClr val="1C3557"/>
+                </a:solidFill>
+                <a:latin typeface="Noto Sans JP"/>
+              </a:rPr>
+              <a:t>研修スライド作成</a:t>
+            </a:r>
+          </a:p>
+          <a:p>
+            <a:pPr algn="ctr"/>
+            <a:r>
+              <a:rPr sz="1300" b="0">
+                <a:solidFill>
+                  <a:srgbClr val="1C3557"/>
+                </a:solidFill>
+                <a:latin typeface="Noto Sans JP"/>
+              </a:rPr>
+              <a:t>Dify構築（5h）</a:t>
+            </a:r>
+          </a:p>
+          <a:p>
+            <a:pPr algn="ctr"/>
+            <a:r>
+              <a:rPr sz="1300" b="0">
+                <a:solidFill>
+                  <a:srgbClr val="1C3557"/>
+                </a:solidFill>
+                <a:latin typeface="Noto Sans JP"/>
+              </a:rPr>
+              <a:t>案件PM</a:t>
+            </a:r>
+          </a:p>
+        </p:txBody>
+      </p:sp>
+      <p:sp>
+        <p:nvSpPr>
+          <p:cNvPr id="12" name="Rounded Rectangle 11"/>
+          <p:cNvSpPr/>
+          <p:nvPr/>
+        </p:nvSpPr>
+        <p:spPr>
+          <a:xfrm>
+            <a:off x="7315200" y="1371600"/>
+            <a:ext cx="2194560" cy="640080"/>
+          </a:xfrm>
+          <a:prstGeom prst="roundRect">
+            <a:avLst>
+              <a:gd name="adj" fmla="val 5000"/>
+            </a:avLst>
+          </a:prstGeom>
+          <a:solidFill>
+            <a:srgbClr val="2563EB"/>
+          </a:solidFill>
+          <a:ln>
+            <a:noFill/>
+          </a:ln>
+        </p:spPr>
+        <p:style>
+          <a:lnRef idx="1">
+            <a:schemeClr val="accent1"/>
+          </a:lnRef>
+          <a:fillRef idx="3">
+            <a:schemeClr val="accent1"/>
+          </a:fillRef>
+          <a:effectRef idx="2">
+            <a:schemeClr val="accent1"/>
+          </a:effectRef>
+          <a:fontRef idx="minor">
+            <a:schemeClr val="lt1"/>
+          </a:fontRef>
+        </p:style>
+        <p:txBody>
+          <a:bodyPr rtlCol="0" anchor="ctr" wrap="square" lIns="137160" rIns="137160" tIns="73152" bIns="73152"/>
+          <a:lstStyle/>
+          <a:p>
+            <a:pPr algn="ctr"/>
+            <a:r>
+              <a:rPr sz="1400" b="1">
                 <a:solidFill>
                   <a:srgbClr val="FFFFFF"/>
                 </a:solidFill>
                 <a:latin typeface="Noto Sans JP"/>
               </a:rPr>
-              <a:t>=</a:t>
-            </a:r>
-          </a:p>
-          <a:p>
-            <a:pPr algn="ctr"/>
-            <a:r>
-              <a:rPr sz="2000" b="1">
+              <a:t>事務・法務AI</a:t>
+            </a:r>
+          </a:p>
+        </p:txBody>
+      </p:sp>
+      <p:sp>
+        <p:nvSpPr>
+          <p:cNvPr id="13" name="Rounded Rectangle 12"/>
+          <p:cNvSpPr/>
+          <p:nvPr/>
+        </p:nvSpPr>
+        <p:spPr>
+          <a:xfrm>
+            <a:off x="7315200" y="2103120"/>
+            <a:ext cx="2194560" cy="2743200"/>
+          </a:xfrm>
+          <a:prstGeom prst="roundRect">
+            <a:avLst>
+              <a:gd name="adj" fmla="val 5000"/>
+            </a:avLst>
+          </a:prstGeom>
+          <a:solidFill>
+            <a:srgbClr val="DBEAFE"/>
+          </a:solidFill>
+          <a:ln>
+            <a:noFill/>
+          </a:ln>
+        </p:spPr>
+        <p:style>
+          <a:lnRef idx="1">
+            <a:schemeClr val="accent1"/>
+          </a:lnRef>
+          <a:fillRef idx="3">
+            <a:schemeClr val="accent1"/>
+          </a:fillRef>
+          <a:effectRef idx="2">
+            <a:schemeClr val="accent1"/>
+          </a:effectRef>
+          <a:fontRef idx="minor">
+            <a:schemeClr val="lt1"/>
+          </a:fontRef>
+        </p:style>
+        <p:txBody>
+          <a:bodyPr rtlCol="0" anchor="ctr" wrap="square" lIns="137160" rIns="137160" tIns="73152" bIns="73152"/>
+          <a:lstStyle/>
+          <a:p>
+            <a:pPr algn="ctr"/>
+            <a:r>
+              <a:rPr sz="1300" b="0">
+                <a:solidFill>
+                  <a:srgbClr val="1C3557"/>
+                </a:solidFill>
+                <a:latin typeface="Noto Sans JP"/>
+              </a:rPr>
+              <a:t>契約書チェック</a:t>
+            </a:r>
+          </a:p>
+          <a:p>
+            <a:pPr algn="ctr"/>
+            <a:r>
+              <a:rPr sz="1300" b="0">
+                <a:solidFill>
+                  <a:srgbClr val="1C3557"/>
+                </a:solidFill>
+                <a:latin typeface="Noto Sans JP"/>
+              </a:rPr>
+              <a:t>PL自動更新</a:t>
+            </a:r>
+          </a:p>
+          <a:p>
+            <a:pPr algn="ctr"/>
+            <a:r>
+              <a:rPr sz="1300" b="0">
+                <a:solidFill>
+                  <a:srgbClr val="1C3557"/>
+                </a:solidFill>
+                <a:latin typeface="Noto Sans JP"/>
+              </a:rPr>
+              <a:t>受信トレイ整理</a:t>
+            </a:r>
+          </a:p>
+        </p:txBody>
+      </p:sp>
+      <p:sp>
+        <p:nvSpPr>
+          <p:cNvPr id="14" name="Rounded Rectangle 13"/>
+          <p:cNvSpPr/>
+          <p:nvPr/>
+        </p:nvSpPr>
+        <p:spPr>
+          <a:xfrm>
+            <a:off x="9601200" y="1371600"/>
+            <a:ext cx="2194560" cy="640080"/>
+          </a:xfrm>
+          <a:prstGeom prst="roundRect">
+            <a:avLst>
+              <a:gd name="adj" fmla="val 5000"/>
+            </a:avLst>
+          </a:prstGeom>
+          <a:solidFill>
+            <a:srgbClr val="2563EB"/>
+          </a:solidFill>
+          <a:ln>
+            <a:noFill/>
+          </a:ln>
+        </p:spPr>
+        <p:style>
+          <a:lnRef idx="1">
+            <a:schemeClr val="accent1"/>
+          </a:lnRef>
+          <a:fillRef idx="3">
+            <a:schemeClr val="accent1"/>
+          </a:fillRef>
+          <a:effectRef idx="2">
+            <a:schemeClr val="accent1"/>
+          </a:effectRef>
+          <a:fontRef idx="minor">
+            <a:schemeClr val="lt1"/>
+          </a:fontRef>
+        </p:style>
+        <p:txBody>
+          <a:bodyPr rtlCol="0" anchor="ctr" wrap="square" lIns="137160" rIns="137160" tIns="73152" bIns="73152"/>
+          <a:lstStyle/>
+          <a:p>
+            <a:pPr algn="ctr"/>
+            <a:r>
+              <a:rPr sz="1400" b="1">
                 <a:solidFill>
                   <a:srgbClr val="FFFFFF"/>
                 </a:solidFill>
                 <a:latin typeface="Noto Sans JP"/>
               </a:rPr>
-              <a:t/>
-            </a:r>
-          </a:p>
-          <a:p>
-            <a:pPr algn="ctr"/>
-            <a:r>
-              <a:rPr sz="2000" b="1">
-                <a:solidFill>
-                  <a:srgbClr val="FFFFFF"/>
-                </a:solidFill>
-                <a:latin typeface="Noto Sans JP"/>
-              </a:rPr>
-              <a:t>AI社員</a:t>
-            </a:r>
-          </a:p>
-          <a:p>
-            <a:pPr algn="ctr"/>
-            <a:r>
-              <a:rPr sz="2000" b="1">
-                <a:solidFill>
-                  <a:srgbClr val="FFFFFF"/>
-                </a:solidFill>
-                <a:latin typeface="Noto Sans JP"/>
-              </a:rPr>
-              <a:t>1.3人分</a:t>
-            </a:r>
-          </a:p>
-          <a:p>
-            <a:pPr algn="ctr"/>
-            <a:r>
-              <a:rPr sz="2000" b="1">
-                <a:solidFill>
-                  <a:srgbClr val="FFFFFF"/>
-                </a:solidFill>
-                <a:latin typeface="Noto Sans JP"/>
-              </a:rPr>
-              <a:t>稼働中</a:t>
+              <a:t>戦略AI</a:t>
+            </a:r>
+          </a:p>
+        </p:txBody>
+      </p:sp>
+      <p:sp>
+        <p:nvSpPr>
+          <p:cNvPr id="15" name="Rounded Rectangle 14"/>
+          <p:cNvSpPr/>
+          <p:nvPr/>
+        </p:nvSpPr>
+        <p:spPr>
+          <a:xfrm>
+            <a:off x="9601200" y="2103120"/>
+            <a:ext cx="2194560" cy="2743200"/>
+          </a:xfrm>
+          <a:prstGeom prst="roundRect">
+            <a:avLst>
+              <a:gd name="adj" fmla="val 5000"/>
+            </a:avLst>
+          </a:prstGeom>
+          <a:solidFill>
+            <a:srgbClr val="DBEAFE"/>
+          </a:solidFill>
+          <a:ln>
+            <a:noFill/>
+          </a:ln>
+        </p:spPr>
+        <p:style>
+          <a:lnRef idx="1">
+            <a:schemeClr val="accent1"/>
+          </a:lnRef>
+          <a:fillRef idx="3">
+            <a:schemeClr val="accent1"/>
+          </a:fillRef>
+          <a:effectRef idx="2">
+            <a:schemeClr val="accent1"/>
+          </a:effectRef>
+          <a:fontRef idx="minor">
+            <a:schemeClr val="lt1"/>
+          </a:fontRef>
+        </p:style>
+        <p:txBody>
+          <a:bodyPr rtlCol="0" anchor="ctr" wrap="square" lIns="137160" rIns="137160" tIns="73152" bIns="73152"/>
+          <a:lstStyle/>
+          <a:p>
+            <a:pPr algn="ctr"/>
+            <a:r>
+              <a:rPr sz="1300" b="0">
+                <a:solidFill>
+                  <a:srgbClr val="1C3557"/>
+                </a:solidFill>
+                <a:latin typeface="Noto Sans JP"/>
+              </a:rPr>
+              <a:t>競合調査</a:t>
+            </a:r>
+          </a:p>
+          <a:p>
+            <a:pPr algn="ctr"/>
+            <a:r>
+              <a:rPr sz="1300" b="0">
+                <a:solidFill>
+                  <a:srgbClr val="1C3557"/>
+                </a:solidFill>
+                <a:latin typeface="Noto Sans JP"/>
+              </a:rPr>
+              <a:t>料金設計</a:t>
+            </a:r>
+          </a:p>
+          <a:p>
+            <a:pPr algn="ctr"/>
+            <a:r>
+              <a:rPr sz="1300" b="0">
+                <a:solidFill>
+                  <a:srgbClr val="1C3557"/>
+                </a:solidFill>
+                <a:latin typeface="Noto Sans JP"/>
+              </a:rPr>
+              <a:t>プロダクト改善案</a:t>
+            </a:r>
+          </a:p>
+        </p:txBody>
+      </p:sp>
+      <p:sp>
+        <p:nvSpPr>
+          <p:cNvPr id="16" name="Rounded Rectangle 15"/>
+          <p:cNvSpPr/>
+          <p:nvPr/>
+        </p:nvSpPr>
+        <p:spPr>
+          <a:xfrm>
+            <a:off x="457200" y="5212080"/>
+            <a:ext cx="11274552" cy="1097280"/>
+          </a:xfrm>
+          <a:prstGeom prst="roundRect">
+            <a:avLst>
+              <a:gd name="adj" fmla="val 5000"/>
+            </a:avLst>
+          </a:prstGeom>
+          <a:solidFill>
+            <a:srgbClr val="DBEAFE"/>
+          </a:solidFill>
+          <a:ln>
+            <a:noFill/>
+          </a:ln>
+        </p:spPr>
+        <p:style>
+          <a:lnRef idx="1">
+            <a:schemeClr val="accent1"/>
+          </a:lnRef>
+          <a:fillRef idx="3">
+            <a:schemeClr val="accent1"/>
+          </a:fillRef>
+          <a:effectRef idx="2">
+            <a:schemeClr val="accent1"/>
+          </a:effectRef>
+          <a:fontRef idx="minor">
+            <a:schemeClr val="lt1"/>
+          </a:fontRef>
+        </p:style>
+        <p:txBody>
+          <a:bodyPr rtlCol="0" anchor="ctr" wrap="square" lIns="137160" rIns="137160" tIns="73152" bIns="73152"/>
+          <a:lstStyle/>
+          <a:p>
+            <a:pPr algn="ctr"/>
+            <a:r>
+              <a:rPr sz="2400" b="1">
+                <a:solidFill>
+                  <a:srgbClr val="2563EB"/>
+                </a:solidFill>
+                <a:latin typeface="Noto Sans JP"/>
+              </a:rPr>
+              <a:t>いろんな領域で AI社員 を使い倒している</a:t>
             </a:r>
           </a:p>
         </p:txBody>
@@ -10167,38 +12008,45 @@
         </p:nvSpPr>
         <p:spPr>
           <a:xfrm>
-            <a:off x="5029200" y="1371600"/>
-            <a:ext cx="2130552" cy="54864"/>
+            <a:off x="457200" y="365760"/>
+            <a:ext cx="11274552" cy="457200"/>
           </a:xfrm>
           <a:prstGeom prst="rect">
             <a:avLst/>
           </a:prstGeom>
-          <a:solidFill>
-            <a:srgbClr val="2563EB"/>
-          </a:solidFill>
-          <a:ln>
-            <a:noFill/>
-          </a:ln>
-        </p:spPr>
-        <p:style>
-          <a:lnRef idx="1">
-            <a:schemeClr val="accent1"/>
-          </a:lnRef>
-          <a:fillRef idx="3">
-            <a:schemeClr val="accent1"/>
-          </a:fillRef>
-          <a:effectRef idx="2">
-            <a:schemeClr val="accent1"/>
-          </a:effectRef>
-          <a:fontRef idx="minor">
-            <a:schemeClr val="lt1"/>
-          </a:fontRef>
-        </p:style>
-        <p:txBody>
-          <a:bodyPr rtlCol="0" anchor="ctr"/>
-          <a:lstStyle/>
-          <a:p>
-            <a:pPr algn="ctr"/>
+          <a:noFill/>
+          <a:ln>
+            <a:noFill/>
+          </a:ln>
+        </p:spPr>
+        <p:style>
+          <a:lnRef idx="1">
+            <a:schemeClr val="accent1"/>
+          </a:lnRef>
+          <a:fillRef idx="3">
+            <a:schemeClr val="accent1"/>
+          </a:fillRef>
+          <a:effectRef idx="2">
+            <a:schemeClr val="accent1"/>
+          </a:effectRef>
+          <a:fontRef idx="minor">
+            <a:schemeClr val="lt1"/>
+          </a:fontRef>
+        </p:style>
+        <p:txBody>
+          <a:bodyPr rtlCol="0" anchor="t" wrap="square" lIns="137160" rIns="137160" tIns="73152" bIns="73152"/>
+          <a:lstStyle/>
+          <a:p>
+            <a:pPr algn="ctr"/>
+            <a:r>
+              <a:rPr sz="1400" b="1">
+                <a:solidFill>
+                  <a:srgbClr val="6B7280"/>
+                </a:solidFill>
+                <a:latin typeface="Noto Sans JP"/>
+              </a:rPr>
+              <a:t>そして</a:t>
+            </a:r>
           </a:p>
         </p:txBody>
       </p:sp>
@@ -10210,45 +12058,38 @@
         </p:nvSpPr>
         <p:spPr>
           <a:xfrm>
-            <a:off x="457200" y="1828800"/>
-            <a:ext cx="11274552" cy="1097280"/>
+            <a:off x="5486400" y="914400"/>
+            <a:ext cx="1216152" cy="54864"/>
           </a:xfrm>
           <a:prstGeom prst="rect">
             <a:avLst/>
           </a:prstGeom>
-          <a:noFill/>
-          <a:ln>
-            <a:noFill/>
-          </a:ln>
-        </p:spPr>
-        <p:style>
-          <a:lnRef idx="1">
-            <a:schemeClr val="accent1"/>
-          </a:lnRef>
-          <a:fillRef idx="3">
-            <a:schemeClr val="accent1"/>
-          </a:fillRef>
-          <a:effectRef idx="2">
-            <a:schemeClr val="accent1"/>
-          </a:effectRef>
-          <a:fontRef idx="minor">
-            <a:schemeClr val="lt1"/>
-          </a:fontRef>
-        </p:style>
-        <p:txBody>
-          <a:bodyPr rtlCol="0" anchor="ctr" wrap="square" lIns="137160" rIns="137160" tIns="73152" bIns="73152"/>
-          <a:lstStyle/>
-          <a:p>
-            <a:pPr algn="ctr"/>
-            <a:r>
-              <a:rPr sz="3200" b="1">
-                <a:solidFill>
-                  <a:srgbClr val="6B7280"/>
-                </a:solidFill>
-                <a:latin typeface="Noto Sans JP"/>
-              </a:rPr>
-              <a:t>ここまでが現状の話</a:t>
-            </a:r>
+          <a:solidFill>
+            <a:srgbClr val="2563EB"/>
+          </a:solidFill>
+          <a:ln>
+            <a:noFill/>
+          </a:ln>
+        </p:spPr>
+        <p:style>
+          <a:lnRef idx="1">
+            <a:schemeClr val="accent1"/>
+          </a:lnRef>
+          <a:fillRef idx="3">
+            <a:schemeClr val="accent1"/>
+          </a:fillRef>
+          <a:effectRef idx="2">
+            <a:schemeClr val="accent1"/>
+          </a:effectRef>
+          <a:fontRef idx="minor">
+            <a:schemeClr val="lt1"/>
+          </a:fontRef>
+        </p:style>
+        <p:txBody>
+          <a:bodyPr rtlCol="0" anchor="ctr"/>
+          <a:lstStyle/>
+          <a:p>
+            <a:pPr algn="ctr"/>
           </a:p>
         </p:txBody>
       </p:sp>
@@ -10260,8 +12101,8 @@
         </p:nvSpPr>
         <p:spPr>
           <a:xfrm>
-            <a:off x="457200" y="3017520"/>
-            <a:ext cx="11274552" cy="640080"/>
+            <a:off x="457200" y="2011680"/>
+            <a:ext cx="11274552" cy="1371600"/>
           </a:xfrm>
           <a:prstGeom prst="rect">
             <a:avLst/>
@@ -10291,13 +12132,13 @@
           <a:p>
             <a:pPr algn="ctr"/>
             <a:r>
-              <a:rPr sz="3600" b="1">
-                <a:solidFill>
-                  <a:srgbClr val="2563EB"/>
-                </a:solidFill>
-                <a:latin typeface="Noto Sans JP"/>
-              </a:rPr>
-              <a:t>↓</a:t>
+              <a:rPr sz="3200" b="0">
+                <a:solidFill>
+                  <a:srgbClr val="1C3557"/>
+                </a:solidFill>
+                <a:latin typeface="Noto Sans JP"/>
+              </a:rPr>
+              <a:t>これが</a:t>
             </a:r>
           </a:p>
         </p:txBody>
@@ -10310,8 +12151,8 @@
         </p:nvSpPr>
         <p:spPr>
           <a:xfrm>
-            <a:off x="457200" y="3840480"/>
-            <a:ext cx="11274552" cy="1371600"/>
+            <a:off x="457200" y="3200400"/>
+            <a:ext cx="11274552" cy="1463040"/>
           </a:xfrm>
           <a:prstGeom prst="rect">
             <a:avLst/>
@@ -10341,27 +12182,70 @@
           <a:p>
             <a:pPr algn="ctr"/>
             <a:r>
-              <a:rPr sz="4400" b="1">
+              <a:rPr sz="5200" b="1">
                 <a:solidFill>
                   <a:srgbClr val="2563EB"/>
                 </a:solidFill>
                 <a:latin typeface="Noto Sans JP"/>
               </a:rPr>
-              <a:t>ここから今後の話</a:t>
-            </a:r>
-          </a:p>
-        </p:txBody>
-      </p:sp>
-      <p:sp>
-        <p:nvSpPr>
-          <p:cNvPr id="7" name="Rectangle 6"/>
-          <p:cNvSpPr/>
-          <p:nvPr/>
-        </p:nvSpPr>
-        <p:spPr>
-          <a:xfrm>
-            <a:off x="457200" y="5394960"/>
-            <a:ext cx="11274552" cy="548640"/>
+              <a:t>売上に直結している</a:t>
+            </a:r>
+          </a:p>
+        </p:txBody>
+      </p:sp>
+      <p:sp>
+        <p:nvSpPr>
+          <p:cNvPr id="7" name="Down Arrow 6"/>
+          <p:cNvSpPr/>
+          <p:nvPr/>
+        </p:nvSpPr>
+        <p:spPr>
+          <a:xfrm>
+            <a:off x="5870448" y="5029200"/>
+            <a:ext cx="457200" cy="548640"/>
+          </a:xfrm>
+          <a:prstGeom prst="downArrow">
+            <a:avLst/>
+          </a:prstGeom>
+          <a:solidFill>
+            <a:srgbClr val="2563EB"/>
+          </a:solidFill>
+          <a:ln>
+            <a:noFill/>
+          </a:ln>
+        </p:spPr>
+        <p:style>
+          <a:lnRef idx="1">
+            <a:schemeClr val="accent1"/>
+          </a:lnRef>
+          <a:fillRef idx="3">
+            <a:schemeClr val="accent1"/>
+          </a:fillRef>
+          <a:effectRef idx="2">
+            <a:schemeClr val="accent1"/>
+          </a:effectRef>
+          <a:fontRef idx="minor">
+            <a:schemeClr val="lt1"/>
+          </a:fontRef>
+        </p:style>
+        <p:txBody>
+          <a:bodyPr rtlCol="0" anchor="ctr"/>
+          <a:lstStyle/>
+          <a:p>
+            <a:pPr algn="ctr"/>
+          </a:p>
+        </p:txBody>
+      </p:sp>
+      <p:sp>
+        <p:nvSpPr>
+          <p:cNvPr id="8" name="Rectangle 7"/>
+          <p:cNvSpPr/>
+          <p:nvPr/>
+        </p:nvSpPr>
+        <p:spPr>
+          <a:xfrm>
+            <a:off x="10972800" y="6492240"/>
+            <a:ext cx="1005840" cy="274320"/>
           </a:xfrm>
           <a:prstGeom prst="rect">
             <a:avLst/>
@@ -10386,68 +12270,18 @@
           </a:fontRef>
         </p:style>
         <p:txBody>
-          <a:bodyPr rtlCol="0" anchor="ctr" wrap="square" lIns="137160" rIns="137160" tIns="73152" bIns="73152"/>
-          <a:lstStyle/>
-          <a:p>
-            <a:pPr algn="ctr"/>
-            <a:r>
-              <a:rPr sz="1600" b="0">
-                <a:solidFill>
-                  <a:srgbClr val="1C3557"/>
-                </a:solidFill>
-                <a:latin typeface="Noto Sans JP"/>
-              </a:rPr>
-              <a:t>9月末までにAI社員5人を完成させる、その道筋</a:t>
-            </a:r>
-          </a:p>
-        </p:txBody>
-      </p:sp>
-      <p:sp>
-        <p:nvSpPr>
-          <p:cNvPr id="8" name="Rectangle 7"/>
-          <p:cNvSpPr/>
-          <p:nvPr/>
-        </p:nvSpPr>
-        <p:spPr>
-          <a:xfrm>
-            <a:off x="10972800" y="6492240"/>
-            <a:ext cx="1005840" cy="274320"/>
-          </a:xfrm>
-          <a:prstGeom prst="rect">
-            <a:avLst/>
-          </a:prstGeom>
-          <a:noFill/>
-          <a:ln>
-            <a:noFill/>
-          </a:ln>
-        </p:spPr>
-        <p:style>
-          <a:lnRef idx="1">
-            <a:schemeClr val="accent1"/>
-          </a:lnRef>
-          <a:fillRef idx="3">
-            <a:schemeClr val="accent1"/>
-          </a:fillRef>
-          <a:effectRef idx="2">
-            <a:schemeClr val="accent1"/>
-          </a:effectRef>
-          <a:fontRef idx="minor">
-            <a:schemeClr val="lt1"/>
-          </a:fontRef>
-        </p:style>
-        <p:txBody>
           <a:bodyPr rtlCol="0" anchor="t" wrap="square" lIns="137160" rIns="137160" tIns="73152" bIns="73152"/>
           <a:lstStyle/>
           <a:p>
             <a:pPr algn="r"/>
             <a:r>
-              <a:rPr sz="1000" b="0">
+              <a:rPr sz="1100" b="0">
                 <a:solidFill>
                   <a:srgbClr val="6B7280"/>
                 </a:solidFill>
                 <a:latin typeface="Noto Sans JP"/>
               </a:rPr>
-              <a:t>9 / 11</a:t>
+              <a:t>9 / 13</a:t>
             </a:r>
           </a:p>
         </p:txBody>

--- a/strategy/AI社員5人_発表_20260426.pptx
+++ b/strategy/AI社員5人_発表_20260426.pptx
@@ -3306,7 +3306,7 @@
           </a:fontRef>
         </p:style>
         <p:txBody>
-          <a:bodyPr rtlCol="0" anchor="ctr" wrap="square" lIns="137160" rIns="137160" tIns="73152" bIns="73152"/>
+          <a:bodyPr rtlCol="0" anchor="ctr" wrap="square" tIns="54864" bIns="54864"/>
           <a:lstStyle/>
           <a:p>
             <a:pPr algn="ctr"/>
@@ -3399,7 +3399,7 @@
           </a:fontRef>
         </p:style>
         <p:txBody>
-          <a:bodyPr rtlCol="0" anchor="ctr" wrap="square" lIns="137160" rIns="137160" tIns="73152" bIns="73152"/>
+          <a:bodyPr rtlCol="0" anchor="ctr" wrap="square" tIns="54864" bIns="54864"/>
           <a:lstStyle/>
           <a:p>
             <a:pPr algn="ctr"/>
@@ -3449,7 +3449,7 @@
           </a:fontRef>
         </p:style>
         <p:txBody>
-          <a:bodyPr rtlCol="0" anchor="ctr" wrap="square" lIns="137160" rIns="137160" tIns="73152" bIns="73152"/>
+          <a:bodyPr rtlCol="0" anchor="ctr" wrap="square" tIns="54864" bIns="54864"/>
           <a:lstStyle/>
           <a:p>
             <a:pPr algn="ctr"/>
@@ -3499,7 +3499,7 @@
           </a:fontRef>
         </p:style>
         <p:txBody>
-          <a:bodyPr rtlCol="0" anchor="t" wrap="square" lIns="137160" rIns="137160" tIns="73152" bIns="73152"/>
+          <a:bodyPr rtlCol="0" anchor="t" wrap="square" tIns="54864" bIns="54864"/>
           <a:lstStyle/>
           <a:p>
             <a:pPr algn="ctr"/>
@@ -3610,7 +3610,7 @@
           </a:fontRef>
         </p:style>
         <p:txBody>
-          <a:bodyPr rtlCol="0" anchor="t" wrap="square" lIns="137160" rIns="137160" tIns="73152" bIns="73152"/>
+          <a:bodyPr rtlCol="0" anchor="t" wrap="square" tIns="54864" bIns="54864"/>
           <a:lstStyle/>
           <a:p>
             <a:pPr algn="r"/>
@@ -3660,7 +3660,7 @@
           </a:fontRef>
         </p:style>
         <p:txBody>
-          <a:bodyPr rtlCol="0" anchor="t" wrap="square" lIns="137160" rIns="137160" tIns="73152" bIns="73152"/>
+          <a:bodyPr rtlCol="0" anchor="t" wrap="square" tIns="54864" bIns="54864"/>
           <a:lstStyle/>
           <a:p>
             <a:pPr algn="l"/>
@@ -3755,7 +3755,7 @@
           </a:fontRef>
         </p:style>
         <p:txBody>
-          <a:bodyPr rtlCol="0" anchor="ctr" wrap="square" lIns="137160" rIns="137160" tIns="73152" bIns="73152"/>
+          <a:bodyPr rtlCol="0" anchor="ctr" wrap="square" tIns="54864" bIns="54864"/>
           <a:lstStyle/>
           <a:p>
             <a:pPr algn="ctr"/>
@@ -3807,7 +3807,7 @@
           </a:fontRef>
         </p:style>
         <p:txBody>
-          <a:bodyPr rtlCol="0" anchor="ctr" wrap="square" lIns="137160" rIns="137160" tIns="73152" bIns="73152"/>
+          <a:bodyPr rtlCol="0" anchor="ctr" wrap="square" tIns="54864" bIns="54864"/>
           <a:lstStyle/>
           <a:p>
             <a:pPr algn="ctr"/>
@@ -3859,7 +3859,7 @@
           </a:fontRef>
         </p:style>
         <p:txBody>
-          <a:bodyPr rtlCol="0" anchor="ctr" wrap="square" lIns="137160" rIns="137160" tIns="73152" bIns="73152"/>
+          <a:bodyPr rtlCol="0" anchor="ctr" wrap="square" tIns="54864" bIns="54864"/>
           <a:lstStyle/>
           <a:p>
             <a:pPr algn="l"/>
@@ -3911,7 +3911,7 @@
           </a:fontRef>
         </p:style>
         <p:txBody>
-          <a:bodyPr rtlCol="0" anchor="ctr" wrap="square" lIns="137160" rIns="137160" tIns="73152" bIns="73152"/>
+          <a:bodyPr rtlCol="0" anchor="ctr" wrap="square" tIns="54864" bIns="54864"/>
           <a:lstStyle/>
           <a:p>
             <a:pPr algn="r"/>
@@ -3963,7 +3963,7 @@
           </a:fontRef>
         </p:style>
         <p:txBody>
-          <a:bodyPr rtlCol="0" anchor="ctr" wrap="square" lIns="137160" rIns="137160" tIns="73152" bIns="73152"/>
+          <a:bodyPr rtlCol="0" anchor="ctr" wrap="square" tIns="54864" bIns="54864"/>
           <a:lstStyle/>
           <a:p>
             <a:pPr algn="l"/>
@@ -4015,7 +4015,7 @@
           </a:fontRef>
         </p:style>
         <p:txBody>
-          <a:bodyPr rtlCol="0" anchor="ctr" wrap="square" lIns="137160" rIns="137160" tIns="73152" bIns="73152"/>
+          <a:bodyPr rtlCol="0" anchor="ctr" wrap="square" tIns="54864" bIns="54864"/>
           <a:lstStyle/>
           <a:p>
             <a:pPr algn="r"/>
@@ -4067,7 +4067,7 @@
           </a:fontRef>
         </p:style>
         <p:txBody>
-          <a:bodyPr rtlCol="0" anchor="ctr" wrap="square" lIns="137160" rIns="137160" tIns="73152" bIns="73152"/>
+          <a:bodyPr rtlCol="0" anchor="ctr" wrap="square" tIns="54864" bIns="54864"/>
           <a:lstStyle/>
           <a:p>
             <a:pPr algn="l"/>
@@ -4119,7 +4119,7 @@
           </a:fontRef>
         </p:style>
         <p:txBody>
-          <a:bodyPr rtlCol="0" anchor="ctr" wrap="square" lIns="137160" rIns="137160" tIns="73152" bIns="73152"/>
+          <a:bodyPr rtlCol="0" anchor="ctr" wrap="square" tIns="54864" bIns="54864"/>
           <a:lstStyle/>
           <a:p>
             <a:pPr algn="r"/>
@@ -4171,7 +4171,7 @@
           </a:fontRef>
         </p:style>
         <p:txBody>
-          <a:bodyPr rtlCol="0" anchor="ctr" wrap="square" lIns="137160" rIns="137160" tIns="73152" bIns="73152"/>
+          <a:bodyPr rtlCol="0" anchor="ctr" wrap="square" tIns="54864" bIns="54864"/>
           <a:lstStyle/>
           <a:p>
             <a:pPr algn="l"/>
@@ -4223,7 +4223,7 @@
           </a:fontRef>
         </p:style>
         <p:txBody>
-          <a:bodyPr rtlCol="0" anchor="ctr" wrap="square" lIns="137160" rIns="137160" tIns="73152" bIns="73152"/>
+          <a:bodyPr rtlCol="0" anchor="ctr" wrap="square" tIns="54864" bIns="54864"/>
           <a:lstStyle/>
           <a:p>
             <a:pPr algn="r"/>
@@ -4275,7 +4275,7 @@
           </a:fontRef>
         </p:style>
         <p:txBody>
-          <a:bodyPr rtlCol="0" anchor="ctr" wrap="square" lIns="137160" rIns="137160" tIns="73152" bIns="73152"/>
+          <a:bodyPr rtlCol="0" anchor="ctr" wrap="square" tIns="54864" bIns="54864"/>
           <a:lstStyle/>
           <a:p>
             <a:pPr algn="l"/>
@@ -4327,7 +4327,7 @@
           </a:fontRef>
         </p:style>
         <p:txBody>
-          <a:bodyPr rtlCol="0" anchor="ctr" wrap="square" lIns="137160" rIns="137160" tIns="73152" bIns="73152"/>
+          <a:bodyPr rtlCol="0" anchor="ctr" wrap="square" tIns="54864" bIns="54864"/>
           <a:lstStyle/>
           <a:p>
             <a:pPr algn="r"/>
@@ -4381,7 +4381,7 @@
           </a:fontRef>
         </p:style>
         <p:txBody>
-          <a:bodyPr rtlCol="0" anchor="ctr" wrap="square" lIns="137160" rIns="137160" tIns="73152" bIns="73152"/>
+          <a:bodyPr rtlCol="0" anchor="ctr" wrap="square" tIns="54864" bIns="54864"/>
           <a:lstStyle/>
           <a:p>
             <a:pPr algn="ctr"/>
@@ -4631,7 +4631,7 @@
           </a:fontRef>
         </p:style>
         <p:txBody>
-          <a:bodyPr rtlCol="0" anchor="ctr" wrap="square" lIns="137160" rIns="137160" tIns="73152" bIns="73152"/>
+          <a:bodyPr rtlCol="0" anchor="ctr" wrap="square" tIns="54864" bIns="54864"/>
           <a:lstStyle/>
           <a:p>
             <a:pPr algn="ctr"/>
@@ -4724,7 +4724,7 @@
           </a:fontRef>
         </p:style>
         <p:txBody>
-          <a:bodyPr rtlCol="0" anchor="ctr" wrap="square" lIns="137160" rIns="137160" tIns="73152" bIns="73152"/>
+          <a:bodyPr rtlCol="0" anchor="ctr" wrap="square" tIns="54864" bIns="54864"/>
           <a:lstStyle/>
           <a:p>
             <a:pPr algn="ctr"/>
@@ -4774,7 +4774,7 @@
           </a:fontRef>
         </p:style>
         <p:txBody>
-          <a:bodyPr rtlCol="0" anchor="ctr" wrap="square" lIns="137160" rIns="137160" tIns="73152" bIns="73152"/>
+          <a:bodyPr rtlCol="0" anchor="ctr" wrap="square" tIns="54864" bIns="54864"/>
           <a:lstStyle/>
           <a:p>
             <a:pPr algn="ctr"/>
@@ -4785,7 +4785,7 @@
                 </a:solidFill>
                 <a:latin typeface="Noto Sans JP"/>
               </a:rPr>
-              <a:t>9月末までにAI社員5人を完成させる</a:t>
+              <a:t>9月末までにAI社員5人を完成させる、その具体ロードマップ</a:t>
             </a:r>
           </a:p>
         </p:txBody>
@@ -4824,7 +4824,7 @@
           </a:fontRef>
         </p:style>
         <p:txBody>
-          <a:bodyPr rtlCol="0" anchor="t" wrap="square" lIns="137160" rIns="137160" tIns="73152" bIns="73152"/>
+          <a:bodyPr rtlCol="0" anchor="t" wrap="square" tIns="54864" bIns="54864"/>
           <a:lstStyle/>
           <a:p>
             <a:pPr algn="r"/>
@@ -4935,7 +4935,7 @@
           </a:fontRef>
         </p:style>
         <p:txBody>
-          <a:bodyPr rtlCol="0" anchor="t" wrap="square" lIns="137160" rIns="137160" tIns="73152" bIns="73152"/>
+          <a:bodyPr rtlCol="0" anchor="t" wrap="square" tIns="54864" bIns="54864"/>
           <a:lstStyle/>
           <a:p>
             <a:pPr algn="r"/>
@@ -4985,7 +4985,7 @@
           </a:fontRef>
         </p:style>
         <p:txBody>
-          <a:bodyPr rtlCol="0" anchor="t" wrap="square" lIns="137160" rIns="137160" tIns="73152" bIns="73152"/>
+          <a:bodyPr rtlCol="0" anchor="t" wrap="square" tIns="54864" bIns="54864"/>
           <a:lstStyle/>
           <a:p>
             <a:pPr algn="l"/>
@@ -4996,7 +4996,7 @@
                 </a:solidFill>
                 <a:latin typeface="Noto Sans JP"/>
               </a:rPr>
-              <a:t>6月末 2人分 → 9月末 5人分、Agent Teamsも並走</a:t>
+              <a:t>9月末までのロードマップ：何をどうしていくか</a:t>
             </a:r>
           </a:p>
         </p:txBody>
@@ -5053,7 +5053,7 @@
         <p:spPr>
           <a:xfrm>
             <a:off x="457200" y="1371600"/>
-            <a:ext cx="2286000" cy="685800"/>
+            <a:ext cx="1371600" cy="640080"/>
           </a:xfrm>
           <a:prstGeom prst="rect">
             <a:avLst/>
@@ -5080,12 +5080,12 @@
           </a:fontRef>
         </p:style>
         <p:txBody>
-          <a:bodyPr rtlCol="0" anchor="ctr" wrap="square" lIns="137160" rIns="137160" tIns="73152" bIns="73152"/>
-          <a:lstStyle/>
-          <a:p>
-            <a:pPr algn="ctr"/>
-            <a:r>
-              <a:rPr sz="1600" b="1">
+          <a:bodyPr rtlCol="0" anchor="ctr" wrap="square" tIns="54864" bIns="54864"/>
+          <a:lstStyle/>
+          <a:p>
+            <a:pPr algn="ctr"/>
+            <a:r>
+              <a:rPr sz="1300" b="1">
                 <a:solidFill>
                   <a:srgbClr val="FFFFFF"/>
                 </a:solidFill>
@@ -5104,8 +5104,8 @@
         </p:nvSpPr>
         <p:spPr>
           <a:xfrm>
-            <a:off x="2788920" y="1371600"/>
-            <a:ext cx="1828800" cy="685800"/>
+            <a:off x="1874519" y="1371600"/>
+            <a:ext cx="1280160" cy="640080"/>
           </a:xfrm>
           <a:prstGeom prst="rect">
             <a:avLst/>
@@ -5132,12 +5132,12 @@
           </a:fontRef>
         </p:style>
         <p:txBody>
-          <a:bodyPr rtlCol="0" anchor="ctr" wrap="square" lIns="137160" rIns="137160" tIns="73152" bIns="73152"/>
-          <a:lstStyle/>
-          <a:p>
-            <a:pPr algn="ctr"/>
-            <a:r>
-              <a:rPr sz="1600" b="1">
+          <a:bodyPr rtlCol="0" anchor="ctr" wrap="square" tIns="54864" bIns="54864"/>
+          <a:lstStyle/>
+          <a:p>
+            <a:pPr algn="ctr"/>
+            <a:r>
+              <a:rPr sz="1300" b="1">
                 <a:solidFill>
                   <a:srgbClr val="FFFFFF"/>
                 </a:solidFill>
@@ -5156,8 +5156,8 @@
         </p:nvSpPr>
         <p:spPr>
           <a:xfrm>
-            <a:off x="4663440" y="1371600"/>
-            <a:ext cx="7040880" cy="685800"/>
+            <a:off x="3200400" y="1371600"/>
+            <a:ext cx="5943600" cy="640080"/>
           </a:xfrm>
           <a:prstGeom prst="rect">
             <a:avLst/>
@@ -5184,18 +5184,18 @@
           </a:fontRef>
         </p:style>
         <p:txBody>
-          <a:bodyPr rtlCol="0" anchor="ctr" wrap="square" lIns="137160" rIns="137160" tIns="73152" bIns="73152"/>
-          <a:lstStyle/>
-          <a:p>
-            <a:pPr algn="ctr"/>
-            <a:r>
-              <a:rPr sz="1600" b="1">
+          <a:bodyPr rtlCol="0" anchor="ctr" wrap="square" tIns="54864" bIns="54864"/>
+          <a:lstStyle/>
+          <a:p>
+            <a:pPr algn="ctr"/>
+            <a:r>
+              <a:rPr sz="1300" b="1">
                 <a:solidFill>
                   <a:srgbClr val="FFFFFF"/>
                 </a:solidFill>
                 <a:latin typeface="Noto Sans JP"/>
               </a:rPr>
-              <a:t>動き</a:t>
+              <a:t>具体タスク</a:t>
             </a:r>
           </a:p>
         </p:txBody>
@@ -5208,13 +5208,65 @@
         </p:nvSpPr>
         <p:spPr>
           <a:xfrm>
-            <a:off x="457200" y="2130552"/>
-            <a:ext cx="2286000" cy="685800"/>
+            <a:off x="9189720" y="1371600"/>
+            <a:ext cx="2542032" cy="640080"/>
           </a:xfrm>
           <a:prstGeom prst="rect">
             <a:avLst/>
           </a:prstGeom>
           <a:solidFill>
+            <a:srgbClr val="1C3557"/>
+          </a:solidFill>
+          <a:ln>
+            <a:noFill/>
+          </a:ln>
+        </p:spPr>
+        <p:style>
+          <a:lnRef idx="1">
+            <a:schemeClr val="accent1"/>
+          </a:lnRef>
+          <a:fillRef idx="3">
+            <a:schemeClr val="accent1"/>
+          </a:fillRef>
+          <a:effectRef idx="2">
+            <a:schemeClr val="accent1"/>
+          </a:effectRef>
+          <a:fontRef idx="minor">
+            <a:schemeClr val="lt1"/>
+          </a:fontRef>
+        </p:style>
+        <p:txBody>
+          <a:bodyPr rtlCol="0" anchor="ctr" wrap="square" tIns="54864" bIns="54864"/>
+          <a:lstStyle/>
+          <a:p>
+            <a:pPr algn="ctr"/>
+            <a:r>
+              <a:rPr sz="1300" b="1">
+                <a:solidFill>
+                  <a:srgbClr val="FFFFFF"/>
+                </a:solidFill>
+                <a:latin typeface="Noto Sans JP"/>
+              </a:rPr>
+              <a:t>Agent Teams</a:t>
+            </a:r>
+          </a:p>
+        </p:txBody>
+      </p:sp>
+      <p:sp>
+        <p:nvSpPr>
+          <p:cNvPr id="10" name="Rectangle 9"/>
+          <p:cNvSpPr/>
+          <p:nvPr/>
+        </p:nvSpPr>
+        <p:spPr>
+          <a:xfrm>
+            <a:off x="457200" y="2084832"/>
+            <a:ext cx="1371600" cy="640080"/>
+          </a:xfrm>
+          <a:prstGeom prst="rect">
+            <a:avLst/>
+          </a:prstGeom>
+          <a:solidFill>
             <a:srgbClr val="F3F4F6"/>
           </a:solidFill>
           <a:ln>
@@ -5236,32 +5288,44 @@
           </a:fontRef>
         </p:style>
         <p:txBody>
-          <a:bodyPr rtlCol="0" anchor="ctr" wrap="square" lIns="137160" rIns="137160" tIns="73152" bIns="73152"/>
-          <a:lstStyle/>
-          <a:p>
-            <a:pPr algn="ctr"/>
-            <a:r>
-              <a:rPr sz="1400" b="0">
+          <a:bodyPr rtlCol="0" anchor="ctr" wrap="square" tIns="54864" bIns="54864"/>
+          <a:lstStyle/>
+          <a:p>
+            <a:pPr algn="ctr"/>
+            <a:r>
+              <a:rPr sz="1100" b="0">
                 <a:solidFill>
                   <a:srgbClr val="1C3557"/>
                 </a:solidFill>
                 <a:latin typeface="Noto Sans JP"/>
               </a:rPr>
-              <a:t>4月 (現在)</a:t>
-            </a:r>
-          </a:p>
-        </p:txBody>
-      </p:sp>
-      <p:sp>
-        <p:nvSpPr>
-          <p:cNvPr id="10" name="Rectangle 9"/>
-          <p:cNvSpPr/>
-          <p:nvPr/>
-        </p:nvSpPr>
-        <p:spPr>
-          <a:xfrm>
-            <a:off x="2788920" y="2130552"/>
-            <a:ext cx="1828800" cy="685800"/>
+              <a:t>4月</a:t>
+            </a:r>
+          </a:p>
+          <a:p>
+            <a:pPr algn="ctr"/>
+            <a:r>
+              <a:rPr sz="1100" b="0">
+                <a:solidFill>
+                  <a:srgbClr val="1C3557"/>
+                </a:solidFill>
+                <a:latin typeface="Noto Sans JP"/>
+              </a:rPr>
+              <a:t>(現在)</a:t>
+            </a:r>
+          </a:p>
+        </p:txBody>
+      </p:sp>
+      <p:sp>
+        <p:nvSpPr>
+          <p:cNvPr id="11" name="Rectangle 10"/>
+          <p:cNvSpPr/>
+          <p:nvPr/>
+        </p:nvSpPr>
+        <p:spPr>
+          <a:xfrm>
+            <a:off x="1874519" y="2084832"/>
+            <a:ext cx="1280160" cy="640080"/>
           </a:xfrm>
           <a:prstGeom prst="rect">
             <a:avLst/>
@@ -5288,12 +5352,12 @@
           </a:fontRef>
         </p:style>
         <p:txBody>
-          <a:bodyPr rtlCol="0" anchor="ctr" wrap="square" lIns="137160" rIns="137160" tIns="73152" bIns="73152"/>
-          <a:lstStyle/>
-          <a:p>
-            <a:pPr algn="ctr"/>
-            <a:r>
-              <a:rPr sz="1800" b="1">
+          <a:bodyPr rtlCol="0" anchor="ctr" wrap="square" tIns="54864" bIns="54864"/>
+          <a:lstStyle/>
+          <a:p>
+            <a:pPr algn="ctr"/>
+            <a:r>
+              <a:rPr sz="1400" b="1">
                 <a:solidFill>
                   <a:srgbClr val="1C3557"/>
                 </a:solidFill>
@@ -5306,14 +5370,14 @@
       </p:sp>
       <p:sp>
         <p:nvSpPr>
-          <p:cNvPr id="11" name="Rectangle 10"/>
-          <p:cNvSpPr/>
-          <p:nvPr/>
-        </p:nvSpPr>
-        <p:spPr>
-          <a:xfrm>
-            <a:off x="4663440" y="2130552"/>
-            <a:ext cx="7040880" cy="685800"/>
+          <p:cNvPr id="12" name="Rectangle 11"/>
+          <p:cNvSpPr/>
+          <p:nvPr/>
+        </p:nvSpPr>
+        <p:spPr>
+          <a:xfrm>
+            <a:off x="3200400" y="2084832"/>
+            <a:ext cx="5943600" cy="640080"/>
           </a:xfrm>
           <a:prstGeom prst="rect">
             <a:avLst/>
@@ -5340,37 +5404,297 @@
           </a:fontRef>
         </p:style>
         <p:txBody>
-          <a:bodyPr rtlCol="0" anchor="ctr" wrap="square" lIns="137160" rIns="137160" tIns="73152" bIns="73152"/>
+          <a:bodyPr rtlCol="0" anchor="ctr" wrap="square" tIns="54864" bIns="54864"/>
           <a:lstStyle/>
           <a:p>
             <a:pPr algn="l"/>
             <a:r>
-              <a:rPr sz="1300" b="0">
+              <a:rPr sz="1100" b="0">
                 <a:solidFill>
                   <a:srgbClr val="1C3557"/>
                 </a:solidFill>
                 <a:latin typeface="Noto Sans JP"/>
               </a:rPr>
-              <a:t>デリバリーAI + 戦略AI が稼働中</a:t>
-            </a:r>
-          </a:p>
-        </p:txBody>
-      </p:sp>
-      <p:sp>
-        <p:nvSpPr>
-          <p:cNvPr id="12" name="Rectangle 11"/>
-          <p:cNvSpPr/>
-          <p:nvPr/>
-        </p:nvSpPr>
-        <p:spPr>
-          <a:xfrm>
-            <a:off x="457200" y="2889504"/>
-            <a:ext cx="2286000" cy="685800"/>
+              <a:t>NTT・中西デリバリー継続 / 戦略AIで競合・料金リサーチ強化</a:t>
+            </a:r>
+          </a:p>
+        </p:txBody>
+      </p:sp>
+      <p:sp>
+        <p:nvSpPr>
+          <p:cNvPr id="13" name="Rectangle 12"/>
+          <p:cNvSpPr/>
+          <p:nvPr/>
+        </p:nvSpPr>
+        <p:spPr>
+          <a:xfrm>
+            <a:off x="9189720" y="2084832"/>
+            <a:ext cx="2542032" cy="640080"/>
           </a:xfrm>
           <a:prstGeom prst="rect">
             <a:avLst/>
           </a:prstGeom>
           <a:solidFill>
+            <a:srgbClr val="F3F4F6"/>
+          </a:solidFill>
+          <a:ln>
+            <a:noFill/>
+          </a:ln>
+        </p:spPr>
+        <p:style>
+          <a:lnRef idx="1">
+            <a:schemeClr val="accent1"/>
+          </a:lnRef>
+          <a:fillRef idx="3">
+            <a:schemeClr val="accent1"/>
+          </a:fillRef>
+          <a:effectRef idx="2">
+            <a:schemeClr val="accent1"/>
+          </a:effectRef>
+          <a:fontRef idx="minor">
+            <a:schemeClr val="lt1"/>
+          </a:fontRef>
+        </p:style>
+        <p:txBody>
+          <a:bodyPr rtlCol="0" anchor="ctr" wrap="square" tIns="54864" bIns="54864"/>
+          <a:lstStyle/>
+          <a:p>
+            <a:pPr algn="l"/>
+            <a:r>
+              <a:rPr sz="1100" b="0">
+                <a:solidFill>
+                  <a:srgbClr val="1C3557"/>
+                </a:solidFill>
+                <a:latin typeface="Noto Sans JP"/>
+              </a:rPr>
+              <a:t>構造設計の検討</a:t>
+            </a:r>
+          </a:p>
+        </p:txBody>
+      </p:sp>
+      <p:sp>
+        <p:nvSpPr>
+          <p:cNvPr id="14" name="Rectangle 13"/>
+          <p:cNvSpPr/>
+          <p:nvPr/>
+        </p:nvSpPr>
+        <p:spPr>
+          <a:xfrm>
+            <a:off x="457200" y="2679192"/>
+            <a:ext cx="1371600" cy="640080"/>
+          </a:xfrm>
+          <a:prstGeom prst="rect">
+            <a:avLst/>
+          </a:prstGeom>
+          <a:solidFill>
+            <a:srgbClr val="F3F4F6"/>
+          </a:solidFill>
+          <a:ln>
+            <a:noFill/>
+          </a:ln>
+        </p:spPr>
+        <p:style>
+          <a:lnRef idx="1">
+            <a:schemeClr val="accent1"/>
+          </a:lnRef>
+          <a:fillRef idx="3">
+            <a:schemeClr val="accent1"/>
+          </a:fillRef>
+          <a:effectRef idx="2">
+            <a:schemeClr val="accent1"/>
+          </a:effectRef>
+          <a:fontRef idx="minor">
+            <a:schemeClr val="lt1"/>
+          </a:fontRef>
+        </p:style>
+        <p:txBody>
+          <a:bodyPr rtlCol="0" anchor="ctr" wrap="square" tIns="54864" bIns="54864"/>
+          <a:lstStyle/>
+          <a:p>
+            <a:pPr algn="ctr"/>
+            <a:r>
+              <a:rPr sz="1100" b="0">
+                <a:solidFill>
+                  <a:srgbClr val="1C3557"/>
+                </a:solidFill>
+                <a:latin typeface="Noto Sans JP"/>
+              </a:rPr>
+              <a:t>5月</a:t>
+            </a:r>
+          </a:p>
+        </p:txBody>
+      </p:sp>
+      <p:sp>
+        <p:nvSpPr>
+          <p:cNvPr id="15" name="Rectangle 14"/>
+          <p:cNvSpPr/>
+          <p:nvPr/>
+        </p:nvSpPr>
+        <p:spPr>
+          <a:xfrm>
+            <a:off x="1874519" y="2679192"/>
+            <a:ext cx="1280160" cy="640080"/>
+          </a:xfrm>
+          <a:prstGeom prst="rect">
+            <a:avLst/>
+          </a:prstGeom>
+          <a:solidFill>
+            <a:srgbClr val="F3F4F6"/>
+          </a:solidFill>
+          <a:ln>
+            <a:noFill/>
+          </a:ln>
+        </p:spPr>
+        <p:style>
+          <a:lnRef idx="1">
+            <a:schemeClr val="accent1"/>
+          </a:lnRef>
+          <a:fillRef idx="3">
+            <a:schemeClr val="accent1"/>
+          </a:fillRef>
+          <a:effectRef idx="2">
+            <a:schemeClr val="accent1"/>
+          </a:effectRef>
+          <a:fontRef idx="minor">
+            <a:schemeClr val="lt1"/>
+          </a:fontRef>
+        </p:style>
+        <p:txBody>
+          <a:bodyPr rtlCol="0" anchor="ctr" wrap="square" tIns="54864" bIns="54864"/>
+          <a:lstStyle/>
+          <a:p>
+            <a:pPr algn="ctr"/>
+            <a:r>
+              <a:rPr sz="1400" b="1">
+                <a:solidFill>
+                  <a:srgbClr val="1C3557"/>
+                </a:solidFill>
+                <a:latin typeface="Noto Sans JP"/>
+              </a:rPr>
+              <a:t>1.6人分</a:t>
+            </a:r>
+          </a:p>
+        </p:txBody>
+      </p:sp>
+      <p:sp>
+        <p:nvSpPr>
+          <p:cNvPr id="16" name="Rectangle 15"/>
+          <p:cNvSpPr/>
+          <p:nvPr/>
+        </p:nvSpPr>
+        <p:spPr>
+          <a:xfrm>
+            <a:off x="3200400" y="2679192"/>
+            <a:ext cx="5943600" cy="640080"/>
+          </a:xfrm>
+          <a:prstGeom prst="rect">
+            <a:avLst/>
+          </a:prstGeom>
+          <a:solidFill>
+            <a:srgbClr val="F3F4F6"/>
+          </a:solidFill>
+          <a:ln>
+            <a:noFill/>
+          </a:ln>
+        </p:spPr>
+        <p:style>
+          <a:lnRef idx="1">
+            <a:schemeClr val="accent1"/>
+          </a:lnRef>
+          <a:fillRef idx="3">
+            <a:schemeClr val="accent1"/>
+          </a:fillRef>
+          <a:effectRef idx="2">
+            <a:schemeClr val="accent1"/>
+          </a:effectRef>
+          <a:fontRef idx="minor">
+            <a:schemeClr val="lt1"/>
+          </a:fontRef>
+        </p:style>
+        <p:txBody>
+          <a:bodyPr rtlCol="0" anchor="ctr" wrap="square" tIns="54864" bIns="54864"/>
+          <a:lstStyle/>
+          <a:p>
+            <a:pPr algn="l"/>
+            <a:r>
+              <a:rPr sz="1100" b="0">
+                <a:solidFill>
+                  <a:srgbClr val="1C3557"/>
+                </a:solidFill>
+                <a:latin typeface="Noto Sans JP"/>
+              </a:rPr>
+              <a:t>マーケAI立ち上げ(LP・LINE) / 営業AI立ち上げ(商談前準備テンプレ)</a:t>
+            </a:r>
+          </a:p>
+        </p:txBody>
+      </p:sp>
+      <p:sp>
+        <p:nvSpPr>
+          <p:cNvPr id="17" name="Rectangle 16"/>
+          <p:cNvSpPr/>
+          <p:nvPr/>
+        </p:nvSpPr>
+        <p:spPr>
+          <a:xfrm>
+            <a:off x="9189720" y="2679192"/>
+            <a:ext cx="2542032" cy="640080"/>
+          </a:xfrm>
+          <a:prstGeom prst="rect">
+            <a:avLst/>
+          </a:prstGeom>
+          <a:solidFill>
+            <a:srgbClr val="F3F4F6"/>
+          </a:solidFill>
+          <a:ln>
+            <a:noFill/>
+          </a:ln>
+        </p:spPr>
+        <p:style>
+          <a:lnRef idx="1">
+            <a:schemeClr val="accent1"/>
+          </a:lnRef>
+          <a:fillRef idx="3">
+            <a:schemeClr val="accent1"/>
+          </a:fillRef>
+          <a:effectRef idx="2">
+            <a:schemeClr val="accent1"/>
+          </a:effectRef>
+          <a:fontRef idx="minor">
+            <a:schemeClr val="lt1"/>
+          </a:fontRef>
+        </p:style>
+        <p:txBody>
+          <a:bodyPr rtlCol="0" anchor="ctr" wrap="square" tIns="54864" bIns="54864"/>
+          <a:lstStyle/>
+          <a:p>
+            <a:pPr algn="l"/>
+            <a:r>
+              <a:rPr sz="1100" b="0">
+                <a:solidFill>
+                  <a:srgbClr val="1C3557"/>
+                </a:solidFill>
+                <a:latin typeface="Noto Sans JP"/>
+              </a:rPr>
+              <a:t>5人の役割分担を設計</a:t>
+            </a:r>
+          </a:p>
+        </p:txBody>
+      </p:sp>
+      <p:sp>
+        <p:nvSpPr>
+          <p:cNvPr id="18" name="Rectangle 17"/>
+          <p:cNvSpPr/>
+          <p:nvPr/>
+        </p:nvSpPr>
+        <p:spPr>
+          <a:xfrm>
+            <a:off x="457200" y="3273552"/>
+            <a:ext cx="1371600" cy="640080"/>
+          </a:xfrm>
+          <a:prstGeom prst="rect">
+            <a:avLst/>
+          </a:prstGeom>
+          <a:solidFill>
             <a:srgbClr val="2563EB"/>
           </a:solidFill>
           <a:ln>
@@ -5392,7 +5716,71 @@
           </a:fontRef>
         </p:style>
         <p:txBody>
-          <a:bodyPr rtlCol="0" anchor="ctr" wrap="square" lIns="137160" rIns="137160" tIns="73152" bIns="73152"/>
+          <a:bodyPr rtlCol="0" anchor="ctr" wrap="square" tIns="54864" bIns="54864"/>
+          <a:lstStyle/>
+          <a:p>
+            <a:pPr algn="ctr"/>
+            <a:r>
+              <a:rPr sz="1100" b="1">
+                <a:solidFill>
+                  <a:srgbClr val="FFFFFF"/>
+                </a:solidFill>
+                <a:latin typeface="Noto Sans JP"/>
+              </a:rPr>
+              <a:t>6月末</a:t>
+            </a:r>
+          </a:p>
+          <a:p>
+            <a:pPr algn="ctr"/>
+            <a:r>
+              <a:rPr sz="1100" b="1">
+                <a:solidFill>
+                  <a:srgbClr val="FFFFFF"/>
+                </a:solidFill>
+                <a:latin typeface="Noto Sans JP"/>
+              </a:rPr>
+              <a:t>(中間)</a:t>
+            </a:r>
+          </a:p>
+        </p:txBody>
+      </p:sp>
+      <p:sp>
+        <p:nvSpPr>
+          <p:cNvPr id="19" name="Rectangle 18"/>
+          <p:cNvSpPr/>
+          <p:nvPr/>
+        </p:nvSpPr>
+        <p:spPr>
+          <a:xfrm>
+            <a:off x="1874519" y="3273552"/>
+            <a:ext cx="1280160" cy="640080"/>
+          </a:xfrm>
+          <a:prstGeom prst="rect">
+            <a:avLst/>
+          </a:prstGeom>
+          <a:solidFill>
+            <a:srgbClr val="2563EB"/>
+          </a:solidFill>
+          <a:ln>
+            <a:noFill/>
+          </a:ln>
+        </p:spPr>
+        <p:style>
+          <a:lnRef idx="1">
+            <a:schemeClr val="accent1"/>
+          </a:lnRef>
+          <a:fillRef idx="3">
+            <a:schemeClr val="accent1"/>
+          </a:fillRef>
+          <a:effectRef idx="2">
+            <a:schemeClr val="accent1"/>
+          </a:effectRef>
+          <a:fontRef idx="minor">
+            <a:schemeClr val="lt1"/>
+          </a:fontRef>
+        </p:style>
+        <p:txBody>
+          <a:bodyPr rtlCol="0" anchor="ctr" wrap="square" tIns="54864" bIns="54864"/>
           <a:lstStyle/>
           <a:p>
             <a:pPr algn="ctr"/>
@@ -5403,26 +5791,546 @@
                 </a:solidFill>
                 <a:latin typeface="Noto Sans JP"/>
               </a:rPr>
-              <a:t>6月末 (中間発表)</a:t>
-            </a:r>
-          </a:p>
-        </p:txBody>
-      </p:sp>
-      <p:sp>
-        <p:nvSpPr>
-          <p:cNvPr id="13" name="Rectangle 12"/>
-          <p:cNvSpPr/>
-          <p:nvPr/>
-        </p:nvSpPr>
-        <p:spPr>
-          <a:xfrm>
-            <a:off x="2788920" y="2889504"/>
-            <a:ext cx="1828800" cy="685800"/>
+              <a:t>2人分</a:t>
+            </a:r>
+          </a:p>
+        </p:txBody>
+      </p:sp>
+      <p:sp>
+        <p:nvSpPr>
+          <p:cNvPr id="20" name="Rectangle 19"/>
+          <p:cNvSpPr/>
+          <p:nvPr/>
+        </p:nvSpPr>
+        <p:spPr>
+          <a:xfrm>
+            <a:off x="3200400" y="3273552"/>
+            <a:ext cx="5943600" cy="640080"/>
           </a:xfrm>
           <a:prstGeom prst="rect">
             <a:avLst/>
           </a:prstGeom>
           <a:solidFill>
+            <a:srgbClr val="DBEAFE"/>
+          </a:solidFill>
+          <a:ln>
+            <a:noFill/>
+          </a:ln>
+        </p:spPr>
+        <p:style>
+          <a:lnRef idx="1">
+            <a:schemeClr val="accent1"/>
+          </a:lnRef>
+          <a:fillRef idx="3">
+            <a:schemeClr val="accent1"/>
+          </a:fillRef>
+          <a:effectRef idx="2">
+            <a:schemeClr val="accent1"/>
+          </a:effectRef>
+          <a:fontRef idx="minor">
+            <a:schemeClr val="lt1"/>
+          </a:fontRef>
+        </p:style>
+        <p:txBody>
+          <a:bodyPr rtlCol="0" anchor="ctr" wrap="square" tIns="54864" bIns="54864"/>
+          <a:lstStyle/>
+          <a:p>
+            <a:pPr algn="l"/>
+            <a:r>
+              <a:rPr sz="1100" b="0">
+                <a:solidFill>
+                  <a:srgbClr val="1C3557"/>
+                </a:solidFill>
+                <a:latin typeface="Noto Sans JP"/>
+              </a:rPr>
+              <a:t>Kawaru β版ローンチ実施 / 5人で連携運用テスト開始</a:t>
+            </a:r>
+          </a:p>
+        </p:txBody>
+      </p:sp>
+      <p:sp>
+        <p:nvSpPr>
+          <p:cNvPr id="21" name="Rectangle 20"/>
+          <p:cNvSpPr/>
+          <p:nvPr/>
+        </p:nvSpPr>
+        <p:spPr>
+          <a:xfrm>
+            <a:off x="9189720" y="3273552"/>
+            <a:ext cx="2542032" cy="640080"/>
+          </a:xfrm>
+          <a:prstGeom prst="rect">
+            <a:avLst/>
+          </a:prstGeom>
+          <a:solidFill>
+            <a:srgbClr val="DBEAFE"/>
+          </a:solidFill>
+          <a:ln>
+            <a:noFill/>
+          </a:ln>
+        </p:spPr>
+        <p:style>
+          <a:lnRef idx="1">
+            <a:schemeClr val="accent1"/>
+          </a:lnRef>
+          <a:fillRef idx="3">
+            <a:schemeClr val="accent1"/>
+          </a:fillRef>
+          <a:effectRef idx="2">
+            <a:schemeClr val="accent1"/>
+          </a:effectRef>
+          <a:fontRef idx="minor">
+            <a:schemeClr val="lt1"/>
+          </a:fontRef>
+        </p:style>
+        <p:txBody>
+          <a:bodyPr rtlCol="0" anchor="ctr" wrap="square" tIns="54864" bIns="54864"/>
+          <a:lstStyle/>
+          <a:p>
+            <a:pPr algn="l"/>
+            <a:r>
+              <a:rPr sz="1100" b="0">
+                <a:solidFill>
+                  <a:srgbClr val="1C3557"/>
+                </a:solidFill>
+                <a:latin typeface="Noto Sans JP"/>
+              </a:rPr>
+              <a:t>初期構築 (3人連携)</a:t>
+            </a:r>
+          </a:p>
+        </p:txBody>
+      </p:sp>
+      <p:sp>
+        <p:nvSpPr>
+          <p:cNvPr id="22" name="Rectangle 21"/>
+          <p:cNvSpPr/>
+          <p:nvPr/>
+        </p:nvSpPr>
+        <p:spPr>
+          <a:xfrm>
+            <a:off x="457200" y="3867912"/>
+            <a:ext cx="1371600" cy="640080"/>
+          </a:xfrm>
+          <a:prstGeom prst="rect">
+            <a:avLst/>
+          </a:prstGeom>
+          <a:solidFill>
+            <a:srgbClr val="F3F4F6"/>
+          </a:solidFill>
+          <a:ln>
+            <a:noFill/>
+          </a:ln>
+        </p:spPr>
+        <p:style>
+          <a:lnRef idx="1">
+            <a:schemeClr val="accent1"/>
+          </a:lnRef>
+          <a:fillRef idx="3">
+            <a:schemeClr val="accent1"/>
+          </a:fillRef>
+          <a:effectRef idx="2">
+            <a:schemeClr val="accent1"/>
+          </a:effectRef>
+          <a:fontRef idx="minor">
+            <a:schemeClr val="lt1"/>
+          </a:fontRef>
+        </p:style>
+        <p:txBody>
+          <a:bodyPr rtlCol="0" anchor="ctr" wrap="square" tIns="54864" bIns="54864"/>
+          <a:lstStyle/>
+          <a:p>
+            <a:pPr algn="ctr"/>
+            <a:r>
+              <a:rPr sz="1100" b="0">
+                <a:solidFill>
+                  <a:srgbClr val="1C3557"/>
+                </a:solidFill>
+                <a:latin typeface="Noto Sans JP"/>
+              </a:rPr>
+              <a:t>7-8月</a:t>
+            </a:r>
+          </a:p>
+        </p:txBody>
+      </p:sp>
+      <p:sp>
+        <p:nvSpPr>
+          <p:cNvPr id="23" name="Rectangle 22"/>
+          <p:cNvSpPr/>
+          <p:nvPr/>
+        </p:nvSpPr>
+        <p:spPr>
+          <a:xfrm>
+            <a:off x="1874519" y="3867912"/>
+            <a:ext cx="1280160" cy="640080"/>
+          </a:xfrm>
+          <a:prstGeom prst="rect">
+            <a:avLst/>
+          </a:prstGeom>
+          <a:solidFill>
+            <a:srgbClr val="F3F4F6"/>
+          </a:solidFill>
+          <a:ln>
+            <a:noFill/>
+          </a:ln>
+        </p:spPr>
+        <p:style>
+          <a:lnRef idx="1">
+            <a:schemeClr val="accent1"/>
+          </a:lnRef>
+          <a:fillRef idx="3">
+            <a:schemeClr val="accent1"/>
+          </a:fillRef>
+          <a:effectRef idx="2">
+            <a:schemeClr val="accent1"/>
+          </a:effectRef>
+          <a:fontRef idx="minor">
+            <a:schemeClr val="lt1"/>
+          </a:fontRef>
+        </p:style>
+        <p:txBody>
+          <a:bodyPr rtlCol="0" anchor="ctr" wrap="square" tIns="54864" bIns="54864"/>
+          <a:lstStyle/>
+          <a:p>
+            <a:pPr algn="ctr"/>
+            <a:r>
+              <a:rPr sz="1400" b="1">
+                <a:solidFill>
+                  <a:srgbClr val="1C3557"/>
+                </a:solidFill>
+                <a:latin typeface="Noto Sans JP"/>
+              </a:rPr>
+              <a:t>3〜4人分</a:t>
+            </a:r>
+          </a:p>
+        </p:txBody>
+      </p:sp>
+      <p:sp>
+        <p:nvSpPr>
+          <p:cNvPr id="24" name="Rectangle 23"/>
+          <p:cNvSpPr/>
+          <p:nvPr/>
+        </p:nvSpPr>
+        <p:spPr>
+          <a:xfrm>
+            <a:off x="3200400" y="3867912"/>
+            <a:ext cx="5943600" cy="640080"/>
+          </a:xfrm>
+          <a:prstGeom prst="rect">
+            <a:avLst/>
+          </a:prstGeom>
+          <a:solidFill>
+            <a:srgbClr val="F3F4F6"/>
+          </a:solidFill>
+          <a:ln>
+            <a:noFill/>
+          </a:ln>
+        </p:spPr>
+        <p:style>
+          <a:lnRef idx="1">
+            <a:schemeClr val="accent1"/>
+          </a:lnRef>
+          <a:fillRef idx="3">
+            <a:schemeClr val="accent1"/>
+          </a:fillRef>
+          <a:effectRef idx="2">
+            <a:schemeClr val="accent1"/>
+          </a:effectRef>
+          <a:fontRef idx="minor">
+            <a:schemeClr val="lt1"/>
+          </a:fontRef>
+        </p:style>
+        <p:txBody>
+          <a:bodyPr rtlCol="0" anchor="ctr" wrap="square" tIns="54864" bIns="54864"/>
+          <a:lstStyle/>
+          <a:p>
+            <a:pPr algn="l"/>
+            <a:r>
+              <a:rPr sz="1100" b="0">
+                <a:solidFill>
+                  <a:srgbClr val="1C3557"/>
+                </a:solidFill>
+                <a:latin typeface="Noto Sans JP"/>
+              </a:rPr>
+              <a:t>β版運用フィードバック反映 / プロダクト改善ループ確立</a:t>
+            </a:r>
+          </a:p>
+        </p:txBody>
+      </p:sp>
+      <p:sp>
+        <p:nvSpPr>
+          <p:cNvPr id="25" name="Rectangle 24"/>
+          <p:cNvSpPr/>
+          <p:nvPr/>
+        </p:nvSpPr>
+        <p:spPr>
+          <a:xfrm>
+            <a:off x="9189720" y="3867912"/>
+            <a:ext cx="2542032" cy="640080"/>
+          </a:xfrm>
+          <a:prstGeom prst="rect">
+            <a:avLst/>
+          </a:prstGeom>
+          <a:solidFill>
+            <a:srgbClr val="F3F4F6"/>
+          </a:solidFill>
+          <a:ln>
+            <a:noFill/>
+          </a:ln>
+        </p:spPr>
+        <p:style>
+          <a:lnRef idx="1">
+            <a:schemeClr val="accent1"/>
+          </a:lnRef>
+          <a:fillRef idx="3">
+            <a:schemeClr val="accent1"/>
+          </a:fillRef>
+          <a:effectRef idx="2">
+            <a:schemeClr val="accent1"/>
+          </a:effectRef>
+          <a:fontRef idx="minor">
+            <a:schemeClr val="lt1"/>
+          </a:fontRef>
+        </p:style>
+        <p:txBody>
+          <a:bodyPr rtlCol="0" anchor="ctr" wrap="square" tIns="54864" bIns="54864"/>
+          <a:lstStyle/>
+          <a:p>
+            <a:pPr algn="l"/>
+            <a:r>
+              <a:rPr sz="1100" b="0">
+                <a:solidFill>
+                  <a:srgbClr val="1C3557"/>
+                </a:solidFill>
+                <a:latin typeface="Noto Sans JP"/>
+              </a:rPr>
+              <a:t>連携テスト / デモ実装</a:t>
+            </a:r>
+          </a:p>
+        </p:txBody>
+      </p:sp>
+      <p:sp>
+        <p:nvSpPr>
+          <p:cNvPr id="26" name="Rectangle 25"/>
+          <p:cNvSpPr/>
+          <p:nvPr/>
+        </p:nvSpPr>
+        <p:spPr>
+          <a:xfrm>
+            <a:off x="457200" y="4462272"/>
+            <a:ext cx="1371600" cy="640080"/>
+          </a:xfrm>
+          <a:prstGeom prst="rect">
+            <a:avLst/>
+          </a:prstGeom>
+          <a:solidFill>
+            <a:srgbClr val="F3F4F6"/>
+          </a:solidFill>
+          <a:ln>
+            <a:noFill/>
+          </a:ln>
+        </p:spPr>
+        <p:style>
+          <a:lnRef idx="1">
+            <a:schemeClr val="accent1"/>
+          </a:lnRef>
+          <a:fillRef idx="3">
+            <a:schemeClr val="accent1"/>
+          </a:fillRef>
+          <a:effectRef idx="2">
+            <a:schemeClr val="accent1"/>
+          </a:effectRef>
+          <a:fontRef idx="minor">
+            <a:schemeClr val="lt1"/>
+          </a:fontRef>
+        </p:style>
+        <p:txBody>
+          <a:bodyPr rtlCol="0" anchor="ctr" wrap="square" tIns="54864" bIns="54864"/>
+          <a:lstStyle/>
+          <a:p>
+            <a:pPr algn="ctr"/>
+            <a:r>
+              <a:rPr sz="1100" b="0">
+                <a:solidFill>
+                  <a:srgbClr val="1C3557"/>
+                </a:solidFill>
+                <a:latin typeface="Noto Sans JP"/>
+              </a:rPr>
+              <a:t>8月</a:t>
+            </a:r>
+          </a:p>
+        </p:txBody>
+      </p:sp>
+      <p:sp>
+        <p:nvSpPr>
+          <p:cNvPr id="27" name="Rectangle 26"/>
+          <p:cNvSpPr/>
+          <p:nvPr/>
+        </p:nvSpPr>
+        <p:spPr>
+          <a:xfrm>
+            <a:off x="1874519" y="4462272"/>
+            <a:ext cx="1280160" cy="640080"/>
+          </a:xfrm>
+          <a:prstGeom prst="rect">
+            <a:avLst/>
+          </a:prstGeom>
+          <a:solidFill>
+            <a:srgbClr val="F3F4F6"/>
+          </a:solidFill>
+          <a:ln>
+            <a:noFill/>
+          </a:ln>
+        </p:spPr>
+        <p:style>
+          <a:lnRef idx="1">
+            <a:schemeClr val="accent1"/>
+          </a:lnRef>
+          <a:fillRef idx="3">
+            <a:schemeClr val="accent1"/>
+          </a:fillRef>
+          <a:effectRef idx="2">
+            <a:schemeClr val="accent1"/>
+          </a:effectRef>
+          <a:fontRef idx="minor">
+            <a:schemeClr val="lt1"/>
+          </a:fontRef>
+        </p:style>
+        <p:txBody>
+          <a:bodyPr rtlCol="0" anchor="ctr" wrap="square" tIns="54864" bIns="54864"/>
+          <a:lstStyle/>
+          <a:p>
+            <a:pPr algn="ctr"/>
+            <a:r>
+              <a:rPr sz="1400" b="1">
+                <a:solidFill>
+                  <a:srgbClr val="1C3557"/>
+                </a:solidFill>
+                <a:latin typeface="Noto Sans JP"/>
+              </a:rPr>
+              <a:t>4人分</a:t>
+            </a:r>
+          </a:p>
+        </p:txBody>
+      </p:sp>
+      <p:sp>
+        <p:nvSpPr>
+          <p:cNvPr id="28" name="Rectangle 27"/>
+          <p:cNvSpPr/>
+          <p:nvPr/>
+        </p:nvSpPr>
+        <p:spPr>
+          <a:xfrm>
+            <a:off x="3200400" y="4462272"/>
+            <a:ext cx="5943600" cy="640080"/>
+          </a:xfrm>
+          <a:prstGeom prst="rect">
+            <a:avLst/>
+          </a:prstGeom>
+          <a:solidFill>
+            <a:srgbClr val="F3F4F6"/>
+          </a:solidFill>
+          <a:ln>
+            <a:noFill/>
+          </a:ln>
+        </p:spPr>
+        <p:style>
+          <a:lnRef idx="1">
+            <a:schemeClr val="accent1"/>
+          </a:lnRef>
+          <a:fillRef idx="3">
+            <a:schemeClr val="accent1"/>
+          </a:fillRef>
+          <a:effectRef idx="2">
+            <a:schemeClr val="accent1"/>
+          </a:effectRef>
+          <a:fontRef idx="minor">
+            <a:schemeClr val="lt1"/>
+          </a:fontRef>
+        </p:style>
+        <p:txBody>
+          <a:bodyPr rtlCol="0" anchor="ctr" wrap="square" tIns="54864" bIns="54864"/>
+          <a:lstStyle/>
+          <a:p>
+            <a:pPr algn="l"/>
+            <a:r>
+              <a:rPr sz="1100" b="0">
+                <a:solidFill>
+                  <a:srgbClr val="1C3557"/>
+                </a:solidFill>
+                <a:latin typeface="Noto Sans JP"/>
+              </a:rPr>
+              <a:t>事務・法務AI追加(契約書/PL/利用規約自動化)</a:t>
+            </a:r>
+          </a:p>
+        </p:txBody>
+      </p:sp>
+      <p:sp>
+        <p:nvSpPr>
+          <p:cNvPr id="29" name="Rectangle 28"/>
+          <p:cNvSpPr/>
+          <p:nvPr/>
+        </p:nvSpPr>
+        <p:spPr>
+          <a:xfrm>
+            <a:off x="9189720" y="4462272"/>
+            <a:ext cx="2542032" cy="640080"/>
+          </a:xfrm>
+          <a:prstGeom prst="rect">
+            <a:avLst/>
+          </a:prstGeom>
+          <a:solidFill>
+            <a:srgbClr val="F3F4F6"/>
+          </a:solidFill>
+          <a:ln>
+            <a:noFill/>
+          </a:ln>
+        </p:spPr>
+        <p:style>
+          <a:lnRef idx="1">
+            <a:schemeClr val="accent1"/>
+          </a:lnRef>
+          <a:fillRef idx="3">
+            <a:schemeClr val="accent1"/>
+          </a:fillRef>
+          <a:effectRef idx="2">
+            <a:schemeClr val="accent1"/>
+          </a:effectRef>
+          <a:fontRef idx="minor">
+            <a:schemeClr val="lt1"/>
+          </a:fontRef>
+        </p:style>
+        <p:txBody>
+          <a:bodyPr rtlCol="0" anchor="ctr" wrap="square" tIns="54864" bIns="54864"/>
+          <a:lstStyle/>
+          <a:p>
+            <a:pPr algn="l"/>
+            <a:r>
+              <a:rPr sz="1100" b="0">
+                <a:solidFill>
+                  <a:srgbClr val="1C3557"/>
+                </a:solidFill>
+                <a:latin typeface="Noto Sans JP"/>
+              </a:rPr>
+              <a:t>5人連携リハーサル</a:t>
+            </a:r>
+          </a:p>
+        </p:txBody>
+      </p:sp>
+      <p:sp>
+        <p:nvSpPr>
+          <p:cNvPr id="30" name="Rectangle 29"/>
+          <p:cNvSpPr/>
+          <p:nvPr/>
+        </p:nvSpPr>
+        <p:spPr>
+          <a:xfrm>
+            <a:off x="457200" y="5056632"/>
+            <a:ext cx="1371600" cy="640080"/>
+          </a:xfrm>
+          <a:prstGeom prst="rect">
+            <a:avLst/>
+          </a:prstGeom>
+          <a:solidFill>
             <a:srgbClr val="2563EB"/>
           </a:solidFill>
           <a:ln>
@@ -5444,37 +6352,101 @@
           </a:fontRef>
         </p:style>
         <p:txBody>
-          <a:bodyPr rtlCol="0" anchor="ctr" wrap="square" lIns="137160" rIns="137160" tIns="73152" bIns="73152"/>
-          <a:lstStyle/>
-          <a:p>
-            <a:pPr algn="ctr"/>
-            <a:r>
-              <a:rPr sz="1800" b="1">
+          <a:bodyPr rtlCol="0" anchor="ctr" wrap="square" tIns="54864" bIns="54864"/>
+          <a:lstStyle/>
+          <a:p>
+            <a:pPr algn="ctr"/>
+            <a:r>
+              <a:rPr sz="1100" b="1">
                 <a:solidFill>
                   <a:srgbClr val="FFFFFF"/>
                 </a:solidFill>
                 <a:latin typeface="Noto Sans JP"/>
               </a:rPr>
-              <a:t>2人分</a:t>
-            </a:r>
-          </a:p>
-        </p:txBody>
-      </p:sp>
-      <p:sp>
-        <p:nvSpPr>
-          <p:cNvPr id="14" name="Rectangle 13"/>
-          <p:cNvSpPr/>
-          <p:nvPr/>
-        </p:nvSpPr>
-        <p:spPr>
-          <a:xfrm>
-            <a:off x="4663440" y="2889504"/>
-            <a:ext cx="7040880" cy="685800"/>
+              <a:t>9月末</a:t>
+            </a:r>
+          </a:p>
+          <a:p>
+            <a:pPr algn="ctr"/>
+            <a:r>
+              <a:rPr sz="1100" b="1">
+                <a:solidFill>
+                  <a:srgbClr val="FFFFFF"/>
+                </a:solidFill>
+                <a:latin typeface="Noto Sans JP"/>
+              </a:rPr>
+              <a:t>(最終)</a:t>
+            </a:r>
+          </a:p>
+        </p:txBody>
+      </p:sp>
+      <p:sp>
+        <p:nvSpPr>
+          <p:cNvPr id="31" name="Rectangle 30"/>
+          <p:cNvSpPr/>
+          <p:nvPr/>
+        </p:nvSpPr>
+        <p:spPr>
+          <a:xfrm>
+            <a:off x="1874519" y="5056632"/>
+            <a:ext cx="1280160" cy="640080"/>
           </a:xfrm>
           <a:prstGeom prst="rect">
             <a:avLst/>
           </a:prstGeom>
           <a:solidFill>
+            <a:srgbClr val="2563EB"/>
+          </a:solidFill>
+          <a:ln>
+            <a:noFill/>
+          </a:ln>
+        </p:spPr>
+        <p:style>
+          <a:lnRef idx="1">
+            <a:schemeClr val="accent1"/>
+          </a:lnRef>
+          <a:fillRef idx="3">
+            <a:schemeClr val="accent1"/>
+          </a:fillRef>
+          <a:effectRef idx="2">
+            <a:schemeClr val="accent1"/>
+          </a:effectRef>
+          <a:fontRef idx="minor">
+            <a:schemeClr val="lt1"/>
+          </a:fontRef>
+        </p:style>
+        <p:txBody>
+          <a:bodyPr rtlCol="0" anchor="ctr" wrap="square" tIns="54864" bIns="54864"/>
+          <a:lstStyle/>
+          <a:p>
+            <a:pPr algn="ctr"/>
+            <a:r>
+              <a:rPr sz="1400" b="1">
+                <a:solidFill>
+                  <a:srgbClr val="FFFFFF"/>
+                </a:solidFill>
+                <a:latin typeface="Noto Sans JP"/>
+              </a:rPr>
+              <a:t>5人分</a:t>
+            </a:r>
+          </a:p>
+        </p:txBody>
+      </p:sp>
+      <p:sp>
+        <p:nvSpPr>
+          <p:cNvPr id="32" name="Rectangle 31"/>
+          <p:cNvSpPr/>
+          <p:nvPr/>
+        </p:nvSpPr>
+        <p:spPr>
+          <a:xfrm>
+            <a:off x="3200400" y="5056632"/>
+            <a:ext cx="5943600" cy="640080"/>
+          </a:xfrm>
+          <a:prstGeom prst="rect">
+            <a:avLst/>
+          </a:prstGeom>
+          <a:solidFill>
             <a:srgbClr val="DBEAFE"/>
           </a:solidFill>
           <a:ln>
@@ -5496,380 +6468,120 @@
           </a:fontRef>
         </p:style>
         <p:txBody>
-          <a:bodyPr rtlCol="0" anchor="ctr" wrap="square" lIns="137160" rIns="137160" tIns="73152" bIns="73152"/>
+          <a:bodyPr rtlCol="0" anchor="ctr" wrap="square" tIns="54864" bIns="54864"/>
           <a:lstStyle/>
           <a:p>
             <a:pPr algn="l"/>
             <a:r>
-              <a:rPr sz="1300" b="0">
+              <a:rPr sz="1100" b="0">
                 <a:solidFill>
                   <a:srgbClr val="1C3557"/>
                 </a:solidFill>
                 <a:latin typeface="Noto Sans JP"/>
               </a:rPr>
-              <a:t>5人全員が同時進行で立ち上がり / Agent Teams 初期構築</a:t>
-            </a:r>
-          </a:p>
-        </p:txBody>
-      </p:sp>
-      <p:sp>
-        <p:nvSpPr>
-          <p:cNvPr id="15" name="Rectangle 14"/>
-          <p:cNvSpPr/>
-          <p:nvPr/>
-        </p:nvSpPr>
-        <p:spPr>
-          <a:xfrm>
-            <a:off x="457200" y="3648456"/>
-            <a:ext cx="2286000" cy="685800"/>
+              <a:t>5人フル稼働 / プロダクト × デリバリー両輪完成</a:t>
+            </a:r>
+          </a:p>
+        </p:txBody>
+      </p:sp>
+      <p:sp>
+        <p:nvSpPr>
+          <p:cNvPr id="33" name="Rectangle 32"/>
+          <p:cNvSpPr/>
+          <p:nvPr/>
+        </p:nvSpPr>
+        <p:spPr>
+          <a:xfrm>
+            <a:off x="9189720" y="5056632"/>
+            <a:ext cx="2542032" cy="640080"/>
           </a:xfrm>
           <a:prstGeom prst="rect">
             <a:avLst/>
           </a:prstGeom>
           <a:solidFill>
-            <a:srgbClr val="F3F4F6"/>
-          </a:solidFill>
-          <a:ln>
-            <a:noFill/>
-          </a:ln>
-        </p:spPr>
-        <p:style>
-          <a:lnRef idx="1">
-            <a:schemeClr val="accent1"/>
-          </a:lnRef>
-          <a:fillRef idx="3">
-            <a:schemeClr val="accent1"/>
-          </a:fillRef>
-          <a:effectRef idx="2">
-            <a:schemeClr val="accent1"/>
-          </a:effectRef>
-          <a:fontRef idx="minor">
-            <a:schemeClr val="lt1"/>
-          </a:fontRef>
-        </p:style>
-        <p:txBody>
-          <a:bodyPr rtlCol="0" anchor="ctr" wrap="square" lIns="137160" rIns="137160" tIns="73152" bIns="73152"/>
-          <a:lstStyle/>
-          <a:p>
-            <a:pPr algn="ctr"/>
-            <a:r>
-              <a:rPr sz="1400" b="0">
+            <a:srgbClr val="DBEAFE"/>
+          </a:solidFill>
+          <a:ln>
+            <a:noFill/>
+          </a:ln>
+        </p:spPr>
+        <p:style>
+          <a:lnRef idx="1">
+            <a:schemeClr val="accent1"/>
+          </a:lnRef>
+          <a:fillRef idx="3">
+            <a:schemeClr val="accent1"/>
+          </a:fillRef>
+          <a:effectRef idx="2">
+            <a:schemeClr val="accent1"/>
+          </a:effectRef>
+          <a:fontRef idx="minor">
+            <a:schemeClr val="lt1"/>
+          </a:fontRef>
+        </p:style>
+        <p:txBody>
+          <a:bodyPr rtlCol="0" anchor="ctr" wrap="square" tIns="54864" bIns="54864"/>
+          <a:lstStyle/>
+          <a:p>
+            <a:pPr algn="l"/>
+            <a:r>
+              <a:rPr sz="1100" b="0">
                 <a:solidFill>
                   <a:srgbClr val="1C3557"/>
                 </a:solidFill>
                 <a:latin typeface="Noto Sans JP"/>
               </a:rPr>
-              <a:t>7-8月</a:t>
-            </a:r>
-          </a:p>
-        </p:txBody>
-      </p:sp>
-      <p:sp>
-        <p:nvSpPr>
-          <p:cNvPr id="16" name="Rectangle 15"/>
-          <p:cNvSpPr/>
-          <p:nvPr/>
-        </p:nvSpPr>
-        <p:spPr>
-          <a:xfrm>
-            <a:off x="2788920" y="3648456"/>
-            <a:ext cx="1828800" cy="685800"/>
+              <a:t>5人協働で事業を動かす</a:t>
+            </a:r>
+          </a:p>
+        </p:txBody>
+      </p:sp>
+      <p:sp>
+        <p:nvSpPr>
+          <p:cNvPr id="34" name="Rectangle 33"/>
+          <p:cNvSpPr/>
+          <p:nvPr/>
+        </p:nvSpPr>
+        <p:spPr>
+          <a:xfrm>
+            <a:off x="457200" y="6263640"/>
+            <a:ext cx="11274552" cy="411480"/>
           </a:xfrm>
           <a:prstGeom prst="rect">
             <a:avLst/>
           </a:prstGeom>
-          <a:solidFill>
-            <a:srgbClr val="F3F4F6"/>
-          </a:solidFill>
-          <a:ln>
-            <a:noFill/>
-          </a:ln>
-        </p:spPr>
-        <p:style>
-          <a:lnRef idx="1">
-            <a:schemeClr val="accent1"/>
-          </a:lnRef>
-          <a:fillRef idx="3">
-            <a:schemeClr val="accent1"/>
-          </a:fillRef>
-          <a:effectRef idx="2">
-            <a:schemeClr val="accent1"/>
-          </a:effectRef>
-          <a:fontRef idx="minor">
-            <a:schemeClr val="lt1"/>
-          </a:fontRef>
-        </p:style>
-        <p:txBody>
-          <a:bodyPr rtlCol="0" anchor="ctr" wrap="square" lIns="137160" rIns="137160" tIns="73152" bIns="73152"/>
-          <a:lstStyle/>
-          <a:p>
-            <a:pPr algn="ctr"/>
-            <a:r>
-              <a:rPr sz="1800" b="1">
-                <a:solidFill>
-                  <a:srgbClr val="1C3557"/>
-                </a:solidFill>
-                <a:latin typeface="Noto Sans JP"/>
-              </a:rPr>
-              <a:t>3〜4人分</a:t>
-            </a:r>
-          </a:p>
-        </p:txBody>
-      </p:sp>
-      <p:sp>
-        <p:nvSpPr>
-          <p:cNvPr id="17" name="Rectangle 16"/>
-          <p:cNvSpPr/>
-          <p:nvPr/>
-        </p:nvSpPr>
-        <p:spPr>
-          <a:xfrm>
-            <a:off x="4663440" y="3648456"/>
-            <a:ext cx="7040880" cy="685800"/>
-          </a:xfrm>
-          <a:prstGeom prst="rect">
-            <a:avLst/>
-          </a:prstGeom>
-          <a:solidFill>
-            <a:srgbClr val="F3F4F6"/>
-          </a:solidFill>
-          <a:ln>
-            <a:noFill/>
-          </a:ln>
-        </p:spPr>
-        <p:style>
-          <a:lnRef idx="1">
-            <a:schemeClr val="accent1"/>
-          </a:lnRef>
-          <a:fillRef idx="3">
-            <a:schemeClr val="accent1"/>
-          </a:fillRef>
-          <a:effectRef idx="2">
-            <a:schemeClr val="accent1"/>
-          </a:effectRef>
-          <a:fontRef idx="minor">
-            <a:schemeClr val="lt1"/>
-          </a:fontRef>
-        </p:style>
-        <p:txBody>
-          <a:bodyPr rtlCol="0" anchor="ctr" wrap="square" lIns="137160" rIns="137160" tIns="73152" bIns="73152"/>
-          <a:lstStyle/>
-          <a:p>
-            <a:pPr algn="l"/>
-            <a:r>
-              <a:rPr sz="1300" b="0">
-                <a:solidFill>
-                  <a:srgbClr val="1C3557"/>
-                </a:solidFill>
-                <a:latin typeface="Noto Sans JP"/>
-              </a:rPr>
-              <a:t>各領域で深化 / Agent Teams 連携テスト</a:t>
-            </a:r>
-          </a:p>
-        </p:txBody>
-      </p:sp>
-      <p:sp>
-        <p:nvSpPr>
-          <p:cNvPr id="18" name="Rectangle 17"/>
-          <p:cNvSpPr/>
-          <p:nvPr/>
-        </p:nvSpPr>
-        <p:spPr>
-          <a:xfrm>
-            <a:off x="457200" y="4407408"/>
-            <a:ext cx="2286000" cy="685800"/>
-          </a:xfrm>
-          <a:prstGeom prst="rect">
-            <a:avLst/>
-          </a:prstGeom>
-          <a:solidFill>
-            <a:srgbClr val="2563EB"/>
-          </a:solidFill>
-          <a:ln>
-            <a:noFill/>
-          </a:ln>
-        </p:spPr>
-        <p:style>
-          <a:lnRef idx="1">
-            <a:schemeClr val="accent1"/>
-          </a:lnRef>
-          <a:fillRef idx="3">
-            <a:schemeClr val="accent1"/>
-          </a:fillRef>
-          <a:effectRef idx="2">
-            <a:schemeClr val="accent1"/>
-          </a:effectRef>
-          <a:fontRef idx="minor">
-            <a:schemeClr val="lt1"/>
-          </a:fontRef>
-        </p:style>
-        <p:txBody>
-          <a:bodyPr rtlCol="0" anchor="ctr" wrap="square" lIns="137160" rIns="137160" tIns="73152" bIns="73152"/>
+          <a:noFill/>
+          <a:ln>
+            <a:noFill/>
+          </a:ln>
+        </p:spPr>
+        <p:style>
+          <a:lnRef idx="1">
+            <a:schemeClr val="accent1"/>
+          </a:lnRef>
+          <a:fillRef idx="3">
+            <a:schemeClr val="accent1"/>
+          </a:fillRef>
+          <a:effectRef idx="2">
+            <a:schemeClr val="accent1"/>
+          </a:effectRef>
+          <a:fontRef idx="minor">
+            <a:schemeClr val="lt1"/>
+          </a:fontRef>
+        </p:style>
+        <p:txBody>
+          <a:bodyPr rtlCol="0" anchor="ctr" wrap="square" tIns="54864" bIns="54864"/>
           <a:lstStyle/>
           <a:p>
             <a:pPr algn="ctr"/>
             <a:r>
               <a:rPr sz="1400" b="1">
                 <a:solidFill>
-                  <a:srgbClr val="FFFFFF"/>
-                </a:solidFill>
-                <a:latin typeface="Noto Sans JP"/>
-              </a:rPr>
-              <a:t>9月末 (最終)</a:t>
-            </a:r>
-          </a:p>
-        </p:txBody>
-      </p:sp>
-      <p:sp>
-        <p:nvSpPr>
-          <p:cNvPr id="19" name="Rectangle 18"/>
-          <p:cNvSpPr/>
-          <p:nvPr/>
-        </p:nvSpPr>
-        <p:spPr>
-          <a:xfrm>
-            <a:off x="2788920" y="4407408"/>
-            <a:ext cx="1828800" cy="685800"/>
-          </a:xfrm>
-          <a:prstGeom prst="rect">
-            <a:avLst/>
-          </a:prstGeom>
-          <a:solidFill>
-            <a:srgbClr val="2563EB"/>
-          </a:solidFill>
-          <a:ln>
-            <a:noFill/>
-          </a:ln>
-        </p:spPr>
-        <p:style>
-          <a:lnRef idx="1">
-            <a:schemeClr val="accent1"/>
-          </a:lnRef>
-          <a:fillRef idx="3">
-            <a:schemeClr val="accent1"/>
-          </a:fillRef>
-          <a:effectRef idx="2">
-            <a:schemeClr val="accent1"/>
-          </a:effectRef>
-          <a:fontRef idx="minor">
-            <a:schemeClr val="lt1"/>
-          </a:fontRef>
-        </p:style>
-        <p:txBody>
-          <a:bodyPr rtlCol="0" anchor="ctr" wrap="square" lIns="137160" rIns="137160" tIns="73152" bIns="73152"/>
-          <a:lstStyle/>
-          <a:p>
-            <a:pPr algn="ctr"/>
-            <a:r>
-              <a:rPr sz="1800" b="1">
-                <a:solidFill>
-                  <a:srgbClr val="FFFFFF"/>
-                </a:solidFill>
-                <a:latin typeface="Noto Sans JP"/>
-              </a:rPr>
-              <a:t>5人分</a:t>
-            </a:r>
-          </a:p>
-        </p:txBody>
-      </p:sp>
-      <p:sp>
-        <p:nvSpPr>
-          <p:cNvPr id="20" name="Rectangle 19"/>
-          <p:cNvSpPr/>
-          <p:nvPr/>
-        </p:nvSpPr>
-        <p:spPr>
-          <a:xfrm>
-            <a:off x="4663440" y="4407408"/>
-            <a:ext cx="7040880" cy="685800"/>
-          </a:xfrm>
-          <a:prstGeom prst="rect">
-            <a:avLst/>
-          </a:prstGeom>
-          <a:solidFill>
-            <a:srgbClr val="DBEAFE"/>
-          </a:solidFill>
-          <a:ln>
-            <a:noFill/>
-          </a:ln>
-        </p:spPr>
-        <p:style>
-          <a:lnRef idx="1">
-            <a:schemeClr val="accent1"/>
-          </a:lnRef>
-          <a:fillRef idx="3">
-            <a:schemeClr val="accent1"/>
-          </a:fillRef>
-          <a:effectRef idx="2">
-            <a:schemeClr val="accent1"/>
-          </a:effectRef>
-          <a:fontRef idx="minor">
-            <a:schemeClr val="lt1"/>
-          </a:fontRef>
-        </p:style>
-        <p:txBody>
-          <a:bodyPr rtlCol="0" anchor="ctr" wrap="square" lIns="137160" rIns="137160" tIns="73152" bIns="73152"/>
-          <a:lstStyle/>
-          <a:p>
-            <a:pPr algn="l"/>
-            <a:r>
-              <a:rPr sz="1300" b="0">
-                <a:solidFill>
-                  <a:srgbClr val="1C3557"/>
-                </a:solidFill>
-                <a:latin typeface="Noto Sans JP"/>
-              </a:rPr>
-              <a:t>5人フル稼働 + Agent Teams で協働</a:t>
-            </a:r>
-          </a:p>
-        </p:txBody>
-      </p:sp>
-      <p:sp>
-        <p:nvSpPr>
-          <p:cNvPr id="21" name="Rectangle 20"/>
-          <p:cNvSpPr/>
-          <p:nvPr/>
-        </p:nvSpPr>
-        <p:spPr>
-          <a:xfrm>
-            <a:off x="457200" y="5760720"/>
-            <a:ext cx="11274552" cy="731520"/>
-          </a:xfrm>
-          <a:prstGeom prst="rect">
-            <a:avLst/>
-          </a:prstGeom>
-          <a:noFill/>
-          <a:ln>
-            <a:noFill/>
-          </a:ln>
-        </p:spPr>
-        <p:style>
-          <a:lnRef idx="1">
-            <a:schemeClr val="accent1"/>
-          </a:lnRef>
-          <a:fillRef idx="3">
-            <a:schemeClr val="accent1"/>
-          </a:fillRef>
-          <a:effectRef idx="2">
-            <a:schemeClr val="accent1"/>
-          </a:effectRef>
-          <a:fontRef idx="minor">
-            <a:schemeClr val="lt1"/>
-          </a:fontRef>
-        </p:style>
-        <p:txBody>
-          <a:bodyPr rtlCol="0" anchor="ctr" wrap="square" lIns="137160" rIns="137160" tIns="73152" bIns="73152"/>
-          <a:lstStyle/>
-          <a:p>
-            <a:pPr algn="ctr"/>
-            <a:r>
-              <a:rPr sz="2000" b="1">
-                <a:solidFill>
                   <a:srgbClr val="2563EB"/>
                 </a:solidFill>
                 <a:latin typeface="Noto Sans JP"/>
               </a:rPr>
-              <a:t>5人を網羅的に同時進行で育てる</a:t>
+              <a:t>5人を網羅的に同時進行で育てる + Agent Teamsを並走で構築する</a:t>
             </a:r>
           </a:p>
         </p:txBody>
@@ -6098,7 +6810,7 @@
           </a:fontRef>
         </p:style>
         <p:txBody>
-          <a:bodyPr rtlCol="0" anchor="ctr" wrap="square" lIns="137160" rIns="137160" tIns="73152" bIns="73152"/>
+          <a:bodyPr rtlCol="0" anchor="ctr" wrap="square" tIns="54864" bIns="54864"/>
           <a:lstStyle/>
           <a:p>
             <a:pPr algn="ctr"/>
@@ -6148,7 +6860,7 @@
           </a:fontRef>
         </p:style>
         <p:txBody>
-          <a:bodyPr rtlCol="0" anchor="ctr" wrap="square" lIns="137160" rIns="137160" tIns="73152" bIns="73152"/>
+          <a:bodyPr rtlCol="0" anchor="ctr" wrap="square" tIns="54864" bIns="54864"/>
           <a:lstStyle/>
           <a:p>
             <a:pPr algn="ctr"/>
@@ -6241,7 +6953,7 @@
           </a:fontRef>
         </p:style>
         <p:txBody>
-          <a:bodyPr rtlCol="0" anchor="ctr" wrap="square" lIns="137160" rIns="137160" tIns="73152" bIns="73152"/>
+          <a:bodyPr rtlCol="0" anchor="ctr" wrap="square" tIns="54864" bIns="54864"/>
           <a:lstStyle/>
           <a:p>
             <a:pPr algn="ctr"/>
@@ -6295,7 +7007,7 @@
           </a:fontRef>
         </p:style>
         <p:txBody>
-          <a:bodyPr rtlCol="0" anchor="ctr" wrap="square" lIns="137160" rIns="137160" tIns="73152" bIns="73152"/>
+          <a:bodyPr rtlCol="0" anchor="ctr" wrap="square" tIns="54864" bIns="54864"/>
           <a:lstStyle/>
           <a:p>
             <a:pPr algn="ctr"/>
@@ -6349,7 +7061,7 @@
           </a:fontRef>
         </p:style>
         <p:txBody>
-          <a:bodyPr rtlCol="0" anchor="ctr" wrap="square" lIns="137160" rIns="137160" tIns="73152" bIns="73152"/>
+          <a:bodyPr rtlCol="0" anchor="ctr" wrap="square" tIns="54864" bIns="54864"/>
           <a:lstStyle/>
           <a:p>
             <a:pPr algn="ctr"/>
@@ -6403,7 +7115,7 @@
           </a:fontRef>
         </p:style>
         <p:txBody>
-          <a:bodyPr rtlCol="0" anchor="ctr" wrap="square" lIns="137160" rIns="137160" tIns="73152" bIns="73152"/>
+          <a:bodyPr rtlCol="0" anchor="ctr" wrap="square" tIns="54864" bIns="54864"/>
           <a:lstStyle/>
           <a:p>
             <a:pPr algn="ctr"/>
@@ -6457,7 +7169,7 @@
           </a:fontRef>
         </p:style>
         <p:txBody>
-          <a:bodyPr rtlCol="0" anchor="ctr" wrap="square" lIns="137160" rIns="137160" tIns="73152" bIns="73152"/>
+          <a:bodyPr rtlCol="0" anchor="ctr" wrap="square" tIns="54864" bIns="54864"/>
           <a:lstStyle/>
           <a:p>
             <a:pPr algn="ctr"/>
@@ -6507,7 +7219,7 @@
           </a:fontRef>
         </p:style>
         <p:txBody>
-          <a:bodyPr rtlCol="0" anchor="t" wrap="square" lIns="137160" rIns="137160" tIns="73152" bIns="73152"/>
+          <a:bodyPr rtlCol="0" anchor="t" wrap="square" tIns="54864" bIns="54864"/>
           <a:lstStyle/>
           <a:p>
             <a:pPr algn="r"/>
@@ -6618,7 +7330,7 @@
           </a:fontRef>
         </p:style>
         <p:txBody>
-          <a:bodyPr rtlCol="0" anchor="t" wrap="square" lIns="137160" rIns="137160" tIns="73152" bIns="73152"/>
+          <a:bodyPr rtlCol="0" anchor="t" wrap="square" tIns="54864" bIns="54864"/>
           <a:lstStyle/>
           <a:p>
             <a:pPr algn="ctr"/>
@@ -6711,7 +7423,7 @@
           </a:fontRef>
         </p:style>
         <p:txBody>
-          <a:bodyPr rtlCol="0" anchor="ctr" wrap="square" lIns="137160" rIns="137160" tIns="73152" bIns="73152"/>
+          <a:bodyPr rtlCol="0" anchor="ctr" wrap="square" tIns="54864" bIns="54864"/>
           <a:lstStyle/>
           <a:p>
             <a:pPr algn="ctr"/>
@@ -6761,7 +7473,7 @@
           </a:fontRef>
         </p:style>
         <p:txBody>
-          <a:bodyPr rtlCol="0" anchor="ctr" wrap="square" lIns="137160" rIns="137160" tIns="73152" bIns="73152"/>
+          <a:bodyPr rtlCol="0" anchor="ctr" wrap="square" tIns="54864" bIns="54864"/>
           <a:lstStyle/>
           <a:p>
             <a:pPr algn="ctr"/>
@@ -6815,7 +7527,7 @@
           </a:fontRef>
         </p:style>
         <p:txBody>
-          <a:bodyPr rtlCol="0" anchor="t" wrap="square" lIns="137160" rIns="137160" tIns="73152" bIns="73152"/>
+          <a:bodyPr rtlCol="0" anchor="t" wrap="square" tIns="54864" bIns="54864"/>
           <a:lstStyle/>
           <a:p>
             <a:pPr algn="ctr"/>
@@ -6865,7 +7577,7 @@
           </a:fontRef>
         </p:style>
         <p:txBody>
-          <a:bodyPr rtlCol="0" anchor="ctr" wrap="square" lIns="137160" rIns="137160" tIns="73152" bIns="73152"/>
+          <a:bodyPr rtlCol="0" anchor="ctr" wrap="square" tIns="54864" bIns="54864"/>
           <a:lstStyle/>
           <a:p>
             <a:pPr algn="ctr"/>
@@ -6974,7 +7686,7 @@
           </a:fontRef>
         </p:style>
         <p:txBody>
-          <a:bodyPr rtlCol="0" anchor="t" wrap="square" lIns="137160" rIns="137160" tIns="73152" bIns="73152"/>
+          <a:bodyPr rtlCol="0" anchor="t" wrap="square" tIns="54864" bIns="54864"/>
           <a:lstStyle/>
           <a:p>
             <a:pPr algn="ctr"/>
@@ -7024,7 +7736,7 @@
           </a:fontRef>
         </p:style>
         <p:txBody>
-          <a:bodyPr rtlCol="0" anchor="ctr" wrap="square" lIns="137160" rIns="137160" tIns="73152" bIns="73152"/>
+          <a:bodyPr rtlCol="0" anchor="ctr" wrap="square" tIns="54864" bIns="54864"/>
           <a:lstStyle/>
           <a:p>
             <a:pPr algn="ctr"/>
@@ -7086,7 +7798,7 @@
           </a:fontRef>
         </p:style>
         <p:txBody>
-          <a:bodyPr rtlCol="0" anchor="t" wrap="square" lIns="137160" rIns="137160" tIns="73152" bIns="73152"/>
+          <a:bodyPr rtlCol="0" anchor="t" wrap="square" tIns="54864" bIns="54864"/>
           <a:lstStyle/>
           <a:p>
             <a:pPr algn="r"/>
@@ -7197,7 +7909,7 @@
           </a:fontRef>
         </p:style>
         <p:txBody>
-          <a:bodyPr rtlCol="0" anchor="t" wrap="square" lIns="137160" rIns="137160" tIns="73152" bIns="73152"/>
+          <a:bodyPr rtlCol="0" anchor="t" wrap="square" tIns="54864" bIns="54864"/>
           <a:lstStyle/>
           <a:p>
             <a:pPr algn="r"/>
@@ -7247,7 +7959,7 @@
           </a:fontRef>
         </p:style>
         <p:txBody>
-          <a:bodyPr rtlCol="0" anchor="t" wrap="square" lIns="137160" rIns="137160" tIns="73152" bIns="73152"/>
+          <a:bodyPr rtlCol="0" anchor="t" wrap="square" tIns="54864" bIns="54864"/>
           <a:lstStyle/>
           <a:p>
             <a:pPr algn="l"/>
@@ -7258,7 +7970,7 @@
                 </a:solidFill>
                 <a:latin typeface="Noto Sans JP"/>
               </a:rPr>
-              <a:t>Kawaru事業部の現状</a:t>
+              <a:t>Kawaru事業部の現状：4サービスを2人体制で動かしている</a:t>
             </a:r>
           </a:p>
         </p:txBody>
@@ -7308,64 +8020,14 @@
       </p:sp>
       <p:sp>
         <p:nvSpPr>
-          <p:cNvPr id="6" name="Rectangle 5"/>
-          <p:cNvSpPr/>
-          <p:nvPr/>
-        </p:nvSpPr>
-        <p:spPr>
-          <a:xfrm>
-            <a:off x="457200" y="1554480"/>
-            <a:ext cx="5303520" cy="548640"/>
-          </a:xfrm>
-          <a:prstGeom prst="rect">
-            <a:avLst/>
-          </a:prstGeom>
-          <a:noFill/>
-          <a:ln>
-            <a:noFill/>
-          </a:ln>
-        </p:spPr>
-        <p:style>
-          <a:lnRef idx="1">
-            <a:schemeClr val="accent1"/>
-          </a:lnRef>
-          <a:fillRef idx="3">
-            <a:schemeClr val="accent1"/>
-          </a:fillRef>
-          <a:effectRef idx="2">
-            <a:schemeClr val="accent1"/>
-          </a:effectRef>
-          <a:fontRef idx="minor">
-            <a:schemeClr val="lt1"/>
-          </a:fontRef>
-        </p:style>
-        <p:txBody>
-          <a:bodyPr rtlCol="0" anchor="t" wrap="square" lIns="137160" rIns="137160" tIns="73152" bIns="73152"/>
-          <a:lstStyle/>
-          <a:p>
-            <a:pPr algn="ctr"/>
-            <a:r>
-              <a:rPr sz="1600" b="1">
-                <a:solidFill>
-                  <a:srgbClr val="6B7280"/>
-                </a:solidFill>
-                <a:latin typeface="Noto Sans JP"/>
-              </a:rPr>
-              <a:t>体制</a:t>
-            </a:r>
-          </a:p>
-        </p:txBody>
-      </p:sp>
-      <p:sp>
-        <p:nvSpPr>
-          <p:cNvPr id="7" name="Rounded Rectangle 6"/>
-          <p:cNvSpPr/>
-          <p:nvPr/>
-        </p:nvSpPr>
-        <p:spPr>
-          <a:xfrm>
-            <a:off x="914400" y="2286000"/>
-            <a:ext cx="2103120" cy="1371600"/>
+          <p:cNvPr id="6" name="Rounded Rectangle 5"/>
+          <p:cNvSpPr/>
+          <p:nvPr/>
+        </p:nvSpPr>
+        <p:spPr>
+          <a:xfrm>
+            <a:off x="457200" y="1463040"/>
+            <a:ext cx="2743200" cy="1463040"/>
           </a:xfrm>
           <a:prstGeom prst="roundRect">
             <a:avLst>
@@ -7373,53 +8035,53 @@
             </a:avLst>
           </a:prstGeom>
           <a:solidFill>
-            <a:srgbClr val="1C3557"/>
-          </a:solidFill>
-          <a:ln>
-            <a:noFill/>
-          </a:ln>
-        </p:spPr>
-        <p:style>
-          <a:lnRef idx="1">
-            <a:schemeClr val="accent1"/>
-          </a:lnRef>
-          <a:fillRef idx="3">
-            <a:schemeClr val="accent1"/>
-          </a:fillRef>
-          <a:effectRef idx="2">
-            <a:schemeClr val="accent1"/>
-          </a:effectRef>
-          <a:fontRef idx="minor">
-            <a:schemeClr val="lt1"/>
-          </a:fontRef>
-        </p:style>
-        <p:txBody>
-          <a:bodyPr rtlCol="0" anchor="ctr" wrap="square" lIns="137160" rIns="137160" tIns="73152" bIns="73152"/>
-          <a:lstStyle/>
-          <a:p>
-            <a:pPr algn="ctr"/>
-            <a:r>
-              <a:rPr sz="2600" b="1">
+            <a:srgbClr val="2563EB"/>
+          </a:solidFill>
+          <a:ln>
+            <a:noFill/>
+          </a:ln>
+        </p:spPr>
+        <p:style>
+          <a:lnRef idx="1">
+            <a:schemeClr val="accent1"/>
+          </a:lnRef>
+          <a:fillRef idx="3">
+            <a:schemeClr val="accent1"/>
+          </a:fillRef>
+          <a:effectRef idx="2">
+            <a:schemeClr val="accent1"/>
+          </a:effectRef>
+          <a:fontRef idx="minor">
+            <a:schemeClr val="lt1"/>
+          </a:fontRef>
+        </p:style>
+        <p:txBody>
+          <a:bodyPr rtlCol="0" anchor="ctr" wrap="square" tIns="54864" bIns="54864"/>
+          <a:lstStyle/>
+          <a:p>
+            <a:pPr algn="ctr"/>
+            <a:r>
+              <a:rPr sz="2400" b="1">
                 <a:solidFill>
                   <a:srgbClr val="FFFFFF"/>
                 </a:solidFill>
                 <a:latin typeface="Noto Sans JP"/>
               </a:rPr>
-              <a:t>髙橋</a:t>
-            </a:r>
-          </a:p>
-        </p:txBody>
-      </p:sp>
-      <p:sp>
-        <p:nvSpPr>
-          <p:cNvPr id="8" name="Rounded Rectangle 7"/>
-          <p:cNvSpPr/>
-          <p:nvPr/>
-        </p:nvSpPr>
-        <p:spPr>
-          <a:xfrm>
-            <a:off x="3200400" y="2286000"/>
-            <a:ext cx="2103120" cy="1371600"/>
+              <a:t>Kawaru</a:t>
+            </a:r>
+          </a:p>
+        </p:txBody>
+      </p:sp>
+      <p:sp>
+        <p:nvSpPr>
+          <p:cNvPr id="7" name="Rounded Rectangle 6"/>
+          <p:cNvSpPr/>
+          <p:nvPr/>
+        </p:nvSpPr>
+        <p:spPr>
+          <a:xfrm>
+            <a:off x="3246120" y="1463040"/>
+            <a:ext cx="2743200" cy="1463040"/>
           </a:xfrm>
           <a:prstGeom prst="roundRect">
             <a:avLst>
@@ -7427,253 +8089,53 @@
             </a:avLst>
           </a:prstGeom>
           <a:solidFill>
-            <a:srgbClr val="2563EB"/>
-          </a:solidFill>
-          <a:ln>
-            <a:noFill/>
-          </a:ln>
-        </p:spPr>
-        <p:style>
-          <a:lnRef idx="1">
-            <a:schemeClr val="accent1"/>
-          </a:lnRef>
-          <a:fillRef idx="3">
-            <a:schemeClr val="accent1"/>
-          </a:fillRef>
-          <a:effectRef idx="2">
-            <a:schemeClr val="accent1"/>
-          </a:effectRef>
-          <a:fontRef idx="minor">
-            <a:schemeClr val="lt1"/>
-          </a:fontRef>
-        </p:style>
-        <p:txBody>
-          <a:bodyPr rtlCol="0" anchor="ctr" wrap="square" lIns="137160" rIns="137160" tIns="73152" bIns="73152"/>
-          <a:lstStyle/>
-          <a:p>
-            <a:pPr algn="ctr"/>
-            <a:r>
-              <a:rPr sz="2600" b="1">
+            <a:srgbClr val="FF6600"/>
+          </a:solidFill>
+          <a:ln>
+            <a:noFill/>
+          </a:ln>
+        </p:spPr>
+        <p:style>
+          <a:lnRef idx="1">
+            <a:schemeClr val="accent1"/>
+          </a:lnRef>
+          <a:fillRef idx="3">
+            <a:schemeClr val="accent1"/>
+          </a:fillRef>
+          <a:effectRef idx="2">
+            <a:schemeClr val="accent1"/>
+          </a:effectRef>
+          <a:fontRef idx="minor">
+            <a:schemeClr val="lt1"/>
+          </a:fontRef>
+        </p:style>
+        <p:txBody>
+          <a:bodyPr rtlCol="0" anchor="ctr" wrap="square" tIns="54864" bIns="54864"/>
+          <a:lstStyle/>
+          <a:p>
+            <a:pPr algn="ctr"/>
+            <a:r>
+              <a:rPr sz="2400" b="1">
                 <a:solidFill>
                   <a:srgbClr val="FFFFFF"/>
                 </a:solidFill>
                 <a:latin typeface="Noto Sans JP"/>
               </a:rPr>
-              <a:t>大川</a:t>
-            </a:r>
-          </a:p>
-        </p:txBody>
-      </p:sp>
-      <p:sp>
-        <p:nvSpPr>
-          <p:cNvPr id="9" name="Rectangle 8"/>
-          <p:cNvSpPr/>
-          <p:nvPr/>
-        </p:nvSpPr>
-        <p:spPr>
-          <a:xfrm>
-            <a:off x="457200" y="3931920"/>
-            <a:ext cx="5303520" cy="1371600"/>
-          </a:xfrm>
-          <a:prstGeom prst="rect">
-            <a:avLst/>
-          </a:prstGeom>
-          <a:noFill/>
-          <a:ln>
-            <a:noFill/>
-          </a:ln>
-        </p:spPr>
-        <p:style>
-          <a:lnRef idx="1">
-            <a:schemeClr val="accent1"/>
-          </a:lnRef>
-          <a:fillRef idx="3">
-            <a:schemeClr val="accent1"/>
-          </a:fillRef>
-          <a:effectRef idx="2">
-            <a:schemeClr val="accent1"/>
-          </a:effectRef>
-          <a:fontRef idx="minor">
-            <a:schemeClr val="lt1"/>
-          </a:fontRef>
-        </p:style>
-        <p:txBody>
-          <a:bodyPr rtlCol="0" anchor="ctr" wrap="square" lIns="137160" rIns="137160" tIns="73152" bIns="73152"/>
-          <a:lstStyle/>
-          <a:p>
-            <a:pPr algn="ctr"/>
-            <a:r>
-              <a:rPr sz="7200" b="1">
-                <a:solidFill>
-                  <a:srgbClr val="2563EB"/>
-                </a:solidFill>
-                <a:latin typeface="Noto Sans JP"/>
-              </a:rPr>
-              <a:t>2人</a:t>
-            </a:r>
-          </a:p>
-        </p:txBody>
-      </p:sp>
-      <p:sp>
-        <p:nvSpPr>
-          <p:cNvPr id="10" name="Rectangle 9"/>
-          <p:cNvSpPr/>
-          <p:nvPr/>
-        </p:nvSpPr>
-        <p:spPr>
-          <a:xfrm>
-            <a:off x="457200" y="5303520"/>
-            <a:ext cx="5303520" cy="457200"/>
-          </a:xfrm>
-          <a:prstGeom prst="rect">
-            <a:avLst/>
-          </a:prstGeom>
-          <a:noFill/>
-          <a:ln>
-            <a:noFill/>
-          </a:ln>
-        </p:spPr>
-        <p:style>
-          <a:lnRef idx="1">
-            <a:schemeClr val="accent1"/>
-          </a:lnRef>
-          <a:fillRef idx="3">
-            <a:schemeClr val="accent1"/>
-          </a:fillRef>
-          <a:effectRef idx="2">
-            <a:schemeClr val="accent1"/>
-          </a:effectRef>
-          <a:fontRef idx="minor">
-            <a:schemeClr val="lt1"/>
-          </a:fontRef>
-        </p:style>
-        <p:txBody>
-          <a:bodyPr rtlCol="0" anchor="t" wrap="square" lIns="137160" rIns="137160" tIns="73152" bIns="73152"/>
-          <a:lstStyle/>
-          <a:p>
-            <a:pPr algn="ctr"/>
-            <a:r>
-              <a:rPr sz="1400" b="0">
-                <a:solidFill>
-                  <a:srgbClr val="6B7280"/>
-                </a:solidFill>
-                <a:latin typeface="Noto Sans JP"/>
-              </a:rPr>
-              <a:t>フルコミットメンバー</a:t>
-            </a:r>
-          </a:p>
-        </p:txBody>
-      </p:sp>
-      <p:sp>
-        <p:nvSpPr>
-          <p:cNvPr id="11" name="Rectangle 10"/>
-          <p:cNvSpPr/>
-          <p:nvPr/>
-        </p:nvSpPr>
-        <p:spPr>
-          <a:xfrm>
-            <a:off x="5760720" y="3017520"/>
-            <a:ext cx="731520" cy="731520"/>
-          </a:xfrm>
-          <a:prstGeom prst="rect">
-            <a:avLst/>
-          </a:prstGeom>
-          <a:noFill/>
-          <a:ln>
-            <a:noFill/>
-          </a:ln>
-        </p:spPr>
-        <p:style>
-          <a:lnRef idx="1">
-            <a:schemeClr val="accent1"/>
-          </a:lnRef>
-          <a:fillRef idx="3">
-            <a:schemeClr val="accent1"/>
-          </a:fillRef>
-          <a:effectRef idx="2">
-            <a:schemeClr val="accent1"/>
-          </a:effectRef>
-          <a:fontRef idx="minor">
-            <a:schemeClr val="lt1"/>
-          </a:fontRef>
-        </p:style>
-        <p:txBody>
-          <a:bodyPr rtlCol="0" anchor="ctr" wrap="square" lIns="137160" rIns="137160" tIns="73152" bIns="73152"/>
-          <a:lstStyle/>
-          <a:p>
-            <a:pPr algn="ctr"/>
-            <a:r>
-              <a:rPr sz="3600" b="1">
-                <a:solidFill>
-                  <a:srgbClr val="6B7280"/>
-                </a:solidFill>
-                <a:latin typeface="Noto Sans JP"/>
-              </a:rPr>
-              <a:t>×</a:t>
-            </a:r>
-          </a:p>
-        </p:txBody>
-      </p:sp>
-      <p:sp>
-        <p:nvSpPr>
-          <p:cNvPr id="12" name="Rectangle 11"/>
-          <p:cNvSpPr/>
-          <p:nvPr/>
-        </p:nvSpPr>
-        <p:spPr>
-          <a:xfrm>
-            <a:off x="6583680" y="1554480"/>
-            <a:ext cx="5120640" cy="548640"/>
-          </a:xfrm>
-          <a:prstGeom prst="rect">
-            <a:avLst/>
-          </a:prstGeom>
-          <a:noFill/>
-          <a:ln>
-            <a:noFill/>
-          </a:ln>
-        </p:spPr>
-        <p:style>
-          <a:lnRef idx="1">
-            <a:schemeClr val="accent1"/>
-          </a:lnRef>
-          <a:fillRef idx="3">
-            <a:schemeClr val="accent1"/>
-          </a:fillRef>
-          <a:effectRef idx="2">
-            <a:schemeClr val="accent1"/>
-          </a:effectRef>
-          <a:fontRef idx="minor">
-            <a:schemeClr val="lt1"/>
-          </a:fontRef>
-        </p:style>
-        <p:txBody>
-          <a:bodyPr rtlCol="0" anchor="t" wrap="square" lIns="137160" rIns="137160" tIns="73152" bIns="73152"/>
-          <a:lstStyle/>
-          <a:p>
-            <a:pPr algn="ctr"/>
-            <a:r>
-              <a:rPr sz="1600" b="1">
-                <a:solidFill>
-                  <a:srgbClr val="6B7280"/>
-                </a:solidFill>
-                <a:latin typeface="Noto Sans JP"/>
-              </a:rPr>
-              <a:t>サービス</a:t>
-            </a:r>
-          </a:p>
-        </p:txBody>
-      </p:sp>
-      <p:sp>
-        <p:nvSpPr>
-          <p:cNvPr id="13" name="Rounded Rectangle 12"/>
-          <p:cNvSpPr/>
-          <p:nvPr/>
-        </p:nvSpPr>
-        <p:spPr>
-          <a:xfrm>
-            <a:off x="6766560" y="2286000"/>
-            <a:ext cx="2377440" cy="914400"/>
+              <a:t>Kawaru Team</a:t>
+            </a:r>
+          </a:p>
+        </p:txBody>
+      </p:sp>
+      <p:sp>
+        <p:nvSpPr>
+          <p:cNvPr id="8" name="Rounded Rectangle 7"/>
+          <p:cNvSpPr/>
+          <p:nvPr/>
+        </p:nvSpPr>
+        <p:spPr>
+          <a:xfrm>
+            <a:off x="6035040" y="1463040"/>
+            <a:ext cx="2743200" cy="1463040"/>
           </a:xfrm>
           <a:prstGeom prst="roundRect">
             <a:avLst>
@@ -7681,53 +8143,53 @@
             </a:avLst>
           </a:prstGeom>
           <a:solidFill>
-            <a:srgbClr val="2563EB"/>
-          </a:solidFill>
-          <a:ln>
-            <a:noFill/>
-          </a:ln>
-        </p:spPr>
-        <p:style>
-          <a:lnRef idx="1">
-            <a:schemeClr val="accent1"/>
-          </a:lnRef>
-          <a:fillRef idx="3">
-            <a:schemeClr val="accent1"/>
-          </a:fillRef>
-          <a:effectRef idx="2">
-            <a:schemeClr val="accent1"/>
-          </a:effectRef>
-          <a:fontRef idx="minor">
-            <a:schemeClr val="lt1"/>
-          </a:fontRef>
-        </p:style>
-        <p:txBody>
-          <a:bodyPr rtlCol="0" anchor="ctr" wrap="square" lIns="137160" rIns="137160" tIns="73152" bIns="73152"/>
-          <a:lstStyle/>
-          <a:p>
-            <a:pPr algn="ctr"/>
-            <a:r>
-              <a:rPr sz="1600" b="1">
+            <a:srgbClr val="7C3AED"/>
+          </a:solidFill>
+          <a:ln>
+            <a:noFill/>
+          </a:ln>
+        </p:spPr>
+        <p:style>
+          <a:lnRef idx="1">
+            <a:schemeClr val="accent1"/>
+          </a:lnRef>
+          <a:fillRef idx="3">
+            <a:schemeClr val="accent1"/>
+          </a:fillRef>
+          <a:effectRef idx="2">
+            <a:schemeClr val="accent1"/>
+          </a:effectRef>
+          <a:fontRef idx="minor">
+            <a:schemeClr val="lt1"/>
+          </a:fontRef>
+        </p:style>
+        <p:txBody>
+          <a:bodyPr rtlCol="0" anchor="ctr" wrap="square" tIns="54864" bIns="54864"/>
+          <a:lstStyle/>
+          <a:p>
+            <a:pPr algn="ctr"/>
+            <a:r>
+              <a:rPr sz="2400" b="1">
                 <a:solidFill>
                   <a:srgbClr val="FFFFFF"/>
                 </a:solidFill>
                 <a:latin typeface="Noto Sans JP"/>
               </a:rPr>
-              <a:t>Kawaru</a:t>
-            </a:r>
-          </a:p>
-        </p:txBody>
-      </p:sp>
-      <p:sp>
-        <p:nvSpPr>
-          <p:cNvPr id="14" name="Rounded Rectangle 13"/>
-          <p:cNvSpPr/>
-          <p:nvPr/>
-        </p:nvSpPr>
-        <p:spPr>
-          <a:xfrm>
-            <a:off x="9235440" y="2286000"/>
-            <a:ext cx="2377440" cy="914400"/>
+              <a:t>Kawaru Coach</a:t>
+            </a:r>
+          </a:p>
+        </p:txBody>
+      </p:sp>
+      <p:sp>
+        <p:nvSpPr>
+          <p:cNvPr id="9" name="Rounded Rectangle 8"/>
+          <p:cNvSpPr/>
+          <p:nvPr/>
+        </p:nvSpPr>
+        <p:spPr>
+          <a:xfrm>
+            <a:off x="8823959" y="1463040"/>
+            <a:ext cx="2743200" cy="1463040"/>
           </a:xfrm>
           <a:prstGeom prst="roundRect">
             <a:avLst>
@@ -7735,53 +8197,96 @@
             </a:avLst>
           </a:prstGeom>
           <a:solidFill>
-            <a:srgbClr val="FF6600"/>
-          </a:solidFill>
-          <a:ln>
-            <a:noFill/>
-          </a:ln>
-        </p:spPr>
-        <p:style>
-          <a:lnRef idx="1">
-            <a:schemeClr val="accent1"/>
-          </a:lnRef>
-          <a:fillRef idx="3">
-            <a:schemeClr val="accent1"/>
-          </a:fillRef>
-          <a:effectRef idx="2">
-            <a:schemeClr val="accent1"/>
-          </a:effectRef>
-          <a:fontRef idx="minor">
-            <a:schemeClr val="lt1"/>
-          </a:fontRef>
-        </p:style>
-        <p:txBody>
-          <a:bodyPr rtlCol="0" anchor="ctr" wrap="square" lIns="137160" rIns="137160" tIns="73152" bIns="73152"/>
-          <a:lstStyle/>
-          <a:p>
-            <a:pPr algn="ctr"/>
-            <a:r>
-              <a:rPr sz="1400" b="1">
+            <a:srgbClr val="10BF16"/>
+          </a:solidFill>
+          <a:ln>
+            <a:noFill/>
+          </a:ln>
+        </p:spPr>
+        <p:style>
+          <a:lnRef idx="1">
+            <a:schemeClr val="accent1"/>
+          </a:lnRef>
+          <a:fillRef idx="3">
+            <a:schemeClr val="accent1"/>
+          </a:fillRef>
+          <a:effectRef idx="2">
+            <a:schemeClr val="accent1"/>
+          </a:effectRef>
+          <a:fontRef idx="minor">
+            <a:schemeClr val="lt1"/>
+          </a:fontRef>
+        </p:style>
+        <p:txBody>
+          <a:bodyPr rtlCol="0" anchor="ctr" wrap="square" tIns="54864" bIns="54864"/>
+          <a:lstStyle/>
+          <a:p>
+            <a:pPr algn="ctr"/>
+            <a:r>
+              <a:rPr sz="2400" b="1">
                 <a:solidFill>
                   <a:srgbClr val="FFFFFF"/>
                 </a:solidFill>
                 <a:latin typeface="Noto Sans JP"/>
               </a:rPr>
-              <a:t>Kawaru Team</a:t>
-            </a:r>
-          </a:p>
-        </p:txBody>
-      </p:sp>
-      <p:sp>
-        <p:nvSpPr>
-          <p:cNvPr id="15" name="Rounded Rectangle 14"/>
-          <p:cNvSpPr/>
-          <p:nvPr/>
-        </p:nvSpPr>
-        <p:spPr>
-          <a:xfrm>
-            <a:off x="6766560" y="3291840"/>
-            <a:ext cx="2377440" cy="914400"/>
+              <a:t>Kawaru BPO</a:t>
+            </a:r>
+          </a:p>
+        </p:txBody>
+      </p:sp>
+      <p:sp>
+        <p:nvSpPr>
+          <p:cNvPr id="10" name="Down Arrow 9"/>
+          <p:cNvSpPr/>
+          <p:nvPr/>
+        </p:nvSpPr>
+        <p:spPr>
+          <a:xfrm>
+            <a:off x="5870448" y="3108960"/>
+            <a:ext cx="457200" cy="548640"/>
+          </a:xfrm>
+          <a:prstGeom prst="downArrow">
+            <a:avLst/>
+          </a:prstGeom>
+          <a:solidFill>
+            <a:srgbClr val="2563EB"/>
+          </a:solidFill>
+          <a:ln>
+            <a:noFill/>
+          </a:ln>
+        </p:spPr>
+        <p:style>
+          <a:lnRef idx="1">
+            <a:schemeClr val="accent1"/>
+          </a:lnRef>
+          <a:fillRef idx="3">
+            <a:schemeClr val="accent1"/>
+          </a:fillRef>
+          <a:effectRef idx="2">
+            <a:schemeClr val="accent1"/>
+          </a:effectRef>
+          <a:fontRef idx="minor">
+            <a:schemeClr val="lt1"/>
+          </a:fontRef>
+        </p:style>
+        <p:txBody>
+          <a:bodyPr rtlCol="0" anchor="ctr"/>
+          <a:lstStyle/>
+          <a:p>
+            <a:pPr algn="ctr"/>
+          </a:p>
+        </p:txBody>
+      </p:sp>
+      <p:sp>
+        <p:nvSpPr>
+          <p:cNvPr id="11" name="Rounded Rectangle 10"/>
+          <p:cNvSpPr/>
+          <p:nvPr/>
+        </p:nvSpPr>
+        <p:spPr>
+          <a:xfrm>
+            <a:off x="3200400" y="3931920"/>
+            <a:ext cx="2286000" cy="1280160"/>
           </a:xfrm>
           <a:prstGeom prst="roundRect">
             <a:avLst>
@@ -7789,53 +8294,103 @@
             </a:avLst>
           </a:prstGeom>
           <a:solidFill>
-            <a:srgbClr val="7C3AED"/>
-          </a:solidFill>
-          <a:ln>
-            <a:noFill/>
-          </a:ln>
-        </p:spPr>
-        <p:style>
-          <a:lnRef idx="1">
-            <a:schemeClr val="accent1"/>
-          </a:lnRef>
-          <a:fillRef idx="3">
-            <a:schemeClr val="accent1"/>
-          </a:fillRef>
-          <a:effectRef idx="2">
-            <a:schemeClr val="accent1"/>
-          </a:effectRef>
-          <a:fontRef idx="minor">
-            <a:schemeClr val="lt1"/>
-          </a:fontRef>
-        </p:style>
-        <p:txBody>
-          <a:bodyPr rtlCol="0" anchor="ctr" wrap="square" lIns="137160" rIns="137160" tIns="73152" bIns="73152"/>
-          <a:lstStyle/>
-          <a:p>
-            <a:pPr algn="ctr"/>
-            <a:r>
-              <a:rPr sz="1400" b="1">
+            <a:srgbClr val="1C3557"/>
+          </a:solidFill>
+          <a:ln>
+            <a:noFill/>
+          </a:ln>
+        </p:spPr>
+        <p:style>
+          <a:lnRef idx="1">
+            <a:schemeClr val="accent1"/>
+          </a:lnRef>
+          <a:fillRef idx="3">
+            <a:schemeClr val="accent1"/>
+          </a:fillRef>
+          <a:effectRef idx="2">
+            <a:schemeClr val="accent1"/>
+          </a:effectRef>
+          <a:fontRef idx="minor">
+            <a:schemeClr val="lt1"/>
+          </a:fontRef>
+        </p:style>
+        <p:txBody>
+          <a:bodyPr rtlCol="0" anchor="ctr" wrap="square" tIns="54864" bIns="54864"/>
+          <a:lstStyle/>
+          <a:p>
+            <a:pPr algn="ctr"/>
+            <a:r>
+              <a:rPr sz="2800" b="1">
                 <a:solidFill>
                   <a:srgbClr val="FFFFFF"/>
                 </a:solidFill>
                 <a:latin typeface="Noto Sans JP"/>
               </a:rPr>
-              <a:t>Kawaru Coach</a:t>
-            </a:r>
-          </a:p>
-        </p:txBody>
-      </p:sp>
-      <p:sp>
-        <p:nvSpPr>
-          <p:cNvPr id="16" name="Rounded Rectangle 15"/>
-          <p:cNvSpPr/>
-          <p:nvPr/>
-        </p:nvSpPr>
-        <p:spPr>
-          <a:xfrm>
-            <a:off x="9235440" y="3291840"/>
-            <a:ext cx="2377440" cy="914400"/>
+              <a:t>髙橋</a:t>
+            </a:r>
+          </a:p>
+        </p:txBody>
+      </p:sp>
+      <p:sp>
+        <p:nvSpPr>
+          <p:cNvPr id="12" name="Rectangle 11"/>
+          <p:cNvSpPr/>
+          <p:nvPr/>
+        </p:nvSpPr>
+        <p:spPr>
+          <a:xfrm>
+            <a:off x="5577840" y="3931920"/>
+            <a:ext cx="914400" cy="1280160"/>
+          </a:xfrm>
+          <a:prstGeom prst="rect">
+            <a:avLst/>
+          </a:prstGeom>
+          <a:noFill/>
+          <a:ln>
+            <a:noFill/>
+          </a:ln>
+        </p:spPr>
+        <p:style>
+          <a:lnRef idx="1">
+            <a:schemeClr val="accent1"/>
+          </a:lnRef>
+          <a:fillRef idx="3">
+            <a:schemeClr val="accent1"/>
+          </a:fillRef>
+          <a:effectRef idx="2">
+            <a:schemeClr val="accent1"/>
+          </a:effectRef>
+          <a:fontRef idx="minor">
+            <a:schemeClr val="lt1"/>
+          </a:fontRef>
+        </p:style>
+        <p:txBody>
+          <a:bodyPr rtlCol="0" anchor="ctr" wrap="square" tIns="54864" bIns="54864"/>
+          <a:lstStyle/>
+          <a:p>
+            <a:pPr algn="ctr"/>
+            <a:r>
+              <a:rPr sz="3600" b="1">
+                <a:solidFill>
+                  <a:srgbClr val="6B7280"/>
+                </a:solidFill>
+                <a:latin typeface="Noto Sans JP"/>
+              </a:rPr>
+              <a:t>+</a:t>
+            </a:r>
+          </a:p>
+        </p:txBody>
+      </p:sp>
+      <p:sp>
+        <p:nvSpPr>
+          <p:cNvPr id="13" name="Rounded Rectangle 12"/>
+          <p:cNvSpPr/>
+          <p:nvPr/>
+        </p:nvSpPr>
+        <p:spPr>
+          <a:xfrm>
+            <a:off x="6583680" y="3931920"/>
+            <a:ext cx="2286000" cy="1280160"/>
           </a:xfrm>
           <a:prstGeom prst="roundRect">
             <a:avLst>
@@ -7843,178 +8398,82 @@
             </a:avLst>
           </a:prstGeom>
           <a:solidFill>
-            <a:srgbClr val="10BF16"/>
-          </a:solidFill>
-          <a:ln>
-            <a:noFill/>
-          </a:ln>
-        </p:spPr>
-        <p:style>
-          <a:lnRef idx="1">
-            <a:schemeClr val="accent1"/>
-          </a:lnRef>
-          <a:fillRef idx="3">
-            <a:schemeClr val="accent1"/>
-          </a:fillRef>
-          <a:effectRef idx="2">
-            <a:schemeClr val="accent1"/>
-          </a:effectRef>
-          <a:fontRef idx="minor">
-            <a:schemeClr val="lt1"/>
-          </a:fontRef>
-        </p:style>
-        <p:txBody>
-          <a:bodyPr rtlCol="0" anchor="ctr" wrap="square" lIns="137160" rIns="137160" tIns="73152" bIns="73152"/>
-          <a:lstStyle/>
-          <a:p>
-            <a:pPr algn="ctr"/>
-            <a:r>
-              <a:rPr sz="1400" b="1">
+            <a:srgbClr val="2563EB"/>
+          </a:solidFill>
+          <a:ln>
+            <a:noFill/>
+          </a:ln>
+        </p:spPr>
+        <p:style>
+          <a:lnRef idx="1">
+            <a:schemeClr val="accent1"/>
+          </a:lnRef>
+          <a:fillRef idx="3">
+            <a:schemeClr val="accent1"/>
+          </a:fillRef>
+          <a:effectRef idx="2">
+            <a:schemeClr val="accent1"/>
+          </a:effectRef>
+          <a:fontRef idx="minor">
+            <a:schemeClr val="lt1"/>
+          </a:fontRef>
+        </p:style>
+        <p:txBody>
+          <a:bodyPr rtlCol="0" anchor="ctr" wrap="square" tIns="54864" bIns="54864"/>
+          <a:lstStyle/>
+          <a:p>
+            <a:pPr algn="ctr"/>
+            <a:r>
+              <a:rPr sz="2800" b="1">
                 <a:solidFill>
                   <a:srgbClr val="FFFFFF"/>
                 </a:solidFill>
                 <a:latin typeface="Noto Sans JP"/>
               </a:rPr>
-              <a:t>Kawaru BPO</a:t>
-            </a:r>
-          </a:p>
-        </p:txBody>
-      </p:sp>
-      <p:sp>
-        <p:nvSpPr>
-          <p:cNvPr id="17" name="Rectangle 16"/>
-          <p:cNvSpPr/>
-          <p:nvPr/>
-        </p:nvSpPr>
-        <p:spPr>
-          <a:xfrm>
-            <a:off x="6400800" y="3931920"/>
-            <a:ext cx="5303520" cy="1371600"/>
-          </a:xfrm>
-          <a:prstGeom prst="rect">
-            <a:avLst/>
-          </a:prstGeom>
-          <a:noFill/>
-          <a:ln>
-            <a:noFill/>
-          </a:ln>
-        </p:spPr>
-        <p:style>
-          <a:lnRef idx="1">
-            <a:schemeClr val="accent1"/>
-          </a:lnRef>
-          <a:fillRef idx="3">
-            <a:schemeClr val="accent1"/>
-          </a:fillRef>
-          <a:effectRef idx="2">
-            <a:schemeClr val="accent1"/>
-          </a:effectRef>
-          <a:fontRef idx="minor">
-            <a:schemeClr val="lt1"/>
-          </a:fontRef>
-        </p:style>
-        <p:txBody>
-          <a:bodyPr rtlCol="0" anchor="ctr" wrap="square" lIns="137160" rIns="137160" tIns="73152" bIns="73152"/>
-          <a:lstStyle/>
-          <a:p>
-            <a:pPr algn="ctr"/>
-            <a:r>
-              <a:rPr sz="7200" b="1">
-                <a:solidFill>
-                  <a:srgbClr val="2563EB"/>
-                </a:solidFill>
-                <a:latin typeface="Noto Sans JP"/>
-              </a:rPr>
-              <a:t>4</a:t>
-            </a:r>
-          </a:p>
-        </p:txBody>
-      </p:sp>
-      <p:sp>
-        <p:nvSpPr>
-          <p:cNvPr id="18" name="Rectangle 17"/>
-          <p:cNvSpPr/>
-          <p:nvPr/>
-        </p:nvSpPr>
-        <p:spPr>
-          <a:xfrm>
-            <a:off x="6400800" y="5303520"/>
-            <a:ext cx="5303520" cy="457200"/>
-          </a:xfrm>
-          <a:prstGeom prst="rect">
-            <a:avLst/>
-          </a:prstGeom>
-          <a:noFill/>
-          <a:ln>
-            <a:noFill/>
-          </a:ln>
-        </p:spPr>
-        <p:style>
-          <a:lnRef idx="1">
-            <a:schemeClr val="accent1"/>
-          </a:lnRef>
-          <a:fillRef idx="3">
-            <a:schemeClr val="accent1"/>
-          </a:fillRef>
-          <a:effectRef idx="2">
-            <a:schemeClr val="accent1"/>
-          </a:effectRef>
-          <a:fontRef idx="minor">
-            <a:schemeClr val="lt1"/>
-          </a:fontRef>
-        </p:style>
-        <p:txBody>
-          <a:bodyPr rtlCol="0" anchor="t" wrap="square" lIns="137160" rIns="137160" tIns="73152" bIns="73152"/>
-          <a:lstStyle/>
-          <a:p>
-            <a:pPr algn="ctr"/>
-            <a:r>
-              <a:rPr sz="1400" b="0">
-                <a:solidFill>
-                  <a:srgbClr val="6B7280"/>
-                </a:solidFill>
-                <a:latin typeface="Noto Sans JP"/>
-              </a:rPr>
-              <a:t>事業部のサービス</a:t>
-            </a:r>
-          </a:p>
-        </p:txBody>
-      </p:sp>
-      <p:sp>
-        <p:nvSpPr>
-          <p:cNvPr id="19" name="Rectangle 18"/>
-          <p:cNvSpPr/>
-          <p:nvPr/>
-        </p:nvSpPr>
-        <p:spPr>
-          <a:xfrm>
-            <a:off x="457200" y="5943600"/>
-            <a:ext cx="11274552" cy="640080"/>
-          </a:xfrm>
-          <a:prstGeom prst="rect">
-            <a:avLst/>
-          </a:prstGeom>
-          <a:noFill/>
-          <a:ln>
-            <a:noFill/>
-          </a:ln>
-        </p:spPr>
-        <p:style>
-          <a:lnRef idx="1">
-            <a:schemeClr val="accent1"/>
-          </a:lnRef>
-          <a:fillRef idx="3">
-            <a:schemeClr val="accent1"/>
-          </a:fillRef>
-          <a:effectRef idx="2">
-            <a:schemeClr val="accent1"/>
-          </a:effectRef>
-          <a:fontRef idx="minor">
-            <a:schemeClr val="lt1"/>
-          </a:fontRef>
-        </p:style>
-        <p:txBody>
-          <a:bodyPr rtlCol="0" anchor="ctr" wrap="square" lIns="137160" rIns="137160" tIns="73152" bIns="73152"/>
+              <a:t>大川</a:t>
+            </a:r>
+          </a:p>
+        </p:txBody>
+      </p:sp>
+      <p:sp>
+        <p:nvSpPr>
+          <p:cNvPr id="14" name="Rounded Rectangle 13"/>
+          <p:cNvSpPr/>
+          <p:nvPr/>
+        </p:nvSpPr>
+        <p:spPr>
+          <a:xfrm>
+            <a:off x="457200" y="5486400"/>
+            <a:ext cx="11274552" cy="914400"/>
+          </a:xfrm>
+          <a:prstGeom prst="roundRect">
+            <a:avLst>
+              <a:gd name="adj" fmla="val 5000"/>
+            </a:avLst>
+          </a:prstGeom>
+          <a:solidFill>
+            <a:srgbClr val="DBEAFE"/>
+          </a:solidFill>
+          <a:ln>
+            <a:noFill/>
+          </a:ln>
+        </p:spPr>
+        <p:style>
+          <a:lnRef idx="1">
+            <a:schemeClr val="accent1"/>
+          </a:lnRef>
+          <a:fillRef idx="3">
+            <a:schemeClr val="accent1"/>
+          </a:fillRef>
+          <a:effectRef idx="2">
+            <a:schemeClr val="accent1"/>
+          </a:effectRef>
+          <a:fontRef idx="minor">
+            <a:schemeClr val="lt1"/>
+          </a:fontRef>
+        </p:style>
+        <p:txBody>
+          <a:bodyPr rtlCol="0" anchor="ctr" wrap="square" tIns="54864" bIns="54864"/>
           <a:lstStyle/>
           <a:p>
             <a:pPr algn="ctr"/>
@@ -8025,7 +8484,7 @@
                 </a:solidFill>
                 <a:latin typeface="Noto Sans JP"/>
               </a:rPr>
-              <a:t>2人で 4つのサービス を動かしている</a:t>
+              <a:t>現状、Kawaru事業部の重要な4サービスを2人体制でやっている</a:t>
             </a:r>
           </a:p>
         </p:txBody>
@@ -8125,7 +8584,7 @@
           </a:fontRef>
         </p:style>
         <p:txBody>
-          <a:bodyPr rtlCol="0" anchor="t" wrap="square" lIns="137160" rIns="137160" tIns="73152" bIns="73152"/>
+          <a:bodyPr rtlCol="0" anchor="t" wrap="square" tIns="54864" bIns="54864"/>
           <a:lstStyle/>
           <a:p>
             <a:pPr algn="r"/>
@@ -8175,7 +8634,7 @@
           </a:fontRef>
         </p:style>
         <p:txBody>
-          <a:bodyPr rtlCol="0" anchor="t" wrap="square" lIns="137160" rIns="137160" tIns="73152" bIns="73152"/>
+          <a:bodyPr rtlCol="0" anchor="t" wrap="square" tIns="54864" bIns="54864"/>
           <a:lstStyle/>
           <a:p>
             <a:pPr algn="l"/>
@@ -8186,7 +8645,7 @@
                 </a:solidFill>
                 <a:latin typeface="Noto Sans JP"/>
               </a:rPr>
-              <a:t>Kawaru事業部の4サービス</a:t>
+              <a:t>すでにAI社員5人を動かしている</a:t>
             </a:r>
           </a:p>
         </p:txBody>
@@ -8242,8 +8701,8 @@
         </p:nvSpPr>
         <p:spPr>
           <a:xfrm>
-            <a:off x="640080" y="1463040"/>
-            <a:ext cx="5029200" cy="2194560"/>
+            <a:off x="5184648" y="1280160"/>
+            <a:ext cx="1828800" cy="640080"/>
           </a:xfrm>
           <a:prstGeom prst="roundRect">
             <a:avLst>
@@ -8251,53 +8710,88 @@
             </a:avLst>
           </a:prstGeom>
           <a:solidFill>
-            <a:srgbClr val="2563EB"/>
-          </a:solidFill>
-          <a:ln>
-            <a:noFill/>
-          </a:ln>
-        </p:spPr>
-        <p:style>
-          <a:lnRef idx="1">
-            <a:schemeClr val="accent1"/>
-          </a:lnRef>
-          <a:fillRef idx="3">
-            <a:schemeClr val="accent1"/>
-          </a:fillRef>
-          <a:effectRef idx="2">
-            <a:schemeClr val="accent1"/>
-          </a:effectRef>
-          <a:fontRef idx="minor">
-            <a:schemeClr val="lt1"/>
-          </a:fontRef>
-        </p:style>
-        <p:txBody>
-          <a:bodyPr rtlCol="0" anchor="ctr" wrap="square" lIns="137160" rIns="137160" tIns="73152" bIns="73152"/>
-          <a:lstStyle/>
-          <a:p>
-            <a:pPr algn="ctr"/>
-            <a:r>
-              <a:rPr sz="4400" b="1">
+            <a:srgbClr val="1C3557"/>
+          </a:solidFill>
+          <a:ln>
+            <a:noFill/>
+          </a:ln>
+        </p:spPr>
+        <p:style>
+          <a:lnRef idx="1">
+            <a:schemeClr val="accent1"/>
+          </a:lnRef>
+          <a:fillRef idx="3">
+            <a:schemeClr val="accent1"/>
+          </a:fillRef>
+          <a:effectRef idx="2">
+            <a:schemeClr val="accent1"/>
+          </a:effectRef>
+          <a:fontRef idx="minor">
+            <a:schemeClr val="lt1"/>
+          </a:fontRef>
+        </p:style>
+        <p:txBody>
+          <a:bodyPr rtlCol="0" anchor="ctr" wrap="square" tIns="54864" bIns="54864"/>
+          <a:lstStyle/>
+          <a:p>
+            <a:pPr algn="ctr"/>
+            <a:r>
+              <a:rPr sz="1800" b="1">
                 <a:solidFill>
                   <a:srgbClr val="FFFFFF"/>
                 </a:solidFill>
                 <a:latin typeface="Noto Sans JP"/>
               </a:rPr>
-              <a:t>Kawaru</a:t>
-            </a:r>
-          </a:p>
-        </p:txBody>
-      </p:sp>
-      <p:sp>
-        <p:nvSpPr>
-          <p:cNvPr id="7" name="Rounded Rectangle 6"/>
-          <p:cNvSpPr/>
-          <p:nvPr/>
-        </p:nvSpPr>
-        <p:spPr>
-          <a:xfrm>
-            <a:off x="5943600" y="1463040"/>
-            <a:ext cx="5029200" cy="2194560"/>
+              <a:t>髙橋</a:t>
+            </a:r>
+          </a:p>
+        </p:txBody>
+      </p:sp>
+      <p:cxnSp>
+        <p:nvCxnSpPr>
+          <p:cNvPr id="7" name="Connector 6"/>
+          <p:cNvCxnSpPr/>
+          <p:nvPr/>
+        </p:nvCxnSpPr>
+        <p:spPr>
+          <a:xfrm>
+            <a:off x="6099048" y="1920240"/>
+            <a:ext cx="0" cy="365760"/>
+          </a:xfrm>
+          <a:prstGeom prst="line">
+            <a:avLst/>
+          </a:prstGeom>
+          <a:ln w="25400">
+            <a:solidFill>
+              <a:srgbClr val="6B7280"/>
+            </a:solidFill>
+          </a:ln>
+        </p:spPr>
+        <p:style>
+          <a:lnRef idx="2">
+            <a:schemeClr val="accent1"/>
+          </a:lnRef>
+          <a:fillRef idx="0">
+            <a:schemeClr val="accent1"/>
+          </a:fillRef>
+          <a:effectRef idx="1">
+            <a:schemeClr val="accent1"/>
+          </a:effectRef>
+          <a:fontRef idx="minor">
+            <a:schemeClr val="tx1"/>
+          </a:fontRef>
+        </p:style>
+      </p:cxnSp>
+      <p:sp>
+        <p:nvSpPr>
+          <p:cNvPr id="8" name="Rounded Rectangle 7"/>
+          <p:cNvSpPr/>
+          <p:nvPr/>
+        </p:nvSpPr>
+        <p:spPr>
+          <a:xfrm>
+            <a:off x="4727448" y="2286000"/>
+            <a:ext cx="2743200" cy="914400"/>
           </a:xfrm>
           <a:prstGeom prst="roundRect">
             <a:avLst>
@@ -8305,53 +8799,88 @@
             </a:avLst>
           </a:prstGeom>
           <a:solidFill>
-            <a:srgbClr val="FF6600"/>
-          </a:solidFill>
-          <a:ln>
-            <a:noFill/>
-          </a:ln>
-        </p:spPr>
-        <p:style>
-          <a:lnRef idx="1">
-            <a:schemeClr val="accent1"/>
-          </a:lnRef>
-          <a:fillRef idx="3">
-            <a:schemeClr val="accent1"/>
-          </a:fillRef>
-          <a:effectRef idx="2">
-            <a:schemeClr val="accent1"/>
-          </a:effectRef>
-          <a:fontRef idx="minor">
-            <a:schemeClr val="lt1"/>
-          </a:fontRef>
-        </p:style>
-        <p:txBody>
-          <a:bodyPr rtlCol="0" anchor="ctr" wrap="square" lIns="137160" rIns="137160" tIns="73152" bIns="73152"/>
-          <a:lstStyle/>
-          <a:p>
-            <a:pPr algn="ctr"/>
-            <a:r>
-              <a:rPr sz="4000" b="1">
+            <a:srgbClr val="2563EB"/>
+          </a:solidFill>
+          <a:ln>
+            <a:noFill/>
+          </a:ln>
+        </p:spPr>
+        <p:style>
+          <a:lnRef idx="1">
+            <a:schemeClr val="accent1"/>
+          </a:lnRef>
+          <a:fillRef idx="3">
+            <a:schemeClr val="accent1"/>
+          </a:fillRef>
+          <a:effectRef idx="2">
+            <a:schemeClr val="accent1"/>
+          </a:effectRef>
+          <a:fontRef idx="minor">
+            <a:schemeClr val="lt1"/>
+          </a:fontRef>
+        </p:style>
+        <p:txBody>
+          <a:bodyPr rtlCol="0" anchor="ctr" wrap="square" tIns="54864" bIns="54864"/>
+          <a:lstStyle/>
+          <a:p>
+            <a:pPr algn="ctr"/>
+            <a:r>
+              <a:rPr sz="2800" b="1">
                 <a:solidFill>
                   <a:srgbClr val="FFFFFF"/>
                 </a:solidFill>
                 <a:latin typeface="Noto Sans JP"/>
               </a:rPr>
-              <a:t>Kawaru Team</a:t>
-            </a:r>
-          </a:p>
-        </p:txBody>
-      </p:sp>
-      <p:sp>
-        <p:nvSpPr>
-          <p:cNvPr id="8" name="Rounded Rectangle 7"/>
-          <p:cNvSpPr/>
-          <p:nvPr/>
-        </p:nvSpPr>
-        <p:spPr>
-          <a:xfrm>
-            <a:off x="640080" y="3931920"/>
-            <a:ext cx="5029200" cy="2194560"/>
+              <a:t>大川</a:t>
+            </a:r>
+          </a:p>
+        </p:txBody>
+      </p:sp>
+      <p:cxnSp>
+        <p:nvCxnSpPr>
+          <p:cNvPr id="9" name="Connector 8"/>
+          <p:cNvCxnSpPr/>
+          <p:nvPr/>
+        </p:nvCxnSpPr>
+        <p:spPr>
+          <a:xfrm flipH="1">
+            <a:off x="1508760" y="3200400"/>
+            <a:ext cx="4590288" cy="1005840"/>
+          </a:xfrm>
+          <a:prstGeom prst="line">
+            <a:avLst/>
+          </a:prstGeom>
+          <a:ln w="31750">
+            <a:solidFill>
+              <a:srgbClr val="2563EB"/>
+            </a:solidFill>
+          </a:ln>
+        </p:spPr>
+        <p:style>
+          <a:lnRef idx="2">
+            <a:schemeClr val="accent1"/>
+          </a:lnRef>
+          <a:fillRef idx="0">
+            <a:schemeClr val="accent1"/>
+          </a:fillRef>
+          <a:effectRef idx="1">
+            <a:schemeClr val="accent1"/>
+          </a:effectRef>
+          <a:fontRef idx="minor">
+            <a:schemeClr val="tx1"/>
+          </a:fontRef>
+        </p:style>
+      </p:cxnSp>
+      <p:sp>
+        <p:nvSpPr>
+          <p:cNvPr id="10" name="Rounded Rectangle 9"/>
+          <p:cNvSpPr/>
+          <p:nvPr/>
+        </p:nvSpPr>
+        <p:spPr>
+          <a:xfrm>
+            <a:off x="457200" y="4206240"/>
+            <a:ext cx="2103120" cy="1371600"/>
           </a:xfrm>
           <a:prstGeom prst="roundRect">
             <a:avLst>
@@ -8359,53 +8888,88 @@
             </a:avLst>
           </a:prstGeom>
           <a:solidFill>
-            <a:srgbClr val="7C3AED"/>
-          </a:solidFill>
-          <a:ln>
-            <a:noFill/>
-          </a:ln>
-        </p:spPr>
-        <p:style>
-          <a:lnRef idx="1">
-            <a:schemeClr val="accent1"/>
-          </a:lnRef>
-          <a:fillRef idx="3">
-            <a:schemeClr val="accent1"/>
-          </a:fillRef>
-          <a:effectRef idx="2">
-            <a:schemeClr val="accent1"/>
-          </a:effectRef>
-          <a:fontRef idx="minor">
-            <a:schemeClr val="lt1"/>
-          </a:fontRef>
-        </p:style>
-        <p:txBody>
-          <a:bodyPr rtlCol="0" anchor="ctr" wrap="square" lIns="137160" rIns="137160" tIns="73152" bIns="73152"/>
-          <a:lstStyle/>
-          <a:p>
-            <a:pPr algn="ctr"/>
-            <a:r>
-              <a:rPr sz="4000" b="1">
+            <a:srgbClr val="2563EB"/>
+          </a:solidFill>
+          <a:ln>
+            <a:noFill/>
+          </a:ln>
+        </p:spPr>
+        <p:style>
+          <a:lnRef idx="1">
+            <a:schemeClr val="accent1"/>
+          </a:lnRef>
+          <a:fillRef idx="3">
+            <a:schemeClr val="accent1"/>
+          </a:fillRef>
+          <a:effectRef idx="2">
+            <a:schemeClr val="accent1"/>
+          </a:effectRef>
+          <a:fontRef idx="minor">
+            <a:schemeClr val="lt1"/>
+          </a:fontRef>
+        </p:style>
+        <p:txBody>
+          <a:bodyPr rtlCol="0" anchor="ctr" wrap="square" tIns="54864" bIns="54864"/>
+          <a:lstStyle/>
+          <a:p>
+            <a:pPr algn="ctr"/>
+            <a:r>
+              <a:rPr sz="1600" b="1">
                 <a:solidFill>
                   <a:srgbClr val="FFFFFF"/>
                 </a:solidFill>
                 <a:latin typeface="Noto Sans JP"/>
               </a:rPr>
-              <a:t>Kawaru Coach</a:t>
-            </a:r>
-          </a:p>
-        </p:txBody>
-      </p:sp>
-      <p:sp>
-        <p:nvSpPr>
-          <p:cNvPr id="9" name="Rounded Rectangle 8"/>
-          <p:cNvSpPr/>
-          <p:nvPr/>
-        </p:nvSpPr>
-        <p:spPr>
-          <a:xfrm>
-            <a:off x="5943600" y="3931920"/>
-            <a:ext cx="5029200" cy="2194560"/>
+              <a:t>マーケAI</a:t>
+            </a:r>
+          </a:p>
+        </p:txBody>
+      </p:sp>
+      <p:cxnSp>
+        <p:nvCxnSpPr>
+          <p:cNvPr id="11" name="Connector 10"/>
+          <p:cNvCxnSpPr/>
+          <p:nvPr/>
+        </p:nvCxnSpPr>
+        <p:spPr>
+          <a:xfrm flipH="1">
+            <a:off x="3840479" y="3200400"/>
+            <a:ext cx="2258569" cy="1005840"/>
+          </a:xfrm>
+          <a:prstGeom prst="line">
+            <a:avLst/>
+          </a:prstGeom>
+          <a:ln w="31750">
+            <a:solidFill>
+              <a:srgbClr val="2563EB"/>
+            </a:solidFill>
+          </a:ln>
+        </p:spPr>
+        <p:style>
+          <a:lnRef idx="2">
+            <a:schemeClr val="accent1"/>
+          </a:lnRef>
+          <a:fillRef idx="0">
+            <a:schemeClr val="accent1"/>
+          </a:fillRef>
+          <a:effectRef idx="1">
+            <a:schemeClr val="accent1"/>
+          </a:effectRef>
+          <a:fontRef idx="minor">
+            <a:schemeClr val="tx1"/>
+          </a:fontRef>
+        </p:style>
+      </p:cxnSp>
+      <p:sp>
+        <p:nvSpPr>
+          <p:cNvPr id="12" name="Rounded Rectangle 11"/>
+          <p:cNvSpPr/>
+          <p:nvPr/>
+        </p:nvSpPr>
+        <p:spPr>
+          <a:xfrm>
+            <a:off x="2788920" y="4206240"/>
+            <a:ext cx="2103120" cy="1371600"/>
           </a:xfrm>
           <a:prstGeom prst="roundRect">
             <a:avLst>
@@ -8413,53 +8977,320 @@
             </a:avLst>
           </a:prstGeom>
           <a:solidFill>
-            <a:srgbClr val="10BF16"/>
-          </a:solidFill>
-          <a:ln>
-            <a:noFill/>
-          </a:ln>
-        </p:spPr>
-        <p:style>
-          <a:lnRef idx="1">
-            <a:schemeClr val="accent1"/>
-          </a:lnRef>
-          <a:fillRef idx="3">
-            <a:schemeClr val="accent1"/>
-          </a:fillRef>
-          <a:effectRef idx="2">
-            <a:schemeClr val="accent1"/>
-          </a:effectRef>
-          <a:fontRef idx="minor">
-            <a:schemeClr val="lt1"/>
-          </a:fontRef>
-        </p:style>
-        <p:txBody>
-          <a:bodyPr rtlCol="0" anchor="ctr" wrap="square" lIns="137160" rIns="137160" tIns="73152" bIns="73152"/>
-          <a:lstStyle/>
-          <a:p>
-            <a:pPr algn="ctr"/>
-            <a:r>
-              <a:rPr sz="4000" b="1">
+            <a:srgbClr val="2563EB"/>
+          </a:solidFill>
+          <a:ln>
+            <a:noFill/>
+          </a:ln>
+        </p:spPr>
+        <p:style>
+          <a:lnRef idx="1">
+            <a:schemeClr val="accent1"/>
+          </a:lnRef>
+          <a:fillRef idx="3">
+            <a:schemeClr val="accent1"/>
+          </a:fillRef>
+          <a:effectRef idx="2">
+            <a:schemeClr val="accent1"/>
+          </a:effectRef>
+          <a:fontRef idx="minor">
+            <a:schemeClr val="lt1"/>
+          </a:fontRef>
+        </p:style>
+        <p:txBody>
+          <a:bodyPr rtlCol="0" anchor="ctr" wrap="square" tIns="54864" bIns="54864"/>
+          <a:lstStyle/>
+          <a:p>
+            <a:pPr algn="ctr"/>
+            <a:r>
+              <a:rPr sz="1600" b="1">
                 <a:solidFill>
                   <a:srgbClr val="FFFFFF"/>
                 </a:solidFill>
                 <a:latin typeface="Noto Sans JP"/>
               </a:rPr>
-              <a:t>Kawaru BPO</a:t>
-            </a:r>
-          </a:p>
-        </p:txBody>
-      </p:sp>
-      <p:sp>
-        <p:nvSpPr>
-          <p:cNvPr id="10" name="Rectangle 9"/>
-          <p:cNvSpPr/>
-          <p:nvPr/>
-        </p:nvSpPr>
-        <p:spPr>
-          <a:xfrm>
-            <a:off x="457200" y="6263640"/>
-            <a:ext cx="11274552" cy="457200"/>
+              <a:t>営業AI</a:t>
+            </a:r>
+          </a:p>
+        </p:txBody>
+      </p:sp>
+      <p:cxnSp>
+        <p:nvCxnSpPr>
+          <p:cNvPr id="13" name="Connector 12"/>
+          <p:cNvCxnSpPr/>
+          <p:nvPr/>
+        </p:nvCxnSpPr>
+        <p:spPr>
+          <a:xfrm>
+            <a:off x="6099048" y="3200400"/>
+            <a:ext cx="73152" cy="1005840"/>
+          </a:xfrm>
+          <a:prstGeom prst="line">
+            <a:avLst/>
+          </a:prstGeom>
+          <a:ln w="31750">
+            <a:solidFill>
+              <a:srgbClr val="2563EB"/>
+            </a:solidFill>
+          </a:ln>
+        </p:spPr>
+        <p:style>
+          <a:lnRef idx="2">
+            <a:schemeClr val="accent1"/>
+          </a:lnRef>
+          <a:fillRef idx="0">
+            <a:schemeClr val="accent1"/>
+          </a:fillRef>
+          <a:effectRef idx="1">
+            <a:schemeClr val="accent1"/>
+          </a:effectRef>
+          <a:fontRef idx="minor">
+            <a:schemeClr val="tx1"/>
+          </a:fontRef>
+        </p:style>
+      </p:cxnSp>
+      <p:sp>
+        <p:nvSpPr>
+          <p:cNvPr id="14" name="Rounded Rectangle 13"/>
+          <p:cNvSpPr/>
+          <p:nvPr/>
+        </p:nvSpPr>
+        <p:spPr>
+          <a:xfrm>
+            <a:off x="5120640" y="4206240"/>
+            <a:ext cx="2103120" cy="1371600"/>
+          </a:xfrm>
+          <a:prstGeom prst="roundRect">
+            <a:avLst>
+              <a:gd name="adj" fmla="val 5000"/>
+            </a:avLst>
+          </a:prstGeom>
+          <a:solidFill>
+            <a:srgbClr val="2563EB"/>
+          </a:solidFill>
+          <a:ln>
+            <a:noFill/>
+          </a:ln>
+        </p:spPr>
+        <p:style>
+          <a:lnRef idx="1">
+            <a:schemeClr val="accent1"/>
+          </a:lnRef>
+          <a:fillRef idx="3">
+            <a:schemeClr val="accent1"/>
+          </a:fillRef>
+          <a:effectRef idx="2">
+            <a:schemeClr val="accent1"/>
+          </a:effectRef>
+          <a:fontRef idx="minor">
+            <a:schemeClr val="lt1"/>
+          </a:fontRef>
+        </p:style>
+        <p:txBody>
+          <a:bodyPr rtlCol="0" anchor="ctr" wrap="square" tIns="54864" bIns="54864"/>
+          <a:lstStyle/>
+          <a:p>
+            <a:pPr algn="ctr"/>
+            <a:r>
+              <a:rPr sz="1600" b="1">
+                <a:solidFill>
+                  <a:srgbClr val="FFFFFF"/>
+                </a:solidFill>
+                <a:latin typeface="Noto Sans JP"/>
+              </a:rPr>
+              <a:t>デリバリーAI</a:t>
+            </a:r>
+          </a:p>
+        </p:txBody>
+      </p:sp>
+      <p:cxnSp>
+        <p:nvCxnSpPr>
+          <p:cNvPr id="15" name="Connector 14"/>
+          <p:cNvCxnSpPr/>
+          <p:nvPr/>
+        </p:nvCxnSpPr>
+        <p:spPr>
+          <a:xfrm>
+            <a:off x="6099048" y="3200400"/>
+            <a:ext cx="2404871" cy="1005840"/>
+          </a:xfrm>
+          <a:prstGeom prst="line">
+            <a:avLst/>
+          </a:prstGeom>
+          <a:ln w="31750">
+            <a:solidFill>
+              <a:srgbClr val="2563EB"/>
+            </a:solidFill>
+          </a:ln>
+        </p:spPr>
+        <p:style>
+          <a:lnRef idx="2">
+            <a:schemeClr val="accent1"/>
+          </a:lnRef>
+          <a:fillRef idx="0">
+            <a:schemeClr val="accent1"/>
+          </a:fillRef>
+          <a:effectRef idx="1">
+            <a:schemeClr val="accent1"/>
+          </a:effectRef>
+          <a:fontRef idx="minor">
+            <a:schemeClr val="tx1"/>
+          </a:fontRef>
+        </p:style>
+      </p:cxnSp>
+      <p:sp>
+        <p:nvSpPr>
+          <p:cNvPr id="16" name="Rounded Rectangle 15"/>
+          <p:cNvSpPr/>
+          <p:nvPr/>
+        </p:nvSpPr>
+        <p:spPr>
+          <a:xfrm>
+            <a:off x="7452359" y="4206240"/>
+            <a:ext cx="2103120" cy="1371600"/>
+          </a:xfrm>
+          <a:prstGeom prst="roundRect">
+            <a:avLst>
+              <a:gd name="adj" fmla="val 5000"/>
+            </a:avLst>
+          </a:prstGeom>
+          <a:solidFill>
+            <a:srgbClr val="2563EB"/>
+          </a:solidFill>
+          <a:ln>
+            <a:noFill/>
+          </a:ln>
+        </p:spPr>
+        <p:style>
+          <a:lnRef idx="1">
+            <a:schemeClr val="accent1"/>
+          </a:lnRef>
+          <a:fillRef idx="3">
+            <a:schemeClr val="accent1"/>
+          </a:fillRef>
+          <a:effectRef idx="2">
+            <a:schemeClr val="accent1"/>
+          </a:effectRef>
+          <a:fontRef idx="minor">
+            <a:schemeClr val="lt1"/>
+          </a:fontRef>
+        </p:style>
+        <p:txBody>
+          <a:bodyPr rtlCol="0" anchor="ctr" wrap="square" tIns="54864" bIns="54864"/>
+          <a:lstStyle/>
+          <a:p>
+            <a:pPr algn="ctr"/>
+            <a:r>
+              <a:rPr sz="1600" b="1">
+                <a:solidFill>
+                  <a:srgbClr val="FFFFFF"/>
+                </a:solidFill>
+                <a:latin typeface="Noto Sans JP"/>
+              </a:rPr>
+              <a:t>事務法務AI</a:t>
+            </a:r>
+          </a:p>
+        </p:txBody>
+      </p:sp>
+      <p:cxnSp>
+        <p:nvCxnSpPr>
+          <p:cNvPr id="17" name="Connector 16"/>
+          <p:cNvCxnSpPr/>
+          <p:nvPr/>
+        </p:nvCxnSpPr>
+        <p:spPr>
+          <a:xfrm>
+            <a:off x="6099048" y="3200400"/>
+            <a:ext cx="4736592" cy="1005840"/>
+          </a:xfrm>
+          <a:prstGeom prst="line">
+            <a:avLst/>
+          </a:prstGeom>
+          <a:ln w="31750">
+            <a:solidFill>
+              <a:srgbClr val="2563EB"/>
+            </a:solidFill>
+          </a:ln>
+        </p:spPr>
+        <p:style>
+          <a:lnRef idx="2">
+            <a:schemeClr val="accent1"/>
+          </a:lnRef>
+          <a:fillRef idx="0">
+            <a:schemeClr val="accent1"/>
+          </a:fillRef>
+          <a:effectRef idx="1">
+            <a:schemeClr val="accent1"/>
+          </a:effectRef>
+          <a:fontRef idx="minor">
+            <a:schemeClr val="tx1"/>
+          </a:fontRef>
+        </p:style>
+      </p:cxnSp>
+      <p:sp>
+        <p:nvSpPr>
+          <p:cNvPr id="18" name="Rounded Rectangle 17"/>
+          <p:cNvSpPr/>
+          <p:nvPr/>
+        </p:nvSpPr>
+        <p:spPr>
+          <a:xfrm>
+            <a:off x="9784080" y="4206240"/>
+            <a:ext cx="2103120" cy="1371600"/>
+          </a:xfrm>
+          <a:prstGeom prst="roundRect">
+            <a:avLst>
+              <a:gd name="adj" fmla="val 5000"/>
+            </a:avLst>
+          </a:prstGeom>
+          <a:solidFill>
+            <a:srgbClr val="2563EB"/>
+          </a:solidFill>
+          <a:ln>
+            <a:noFill/>
+          </a:ln>
+        </p:spPr>
+        <p:style>
+          <a:lnRef idx="1">
+            <a:schemeClr val="accent1"/>
+          </a:lnRef>
+          <a:fillRef idx="3">
+            <a:schemeClr val="accent1"/>
+          </a:fillRef>
+          <a:effectRef idx="2">
+            <a:schemeClr val="accent1"/>
+          </a:effectRef>
+          <a:fontRef idx="minor">
+            <a:schemeClr val="lt1"/>
+          </a:fontRef>
+        </p:style>
+        <p:txBody>
+          <a:bodyPr rtlCol="0" anchor="ctr" wrap="square" tIns="54864" bIns="54864"/>
+          <a:lstStyle/>
+          <a:p>
+            <a:pPr algn="ctr"/>
+            <a:r>
+              <a:rPr sz="1600" b="1">
+                <a:solidFill>
+                  <a:srgbClr val="FFFFFF"/>
+                </a:solidFill>
+                <a:latin typeface="Noto Sans JP"/>
+              </a:rPr>
+              <a:t>戦略AI</a:t>
+            </a:r>
+          </a:p>
+        </p:txBody>
+      </p:sp>
+      <p:sp>
+        <p:nvSpPr>
+          <p:cNvPr id="19" name="Rectangle 18"/>
+          <p:cNvSpPr/>
+          <p:nvPr/>
+        </p:nvSpPr>
+        <p:spPr>
+          <a:xfrm>
+            <a:off x="457200" y="5852160"/>
+            <a:ext cx="11274552" cy="731520"/>
           </a:xfrm>
           <a:prstGeom prst="rect">
             <a:avLst/>
@@ -8484,18 +9315,18 @@
           </a:fontRef>
         </p:style>
         <p:txBody>
-          <a:bodyPr rtlCol="0" anchor="t" wrap="square" lIns="137160" rIns="137160" tIns="73152" bIns="73152"/>
-          <a:lstStyle/>
-          <a:p>
-            <a:pPr algn="ctr"/>
-            <a:r>
-              <a:rPr sz="1800" b="1">
-                <a:solidFill>
-                  <a:srgbClr val="1C3557"/>
-                </a:solidFill>
-                <a:latin typeface="Noto Sans JP"/>
-              </a:rPr>
-              <a:t>この4つのサービスを動かしている</a:t>
+          <a:bodyPr rtlCol="0" anchor="ctr" wrap="square" tIns="54864" bIns="54864"/>
+          <a:lstStyle/>
+          <a:p>
+            <a:pPr algn="ctr"/>
+            <a:r>
+              <a:rPr sz="2000" b="1">
+                <a:solidFill>
+                  <a:srgbClr val="2563EB"/>
+                </a:solidFill>
+                <a:latin typeface="Noto Sans JP"/>
+              </a:rPr>
+              <a:t>大川主導で AI社員5人 を動かして事業部を回している</a:t>
             </a:r>
           </a:p>
         </p:txBody>
@@ -8595,7 +9426,7 @@
           </a:fontRef>
         </p:style>
         <p:txBody>
-          <a:bodyPr rtlCol="0" anchor="t" wrap="square" lIns="137160" rIns="137160" tIns="73152" bIns="73152"/>
+          <a:bodyPr rtlCol="0" anchor="t" wrap="square" tIns="54864" bIns="54864"/>
           <a:lstStyle/>
           <a:p>
             <a:pPr algn="r"/>
@@ -8645,7 +9476,7 @@
           </a:fontRef>
         </p:style>
         <p:txBody>
-          <a:bodyPr rtlCol="0" anchor="t" wrap="square" lIns="137160" rIns="137160" tIns="73152" bIns="73152"/>
+          <a:bodyPr rtlCol="0" anchor="t" wrap="square" tIns="54864" bIns="54864"/>
           <a:lstStyle/>
           <a:p>
             <a:pPr algn="l"/>
@@ -8656,7 +9487,7 @@
                 </a:solidFill>
                 <a:latin typeface="Noto Sans JP"/>
               </a:rPr>
-              <a:t>すでにAI社員5人を動かしている</a:t>
+              <a:t>こういう5人構成を考えています</a:t>
             </a:r>
           </a:p>
         </p:txBody>
@@ -8706,14 +9537,529 @@
       </p:sp>
       <p:sp>
         <p:nvSpPr>
-          <p:cNvPr id="6" name="Rounded Rectangle 5"/>
-          <p:cNvSpPr/>
-          <p:nvPr/>
-        </p:nvSpPr>
-        <p:spPr>
-          <a:xfrm>
-            <a:off x="5184648" y="1280160"/>
-            <a:ext cx="1828800" cy="548640"/>
+          <p:cNvPr id="6" name="Rectangle 5"/>
+          <p:cNvSpPr/>
+          <p:nvPr/>
+        </p:nvSpPr>
+        <p:spPr>
+          <a:xfrm>
+            <a:off x="457200" y="1554480"/>
+            <a:ext cx="11274552" cy="548640"/>
+          </a:xfrm>
+          <a:prstGeom prst="rect">
+            <a:avLst/>
+          </a:prstGeom>
+          <a:noFill/>
+          <a:ln>
+            <a:noFill/>
+          </a:ln>
+        </p:spPr>
+        <p:style>
+          <a:lnRef idx="1">
+            <a:schemeClr val="accent1"/>
+          </a:lnRef>
+          <a:fillRef idx="3">
+            <a:schemeClr val="accent1"/>
+          </a:fillRef>
+          <a:effectRef idx="2">
+            <a:schemeClr val="accent1"/>
+          </a:effectRef>
+          <a:fontRef idx="minor">
+            <a:schemeClr val="lt1"/>
+          </a:fontRef>
+        </p:style>
+        <p:txBody>
+          <a:bodyPr rtlCol="0" anchor="t" wrap="square" tIns="54864" bIns="54864"/>
+          <a:lstStyle/>
+          <a:p>
+            <a:pPr algn="ctr"/>
+            <a:r>
+              <a:rPr sz="1800" b="1">
+                <a:solidFill>
+                  <a:srgbClr val="1C3557"/>
+                </a:solidFill>
+                <a:latin typeface="Noto Sans JP"/>
+              </a:rPr>
+              <a:t>事業を回すために必要な機能を、5人のAI社員に分けた</a:t>
+            </a:r>
+          </a:p>
+        </p:txBody>
+      </p:sp>
+      <p:sp>
+        <p:nvSpPr>
+          <p:cNvPr id="7" name="Oval 6"/>
+          <p:cNvSpPr/>
+          <p:nvPr/>
+        </p:nvSpPr>
+        <p:spPr>
+          <a:xfrm>
+            <a:off x="516636" y="2743200"/>
+            <a:ext cx="2011680" cy="2011680"/>
+          </a:xfrm>
+          <a:prstGeom prst="ellipse">
+            <a:avLst/>
+          </a:prstGeom>
+          <a:solidFill>
+            <a:srgbClr val="2563EB"/>
+          </a:solidFill>
+          <a:ln>
+            <a:noFill/>
+          </a:ln>
+        </p:spPr>
+        <p:style>
+          <a:lnRef idx="1">
+            <a:schemeClr val="accent1"/>
+          </a:lnRef>
+          <a:fillRef idx="3">
+            <a:schemeClr val="accent1"/>
+          </a:fillRef>
+          <a:effectRef idx="2">
+            <a:schemeClr val="accent1"/>
+          </a:effectRef>
+          <a:fontRef idx="minor">
+            <a:schemeClr val="lt1"/>
+          </a:fontRef>
+        </p:style>
+        <p:txBody>
+          <a:bodyPr rtlCol="0" anchor="ctr"/>
+          <a:lstStyle/>
+          <a:p>
+            <a:pPr algn="ctr"/>
+          </a:p>
+        </p:txBody>
+      </p:sp>
+      <p:sp>
+        <p:nvSpPr>
+          <p:cNvPr id="8" name="Rectangle 7"/>
+          <p:cNvSpPr/>
+          <p:nvPr/>
+        </p:nvSpPr>
+        <p:spPr>
+          <a:xfrm>
+            <a:off x="516636" y="2743200"/>
+            <a:ext cx="2011680" cy="2011680"/>
+          </a:xfrm>
+          <a:prstGeom prst="rect">
+            <a:avLst/>
+          </a:prstGeom>
+          <a:noFill/>
+          <a:ln>
+            <a:noFill/>
+          </a:ln>
+        </p:spPr>
+        <p:style>
+          <a:lnRef idx="1">
+            <a:schemeClr val="accent1"/>
+          </a:lnRef>
+          <a:fillRef idx="3">
+            <a:schemeClr val="accent1"/>
+          </a:fillRef>
+          <a:effectRef idx="2">
+            <a:schemeClr val="accent1"/>
+          </a:effectRef>
+          <a:fontRef idx="minor">
+            <a:schemeClr val="lt1"/>
+          </a:fontRef>
+        </p:style>
+        <p:txBody>
+          <a:bodyPr rtlCol="0" anchor="ctr" wrap="square" tIns="54864" bIns="54864"/>
+          <a:lstStyle/>
+          <a:p>
+            <a:pPr algn="ctr"/>
+            <a:r>
+              <a:rPr sz="1800" b="1">
+                <a:solidFill>
+                  <a:srgbClr val="FFFFFF"/>
+                </a:solidFill>
+                <a:latin typeface="Noto Sans JP"/>
+              </a:rPr>
+              <a:t>マーケ</a:t>
+            </a:r>
+          </a:p>
+        </p:txBody>
+      </p:sp>
+      <p:sp>
+        <p:nvSpPr>
+          <p:cNvPr id="9" name="Oval 8"/>
+          <p:cNvSpPr/>
+          <p:nvPr/>
+        </p:nvSpPr>
+        <p:spPr>
+          <a:xfrm>
+            <a:off x="2802636" y="2743200"/>
+            <a:ext cx="2011680" cy="2011680"/>
+          </a:xfrm>
+          <a:prstGeom prst="ellipse">
+            <a:avLst/>
+          </a:prstGeom>
+          <a:solidFill>
+            <a:srgbClr val="2563EB"/>
+          </a:solidFill>
+          <a:ln>
+            <a:noFill/>
+          </a:ln>
+        </p:spPr>
+        <p:style>
+          <a:lnRef idx="1">
+            <a:schemeClr val="accent1"/>
+          </a:lnRef>
+          <a:fillRef idx="3">
+            <a:schemeClr val="accent1"/>
+          </a:fillRef>
+          <a:effectRef idx="2">
+            <a:schemeClr val="accent1"/>
+          </a:effectRef>
+          <a:fontRef idx="minor">
+            <a:schemeClr val="lt1"/>
+          </a:fontRef>
+        </p:style>
+        <p:txBody>
+          <a:bodyPr rtlCol="0" anchor="ctr"/>
+          <a:lstStyle/>
+          <a:p>
+            <a:pPr algn="ctr"/>
+          </a:p>
+        </p:txBody>
+      </p:sp>
+      <p:sp>
+        <p:nvSpPr>
+          <p:cNvPr id="10" name="Rectangle 9"/>
+          <p:cNvSpPr/>
+          <p:nvPr/>
+        </p:nvSpPr>
+        <p:spPr>
+          <a:xfrm>
+            <a:off x="2802636" y="2743200"/>
+            <a:ext cx="2011680" cy="2011680"/>
+          </a:xfrm>
+          <a:prstGeom prst="rect">
+            <a:avLst/>
+          </a:prstGeom>
+          <a:noFill/>
+          <a:ln>
+            <a:noFill/>
+          </a:ln>
+        </p:spPr>
+        <p:style>
+          <a:lnRef idx="1">
+            <a:schemeClr val="accent1"/>
+          </a:lnRef>
+          <a:fillRef idx="3">
+            <a:schemeClr val="accent1"/>
+          </a:fillRef>
+          <a:effectRef idx="2">
+            <a:schemeClr val="accent1"/>
+          </a:effectRef>
+          <a:fontRef idx="minor">
+            <a:schemeClr val="lt1"/>
+          </a:fontRef>
+        </p:style>
+        <p:txBody>
+          <a:bodyPr rtlCol="0" anchor="ctr" wrap="square" tIns="54864" bIns="54864"/>
+          <a:lstStyle/>
+          <a:p>
+            <a:pPr algn="ctr"/>
+            <a:r>
+              <a:rPr sz="1800" b="1">
+                <a:solidFill>
+                  <a:srgbClr val="FFFFFF"/>
+                </a:solidFill>
+                <a:latin typeface="Noto Sans JP"/>
+              </a:rPr>
+              <a:t>営業</a:t>
+            </a:r>
+          </a:p>
+        </p:txBody>
+      </p:sp>
+      <p:sp>
+        <p:nvSpPr>
+          <p:cNvPr id="11" name="Oval 10"/>
+          <p:cNvSpPr/>
+          <p:nvPr/>
+        </p:nvSpPr>
+        <p:spPr>
+          <a:xfrm>
+            <a:off x="5088636" y="2743200"/>
+            <a:ext cx="2011680" cy="2011680"/>
+          </a:xfrm>
+          <a:prstGeom prst="ellipse">
+            <a:avLst/>
+          </a:prstGeom>
+          <a:solidFill>
+            <a:srgbClr val="2563EB"/>
+          </a:solidFill>
+          <a:ln>
+            <a:noFill/>
+          </a:ln>
+        </p:spPr>
+        <p:style>
+          <a:lnRef idx="1">
+            <a:schemeClr val="accent1"/>
+          </a:lnRef>
+          <a:fillRef idx="3">
+            <a:schemeClr val="accent1"/>
+          </a:fillRef>
+          <a:effectRef idx="2">
+            <a:schemeClr val="accent1"/>
+          </a:effectRef>
+          <a:fontRef idx="minor">
+            <a:schemeClr val="lt1"/>
+          </a:fontRef>
+        </p:style>
+        <p:txBody>
+          <a:bodyPr rtlCol="0" anchor="ctr"/>
+          <a:lstStyle/>
+          <a:p>
+            <a:pPr algn="ctr"/>
+          </a:p>
+        </p:txBody>
+      </p:sp>
+      <p:sp>
+        <p:nvSpPr>
+          <p:cNvPr id="12" name="Rectangle 11"/>
+          <p:cNvSpPr/>
+          <p:nvPr/>
+        </p:nvSpPr>
+        <p:spPr>
+          <a:xfrm>
+            <a:off x="5088636" y="2743200"/>
+            <a:ext cx="2011680" cy="2011680"/>
+          </a:xfrm>
+          <a:prstGeom prst="rect">
+            <a:avLst/>
+          </a:prstGeom>
+          <a:noFill/>
+          <a:ln>
+            <a:noFill/>
+          </a:ln>
+        </p:spPr>
+        <p:style>
+          <a:lnRef idx="1">
+            <a:schemeClr val="accent1"/>
+          </a:lnRef>
+          <a:fillRef idx="3">
+            <a:schemeClr val="accent1"/>
+          </a:fillRef>
+          <a:effectRef idx="2">
+            <a:schemeClr val="accent1"/>
+          </a:effectRef>
+          <a:fontRef idx="minor">
+            <a:schemeClr val="lt1"/>
+          </a:fontRef>
+        </p:style>
+        <p:txBody>
+          <a:bodyPr rtlCol="0" anchor="ctr" wrap="square" tIns="54864" bIns="54864"/>
+          <a:lstStyle/>
+          <a:p>
+            <a:pPr algn="ctr"/>
+            <a:r>
+              <a:rPr sz="1800" b="1">
+                <a:solidFill>
+                  <a:srgbClr val="FFFFFF"/>
+                </a:solidFill>
+                <a:latin typeface="Noto Sans JP"/>
+              </a:rPr>
+              <a:t>デリバリー</a:t>
+            </a:r>
+          </a:p>
+        </p:txBody>
+      </p:sp>
+      <p:sp>
+        <p:nvSpPr>
+          <p:cNvPr id="13" name="Oval 12"/>
+          <p:cNvSpPr/>
+          <p:nvPr/>
+        </p:nvSpPr>
+        <p:spPr>
+          <a:xfrm>
+            <a:off x="7374636" y="2743200"/>
+            <a:ext cx="2011680" cy="2011680"/>
+          </a:xfrm>
+          <a:prstGeom prst="ellipse">
+            <a:avLst/>
+          </a:prstGeom>
+          <a:solidFill>
+            <a:srgbClr val="2563EB"/>
+          </a:solidFill>
+          <a:ln>
+            <a:noFill/>
+          </a:ln>
+        </p:spPr>
+        <p:style>
+          <a:lnRef idx="1">
+            <a:schemeClr val="accent1"/>
+          </a:lnRef>
+          <a:fillRef idx="3">
+            <a:schemeClr val="accent1"/>
+          </a:fillRef>
+          <a:effectRef idx="2">
+            <a:schemeClr val="accent1"/>
+          </a:effectRef>
+          <a:fontRef idx="minor">
+            <a:schemeClr val="lt1"/>
+          </a:fontRef>
+        </p:style>
+        <p:txBody>
+          <a:bodyPr rtlCol="0" anchor="ctr"/>
+          <a:lstStyle/>
+          <a:p>
+            <a:pPr algn="ctr"/>
+          </a:p>
+        </p:txBody>
+      </p:sp>
+      <p:sp>
+        <p:nvSpPr>
+          <p:cNvPr id="14" name="Rectangle 13"/>
+          <p:cNvSpPr/>
+          <p:nvPr/>
+        </p:nvSpPr>
+        <p:spPr>
+          <a:xfrm>
+            <a:off x="7374636" y="2743200"/>
+            <a:ext cx="2011680" cy="2011680"/>
+          </a:xfrm>
+          <a:prstGeom prst="rect">
+            <a:avLst/>
+          </a:prstGeom>
+          <a:noFill/>
+          <a:ln>
+            <a:noFill/>
+          </a:ln>
+        </p:spPr>
+        <p:style>
+          <a:lnRef idx="1">
+            <a:schemeClr val="accent1"/>
+          </a:lnRef>
+          <a:fillRef idx="3">
+            <a:schemeClr val="accent1"/>
+          </a:fillRef>
+          <a:effectRef idx="2">
+            <a:schemeClr val="accent1"/>
+          </a:effectRef>
+          <a:fontRef idx="minor">
+            <a:schemeClr val="lt1"/>
+          </a:fontRef>
+        </p:style>
+        <p:txBody>
+          <a:bodyPr rtlCol="0" anchor="ctr" wrap="square" tIns="54864" bIns="54864"/>
+          <a:lstStyle/>
+          <a:p>
+            <a:pPr algn="ctr"/>
+            <a:r>
+              <a:rPr sz="1800" b="1">
+                <a:solidFill>
+                  <a:srgbClr val="FFFFFF"/>
+                </a:solidFill>
+                <a:latin typeface="Noto Sans JP"/>
+              </a:rPr>
+              <a:t>事務・法務</a:t>
+            </a:r>
+          </a:p>
+        </p:txBody>
+      </p:sp>
+      <p:sp>
+        <p:nvSpPr>
+          <p:cNvPr id="15" name="Oval 14"/>
+          <p:cNvSpPr/>
+          <p:nvPr/>
+        </p:nvSpPr>
+        <p:spPr>
+          <a:xfrm>
+            <a:off x="9660636" y="2743200"/>
+            <a:ext cx="2011680" cy="2011680"/>
+          </a:xfrm>
+          <a:prstGeom prst="ellipse">
+            <a:avLst/>
+          </a:prstGeom>
+          <a:solidFill>
+            <a:srgbClr val="2563EB"/>
+          </a:solidFill>
+          <a:ln>
+            <a:noFill/>
+          </a:ln>
+        </p:spPr>
+        <p:style>
+          <a:lnRef idx="1">
+            <a:schemeClr val="accent1"/>
+          </a:lnRef>
+          <a:fillRef idx="3">
+            <a:schemeClr val="accent1"/>
+          </a:fillRef>
+          <a:effectRef idx="2">
+            <a:schemeClr val="accent1"/>
+          </a:effectRef>
+          <a:fontRef idx="minor">
+            <a:schemeClr val="lt1"/>
+          </a:fontRef>
+        </p:style>
+        <p:txBody>
+          <a:bodyPr rtlCol="0" anchor="ctr"/>
+          <a:lstStyle/>
+          <a:p>
+            <a:pPr algn="ctr"/>
+          </a:p>
+        </p:txBody>
+      </p:sp>
+      <p:sp>
+        <p:nvSpPr>
+          <p:cNvPr id="16" name="Rectangle 15"/>
+          <p:cNvSpPr/>
+          <p:nvPr/>
+        </p:nvSpPr>
+        <p:spPr>
+          <a:xfrm>
+            <a:off x="9660636" y="2743200"/>
+            <a:ext cx="2011680" cy="2011680"/>
+          </a:xfrm>
+          <a:prstGeom prst="rect">
+            <a:avLst/>
+          </a:prstGeom>
+          <a:noFill/>
+          <a:ln>
+            <a:noFill/>
+          </a:ln>
+        </p:spPr>
+        <p:style>
+          <a:lnRef idx="1">
+            <a:schemeClr val="accent1"/>
+          </a:lnRef>
+          <a:fillRef idx="3">
+            <a:schemeClr val="accent1"/>
+          </a:fillRef>
+          <a:effectRef idx="2">
+            <a:schemeClr val="accent1"/>
+          </a:effectRef>
+          <a:fontRef idx="minor">
+            <a:schemeClr val="lt1"/>
+          </a:fontRef>
+        </p:style>
+        <p:txBody>
+          <a:bodyPr rtlCol="0" anchor="ctr" wrap="square" tIns="54864" bIns="54864"/>
+          <a:lstStyle/>
+          <a:p>
+            <a:pPr algn="ctr"/>
+            <a:r>
+              <a:rPr sz="1800" b="1">
+                <a:solidFill>
+                  <a:srgbClr val="FFFFFF"/>
+                </a:solidFill>
+                <a:latin typeface="Noto Sans JP"/>
+              </a:rPr>
+              <a:t>戦略</a:t>
+            </a:r>
+          </a:p>
+        </p:txBody>
+      </p:sp>
+      <p:sp>
+        <p:nvSpPr>
+          <p:cNvPr id="17" name="Rounded Rectangle 16"/>
+          <p:cNvSpPr/>
+          <p:nvPr/>
+        </p:nvSpPr>
+        <p:spPr>
+          <a:xfrm>
+            <a:off x="457200" y="5212080"/>
+            <a:ext cx="11274552" cy="1097280"/>
           </a:xfrm>
           <a:prstGeom prst="roundRect">
             <a:avLst>
@@ -8721,710 +10067,39 @@
             </a:avLst>
           </a:prstGeom>
           <a:solidFill>
-            <a:srgbClr val="1C3557"/>
-          </a:solidFill>
-          <a:ln>
-            <a:noFill/>
-          </a:ln>
-        </p:spPr>
-        <p:style>
-          <a:lnRef idx="1">
-            <a:schemeClr val="accent1"/>
-          </a:lnRef>
-          <a:fillRef idx="3">
-            <a:schemeClr val="accent1"/>
-          </a:fillRef>
-          <a:effectRef idx="2">
-            <a:schemeClr val="accent1"/>
-          </a:effectRef>
-          <a:fontRef idx="minor">
-            <a:schemeClr val="lt1"/>
-          </a:fontRef>
-        </p:style>
-        <p:txBody>
-          <a:bodyPr rtlCol="0" anchor="ctr" wrap="square" lIns="137160" rIns="137160" tIns="73152" bIns="73152"/>
-          <a:lstStyle/>
-          <a:p>
-            <a:pPr algn="ctr"/>
-            <a:r>
-              <a:rPr sz="1600" b="1">
-                <a:solidFill>
-                  <a:srgbClr val="FFFFFF"/>
-                </a:solidFill>
-                <a:latin typeface="Noto Sans JP"/>
-              </a:rPr>
-              <a:t>髙橋</a:t>
-            </a:r>
-          </a:p>
-        </p:txBody>
-      </p:sp>
-      <p:sp>
-        <p:nvSpPr>
-          <p:cNvPr id="7" name="Down Arrow 6"/>
-          <p:cNvSpPr/>
-          <p:nvPr/>
-        </p:nvSpPr>
-        <p:spPr>
-          <a:xfrm>
-            <a:off x="5870448" y="1874519"/>
-            <a:ext cx="457200" cy="365760"/>
-          </a:xfrm>
-          <a:prstGeom prst="downArrow">
-            <a:avLst/>
-          </a:prstGeom>
-          <a:solidFill>
-            <a:srgbClr val="6B7280"/>
-          </a:solidFill>
-          <a:ln>
-            <a:noFill/>
-          </a:ln>
-        </p:spPr>
-        <p:style>
-          <a:lnRef idx="1">
-            <a:schemeClr val="accent1"/>
-          </a:lnRef>
-          <a:fillRef idx="3">
-            <a:schemeClr val="accent1"/>
-          </a:fillRef>
-          <a:effectRef idx="2">
-            <a:schemeClr val="accent1"/>
-          </a:effectRef>
-          <a:fontRef idx="minor">
-            <a:schemeClr val="lt1"/>
-          </a:fontRef>
-        </p:style>
-        <p:txBody>
-          <a:bodyPr rtlCol="0" anchor="ctr"/>
-          <a:lstStyle/>
-          <a:p>
-            <a:pPr algn="ctr"/>
-          </a:p>
-        </p:txBody>
-      </p:sp>
-      <p:sp>
-        <p:nvSpPr>
-          <p:cNvPr id="8" name="Rounded Rectangle 7"/>
-          <p:cNvSpPr/>
-          <p:nvPr/>
-        </p:nvSpPr>
-        <p:spPr>
-          <a:xfrm>
-            <a:off x="4727448" y="2286000"/>
-            <a:ext cx="2743200" cy="914400"/>
-          </a:xfrm>
-          <a:prstGeom prst="roundRect">
-            <a:avLst>
-              <a:gd name="adj" fmla="val 5000"/>
-            </a:avLst>
-          </a:prstGeom>
-          <a:solidFill>
-            <a:srgbClr val="2563EB"/>
-          </a:solidFill>
-          <a:ln>
-            <a:noFill/>
-          </a:ln>
-        </p:spPr>
-        <p:style>
-          <a:lnRef idx="1">
-            <a:schemeClr val="accent1"/>
-          </a:lnRef>
-          <a:fillRef idx="3">
-            <a:schemeClr val="accent1"/>
-          </a:fillRef>
-          <a:effectRef idx="2">
-            <a:schemeClr val="accent1"/>
-          </a:effectRef>
-          <a:fontRef idx="minor">
-            <a:schemeClr val="lt1"/>
-          </a:fontRef>
-        </p:style>
-        <p:txBody>
-          <a:bodyPr rtlCol="0" anchor="ctr" wrap="square" lIns="137160" rIns="137160" tIns="73152" bIns="73152"/>
-          <a:lstStyle/>
-          <a:p>
-            <a:pPr algn="ctr"/>
-            <a:r>
-              <a:rPr sz="2800" b="1">
-                <a:solidFill>
-                  <a:srgbClr val="FFFFFF"/>
-                </a:solidFill>
-                <a:latin typeface="Noto Sans JP"/>
-              </a:rPr>
-              <a:t>大川</a:t>
-            </a:r>
-          </a:p>
-        </p:txBody>
-      </p:sp>
-      <p:sp>
-        <p:nvSpPr>
-          <p:cNvPr id="9" name="Rectangle 8"/>
-          <p:cNvSpPr/>
-          <p:nvPr/>
-        </p:nvSpPr>
-        <p:spPr>
-          <a:xfrm>
-            <a:off x="1325880" y="3383280"/>
-            <a:ext cx="365760" cy="457200"/>
-          </a:xfrm>
-          <a:prstGeom prst="rect">
-            <a:avLst/>
-          </a:prstGeom>
-          <a:noFill/>
-          <a:ln>
-            <a:noFill/>
-          </a:ln>
-        </p:spPr>
-        <p:style>
-          <a:lnRef idx="1">
-            <a:schemeClr val="accent1"/>
-          </a:lnRef>
-          <a:fillRef idx="3">
-            <a:schemeClr val="accent1"/>
-          </a:fillRef>
-          <a:effectRef idx="2">
-            <a:schemeClr val="accent1"/>
-          </a:effectRef>
-          <a:fontRef idx="minor">
-            <a:schemeClr val="lt1"/>
-          </a:fontRef>
-        </p:style>
-        <p:txBody>
-          <a:bodyPr rtlCol="0" anchor="ctr" wrap="square" lIns="137160" rIns="137160" tIns="73152" bIns="73152"/>
-          <a:lstStyle/>
-          <a:p>
-            <a:pPr algn="ctr"/>
-            <a:r>
-              <a:rPr sz="2400" b="1">
+            <a:srgbClr val="DBEAFE"/>
+          </a:solidFill>
+          <a:ln>
+            <a:noFill/>
+          </a:ln>
+        </p:spPr>
+        <p:style>
+          <a:lnRef idx="1">
+            <a:schemeClr val="accent1"/>
+          </a:lnRef>
+          <a:fillRef idx="3">
+            <a:schemeClr val="accent1"/>
+          </a:fillRef>
+          <a:effectRef idx="2">
+            <a:schemeClr val="accent1"/>
+          </a:effectRef>
+          <a:fontRef idx="minor">
+            <a:schemeClr val="lt1"/>
+          </a:fontRef>
+        </p:style>
+        <p:txBody>
+          <a:bodyPr rtlCol="0" anchor="ctr" wrap="square" tIns="54864" bIns="54864"/>
+          <a:lstStyle/>
+          <a:p>
+            <a:pPr algn="ctr"/>
+            <a:r>
+              <a:rPr sz="3600" b="1">
                 <a:solidFill>
                   <a:srgbClr val="2563EB"/>
                 </a:solidFill>
                 <a:latin typeface="Noto Sans JP"/>
               </a:rPr>
-              <a:t>↓</a:t>
-            </a:r>
-          </a:p>
-        </p:txBody>
-      </p:sp>
-      <p:sp>
-        <p:nvSpPr>
-          <p:cNvPr id="10" name="Rounded Rectangle 9"/>
-          <p:cNvSpPr/>
-          <p:nvPr/>
-        </p:nvSpPr>
-        <p:spPr>
-          <a:xfrm>
-            <a:off x="457200" y="3931920"/>
-            <a:ext cx="2103120" cy="1371600"/>
-          </a:xfrm>
-          <a:prstGeom prst="roundRect">
-            <a:avLst>
-              <a:gd name="adj" fmla="val 5000"/>
-            </a:avLst>
-          </a:prstGeom>
-          <a:solidFill>
-            <a:srgbClr val="2563EB"/>
-          </a:solidFill>
-          <a:ln>
-            <a:noFill/>
-          </a:ln>
-        </p:spPr>
-        <p:style>
-          <a:lnRef idx="1">
-            <a:schemeClr val="accent1"/>
-          </a:lnRef>
-          <a:fillRef idx="3">
-            <a:schemeClr val="accent1"/>
-          </a:fillRef>
-          <a:effectRef idx="2">
-            <a:schemeClr val="accent1"/>
-          </a:effectRef>
-          <a:fontRef idx="minor">
-            <a:schemeClr val="lt1"/>
-          </a:fontRef>
-        </p:style>
-        <p:txBody>
-          <a:bodyPr rtlCol="0" anchor="ctr" wrap="square" lIns="137160" rIns="137160" tIns="73152" bIns="73152"/>
-          <a:lstStyle/>
-          <a:p>
-            <a:pPr algn="ctr"/>
-            <a:r>
-              <a:rPr sz="1600" b="1">
-                <a:solidFill>
-                  <a:srgbClr val="FFFFFF"/>
-                </a:solidFill>
-                <a:latin typeface="Noto Sans JP"/>
-              </a:rPr>
-              <a:t>マーケAI</a:t>
-            </a:r>
-          </a:p>
-        </p:txBody>
-      </p:sp>
-      <p:sp>
-        <p:nvSpPr>
-          <p:cNvPr id="11" name="Rectangle 10"/>
-          <p:cNvSpPr/>
-          <p:nvPr/>
-        </p:nvSpPr>
-        <p:spPr>
-          <a:xfrm>
-            <a:off x="3657600" y="3383280"/>
-            <a:ext cx="365760" cy="457200"/>
-          </a:xfrm>
-          <a:prstGeom prst="rect">
-            <a:avLst/>
-          </a:prstGeom>
-          <a:noFill/>
-          <a:ln>
-            <a:noFill/>
-          </a:ln>
-        </p:spPr>
-        <p:style>
-          <a:lnRef idx="1">
-            <a:schemeClr val="accent1"/>
-          </a:lnRef>
-          <a:fillRef idx="3">
-            <a:schemeClr val="accent1"/>
-          </a:fillRef>
-          <a:effectRef idx="2">
-            <a:schemeClr val="accent1"/>
-          </a:effectRef>
-          <a:fontRef idx="minor">
-            <a:schemeClr val="lt1"/>
-          </a:fontRef>
-        </p:style>
-        <p:txBody>
-          <a:bodyPr rtlCol="0" anchor="ctr" wrap="square" lIns="137160" rIns="137160" tIns="73152" bIns="73152"/>
-          <a:lstStyle/>
-          <a:p>
-            <a:pPr algn="ctr"/>
-            <a:r>
-              <a:rPr sz="2400" b="1">
-                <a:solidFill>
-                  <a:srgbClr val="2563EB"/>
-                </a:solidFill>
-                <a:latin typeface="Noto Sans JP"/>
-              </a:rPr>
-              <a:t>↓</a:t>
-            </a:r>
-          </a:p>
-        </p:txBody>
-      </p:sp>
-      <p:sp>
-        <p:nvSpPr>
-          <p:cNvPr id="12" name="Rounded Rectangle 11"/>
-          <p:cNvSpPr/>
-          <p:nvPr/>
-        </p:nvSpPr>
-        <p:spPr>
-          <a:xfrm>
-            <a:off x="2788920" y="3931920"/>
-            <a:ext cx="2103120" cy="1371600"/>
-          </a:xfrm>
-          <a:prstGeom prst="roundRect">
-            <a:avLst>
-              <a:gd name="adj" fmla="val 5000"/>
-            </a:avLst>
-          </a:prstGeom>
-          <a:solidFill>
-            <a:srgbClr val="2563EB"/>
-          </a:solidFill>
-          <a:ln>
-            <a:noFill/>
-          </a:ln>
-        </p:spPr>
-        <p:style>
-          <a:lnRef idx="1">
-            <a:schemeClr val="accent1"/>
-          </a:lnRef>
-          <a:fillRef idx="3">
-            <a:schemeClr val="accent1"/>
-          </a:fillRef>
-          <a:effectRef idx="2">
-            <a:schemeClr val="accent1"/>
-          </a:effectRef>
-          <a:fontRef idx="minor">
-            <a:schemeClr val="lt1"/>
-          </a:fontRef>
-        </p:style>
-        <p:txBody>
-          <a:bodyPr rtlCol="0" anchor="ctr" wrap="square" lIns="137160" rIns="137160" tIns="73152" bIns="73152"/>
-          <a:lstStyle/>
-          <a:p>
-            <a:pPr algn="ctr"/>
-            <a:r>
-              <a:rPr sz="1600" b="1">
-                <a:solidFill>
-                  <a:srgbClr val="FFFFFF"/>
-                </a:solidFill>
-                <a:latin typeface="Noto Sans JP"/>
-              </a:rPr>
-              <a:t>営業AI</a:t>
-            </a:r>
-          </a:p>
-        </p:txBody>
-      </p:sp>
-      <p:sp>
-        <p:nvSpPr>
-          <p:cNvPr id="13" name="Rectangle 12"/>
-          <p:cNvSpPr/>
-          <p:nvPr/>
-        </p:nvSpPr>
-        <p:spPr>
-          <a:xfrm>
-            <a:off x="5989320" y="3383280"/>
-            <a:ext cx="365760" cy="457200"/>
-          </a:xfrm>
-          <a:prstGeom prst="rect">
-            <a:avLst/>
-          </a:prstGeom>
-          <a:noFill/>
-          <a:ln>
-            <a:noFill/>
-          </a:ln>
-        </p:spPr>
-        <p:style>
-          <a:lnRef idx="1">
-            <a:schemeClr val="accent1"/>
-          </a:lnRef>
-          <a:fillRef idx="3">
-            <a:schemeClr val="accent1"/>
-          </a:fillRef>
-          <a:effectRef idx="2">
-            <a:schemeClr val="accent1"/>
-          </a:effectRef>
-          <a:fontRef idx="minor">
-            <a:schemeClr val="lt1"/>
-          </a:fontRef>
-        </p:style>
-        <p:txBody>
-          <a:bodyPr rtlCol="0" anchor="ctr" wrap="square" lIns="137160" rIns="137160" tIns="73152" bIns="73152"/>
-          <a:lstStyle/>
-          <a:p>
-            <a:pPr algn="ctr"/>
-            <a:r>
-              <a:rPr sz="2400" b="1">
-                <a:solidFill>
-                  <a:srgbClr val="2563EB"/>
-                </a:solidFill>
-                <a:latin typeface="Noto Sans JP"/>
-              </a:rPr>
-              <a:t>↓</a:t>
-            </a:r>
-          </a:p>
-        </p:txBody>
-      </p:sp>
-      <p:sp>
-        <p:nvSpPr>
-          <p:cNvPr id="14" name="Rounded Rectangle 13"/>
-          <p:cNvSpPr/>
-          <p:nvPr/>
-        </p:nvSpPr>
-        <p:spPr>
-          <a:xfrm>
-            <a:off x="5120640" y="3931920"/>
-            <a:ext cx="2103120" cy="1371600"/>
-          </a:xfrm>
-          <a:prstGeom prst="roundRect">
-            <a:avLst>
-              <a:gd name="adj" fmla="val 5000"/>
-            </a:avLst>
-          </a:prstGeom>
-          <a:solidFill>
-            <a:srgbClr val="2563EB"/>
-          </a:solidFill>
-          <a:ln>
-            <a:noFill/>
-          </a:ln>
-        </p:spPr>
-        <p:style>
-          <a:lnRef idx="1">
-            <a:schemeClr val="accent1"/>
-          </a:lnRef>
-          <a:fillRef idx="3">
-            <a:schemeClr val="accent1"/>
-          </a:fillRef>
-          <a:effectRef idx="2">
-            <a:schemeClr val="accent1"/>
-          </a:effectRef>
-          <a:fontRef idx="minor">
-            <a:schemeClr val="lt1"/>
-          </a:fontRef>
-        </p:style>
-        <p:txBody>
-          <a:bodyPr rtlCol="0" anchor="ctr" wrap="square" lIns="137160" rIns="137160" tIns="73152" bIns="73152"/>
-          <a:lstStyle/>
-          <a:p>
-            <a:pPr algn="ctr"/>
-            <a:r>
-              <a:rPr sz="1600" b="1">
-                <a:solidFill>
-                  <a:srgbClr val="FFFFFF"/>
-                </a:solidFill>
-                <a:latin typeface="Noto Sans JP"/>
-              </a:rPr>
-              <a:t>デリバリーAI</a:t>
-            </a:r>
-          </a:p>
-        </p:txBody>
-      </p:sp>
-      <p:sp>
-        <p:nvSpPr>
-          <p:cNvPr id="15" name="Rectangle 14"/>
-          <p:cNvSpPr/>
-          <p:nvPr/>
-        </p:nvSpPr>
-        <p:spPr>
-          <a:xfrm>
-            <a:off x="8321039" y="3383280"/>
-            <a:ext cx="365760" cy="457200"/>
-          </a:xfrm>
-          <a:prstGeom prst="rect">
-            <a:avLst/>
-          </a:prstGeom>
-          <a:noFill/>
-          <a:ln>
-            <a:noFill/>
-          </a:ln>
-        </p:spPr>
-        <p:style>
-          <a:lnRef idx="1">
-            <a:schemeClr val="accent1"/>
-          </a:lnRef>
-          <a:fillRef idx="3">
-            <a:schemeClr val="accent1"/>
-          </a:fillRef>
-          <a:effectRef idx="2">
-            <a:schemeClr val="accent1"/>
-          </a:effectRef>
-          <a:fontRef idx="minor">
-            <a:schemeClr val="lt1"/>
-          </a:fontRef>
-        </p:style>
-        <p:txBody>
-          <a:bodyPr rtlCol="0" anchor="ctr" wrap="square" lIns="137160" rIns="137160" tIns="73152" bIns="73152"/>
-          <a:lstStyle/>
-          <a:p>
-            <a:pPr algn="ctr"/>
-            <a:r>
-              <a:rPr sz="2400" b="1">
-                <a:solidFill>
-                  <a:srgbClr val="2563EB"/>
-                </a:solidFill>
-                <a:latin typeface="Noto Sans JP"/>
-              </a:rPr>
-              <a:t>↓</a:t>
-            </a:r>
-          </a:p>
-        </p:txBody>
-      </p:sp>
-      <p:sp>
-        <p:nvSpPr>
-          <p:cNvPr id="16" name="Rounded Rectangle 15"/>
-          <p:cNvSpPr/>
-          <p:nvPr/>
-        </p:nvSpPr>
-        <p:spPr>
-          <a:xfrm>
-            <a:off x="7452359" y="3931920"/>
-            <a:ext cx="2103120" cy="1371600"/>
-          </a:xfrm>
-          <a:prstGeom prst="roundRect">
-            <a:avLst>
-              <a:gd name="adj" fmla="val 5000"/>
-            </a:avLst>
-          </a:prstGeom>
-          <a:solidFill>
-            <a:srgbClr val="2563EB"/>
-          </a:solidFill>
-          <a:ln>
-            <a:noFill/>
-          </a:ln>
-        </p:spPr>
-        <p:style>
-          <a:lnRef idx="1">
-            <a:schemeClr val="accent1"/>
-          </a:lnRef>
-          <a:fillRef idx="3">
-            <a:schemeClr val="accent1"/>
-          </a:fillRef>
-          <a:effectRef idx="2">
-            <a:schemeClr val="accent1"/>
-          </a:effectRef>
-          <a:fontRef idx="minor">
-            <a:schemeClr val="lt1"/>
-          </a:fontRef>
-        </p:style>
-        <p:txBody>
-          <a:bodyPr rtlCol="0" anchor="ctr" wrap="square" lIns="137160" rIns="137160" tIns="73152" bIns="73152"/>
-          <a:lstStyle/>
-          <a:p>
-            <a:pPr algn="ctr"/>
-            <a:r>
-              <a:rPr sz="1600" b="1">
-                <a:solidFill>
-                  <a:srgbClr val="FFFFFF"/>
-                </a:solidFill>
-                <a:latin typeface="Noto Sans JP"/>
-              </a:rPr>
-              <a:t>事務法務AI</a:t>
-            </a:r>
-          </a:p>
-        </p:txBody>
-      </p:sp>
-      <p:sp>
-        <p:nvSpPr>
-          <p:cNvPr id="17" name="Rectangle 16"/>
-          <p:cNvSpPr/>
-          <p:nvPr/>
-        </p:nvSpPr>
-        <p:spPr>
-          <a:xfrm>
-            <a:off x="10652759" y="3383280"/>
-            <a:ext cx="365760" cy="457200"/>
-          </a:xfrm>
-          <a:prstGeom prst="rect">
-            <a:avLst/>
-          </a:prstGeom>
-          <a:noFill/>
-          <a:ln>
-            <a:noFill/>
-          </a:ln>
-        </p:spPr>
-        <p:style>
-          <a:lnRef idx="1">
-            <a:schemeClr val="accent1"/>
-          </a:lnRef>
-          <a:fillRef idx="3">
-            <a:schemeClr val="accent1"/>
-          </a:fillRef>
-          <a:effectRef idx="2">
-            <a:schemeClr val="accent1"/>
-          </a:effectRef>
-          <a:fontRef idx="minor">
-            <a:schemeClr val="lt1"/>
-          </a:fontRef>
-        </p:style>
-        <p:txBody>
-          <a:bodyPr rtlCol="0" anchor="ctr" wrap="square" lIns="137160" rIns="137160" tIns="73152" bIns="73152"/>
-          <a:lstStyle/>
-          <a:p>
-            <a:pPr algn="ctr"/>
-            <a:r>
-              <a:rPr sz="2400" b="1">
-                <a:solidFill>
-                  <a:srgbClr val="2563EB"/>
-                </a:solidFill>
-                <a:latin typeface="Noto Sans JP"/>
-              </a:rPr>
-              <a:t>↓</a:t>
-            </a:r>
-          </a:p>
-        </p:txBody>
-      </p:sp>
-      <p:sp>
-        <p:nvSpPr>
-          <p:cNvPr id="18" name="Rounded Rectangle 17"/>
-          <p:cNvSpPr/>
-          <p:nvPr/>
-        </p:nvSpPr>
-        <p:spPr>
-          <a:xfrm>
-            <a:off x="9784080" y="3931920"/>
-            <a:ext cx="2103120" cy="1371600"/>
-          </a:xfrm>
-          <a:prstGeom prst="roundRect">
-            <a:avLst>
-              <a:gd name="adj" fmla="val 5000"/>
-            </a:avLst>
-          </a:prstGeom>
-          <a:solidFill>
-            <a:srgbClr val="2563EB"/>
-          </a:solidFill>
-          <a:ln>
-            <a:noFill/>
-          </a:ln>
-        </p:spPr>
-        <p:style>
-          <a:lnRef idx="1">
-            <a:schemeClr val="accent1"/>
-          </a:lnRef>
-          <a:fillRef idx="3">
-            <a:schemeClr val="accent1"/>
-          </a:fillRef>
-          <a:effectRef idx="2">
-            <a:schemeClr val="accent1"/>
-          </a:effectRef>
-          <a:fontRef idx="minor">
-            <a:schemeClr val="lt1"/>
-          </a:fontRef>
-        </p:style>
-        <p:txBody>
-          <a:bodyPr rtlCol="0" anchor="ctr" wrap="square" lIns="137160" rIns="137160" tIns="73152" bIns="73152"/>
-          <a:lstStyle/>
-          <a:p>
-            <a:pPr algn="ctr"/>
-            <a:r>
-              <a:rPr sz="1600" b="1">
-                <a:solidFill>
-                  <a:srgbClr val="FFFFFF"/>
-                </a:solidFill>
-                <a:latin typeface="Noto Sans JP"/>
-              </a:rPr>
-              <a:t>戦略AI</a:t>
-            </a:r>
-          </a:p>
-        </p:txBody>
-      </p:sp>
-      <p:sp>
-        <p:nvSpPr>
-          <p:cNvPr id="19" name="Rounded Rectangle 18"/>
-          <p:cNvSpPr/>
-          <p:nvPr/>
-        </p:nvSpPr>
-        <p:spPr>
-          <a:xfrm>
-            <a:off x="457200" y="5669280"/>
-            <a:ext cx="11274552" cy="914400"/>
-          </a:xfrm>
-          <a:prstGeom prst="roundRect">
-            <a:avLst>
-              <a:gd name="adj" fmla="val 5000"/>
-            </a:avLst>
-          </a:prstGeom>
-          <a:solidFill>
-            <a:srgbClr val="DBEAFE"/>
-          </a:solidFill>
-          <a:ln>
-            <a:noFill/>
-          </a:ln>
-        </p:spPr>
-        <p:style>
-          <a:lnRef idx="1">
-            <a:schemeClr val="accent1"/>
-          </a:lnRef>
-          <a:fillRef idx="3">
-            <a:schemeClr val="accent1"/>
-          </a:fillRef>
-          <a:effectRef idx="2">
-            <a:schemeClr val="accent1"/>
-          </a:effectRef>
-          <a:fontRef idx="minor">
-            <a:schemeClr val="lt1"/>
-          </a:fontRef>
-        </p:style>
-        <p:txBody>
-          <a:bodyPr rtlCol="0" anchor="ctr" wrap="square" lIns="137160" rIns="137160" tIns="73152" bIns="73152"/>
-          <a:lstStyle/>
-          <a:p>
-            <a:pPr algn="ctr"/>
-            <a:r>
-              <a:rPr sz="2200" b="1">
-                <a:solidFill>
-                  <a:srgbClr val="2563EB"/>
-                </a:solidFill>
-                <a:latin typeface="Noto Sans JP"/>
-              </a:rPr>
-              <a:t>大川主導で AI社員5人 を動かして事業部を回している</a:t>
+              <a:t>この 5人 で事業を動かす</a:t>
             </a:r>
           </a:p>
         </p:txBody>
@@ -9524,7 +10199,7 @@
           </a:fontRef>
         </p:style>
         <p:txBody>
-          <a:bodyPr rtlCol="0" anchor="t" wrap="square" lIns="137160" rIns="137160" tIns="73152" bIns="73152"/>
+          <a:bodyPr rtlCol="0" anchor="t" wrap="square" tIns="54864" bIns="54864"/>
           <a:lstStyle/>
           <a:p>
             <a:pPr algn="r"/>
@@ -9574,7 +10249,7 @@
           </a:fontRef>
         </p:style>
         <p:txBody>
-          <a:bodyPr rtlCol="0" anchor="t" wrap="square" lIns="137160" rIns="137160" tIns="73152" bIns="73152"/>
+          <a:bodyPr rtlCol="0" anchor="t" wrap="square" tIns="54864" bIns="54864"/>
           <a:lstStyle/>
           <a:p>
             <a:pPr algn="l"/>
@@ -9671,7 +10346,7 @@
           </a:fontRef>
         </p:style>
         <p:txBody>
-          <a:bodyPr rtlCol="0" anchor="ctr" wrap="square" lIns="137160" rIns="137160" tIns="73152" bIns="73152"/>
+          <a:bodyPr rtlCol="0" anchor="ctr" wrap="square" tIns="54864" bIns="54864"/>
           <a:lstStyle/>
           <a:p>
             <a:pPr algn="ctr"/>
@@ -9725,7 +10400,7 @@
           </a:fontRef>
         </p:style>
         <p:txBody>
-          <a:bodyPr rtlCol="0" anchor="ctr" wrap="square" lIns="137160" rIns="137160" tIns="73152" bIns="73152"/>
+          <a:bodyPr rtlCol="0" anchor="ctr" wrap="square" tIns="54864" bIns="54864"/>
           <a:lstStyle/>
           <a:p>
             <a:pPr algn="l"/>
@@ -9779,7 +10454,7 @@
           </a:fontRef>
         </p:style>
         <p:txBody>
-          <a:bodyPr rtlCol="0" anchor="ctr" wrap="square" lIns="137160" rIns="137160" tIns="73152" bIns="73152"/>
+          <a:bodyPr rtlCol="0" anchor="ctr" wrap="square" tIns="54864" bIns="54864"/>
           <a:lstStyle/>
           <a:p>
             <a:pPr algn="ctr"/>
@@ -9833,7 +10508,7 @@
           </a:fontRef>
         </p:style>
         <p:txBody>
-          <a:bodyPr rtlCol="0" anchor="ctr" wrap="square" lIns="137160" rIns="137160" tIns="73152" bIns="73152"/>
+          <a:bodyPr rtlCol="0" anchor="ctr" wrap="square" tIns="54864" bIns="54864"/>
           <a:lstStyle/>
           <a:p>
             <a:pPr algn="l"/>
@@ -9887,7 +10562,7 @@
           </a:fontRef>
         </p:style>
         <p:txBody>
-          <a:bodyPr rtlCol="0" anchor="ctr" wrap="square" lIns="137160" rIns="137160" tIns="73152" bIns="73152"/>
+          <a:bodyPr rtlCol="0" anchor="ctr" wrap="square" tIns="54864" bIns="54864"/>
           <a:lstStyle/>
           <a:p>
             <a:pPr algn="ctr"/>
@@ -9941,7 +10616,7 @@
           </a:fontRef>
         </p:style>
         <p:txBody>
-          <a:bodyPr rtlCol="0" anchor="ctr" wrap="square" lIns="137160" rIns="137160" tIns="73152" bIns="73152"/>
+          <a:bodyPr rtlCol="0" anchor="ctr" wrap="square" tIns="54864" bIns="54864"/>
           <a:lstStyle/>
           <a:p>
             <a:pPr algn="l"/>
@@ -9995,7 +10670,7 @@
           </a:fontRef>
         </p:style>
         <p:txBody>
-          <a:bodyPr rtlCol="0" anchor="ctr" wrap="square" lIns="137160" rIns="137160" tIns="73152" bIns="73152"/>
+          <a:bodyPr rtlCol="0" anchor="ctr" wrap="square" tIns="54864" bIns="54864"/>
           <a:lstStyle/>
           <a:p>
             <a:pPr algn="ctr"/>
@@ -10049,7 +10724,7 @@
           </a:fontRef>
         </p:style>
         <p:txBody>
-          <a:bodyPr rtlCol="0" anchor="ctr" wrap="square" lIns="137160" rIns="137160" tIns="73152" bIns="73152"/>
+          <a:bodyPr rtlCol="0" anchor="ctr" wrap="square" tIns="54864" bIns="54864"/>
           <a:lstStyle/>
           <a:p>
             <a:pPr algn="l"/>
@@ -10103,7 +10778,7 @@
           </a:fontRef>
         </p:style>
         <p:txBody>
-          <a:bodyPr rtlCol="0" anchor="ctr" wrap="square" lIns="137160" rIns="137160" tIns="73152" bIns="73152"/>
+          <a:bodyPr rtlCol="0" anchor="ctr" wrap="square" tIns="54864" bIns="54864"/>
           <a:lstStyle/>
           <a:p>
             <a:pPr algn="ctr"/>
@@ -10157,7 +10832,7 @@
           </a:fontRef>
         </p:style>
         <p:txBody>
-          <a:bodyPr rtlCol="0" anchor="ctr" wrap="square" lIns="137160" rIns="137160" tIns="73152" bIns="73152"/>
+          <a:bodyPr rtlCol="0" anchor="ctr" wrap="square" tIns="54864" bIns="54864"/>
           <a:lstStyle/>
           <a:p>
             <a:pPr algn="l"/>
@@ -10207,7 +10882,7 @@
           </a:fontRef>
         </p:style>
         <p:txBody>
-          <a:bodyPr rtlCol="0" anchor="t" wrap="square" lIns="137160" rIns="137160" tIns="73152" bIns="73152"/>
+          <a:bodyPr rtlCol="0" anchor="t" wrap="square" tIns="54864" bIns="54864"/>
           <a:lstStyle/>
           <a:p>
             <a:pPr algn="ctr"/>
@@ -10318,7 +10993,7 @@
           </a:fontRef>
         </p:style>
         <p:txBody>
-          <a:bodyPr rtlCol="0" anchor="t" wrap="square" lIns="137160" rIns="137160" tIns="73152" bIns="73152"/>
+          <a:bodyPr rtlCol="0" anchor="t" wrap="square" tIns="54864" bIns="54864"/>
           <a:lstStyle/>
           <a:p>
             <a:pPr algn="r"/>
@@ -10368,7 +11043,7 @@
           </a:fontRef>
         </p:style>
         <p:txBody>
-          <a:bodyPr rtlCol="0" anchor="t" wrap="square" lIns="137160" rIns="137160" tIns="73152" bIns="73152"/>
+          <a:bodyPr rtlCol="0" anchor="t" wrap="square" tIns="54864" bIns="54864"/>
           <a:lstStyle/>
           <a:p>
             <a:pPr algn="l"/>
@@ -10465,7 +11140,7 @@
           </a:fontRef>
         </p:style>
         <p:txBody>
-          <a:bodyPr rtlCol="0" anchor="ctr" wrap="square" lIns="137160" rIns="137160" tIns="73152" bIns="73152"/>
+          <a:bodyPr rtlCol="0" anchor="ctr" wrap="square" tIns="54864" bIns="54864"/>
           <a:lstStyle/>
           <a:p>
             <a:pPr algn="ctr"/>
@@ -10519,7 +11194,7 @@
           </a:fontRef>
         </p:style>
         <p:txBody>
-          <a:bodyPr rtlCol="0" anchor="ctr" wrap="square" lIns="137160" rIns="137160" tIns="73152" bIns="73152"/>
+          <a:bodyPr rtlCol="0" anchor="ctr" wrap="square" tIns="54864" bIns="54864"/>
           <a:lstStyle/>
           <a:p>
             <a:pPr algn="ctr"/>
@@ -10573,7 +11248,7 @@
           </a:fontRef>
         </p:style>
         <p:txBody>
-          <a:bodyPr rtlCol="0" anchor="ctr" wrap="square" lIns="137160" rIns="137160" tIns="73152" bIns="73152"/>
+          <a:bodyPr rtlCol="0" anchor="ctr" wrap="square" tIns="54864" bIns="54864"/>
           <a:lstStyle/>
           <a:p>
             <a:pPr algn="ctr"/>
@@ -10627,7 +11302,7 @@
           </a:fontRef>
         </p:style>
         <p:txBody>
-          <a:bodyPr rtlCol="0" anchor="ctr" wrap="square" lIns="137160" rIns="137160" tIns="73152" bIns="73152"/>
+          <a:bodyPr rtlCol="0" anchor="ctr" wrap="square" tIns="54864" bIns="54864"/>
           <a:lstStyle/>
           <a:p>
             <a:pPr algn="ctr"/>
@@ -10681,7 +11356,7 @@
           </a:fontRef>
         </p:style>
         <p:txBody>
-          <a:bodyPr rtlCol="0" anchor="ctr" wrap="square" lIns="137160" rIns="137160" tIns="73152" bIns="73152"/>
+          <a:bodyPr rtlCol="0" anchor="ctr" wrap="square" tIns="54864" bIns="54864"/>
           <a:lstStyle/>
           <a:p>
             <a:pPr algn="ctr"/>
@@ -10735,7 +11410,7 @@
           </a:fontRef>
         </p:style>
         <p:txBody>
-          <a:bodyPr rtlCol="0" anchor="ctr" wrap="square" lIns="137160" rIns="137160" tIns="73152" bIns="73152"/>
+          <a:bodyPr rtlCol="0" anchor="ctr" wrap="square" tIns="54864" bIns="54864"/>
           <a:lstStyle/>
           <a:p>
             <a:pPr algn="ctr"/>
@@ -10789,7 +11464,7 @@
           </a:fontRef>
         </p:style>
         <p:txBody>
-          <a:bodyPr rtlCol="0" anchor="ctr" wrap="square" lIns="137160" rIns="137160" tIns="73152" bIns="73152"/>
+          <a:bodyPr rtlCol="0" anchor="ctr" wrap="square" tIns="54864" bIns="54864"/>
           <a:lstStyle/>
           <a:p>
             <a:pPr algn="ctr"/>
@@ -10843,7 +11518,7 @@
           </a:fontRef>
         </p:style>
         <p:txBody>
-          <a:bodyPr rtlCol="0" anchor="ctr" wrap="square" lIns="137160" rIns="137160" tIns="73152" bIns="73152"/>
+          <a:bodyPr rtlCol="0" anchor="ctr" wrap="square" tIns="54864" bIns="54864"/>
           <a:lstStyle/>
           <a:p>
             <a:pPr algn="ctr"/>
@@ -10897,7 +11572,7 @@
           </a:fontRef>
         </p:style>
         <p:txBody>
-          <a:bodyPr rtlCol="0" anchor="ctr" wrap="square" lIns="137160" rIns="137160" tIns="73152" bIns="73152"/>
+          <a:bodyPr rtlCol="0" anchor="ctr" wrap="square" tIns="54864" bIns="54864"/>
           <a:lstStyle/>
           <a:p>
             <a:pPr algn="ctr"/>
@@ -10951,7 +11626,7 @@
           </a:fontRef>
         </p:style>
         <p:txBody>
-          <a:bodyPr rtlCol="0" anchor="ctr" wrap="square" lIns="137160" rIns="137160" tIns="73152" bIns="73152"/>
+          <a:bodyPr rtlCol="0" anchor="ctr" wrap="square" tIns="54864" bIns="54864"/>
           <a:lstStyle/>
           <a:p>
             <a:pPr algn="ctr"/>
@@ -11005,7 +11680,7 @@
           </a:fontRef>
         </p:style>
         <p:txBody>
-          <a:bodyPr rtlCol="0" anchor="ctr" wrap="square" lIns="137160" rIns="137160" tIns="73152" bIns="73152"/>
+          <a:bodyPr rtlCol="0" anchor="ctr" wrap="square" tIns="54864" bIns="54864"/>
           <a:lstStyle/>
           <a:p>
             <a:pPr algn="ctr"/>
@@ -11116,7 +11791,7 @@
           </a:fontRef>
         </p:style>
         <p:txBody>
-          <a:bodyPr rtlCol="0" anchor="t" wrap="square" lIns="137160" rIns="137160" tIns="73152" bIns="73152"/>
+          <a:bodyPr rtlCol="0" anchor="t" wrap="square" tIns="54864" bIns="54864"/>
           <a:lstStyle/>
           <a:p>
             <a:pPr algn="r"/>
@@ -11166,7 +11841,7 @@
           </a:fontRef>
         </p:style>
         <p:txBody>
-          <a:bodyPr rtlCol="0" anchor="t" wrap="square" lIns="137160" rIns="137160" tIns="73152" bIns="73152"/>
+          <a:bodyPr rtlCol="0" anchor="t" wrap="square" tIns="54864" bIns="54864"/>
           <a:lstStyle/>
           <a:p>
             <a:pPr algn="l"/>
@@ -11234,7 +11909,7 @@
         <p:spPr>
           <a:xfrm>
             <a:off x="457200" y="1371600"/>
-            <a:ext cx="2194560" cy="640080"/>
+            <a:ext cx="2194560" cy="548640"/>
           </a:xfrm>
           <a:prstGeom prst="roundRect">
             <a:avLst>
@@ -11263,7 +11938,7 @@
           </a:fontRef>
         </p:style>
         <p:txBody>
-          <a:bodyPr rtlCol="0" anchor="ctr" wrap="square" lIns="137160" rIns="137160" tIns="73152" bIns="73152"/>
+          <a:bodyPr rtlCol="0" anchor="ctr" wrap="square" tIns="54864" bIns="54864"/>
           <a:lstStyle/>
           <a:p>
             <a:pPr algn="ctr"/>
@@ -11287,8 +11962,8 @@
         </p:nvSpPr>
         <p:spPr>
           <a:xfrm>
-            <a:off x="457200" y="2103120"/>
-            <a:ext cx="2194560" cy="2743200"/>
+            <a:off x="457200" y="2011680"/>
+            <a:ext cx="2194560" cy="3657600"/>
           </a:xfrm>
           <a:prstGeom prst="roundRect">
             <a:avLst>
@@ -11317,42 +11992,66 @@
           </a:fontRef>
         </p:style>
         <p:txBody>
-          <a:bodyPr rtlCol="0" anchor="ctr" wrap="square" lIns="137160" rIns="137160" tIns="73152" bIns="73152"/>
-          <a:lstStyle/>
-          <a:p>
-            <a:pPr algn="ctr"/>
-            <a:r>
-              <a:rPr sz="1300" b="0">
+          <a:bodyPr rtlCol="0" anchor="t" wrap="square" tIns="54864" bIns="54864"/>
+          <a:lstStyle/>
+          <a:p>
+            <a:pPr algn="l"/>
+            <a:r>
+              <a:rPr sz="1100" b="0">
                 <a:solidFill>
                   <a:srgbClr val="1C3557"/>
                 </a:solidFill>
                 <a:latin typeface="Noto Sans JP"/>
               </a:rPr>
-              <a:t>LP・展示会クリエイティブ</a:t>
-            </a:r>
-          </a:p>
-          <a:p>
-            <a:pPr algn="ctr"/>
-            <a:r>
-              <a:rPr sz="1300" b="0">
+              <a:t>• 展示会クリエイティブ指示書</a:t>
+            </a:r>
+          </a:p>
+          <a:p>
+            <a:pPr algn="l"/>
+            <a:r>
+              <a:rPr sz="1100" b="0">
                 <a:solidFill>
                   <a:srgbClr val="1C3557"/>
                 </a:solidFill>
                 <a:latin typeface="Noto Sans JP"/>
               </a:rPr>
-              <a:t>LINE配信シナリオ</a:t>
-            </a:r>
-          </a:p>
-          <a:p>
-            <a:pPr algn="ctr"/>
-            <a:r>
-              <a:rPr sz="1300" b="0">
+              <a:t>• LINE配信シナリオ</a:t>
+            </a:r>
+          </a:p>
+          <a:p>
+            <a:pPr algn="l"/>
+            <a:r>
+              <a:rPr sz="1100" b="0">
                 <a:solidFill>
                   <a:srgbClr val="1C3557"/>
                 </a:solidFill>
                 <a:latin typeface="Noto Sans JP"/>
               </a:rPr>
-              <a:t>SNS投稿生成</a:t>
+              <a:t>• SNS投稿生成</a:t>
+            </a:r>
+          </a:p>
+          <a:p>
+            <a:pPr algn="l"/>
+            <a:r>
+              <a:rPr sz="1100" b="0">
+                <a:solidFill>
+                  <a:srgbClr val="1C3557"/>
+                </a:solidFill>
+                <a:latin typeface="Noto Sans JP"/>
+              </a:rPr>
+              <a:t>• LP構成案・コピー</a:t>
+            </a:r>
+          </a:p>
+          <a:p>
+            <a:pPr algn="l"/>
+            <a:r>
+              <a:rPr sz="1100" b="0">
+                <a:solidFill>
+                  <a:srgbClr val="1C3557"/>
+                </a:solidFill>
+                <a:latin typeface="Noto Sans JP"/>
+              </a:rPr>
+              <a:t>• YouTube → SNS 転記</a:t>
             </a:r>
           </a:p>
         </p:txBody>
@@ -11366,7 +12065,7 @@
         <p:spPr>
           <a:xfrm>
             <a:off x="2743200" y="1371600"/>
-            <a:ext cx="2194560" cy="640080"/>
+            <a:ext cx="2194560" cy="548640"/>
           </a:xfrm>
           <a:prstGeom prst="roundRect">
             <a:avLst>
@@ -11395,7 +12094,7 @@
           </a:fontRef>
         </p:style>
         <p:txBody>
-          <a:bodyPr rtlCol="0" anchor="ctr" wrap="square" lIns="137160" rIns="137160" tIns="73152" bIns="73152"/>
+          <a:bodyPr rtlCol="0" anchor="ctr" wrap="square" tIns="54864" bIns="54864"/>
           <a:lstStyle/>
           <a:p>
             <a:pPr algn="ctr"/>
@@ -11419,8 +12118,8 @@
         </p:nvSpPr>
         <p:spPr>
           <a:xfrm>
-            <a:off x="2743200" y="2103120"/>
-            <a:ext cx="2194560" cy="2743200"/>
+            <a:off x="2743200" y="2011680"/>
+            <a:ext cx="2194560" cy="3657600"/>
           </a:xfrm>
           <a:prstGeom prst="roundRect">
             <a:avLst>
@@ -11449,42 +12148,66 @@
           </a:fontRef>
         </p:style>
         <p:txBody>
-          <a:bodyPr rtlCol="0" anchor="ctr" wrap="square" lIns="137160" rIns="137160" tIns="73152" bIns="73152"/>
-          <a:lstStyle/>
-          <a:p>
-            <a:pPr algn="ctr"/>
-            <a:r>
-              <a:rPr sz="1300" b="0">
+          <a:bodyPr rtlCol="0" anchor="t" wrap="square" tIns="54864" bIns="54864"/>
+          <a:lstStyle/>
+          <a:p>
+            <a:pPr algn="l"/>
+            <a:r>
+              <a:rPr sz="1100" b="0">
                 <a:solidFill>
                   <a:srgbClr val="1C3557"/>
                 </a:solidFill>
                 <a:latin typeface="Noto Sans JP"/>
               </a:rPr>
-              <a:t>商談前ブリーフィング</a:t>
-            </a:r>
-          </a:p>
-          <a:p>
-            <a:pPr algn="ctr"/>
-            <a:r>
-              <a:rPr sz="1300" b="0">
+              <a:t>• 商談前ブリーフィング</a:t>
+            </a:r>
+          </a:p>
+          <a:p>
+            <a:pPr algn="l"/>
+            <a:r>
+              <a:rPr sz="1100" b="0">
                 <a:solidFill>
                   <a:srgbClr val="1C3557"/>
                 </a:solidFill>
                 <a:latin typeface="Noto Sans JP"/>
               </a:rPr>
-              <a:t>提案書骨子</a:t>
-            </a:r>
-          </a:p>
-          <a:p>
-            <a:pPr algn="ctr"/>
-            <a:r>
-              <a:rPr sz="1300" b="0">
+              <a:t>• 提案書骨子（髙橋メソッド）</a:t>
+            </a:r>
+          </a:p>
+          <a:p>
+            <a:pPr algn="l"/>
+            <a:r>
+              <a:rPr sz="1100" b="0">
                 <a:solidFill>
                   <a:srgbClr val="1C3557"/>
                 </a:solidFill>
                 <a:latin typeface="Noto Sans JP"/>
               </a:rPr>
-              <a:t>フォローメール</a:t>
+              <a:t>• フォローメール（一括）</a:t>
+            </a:r>
+          </a:p>
+          <a:p>
+            <a:pPr algn="l"/>
+            <a:r>
+              <a:rPr sz="1100" b="0">
+                <a:solidFill>
+                  <a:srgbClr val="1C3557"/>
+                </a:solidFill>
+                <a:latin typeface="Noto Sans JP"/>
+              </a:rPr>
+              <a:t>• 要件ヒアリング整理</a:t>
+            </a:r>
+          </a:p>
+          <a:p>
+            <a:pPr algn="l"/>
+            <a:r>
+              <a:rPr sz="1100" b="0">
+                <a:solidFill>
+                  <a:srgbClr val="1C3557"/>
+                </a:solidFill>
+                <a:latin typeface="Noto Sans JP"/>
+              </a:rPr>
+              <a:t>• 見積書作成</a:t>
             </a:r>
           </a:p>
         </p:txBody>
@@ -11498,7 +12221,7 @@
         <p:spPr>
           <a:xfrm>
             <a:off x="5029200" y="1371600"/>
-            <a:ext cx="2194560" cy="640080"/>
+            <a:ext cx="2194560" cy="548640"/>
           </a:xfrm>
           <a:prstGeom prst="roundRect">
             <a:avLst>
@@ -11527,7 +12250,7 @@
           </a:fontRef>
         </p:style>
         <p:txBody>
-          <a:bodyPr rtlCol="0" anchor="ctr" wrap="square" lIns="137160" rIns="137160" tIns="73152" bIns="73152"/>
+          <a:bodyPr rtlCol="0" anchor="ctr" wrap="square" tIns="54864" bIns="54864"/>
           <a:lstStyle/>
           <a:p>
             <a:pPr algn="ctr"/>
@@ -11551,8 +12274,8 @@
         </p:nvSpPr>
         <p:spPr>
           <a:xfrm>
-            <a:off x="5029200" y="2103120"/>
-            <a:ext cx="2194560" cy="2743200"/>
+            <a:off x="5029200" y="2011680"/>
+            <a:ext cx="2194560" cy="3657600"/>
           </a:xfrm>
           <a:prstGeom prst="roundRect">
             <a:avLst>
@@ -11581,42 +12304,66 @@
           </a:fontRef>
         </p:style>
         <p:txBody>
-          <a:bodyPr rtlCol="0" anchor="ctr" wrap="square" lIns="137160" rIns="137160" tIns="73152" bIns="73152"/>
-          <a:lstStyle/>
-          <a:p>
-            <a:pPr algn="ctr"/>
-            <a:r>
-              <a:rPr sz="1300" b="0">
+          <a:bodyPr rtlCol="0" anchor="t" wrap="square" tIns="54864" bIns="54864"/>
+          <a:lstStyle/>
+          <a:p>
+            <a:pPr algn="l"/>
+            <a:r>
+              <a:rPr sz="1100" b="0">
                 <a:solidFill>
                   <a:srgbClr val="1C3557"/>
                 </a:solidFill>
                 <a:latin typeface="Noto Sans JP"/>
               </a:rPr>
-              <a:t>研修スライド作成</a:t>
-            </a:r>
-          </a:p>
-          <a:p>
-            <a:pPr algn="ctr"/>
-            <a:r>
-              <a:rPr sz="1300" b="0">
+              <a:t>• NTT 研修スライド200枚</a:t>
+            </a:r>
+          </a:p>
+          <a:p>
+            <a:pPr algn="l"/>
+            <a:r>
+              <a:rPr sz="1100" b="0">
                 <a:solidFill>
                   <a:srgbClr val="1C3557"/>
                 </a:solidFill>
                 <a:latin typeface="Noto Sans JP"/>
               </a:rPr>
-              <a:t>Dify構築（5h）</a:t>
-            </a:r>
-          </a:p>
-          <a:p>
-            <a:pPr algn="ctr"/>
-            <a:r>
-              <a:rPr sz="1300" b="0">
+              <a:t>• 中西 Dify構築（5h）</a:t>
+            </a:r>
+          </a:p>
+          <a:p>
+            <a:pPr algn="l"/>
+            <a:r>
+              <a:rPr sz="1100" b="0">
                 <a:solidFill>
                   <a:srgbClr val="1C3557"/>
                 </a:solidFill>
                 <a:latin typeface="Noto Sans JP"/>
               </a:rPr>
-              <a:t>案件PM</a:t>
+              <a:t>• キリン 研修PM</a:t>
+            </a:r>
+          </a:p>
+          <a:p>
+            <a:pPr algn="l"/>
+            <a:r>
+              <a:rPr sz="1100" b="0">
+                <a:solidFill>
+                  <a:srgbClr val="1C3557"/>
+                </a:solidFill>
+                <a:latin typeface="Noto Sans JP"/>
+              </a:rPr>
+              <a:t>• ブロードリンク 省エネ運用</a:t>
+            </a:r>
+          </a:p>
+          <a:p>
+            <a:pPr algn="l"/>
+            <a:r>
+              <a:rPr sz="1100" b="0">
+                <a:solidFill>
+                  <a:srgbClr val="1C3557"/>
+                </a:solidFill>
+                <a:latin typeface="Noto Sans JP"/>
+              </a:rPr>
+              <a:t>• カリキュラム設計</a:t>
             </a:r>
           </a:p>
         </p:txBody>
@@ -11630,7 +12377,7 @@
         <p:spPr>
           <a:xfrm>
             <a:off x="7315200" y="1371600"/>
-            <a:ext cx="2194560" cy="640080"/>
+            <a:ext cx="2194560" cy="548640"/>
           </a:xfrm>
           <a:prstGeom prst="roundRect">
             <a:avLst>
@@ -11659,7 +12406,7 @@
           </a:fontRef>
         </p:style>
         <p:txBody>
-          <a:bodyPr rtlCol="0" anchor="ctr" wrap="square" lIns="137160" rIns="137160" tIns="73152" bIns="73152"/>
+          <a:bodyPr rtlCol="0" anchor="ctr" wrap="square" tIns="54864" bIns="54864"/>
           <a:lstStyle/>
           <a:p>
             <a:pPr algn="ctr"/>
@@ -11683,8 +12430,8 @@
         </p:nvSpPr>
         <p:spPr>
           <a:xfrm>
-            <a:off x="7315200" y="2103120"/>
-            <a:ext cx="2194560" cy="2743200"/>
+            <a:off x="7315200" y="2011680"/>
+            <a:ext cx="2194560" cy="3657600"/>
           </a:xfrm>
           <a:prstGeom prst="roundRect">
             <a:avLst>
@@ -11713,42 +12460,66 @@
           </a:fontRef>
         </p:style>
         <p:txBody>
-          <a:bodyPr rtlCol="0" anchor="ctr" wrap="square" lIns="137160" rIns="137160" tIns="73152" bIns="73152"/>
-          <a:lstStyle/>
-          <a:p>
-            <a:pPr algn="ctr"/>
-            <a:r>
-              <a:rPr sz="1300" b="0">
+          <a:bodyPr rtlCol="0" anchor="t" wrap="square" tIns="54864" bIns="54864"/>
+          <a:lstStyle/>
+          <a:p>
+            <a:pPr algn="l"/>
+            <a:r>
+              <a:rPr sz="1100" b="0">
                 <a:solidFill>
                   <a:srgbClr val="1C3557"/>
                 </a:solidFill>
                 <a:latin typeface="Noto Sans JP"/>
               </a:rPr>
-              <a:t>契約書チェック</a:t>
-            </a:r>
-          </a:p>
-          <a:p>
-            <a:pPr algn="ctr"/>
-            <a:r>
-              <a:rPr sz="1300" b="0">
+              <a:t>• 契約書チェック</a:t>
+            </a:r>
+          </a:p>
+          <a:p>
+            <a:pPr algn="l"/>
+            <a:r>
+              <a:rPr sz="1100" b="0">
                 <a:solidFill>
                   <a:srgbClr val="1C3557"/>
                 </a:solidFill>
                 <a:latin typeface="Noto Sans JP"/>
               </a:rPr>
-              <a:t>PL自動更新</a:t>
-            </a:r>
-          </a:p>
-          <a:p>
-            <a:pPr algn="ctr"/>
-            <a:r>
-              <a:rPr sz="1300" b="0">
+              <a:t>• PL自動更新（SUMIFS）</a:t>
+            </a:r>
+          </a:p>
+          <a:p>
+            <a:pPr algn="l"/>
+            <a:r>
+              <a:rPr sz="1100" b="0">
                 <a:solidFill>
                   <a:srgbClr val="1C3557"/>
                 </a:solidFill>
                 <a:latin typeface="Noto Sans JP"/>
               </a:rPr>
-              <a:t>受信トレイ整理</a:t>
+              <a:t>• 受信トレイ整理</a:t>
+            </a:r>
+          </a:p>
+          <a:p>
+            <a:pPr algn="l"/>
+            <a:r>
+              <a:rPr sz="1100" b="0">
+                <a:solidFill>
+                  <a:srgbClr val="1C3557"/>
+                </a:solidFill>
+                <a:latin typeface="Noto Sans JP"/>
+              </a:rPr>
+              <a:t>• 月次レポート生成</a:t>
+            </a:r>
+          </a:p>
+          <a:p>
+            <a:pPr algn="l"/>
+            <a:r>
+              <a:rPr sz="1100" b="0">
+                <a:solidFill>
+                  <a:srgbClr val="1C3557"/>
+                </a:solidFill>
+                <a:latin typeface="Noto Sans JP"/>
+              </a:rPr>
+              <a:t>• ツールコスト最適化</a:t>
             </a:r>
           </a:p>
         </p:txBody>
@@ -11762,7 +12533,7 @@
         <p:spPr>
           <a:xfrm>
             <a:off x="9601200" y="1371600"/>
-            <a:ext cx="2194560" cy="640080"/>
+            <a:ext cx="2194560" cy="548640"/>
           </a:xfrm>
           <a:prstGeom prst="roundRect">
             <a:avLst>
@@ -11791,7 +12562,7 @@
           </a:fontRef>
         </p:style>
         <p:txBody>
-          <a:bodyPr rtlCol="0" anchor="ctr" wrap="square" lIns="137160" rIns="137160" tIns="73152" bIns="73152"/>
+          <a:bodyPr rtlCol="0" anchor="ctr" wrap="square" tIns="54864" bIns="54864"/>
           <a:lstStyle/>
           <a:p>
             <a:pPr algn="ctr"/>
@@ -11815,8 +12586,8 @@
         </p:nvSpPr>
         <p:spPr>
           <a:xfrm>
-            <a:off x="9601200" y="2103120"/>
-            <a:ext cx="2194560" cy="2743200"/>
+            <a:off x="9601200" y="2011680"/>
+            <a:ext cx="2194560" cy="3657600"/>
           </a:xfrm>
           <a:prstGeom prst="roundRect">
             <a:avLst>
@@ -11845,90 +12616,110 @@
           </a:fontRef>
         </p:style>
         <p:txBody>
-          <a:bodyPr rtlCol="0" anchor="ctr" wrap="square" lIns="137160" rIns="137160" tIns="73152" bIns="73152"/>
-          <a:lstStyle/>
-          <a:p>
-            <a:pPr algn="ctr"/>
-            <a:r>
-              <a:rPr sz="1300" b="0">
+          <a:bodyPr rtlCol="0" anchor="t" wrap="square" tIns="54864" bIns="54864"/>
+          <a:lstStyle/>
+          <a:p>
+            <a:pPr algn="l"/>
+            <a:r>
+              <a:rPr sz="1100" b="0">
                 <a:solidFill>
                   <a:srgbClr val="1C3557"/>
                 </a:solidFill>
                 <a:latin typeface="Noto Sans JP"/>
               </a:rPr>
-              <a:t>競合調査</a:t>
-            </a:r>
-          </a:p>
-          <a:p>
-            <a:pPr algn="ctr"/>
-            <a:r>
-              <a:rPr sz="1300" b="0">
+              <a:t>• 競合調査</a:t>
+            </a:r>
+          </a:p>
+          <a:p>
+            <a:pPr algn="l"/>
+            <a:r>
+              <a:rPr sz="1100" b="0">
                 <a:solidFill>
                   <a:srgbClr val="1C3557"/>
                 </a:solidFill>
                 <a:latin typeface="Noto Sans JP"/>
               </a:rPr>
-              <a:t>料金設計</a:t>
-            </a:r>
-          </a:p>
-          <a:p>
-            <a:pPr algn="ctr"/>
-            <a:r>
-              <a:rPr sz="1300" b="0">
+              <a:t>• 料金設計試算</a:t>
+            </a:r>
+          </a:p>
+          <a:p>
+            <a:pPr algn="l"/>
+            <a:r>
+              <a:rPr sz="1100" b="0">
                 <a:solidFill>
                   <a:srgbClr val="1C3557"/>
                 </a:solidFill>
                 <a:latin typeface="Noto Sans JP"/>
               </a:rPr>
-              <a:t>プロダクト改善案</a:t>
-            </a:r>
-          </a:p>
-        </p:txBody>
-      </p:sp>
-      <p:sp>
-        <p:nvSpPr>
-          <p:cNvPr id="16" name="Rounded Rectangle 15"/>
-          <p:cNvSpPr/>
-          <p:nvPr/>
-        </p:nvSpPr>
-        <p:spPr>
-          <a:xfrm>
-            <a:off x="457200" y="5212080"/>
-            <a:ext cx="11274552" cy="1097280"/>
-          </a:xfrm>
-          <a:prstGeom prst="roundRect">
-            <a:avLst>
-              <a:gd name="adj" fmla="val 5000"/>
-            </a:avLst>
-          </a:prstGeom>
-          <a:solidFill>
-            <a:srgbClr val="DBEAFE"/>
-          </a:solidFill>
-          <a:ln>
-            <a:noFill/>
-          </a:ln>
-        </p:spPr>
-        <p:style>
-          <a:lnRef idx="1">
-            <a:schemeClr val="accent1"/>
-          </a:lnRef>
-          <a:fillRef idx="3">
-            <a:schemeClr val="accent1"/>
-          </a:fillRef>
-          <a:effectRef idx="2">
-            <a:schemeClr val="accent1"/>
-          </a:effectRef>
-          <a:fontRef idx="minor">
-            <a:schemeClr val="lt1"/>
-          </a:fontRef>
-        </p:style>
-        <p:txBody>
-          <a:bodyPr rtlCol="0" anchor="ctr" wrap="square" lIns="137160" rIns="137160" tIns="73152" bIns="73152"/>
-          <a:lstStyle/>
-          <a:p>
-            <a:pPr algn="ctr"/>
-            <a:r>
-              <a:rPr sz="2400" b="1">
+              <a:t>• ローンチ後データ分析</a:t>
+            </a:r>
+          </a:p>
+          <a:p>
+            <a:pPr algn="l"/>
+            <a:r>
+              <a:rPr sz="1100" b="0">
+                <a:solidFill>
+                  <a:srgbClr val="1C3557"/>
+                </a:solidFill>
+                <a:latin typeface="Noto Sans JP"/>
+              </a:rPr>
+              <a:t>• プロダクト改善提案</a:t>
+            </a:r>
+          </a:p>
+          <a:p>
+            <a:pPr algn="l"/>
+            <a:r>
+              <a:rPr sz="1100" b="0">
+                <a:solidFill>
+                  <a:srgbClr val="1C3557"/>
+                </a:solidFill>
+                <a:latin typeface="Noto Sans JP"/>
+              </a:rPr>
+              <a:t>• 朝の工程表 / 週次レポート</a:t>
+            </a:r>
+          </a:p>
+        </p:txBody>
+      </p:sp>
+      <p:sp>
+        <p:nvSpPr>
+          <p:cNvPr id="16" name="Rectangle 15"/>
+          <p:cNvSpPr/>
+          <p:nvPr/>
+        </p:nvSpPr>
+        <p:spPr>
+          <a:xfrm>
+            <a:off x="457200" y="5852160"/>
+            <a:ext cx="11274552" cy="731520"/>
+          </a:xfrm>
+          <a:prstGeom prst="rect">
+            <a:avLst/>
+          </a:prstGeom>
+          <a:noFill/>
+          <a:ln>
+            <a:noFill/>
+          </a:ln>
+        </p:spPr>
+        <p:style>
+          <a:lnRef idx="1">
+            <a:schemeClr val="accent1"/>
+          </a:lnRef>
+          <a:fillRef idx="3">
+            <a:schemeClr val="accent1"/>
+          </a:fillRef>
+          <a:effectRef idx="2">
+            <a:schemeClr val="accent1"/>
+          </a:effectRef>
+          <a:fontRef idx="minor">
+            <a:schemeClr val="lt1"/>
+          </a:fontRef>
+        </p:style>
+        <p:txBody>
+          <a:bodyPr rtlCol="0" anchor="ctr" wrap="square" tIns="54864" bIns="54864"/>
+          <a:lstStyle/>
+          <a:p>
+            <a:pPr algn="ctr"/>
+            <a:r>
+              <a:rPr sz="2000" b="1">
                 <a:solidFill>
                   <a:srgbClr val="2563EB"/>
                 </a:solidFill>
@@ -12034,7 +12825,7 @@
           </a:fontRef>
         </p:style>
         <p:txBody>
-          <a:bodyPr rtlCol="0" anchor="t" wrap="square" lIns="137160" rIns="137160" tIns="73152" bIns="73152"/>
+          <a:bodyPr rtlCol="0" anchor="t" wrap="square" tIns="54864" bIns="54864"/>
           <a:lstStyle/>
           <a:p>
             <a:pPr algn="ctr"/>
@@ -12127,7 +12918,7 @@
           </a:fontRef>
         </p:style>
         <p:txBody>
-          <a:bodyPr rtlCol="0" anchor="ctr" wrap="square" lIns="137160" rIns="137160" tIns="73152" bIns="73152"/>
+          <a:bodyPr rtlCol="0" anchor="ctr" wrap="square" tIns="54864" bIns="54864"/>
           <a:lstStyle/>
           <a:p>
             <a:pPr algn="ctr"/>
@@ -12177,7 +12968,7 @@
           </a:fontRef>
         </p:style>
         <p:txBody>
-          <a:bodyPr rtlCol="0" anchor="ctr" wrap="square" lIns="137160" rIns="137160" tIns="73152" bIns="73152"/>
+          <a:bodyPr rtlCol="0" anchor="ctr" wrap="square" tIns="54864" bIns="54864"/>
           <a:lstStyle/>
           <a:p>
             <a:pPr algn="ctr"/>
@@ -12270,7 +13061,7 @@
           </a:fontRef>
         </p:style>
         <p:txBody>
-          <a:bodyPr rtlCol="0" anchor="t" wrap="square" lIns="137160" rIns="137160" tIns="73152" bIns="73152"/>
+          <a:bodyPr rtlCol="0" anchor="t" wrap="square" tIns="54864" bIns="54864"/>
           <a:lstStyle/>
           <a:p>
             <a:pPr algn="r"/>

--- a/strategy/AI社員5人_発表_20260426.pptx
+++ b/strategy/AI社員5人_発表_20260426.pptx
@@ -1056,7 +1056,7 @@
           </a:p>
           <a:p>
             <a:r>
-              <a:t>Kawaru事業部は、決まった業務がない事業部です。</a:t>
+              <a:t>Kawaru事業部は、決まった業務が少ない事業部です。</a:t>
             </a:r>
           </a:p>
           <a:p>
@@ -9295,7 +9295,7 @@
                 </a:solidFill>
                 <a:latin typeface="Noto Sans JP"/>
               </a:rPr>
-              <a:t>決まった業務がない</a:t>
+              <a:t>決まった業務が少ない</a:t>
             </a:r>
           </a:p>
         </p:txBody>

--- a/strategy/AI社員5人_発表_20260426.pptx
+++ b/strategy/AI社員5人_発表_20260426.pptx
@@ -17,8 +17,6 @@
     <p:sldId id="265" r:id="rId17"/>
     <p:sldId id="266" r:id="rId18"/>
     <p:sldId id="267" r:id="rId19"/>
-    <p:sldId id="268" r:id="rId20"/>
-    <p:sldId id="269" r:id="rId21"/>
   </p:sldIdLst>
   <p:sldSz cx="12188952" cy="6858000" type="screen4x3"/>
   <p:notesSz cx="6858000" cy="9144000"/>
@@ -596,17 +594,17 @@
           <a:lstStyle/>
           <a:p>
             <a:r>
-              <a:t>【橋渡し・8秒】</a:t>
-            </a:r>
-          </a:p>
-          <a:p>
-            <a:r>
-              <a:t>そして、これが売上に直結しています。</a:t>
-            </a:r>
-          </a:p>
-          <a:p>
-            <a:r>
-              <a:t>具体的な数字をお見せします。</a:t>
+              <a:t>【現状→今後・7秒】</a:t>
+            </a:r>
+          </a:p>
+          <a:p>
+            <a:r>
+              <a:t>ここまでが現状の話です。</a:t>
+            </a:r>
+          </a:p>
+          <a:p>
+            <a:r>
+              <a:t>ここから9月末までの今後の話、具体的なロードマップを共有します。</a:t>
             </a:r>
           </a:p>
           <a:p/>
@@ -677,32 +675,42 @@
           <a:lstStyle/>
           <a:p>
             <a:r>
-              <a:t>【売上実績・20秒】</a:t>
-            </a:r>
-          </a:p>
-          <a:p>
-            <a:r>
-              <a:t>10月から3月の半期で、売上6,710,000円。</a:t>
-            </a:r>
-          </a:p>
-          <a:p>
-            <a:r>
-              <a:t>NTTネクシア、中西製作所、キリン、ブロードリンク、4案件すべてにAI社員が関与しています。</a:t>
-            </a:r>
-          </a:p>
-          <a:p>
-            <a:r>
-              <a:t>NTT研修スライド200枚は2週間で完納、中西のDify構築は5時間で設計しました。</a:t>
-            </a:r>
-          </a:p>
-          <a:p>
-            <a:r>
-              <a:t>月換算では464,000円、AI社員1.3人分がすでに稼働している計算になります。</a:t>
-            </a:r>
-          </a:p>
-          <a:p>
-            <a:r>
-              <a:t>これは机上の空論ではなく、実際にお客さんに納品している事実です。</a:t>
+              <a:t>【ロードマップ・25秒】</a:t>
+            </a:r>
+          </a:p>
+          <a:p>
+            <a:r>
+              <a:t>9月末までのロードマップです。</a:t>
+            </a:r>
+          </a:p>
+          <a:p>
+            <a:r>
+              <a:t>4月の現在は、5月のβ版ローンチと6月の8EXPO展示会に向けた制作物作成が中心です。</a:t>
+            </a:r>
+          </a:p>
+          <a:p>
+            <a:r>
+              <a:t>5月はローンチ実施と、6月の展示会に向けた戦略・戦術設計にシフト。集客リクエスト配信、当日オペ、営業トークスクリプトなど、マーケと営業の比重が大きい時期です。AI社員を育てながら走らせます。</a:t>
+            </a:r>
+          </a:p>
+          <a:p>
+            <a:r>
+              <a:t>6月末で2人分。8EXPO出展とローンチ後の運用フィードバック反映、5人の連携テスト。デリバリー内容が変化する時期で、顧客の声を聞きながらブラッシュアップします。</a:t>
+            </a:r>
+          </a:p>
+          <a:p>
+            <a:r>
+              <a:t>7-8月は3〜4人分。顧客が増えて事務処理も増えるため、事務・法務AIを稼働させて対応します。</a:t>
+            </a:r>
+          </a:p>
+          <a:p>
+            <a:r>
+              <a:t>9月末で5人分。Agent Teamsで5人協働を実装し、事業を動かす完成形を目指します。</a:t>
+            </a:r>
+          </a:p>
+          <a:p>
+            <a:r>
+              <a:t>新規事業なので進行で変わることも多いですが、5人完成というゴールは確実に進めます。</a:t>
             </a:r>
           </a:p>
           <a:p/>
@@ -773,193 +781,6 @@
           <a:lstStyle/>
           <a:p>
             <a:r>
-              <a:t>【現状→今後・7秒】</a:t>
-            </a:r>
-          </a:p>
-          <a:p>
-            <a:r>
-              <a:t>ここまでが現状の話です。</a:t>
-            </a:r>
-          </a:p>
-          <a:p>
-            <a:r>
-              <a:t>ここから9月末までの今後の話、具体的なロードマップを共有します。</a:t>
-            </a:r>
-          </a:p>
-          <a:p/>
-        </p:txBody>
-      </p:sp>
-      <p:sp>
-        <p:nvSpPr>
-          <p:cNvPr id="4" name="Slide Number Placeholder 3"/>
-          <p:cNvSpPr>
-            <a:spLocks noGrp="1"/>
-          </p:cNvSpPr>
-          <p:nvPr>
-            <p:ph type="sldNum" idx="5" sz="quarter"/>
-          </p:nvPr>
-        </p:nvSpPr>
-        <p:spPr/>
-      </p:sp>
-    </p:spTree>
-  </p:cSld>
-  <p:clrMapOvr>
-    <a:masterClrMapping/>
-  </p:clrMapOvr>
-</p:notes>
-</file>
-
-<file path=ppt/notesSlides/notesSlide13.xml><?xml version="1.0" encoding="utf-8"?>
-<p:notes xmlns:a="http://schemas.openxmlformats.org/drawingml/2006/main" xmlns:p="http://schemas.openxmlformats.org/presentationml/2006/main" xmlns:r="http://schemas.openxmlformats.org/officeDocument/2006/relationships">
-  <p:cSld>
-    <p:spTree>
-      <p:nvGrpSpPr>
-        <p:cNvPr id="1" name=""/>
-        <p:cNvGrpSpPr/>
-        <p:nvPr/>
-      </p:nvGrpSpPr>
-      <p:grpSpPr>
-        <a:xfrm>
-          <a:off x="0" y="0"/>
-          <a:ext cx="0" cy="0"/>
-          <a:chOff x="0" y="0"/>
-          <a:chExt cx="0" cy="0"/>
-        </a:xfrm>
-      </p:grpSpPr>
-      <p:sp>
-        <p:nvSpPr>
-          <p:cNvPr id="2" name="Slide Image Placeholder 1"/>
-          <p:cNvSpPr>
-            <a:spLocks noGrp="1"/>
-          </p:cNvSpPr>
-          <p:nvPr>
-            <p:ph type="sldImg" idx="2"/>
-          </p:nvPr>
-        </p:nvSpPr>
-        <p:spPr/>
-      </p:sp>
-      <p:sp>
-        <p:nvSpPr>
-          <p:cNvPr id="3" name="Notes Placeholder 2"/>
-          <p:cNvSpPr>
-            <a:spLocks noGrp="1"/>
-          </p:cNvSpPr>
-          <p:nvPr>
-            <p:ph type="body" idx="3" sz="quarter"/>
-          </p:nvPr>
-        </p:nvSpPr>
-        <p:spPr/>
-        <p:txBody>
-          <a:bodyPr/>
-          <a:lstStyle/>
-          <a:p>
-            <a:r>
-              <a:t>【ロードマップ・25秒】</a:t>
-            </a:r>
-          </a:p>
-          <a:p>
-            <a:r>
-              <a:t>9月末までのロードマップです。</a:t>
-            </a:r>
-          </a:p>
-          <a:p>
-            <a:r>
-              <a:t>4月の現在は、5月のβ版ローンチと6月の8EXPO展示会に向けた制作物作成が中心です。</a:t>
-            </a:r>
-          </a:p>
-          <a:p>
-            <a:r>
-              <a:t>5月はローンチ実施と、6月の展示会に向けた戦略・戦術設計にシフト。集客リクエスト配信、当日オペ、営業トークスクリプトなど、マーケと営業の比重が大きい時期です。AI社員を育てながら走らせます。</a:t>
-            </a:r>
-          </a:p>
-          <a:p>
-            <a:r>
-              <a:t>6月末で2人分。8EXPO出展とローンチ後の運用フィードバック反映、5人の連携テスト。デリバリー内容が変化する時期で、顧客の声を聞きながらブラッシュアップします。</a:t>
-            </a:r>
-          </a:p>
-          <a:p>
-            <a:r>
-              <a:t>7-8月は3〜4人分。顧客が増えて事務処理も増えるため、事務・法務AIを稼働させて対応します。</a:t>
-            </a:r>
-          </a:p>
-          <a:p>
-            <a:r>
-              <a:t>9月末で5人分。Agent Teamsで5人協働を実装し、事業を動かす完成形を目指します。</a:t>
-            </a:r>
-          </a:p>
-          <a:p>
-            <a:r>
-              <a:t>新規事業なので進行で変わることも多いですが、5人完成というゴールは確実に進めます。</a:t>
-            </a:r>
-          </a:p>
-          <a:p/>
-        </p:txBody>
-      </p:sp>
-      <p:sp>
-        <p:nvSpPr>
-          <p:cNvPr id="4" name="Slide Number Placeholder 3"/>
-          <p:cNvSpPr>
-            <a:spLocks noGrp="1"/>
-          </p:cNvSpPr>
-          <p:nvPr>
-            <p:ph type="sldNum" idx="5" sz="quarter"/>
-          </p:nvPr>
-        </p:nvSpPr>
-        <p:spPr/>
-      </p:sp>
-    </p:spTree>
-  </p:cSld>
-  <p:clrMapOvr>
-    <a:masterClrMapping/>
-  </p:clrMapOvr>
-</p:notes>
-</file>
-
-<file path=ppt/notesSlides/notesSlide14.xml><?xml version="1.0" encoding="utf-8"?>
-<p:notes xmlns:a="http://schemas.openxmlformats.org/drawingml/2006/main" xmlns:p="http://schemas.openxmlformats.org/presentationml/2006/main" xmlns:r="http://schemas.openxmlformats.org/officeDocument/2006/relationships">
-  <p:cSld>
-    <p:spTree>
-      <p:nvGrpSpPr>
-        <p:cNvPr id="1" name=""/>
-        <p:cNvGrpSpPr/>
-        <p:nvPr/>
-      </p:nvGrpSpPr>
-      <p:grpSpPr>
-        <a:xfrm>
-          <a:off x="0" y="0"/>
-          <a:ext cx="0" cy="0"/>
-          <a:chOff x="0" y="0"/>
-          <a:chExt cx="0" cy="0"/>
-        </a:xfrm>
-      </p:grpSpPr>
-      <p:sp>
-        <p:nvSpPr>
-          <p:cNvPr id="2" name="Slide Image Placeholder 1"/>
-          <p:cNvSpPr>
-            <a:spLocks noGrp="1"/>
-          </p:cNvSpPr>
-          <p:nvPr>
-            <p:ph type="sldImg" idx="2"/>
-          </p:nvPr>
-        </p:nvSpPr>
-        <p:spPr/>
-      </p:sp>
-      <p:sp>
-        <p:nvSpPr>
-          <p:cNvPr id="3" name="Notes Placeholder 2"/>
-          <p:cNvSpPr>
-            <a:spLocks noGrp="1"/>
-          </p:cNvSpPr>
-          <p:nvPr>
-            <p:ph type="body" idx="3" sz="quarter"/>
-          </p:nvPr>
-        </p:nvSpPr>
-        <p:spPr/>
-        <p:txBody>
-          <a:bodyPr/>
-          <a:lstStyle/>
-          <a:p>
-            <a:r>
               <a:t>【締め・15秒】</a:t>
             </a:r>
           </a:p>
@@ -1329,7 +1150,7 @@
           <a:lstStyle/>
           <a:p>
             <a:r>
-              <a:t>【私はこう考えた・15秒】</a:t>
+              <a:t>【私はこう考えた + なんでこれに・25秒】</a:t>
             </a:r>
           </a:p>
           <a:p>
@@ -1344,12 +1165,17 @@
           </a:p>
           <a:p>
             <a:r>
-              <a:t>マーケ、営業、デリバリー、事務・法務、戦略。</a:t>
-            </a:r>
-          </a:p>
-          <a:p>
-            <a:r>
-              <a:t>この5人を作って、Kawaru事業部を動かす。</a:t>
+              <a:t>マーケは認知獲得、営業は商談・受注、デリバリーは納品、事務法務は管理・記録、戦略はリサーチ・分析。</a:t>
+            </a:r>
+          </a:p>
+          <a:p>
+            <a:r>
+              <a:t>事業の全部の仕事を、この5人で網羅しています。</a:t>
+            </a:r>
+          </a:p>
+          <a:p>
+            <a:r>
+              <a:t>だから案件が変わっても、この5人で受け止められる、というのが私の考えです。</a:t>
             </a:r>
           </a:p>
           <a:p/>
@@ -1516,42 +1342,42 @@
           <a:lstStyle/>
           <a:p>
             <a:r>
-              <a:t>【5人の構成・25秒】</a:t>
-            </a:r>
-          </a:p>
-          <a:p>
-            <a:r>
-              <a:t>5人の構成を詳しくお見せします。</a:t>
-            </a:r>
-          </a:p>
-          <a:p>
-            <a:r>
-              <a:t>マーケAIは、LP・SNS・展示会・LINE配信・事例記事を担当。</a:t>
-            </a:r>
-          </a:p>
-          <a:p>
-            <a:r>
-              <a:t>営業AIは、商談前準備・要件ヒアリング・提案書・フォロー。</a:t>
-            </a:r>
-          </a:p>
-          <a:p>
-            <a:r>
-              <a:t>デリバリーAIは、研修運営・Dify、n8n、GAS構築・CSコンサル・PM。</a:t>
-            </a:r>
-          </a:p>
-          <a:p>
-            <a:r>
-              <a:t>事務法務AIは、契約書・請求書・利用契約書・プライバシーポリシー・PL。</a:t>
-            </a:r>
-          </a:p>
-          <a:p>
-            <a:r>
-              <a:t>戦略プロダクトAIは、競合調査・市場調査・料金設計・データ分析。</a:t>
-            </a:r>
-          </a:p>
-          <a:p>
-            <a:r>
-              <a:t>各領域の戦略と実行を5人で持っています。戦略AIだけは横断的にリサーチと分析を担当します。</a:t>
+              <a:t>【実際の使い方・25秒】</a:t>
+            </a:r>
+          </a:p>
+          <a:p>
+            <a:r>
+              <a:t>実際に今こう使っています。</a:t>
+            </a:r>
+          </a:p>
+          <a:p>
+            <a:r>
+              <a:t>マーケAIは、展示会クリエイティブやLP制作。</a:t>
+            </a:r>
+          </a:p>
+          <a:p>
+            <a:r>
+              <a:t>営業AIは、商談前準備や提案書の骨子作成。</a:t>
+            </a:r>
+          </a:p>
+          <a:p>
+            <a:r>
+              <a:t>デリバリーAIは、NTT研修200枚を1人2週間で、中西のDify構築を5時間で完納しました。</a:t>
+            </a:r>
+          </a:p>
+          <a:p>
+            <a:r>
+              <a:t>事務法務AIは、契約書チェックやPL自動更新。</a:t>
+            </a:r>
+          </a:p>
+          <a:p>
+            <a:r>
+              <a:t>戦略AIは、競合調査や料金設計、データ分析。</a:t>
+            </a:r>
+          </a:p>
+          <a:p>
+            <a:r>
+              <a:t>細かく読まなくて大丈夫ですが、いろんな領域でAI社員を使い倒しているということが伝わればOKです。</a:t>
             </a:r>
           </a:p>
           <a:p/>
@@ -1622,32 +1448,17 @@
           <a:lstStyle/>
           <a:p>
             <a:r>
-              <a:t>【なんでこれにしたのか・15秒】</a:t>
-            </a:r>
-          </a:p>
-          <a:p>
-            <a:r>
-              <a:t>なんでこの5人にしたのか。</a:t>
-            </a:r>
-          </a:p>
-          <a:p>
-            <a:r>
-              <a:t>マーケ、営業、デリバリー、事務法務、戦略。これは事業に必要な機能をMECEで切ったものです。</a:t>
-            </a:r>
-          </a:p>
-          <a:p>
-            <a:r>
-              <a:t>認知獲得から商談・受注、納品、管理・記録、リサーチ・分析まで。</a:t>
-            </a:r>
-          </a:p>
-          <a:p>
-            <a:r>
-              <a:t>事業の全部の仕事を、この5人で網羅しています。</a:t>
-            </a:r>
-          </a:p>
-          <a:p>
-            <a:r>
-              <a:t>だから案件が変わっても、5人で受け止められます。</a:t>
+              <a:t>【橋渡し・8秒】</a:t>
+            </a:r>
+          </a:p>
+          <a:p>
+            <a:r>
+              <a:t>そして、これが売上に直結しています。</a:t>
+            </a:r>
+          </a:p>
+          <a:p>
+            <a:r>
+              <a:t>具体的な数字をお見せします。</a:t>
             </a:r>
           </a:p>
           <a:p/>
@@ -1718,42 +1529,32 @@
           <a:lstStyle/>
           <a:p>
             <a:r>
-              <a:t>【実際の使い方・25秒】</a:t>
-            </a:r>
-          </a:p>
-          <a:p>
-            <a:r>
-              <a:t>実際に今こう使っています。</a:t>
-            </a:r>
-          </a:p>
-          <a:p>
-            <a:r>
-              <a:t>マーケAIは、展示会クリエイティブやLP制作。</a:t>
-            </a:r>
-          </a:p>
-          <a:p>
-            <a:r>
-              <a:t>営業AIは、商談前準備や提案書の骨子作成。</a:t>
-            </a:r>
-          </a:p>
-          <a:p>
-            <a:r>
-              <a:t>デリバリーAIは、NTT研修200枚を1人2週間で、中西のDify構築を5時間で完納しました。</a:t>
-            </a:r>
-          </a:p>
-          <a:p>
-            <a:r>
-              <a:t>事務法務AIは、契約書チェックやPL自動更新。</a:t>
-            </a:r>
-          </a:p>
-          <a:p>
-            <a:r>
-              <a:t>戦略AIは、競合調査や料金設計、データ分析。</a:t>
-            </a:r>
-          </a:p>
-          <a:p>
-            <a:r>
-              <a:t>細かく読まなくて大丈夫ですが、いろんな領域でAI社員を使い倒しているということが伝わればOKです。</a:t>
+              <a:t>【売上実績・20秒】</a:t>
+            </a:r>
+          </a:p>
+          <a:p>
+            <a:r>
+              <a:t>10月から3月の半期で、売上6,710,000円。</a:t>
+            </a:r>
+          </a:p>
+          <a:p>
+            <a:r>
+              <a:t>NTTネクシア、中西製作所、キリン、ブロードリンク、4案件すべてにAI社員が関与しています。</a:t>
+            </a:r>
+          </a:p>
+          <a:p>
+            <a:r>
+              <a:t>NTT研修スライド200枚は2週間で完納、中西のDify構築は5時間で設計しました。</a:t>
+            </a:r>
+          </a:p>
+          <a:p>
+            <a:r>
+              <a:t>月換算では464,000円、AI社員1.3人分がすでに稼働している計算になります。</a:t>
+            </a:r>
+          </a:p>
+          <a:p>
+            <a:r>
+              <a:t>これは机上の空論ではなく、実際にお客さんに納品している事実です。</a:t>
             </a:r>
           </a:p>
           <a:p/>
@@ -5244,58 +5045,8 @@
         </p:nvSpPr>
         <p:spPr>
           <a:xfrm>
-            <a:off x="457200" y="365760"/>
-            <a:ext cx="11274552" cy="457200"/>
-          </a:xfrm>
-          <a:prstGeom prst="rect">
-            <a:avLst/>
-          </a:prstGeom>
-          <a:noFill/>
-          <a:ln>
-            <a:noFill/>
-          </a:ln>
-        </p:spPr>
-        <p:style>
-          <a:lnRef idx="1">
-            <a:schemeClr val="accent1"/>
-          </a:lnRef>
-          <a:fillRef idx="3">
-            <a:schemeClr val="accent1"/>
-          </a:fillRef>
-          <a:effectRef idx="2">
-            <a:schemeClr val="accent1"/>
-          </a:effectRef>
-          <a:fontRef idx="minor">
-            <a:schemeClr val="lt1"/>
-          </a:fontRef>
-        </p:style>
-        <p:txBody>
-          <a:bodyPr rtlCol="0" anchor="t" wrap="square" tIns="54864" bIns="54864"/>
-          <a:lstStyle/>
-          <a:p>
-            <a:pPr algn="ctr"/>
-            <a:r>
-              <a:rPr sz="1400" b="1">
-                <a:solidFill>
-                  <a:srgbClr val="6B7280"/>
-                </a:solidFill>
-                <a:latin typeface="Noto Sans JP"/>
-              </a:rPr>
-              <a:t>そして</a:t>
-            </a:r>
-          </a:p>
-        </p:txBody>
-      </p:sp>
-      <p:sp>
-        <p:nvSpPr>
-          <p:cNvPr id="4" name="Rectangle 3"/>
-          <p:cNvSpPr/>
-          <p:nvPr/>
-        </p:nvSpPr>
-        <p:spPr>
-          <a:xfrm>
-            <a:off x="5486400" y="914400"/>
-            <a:ext cx="1216152" cy="54864"/>
+            <a:off x="5029200" y="1371600"/>
+            <a:ext cx="2130552" cy="73152"/>
           </a:xfrm>
           <a:prstGeom prst="rect">
             <a:avLst/>
@@ -5331,14 +5082,14 @@
       </p:sp>
       <p:sp>
         <p:nvSpPr>
-          <p:cNvPr id="5" name="Rectangle 4"/>
-          <p:cNvSpPr/>
-          <p:nvPr/>
-        </p:nvSpPr>
-        <p:spPr>
-          <a:xfrm>
-            <a:off x="457200" y="2011680"/>
-            <a:ext cx="11274552" cy="1371600"/>
+          <p:cNvPr id="4" name="Rectangle 3"/>
+          <p:cNvSpPr/>
+          <p:nvPr/>
+        </p:nvSpPr>
+        <p:spPr>
+          <a:xfrm>
+            <a:off x="457200" y="1828800"/>
+            <a:ext cx="11274552" cy="1097280"/>
           </a:xfrm>
           <a:prstGeom prst="rect">
             <a:avLst/>
@@ -5368,77 +5119,27 @@
           <a:p>
             <a:pPr algn="ctr"/>
             <a:r>
-              <a:rPr sz="3200" b="0">
-                <a:solidFill>
-                  <a:srgbClr val="1C3557"/>
-                </a:solidFill>
-                <a:latin typeface="Noto Sans JP"/>
-              </a:rPr>
-              <a:t>これが</a:t>
-            </a:r>
-          </a:p>
-        </p:txBody>
-      </p:sp>
-      <p:sp>
-        <p:nvSpPr>
-          <p:cNvPr id="6" name="Rectangle 5"/>
-          <p:cNvSpPr/>
-          <p:nvPr/>
-        </p:nvSpPr>
-        <p:spPr>
-          <a:xfrm>
-            <a:off x="457200" y="3200400"/>
-            <a:ext cx="11274552" cy="1463040"/>
-          </a:xfrm>
-          <a:prstGeom prst="rect">
-            <a:avLst/>
-          </a:prstGeom>
-          <a:noFill/>
-          <a:ln>
-            <a:noFill/>
-          </a:ln>
-        </p:spPr>
-        <p:style>
-          <a:lnRef idx="1">
-            <a:schemeClr val="accent1"/>
-          </a:lnRef>
-          <a:fillRef idx="3">
-            <a:schemeClr val="accent1"/>
-          </a:fillRef>
-          <a:effectRef idx="2">
-            <a:schemeClr val="accent1"/>
-          </a:effectRef>
-          <a:fontRef idx="minor">
-            <a:schemeClr val="lt1"/>
-          </a:fontRef>
-        </p:style>
-        <p:txBody>
-          <a:bodyPr rtlCol="0" anchor="ctr" wrap="square" tIns="54864" bIns="54864"/>
-          <a:lstStyle/>
-          <a:p>
-            <a:pPr algn="ctr"/>
-            <a:r>
-              <a:rPr sz="5200" b="1">
-                <a:solidFill>
-                  <a:srgbClr val="2563EB"/>
-                </a:solidFill>
-                <a:latin typeface="Noto Sans JP"/>
-              </a:rPr>
-              <a:t>売上に直結している</a:t>
-            </a:r>
-          </a:p>
-        </p:txBody>
-      </p:sp>
-      <p:sp>
-        <p:nvSpPr>
-          <p:cNvPr id="7" name="Down Arrow 6"/>
-          <p:cNvSpPr/>
-          <p:nvPr/>
-        </p:nvSpPr>
-        <p:spPr>
-          <a:xfrm>
-            <a:off x="5870448" y="5029200"/>
-            <a:ext cx="457200" cy="548640"/>
+              <a:rPr sz="3400" b="1">
+                <a:solidFill>
+                  <a:srgbClr val="6B7280"/>
+                </a:solidFill>
+                <a:latin typeface="Noto Sans JP"/>
+              </a:rPr>
+              <a:t>ここまでが現状の話</a:t>
+            </a:r>
+          </a:p>
+        </p:txBody>
+      </p:sp>
+      <p:sp>
+        <p:nvSpPr>
+          <p:cNvPr id="5" name="Down Arrow 4"/>
+          <p:cNvSpPr/>
+          <p:nvPr/>
+        </p:nvSpPr>
+        <p:spPr>
+          <a:xfrm>
+            <a:off x="5641848" y="3108960"/>
+            <a:ext cx="914400" cy="731520"/>
           </a:xfrm>
           <a:prstGeom prst="downArrow">
             <a:avLst/>
@@ -5474,6 +5175,106 @@
       </p:sp>
       <p:sp>
         <p:nvSpPr>
+          <p:cNvPr id="6" name="Rectangle 5"/>
+          <p:cNvSpPr/>
+          <p:nvPr/>
+        </p:nvSpPr>
+        <p:spPr>
+          <a:xfrm>
+            <a:off x="457200" y="4023360"/>
+            <a:ext cx="11274552" cy="1371600"/>
+          </a:xfrm>
+          <a:prstGeom prst="rect">
+            <a:avLst/>
+          </a:prstGeom>
+          <a:noFill/>
+          <a:ln>
+            <a:noFill/>
+          </a:ln>
+        </p:spPr>
+        <p:style>
+          <a:lnRef idx="1">
+            <a:schemeClr val="accent1"/>
+          </a:lnRef>
+          <a:fillRef idx="3">
+            <a:schemeClr val="accent1"/>
+          </a:fillRef>
+          <a:effectRef idx="2">
+            <a:schemeClr val="accent1"/>
+          </a:effectRef>
+          <a:fontRef idx="minor">
+            <a:schemeClr val="lt1"/>
+          </a:fontRef>
+        </p:style>
+        <p:txBody>
+          <a:bodyPr rtlCol="0" anchor="ctr" wrap="square" tIns="54864" bIns="54864"/>
+          <a:lstStyle/>
+          <a:p>
+            <a:pPr algn="ctr"/>
+            <a:r>
+              <a:rPr sz="5000" b="1">
+                <a:solidFill>
+                  <a:srgbClr val="2563EB"/>
+                </a:solidFill>
+                <a:latin typeface="Noto Sans JP"/>
+              </a:rPr>
+              <a:t>ここから今後の話</a:t>
+            </a:r>
+          </a:p>
+        </p:txBody>
+      </p:sp>
+      <p:sp>
+        <p:nvSpPr>
+          <p:cNvPr id="7" name="Rectangle 6"/>
+          <p:cNvSpPr/>
+          <p:nvPr/>
+        </p:nvSpPr>
+        <p:spPr>
+          <a:xfrm>
+            <a:off x="457200" y="5486400"/>
+            <a:ext cx="11274552" cy="548640"/>
+          </a:xfrm>
+          <a:prstGeom prst="rect">
+            <a:avLst/>
+          </a:prstGeom>
+          <a:noFill/>
+          <a:ln>
+            <a:noFill/>
+          </a:ln>
+        </p:spPr>
+        <p:style>
+          <a:lnRef idx="1">
+            <a:schemeClr val="accent1"/>
+          </a:lnRef>
+          <a:fillRef idx="3">
+            <a:schemeClr val="accent1"/>
+          </a:fillRef>
+          <a:effectRef idx="2">
+            <a:schemeClr val="accent1"/>
+          </a:effectRef>
+          <a:fontRef idx="minor">
+            <a:schemeClr val="lt1"/>
+          </a:fontRef>
+        </p:style>
+        <p:txBody>
+          <a:bodyPr rtlCol="0" anchor="ctr" wrap="square" tIns="54864" bIns="54864"/>
+          <a:lstStyle/>
+          <a:p>
+            <a:pPr algn="ctr"/>
+            <a:r>
+              <a:rPr sz="1800" b="1">
+                <a:solidFill>
+                  <a:srgbClr val="1C3557"/>
+                </a:solidFill>
+                <a:latin typeface="Noto Sans JP"/>
+              </a:rPr>
+              <a:t>9月末までにAI社員5人を完成させる、その具体ロードマップ</a:t>
+            </a:r>
+          </a:p>
+        </p:txBody>
+      </p:sp>
+      <p:sp>
+        <p:nvSpPr>
           <p:cNvPr id="8" name="Rectangle 7"/>
           <p:cNvSpPr/>
           <p:nvPr/>
@@ -5517,7 +5318,7 @@
                 </a:solidFill>
                 <a:latin typeface="Noto Sans JP"/>
               </a:rPr>
-              <a:t>10 / 14</a:t>
+              <a:t>10 / 12</a:t>
             </a:r>
           </a:p>
         </p:txBody>
@@ -5628,7 +5429,7 @@
                 </a:solidFill>
                 <a:latin typeface="Noto Sans JP"/>
               </a:rPr>
-              <a:t>11 / 14</a:t>
+              <a:t>11 / 12</a:t>
             </a:r>
           </a:p>
         </p:txBody>
@@ -5678,7 +5479,7 @@
                 </a:solidFill>
                 <a:latin typeface="Noto Sans JP"/>
               </a:rPr>
-              <a:t>半期 ¥6,710,000、4案件すべてにAI社員が動いている</a:t>
+              <a:t>9月末までのロードマップ</a:t>
             </a:r>
           </a:p>
         </p:txBody>
@@ -5734,8 +5535,8 @@
         </p:nvSpPr>
         <p:spPr>
           <a:xfrm>
-            <a:off x="457200" y="1554480"/>
-            <a:ext cx="4572000" cy="640080"/>
+            <a:off x="457200" y="1371600"/>
+            <a:ext cx="1371600" cy="777240"/>
           </a:xfrm>
           <a:prstGeom prst="rect">
             <a:avLst/>
@@ -5767,13 +5568,13 @@
           <a:p>
             <a:pPr algn="ctr"/>
             <a:r>
-              <a:rPr sz="1600" b="1">
+              <a:rPr sz="1300" b="1">
                 <a:solidFill>
                   <a:srgbClr val="FFFFFF"/>
                 </a:solidFill>
                 <a:latin typeface="Noto Sans JP"/>
               </a:rPr>
-              <a:t>案件</a:t>
+              <a:t>月</a:t>
             </a:r>
           </a:p>
         </p:txBody>
@@ -5786,8 +5587,8 @@
         </p:nvSpPr>
         <p:spPr>
           <a:xfrm>
-            <a:off x="5074920" y="1554480"/>
-            <a:ext cx="2743200" cy="640080"/>
+            <a:off x="1874519" y="1371600"/>
+            <a:ext cx="1280160" cy="777240"/>
           </a:xfrm>
           <a:prstGeom prst="rect">
             <a:avLst/>
@@ -5819,13 +5620,13 @@
           <a:p>
             <a:pPr algn="ctr"/>
             <a:r>
-              <a:rPr sz="1600" b="1">
+              <a:rPr sz="1300" b="1">
                 <a:solidFill>
                   <a:srgbClr val="FFFFFF"/>
                 </a:solidFill>
                 <a:latin typeface="Noto Sans JP"/>
               </a:rPr>
-              <a:t>売上 (税抜)</a:t>
+              <a:t>達成水準</a:t>
             </a:r>
           </a:p>
         </p:txBody>
@@ -5838,8 +5639,112 @@
         </p:nvSpPr>
         <p:spPr>
           <a:xfrm>
-            <a:off x="457200" y="2267712"/>
-            <a:ext cx="4572000" cy="640080"/>
+            <a:off x="3200400" y="1371600"/>
+            <a:ext cx="5029200" cy="777240"/>
+          </a:xfrm>
+          <a:prstGeom prst="rect">
+            <a:avLst/>
+          </a:prstGeom>
+          <a:solidFill>
+            <a:srgbClr val="1C3557"/>
+          </a:solidFill>
+          <a:ln>
+            <a:noFill/>
+          </a:ln>
+        </p:spPr>
+        <p:style>
+          <a:lnRef idx="1">
+            <a:schemeClr val="accent1"/>
+          </a:lnRef>
+          <a:fillRef idx="3">
+            <a:schemeClr val="accent1"/>
+          </a:fillRef>
+          <a:effectRef idx="2">
+            <a:schemeClr val="accent1"/>
+          </a:effectRef>
+          <a:fontRef idx="minor">
+            <a:schemeClr val="lt1"/>
+          </a:fontRef>
+        </p:style>
+        <p:txBody>
+          <a:bodyPr rtlCol="0" anchor="ctr" wrap="square" tIns="54864" bIns="54864"/>
+          <a:lstStyle/>
+          <a:p>
+            <a:pPr algn="ctr"/>
+            <a:r>
+              <a:rPr sz="1300" b="1">
+                <a:solidFill>
+                  <a:srgbClr val="FFFFFF"/>
+                </a:solidFill>
+                <a:latin typeface="Noto Sans JP"/>
+              </a:rPr>
+              <a:t>具体タスク</a:t>
+            </a:r>
+          </a:p>
+        </p:txBody>
+      </p:sp>
+      <p:sp>
+        <p:nvSpPr>
+          <p:cNvPr id="9" name="Rectangle 8"/>
+          <p:cNvSpPr/>
+          <p:nvPr/>
+        </p:nvSpPr>
+        <p:spPr>
+          <a:xfrm>
+            <a:off x="8275320" y="1371600"/>
+            <a:ext cx="3456432" cy="777240"/>
+          </a:xfrm>
+          <a:prstGeom prst="rect">
+            <a:avLst/>
+          </a:prstGeom>
+          <a:solidFill>
+            <a:srgbClr val="1C3557"/>
+          </a:solidFill>
+          <a:ln>
+            <a:noFill/>
+          </a:ln>
+        </p:spPr>
+        <p:style>
+          <a:lnRef idx="1">
+            <a:schemeClr val="accent1"/>
+          </a:lnRef>
+          <a:fillRef idx="3">
+            <a:schemeClr val="accent1"/>
+          </a:fillRef>
+          <a:effectRef idx="2">
+            <a:schemeClr val="accent1"/>
+          </a:effectRef>
+          <a:fontRef idx="minor">
+            <a:schemeClr val="lt1"/>
+          </a:fontRef>
+        </p:style>
+        <p:txBody>
+          <a:bodyPr rtlCol="0" anchor="ctr" wrap="square" tIns="54864" bIns="54864"/>
+          <a:lstStyle/>
+          <a:p>
+            <a:pPr algn="ctr"/>
+            <a:r>
+              <a:rPr sz="1300" b="1">
+                <a:solidFill>
+                  <a:srgbClr val="FFFFFF"/>
+                </a:solidFill>
+                <a:latin typeface="Noto Sans JP"/>
+              </a:rPr>
+              <a:t>この時期に重点を置く理由</a:t>
+            </a:r>
+          </a:p>
+        </p:txBody>
+      </p:sp>
+      <p:sp>
+        <p:nvSpPr>
+          <p:cNvPr id="10" name="Rectangle 9"/>
+          <p:cNvSpPr/>
+          <p:nvPr/>
+        </p:nvSpPr>
+        <p:spPr>
+          <a:xfrm>
+            <a:off x="457200" y="2240280"/>
+            <a:ext cx="1371600" cy="777240"/>
           </a:xfrm>
           <a:prstGeom prst="rect">
             <a:avLst/>
@@ -5869,29 +5774,41 @@
           <a:bodyPr rtlCol="0" anchor="ctr" wrap="square" tIns="54864" bIns="54864"/>
           <a:lstStyle/>
           <a:p>
-            <a:pPr algn="l"/>
-            <a:r>
-              <a:rPr sz="1600" b="0">
+            <a:pPr algn="ctr"/>
+            <a:r>
+              <a:rPr sz="1100" b="0">
                 <a:solidFill>
                   <a:srgbClr val="1C3557"/>
                 </a:solidFill>
                 <a:latin typeface="Noto Sans JP"/>
               </a:rPr>
-              <a:t>NTTネクシア</a:t>
-            </a:r>
-          </a:p>
-        </p:txBody>
-      </p:sp>
-      <p:sp>
-        <p:nvSpPr>
-          <p:cNvPr id="9" name="Rectangle 8"/>
-          <p:cNvSpPr/>
-          <p:nvPr/>
-        </p:nvSpPr>
-        <p:spPr>
-          <a:xfrm>
-            <a:off x="5074920" y="2267712"/>
-            <a:ext cx="2743200" cy="640080"/>
+              <a:t>4月</a:t>
+            </a:r>
+          </a:p>
+          <a:p>
+            <a:pPr algn="ctr"/>
+            <a:r>
+              <a:rPr sz="1100" b="0">
+                <a:solidFill>
+                  <a:srgbClr val="1C3557"/>
+                </a:solidFill>
+                <a:latin typeface="Noto Sans JP"/>
+              </a:rPr>
+              <a:t>(現在)</a:t>
+            </a:r>
+          </a:p>
+        </p:txBody>
+      </p:sp>
+      <p:sp>
+        <p:nvSpPr>
+          <p:cNvPr id="11" name="Rectangle 10"/>
+          <p:cNvSpPr/>
+          <p:nvPr/>
+        </p:nvSpPr>
+        <p:spPr>
+          <a:xfrm>
+            <a:off x="1874519" y="2240280"/>
+            <a:ext cx="1280160" cy="777240"/>
           </a:xfrm>
           <a:prstGeom prst="rect">
             <a:avLst/>
@@ -5921,29 +5838,29 @@
           <a:bodyPr rtlCol="0" anchor="ctr" wrap="square" tIns="54864" bIns="54864"/>
           <a:lstStyle/>
           <a:p>
-            <a:pPr algn="r"/>
-            <a:r>
-              <a:rPr sz="1600" b="0">
+            <a:pPr algn="ctr"/>
+            <a:r>
+              <a:rPr sz="1400" b="1">
                 <a:solidFill>
                   <a:srgbClr val="1C3557"/>
                 </a:solidFill>
                 <a:latin typeface="Noto Sans JP"/>
               </a:rPr>
-              <a:t>¥5,000,000</a:t>
-            </a:r>
-          </a:p>
-        </p:txBody>
-      </p:sp>
-      <p:sp>
-        <p:nvSpPr>
-          <p:cNvPr id="10" name="Rectangle 9"/>
-          <p:cNvSpPr/>
-          <p:nvPr/>
-        </p:nvSpPr>
-        <p:spPr>
-          <a:xfrm>
-            <a:off x="457200" y="2980944"/>
-            <a:ext cx="4572000" cy="640080"/>
+              <a:t>1.3人分</a:t>
+            </a:r>
+          </a:p>
+        </p:txBody>
+      </p:sp>
+      <p:sp>
+        <p:nvSpPr>
+          <p:cNvPr id="12" name="Rectangle 11"/>
+          <p:cNvSpPr/>
+          <p:nvPr/>
+        </p:nvSpPr>
+        <p:spPr>
+          <a:xfrm>
+            <a:off x="3200400" y="2240280"/>
+            <a:ext cx="5029200" cy="777240"/>
           </a:xfrm>
           <a:prstGeom prst="rect">
             <a:avLst/>
@@ -5975,27 +5892,27 @@
           <a:p>
             <a:pPr algn="l"/>
             <a:r>
-              <a:rPr sz="1600" b="0">
+              <a:rPr sz="1100" b="0">
                 <a:solidFill>
                   <a:srgbClr val="1C3557"/>
                 </a:solidFill>
                 <a:latin typeface="Noto Sans JP"/>
               </a:rPr>
-              <a:t>中西製作所</a:t>
-            </a:r>
-          </a:p>
-        </p:txBody>
-      </p:sp>
-      <p:sp>
-        <p:nvSpPr>
-          <p:cNvPr id="11" name="Rectangle 10"/>
-          <p:cNvSpPr/>
-          <p:nvPr/>
-        </p:nvSpPr>
-        <p:spPr>
-          <a:xfrm>
-            <a:off x="5074920" y="2980944"/>
-            <a:ext cx="2743200" cy="640080"/>
+              <a:t>展示会・ローンチに向けた制作物作成（クリエイティブ・LP・LINE）</a:t>
+            </a:r>
+          </a:p>
+        </p:txBody>
+      </p:sp>
+      <p:sp>
+        <p:nvSpPr>
+          <p:cNvPr id="13" name="Rectangle 12"/>
+          <p:cNvSpPr/>
+          <p:nvPr/>
+        </p:nvSpPr>
+        <p:spPr>
+          <a:xfrm>
+            <a:off x="8275320" y="2240280"/>
+            <a:ext cx="3456432" cy="777240"/>
           </a:xfrm>
           <a:prstGeom prst="rect">
             <a:avLst/>
@@ -6025,29 +5942,29 @@
           <a:bodyPr rtlCol="0" anchor="ctr" wrap="square" tIns="54864" bIns="54864"/>
           <a:lstStyle/>
           <a:p>
-            <a:pPr algn="r"/>
-            <a:r>
-              <a:rPr sz="1600" b="0">
+            <a:pPr algn="l"/>
+            <a:r>
+              <a:rPr sz="1100" b="0">
                 <a:solidFill>
                   <a:srgbClr val="1C3557"/>
                 </a:solidFill>
                 <a:latin typeface="Noto Sans JP"/>
               </a:rPr>
-              <a:t>¥1,000,000</a:t>
-            </a:r>
-          </a:p>
-        </p:txBody>
-      </p:sp>
-      <p:sp>
-        <p:nvSpPr>
-          <p:cNvPr id="12" name="Rectangle 11"/>
-          <p:cNvSpPr/>
-          <p:nvPr/>
-        </p:nvSpPr>
-        <p:spPr>
-          <a:xfrm>
-            <a:off x="457200" y="3694176"/>
-            <a:ext cx="4572000" cy="640080"/>
+              <a:t>5月の本番に向けた助走期間</a:t>
+            </a:r>
+          </a:p>
+        </p:txBody>
+      </p:sp>
+      <p:sp>
+        <p:nvSpPr>
+          <p:cNvPr id="14" name="Rectangle 13"/>
+          <p:cNvSpPr/>
+          <p:nvPr/>
+        </p:nvSpPr>
+        <p:spPr>
+          <a:xfrm>
+            <a:off x="457200" y="3017520"/>
+            <a:ext cx="1371600" cy="777240"/>
           </a:xfrm>
           <a:prstGeom prst="rect">
             <a:avLst/>
@@ -6077,29 +5994,29 @@
           <a:bodyPr rtlCol="0" anchor="ctr" wrap="square" tIns="54864" bIns="54864"/>
           <a:lstStyle/>
           <a:p>
-            <a:pPr algn="l"/>
-            <a:r>
-              <a:rPr sz="1600" b="0">
+            <a:pPr algn="ctr"/>
+            <a:r>
+              <a:rPr sz="1100" b="0">
                 <a:solidFill>
                   <a:srgbClr val="1C3557"/>
                 </a:solidFill>
                 <a:latin typeface="Noto Sans JP"/>
               </a:rPr>
-              <a:t>中部キリンビバレッジ</a:t>
-            </a:r>
-          </a:p>
-        </p:txBody>
-      </p:sp>
-      <p:sp>
-        <p:nvSpPr>
-          <p:cNvPr id="13" name="Rectangle 12"/>
-          <p:cNvSpPr/>
-          <p:nvPr/>
-        </p:nvSpPr>
-        <p:spPr>
-          <a:xfrm>
-            <a:off x="5074920" y="3694176"/>
-            <a:ext cx="2743200" cy="640080"/>
+              <a:t>5月</a:t>
+            </a:r>
+          </a:p>
+        </p:txBody>
+      </p:sp>
+      <p:sp>
+        <p:nvSpPr>
+          <p:cNvPr id="15" name="Rectangle 14"/>
+          <p:cNvSpPr/>
+          <p:nvPr/>
+        </p:nvSpPr>
+        <p:spPr>
+          <a:xfrm>
+            <a:off x="1874519" y="3017520"/>
+            <a:ext cx="1280160" cy="777240"/>
           </a:xfrm>
           <a:prstGeom prst="rect">
             <a:avLst/>
@@ -6129,29 +6046,29 @@
           <a:bodyPr rtlCol="0" anchor="ctr" wrap="square" tIns="54864" bIns="54864"/>
           <a:lstStyle/>
           <a:p>
-            <a:pPr algn="r"/>
-            <a:r>
-              <a:rPr sz="1600" b="0">
+            <a:pPr algn="ctr"/>
+            <a:r>
+              <a:rPr sz="1400" b="1">
                 <a:solidFill>
                   <a:srgbClr val="1C3557"/>
                 </a:solidFill>
                 <a:latin typeface="Noto Sans JP"/>
               </a:rPr>
-              <a:t>¥450,000</a:t>
-            </a:r>
-          </a:p>
-        </p:txBody>
-      </p:sp>
-      <p:sp>
-        <p:nvSpPr>
-          <p:cNvPr id="14" name="Rectangle 13"/>
-          <p:cNvSpPr/>
-          <p:nvPr/>
-        </p:nvSpPr>
-        <p:spPr>
-          <a:xfrm>
-            <a:off x="457200" y="4407408"/>
-            <a:ext cx="4572000" cy="640080"/>
+              <a:t>1.6人分</a:t>
+            </a:r>
+          </a:p>
+        </p:txBody>
+      </p:sp>
+      <p:sp>
+        <p:nvSpPr>
+          <p:cNvPr id="16" name="Rectangle 15"/>
+          <p:cNvSpPr/>
+          <p:nvPr/>
+        </p:nvSpPr>
+        <p:spPr>
+          <a:xfrm>
+            <a:off x="3200400" y="3017520"/>
+            <a:ext cx="5029200" cy="777240"/>
           </a:xfrm>
           <a:prstGeom prst="rect">
             <a:avLst/>
@@ -6183,27 +6100,39 @@
           <a:p>
             <a:pPr algn="l"/>
             <a:r>
-              <a:rPr sz="1600" b="0">
+              <a:rPr sz="1100" b="0">
                 <a:solidFill>
                   <a:srgbClr val="1C3557"/>
                 </a:solidFill>
                 <a:latin typeface="Noto Sans JP"/>
               </a:rPr>
-              <a:t>ブロードリンク</a:t>
-            </a:r>
-          </a:p>
-        </p:txBody>
-      </p:sp>
-      <p:sp>
-        <p:nvSpPr>
-          <p:cNvPr id="15" name="Rectangle 14"/>
-          <p:cNvSpPr/>
-          <p:nvPr/>
-        </p:nvSpPr>
-        <p:spPr>
-          <a:xfrm>
-            <a:off x="5074920" y="4407408"/>
-            <a:ext cx="2743200" cy="640080"/>
+              <a:t>β版ローンチ実施(5/2) ／ 6月8EXPOの戦略・戦術設計</a:t>
+            </a:r>
+          </a:p>
+          <a:p>
+            <a:pPr algn="l"/>
+            <a:r>
+              <a:rPr sz="1100" b="0">
+                <a:solidFill>
+                  <a:srgbClr val="1C3557"/>
+                </a:solidFill>
+                <a:latin typeface="Noto Sans JP"/>
+              </a:rPr>
+              <a:t>（集客リクエスト配信／当日オペ／営業トークスクリプト）</a:t>
+            </a:r>
+          </a:p>
+        </p:txBody>
+      </p:sp>
+      <p:sp>
+        <p:nvSpPr>
+          <p:cNvPr id="17" name="Rectangle 16"/>
+          <p:cNvSpPr/>
+          <p:nvPr/>
+        </p:nvSpPr>
+        <p:spPr>
+          <a:xfrm>
+            <a:off x="8275320" y="3017520"/>
+            <a:ext cx="3456432" cy="777240"/>
           </a:xfrm>
           <a:prstGeom prst="rect">
             <a:avLst/>
@@ -6233,29 +6162,29 @@
           <a:bodyPr rtlCol="0" anchor="ctr" wrap="square" tIns="54864" bIns="54864"/>
           <a:lstStyle/>
           <a:p>
-            <a:pPr algn="r"/>
-            <a:r>
-              <a:rPr sz="1600" b="0">
+            <a:pPr algn="l"/>
+            <a:r>
+              <a:rPr sz="1100" b="0">
                 <a:solidFill>
                   <a:srgbClr val="1C3557"/>
                 </a:solidFill>
                 <a:latin typeface="Noto Sans JP"/>
               </a:rPr>
-              <a:t>¥260,000</a:t>
-            </a:r>
-          </a:p>
-        </p:txBody>
-      </p:sp>
-      <p:sp>
-        <p:nvSpPr>
-          <p:cNvPr id="16" name="Rectangle 15"/>
-          <p:cNvSpPr/>
-          <p:nvPr/>
-        </p:nvSpPr>
-        <p:spPr>
-          <a:xfrm>
-            <a:off x="457200" y="5120640"/>
-            <a:ext cx="4572000" cy="640080"/>
+              <a:t>マーケ・営業の比重が大きい時期。AI社員を育てながら走らせる</a:t>
+            </a:r>
+          </a:p>
+        </p:txBody>
+      </p:sp>
+      <p:sp>
+        <p:nvSpPr>
+          <p:cNvPr id="18" name="Rectangle 17"/>
+          <p:cNvSpPr/>
+          <p:nvPr/>
+        </p:nvSpPr>
+        <p:spPr>
+          <a:xfrm>
+            <a:off x="457200" y="3794760"/>
+            <a:ext cx="1371600" cy="777240"/>
           </a:xfrm>
           <a:prstGeom prst="rect">
             <a:avLst/>
@@ -6285,29 +6214,41 @@
           <a:bodyPr rtlCol="0" anchor="ctr" wrap="square" tIns="54864" bIns="54864"/>
           <a:lstStyle/>
           <a:p>
-            <a:pPr algn="l"/>
-            <a:r>
-              <a:rPr sz="1800" b="1">
+            <a:pPr algn="ctr"/>
+            <a:r>
+              <a:rPr sz="1100" b="1">
                 <a:solidFill>
                   <a:srgbClr val="FFFFFF"/>
                 </a:solidFill>
                 <a:latin typeface="Noto Sans JP"/>
               </a:rPr>
-              <a:t>半期合計</a:t>
-            </a:r>
-          </a:p>
-        </p:txBody>
-      </p:sp>
-      <p:sp>
-        <p:nvSpPr>
-          <p:cNvPr id="17" name="Rectangle 16"/>
-          <p:cNvSpPr/>
-          <p:nvPr/>
-        </p:nvSpPr>
-        <p:spPr>
-          <a:xfrm>
-            <a:off x="5074920" y="5120640"/>
-            <a:ext cx="2743200" cy="640080"/>
+              <a:t>6月末</a:t>
+            </a:r>
+          </a:p>
+          <a:p>
+            <a:pPr algn="ctr"/>
+            <a:r>
+              <a:rPr sz="1100" b="1">
+                <a:solidFill>
+                  <a:srgbClr val="FFFFFF"/>
+                </a:solidFill>
+                <a:latin typeface="Noto Sans JP"/>
+              </a:rPr>
+              <a:t>(中間)</a:t>
+            </a:r>
+          </a:p>
+        </p:txBody>
+      </p:sp>
+      <p:sp>
+        <p:nvSpPr>
+          <p:cNvPr id="19" name="Rectangle 18"/>
+          <p:cNvSpPr/>
+          <p:nvPr/>
+        </p:nvSpPr>
+        <p:spPr>
+          <a:xfrm>
+            <a:off x="1874519" y="3794760"/>
+            <a:ext cx="1280160" cy="777240"/>
           </a:xfrm>
           <a:prstGeom prst="rect">
             <a:avLst/>
@@ -6337,34 +6278,344 @@
           <a:bodyPr rtlCol="0" anchor="ctr" wrap="square" tIns="54864" bIns="54864"/>
           <a:lstStyle/>
           <a:p>
-            <a:pPr algn="r"/>
-            <a:r>
-              <a:rPr sz="1800" b="1">
+            <a:pPr algn="ctr"/>
+            <a:r>
+              <a:rPr sz="1400" b="1">
                 <a:solidFill>
                   <a:srgbClr val="FFFFFF"/>
                 </a:solidFill>
                 <a:latin typeface="Noto Sans JP"/>
               </a:rPr>
-              <a:t>¥6,710,000</a:t>
-            </a:r>
-          </a:p>
-        </p:txBody>
-      </p:sp>
-      <p:sp>
-        <p:nvSpPr>
-          <p:cNvPr id="18" name="Rounded Rectangle 17"/>
-          <p:cNvSpPr/>
-          <p:nvPr/>
-        </p:nvSpPr>
-        <p:spPr>
-          <a:xfrm>
-            <a:off x="8229600" y="1554480"/>
-            <a:ext cx="3502152" cy="4206240"/>
-          </a:xfrm>
-          <a:prstGeom prst="roundRect">
-            <a:avLst>
-              <a:gd name="adj" fmla="val 5000"/>
-            </a:avLst>
+              <a:t>2人分</a:t>
+            </a:r>
+          </a:p>
+        </p:txBody>
+      </p:sp>
+      <p:sp>
+        <p:nvSpPr>
+          <p:cNvPr id="20" name="Rectangle 19"/>
+          <p:cNvSpPr/>
+          <p:nvPr/>
+        </p:nvSpPr>
+        <p:spPr>
+          <a:xfrm>
+            <a:off x="3200400" y="3794760"/>
+            <a:ext cx="5029200" cy="777240"/>
+          </a:xfrm>
+          <a:prstGeom prst="rect">
+            <a:avLst/>
+          </a:prstGeom>
+          <a:solidFill>
+            <a:srgbClr val="DBEAFE"/>
+          </a:solidFill>
+          <a:ln>
+            <a:noFill/>
+          </a:ln>
+        </p:spPr>
+        <p:style>
+          <a:lnRef idx="1">
+            <a:schemeClr val="accent1"/>
+          </a:lnRef>
+          <a:fillRef idx="3">
+            <a:schemeClr val="accent1"/>
+          </a:fillRef>
+          <a:effectRef idx="2">
+            <a:schemeClr val="accent1"/>
+          </a:effectRef>
+          <a:fontRef idx="minor">
+            <a:schemeClr val="lt1"/>
+          </a:fontRef>
+        </p:style>
+        <p:txBody>
+          <a:bodyPr rtlCol="0" anchor="ctr" wrap="square" tIns="54864" bIns="54864"/>
+          <a:lstStyle/>
+          <a:p>
+            <a:pPr algn="l"/>
+            <a:r>
+              <a:rPr sz="1100" b="0">
+                <a:solidFill>
+                  <a:srgbClr val="1C3557"/>
+                </a:solidFill>
+                <a:latin typeface="Noto Sans JP"/>
+              </a:rPr>
+              <a:t>8EXPO出展(6/3-4) ／ ローンチ後の運用フィードバック反映 ／ 5人連携テスト</a:t>
+            </a:r>
+          </a:p>
+        </p:txBody>
+      </p:sp>
+      <p:sp>
+        <p:nvSpPr>
+          <p:cNvPr id="21" name="Rectangle 20"/>
+          <p:cNvSpPr/>
+          <p:nvPr/>
+        </p:nvSpPr>
+        <p:spPr>
+          <a:xfrm>
+            <a:off x="8275320" y="3794760"/>
+            <a:ext cx="3456432" cy="777240"/>
+          </a:xfrm>
+          <a:prstGeom prst="rect">
+            <a:avLst/>
+          </a:prstGeom>
+          <a:solidFill>
+            <a:srgbClr val="DBEAFE"/>
+          </a:solidFill>
+          <a:ln>
+            <a:noFill/>
+          </a:ln>
+        </p:spPr>
+        <p:style>
+          <a:lnRef idx="1">
+            <a:schemeClr val="accent1"/>
+          </a:lnRef>
+          <a:fillRef idx="3">
+            <a:schemeClr val="accent1"/>
+          </a:fillRef>
+          <a:effectRef idx="2">
+            <a:schemeClr val="accent1"/>
+          </a:effectRef>
+          <a:fontRef idx="minor">
+            <a:schemeClr val="lt1"/>
+          </a:fontRef>
+        </p:style>
+        <p:txBody>
+          <a:bodyPr rtlCol="0" anchor="ctr" wrap="square" tIns="54864" bIns="54864"/>
+          <a:lstStyle/>
+          <a:p>
+            <a:pPr algn="l"/>
+            <a:r>
+              <a:rPr sz="1100" b="0">
+                <a:solidFill>
+                  <a:srgbClr val="1C3557"/>
+                </a:solidFill>
+                <a:latin typeface="Noto Sans JP"/>
+              </a:rPr>
+              <a:t>デリバリー内容が変化する時期。顧客の声を聞きながらブラッシュアップ</a:t>
+            </a:r>
+          </a:p>
+        </p:txBody>
+      </p:sp>
+      <p:sp>
+        <p:nvSpPr>
+          <p:cNvPr id="22" name="Rectangle 21"/>
+          <p:cNvSpPr/>
+          <p:nvPr/>
+        </p:nvSpPr>
+        <p:spPr>
+          <a:xfrm>
+            <a:off x="457200" y="4572000"/>
+            <a:ext cx="1371600" cy="777240"/>
+          </a:xfrm>
+          <a:prstGeom prst="rect">
+            <a:avLst/>
+          </a:prstGeom>
+          <a:solidFill>
+            <a:srgbClr val="F3F4F6"/>
+          </a:solidFill>
+          <a:ln>
+            <a:noFill/>
+          </a:ln>
+        </p:spPr>
+        <p:style>
+          <a:lnRef idx="1">
+            <a:schemeClr val="accent1"/>
+          </a:lnRef>
+          <a:fillRef idx="3">
+            <a:schemeClr val="accent1"/>
+          </a:fillRef>
+          <a:effectRef idx="2">
+            <a:schemeClr val="accent1"/>
+          </a:effectRef>
+          <a:fontRef idx="minor">
+            <a:schemeClr val="lt1"/>
+          </a:fontRef>
+        </p:style>
+        <p:txBody>
+          <a:bodyPr rtlCol="0" anchor="ctr" wrap="square" tIns="54864" bIns="54864"/>
+          <a:lstStyle/>
+          <a:p>
+            <a:pPr algn="ctr"/>
+            <a:r>
+              <a:rPr sz="1100" b="0">
+                <a:solidFill>
+                  <a:srgbClr val="1C3557"/>
+                </a:solidFill>
+                <a:latin typeface="Noto Sans JP"/>
+              </a:rPr>
+              <a:t>7-8月</a:t>
+            </a:r>
+          </a:p>
+        </p:txBody>
+      </p:sp>
+      <p:sp>
+        <p:nvSpPr>
+          <p:cNvPr id="23" name="Rectangle 22"/>
+          <p:cNvSpPr/>
+          <p:nvPr/>
+        </p:nvSpPr>
+        <p:spPr>
+          <a:xfrm>
+            <a:off x="1874519" y="4572000"/>
+            <a:ext cx="1280160" cy="777240"/>
+          </a:xfrm>
+          <a:prstGeom prst="rect">
+            <a:avLst/>
+          </a:prstGeom>
+          <a:solidFill>
+            <a:srgbClr val="F3F4F6"/>
+          </a:solidFill>
+          <a:ln>
+            <a:noFill/>
+          </a:ln>
+        </p:spPr>
+        <p:style>
+          <a:lnRef idx="1">
+            <a:schemeClr val="accent1"/>
+          </a:lnRef>
+          <a:fillRef idx="3">
+            <a:schemeClr val="accent1"/>
+          </a:fillRef>
+          <a:effectRef idx="2">
+            <a:schemeClr val="accent1"/>
+          </a:effectRef>
+          <a:fontRef idx="minor">
+            <a:schemeClr val="lt1"/>
+          </a:fontRef>
+        </p:style>
+        <p:txBody>
+          <a:bodyPr rtlCol="0" anchor="ctr" wrap="square" tIns="54864" bIns="54864"/>
+          <a:lstStyle/>
+          <a:p>
+            <a:pPr algn="ctr"/>
+            <a:r>
+              <a:rPr sz="1400" b="1">
+                <a:solidFill>
+                  <a:srgbClr val="1C3557"/>
+                </a:solidFill>
+                <a:latin typeface="Noto Sans JP"/>
+              </a:rPr>
+              <a:t>3〜4人分</a:t>
+            </a:r>
+          </a:p>
+        </p:txBody>
+      </p:sp>
+      <p:sp>
+        <p:nvSpPr>
+          <p:cNvPr id="24" name="Rectangle 23"/>
+          <p:cNvSpPr/>
+          <p:nvPr/>
+        </p:nvSpPr>
+        <p:spPr>
+          <a:xfrm>
+            <a:off x="3200400" y="4572000"/>
+            <a:ext cx="5029200" cy="777240"/>
+          </a:xfrm>
+          <a:prstGeom prst="rect">
+            <a:avLst/>
+          </a:prstGeom>
+          <a:solidFill>
+            <a:srgbClr val="F3F4F6"/>
+          </a:solidFill>
+          <a:ln>
+            <a:noFill/>
+          </a:ln>
+        </p:spPr>
+        <p:style>
+          <a:lnRef idx="1">
+            <a:schemeClr val="accent1"/>
+          </a:lnRef>
+          <a:fillRef idx="3">
+            <a:schemeClr val="accent1"/>
+          </a:fillRef>
+          <a:effectRef idx="2">
+            <a:schemeClr val="accent1"/>
+          </a:effectRef>
+          <a:fontRef idx="minor">
+            <a:schemeClr val="lt1"/>
+          </a:fontRef>
+        </p:style>
+        <p:txBody>
+          <a:bodyPr rtlCol="0" anchor="ctr" wrap="square" tIns="54864" bIns="54864"/>
+          <a:lstStyle/>
+          <a:p>
+            <a:pPr algn="l"/>
+            <a:r>
+              <a:rPr sz="1100" b="0">
+                <a:solidFill>
+                  <a:srgbClr val="1C3557"/>
+                </a:solidFill>
+                <a:latin typeface="Noto Sans JP"/>
+              </a:rPr>
+              <a:t>β版経由の新規案件対応 ／ プロダクト改善ループ確立 ／ 事務・法務AI追加</a:t>
+            </a:r>
+          </a:p>
+        </p:txBody>
+      </p:sp>
+      <p:sp>
+        <p:nvSpPr>
+          <p:cNvPr id="25" name="Rectangle 24"/>
+          <p:cNvSpPr/>
+          <p:nvPr/>
+        </p:nvSpPr>
+        <p:spPr>
+          <a:xfrm>
+            <a:off x="8275320" y="4572000"/>
+            <a:ext cx="3456432" cy="777240"/>
+          </a:xfrm>
+          <a:prstGeom prst="rect">
+            <a:avLst/>
+          </a:prstGeom>
+          <a:solidFill>
+            <a:srgbClr val="F3F4F6"/>
+          </a:solidFill>
+          <a:ln>
+            <a:noFill/>
+          </a:ln>
+        </p:spPr>
+        <p:style>
+          <a:lnRef idx="1">
+            <a:schemeClr val="accent1"/>
+          </a:lnRef>
+          <a:fillRef idx="3">
+            <a:schemeClr val="accent1"/>
+          </a:fillRef>
+          <a:effectRef idx="2">
+            <a:schemeClr val="accent1"/>
+          </a:effectRef>
+          <a:fontRef idx="minor">
+            <a:schemeClr val="lt1"/>
+          </a:fontRef>
+        </p:style>
+        <p:txBody>
+          <a:bodyPr rtlCol="0" anchor="ctr" wrap="square" tIns="54864" bIns="54864"/>
+          <a:lstStyle/>
+          <a:p>
+            <a:pPr algn="l"/>
+            <a:r>
+              <a:rPr sz="1100" b="0">
+                <a:solidFill>
+                  <a:srgbClr val="1C3557"/>
+                </a:solidFill>
+                <a:latin typeface="Noto Sans JP"/>
+              </a:rPr>
+              <a:t>顧客が増えて事務処理が増える時期。事務AIを稼働させて対応</a:t>
+            </a:r>
+          </a:p>
+        </p:txBody>
+      </p:sp>
+      <p:sp>
+        <p:nvSpPr>
+          <p:cNvPr id="26" name="Rectangle 25"/>
+          <p:cNvSpPr/>
+          <p:nvPr/>
+        </p:nvSpPr>
+        <p:spPr>
+          <a:xfrm>
+            <a:off x="457200" y="5349240"/>
+            <a:ext cx="1371600" cy="777240"/>
+          </a:xfrm>
+          <a:prstGeom prst="rect">
+            <a:avLst/>
           </a:prstGeom>
           <a:solidFill>
             <a:srgbClr val="2563EB"/>
@@ -6393,109 +6644,231 @@
           <a:p>
             <a:pPr algn="ctr"/>
             <a:r>
-              <a:rPr sz="2200" b="1">
+              <a:rPr sz="1100" b="1">
                 <a:solidFill>
                   <a:srgbClr val="FFFFFF"/>
                 </a:solidFill>
                 <a:latin typeface="Noto Sans JP"/>
               </a:rPr>
-              <a:t>月換算</a:t>
+              <a:t>9月末</a:t>
             </a:r>
           </a:p>
           <a:p>
             <a:pPr algn="ctr"/>
             <a:r>
-              <a:rPr sz="2200" b="1">
+              <a:rPr sz="1100" b="1">
                 <a:solidFill>
                   <a:srgbClr val="FFFFFF"/>
                 </a:solidFill>
                 <a:latin typeface="Noto Sans JP"/>
               </a:rPr>
-              <a:t/>
-            </a:r>
-          </a:p>
+              <a:t>(最終)</a:t>
+            </a:r>
+          </a:p>
+        </p:txBody>
+      </p:sp>
+      <p:sp>
+        <p:nvSpPr>
+          <p:cNvPr id="27" name="Rectangle 26"/>
+          <p:cNvSpPr/>
+          <p:nvPr/>
+        </p:nvSpPr>
+        <p:spPr>
+          <a:xfrm>
+            <a:off x="1874519" y="5349240"/>
+            <a:ext cx="1280160" cy="777240"/>
+          </a:xfrm>
+          <a:prstGeom prst="rect">
+            <a:avLst/>
+          </a:prstGeom>
+          <a:solidFill>
+            <a:srgbClr val="2563EB"/>
+          </a:solidFill>
+          <a:ln>
+            <a:noFill/>
+          </a:ln>
+        </p:spPr>
+        <p:style>
+          <a:lnRef idx="1">
+            <a:schemeClr val="accent1"/>
+          </a:lnRef>
+          <a:fillRef idx="3">
+            <a:schemeClr val="accent1"/>
+          </a:fillRef>
+          <a:effectRef idx="2">
+            <a:schemeClr val="accent1"/>
+          </a:effectRef>
+          <a:fontRef idx="minor">
+            <a:schemeClr val="lt1"/>
+          </a:fontRef>
+        </p:style>
+        <p:txBody>
+          <a:bodyPr rtlCol="0" anchor="ctr" wrap="square" tIns="54864" bIns="54864"/>
+          <a:lstStyle/>
           <a:p>
             <a:pPr algn="ctr"/>
             <a:r>
-              <a:rPr sz="2200" b="1">
+              <a:rPr sz="1400" b="1">
                 <a:solidFill>
                   <a:srgbClr val="FFFFFF"/>
                 </a:solidFill>
                 <a:latin typeface="Noto Sans JP"/>
               </a:rPr>
-              <a:t>¥464,000</a:t>
-            </a:r>
-          </a:p>
+              <a:t>5人分</a:t>
+            </a:r>
+          </a:p>
+        </p:txBody>
+      </p:sp>
+      <p:sp>
+        <p:nvSpPr>
+          <p:cNvPr id="28" name="Rectangle 27"/>
+          <p:cNvSpPr/>
+          <p:nvPr/>
+        </p:nvSpPr>
+        <p:spPr>
+          <a:xfrm>
+            <a:off x="3200400" y="5349240"/>
+            <a:ext cx="5029200" cy="777240"/>
+          </a:xfrm>
+          <a:prstGeom prst="rect">
+            <a:avLst/>
+          </a:prstGeom>
+          <a:solidFill>
+            <a:srgbClr val="DBEAFE"/>
+          </a:solidFill>
+          <a:ln>
+            <a:noFill/>
+          </a:ln>
+        </p:spPr>
+        <p:style>
+          <a:lnRef idx="1">
+            <a:schemeClr val="accent1"/>
+          </a:lnRef>
+          <a:fillRef idx="3">
+            <a:schemeClr val="accent1"/>
+          </a:fillRef>
+          <a:effectRef idx="2">
+            <a:schemeClr val="accent1"/>
+          </a:effectRef>
+          <a:fontRef idx="minor">
+            <a:schemeClr val="lt1"/>
+          </a:fontRef>
+        </p:style>
+        <p:txBody>
+          <a:bodyPr rtlCol="0" anchor="ctr" wrap="square" tIns="54864" bIns="54864"/>
+          <a:lstStyle/>
+          <a:p>
+            <a:pPr algn="l"/>
+            <a:r>
+              <a:rPr sz="1100" b="0">
+                <a:solidFill>
+                  <a:srgbClr val="1C3557"/>
+                </a:solidFill>
+                <a:latin typeface="Noto Sans JP"/>
+              </a:rPr>
+              <a:t>5人フル稼働 ／ プロダクト × デリバリー両輪完成</a:t>
+            </a:r>
+          </a:p>
+        </p:txBody>
+      </p:sp>
+      <p:sp>
+        <p:nvSpPr>
+          <p:cNvPr id="29" name="Rectangle 28"/>
+          <p:cNvSpPr/>
+          <p:nvPr/>
+        </p:nvSpPr>
+        <p:spPr>
+          <a:xfrm>
+            <a:off x="8275320" y="5349240"/>
+            <a:ext cx="3456432" cy="777240"/>
+          </a:xfrm>
+          <a:prstGeom prst="rect">
+            <a:avLst/>
+          </a:prstGeom>
+          <a:solidFill>
+            <a:srgbClr val="DBEAFE"/>
+          </a:solidFill>
+          <a:ln>
+            <a:noFill/>
+          </a:ln>
+        </p:spPr>
+        <p:style>
+          <a:lnRef idx="1">
+            <a:schemeClr val="accent1"/>
+          </a:lnRef>
+          <a:fillRef idx="3">
+            <a:schemeClr val="accent1"/>
+          </a:fillRef>
+          <a:effectRef idx="2">
+            <a:schemeClr val="accent1"/>
+          </a:effectRef>
+          <a:fontRef idx="minor">
+            <a:schemeClr val="lt1"/>
+          </a:fontRef>
+        </p:style>
+        <p:txBody>
+          <a:bodyPr rtlCol="0" anchor="ctr" wrap="square" tIns="54864" bIns="54864"/>
+          <a:lstStyle/>
+          <a:p>
+            <a:pPr algn="l"/>
+            <a:r>
+              <a:rPr sz="1100" b="0">
+                <a:solidFill>
+                  <a:srgbClr val="1C3557"/>
+                </a:solidFill>
+                <a:latin typeface="Noto Sans JP"/>
+              </a:rPr>
+              <a:t>Agent Teamsで5人協働を実装し、事業を動かす完成形へ</a:t>
+            </a:r>
+          </a:p>
+        </p:txBody>
+      </p:sp>
+      <p:sp>
+        <p:nvSpPr>
+          <p:cNvPr id="30" name="Rectangle 29"/>
+          <p:cNvSpPr/>
+          <p:nvPr/>
+        </p:nvSpPr>
+        <p:spPr>
+          <a:xfrm>
+            <a:off x="457200" y="6263640"/>
+            <a:ext cx="11274552" cy="411480"/>
+          </a:xfrm>
+          <a:prstGeom prst="rect">
+            <a:avLst/>
+          </a:prstGeom>
+          <a:noFill/>
+          <a:ln>
+            <a:noFill/>
+          </a:ln>
+        </p:spPr>
+        <p:style>
+          <a:lnRef idx="1">
+            <a:schemeClr val="accent1"/>
+          </a:lnRef>
+          <a:fillRef idx="3">
+            <a:schemeClr val="accent1"/>
+          </a:fillRef>
+          <a:effectRef idx="2">
+            <a:schemeClr val="accent1"/>
+          </a:effectRef>
+          <a:fontRef idx="minor">
+            <a:schemeClr val="lt1"/>
+          </a:fontRef>
+        </p:style>
+        <p:txBody>
+          <a:bodyPr rtlCol="0" anchor="ctr" wrap="square" tIns="54864" bIns="54864"/>
+          <a:lstStyle/>
           <a:p>
             <a:pPr algn="ctr"/>
             <a:r>
-              <a:rPr sz="2200" b="1">
-                <a:solidFill>
-                  <a:srgbClr val="FFFFFF"/>
-                </a:solidFill>
-                <a:latin typeface="Noto Sans JP"/>
-              </a:rPr>
-              <a:t/>
-            </a:r>
-          </a:p>
-          <a:p>
-            <a:pPr algn="ctr"/>
-            <a:r>
-              <a:rPr sz="2200" b="1">
-                <a:solidFill>
-                  <a:srgbClr val="FFFFFF"/>
-                </a:solidFill>
-                <a:latin typeface="Noto Sans JP"/>
-              </a:rPr>
-              <a:t>=</a:t>
-            </a:r>
-          </a:p>
-          <a:p>
-            <a:pPr algn="ctr"/>
-            <a:r>
-              <a:rPr sz="2200" b="1">
-                <a:solidFill>
-                  <a:srgbClr val="FFFFFF"/>
-                </a:solidFill>
-                <a:latin typeface="Noto Sans JP"/>
-              </a:rPr>
-              <a:t/>
-            </a:r>
-          </a:p>
-          <a:p>
-            <a:pPr algn="ctr"/>
-            <a:r>
-              <a:rPr sz="2200" b="1">
-                <a:solidFill>
-                  <a:srgbClr val="FFFFFF"/>
-                </a:solidFill>
-                <a:latin typeface="Noto Sans JP"/>
-              </a:rPr>
-              <a:t>AI社員</a:t>
-            </a:r>
-          </a:p>
-          <a:p>
-            <a:pPr algn="ctr"/>
-            <a:r>
-              <a:rPr sz="2200" b="1">
-                <a:solidFill>
-                  <a:srgbClr val="FFFFFF"/>
-                </a:solidFill>
-                <a:latin typeface="Noto Sans JP"/>
-              </a:rPr>
-              <a:t>1.3人分</a:t>
-            </a:r>
-          </a:p>
-          <a:p>
-            <a:pPr algn="ctr"/>
-            <a:r>
-              <a:rPr sz="2200" b="1">
-                <a:solidFill>
-                  <a:srgbClr val="FFFFFF"/>
-                </a:solidFill>
-                <a:latin typeface="Noto Sans JP"/>
-              </a:rPr>
-              <a:t>稼働中</a:t>
+              <a:rPr sz="1300" b="1">
+                <a:solidFill>
+                  <a:srgbClr val="2563EB"/>
+                </a:solidFill>
+                <a:latin typeface="Noto Sans JP"/>
+              </a:rPr>
+              <a:t>新規事業なので進行で変わることも多いが、5人完成は確実に進める</a:t>
             </a:r>
           </a:p>
         </p:txBody>
@@ -6569,1903 +6942,6 @@
         </p:nvSpPr>
         <p:spPr>
           <a:xfrm>
-            <a:off x="5029200" y="1371600"/>
-            <a:ext cx="2130552" cy="73152"/>
-          </a:xfrm>
-          <a:prstGeom prst="rect">
-            <a:avLst/>
-          </a:prstGeom>
-          <a:solidFill>
-            <a:srgbClr val="2563EB"/>
-          </a:solidFill>
-          <a:ln>
-            <a:noFill/>
-          </a:ln>
-        </p:spPr>
-        <p:style>
-          <a:lnRef idx="1">
-            <a:schemeClr val="accent1"/>
-          </a:lnRef>
-          <a:fillRef idx="3">
-            <a:schemeClr val="accent1"/>
-          </a:fillRef>
-          <a:effectRef idx="2">
-            <a:schemeClr val="accent1"/>
-          </a:effectRef>
-          <a:fontRef idx="minor">
-            <a:schemeClr val="lt1"/>
-          </a:fontRef>
-        </p:style>
-        <p:txBody>
-          <a:bodyPr rtlCol="0" anchor="ctr"/>
-          <a:lstStyle/>
-          <a:p>
-            <a:pPr algn="ctr"/>
-          </a:p>
-        </p:txBody>
-      </p:sp>
-      <p:sp>
-        <p:nvSpPr>
-          <p:cNvPr id="4" name="Rectangle 3"/>
-          <p:cNvSpPr/>
-          <p:nvPr/>
-        </p:nvSpPr>
-        <p:spPr>
-          <a:xfrm>
-            <a:off x="457200" y="1828800"/>
-            <a:ext cx="11274552" cy="1097280"/>
-          </a:xfrm>
-          <a:prstGeom prst="rect">
-            <a:avLst/>
-          </a:prstGeom>
-          <a:noFill/>
-          <a:ln>
-            <a:noFill/>
-          </a:ln>
-        </p:spPr>
-        <p:style>
-          <a:lnRef idx="1">
-            <a:schemeClr val="accent1"/>
-          </a:lnRef>
-          <a:fillRef idx="3">
-            <a:schemeClr val="accent1"/>
-          </a:fillRef>
-          <a:effectRef idx="2">
-            <a:schemeClr val="accent1"/>
-          </a:effectRef>
-          <a:fontRef idx="minor">
-            <a:schemeClr val="lt1"/>
-          </a:fontRef>
-        </p:style>
-        <p:txBody>
-          <a:bodyPr rtlCol="0" anchor="ctr" wrap="square" tIns="54864" bIns="54864"/>
-          <a:lstStyle/>
-          <a:p>
-            <a:pPr algn="ctr"/>
-            <a:r>
-              <a:rPr sz="3400" b="1">
-                <a:solidFill>
-                  <a:srgbClr val="6B7280"/>
-                </a:solidFill>
-                <a:latin typeface="Noto Sans JP"/>
-              </a:rPr>
-              <a:t>ここまでが現状の話</a:t>
-            </a:r>
-          </a:p>
-        </p:txBody>
-      </p:sp>
-      <p:sp>
-        <p:nvSpPr>
-          <p:cNvPr id="5" name="Down Arrow 4"/>
-          <p:cNvSpPr/>
-          <p:nvPr/>
-        </p:nvSpPr>
-        <p:spPr>
-          <a:xfrm>
-            <a:off x="5641848" y="3108960"/>
-            <a:ext cx="914400" cy="731520"/>
-          </a:xfrm>
-          <a:prstGeom prst="downArrow">
-            <a:avLst/>
-          </a:prstGeom>
-          <a:solidFill>
-            <a:srgbClr val="2563EB"/>
-          </a:solidFill>
-          <a:ln>
-            <a:noFill/>
-          </a:ln>
-        </p:spPr>
-        <p:style>
-          <a:lnRef idx="1">
-            <a:schemeClr val="accent1"/>
-          </a:lnRef>
-          <a:fillRef idx="3">
-            <a:schemeClr val="accent1"/>
-          </a:fillRef>
-          <a:effectRef idx="2">
-            <a:schemeClr val="accent1"/>
-          </a:effectRef>
-          <a:fontRef idx="minor">
-            <a:schemeClr val="lt1"/>
-          </a:fontRef>
-        </p:style>
-        <p:txBody>
-          <a:bodyPr rtlCol="0" anchor="ctr"/>
-          <a:lstStyle/>
-          <a:p>
-            <a:pPr algn="ctr"/>
-          </a:p>
-        </p:txBody>
-      </p:sp>
-      <p:sp>
-        <p:nvSpPr>
-          <p:cNvPr id="6" name="Rectangle 5"/>
-          <p:cNvSpPr/>
-          <p:nvPr/>
-        </p:nvSpPr>
-        <p:spPr>
-          <a:xfrm>
-            <a:off x="457200" y="4023360"/>
-            <a:ext cx="11274552" cy="1371600"/>
-          </a:xfrm>
-          <a:prstGeom prst="rect">
-            <a:avLst/>
-          </a:prstGeom>
-          <a:noFill/>
-          <a:ln>
-            <a:noFill/>
-          </a:ln>
-        </p:spPr>
-        <p:style>
-          <a:lnRef idx="1">
-            <a:schemeClr val="accent1"/>
-          </a:lnRef>
-          <a:fillRef idx="3">
-            <a:schemeClr val="accent1"/>
-          </a:fillRef>
-          <a:effectRef idx="2">
-            <a:schemeClr val="accent1"/>
-          </a:effectRef>
-          <a:fontRef idx="minor">
-            <a:schemeClr val="lt1"/>
-          </a:fontRef>
-        </p:style>
-        <p:txBody>
-          <a:bodyPr rtlCol="0" anchor="ctr" wrap="square" tIns="54864" bIns="54864"/>
-          <a:lstStyle/>
-          <a:p>
-            <a:pPr algn="ctr"/>
-            <a:r>
-              <a:rPr sz="5000" b="1">
-                <a:solidFill>
-                  <a:srgbClr val="2563EB"/>
-                </a:solidFill>
-                <a:latin typeface="Noto Sans JP"/>
-              </a:rPr>
-              <a:t>ここから今後の話</a:t>
-            </a:r>
-          </a:p>
-        </p:txBody>
-      </p:sp>
-      <p:sp>
-        <p:nvSpPr>
-          <p:cNvPr id="7" name="Rectangle 6"/>
-          <p:cNvSpPr/>
-          <p:nvPr/>
-        </p:nvSpPr>
-        <p:spPr>
-          <a:xfrm>
-            <a:off x="457200" y="5486400"/>
-            <a:ext cx="11274552" cy="548640"/>
-          </a:xfrm>
-          <a:prstGeom prst="rect">
-            <a:avLst/>
-          </a:prstGeom>
-          <a:noFill/>
-          <a:ln>
-            <a:noFill/>
-          </a:ln>
-        </p:spPr>
-        <p:style>
-          <a:lnRef idx="1">
-            <a:schemeClr val="accent1"/>
-          </a:lnRef>
-          <a:fillRef idx="3">
-            <a:schemeClr val="accent1"/>
-          </a:fillRef>
-          <a:effectRef idx="2">
-            <a:schemeClr val="accent1"/>
-          </a:effectRef>
-          <a:fontRef idx="minor">
-            <a:schemeClr val="lt1"/>
-          </a:fontRef>
-        </p:style>
-        <p:txBody>
-          <a:bodyPr rtlCol="0" anchor="ctr" wrap="square" tIns="54864" bIns="54864"/>
-          <a:lstStyle/>
-          <a:p>
-            <a:pPr algn="ctr"/>
-            <a:r>
-              <a:rPr sz="1800" b="1">
-                <a:solidFill>
-                  <a:srgbClr val="1C3557"/>
-                </a:solidFill>
-                <a:latin typeface="Noto Sans JP"/>
-              </a:rPr>
-              <a:t>9月末までにAI社員5人を完成させる、その具体ロードマップ</a:t>
-            </a:r>
-          </a:p>
-        </p:txBody>
-      </p:sp>
-      <p:sp>
-        <p:nvSpPr>
-          <p:cNvPr id="8" name="Rectangle 7"/>
-          <p:cNvSpPr/>
-          <p:nvPr/>
-        </p:nvSpPr>
-        <p:spPr>
-          <a:xfrm>
-            <a:off x="10972800" y="6492240"/>
-            <a:ext cx="1005840" cy="274320"/>
-          </a:xfrm>
-          <a:prstGeom prst="rect">
-            <a:avLst/>
-          </a:prstGeom>
-          <a:noFill/>
-          <a:ln>
-            <a:noFill/>
-          </a:ln>
-        </p:spPr>
-        <p:style>
-          <a:lnRef idx="1">
-            <a:schemeClr val="accent1"/>
-          </a:lnRef>
-          <a:fillRef idx="3">
-            <a:schemeClr val="accent1"/>
-          </a:fillRef>
-          <a:effectRef idx="2">
-            <a:schemeClr val="accent1"/>
-          </a:effectRef>
-          <a:fontRef idx="minor">
-            <a:schemeClr val="lt1"/>
-          </a:fontRef>
-        </p:style>
-        <p:txBody>
-          <a:bodyPr rtlCol="0" anchor="t" wrap="square" tIns="54864" bIns="54864"/>
-          <a:lstStyle/>
-          <a:p>
-            <a:pPr algn="r"/>
-            <a:r>
-              <a:rPr sz="1100" b="0">
-                <a:solidFill>
-                  <a:srgbClr val="6B7280"/>
-                </a:solidFill>
-                <a:latin typeface="Noto Sans JP"/>
-              </a:rPr>
-              <a:t>12 / 14</a:t>
-            </a:r>
-          </a:p>
-        </p:txBody>
-      </p:sp>
-    </p:spTree>
-  </p:cSld>
-  <p:clrMapOvr>
-    <a:masterClrMapping/>
-  </p:clrMapOvr>
-</p:sld>
-</file>
-
-<file path=ppt/slides/slide13.xml><?xml version="1.0" encoding="utf-8"?>
-<p:sld xmlns:a="http://schemas.openxmlformats.org/drawingml/2006/main" xmlns:p="http://schemas.openxmlformats.org/presentationml/2006/main" xmlns:r="http://schemas.openxmlformats.org/officeDocument/2006/relationships">
-  <p:cSld>
-    <p:spTree>
-      <p:nvGrpSpPr>
-        <p:cNvPr id="1" name=""/>
-        <p:cNvGrpSpPr/>
-        <p:nvPr/>
-      </p:nvGrpSpPr>
-      <p:grpSpPr/>
-      <p:sp>
-        <p:nvSpPr>
-          <p:cNvPr id="2" name="Rectangle 1"/>
-          <p:cNvSpPr/>
-          <p:nvPr/>
-        </p:nvSpPr>
-        <p:spPr>
-          <a:xfrm>
-            <a:off x="0" y="0"/>
-            <a:ext cx="12188952" cy="6858000"/>
-          </a:xfrm>
-          <a:prstGeom prst="rect">
-            <a:avLst/>
-          </a:prstGeom>
-          <a:solidFill>
-            <a:srgbClr val="FFFFFF"/>
-          </a:solidFill>
-          <a:ln>
-            <a:noFill/>
-          </a:ln>
-        </p:spPr>
-        <p:style>
-          <a:lnRef idx="1">
-            <a:schemeClr val="accent1"/>
-          </a:lnRef>
-          <a:fillRef idx="3">
-            <a:schemeClr val="accent1"/>
-          </a:fillRef>
-          <a:effectRef idx="2">
-            <a:schemeClr val="accent1"/>
-          </a:effectRef>
-          <a:fontRef idx="minor">
-            <a:schemeClr val="lt1"/>
-          </a:fontRef>
-        </p:style>
-        <p:txBody>
-          <a:bodyPr rtlCol="0" anchor="ctr"/>
-          <a:lstStyle/>
-          <a:p>
-            <a:pPr algn="ctr"/>
-          </a:p>
-        </p:txBody>
-      </p:sp>
-      <p:sp>
-        <p:nvSpPr>
-          <p:cNvPr id="3" name="Rectangle 2"/>
-          <p:cNvSpPr/>
-          <p:nvPr/>
-        </p:nvSpPr>
-        <p:spPr>
-          <a:xfrm>
-            <a:off x="10972800" y="274320"/>
-            <a:ext cx="1005840" cy="274320"/>
-          </a:xfrm>
-          <a:prstGeom prst="rect">
-            <a:avLst/>
-          </a:prstGeom>
-          <a:noFill/>
-          <a:ln>
-            <a:noFill/>
-          </a:ln>
-        </p:spPr>
-        <p:style>
-          <a:lnRef idx="1">
-            <a:schemeClr val="accent1"/>
-          </a:lnRef>
-          <a:fillRef idx="3">
-            <a:schemeClr val="accent1"/>
-          </a:fillRef>
-          <a:effectRef idx="2">
-            <a:schemeClr val="accent1"/>
-          </a:effectRef>
-          <a:fontRef idx="minor">
-            <a:schemeClr val="lt1"/>
-          </a:fontRef>
-        </p:style>
-        <p:txBody>
-          <a:bodyPr rtlCol="0" anchor="t" wrap="square" tIns="54864" bIns="54864"/>
-          <a:lstStyle/>
-          <a:p>
-            <a:pPr algn="r"/>
-            <a:r>
-              <a:rPr sz="1100" b="0">
-                <a:solidFill>
-                  <a:srgbClr val="6B7280"/>
-                </a:solidFill>
-                <a:latin typeface="Noto Sans JP"/>
-              </a:rPr>
-              <a:t>13 / 14</a:t>
-            </a:r>
-          </a:p>
-        </p:txBody>
-      </p:sp>
-      <p:sp>
-        <p:nvSpPr>
-          <p:cNvPr id="4" name="Rectangle 3"/>
-          <p:cNvSpPr/>
-          <p:nvPr/>
-        </p:nvSpPr>
-        <p:spPr>
-          <a:xfrm>
-            <a:off x="457200" y="365760"/>
-            <a:ext cx="10515600" cy="640080"/>
-          </a:xfrm>
-          <a:prstGeom prst="rect">
-            <a:avLst/>
-          </a:prstGeom>
-          <a:noFill/>
-          <a:ln>
-            <a:noFill/>
-          </a:ln>
-        </p:spPr>
-        <p:style>
-          <a:lnRef idx="1">
-            <a:schemeClr val="accent1"/>
-          </a:lnRef>
-          <a:fillRef idx="3">
-            <a:schemeClr val="accent1"/>
-          </a:fillRef>
-          <a:effectRef idx="2">
-            <a:schemeClr val="accent1"/>
-          </a:effectRef>
-          <a:fontRef idx="minor">
-            <a:schemeClr val="lt1"/>
-          </a:fontRef>
-        </p:style>
-        <p:txBody>
-          <a:bodyPr rtlCol="0" anchor="t" wrap="square" tIns="54864" bIns="54864"/>
-          <a:lstStyle/>
-          <a:p>
-            <a:pPr algn="l"/>
-            <a:r>
-              <a:rPr sz="2400" b="1">
-                <a:solidFill>
-                  <a:srgbClr val="1C3557"/>
-                </a:solidFill>
-                <a:latin typeface="Noto Sans JP"/>
-              </a:rPr>
-              <a:t>9月末までのロードマップ</a:t>
-            </a:r>
-          </a:p>
-        </p:txBody>
-      </p:sp>
-      <p:sp>
-        <p:nvSpPr>
-          <p:cNvPr id="5" name="Rectangle 4"/>
-          <p:cNvSpPr/>
-          <p:nvPr/>
-        </p:nvSpPr>
-        <p:spPr>
-          <a:xfrm>
-            <a:off x="457200" y="1051560"/>
-            <a:ext cx="1645920" cy="64008"/>
-          </a:xfrm>
-          <a:prstGeom prst="rect">
-            <a:avLst/>
-          </a:prstGeom>
-          <a:solidFill>
-            <a:srgbClr val="2563EB"/>
-          </a:solidFill>
-          <a:ln>
-            <a:noFill/>
-          </a:ln>
-        </p:spPr>
-        <p:style>
-          <a:lnRef idx="1">
-            <a:schemeClr val="accent1"/>
-          </a:lnRef>
-          <a:fillRef idx="3">
-            <a:schemeClr val="accent1"/>
-          </a:fillRef>
-          <a:effectRef idx="2">
-            <a:schemeClr val="accent1"/>
-          </a:effectRef>
-          <a:fontRef idx="minor">
-            <a:schemeClr val="lt1"/>
-          </a:fontRef>
-        </p:style>
-        <p:txBody>
-          <a:bodyPr rtlCol="0" anchor="ctr"/>
-          <a:lstStyle/>
-          <a:p>
-            <a:pPr algn="ctr"/>
-          </a:p>
-        </p:txBody>
-      </p:sp>
-      <p:sp>
-        <p:nvSpPr>
-          <p:cNvPr id="6" name="Rectangle 5"/>
-          <p:cNvSpPr/>
-          <p:nvPr/>
-        </p:nvSpPr>
-        <p:spPr>
-          <a:xfrm>
-            <a:off x="457200" y="1371600"/>
-            <a:ext cx="1371600" cy="777240"/>
-          </a:xfrm>
-          <a:prstGeom prst="rect">
-            <a:avLst/>
-          </a:prstGeom>
-          <a:solidFill>
-            <a:srgbClr val="1C3557"/>
-          </a:solidFill>
-          <a:ln>
-            <a:noFill/>
-          </a:ln>
-        </p:spPr>
-        <p:style>
-          <a:lnRef idx="1">
-            <a:schemeClr val="accent1"/>
-          </a:lnRef>
-          <a:fillRef idx="3">
-            <a:schemeClr val="accent1"/>
-          </a:fillRef>
-          <a:effectRef idx="2">
-            <a:schemeClr val="accent1"/>
-          </a:effectRef>
-          <a:fontRef idx="minor">
-            <a:schemeClr val="lt1"/>
-          </a:fontRef>
-        </p:style>
-        <p:txBody>
-          <a:bodyPr rtlCol="0" anchor="ctr" wrap="square" tIns="54864" bIns="54864"/>
-          <a:lstStyle/>
-          <a:p>
-            <a:pPr algn="ctr"/>
-            <a:r>
-              <a:rPr sz="1300" b="1">
-                <a:solidFill>
-                  <a:srgbClr val="FFFFFF"/>
-                </a:solidFill>
-                <a:latin typeface="Noto Sans JP"/>
-              </a:rPr>
-              <a:t>月</a:t>
-            </a:r>
-          </a:p>
-        </p:txBody>
-      </p:sp>
-      <p:sp>
-        <p:nvSpPr>
-          <p:cNvPr id="7" name="Rectangle 6"/>
-          <p:cNvSpPr/>
-          <p:nvPr/>
-        </p:nvSpPr>
-        <p:spPr>
-          <a:xfrm>
-            <a:off x="1874519" y="1371600"/>
-            <a:ext cx="1280160" cy="777240"/>
-          </a:xfrm>
-          <a:prstGeom prst="rect">
-            <a:avLst/>
-          </a:prstGeom>
-          <a:solidFill>
-            <a:srgbClr val="1C3557"/>
-          </a:solidFill>
-          <a:ln>
-            <a:noFill/>
-          </a:ln>
-        </p:spPr>
-        <p:style>
-          <a:lnRef idx="1">
-            <a:schemeClr val="accent1"/>
-          </a:lnRef>
-          <a:fillRef idx="3">
-            <a:schemeClr val="accent1"/>
-          </a:fillRef>
-          <a:effectRef idx="2">
-            <a:schemeClr val="accent1"/>
-          </a:effectRef>
-          <a:fontRef idx="minor">
-            <a:schemeClr val="lt1"/>
-          </a:fontRef>
-        </p:style>
-        <p:txBody>
-          <a:bodyPr rtlCol="0" anchor="ctr" wrap="square" tIns="54864" bIns="54864"/>
-          <a:lstStyle/>
-          <a:p>
-            <a:pPr algn="ctr"/>
-            <a:r>
-              <a:rPr sz="1300" b="1">
-                <a:solidFill>
-                  <a:srgbClr val="FFFFFF"/>
-                </a:solidFill>
-                <a:latin typeface="Noto Sans JP"/>
-              </a:rPr>
-              <a:t>達成水準</a:t>
-            </a:r>
-          </a:p>
-        </p:txBody>
-      </p:sp>
-      <p:sp>
-        <p:nvSpPr>
-          <p:cNvPr id="8" name="Rectangle 7"/>
-          <p:cNvSpPr/>
-          <p:nvPr/>
-        </p:nvSpPr>
-        <p:spPr>
-          <a:xfrm>
-            <a:off x="3200400" y="1371600"/>
-            <a:ext cx="5029200" cy="777240"/>
-          </a:xfrm>
-          <a:prstGeom prst="rect">
-            <a:avLst/>
-          </a:prstGeom>
-          <a:solidFill>
-            <a:srgbClr val="1C3557"/>
-          </a:solidFill>
-          <a:ln>
-            <a:noFill/>
-          </a:ln>
-        </p:spPr>
-        <p:style>
-          <a:lnRef idx="1">
-            <a:schemeClr val="accent1"/>
-          </a:lnRef>
-          <a:fillRef idx="3">
-            <a:schemeClr val="accent1"/>
-          </a:fillRef>
-          <a:effectRef idx="2">
-            <a:schemeClr val="accent1"/>
-          </a:effectRef>
-          <a:fontRef idx="minor">
-            <a:schemeClr val="lt1"/>
-          </a:fontRef>
-        </p:style>
-        <p:txBody>
-          <a:bodyPr rtlCol="0" anchor="ctr" wrap="square" tIns="54864" bIns="54864"/>
-          <a:lstStyle/>
-          <a:p>
-            <a:pPr algn="ctr"/>
-            <a:r>
-              <a:rPr sz="1300" b="1">
-                <a:solidFill>
-                  <a:srgbClr val="FFFFFF"/>
-                </a:solidFill>
-                <a:latin typeface="Noto Sans JP"/>
-              </a:rPr>
-              <a:t>具体タスク</a:t>
-            </a:r>
-          </a:p>
-        </p:txBody>
-      </p:sp>
-      <p:sp>
-        <p:nvSpPr>
-          <p:cNvPr id="9" name="Rectangle 8"/>
-          <p:cNvSpPr/>
-          <p:nvPr/>
-        </p:nvSpPr>
-        <p:spPr>
-          <a:xfrm>
-            <a:off x="8275320" y="1371600"/>
-            <a:ext cx="3456432" cy="777240"/>
-          </a:xfrm>
-          <a:prstGeom prst="rect">
-            <a:avLst/>
-          </a:prstGeom>
-          <a:solidFill>
-            <a:srgbClr val="1C3557"/>
-          </a:solidFill>
-          <a:ln>
-            <a:noFill/>
-          </a:ln>
-        </p:spPr>
-        <p:style>
-          <a:lnRef idx="1">
-            <a:schemeClr val="accent1"/>
-          </a:lnRef>
-          <a:fillRef idx="3">
-            <a:schemeClr val="accent1"/>
-          </a:fillRef>
-          <a:effectRef idx="2">
-            <a:schemeClr val="accent1"/>
-          </a:effectRef>
-          <a:fontRef idx="minor">
-            <a:schemeClr val="lt1"/>
-          </a:fontRef>
-        </p:style>
-        <p:txBody>
-          <a:bodyPr rtlCol="0" anchor="ctr" wrap="square" tIns="54864" bIns="54864"/>
-          <a:lstStyle/>
-          <a:p>
-            <a:pPr algn="ctr"/>
-            <a:r>
-              <a:rPr sz="1300" b="1">
-                <a:solidFill>
-                  <a:srgbClr val="FFFFFF"/>
-                </a:solidFill>
-                <a:latin typeface="Noto Sans JP"/>
-              </a:rPr>
-              <a:t>この時期に重点を置く理由</a:t>
-            </a:r>
-          </a:p>
-        </p:txBody>
-      </p:sp>
-      <p:sp>
-        <p:nvSpPr>
-          <p:cNvPr id="10" name="Rectangle 9"/>
-          <p:cNvSpPr/>
-          <p:nvPr/>
-        </p:nvSpPr>
-        <p:spPr>
-          <a:xfrm>
-            <a:off x="457200" y="2240280"/>
-            <a:ext cx="1371600" cy="777240"/>
-          </a:xfrm>
-          <a:prstGeom prst="rect">
-            <a:avLst/>
-          </a:prstGeom>
-          <a:solidFill>
-            <a:srgbClr val="F3F4F6"/>
-          </a:solidFill>
-          <a:ln>
-            <a:noFill/>
-          </a:ln>
-        </p:spPr>
-        <p:style>
-          <a:lnRef idx="1">
-            <a:schemeClr val="accent1"/>
-          </a:lnRef>
-          <a:fillRef idx="3">
-            <a:schemeClr val="accent1"/>
-          </a:fillRef>
-          <a:effectRef idx="2">
-            <a:schemeClr val="accent1"/>
-          </a:effectRef>
-          <a:fontRef idx="minor">
-            <a:schemeClr val="lt1"/>
-          </a:fontRef>
-        </p:style>
-        <p:txBody>
-          <a:bodyPr rtlCol="0" anchor="ctr" wrap="square" tIns="54864" bIns="54864"/>
-          <a:lstStyle/>
-          <a:p>
-            <a:pPr algn="ctr"/>
-            <a:r>
-              <a:rPr sz="1100" b="0">
-                <a:solidFill>
-                  <a:srgbClr val="1C3557"/>
-                </a:solidFill>
-                <a:latin typeface="Noto Sans JP"/>
-              </a:rPr>
-              <a:t>4月</a:t>
-            </a:r>
-          </a:p>
-          <a:p>
-            <a:pPr algn="ctr"/>
-            <a:r>
-              <a:rPr sz="1100" b="0">
-                <a:solidFill>
-                  <a:srgbClr val="1C3557"/>
-                </a:solidFill>
-                <a:latin typeface="Noto Sans JP"/>
-              </a:rPr>
-              <a:t>(現在)</a:t>
-            </a:r>
-          </a:p>
-        </p:txBody>
-      </p:sp>
-      <p:sp>
-        <p:nvSpPr>
-          <p:cNvPr id="11" name="Rectangle 10"/>
-          <p:cNvSpPr/>
-          <p:nvPr/>
-        </p:nvSpPr>
-        <p:spPr>
-          <a:xfrm>
-            <a:off x="1874519" y="2240280"/>
-            <a:ext cx="1280160" cy="777240"/>
-          </a:xfrm>
-          <a:prstGeom prst="rect">
-            <a:avLst/>
-          </a:prstGeom>
-          <a:solidFill>
-            <a:srgbClr val="F3F4F6"/>
-          </a:solidFill>
-          <a:ln>
-            <a:noFill/>
-          </a:ln>
-        </p:spPr>
-        <p:style>
-          <a:lnRef idx="1">
-            <a:schemeClr val="accent1"/>
-          </a:lnRef>
-          <a:fillRef idx="3">
-            <a:schemeClr val="accent1"/>
-          </a:fillRef>
-          <a:effectRef idx="2">
-            <a:schemeClr val="accent1"/>
-          </a:effectRef>
-          <a:fontRef idx="minor">
-            <a:schemeClr val="lt1"/>
-          </a:fontRef>
-        </p:style>
-        <p:txBody>
-          <a:bodyPr rtlCol="0" anchor="ctr" wrap="square" tIns="54864" bIns="54864"/>
-          <a:lstStyle/>
-          <a:p>
-            <a:pPr algn="ctr"/>
-            <a:r>
-              <a:rPr sz="1400" b="1">
-                <a:solidFill>
-                  <a:srgbClr val="1C3557"/>
-                </a:solidFill>
-                <a:latin typeface="Noto Sans JP"/>
-              </a:rPr>
-              <a:t>1.3人分</a:t>
-            </a:r>
-          </a:p>
-        </p:txBody>
-      </p:sp>
-      <p:sp>
-        <p:nvSpPr>
-          <p:cNvPr id="12" name="Rectangle 11"/>
-          <p:cNvSpPr/>
-          <p:nvPr/>
-        </p:nvSpPr>
-        <p:spPr>
-          <a:xfrm>
-            <a:off x="3200400" y="2240280"/>
-            <a:ext cx="5029200" cy="777240"/>
-          </a:xfrm>
-          <a:prstGeom prst="rect">
-            <a:avLst/>
-          </a:prstGeom>
-          <a:solidFill>
-            <a:srgbClr val="F3F4F6"/>
-          </a:solidFill>
-          <a:ln>
-            <a:noFill/>
-          </a:ln>
-        </p:spPr>
-        <p:style>
-          <a:lnRef idx="1">
-            <a:schemeClr val="accent1"/>
-          </a:lnRef>
-          <a:fillRef idx="3">
-            <a:schemeClr val="accent1"/>
-          </a:fillRef>
-          <a:effectRef idx="2">
-            <a:schemeClr val="accent1"/>
-          </a:effectRef>
-          <a:fontRef idx="minor">
-            <a:schemeClr val="lt1"/>
-          </a:fontRef>
-        </p:style>
-        <p:txBody>
-          <a:bodyPr rtlCol="0" anchor="ctr" wrap="square" tIns="54864" bIns="54864"/>
-          <a:lstStyle/>
-          <a:p>
-            <a:pPr algn="l"/>
-            <a:r>
-              <a:rPr sz="1100" b="0">
-                <a:solidFill>
-                  <a:srgbClr val="1C3557"/>
-                </a:solidFill>
-                <a:latin typeface="Noto Sans JP"/>
-              </a:rPr>
-              <a:t>展示会・ローンチに向けた制作物作成（クリエイティブ・LP・LINE）</a:t>
-            </a:r>
-          </a:p>
-        </p:txBody>
-      </p:sp>
-      <p:sp>
-        <p:nvSpPr>
-          <p:cNvPr id="13" name="Rectangle 12"/>
-          <p:cNvSpPr/>
-          <p:nvPr/>
-        </p:nvSpPr>
-        <p:spPr>
-          <a:xfrm>
-            <a:off x="8275320" y="2240280"/>
-            <a:ext cx="3456432" cy="777240"/>
-          </a:xfrm>
-          <a:prstGeom prst="rect">
-            <a:avLst/>
-          </a:prstGeom>
-          <a:solidFill>
-            <a:srgbClr val="F3F4F6"/>
-          </a:solidFill>
-          <a:ln>
-            <a:noFill/>
-          </a:ln>
-        </p:spPr>
-        <p:style>
-          <a:lnRef idx="1">
-            <a:schemeClr val="accent1"/>
-          </a:lnRef>
-          <a:fillRef idx="3">
-            <a:schemeClr val="accent1"/>
-          </a:fillRef>
-          <a:effectRef idx="2">
-            <a:schemeClr val="accent1"/>
-          </a:effectRef>
-          <a:fontRef idx="minor">
-            <a:schemeClr val="lt1"/>
-          </a:fontRef>
-        </p:style>
-        <p:txBody>
-          <a:bodyPr rtlCol="0" anchor="ctr" wrap="square" tIns="54864" bIns="54864"/>
-          <a:lstStyle/>
-          <a:p>
-            <a:pPr algn="l"/>
-            <a:r>
-              <a:rPr sz="1100" b="0">
-                <a:solidFill>
-                  <a:srgbClr val="1C3557"/>
-                </a:solidFill>
-                <a:latin typeface="Noto Sans JP"/>
-              </a:rPr>
-              <a:t>5月の本番に向けた助走期間</a:t>
-            </a:r>
-          </a:p>
-        </p:txBody>
-      </p:sp>
-      <p:sp>
-        <p:nvSpPr>
-          <p:cNvPr id="14" name="Rectangle 13"/>
-          <p:cNvSpPr/>
-          <p:nvPr/>
-        </p:nvSpPr>
-        <p:spPr>
-          <a:xfrm>
-            <a:off x="457200" y="3017520"/>
-            <a:ext cx="1371600" cy="777240"/>
-          </a:xfrm>
-          <a:prstGeom prst="rect">
-            <a:avLst/>
-          </a:prstGeom>
-          <a:solidFill>
-            <a:srgbClr val="F3F4F6"/>
-          </a:solidFill>
-          <a:ln>
-            <a:noFill/>
-          </a:ln>
-        </p:spPr>
-        <p:style>
-          <a:lnRef idx="1">
-            <a:schemeClr val="accent1"/>
-          </a:lnRef>
-          <a:fillRef idx="3">
-            <a:schemeClr val="accent1"/>
-          </a:fillRef>
-          <a:effectRef idx="2">
-            <a:schemeClr val="accent1"/>
-          </a:effectRef>
-          <a:fontRef idx="minor">
-            <a:schemeClr val="lt1"/>
-          </a:fontRef>
-        </p:style>
-        <p:txBody>
-          <a:bodyPr rtlCol="0" anchor="ctr" wrap="square" tIns="54864" bIns="54864"/>
-          <a:lstStyle/>
-          <a:p>
-            <a:pPr algn="ctr"/>
-            <a:r>
-              <a:rPr sz="1100" b="0">
-                <a:solidFill>
-                  <a:srgbClr val="1C3557"/>
-                </a:solidFill>
-                <a:latin typeface="Noto Sans JP"/>
-              </a:rPr>
-              <a:t>5月</a:t>
-            </a:r>
-          </a:p>
-        </p:txBody>
-      </p:sp>
-      <p:sp>
-        <p:nvSpPr>
-          <p:cNvPr id="15" name="Rectangle 14"/>
-          <p:cNvSpPr/>
-          <p:nvPr/>
-        </p:nvSpPr>
-        <p:spPr>
-          <a:xfrm>
-            <a:off x="1874519" y="3017520"/>
-            <a:ext cx="1280160" cy="777240"/>
-          </a:xfrm>
-          <a:prstGeom prst="rect">
-            <a:avLst/>
-          </a:prstGeom>
-          <a:solidFill>
-            <a:srgbClr val="F3F4F6"/>
-          </a:solidFill>
-          <a:ln>
-            <a:noFill/>
-          </a:ln>
-        </p:spPr>
-        <p:style>
-          <a:lnRef idx="1">
-            <a:schemeClr val="accent1"/>
-          </a:lnRef>
-          <a:fillRef idx="3">
-            <a:schemeClr val="accent1"/>
-          </a:fillRef>
-          <a:effectRef idx="2">
-            <a:schemeClr val="accent1"/>
-          </a:effectRef>
-          <a:fontRef idx="minor">
-            <a:schemeClr val="lt1"/>
-          </a:fontRef>
-        </p:style>
-        <p:txBody>
-          <a:bodyPr rtlCol="0" anchor="ctr" wrap="square" tIns="54864" bIns="54864"/>
-          <a:lstStyle/>
-          <a:p>
-            <a:pPr algn="ctr"/>
-            <a:r>
-              <a:rPr sz="1400" b="1">
-                <a:solidFill>
-                  <a:srgbClr val="1C3557"/>
-                </a:solidFill>
-                <a:latin typeface="Noto Sans JP"/>
-              </a:rPr>
-              <a:t>1.6人分</a:t>
-            </a:r>
-          </a:p>
-        </p:txBody>
-      </p:sp>
-      <p:sp>
-        <p:nvSpPr>
-          <p:cNvPr id="16" name="Rectangle 15"/>
-          <p:cNvSpPr/>
-          <p:nvPr/>
-        </p:nvSpPr>
-        <p:spPr>
-          <a:xfrm>
-            <a:off x="3200400" y="3017520"/>
-            <a:ext cx="5029200" cy="777240"/>
-          </a:xfrm>
-          <a:prstGeom prst="rect">
-            <a:avLst/>
-          </a:prstGeom>
-          <a:solidFill>
-            <a:srgbClr val="F3F4F6"/>
-          </a:solidFill>
-          <a:ln>
-            <a:noFill/>
-          </a:ln>
-        </p:spPr>
-        <p:style>
-          <a:lnRef idx="1">
-            <a:schemeClr val="accent1"/>
-          </a:lnRef>
-          <a:fillRef idx="3">
-            <a:schemeClr val="accent1"/>
-          </a:fillRef>
-          <a:effectRef idx="2">
-            <a:schemeClr val="accent1"/>
-          </a:effectRef>
-          <a:fontRef idx="minor">
-            <a:schemeClr val="lt1"/>
-          </a:fontRef>
-        </p:style>
-        <p:txBody>
-          <a:bodyPr rtlCol="0" anchor="ctr" wrap="square" tIns="54864" bIns="54864"/>
-          <a:lstStyle/>
-          <a:p>
-            <a:pPr algn="l"/>
-            <a:r>
-              <a:rPr sz="1100" b="0">
-                <a:solidFill>
-                  <a:srgbClr val="1C3557"/>
-                </a:solidFill>
-                <a:latin typeface="Noto Sans JP"/>
-              </a:rPr>
-              <a:t>β版ローンチ実施(5/2) ／ 6月8EXPOの戦略・戦術設計</a:t>
-            </a:r>
-          </a:p>
-          <a:p>
-            <a:pPr algn="l"/>
-            <a:r>
-              <a:rPr sz="1100" b="0">
-                <a:solidFill>
-                  <a:srgbClr val="1C3557"/>
-                </a:solidFill>
-                <a:latin typeface="Noto Sans JP"/>
-              </a:rPr>
-              <a:t>（集客リクエスト配信／当日オペ／営業トークスクリプト）</a:t>
-            </a:r>
-          </a:p>
-        </p:txBody>
-      </p:sp>
-      <p:sp>
-        <p:nvSpPr>
-          <p:cNvPr id="17" name="Rectangle 16"/>
-          <p:cNvSpPr/>
-          <p:nvPr/>
-        </p:nvSpPr>
-        <p:spPr>
-          <a:xfrm>
-            <a:off x="8275320" y="3017520"/>
-            <a:ext cx="3456432" cy="777240"/>
-          </a:xfrm>
-          <a:prstGeom prst="rect">
-            <a:avLst/>
-          </a:prstGeom>
-          <a:solidFill>
-            <a:srgbClr val="F3F4F6"/>
-          </a:solidFill>
-          <a:ln>
-            <a:noFill/>
-          </a:ln>
-        </p:spPr>
-        <p:style>
-          <a:lnRef idx="1">
-            <a:schemeClr val="accent1"/>
-          </a:lnRef>
-          <a:fillRef idx="3">
-            <a:schemeClr val="accent1"/>
-          </a:fillRef>
-          <a:effectRef idx="2">
-            <a:schemeClr val="accent1"/>
-          </a:effectRef>
-          <a:fontRef idx="minor">
-            <a:schemeClr val="lt1"/>
-          </a:fontRef>
-        </p:style>
-        <p:txBody>
-          <a:bodyPr rtlCol="0" anchor="ctr" wrap="square" tIns="54864" bIns="54864"/>
-          <a:lstStyle/>
-          <a:p>
-            <a:pPr algn="l"/>
-            <a:r>
-              <a:rPr sz="1100" b="0">
-                <a:solidFill>
-                  <a:srgbClr val="1C3557"/>
-                </a:solidFill>
-                <a:latin typeface="Noto Sans JP"/>
-              </a:rPr>
-              <a:t>マーケ・営業の比重が大きい時期。AI社員を育てながら走らせる</a:t>
-            </a:r>
-          </a:p>
-        </p:txBody>
-      </p:sp>
-      <p:sp>
-        <p:nvSpPr>
-          <p:cNvPr id="18" name="Rectangle 17"/>
-          <p:cNvSpPr/>
-          <p:nvPr/>
-        </p:nvSpPr>
-        <p:spPr>
-          <a:xfrm>
-            <a:off x="457200" y="3794760"/>
-            <a:ext cx="1371600" cy="777240"/>
-          </a:xfrm>
-          <a:prstGeom prst="rect">
-            <a:avLst/>
-          </a:prstGeom>
-          <a:solidFill>
-            <a:srgbClr val="2563EB"/>
-          </a:solidFill>
-          <a:ln>
-            <a:noFill/>
-          </a:ln>
-        </p:spPr>
-        <p:style>
-          <a:lnRef idx="1">
-            <a:schemeClr val="accent1"/>
-          </a:lnRef>
-          <a:fillRef idx="3">
-            <a:schemeClr val="accent1"/>
-          </a:fillRef>
-          <a:effectRef idx="2">
-            <a:schemeClr val="accent1"/>
-          </a:effectRef>
-          <a:fontRef idx="minor">
-            <a:schemeClr val="lt1"/>
-          </a:fontRef>
-        </p:style>
-        <p:txBody>
-          <a:bodyPr rtlCol="0" anchor="ctr" wrap="square" tIns="54864" bIns="54864"/>
-          <a:lstStyle/>
-          <a:p>
-            <a:pPr algn="ctr"/>
-            <a:r>
-              <a:rPr sz="1100" b="1">
-                <a:solidFill>
-                  <a:srgbClr val="FFFFFF"/>
-                </a:solidFill>
-                <a:latin typeface="Noto Sans JP"/>
-              </a:rPr>
-              <a:t>6月末</a:t>
-            </a:r>
-          </a:p>
-          <a:p>
-            <a:pPr algn="ctr"/>
-            <a:r>
-              <a:rPr sz="1100" b="1">
-                <a:solidFill>
-                  <a:srgbClr val="FFFFFF"/>
-                </a:solidFill>
-                <a:latin typeface="Noto Sans JP"/>
-              </a:rPr>
-              <a:t>(中間)</a:t>
-            </a:r>
-          </a:p>
-        </p:txBody>
-      </p:sp>
-      <p:sp>
-        <p:nvSpPr>
-          <p:cNvPr id="19" name="Rectangle 18"/>
-          <p:cNvSpPr/>
-          <p:nvPr/>
-        </p:nvSpPr>
-        <p:spPr>
-          <a:xfrm>
-            <a:off x="1874519" y="3794760"/>
-            <a:ext cx="1280160" cy="777240"/>
-          </a:xfrm>
-          <a:prstGeom prst="rect">
-            <a:avLst/>
-          </a:prstGeom>
-          <a:solidFill>
-            <a:srgbClr val="2563EB"/>
-          </a:solidFill>
-          <a:ln>
-            <a:noFill/>
-          </a:ln>
-        </p:spPr>
-        <p:style>
-          <a:lnRef idx="1">
-            <a:schemeClr val="accent1"/>
-          </a:lnRef>
-          <a:fillRef idx="3">
-            <a:schemeClr val="accent1"/>
-          </a:fillRef>
-          <a:effectRef idx="2">
-            <a:schemeClr val="accent1"/>
-          </a:effectRef>
-          <a:fontRef idx="minor">
-            <a:schemeClr val="lt1"/>
-          </a:fontRef>
-        </p:style>
-        <p:txBody>
-          <a:bodyPr rtlCol="0" anchor="ctr" wrap="square" tIns="54864" bIns="54864"/>
-          <a:lstStyle/>
-          <a:p>
-            <a:pPr algn="ctr"/>
-            <a:r>
-              <a:rPr sz="1400" b="1">
-                <a:solidFill>
-                  <a:srgbClr val="FFFFFF"/>
-                </a:solidFill>
-                <a:latin typeface="Noto Sans JP"/>
-              </a:rPr>
-              <a:t>2人分</a:t>
-            </a:r>
-          </a:p>
-        </p:txBody>
-      </p:sp>
-      <p:sp>
-        <p:nvSpPr>
-          <p:cNvPr id="20" name="Rectangle 19"/>
-          <p:cNvSpPr/>
-          <p:nvPr/>
-        </p:nvSpPr>
-        <p:spPr>
-          <a:xfrm>
-            <a:off x="3200400" y="3794760"/>
-            <a:ext cx="5029200" cy="777240"/>
-          </a:xfrm>
-          <a:prstGeom prst="rect">
-            <a:avLst/>
-          </a:prstGeom>
-          <a:solidFill>
-            <a:srgbClr val="DBEAFE"/>
-          </a:solidFill>
-          <a:ln>
-            <a:noFill/>
-          </a:ln>
-        </p:spPr>
-        <p:style>
-          <a:lnRef idx="1">
-            <a:schemeClr val="accent1"/>
-          </a:lnRef>
-          <a:fillRef idx="3">
-            <a:schemeClr val="accent1"/>
-          </a:fillRef>
-          <a:effectRef idx="2">
-            <a:schemeClr val="accent1"/>
-          </a:effectRef>
-          <a:fontRef idx="minor">
-            <a:schemeClr val="lt1"/>
-          </a:fontRef>
-        </p:style>
-        <p:txBody>
-          <a:bodyPr rtlCol="0" anchor="ctr" wrap="square" tIns="54864" bIns="54864"/>
-          <a:lstStyle/>
-          <a:p>
-            <a:pPr algn="l"/>
-            <a:r>
-              <a:rPr sz="1100" b="0">
-                <a:solidFill>
-                  <a:srgbClr val="1C3557"/>
-                </a:solidFill>
-                <a:latin typeface="Noto Sans JP"/>
-              </a:rPr>
-              <a:t>8EXPO出展(6/3-4) ／ ローンチ後の運用フィードバック反映 ／ 5人連携テスト</a:t>
-            </a:r>
-          </a:p>
-        </p:txBody>
-      </p:sp>
-      <p:sp>
-        <p:nvSpPr>
-          <p:cNvPr id="21" name="Rectangle 20"/>
-          <p:cNvSpPr/>
-          <p:nvPr/>
-        </p:nvSpPr>
-        <p:spPr>
-          <a:xfrm>
-            <a:off x="8275320" y="3794760"/>
-            <a:ext cx="3456432" cy="777240"/>
-          </a:xfrm>
-          <a:prstGeom prst="rect">
-            <a:avLst/>
-          </a:prstGeom>
-          <a:solidFill>
-            <a:srgbClr val="DBEAFE"/>
-          </a:solidFill>
-          <a:ln>
-            <a:noFill/>
-          </a:ln>
-        </p:spPr>
-        <p:style>
-          <a:lnRef idx="1">
-            <a:schemeClr val="accent1"/>
-          </a:lnRef>
-          <a:fillRef idx="3">
-            <a:schemeClr val="accent1"/>
-          </a:fillRef>
-          <a:effectRef idx="2">
-            <a:schemeClr val="accent1"/>
-          </a:effectRef>
-          <a:fontRef idx="minor">
-            <a:schemeClr val="lt1"/>
-          </a:fontRef>
-        </p:style>
-        <p:txBody>
-          <a:bodyPr rtlCol="0" anchor="ctr" wrap="square" tIns="54864" bIns="54864"/>
-          <a:lstStyle/>
-          <a:p>
-            <a:pPr algn="l"/>
-            <a:r>
-              <a:rPr sz="1100" b="0">
-                <a:solidFill>
-                  <a:srgbClr val="1C3557"/>
-                </a:solidFill>
-                <a:latin typeface="Noto Sans JP"/>
-              </a:rPr>
-              <a:t>デリバリー内容が変化する時期。顧客の声を聞きながらブラッシュアップ</a:t>
-            </a:r>
-          </a:p>
-        </p:txBody>
-      </p:sp>
-      <p:sp>
-        <p:nvSpPr>
-          <p:cNvPr id="22" name="Rectangle 21"/>
-          <p:cNvSpPr/>
-          <p:nvPr/>
-        </p:nvSpPr>
-        <p:spPr>
-          <a:xfrm>
-            <a:off x="457200" y="4572000"/>
-            <a:ext cx="1371600" cy="777240"/>
-          </a:xfrm>
-          <a:prstGeom prst="rect">
-            <a:avLst/>
-          </a:prstGeom>
-          <a:solidFill>
-            <a:srgbClr val="F3F4F6"/>
-          </a:solidFill>
-          <a:ln>
-            <a:noFill/>
-          </a:ln>
-        </p:spPr>
-        <p:style>
-          <a:lnRef idx="1">
-            <a:schemeClr val="accent1"/>
-          </a:lnRef>
-          <a:fillRef idx="3">
-            <a:schemeClr val="accent1"/>
-          </a:fillRef>
-          <a:effectRef idx="2">
-            <a:schemeClr val="accent1"/>
-          </a:effectRef>
-          <a:fontRef idx="minor">
-            <a:schemeClr val="lt1"/>
-          </a:fontRef>
-        </p:style>
-        <p:txBody>
-          <a:bodyPr rtlCol="0" anchor="ctr" wrap="square" tIns="54864" bIns="54864"/>
-          <a:lstStyle/>
-          <a:p>
-            <a:pPr algn="ctr"/>
-            <a:r>
-              <a:rPr sz="1100" b="0">
-                <a:solidFill>
-                  <a:srgbClr val="1C3557"/>
-                </a:solidFill>
-                <a:latin typeface="Noto Sans JP"/>
-              </a:rPr>
-              <a:t>7-8月</a:t>
-            </a:r>
-          </a:p>
-        </p:txBody>
-      </p:sp>
-      <p:sp>
-        <p:nvSpPr>
-          <p:cNvPr id="23" name="Rectangle 22"/>
-          <p:cNvSpPr/>
-          <p:nvPr/>
-        </p:nvSpPr>
-        <p:spPr>
-          <a:xfrm>
-            <a:off x="1874519" y="4572000"/>
-            <a:ext cx="1280160" cy="777240"/>
-          </a:xfrm>
-          <a:prstGeom prst="rect">
-            <a:avLst/>
-          </a:prstGeom>
-          <a:solidFill>
-            <a:srgbClr val="F3F4F6"/>
-          </a:solidFill>
-          <a:ln>
-            <a:noFill/>
-          </a:ln>
-        </p:spPr>
-        <p:style>
-          <a:lnRef idx="1">
-            <a:schemeClr val="accent1"/>
-          </a:lnRef>
-          <a:fillRef idx="3">
-            <a:schemeClr val="accent1"/>
-          </a:fillRef>
-          <a:effectRef idx="2">
-            <a:schemeClr val="accent1"/>
-          </a:effectRef>
-          <a:fontRef idx="minor">
-            <a:schemeClr val="lt1"/>
-          </a:fontRef>
-        </p:style>
-        <p:txBody>
-          <a:bodyPr rtlCol="0" anchor="ctr" wrap="square" tIns="54864" bIns="54864"/>
-          <a:lstStyle/>
-          <a:p>
-            <a:pPr algn="ctr"/>
-            <a:r>
-              <a:rPr sz="1400" b="1">
-                <a:solidFill>
-                  <a:srgbClr val="1C3557"/>
-                </a:solidFill>
-                <a:latin typeface="Noto Sans JP"/>
-              </a:rPr>
-              <a:t>3〜4人分</a:t>
-            </a:r>
-          </a:p>
-        </p:txBody>
-      </p:sp>
-      <p:sp>
-        <p:nvSpPr>
-          <p:cNvPr id="24" name="Rectangle 23"/>
-          <p:cNvSpPr/>
-          <p:nvPr/>
-        </p:nvSpPr>
-        <p:spPr>
-          <a:xfrm>
-            <a:off x="3200400" y="4572000"/>
-            <a:ext cx="5029200" cy="777240"/>
-          </a:xfrm>
-          <a:prstGeom prst="rect">
-            <a:avLst/>
-          </a:prstGeom>
-          <a:solidFill>
-            <a:srgbClr val="F3F4F6"/>
-          </a:solidFill>
-          <a:ln>
-            <a:noFill/>
-          </a:ln>
-        </p:spPr>
-        <p:style>
-          <a:lnRef idx="1">
-            <a:schemeClr val="accent1"/>
-          </a:lnRef>
-          <a:fillRef idx="3">
-            <a:schemeClr val="accent1"/>
-          </a:fillRef>
-          <a:effectRef idx="2">
-            <a:schemeClr val="accent1"/>
-          </a:effectRef>
-          <a:fontRef idx="minor">
-            <a:schemeClr val="lt1"/>
-          </a:fontRef>
-        </p:style>
-        <p:txBody>
-          <a:bodyPr rtlCol="0" anchor="ctr" wrap="square" tIns="54864" bIns="54864"/>
-          <a:lstStyle/>
-          <a:p>
-            <a:pPr algn="l"/>
-            <a:r>
-              <a:rPr sz="1100" b="0">
-                <a:solidFill>
-                  <a:srgbClr val="1C3557"/>
-                </a:solidFill>
-                <a:latin typeface="Noto Sans JP"/>
-              </a:rPr>
-              <a:t>β版経由の新規案件対応 ／ プロダクト改善ループ確立 ／ 事務・法務AI追加</a:t>
-            </a:r>
-          </a:p>
-        </p:txBody>
-      </p:sp>
-      <p:sp>
-        <p:nvSpPr>
-          <p:cNvPr id="25" name="Rectangle 24"/>
-          <p:cNvSpPr/>
-          <p:nvPr/>
-        </p:nvSpPr>
-        <p:spPr>
-          <a:xfrm>
-            <a:off x="8275320" y="4572000"/>
-            <a:ext cx="3456432" cy="777240"/>
-          </a:xfrm>
-          <a:prstGeom prst="rect">
-            <a:avLst/>
-          </a:prstGeom>
-          <a:solidFill>
-            <a:srgbClr val="F3F4F6"/>
-          </a:solidFill>
-          <a:ln>
-            <a:noFill/>
-          </a:ln>
-        </p:spPr>
-        <p:style>
-          <a:lnRef idx="1">
-            <a:schemeClr val="accent1"/>
-          </a:lnRef>
-          <a:fillRef idx="3">
-            <a:schemeClr val="accent1"/>
-          </a:fillRef>
-          <a:effectRef idx="2">
-            <a:schemeClr val="accent1"/>
-          </a:effectRef>
-          <a:fontRef idx="minor">
-            <a:schemeClr val="lt1"/>
-          </a:fontRef>
-        </p:style>
-        <p:txBody>
-          <a:bodyPr rtlCol="0" anchor="ctr" wrap="square" tIns="54864" bIns="54864"/>
-          <a:lstStyle/>
-          <a:p>
-            <a:pPr algn="l"/>
-            <a:r>
-              <a:rPr sz="1100" b="0">
-                <a:solidFill>
-                  <a:srgbClr val="1C3557"/>
-                </a:solidFill>
-                <a:latin typeface="Noto Sans JP"/>
-              </a:rPr>
-              <a:t>顧客が増えて事務処理が増える時期。事務AIを稼働させて対応</a:t>
-            </a:r>
-          </a:p>
-        </p:txBody>
-      </p:sp>
-      <p:sp>
-        <p:nvSpPr>
-          <p:cNvPr id="26" name="Rectangle 25"/>
-          <p:cNvSpPr/>
-          <p:nvPr/>
-        </p:nvSpPr>
-        <p:spPr>
-          <a:xfrm>
-            <a:off x="457200" y="5349240"/>
-            <a:ext cx="1371600" cy="777240"/>
-          </a:xfrm>
-          <a:prstGeom prst="rect">
-            <a:avLst/>
-          </a:prstGeom>
-          <a:solidFill>
-            <a:srgbClr val="2563EB"/>
-          </a:solidFill>
-          <a:ln>
-            <a:noFill/>
-          </a:ln>
-        </p:spPr>
-        <p:style>
-          <a:lnRef idx="1">
-            <a:schemeClr val="accent1"/>
-          </a:lnRef>
-          <a:fillRef idx="3">
-            <a:schemeClr val="accent1"/>
-          </a:fillRef>
-          <a:effectRef idx="2">
-            <a:schemeClr val="accent1"/>
-          </a:effectRef>
-          <a:fontRef idx="minor">
-            <a:schemeClr val="lt1"/>
-          </a:fontRef>
-        </p:style>
-        <p:txBody>
-          <a:bodyPr rtlCol="0" anchor="ctr" wrap="square" tIns="54864" bIns="54864"/>
-          <a:lstStyle/>
-          <a:p>
-            <a:pPr algn="ctr"/>
-            <a:r>
-              <a:rPr sz="1100" b="1">
-                <a:solidFill>
-                  <a:srgbClr val="FFFFFF"/>
-                </a:solidFill>
-                <a:latin typeface="Noto Sans JP"/>
-              </a:rPr>
-              <a:t>9月末</a:t>
-            </a:r>
-          </a:p>
-          <a:p>
-            <a:pPr algn="ctr"/>
-            <a:r>
-              <a:rPr sz="1100" b="1">
-                <a:solidFill>
-                  <a:srgbClr val="FFFFFF"/>
-                </a:solidFill>
-                <a:latin typeface="Noto Sans JP"/>
-              </a:rPr>
-              <a:t>(最終)</a:t>
-            </a:r>
-          </a:p>
-        </p:txBody>
-      </p:sp>
-      <p:sp>
-        <p:nvSpPr>
-          <p:cNvPr id="27" name="Rectangle 26"/>
-          <p:cNvSpPr/>
-          <p:nvPr/>
-        </p:nvSpPr>
-        <p:spPr>
-          <a:xfrm>
-            <a:off x="1874519" y="5349240"/>
-            <a:ext cx="1280160" cy="777240"/>
-          </a:xfrm>
-          <a:prstGeom prst="rect">
-            <a:avLst/>
-          </a:prstGeom>
-          <a:solidFill>
-            <a:srgbClr val="2563EB"/>
-          </a:solidFill>
-          <a:ln>
-            <a:noFill/>
-          </a:ln>
-        </p:spPr>
-        <p:style>
-          <a:lnRef idx="1">
-            <a:schemeClr val="accent1"/>
-          </a:lnRef>
-          <a:fillRef idx="3">
-            <a:schemeClr val="accent1"/>
-          </a:fillRef>
-          <a:effectRef idx="2">
-            <a:schemeClr val="accent1"/>
-          </a:effectRef>
-          <a:fontRef idx="minor">
-            <a:schemeClr val="lt1"/>
-          </a:fontRef>
-        </p:style>
-        <p:txBody>
-          <a:bodyPr rtlCol="0" anchor="ctr" wrap="square" tIns="54864" bIns="54864"/>
-          <a:lstStyle/>
-          <a:p>
-            <a:pPr algn="ctr"/>
-            <a:r>
-              <a:rPr sz="1400" b="1">
-                <a:solidFill>
-                  <a:srgbClr val="FFFFFF"/>
-                </a:solidFill>
-                <a:latin typeface="Noto Sans JP"/>
-              </a:rPr>
-              <a:t>5人分</a:t>
-            </a:r>
-          </a:p>
-        </p:txBody>
-      </p:sp>
-      <p:sp>
-        <p:nvSpPr>
-          <p:cNvPr id="28" name="Rectangle 27"/>
-          <p:cNvSpPr/>
-          <p:nvPr/>
-        </p:nvSpPr>
-        <p:spPr>
-          <a:xfrm>
-            <a:off x="3200400" y="5349240"/>
-            <a:ext cx="5029200" cy="777240"/>
-          </a:xfrm>
-          <a:prstGeom prst="rect">
-            <a:avLst/>
-          </a:prstGeom>
-          <a:solidFill>
-            <a:srgbClr val="DBEAFE"/>
-          </a:solidFill>
-          <a:ln>
-            <a:noFill/>
-          </a:ln>
-        </p:spPr>
-        <p:style>
-          <a:lnRef idx="1">
-            <a:schemeClr val="accent1"/>
-          </a:lnRef>
-          <a:fillRef idx="3">
-            <a:schemeClr val="accent1"/>
-          </a:fillRef>
-          <a:effectRef idx="2">
-            <a:schemeClr val="accent1"/>
-          </a:effectRef>
-          <a:fontRef idx="minor">
-            <a:schemeClr val="lt1"/>
-          </a:fontRef>
-        </p:style>
-        <p:txBody>
-          <a:bodyPr rtlCol="0" anchor="ctr" wrap="square" tIns="54864" bIns="54864"/>
-          <a:lstStyle/>
-          <a:p>
-            <a:pPr algn="l"/>
-            <a:r>
-              <a:rPr sz="1100" b="0">
-                <a:solidFill>
-                  <a:srgbClr val="1C3557"/>
-                </a:solidFill>
-                <a:latin typeface="Noto Sans JP"/>
-              </a:rPr>
-              <a:t>5人フル稼働 ／ プロダクト × デリバリー両輪完成</a:t>
-            </a:r>
-          </a:p>
-        </p:txBody>
-      </p:sp>
-      <p:sp>
-        <p:nvSpPr>
-          <p:cNvPr id="29" name="Rectangle 28"/>
-          <p:cNvSpPr/>
-          <p:nvPr/>
-        </p:nvSpPr>
-        <p:spPr>
-          <a:xfrm>
-            <a:off x="8275320" y="5349240"/>
-            <a:ext cx="3456432" cy="777240"/>
-          </a:xfrm>
-          <a:prstGeom prst="rect">
-            <a:avLst/>
-          </a:prstGeom>
-          <a:solidFill>
-            <a:srgbClr val="DBEAFE"/>
-          </a:solidFill>
-          <a:ln>
-            <a:noFill/>
-          </a:ln>
-        </p:spPr>
-        <p:style>
-          <a:lnRef idx="1">
-            <a:schemeClr val="accent1"/>
-          </a:lnRef>
-          <a:fillRef idx="3">
-            <a:schemeClr val="accent1"/>
-          </a:fillRef>
-          <a:effectRef idx="2">
-            <a:schemeClr val="accent1"/>
-          </a:effectRef>
-          <a:fontRef idx="minor">
-            <a:schemeClr val="lt1"/>
-          </a:fontRef>
-        </p:style>
-        <p:txBody>
-          <a:bodyPr rtlCol="0" anchor="ctr" wrap="square" tIns="54864" bIns="54864"/>
-          <a:lstStyle/>
-          <a:p>
-            <a:pPr algn="l"/>
-            <a:r>
-              <a:rPr sz="1100" b="0">
-                <a:solidFill>
-                  <a:srgbClr val="1C3557"/>
-                </a:solidFill>
-                <a:latin typeface="Noto Sans JP"/>
-              </a:rPr>
-              <a:t>Agent Teamsで5人協働を実装し、事業を動かす完成形へ</a:t>
-            </a:r>
-          </a:p>
-        </p:txBody>
-      </p:sp>
-      <p:sp>
-        <p:nvSpPr>
-          <p:cNvPr id="30" name="Rectangle 29"/>
-          <p:cNvSpPr/>
-          <p:nvPr/>
-        </p:nvSpPr>
-        <p:spPr>
-          <a:xfrm>
-            <a:off x="457200" y="6263640"/>
-            <a:ext cx="11274552" cy="411480"/>
-          </a:xfrm>
-          <a:prstGeom prst="rect">
-            <a:avLst/>
-          </a:prstGeom>
-          <a:noFill/>
-          <a:ln>
-            <a:noFill/>
-          </a:ln>
-        </p:spPr>
-        <p:style>
-          <a:lnRef idx="1">
-            <a:schemeClr val="accent1"/>
-          </a:lnRef>
-          <a:fillRef idx="3">
-            <a:schemeClr val="accent1"/>
-          </a:fillRef>
-          <a:effectRef idx="2">
-            <a:schemeClr val="accent1"/>
-          </a:effectRef>
-          <a:fontRef idx="minor">
-            <a:schemeClr val="lt1"/>
-          </a:fontRef>
-        </p:style>
-        <p:txBody>
-          <a:bodyPr rtlCol="0" anchor="ctr" wrap="square" tIns="54864" bIns="54864"/>
-          <a:lstStyle/>
-          <a:p>
-            <a:pPr algn="ctr"/>
-            <a:r>
-              <a:rPr sz="1300" b="1">
-                <a:solidFill>
-                  <a:srgbClr val="2563EB"/>
-                </a:solidFill>
-                <a:latin typeface="Noto Sans JP"/>
-              </a:rPr>
-              <a:t>新規事業なので進行で変わることも多いが、5人完成は確実に進める</a:t>
-            </a:r>
-          </a:p>
-        </p:txBody>
-      </p:sp>
-    </p:spTree>
-  </p:cSld>
-  <p:clrMapOvr>
-    <a:masterClrMapping/>
-  </p:clrMapOvr>
-</p:sld>
-</file>
-
-<file path=ppt/slides/slide14.xml><?xml version="1.0" encoding="utf-8"?>
-<p:sld xmlns:a="http://schemas.openxmlformats.org/drawingml/2006/main" xmlns:p="http://schemas.openxmlformats.org/presentationml/2006/main" xmlns:r="http://schemas.openxmlformats.org/officeDocument/2006/relationships">
-  <p:cSld>
-    <p:spTree>
-      <p:nvGrpSpPr>
-        <p:cNvPr id="1" name=""/>
-        <p:cNvGrpSpPr/>
-        <p:nvPr/>
-      </p:nvGrpSpPr>
-      <p:grpSpPr/>
-      <p:sp>
-        <p:nvSpPr>
-          <p:cNvPr id="2" name="Rectangle 1"/>
-          <p:cNvSpPr/>
-          <p:nvPr/>
-        </p:nvSpPr>
-        <p:spPr>
-          <a:xfrm>
-            <a:off x="0" y="0"/>
-            <a:ext cx="12188952" cy="6858000"/>
-          </a:xfrm>
-          <a:prstGeom prst="rect">
-            <a:avLst/>
-          </a:prstGeom>
-          <a:solidFill>
-            <a:srgbClr val="FFFFFF"/>
-          </a:solidFill>
-          <a:ln>
-            <a:noFill/>
-          </a:ln>
-        </p:spPr>
-        <p:style>
-          <a:lnRef idx="1">
-            <a:schemeClr val="accent1"/>
-          </a:lnRef>
-          <a:fillRef idx="3">
-            <a:schemeClr val="accent1"/>
-          </a:fillRef>
-          <a:effectRef idx="2">
-            <a:schemeClr val="accent1"/>
-          </a:effectRef>
-          <a:fontRef idx="minor">
-            <a:schemeClr val="lt1"/>
-          </a:fontRef>
-        </p:style>
-        <p:txBody>
-          <a:bodyPr rtlCol="0" anchor="ctr"/>
-          <a:lstStyle/>
-          <a:p>
-            <a:pPr algn="ctr"/>
-          </a:p>
-        </p:txBody>
-      </p:sp>
-      <p:sp>
-        <p:nvSpPr>
-          <p:cNvPr id="3" name="Rectangle 2"/>
-          <p:cNvSpPr/>
-          <p:nvPr/>
-        </p:nvSpPr>
-        <p:spPr>
-          <a:xfrm>
             <a:off x="0" y="0"/>
             <a:ext cx="12188952" cy="137160"/>
           </a:xfrm>
@@ -9041,7 +7517,7 @@
                 </a:solidFill>
                 <a:latin typeface="Noto Sans JP"/>
               </a:rPr>
-              <a:t>14 / 14</a:t>
+              <a:t>12 / 12</a:t>
             </a:r>
           </a:p>
         </p:txBody>
@@ -9620,7 +8096,7 @@
                 </a:solidFill>
                 <a:latin typeface="Noto Sans JP"/>
               </a:rPr>
-              <a:t>2 / 14</a:t>
+              <a:t>2 / 12</a:t>
             </a:r>
           </a:p>
         </p:txBody>
@@ -9731,7 +8207,7 @@
                 </a:solidFill>
                 <a:latin typeface="Noto Sans JP"/>
               </a:rPr>
-              <a:t>3 / 14</a:t>
+              <a:t>3 / 12</a:t>
             </a:r>
           </a:p>
         </p:txBody>
@@ -10406,7 +8882,7 @@
                 </a:solidFill>
                 <a:latin typeface="Noto Sans JP"/>
               </a:rPr>
-              <a:t>4 / 14</a:t>
+              <a:t>4 / 12</a:t>
             </a:r>
           </a:p>
         </p:txBody>
@@ -10853,7 +9329,7 @@
                 </a:solidFill>
                 <a:latin typeface="Noto Sans JP"/>
               </a:rPr>
-              <a:t>5 / 14</a:t>
+              <a:t>5 / 12</a:t>
             </a:r>
           </a:p>
         </p:txBody>
@@ -11009,8 +9485,8 @@
         </p:nvSpPr>
         <p:spPr>
           <a:xfrm>
-            <a:off x="457200" y="2468880"/>
-            <a:ext cx="2194560" cy="2286000"/>
+            <a:off x="457200" y="2377440"/>
+            <a:ext cx="2194560" cy="1371600"/>
           </a:xfrm>
           <a:prstGeom prst="roundRect">
             <a:avLst>
@@ -11044,7 +9520,7 @@
           <a:p>
             <a:pPr algn="ctr"/>
             <a:r>
-              <a:rPr sz="3200" b="1">
+              <a:rPr sz="2400" b="1">
                 <a:solidFill>
                   <a:srgbClr val="FFFFFF"/>
                 </a:solidFill>
@@ -11063,8 +9539,8 @@
         </p:nvSpPr>
         <p:spPr>
           <a:xfrm>
-            <a:off x="2715768" y="2468880"/>
-            <a:ext cx="2194560" cy="2286000"/>
+            <a:off x="457200" y="3794760"/>
+            <a:ext cx="2194560" cy="731520"/>
           </a:xfrm>
           <a:prstGeom prst="roundRect">
             <a:avLst>
@@ -11072,7 +9548,7 @@
             </a:avLst>
           </a:prstGeom>
           <a:solidFill>
-            <a:srgbClr val="2563EB"/>
+            <a:srgbClr val="F3F4F6"/>
           </a:solidFill>
           <a:ln>
             <a:noFill/>
@@ -11098,13 +9574,13 @@
           <a:p>
             <a:pPr algn="ctr"/>
             <a:r>
-              <a:rPr sz="3200" b="1">
-                <a:solidFill>
-                  <a:srgbClr val="FFFFFF"/>
-                </a:solidFill>
-                <a:latin typeface="Noto Sans JP"/>
-              </a:rPr>
-              <a:t>営業</a:t>
+              <a:rPr sz="1400" b="0">
+                <a:solidFill>
+                  <a:srgbClr val="1C3557"/>
+                </a:solidFill>
+                <a:latin typeface="Noto Sans JP"/>
+              </a:rPr>
+              <a:t>認知獲得</a:t>
             </a:r>
           </a:p>
         </p:txBody>
@@ -11117,8 +9593,8 @@
         </p:nvSpPr>
         <p:spPr>
           <a:xfrm>
-            <a:off x="4974336" y="2468880"/>
-            <a:ext cx="2194560" cy="2286000"/>
+            <a:off x="2715768" y="2377440"/>
+            <a:ext cx="2194560" cy="1371600"/>
           </a:xfrm>
           <a:prstGeom prst="roundRect">
             <a:avLst>
@@ -11152,13 +9628,13 @@
           <a:p>
             <a:pPr algn="ctr"/>
             <a:r>
-              <a:rPr sz="3200" b="1">
+              <a:rPr sz="2400" b="1">
                 <a:solidFill>
                   <a:srgbClr val="FFFFFF"/>
                 </a:solidFill>
                 <a:latin typeface="Noto Sans JP"/>
               </a:rPr>
-              <a:t>デリバリー</a:t>
+              <a:t>営業</a:t>
             </a:r>
           </a:p>
         </p:txBody>
@@ -11171,8 +9647,8 @@
         </p:nvSpPr>
         <p:spPr>
           <a:xfrm>
-            <a:off x="7232903" y="2468880"/>
-            <a:ext cx="2194560" cy="2286000"/>
+            <a:off x="2715768" y="3794760"/>
+            <a:ext cx="2194560" cy="731520"/>
           </a:xfrm>
           <a:prstGeom prst="roundRect">
             <a:avLst>
@@ -11180,7 +9656,7 @@
             </a:avLst>
           </a:prstGeom>
           <a:solidFill>
-            <a:srgbClr val="2563EB"/>
+            <a:srgbClr val="F3F4F6"/>
           </a:solidFill>
           <a:ln>
             <a:noFill/>
@@ -11206,13 +9682,13 @@
           <a:p>
             <a:pPr algn="ctr"/>
             <a:r>
-              <a:rPr sz="3200" b="1">
-                <a:solidFill>
-                  <a:srgbClr val="FFFFFF"/>
-                </a:solidFill>
-                <a:latin typeface="Noto Sans JP"/>
-              </a:rPr>
-              <a:t>事務・法務</a:t>
+              <a:rPr sz="1400" b="0">
+                <a:solidFill>
+                  <a:srgbClr val="1C3557"/>
+                </a:solidFill>
+                <a:latin typeface="Noto Sans JP"/>
+              </a:rPr>
+              <a:t>商談・受注</a:t>
             </a:r>
           </a:p>
         </p:txBody>
@@ -11225,8 +9701,8 @@
         </p:nvSpPr>
         <p:spPr>
           <a:xfrm>
-            <a:off x="9491472" y="2468880"/>
-            <a:ext cx="2194560" cy="2286000"/>
+            <a:off x="4974336" y="2377440"/>
+            <a:ext cx="2194560" cy="1371600"/>
           </a:xfrm>
           <a:prstGeom prst="roundRect">
             <a:avLst>
@@ -11260,13 +9736,13 @@
           <a:p>
             <a:pPr algn="ctr"/>
             <a:r>
-              <a:rPr sz="3200" b="1">
+              <a:rPr sz="2400" b="1">
                 <a:solidFill>
                   <a:srgbClr val="FFFFFF"/>
                 </a:solidFill>
                 <a:latin typeface="Noto Sans JP"/>
               </a:rPr>
-              <a:t>戦略</a:t>
+              <a:t>デリバリー</a:t>
             </a:r>
           </a:p>
         </p:txBody>
@@ -11279,8 +9755,8 @@
         </p:nvSpPr>
         <p:spPr>
           <a:xfrm>
-            <a:off x="457200" y="5212080"/>
-            <a:ext cx="11274552" cy="1005840"/>
+            <a:off x="4974336" y="3794760"/>
+            <a:ext cx="2194560" cy="731520"/>
           </a:xfrm>
           <a:prstGeom prst="roundRect">
             <a:avLst>
@@ -11288,6 +9764,276 @@
             </a:avLst>
           </a:prstGeom>
           <a:solidFill>
+            <a:srgbClr val="F3F4F6"/>
+          </a:solidFill>
+          <a:ln>
+            <a:noFill/>
+          </a:ln>
+        </p:spPr>
+        <p:style>
+          <a:lnRef idx="1">
+            <a:schemeClr val="accent1"/>
+          </a:lnRef>
+          <a:fillRef idx="3">
+            <a:schemeClr val="accent1"/>
+          </a:fillRef>
+          <a:effectRef idx="2">
+            <a:schemeClr val="accent1"/>
+          </a:effectRef>
+          <a:fontRef idx="minor">
+            <a:schemeClr val="lt1"/>
+          </a:fontRef>
+        </p:style>
+        <p:txBody>
+          <a:bodyPr rtlCol="0" anchor="ctr" wrap="square" tIns="54864" bIns="54864"/>
+          <a:lstStyle/>
+          <a:p>
+            <a:pPr algn="ctr"/>
+            <a:r>
+              <a:rPr sz="1400" b="0">
+                <a:solidFill>
+                  <a:srgbClr val="1C3557"/>
+                </a:solidFill>
+                <a:latin typeface="Noto Sans JP"/>
+              </a:rPr>
+              <a:t>納品</a:t>
+            </a:r>
+          </a:p>
+        </p:txBody>
+      </p:sp>
+      <p:sp>
+        <p:nvSpPr>
+          <p:cNvPr id="13" name="Rounded Rectangle 12"/>
+          <p:cNvSpPr/>
+          <p:nvPr/>
+        </p:nvSpPr>
+        <p:spPr>
+          <a:xfrm>
+            <a:off x="7232903" y="2377440"/>
+            <a:ext cx="2194560" cy="1371600"/>
+          </a:xfrm>
+          <a:prstGeom prst="roundRect">
+            <a:avLst>
+              <a:gd name="adj" fmla="val 5000"/>
+            </a:avLst>
+          </a:prstGeom>
+          <a:solidFill>
+            <a:srgbClr val="2563EB"/>
+          </a:solidFill>
+          <a:ln>
+            <a:noFill/>
+          </a:ln>
+        </p:spPr>
+        <p:style>
+          <a:lnRef idx="1">
+            <a:schemeClr val="accent1"/>
+          </a:lnRef>
+          <a:fillRef idx="3">
+            <a:schemeClr val="accent1"/>
+          </a:fillRef>
+          <a:effectRef idx="2">
+            <a:schemeClr val="accent1"/>
+          </a:effectRef>
+          <a:fontRef idx="minor">
+            <a:schemeClr val="lt1"/>
+          </a:fontRef>
+        </p:style>
+        <p:txBody>
+          <a:bodyPr rtlCol="0" anchor="ctr" wrap="square" tIns="54864" bIns="54864"/>
+          <a:lstStyle/>
+          <a:p>
+            <a:pPr algn="ctr"/>
+            <a:r>
+              <a:rPr sz="2400" b="1">
+                <a:solidFill>
+                  <a:srgbClr val="FFFFFF"/>
+                </a:solidFill>
+                <a:latin typeface="Noto Sans JP"/>
+              </a:rPr>
+              <a:t>事務・法務</a:t>
+            </a:r>
+          </a:p>
+        </p:txBody>
+      </p:sp>
+      <p:sp>
+        <p:nvSpPr>
+          <p:cNvPr id="14" name="Rounded Rectangle 13"/>
+          <p:cNvSpPr/>
+          <p:nvPr/>
+        </p:nvSpPr>
+        <p:spPr>
+          <a:xfrm>
+            <a:off x="7232903" y="3794760"/>
+            <a:ext cx="2194560" cy="731520"/>
+          </a:xfrm>
+          <a:prstGeom prst="roundRect">
+            <a:avLst>
+              <a:gd name="adj" fmla="val 5000"/>
+            </a:avLst>
+          </a:prstGeom>
+          <a:solidFill>
+            <a:srgbClr val="F3F4F6"/>
+          </a:solidFill>
+          <a:ln>
+            <a:noFill/>
+          </a:ln>
+        </p:spPr>
+        <p:style>
+          <a:lnRef idx="1">
+            <a:schemeClr val="accent1"/>
+          </a:lnRef>
+          <a:fillRef idx="3">
+            <a:schemeClr val="accent1"/>
+          </a:fillRef>
+          <a:effectRef idx="2">
+            <a:schemeClr val="accent1"/>
+          </a:effectRef>
+          <a:fontRef idx="minor">
+            <a:schemeClr val="lt1"/>
+          </a:fontRef>
+        </p:style>
+        <p:txBody>
+          <a:bodyPr rtlCol="0" anchor="ctr" wrap="square" tIns="54864" bIns="54864"/>
+          <a:lstStyle/>
+          <a:p>
+            <a:pPr algn="ctr"/>
+            <a:r>
+              <a:rPr sz="1400" b="0">
+                <a:solidFill>
+                  <a:srgbClr val="1C3557"/>
+                </a:solidFill>
+                <a:latin typeface="Noto Sans JP"/>
+              </a:rPr>
+              <a:t>管理・記録</a:t>
+            </a:r>
+          </a:p>
+        </p:txBody>
+      </p:sp>
+      <p:sp>
+        <p:nvSpPr>
+          <p:cNvPr id="15" name="Rounded Rectangle 14"/>
+          <p:cNvSpPr/>
+          <p:nvPr/>
+        </p:nvSpPr>
+        <p:spPr>
+          <a:xfrm>
+            <a:off x="9491472" y="2377440"/>
+            <a:ext cx="2194560" cy="1371600"/>
+          </a:xfrm>
+          <a:prstGeom prst="roundRect">
+            <a:avLst>
+              <a:gd name="adj" fmla="val 5000"/>
+            </a:avLst>
+          </a:prstGeom>
+          <a:solidFill>
+            <a:srgbClr val="2563EB"/>
+          </a:solidFill>
+          <a:ln>
+            <a:noFill/>
+          </a:ln>
+        </p:spPr>
+        <p:style>
+          <a:lnRef idx="1">
+            <a:schemeClr val="accent1"/>
+          </a:lnRef>
+          <a:fillRef idx="3">
+            <a:schemeClr val="accent1"/>
+          </a:fillRef>
+          <a:effectRef idx="2">
+            <a:schemeClr val="accent1"/>
+          </a:effectRef>
+          <a:fontRef idx="minor">
+            <a:schemeClr val="lt1"/>
+          </a:fontRef>
+        </p:style>
+        <p:txBody>
+          <a:bodyPr rtlCol="0" anchor="ctr" wrap="square" tIns="54864" bIns="54864"/>
+          <a:lstStyle/>
+          <a:p>
+            <a:pPr algn="ctr"/>
+            <a:r>
+              <a:rPr sz="2400" b="1">
+                <a:solidFill>
+                  <a:srgbClr val="FFFFFF"/>
+                </a:solidFill>
+                <a:latin typeface="Noto Sans JP"/>
+              </a:rPr>
+              <a:t>戦略</a:t>
+            </a:r>
+          </a:p>
+        </p:txBody>
+      </p:sp>
+      <p:sp>
+        <p:nvSpPr>
+          <p:cNvPr id="16" name="Rounded Rectangle 15"/>
+          <p:cNvSpPr/>
+          <p:nvPr/>
+        </p:nvSpPr>
+        <p:spPr>
+          <a:xfrm>
+            <a:off x="9491472" y="3794760"/>
+            <a:ext cx="2194560" cy="731520"/>
+          </a:xfrm>
+          <a:prstGeom prst="roundRect">
+            <a:avLst>
+              <a:gd name="adj" fmla="val 5000"/>
+            </a:avLst>
+          </a:prstGeom>
+          <a:solidFill>
+            <a:srgbClr val="F3F4F6"/>
+          </a:solidFill>
+          <a:ln>
+            <a:noFill/>
+          </a:ln>
+        </p:spPr>
+        <p:style>
+          <a:lnRef idx="1">
+            <a:schemeClr val="accent1"/>
+          </a:lnRef>
+          <a:fillRef idx="3">
+            <a:schemeClr val="accent1"/>
+          </a:fillRef>
+          <a:effectRef idx="2">
+            <a:schemeClr val="accent1"/>
+          </a:effectRef>
+          <a:fontRef idx="minor">
+            <a:schemeClr val="lt1"/>
+          </a:fontRef>
+        </p:style>
+        <p:txBody>
+          <a:bodyPr rtlCol="0" anchor="ctr" wrap="square" tIns="54864" bIns="54864"/>
+          <a:lstStyle/>
+          <a:p>
+            <a:pPr algn="ctr"/>
+            <a:r>
+              <a:rPr sz="1400" b="0">
+                <a:solidFill>
+                  <a:srgbClr val="1C3557"/>
+                </a:solidFill>
+                <a:latin typeface="Noto Sans JP"/>
+              </a:rPr>
+              <a:t>リサーチ・分析</a:t>
+            </a:r>
+          </a:p>
+        </p:txBody>
+      </p:sp>
+      <p:sp>
+        <p:nvSpPr>
+          <p:cNvPr id="17" name="Rounded Rectangle 16"/>
+          <p:cNvSpPr/>
+          <p:nvPr/>
+        </p:nvSpPr>
+        <p:spPr>
+          <a:xfrm>
+            <a:off x="457200" y="4937760"/>
+            <a:ext cx="11274552" cy="1371600"/>
+          </a:xfrm>
+          <a:prstGeom prst="roundRect">
+            <a:avLst>
+              <a:gd name="adj" fmla="val 5000"/>
+            </a:avLst>
+          </a:prstGeom>
+          <a:solidFill>
             <a:srgbClr val="DBEAFE"/>
           </a:solidFill>
           <a:ln>
@@ -11314,13 +10060,13 @@
           <a:p>
             <a:pPr algn="ctr"/>
             <a:r>
-              <a:rPr sz="2800" b="1">
+              <a:rPr sz="2600" b="1">
                 <a:solidFill>
                   <a:srgbClr val="2563EB"/>
                 </a:solidFill>
                 <a:latin typeface="Noto Sans JP"/>
               </a:rPr>
-              <a:t>この 5人 を作って、Kawaru事業部を動かす</a:t>
+              <a:t>事業の全部の仕事を 5人で網羅している</a:t>
             </a:r>
           </a:p>
         </p:txBody>
@@ -11431,7 +10177,7 @@
                 </a:solidFill>
                 <a:latin typeface="Noto Sans JP"/>
               </a:rPr>
-              <a:t>6 / 14</a:t>
+              <a:t>6 / 12</a:t>
             </a:r>
           </a:p>
         </p:txBody>
@@ -12273,7 +11019,7 @@
                 </a:solidFill>
                 <a:latin typeface="Noto Sans JP"/>
               </a:rPr>
-              <a:t>7 / 14</a:t>
+              <a:t>7 / 12</a:t>
             </a:r>
           </a:p>
         </p:txBody>
@@ -12323,7 +11069,7 @@
                 </a:solidFill>
                 <a:latin typeface="Noto Sans JP"/>
               </a:rPr>
-              <a:t>AI社員5人の構成</a:t>
+              <a:t>今こう使ってます</a:t>
             </a:r>
           </a:p>
         </p:txBody>
@@ -12380,7 +11126,7 @@
         <p:spPr>
           <a:xfrm>
             <a:off x="457200" y="1371600"/>
-            <a:ext cx="3200400" cy="868680"/>
+            <a:ext cx="2194560" cy="4297680"/>
           </a:xfrm>
           <a:prstGeom prst="roundRect">
             <a:avLst>
@@ -12388,7 +11134,7 @@
             </a:avLst>
           </a:prstGeom>
           <a:solidFill>
-            <a:srgbClr val="2563EB"/>
+            <a:srgbClr val="F3F4F6"/>
           </a:solidFill>
           <a:ln>
             <a:noFill/>
@@ -12409,18 +11155,18 @@
           </a:fontRef>
         </p:style>
         <p:txBody>
-          <a:bodyPr rtlCol="0" anchor="ctr" wrap="square" tIns="54864" bIns="54864"/>
-          <a:lstStyle/>
-          <a:p>
-            <a:pPr algn="ctr"/>
-            <a:r>
-              <a:rPr sz="1800" b="1">
-                <a:solidFill>
-                  <a:srgbClr val="FFFFFF"/>
-                </a:solidFill>
-                <a:latin typeface="Noto Sans JP"/>
-              </a:rPr>
-              <a:t>マーケAI</a:t>
+          <a:bodyPr rtlCol="0" anchor="t" wrap="square" tIns="54864" bIns="54864"/>
+          <a:lstStyle/>
+          <a:p>
+            <a:pPr algn="l"/>
+            <a:r>
+              <a:rPr sz="1100" b="0">
+                <a:solidFill>
+                  <a:srgbClr val="1C3557"/>
+                </a:solidFill>
+                <a:latin typeface="Noto Sans JP"/>
+              </a:rPr>
+              <a:t/>
             </a:r>
           </a:p>
         </p:txBody>
@@ -12433,8 +11179,8 @@
         </p:nvSpPr>
         <p:spPr>
           <a:xfrm>
-            <a:off x="3749039" y="1371600"/>
-            <a:ext cx="7955279" cy="868680"/>
+            <a:off x="548640" y="1463040"/>
+            <a:ext cx="2011679" cy="640080"/>
           </a:xfrm>
           <a:prstGeom prst="roundRect">
             <a:avLst>
@@ -12442,7 +11188,7 @@
             </a:avLst>
           </a:prstGeom>
           <a:solidFill>
-            <a:srgbClr val="F3F4F6"/>
+            <a:srgbClr val="2563EB"/>
           </a:solidFill>
           <a:ln>
             <a:noFill/>
@@ -12466,29 +11212,127 @@
           <a:bodyPr rtlCol="0" anchor="ctr" wrap="square" tIns="54864" bIns="54864"/>
           <a:lstStyle/>
           <a:p>
+            <a:pPr algn="ctr"/>
+            <a:r>
+              <a:rPr sz="1400" b="1">
+                <a:solidFill>
+                  <a:srgbClr val="FFFFFF"/>
+                </a:solidFill>
+                <a:latin typeface="Noto Sans JP"/>
+              </a:rPr>
+              <a:t>マーケAI</a:t>
+            </a:r>
+          </a:p>
+        </p:txBody>
+      </p:sp>
+      <p:sp>
+        <p:nvSpPr>
+          <p:cNvPr id="8" name="Rectangle 7"/>
+          <p:cNvSpPr/>
+          <p:nvPr/>
+        </p:nvSpPr>
+        <p:spPr>
+          <a:xfrm>
+            <a:off x="594360" y="2240280"/>
+            <a:ext cx="1920240" cy="3337560"/>
+          </a:xfrm>
+          <a:prstGeom prst="rect">
+            <a:avLst/>
+          </a:prstGeom>
+          <a:noFill/>
+          <a:ln>
+            <a:noFill/>
+          </a:ln>
+        </p:spPr>
+        <p:style>
+          <a:lnRef idx="1">
+            <a:schemeClr val="accent1"/>
+          </a:lnRef>
+          <a:fillRef idx="3">
+            <a:schemeClr val="accent1"/>
+          </a:fillRef>
+          <a:effectRef idx="2">
+            <a:schemeClr val="accent1"/>
+          </a:effectRef>
+          <a:fontRef idx="minor">
+            <a:schemeClr val="lt1"/>
+          </a:fontRef>
+        </p:style>
+        <p:txBody>
+          <a:bodyPr rtlCol="0" anchor="t" wrap="square" tIns="54864" bIns="54864"/>
+          <a:lstStyle/>
+          <a:p>
             <a:pPr algn="l"/>
             <a:r>
-              <a:rPr sz="1400" b="0">
+              <a:rPr sz="1100" b="0">
                 <a:solidFill>
                   <a:srgbClr val="1C3557"/>
                 </a:solidFill>
                 <a:latin typeface="Noto Sans JP"/>
               </a:rPr>
-              <a:t>LP / SNS / 展示会 / LINE配信 / 事例記事</a:t>
-            </a:r>
-          </a:p>
-        </p:txBody>
-      </p:sp>
-      <p:sp>
-        <p:nvSpPr>
-          <p:cNvPr id="8" name="Rounded Rectangle 7"/>
-          <p:cNvSpPr/>
-          <p:nvPr/>
-        </p:nvSpPr>
-        <p:spPr>
-          <a:xfrm>
-            <a:off x="457200" y="2331720"/>
-            <a:ext cx="3200400" cy="868680"/>
+              <a:t>✓ 展示会クリエイティブ</a:t>
+            </a:r>
+          </a:p>
+          <a:p>
+            <a:pPr algn="l"/>
+            <a:r>
+              <a:rPr sz="1100" b="0">
+                <a:solidFill>
+                  <a:srgbClr val="1C3557"/>
+                </a:solidFill>
+                <a:latin typeface="Noto Sans JP"/>
+              </a:rPr>
+              <a:t>✓ LINE配信シナリオ</a:t>
+            </a:r>
+          </a:p>
+          <a:p>
+            <a:pPr algn="l"/>
+            <a:r>
+              <a:rPr sz="1100" b="0">
+                <a:solidFill>
+                  <a:srgbClr val="1C3557"/>
+                </a:solidFill>
+                <a:latin typeface="Noto Sans JP"/>
+              </a:rPr>
+              <a:t>✓ SNS投稿生成</a:t>
+            </a:r>
+          </a:p>
+          <a:p>
+            <a:pPr algn="l"/>
+            <a:r>
+              <a:rPr sz="1100" b="0">
+                <a:solidFill>
+                  <a:srgbClr val="1C3557"/>
+                </a:solidFill>
+                <a:latin typeface="Noto Sans JP"/>
+              </a:rPr>
+              <a:t>✓ LP構成案・コピー</a:t>
+            </a:r>
+          </a:p>
+          <a:p>
+            <a:pPr algn="l"/>
+            <a:r>
+              <a:rPr sz="1100" b="0">
+                <a:solidFill>
+                  <a:srgbClr val="1C3557"/>
+                </a:solidFill>
+                <a:latin typeface="Noto Sans JP"/>
+              </a:rPr>
+              <a:t>✓ YouTube → SNS転記</a:t>
+            </a:r>
+          </a:p>
+        </p:txBody>
+      </p:sp>
+      <p:sp>
+        <p:nvSpPr>
+          <p:cNvPr id="9" name="Rounded Rectangle 8"/>
+          <p:cNvSpPr/>
+          <p:nvPr/>
+        </p:nvSpPr>
+        <p:spPr>
+          <a:xfrm>
+            <a:off x="2743200" y="1371600"/>
+            <a:ext cx="2194560" cy="4297680"/>
           </a:xfrm>
           <a:prstGeom prst="roundRect">
             <a:avLst>
@@ -12496,7 +11340,7 @@
             </a:avLst>
           </a:prstGeom>
           <a:solidFill>
-            <a:srgbClr val="2563EB"/>
+            <a:srgbClr val="F3F4F6"/>
           </a:solidFill>
           <a:ln>
             <a:noFill/>
@@ -12517,32 +11361,32 @@
           </a:fontRef>
         </p:style>
         <p:txBody>
-          <a:bodyPr rtlCol="0" anchor="ctr" wrap="square" tIns="54864" bIns="54864"/>
-          <a:lstStyle/>
-          <a:p>
-            <a:pPr algn="ctr"/>
-            <a:r>
-              <a:rPr sz="1800" b="1">
-                <a:solidFill>
-                  <a:srgbClr val="FFFFFF"/>
-                </a:solidFill>
-                <a:latin typeface="Noto Sans JP"/>
-              </a:rPr>
-              <a:t>営業AI</a:t>
-            </a:r>
-          </a:p>
-        </p:txBody>
-      </p:sp>
-      <p:sp>
-        <p:nvSpPr>
-          <p:cNvPr id="9" name="Rounded Rectangle 8"/>
-          <p:cNvSpPr/>
-          <p:nvPr/>
-        </p:nvSpPr>
-        <p:spPr>
-          <a:xfrm>
-            <a:off x="3749039" y="2331720"/>
-            <a:ext cx="7955279" cy="868680"/>
+          <a:bodyPr rtlCol="0" anchor="t" wrap="square" tIns="54864" bIns="54864"/>
+          <a:lstStyle/>
+          <a:p>
+            <a:pPr algn="l"/>
+            <a:r>
+              <a:rPr sz="1100" b="0">
+                <a:solidFill>
+                  <a:srgbClr val="1C3557"/>
+                </a:solidFill>
+                <a:latin typeface="Noto Sans JP"/>
+              </a:rPr>
+              <a:t/>
+            </a:r>
+          </a:p>
+        </p:txBody>
+      </p:sp>
+      <p:sp>
+        <p:nvSpPr>
+          <p:cNvPr id="10" name="Rounded Rectangle 9"/>
+          <p:cNvSpPr/>
+          <p:nvPr/>
+        </p:nvSpPr>
+        <p:spPr>
+          <a:xfrm>
+            <a:off x="2834640" y="1463040"/>
+            <a:ext cx="2011679" cy="640080"/>
           </a:xfrm>
           <a:prstGeom prst="roundRect">
             <a:avLst>
@@ -12550,7 +11394,7 @@
             </a:avLst>
           </a:prstGeom>
           <a:solidFill>
-            <a:srgbClr val="F3F4F6"/>
+            <a:srgbClr val="2563EB"/>
           </a:solidFill>
           <a:ln>
             <a:noFill/>
@@ -12574,29 +11418,127 @@
           <a:bodyPr rtlCol="0" anchor="ctr" wrap="square" tIns="54864" bIns="54864"/>
           <a:lstStyle/>
           <a:p>
+            <a:pPr algn="ctr"/>
+            <a:r>
+              <a:rPr sz="1400" b="1">
+                <a:solidFill>
+                  <a:srgbClr val="FFFFFF"/>
+                </a:solidFill>
+                <a:latin typeface="Noto Sans JP"/>
+              </a:rPr>
+              <a:t>営業AI</a:t>
+            </a:r>
+          </a:p>
+        </p:txBody>
+      </p:sp>
+      <p:sp>
+        <p:nvSpPr>
+          <p:cNvPr id="11" name="Rectangle 10"/>
+          <p:cNvSpPr/>
+          <p:nvPr/>
+        </p:nvSpPr>
+        <p:spPr>
+          <a:xfrm>
+            <a:off x="2880360" y="2240280"/>
+            <a:ext cx="1920240" cy="3337560"/>
+          </a:xfrm>
+          <a:prstGeom prst="rect">
+            <a:avLst/>
+          </a:prstGeom>
+          <a:noFill/>
+          <a:ln>
+            <a:noFill/>
+          </a:ln>
+        </p:spPr>
+        <p:style>
+          <a:lnRef idx="1">
+            <a:schemeClr val="accent1"/>
+          </a:lnRef>
+          <a:fillRef idx="3">
+            <a:schemeClr val="accent1"/>
+          </a:fillRef>
+          <a:effectRef idx="2">
+            <a:schemeClr val="accent1"/>
+          </a:effectRef>
+          <a:fontRef idx="minor">
+            <a:schemeClr val="lt1"/>
+          </a:fontRef>
+        </p:style>
+        <p:txBody>
+          <a:bodyPr rtlCol="0" anchor="t" wrap="square" tIns="54864" bIns="54864"/>
+          <a:lstStyle/>
+          <a:p>
             <a:pPr algn="l"/>
             <a:r>
-              <a:rPr sz="1400" b="0">
+              <a:rPr sz="1100" b="0">
                 <a:solidFill>
                   <a:srgbClr val="1C3557"/>
                 </a:solidFill>
                 <a:latin typeface="Noto Sans JP"/>
               </a:rPr>
-              <a:t>商談前準備 / 要件ヒアリング / 提案書 / フォロー</a:t>
-            </a:r>
-          </a:p>
-        </p:txBody>
-      </p:sp>
-      <p:sp>
-        <p:nvSpPr>
-          <p:cNvPr id="10" name="Rounded Rectangle 9"/>
-          <p:cNvSpPr/>
-          <p:nvPr/>
-        </p:nvSpPr>
-        <p:spPr>
-          <a:xfrm>
-            <a:off x="457200" y="3291839"/>
-            <a:ext cx="3200400" cy="868680"/>
+              <a:t>✓ 商談前ブリーフィング</a:t>
+            </a:r>
+          </a:p>
+          <a:p>
+            <a:pPr algn="l"/>
+            <a:r>
+              <a:rPr sz="1100" b="0">
+                <a:solidFill>
+                  <a:srgbClr val="1C3557"/>
+                </a:solidFill>
+                <a:latin typeface="Noto Sans JP"/>
+              </a:rPr>
+              <a:t>✓ 提案書骨子</a:t>
+            </a:r>
+          </a:p>
+          <a:p>
+            <a:pPr algn="l"/>
+            <a:r>
+              <a:rPr sz="1100" b="0">
+                <a:solidFill>
+                  <a:srgbClr val="1C3557"/>
+                </a:solidFill>
+                <a:latin typeface="Noto Sans JP"/>
+              </a:rPr>
+              <a:t>✓ フォローメール</a:t>
+            </a:r>
+          </a:p>
+          <a:p>
+            <a:pPr algn="l"/>
+            <a:r>
+              <a:rPr sz="1100" b="0">
+                <a:solidFill>
+                  <a:srgbClr val="1C3557"/>
+                </a:solidFill>
+                <a:latin typeface="Noto Sans JP"/>
+              </a:rPr>
+              <a:t>✓ 要件ヒアリング整理</a:t>
+            </a:r>
+          </a:p>
+          <a:p>
+            <a:pPr algn="l"/>
+            <a:r>
+              <a:rPr sz="1100" b="0">
+                <a:solidFill>
+                  <a:srgbClr val="1C3557"/>
+                </a:solidFill>
+                <a:latin typeface="Noto Sans JP"/>
+              </a:rPr>
+              <a:t>✓ 見積書作成</a:t>
+            </a:r>
+          </a:p>
+        </p:txBody>
+      </p:sp>
+      <p:sp>
+        <p:nvSpPr>
+          <p:cNvPr id="12" name="Rounded Rectangle 11"/>
+          <p:cNvSpPr/>
+          <p:nvPr/>
+        </p:nvSpPr>
+        <p:spPr>
+          <a:xfrm>
+            <a:off x="5029200" y="1371600"/>
+            <a:ext cx="2194560" cy="4297680"/>
           </a:xfrm>
           <a:prstGeom prst="roundRect">
             <a:avLst>
@@ -12604,7 +11546,7 @@
             </a:avLst>
           </a:prstGeom>
           <a:solidFill>
-            <a:srgbClr val="2563EB"/>
+            <a:srgbClr val="F3F4F6"/>
           </a:solidFill>
           <a:ln>
             <a:noFill/>
@@ -12625,32 +11567,32 @@
           </a:fontRef>
         </p:style>
         <p:txBody>
-          <a:bodyPr rtlCol="0" anchor="ctr" wrap="square" tIns="54864" bIns="54864"/>
-          <a:lstStyle/>
-          <a:p>
-            <a:pPr algn="ctr"/>
-            <a:r>
-              <a:rPr sz="1800" b="1">
-                <a:solidFill>
-                  <a:srgbClr val="FFFFFF"/>
-                </a:solidFill>
-                <a:latin typeface="Noto Sans JP"/>
-              </a:rPr>
-              <a:t>デリバリーAI</a:t>
-            </a:r>
-          </a:p>
-        </p:txBody>
-      </p:sp>
-      <p:sp>
-        <p:nvSpPr>
-          <p:cNvPr id="11" name="Rounded Rectangle 10"/>
-          <p:cNvSpPr/>
-          <p:nvPr/>
-        </p:nvSpPr>
-        <p:spPr>
-          <a:xfrm>
-            <a:off x="3749039" y="3291839"/>
-            <a:ext cx="7955279" cy="868680"/>
+          <a:bodyPr rtlCol="0" anchor="t" wrap="square" tIns="54864" bIns="54864"/>
+          <a:lstStyle/>
+          <a:p>
+            <a:pPr algn="l"/>
+            <a:r>
+              <a:rPr sz="1100" b="0">
+                <a:solidFill>
+                  <a:srgbClr val="1C3557"/>
+                </a:solidFill>
+                <a:latin typeface="Noto Sans JP"/>
+              </a:rPr>
+              <a:t/>
+            </a:r>
+          </a:p>
+        </p:txBody>
+      </p:sp>
+      <p:sp>
+        <p:nvSpPr>
+          <p:cNvPr id="13" name="Rounded Rectangle 12"/>
+          <p:cNvSpPr/>
+          <p:nvPr/>
+        </p:nvSpPr>
+        <p:spPr>
+          <a:xfrm>
+            <a:off x="5120640" y="1463040"/>
+            <a:ext cx="2011679" cy="640080"/>
           </a:xfrm>
           <a:prstGeom prst="roundRect">
             <a:avLst>
@@ -12658,7 +11600,7 @@
             </a:avLst>
           </a:prstGeom>
           <a:solidFill>
-            <a:srgbClr val="F3F4F6"/>
+            <a:srgbClr val="2563EB"/>
           </a:solidFill>
           <a:ln>
             <a:noFill/>
@@ -12682,29 +11624,127 @@
           <a:bodyPr rtlCol="0" anchor="ctr" wrap="square" tIns="54864" bIns="54864"/>
           <a:lstStyle/>
           <a:p>
+            <a:pPr algn="ctr"/>
+            <a:r>
+              <a:rPr sz="1400" b="1">
+                <a:solidFill>
+                  <a:srgbClr val="FFFFFF"/>
+                </a:solidFill>
+                <a:latin typeface="Noto Sans JP"/>
+              </a:rPr>
+              <a:t>デリバリーAI</a:t>
+            </a:r>
+          </a:p>
+        </p:txBody>
+      </p:sp>
+      <p:sp>
+        <p:nvSpPr>
+          <p:cNvPr id="14" name="Rectangle 13"/>
+          <p:cNvSpPr/>
+          <p:nvPr/>
+        </p:nvSpPr>
+        <p:spPr>
+          <a:xfrm>
+            <a:off x="5166360" y="2240280"/>
+            <a:ext cx="1920240" cy="3337560"/>
+          </a:xfrm>
+          <a:prstGeom prst="rect">
+            <a:avLst/>
+          </a:prstGeom>
+          <a:noFill/>
+          <a:ln>
+            <a:noFill/>
+          </a:ln>
+        </p:spPr>
+        <p:style>
+          <a:lnRef idx="1">
+            <a:schemeClr val="accent1"/>
+          </a:lnRef>
+          <a:fillRef idx="3">
+            <a:schemeClr val="accent1"/>
+          </a:fillRef>
+          <a:effectRef idx="2">
+            <a:schemeClr val="accent1"/>
+          </a:effectRef>
+          <a:fontRef idx="minor">
+            <a:schemeClr val="lt1"/>
+          </a:fontRef>
+        </p:style>
+        <p:txBody>
+          <a:bodyPr rtlCol="0" anchor="t" wrap="square" tIns="54864" bIns="54864"/>
+          <a:lstStyle/>
+          <a:p>
             <a:pPr algn="l"/>
             <a:r>
-              <a:rPr sz="1400" b="0">
+              <a:rPr sz="1100" b="0">
                 <a:solidFill>
                   <a:srgbClr val="1C3557"/>
                 </a:solidFill>
                 <a:latin typeface="Noto Sans JP"/>
               </a:rPr>
-              <a:t>研修運営 / Dify・n8n・GAS構築 / CSコンサル / PM</a:t>
-            </a:r>
-          </a:p>
-        </p:txBody>
-      </p:sp>
-      <p:sp>
-        <p:nvSpPr>
-          <p:cNvPr id="12" name="Rounded Rectangle 11"/>
-          <p:cNvSpPr/>
-          <p:nvPr/>
-        </p:nvSpPr>
-        <p:spPr>
-          <a:xfrm>
-            <a:off x="457200" y="4251959"/>
-            <a:ext cx="3200400" cy="868680"/>
+              <a:t>✓ NTT 研修200枚</a:t>
+            </a:r>
+          </a:p>
+          <a:p>
+            <a:pPr algn="l"/>
+            <a:r>
+              <a:rPr sz="1100" b="0">
+                <a:solidFill>
+                  <a:srgbClr val="1C3557"/>
+                </a:solidFill>
+                <a:latin typeface="Noto Sans JP"/>
+              </a:rPr>
+              <a:t>✓ 中西 Dify構築 (5h)</a:t>
+            </a:r>
+          </a:p>
+          <a:p>
+            <a:pPr algn="l"/>
+            <a:r>
+              <a:rPr sz="1100" b="0">
+                <a:solidFill>
+                  <a:srgbClr val="1C3557"/>
+                </a:solidFill>
+                <a:latin typeface="Noto Sans JP"/>
+              </a:rPr>
+              <a:t>✓ キリン 研修PM</a:t>
+            </a:r>
+          </a:p>
+          <a:p>
+            <a:pPr algn="l"/>
+            <a:r>
+              <a:rPr sz="1100" b="0">
+                <a:solidFill>
+                  <a:srgbClr val="1C3557"/>
+                </a:solidFill>
+                <a:latin typeface="Noto Sans JP"/>
+              </a:rPr>
+              <a:t>✓ ブロードリンク 省エネ</a:t>
+            </a:r>
+          </a:p>
+          <a:p>
+            <a:pPr algn="l"/>
+            <a:r>
+              <a:rPr sz="1100" b="0">
+                <a:solidFill>
+                  <a:srgbClr val="1C3557"/>
+                </a:solidFill>
+                <a:latin typeface="Noto Sans JP"/>
+              </a:rPr>
+              <a:t>✓ カリキュラム設計</a:t>
+            </a:r>
+          </a:p>
+        </p:txBody>
+      </p:sp>
+      <p:sp>
+        <p:nvSpPr>
+          <p:cNvPr id="15" name="Rounded Rectangle 14"/>
+          <p:cNvSpPr/>
+          <p:nvPr/>
+        </p:nvSpPr>
+        <p:spPr>
+          <a:xfrm>
+            <a:off x="7315200" y="1371600"/>
+            <a:ext cx="2194560" cy="4297680"/>
           </a:xfrm>
           <a:prstGeom prst="roundRect">
             <a:avLst>
@@ -12712,7 +11752,7 @@
             </a:avLst>
           </a:prstGeom>
           <a:solidFill>
-            <a:srgbClr val="2563EB"/>
+            <a:srgbClr val="F3F4F6"/>
           </a:solidFill>
           <a:ln>
             <a:noFill/>
@@ -12733,32 +11773,32 @@
           </a:fontRef>
         </p:style>
         <p:txBody>
-          <a:bodyPr rtlCol="0" anchor="ctr" wrap="square" tIns="54864" bIns="54864"/>
-          <a:lstStyle/>
-          <a:p>
-            <a:pPr algn="ctr"/>
-            <a:r>
-              <a:rPr sz="1800" b="1">
-                <a:solidFill>
-                  <a:srgbClr val="FFFFFF"/>
-                </a:solidFill>
-                <a:latin typeface="Noto Sans JP"/>
-              </a:rPr>
-              <a:t>事務・法務AI</a:t>
-            </a:r>
-          </a:p>
-        </p:txBody>
-      </p:sp>
-      <p:sp>
-        <p:nvSpPr>
-          <p:cNvPr id="13" name="Rounded Rectangle 12"/>
-          <p:cNvSpPr/>
-          <p:nvPr/>
-        </p:nvSpPr>
-        <p:spPr>
-          <a:xfrm>
-            <a:off x="3749039" y="4251959"/>
-            <a:ext cx="7955279" cy="868680"/>
+          <a:bodyPr rtlCol="0" anchor="t" wrap="square" tIns="54864" bIns="54864"/>
+          <a:lstStyle/>
+          <a:p>
+            <a:pPr algn="l"/>
+            <a:r>
+              <a:rPr sz="1100" b="0">
+                <a:solidFill>
+                  <a:srgbClr val="1C3557"/>
+                </a:solidFill>
+                <a:latin typeface="Noto Sans JP"/>
+              </a:rPr>
+              <a:t/>
+            </a:r>
+          </a:p>
+        </p:txBody>
+      </p:sp>
+      <p:sp>
+        <p:nvSpPr>
+          <p:cNvPr id="16" name="Rounded Rectangle 15"/>
+          <p:cNvSpPr/>
+          <p:nvPr/>
+        </p:nvSpPr>
+        <p:spPr>
+          <a:xfrm>
+            <a:off x="7406640" y="1463040"/>
+            <a:ext cx="2011679" cy="640080"/>
           </a:xfrm>
           <a:prstGeom prst="roundRect">
             <a:avLst>
@@ -12766,7 +11806,7 @@
             </a:avLst>
           </a:prstGeom>
           <a:solidFill>
-            <a:srgbClr val="F3F4F6"/>
+            <a:srgbClr val="2563EB"/>
           </a:solidFill>
           <a:ln>
             <a:noFill/>
@@ -12790,29 +11830,127 @@
           <a:bodyPr rtlCol="0" anchor="ctr" wrap="square" tIns="54864" bIns="54864"/>
           <a:lstStyle/>
           <a:p>
+            <a:pPr algn="ctr"/>
+            <a:r>
+              <a:rPr sz="1400" b="1">
+                <a:solidFill>
+                  <a:srgbClr val="FFFFFF"/>
+                </a:solidFill>
+                <a:latin typeface="Noto Sans JP"/>
+              </a:rPr>
+              <a:t>事務・法務AI</a:t>
+            </a:r>
+          </a:p>
+        </p:txBody>
+      </p:sp>
+      <p:sp>
+        <p:nvSpPr>
+          <p:cNvPr id="17" name="Rectangle 16"/>
+          <p:cNvSpPr/>
+          <p:nvPr/>
+        </p:nvSpPr>
+        <p:spPr>
+          <a:xfrm>
+            <a:off x="7452360" y="2240280"/>
+            <a:ext cx="1920240" cy="3337560"/>
+          </a:xfrm>
+          <a:prstGeom prst="rect">
+            <a:avLst/>
+          </a:prstGeom>
+          <a:noFill/>
+          <a:ln>
+            <a:noFill/>
+          </a:ln>
+        </p:spPr>
+        <p:style>
+          <a:lnRef idx="1">
+            <a:schemeClr val="accent1"/>
+          </a:lnRef>
+          <a:fillRef idx="3">
+            <a:schemeClr val="accent1"/>
+          </a:fillRef>
+          <a:effectRef idx="2">
+            <a:schemeClr val="accent1"/>
+          </a:effectRef>
+          <a:fontRef idx="minor">
+            <a:schemeClr val="lt1"/>
+          </a:fontRef>
+        </p:style>
+        <p:txBody>
+          <a:bodyPr rtlCol="0" anchor="t" wrap="square" tIns="54864" bIns="54864"/>
+          <a:lstStyle/>
+          <a:p>
             <a:pPr algn="l"/>
             <a:r>
-              <a:rPr sz="1400" b="0">
+              <a:rPr sz="1100" b="0">
                 <a:solidFill>
                   <a:srgbClr val="1C3557"/>
                 </a:solidFill>
                 <a:latin typeface="Noto Sans JP"/>
               </a:rPr>
-              <a:t>契約書 / 請求書 / 利用契約書 / プライバシーポリシー / PL</a:t>
-            </a:r>
-          </a:p>
-        </p:txBody>
-      </p:sp>
-      <p:sp>
-        <p:nvSpPr>
-          <p:cNvPr id="14" name="Rounded Rectangle 13"/>
-          <p:cNvSpPr/>
-          <p:nvPr/>
-        </p:nvSpPr>
-        <p:spPr>
-          <a:xfrm>
-            <a:off x="457200" y="5212079"/>
-            <a:ext cx="3200400" cy="868680"/>
+              <a:t>✓ 契約書チェック</a:t>
+            </a:r>
+          </a:p>
+          <a:p>
+            <a:pPr algn="l"/>
+            <a:r>
+              <a:rPr sz="1100" b="0">
+                <a:solidFill>
+                  <a:srgbClr val="1C3557"/>
+                </a:solidFill>
+                <a:latin typeface="Noto Sans JP"/>
+              </a:rPr>
+              <a:t>✓ PL自動更新</a:t>
+            </a:r>
+          </a:p>
+          <a:p>
+            <a:pPr algn="l"/>
+            <a:r>
+              <a:rPr sz="1100" b="0">
+                <a:solidFill>
+                  <a:srgbClr val="1C3557"/>
+                </a:solidFill>
+                <a:latin typeface="Noto Sans JP"/>
+              </a:rPr>
+              <a:t>✓ 受信トレイ整理</a:t>
+            </a:r>
+          </a:p>
+          <a:p>
+            <a:pPr algn="l"/>
+            <a:r>
+              <a:rPr sz="1100" b="0">
+                <a:solidFill>
+                  <a:srgbClr val="1C3557"/>
+                </a:solidFill>
+                <a:latin typeface="Noto Sans JP"/>
+              </a:rPr>
+              <a:t>✓ 月次レポート</a:t>
+            </a:r>
+          </a:p>
+          <a:p>
+            <a:pPr algn="l"/>
+            <a:r>
+              <a:rPr sz="1100" b="0">
+                <a:solidFill>
+                  <a:srgbClr val="1C3557"/>
+                </a:solidFill>
+                <a:latin typeface="Noto Sans JP"/>
+              </a:rPr>
+              <a:t>✓ ツールコスト最適化</a:t>
+            </a:r>
+          </a:p>
+        </p:txBody>
+      </p:sp>
+      <p:sp>
+        <p:nvSpPr>
+          <p:cNvPr id="18" name="Rounded Rectangle 17"/>
+          <p:cNvSpPr/>
+          <p:nvPr/>
+        </p:nvSpPr>
+        <p:spPr>
+          <a:xfrm>
+            <a:off x="9601200" y="1371600"/>
+            <a:ext cx="2194560" cy="4297680"/>
           </a:xfrm>
           <a:prstGeom prst="roundRect">
             <a:avLst>
@@ -12820,7 +11958,7 @@
             </a:avLst>
           </a:prstGeom>
           <a:solidFill>
-            <a:srgbClr val="2563EB"/>
+            <a:srgbClr val="F3F4F6"/>
           </a:solidFill>
           <a:ln>
             <a:noFill/>
@@ -12841,32 +11979,32 @@
           </a:fontRef>
         </p:style>
         <p:txBody>
-          <a:bodyPr rtlCol="0" anchor="ctr" wrap="square" tIns="54864" bIns="54864"/>
-          <a:lstStyle/>
-          <a:p>
-            <a:pPr algn="ctr"/>
-            <a:r>
-              <a:rPr sz="1800" b="1">
-                <a:solidFill>
-                  <a:srgbClr val="FFFFFF"/>
-                </a:solidFill>
-                <a:latin typeface="Noto Sans JP"/>
-              </a:rPr>
-              <a:t>戦略・プロダクトAI</a:t>
-            </a:r>
-          </a:p>
-        </p:txBody>
-      </p:sp>
-      <p:sp>
-        <p:nvSpPr>
-          <p:cNvPr id="15" name="Rounded Rectangle 14"/>
-          <p:cNvSpPr/>
-          <p:nvPr/>
-        </p:nvSpPr>
-        <p:spPr>
-          <a:xfrm>
-            <a:off x="3749039" y="5212079"/>
-            <a:ext cx="7955279" cy="868680"/>
+          <a:bodyPr rtlCol="0" anchor="t" wrap="square" tIns="54864" bIns="54864"/>
+          <a:lstStyle/>
+          <a:p>
+            <a:pPr algn="l"/>
+            <a:r>
+              <a:rPr sz="1100" b="0">
+                <a:solidFill>
+                  <a:srgbClr val="1C3557"/>
+                </a:solidFill>
+                <a:latin typeface="Noto Sans JP"/>
+              </a:rPr>
+              <a:t/>
+            </a:r>
+          </a:p>
+        </p:txBody>
+      </p:sp>
+      <p:sp>
+        <p:nvSpPr>
+          <p:cNvPr id="19" name="Rounded Rectangle 18"/>
+          <p:cNvSpPr/>
+          <p:nvPr/>
+        </p:nvSpPr>
+        <p:spPr>
+          <a:xfrm>
+            <a:off x="9692640" y="1463040"/>
+            <a:ext cx="2011679" cy="640080"/>
           </a:xfrm>
           <a:prstGeom prst="roundRect">
             <a:avLst>
@@ -12874,7 +12012,7 @@
             </a:avLst>
           </a:prstGeom>
           <a:solidFill>
-            <a:srgbClr val="F3F4F6"/>
+            <a:srgbClr val="2563EB"/>
           </a:solidFill>
           <a:ln>
             <a:noFill/>
@@ -12898,29 +12036,29 @@
           <a:bodyPr rtlCol="0" anchor="ctr" wrap="square" tIns="54864" bIns="54864"/>
           <a:lstStyle/>
           <a:p>
-            <a:pPr algn="l"/>
-            <a:r>
-              <a:rPr sz="1400" b="0">
-                <a:solidFill>
-                  <a:srgbClr val="1C3557"/>
-                </a:solidFill>
-                <a:latin typeface="Noto Sans JP"/>
-              </a:rPr>
-              <a:t>競合調査 / 市場調査 / 料金設計 / データ分析</a:t>
-            </a:r>
-          </a:p>
-        </p:txBody>
-      </p:sp>
-      <p:sp>
-        <p:nvSpPr>
-          <p:cNvPr id="16" name="Rectangle 15"/>
-          <p:cNvSpPr/>
-          <p:nvPr/>
-        </p:nvSpPr>
-        <p:spPr>
-          <a:xfrm>
-            <a:off x="457200" y="6263640"/>
-            <a:ext cx="11274552" cy="365760"/>
+            <a:pPr algn="ctr"/>
+            <a:r>
+              <a:rPr sz="1400" b="1">
+                <a:solidFill>
+                  <a:srgbClr val="FFFFFF"/>
+                </a:solidFill>
+                <a:latin typeface="Noto Sans JP"/>
+              </a:rPr>
+              <a:t>戦略AI</a:t>
+            </a:r>
+          </a:p>
+        </p:txBody>
+      </p:sp>
+      <p:sp>
+        <p:nvSpPr>
+          <p:cNvPr id="20" name="Rectangle 19"/>
+          <p:cNvSpPr/>
+          <p:nvPr/>
+        </p:nvSpPr>
+        <p:spPr>
+          <a:xfrm>
+            <a:off x="9738360" y="2240280"/>
+            <a:ext cx="1920240" cy="3337560"/>
           </a:xfrm>
           <a:prstGeom prst="rect">
             <a:avLst/>
@@ -12948,15 +12086,113 @@
           <a:bodyPr rtlCol="0" anchor="t" wrap="square" tIns="54864" bIns="54864"/>
           <a:lstStyle/>
           <a:p>
+            <a:pPr algn="l"/>
+            <a:r>
+              <a:rPr sz="1100" b="0">
+                <a:solidFill>
+                  <a:srgbClr val="1C3557"/>
+                </a:solidFill>
+                <a:latin typeface="Noto Sans JP"/>
+              </a:rPr>
+              <a:t>✓ 競合調査</a:t>
+            </a:r>
+          </a:p>
+          <a:p>
+            <a:pPr algn="l"/>
+            <a:r>
+              <a:rPr sz="1100" b="0">
+                <a:solidFill>
+                  <a:srgbClr val="1C3557"/>
+                </a:solidFill>
+                <a:latin typeface="Noto Sans JP"/>
+              </a:rPr>
+              <a:t>✓ 料金設計試算</a:t>
+            </a:r>
+          </a:p>
+          <a:p>
+            <a:pPr algn="l"/>
+            <a:r>
+              <a:rPr sz="1100" b="0">
+                <a:solidFill>
+                  <a:srgbClr val="1C3557"/>
+                </a:solidFill>
+                <a:latin typeface="Noto Sans JP"/>
+              </a:rPr>
+              <a:t>✓ データ分析</a:t>
+            </a:r>
+          </a:p>
+          <a:p>
+            <a:pPr algn="l"/>
+            <a:r>
+              <a:rPr sz="1100" b="0">
+                <a:solidFill>
+                  <a:srgbClr val="1C3557"/>
+                </a:solidFill>
+                <a:latin typeface="Noto Sans JP"/>
+              </a:rPr>
+              <a:t>✓ プロダクト改善提案</a:t>
+            </a:r>
+          </a:p>
+          <a:p>
+            <a:pPr algn="l"/>
+            <a:r>
+              <a:rPr sz="1100" b="0">
+                <a:solidFill>
+                  <a:srgbClr val="1C3557"/>
+                </a:solidFill>
+                <a:latin typeface="Noto Sans JP"/>
+              </a:rPr>
+              <a:t>✓ 朝の工程表</a:t>
+            </a:r>
+          </a:p>
+        </p:txBody>
+      </p:sp>
+      <p:sp>
+        <p:nvSpPr>
+          <p:cNvPr id="21" name="Rectangle 20"/>
+          <p:cNvSpPr/>
+          <p:nvPr/>
+        </p:nvSpPr>
+        <p:spPr>
+          <a:xfrm>
+            <a:off x="457200" y="5852160"/>
+            <a:ext cx="11274552" cy="731520"/>
+          </a:xfrm>
+          <a:prstGeom prst="rect">
+            <a:avLst/>
+          </a:prstGeom>
+          <a:noFill/>
+          <a:ln>
+            <a:noFill/>
+          </a:ln>
+        </p:spPr>
+        <p:style>
+          <a:lnRef idx="1">
+            <a:schemeClr val="accent1"/>
+          </a:lnRef>
+          <a:fillRef idx="3">
+            <a:schemeClr val="accent1"/>
+          </a:fillRef>
+          <a:effectRef idx="2">
+            <a:schemeClr val="accent1"/>
+          </a:effectRef>
+          <a:fontRef idx="minor">
+            <a:schemeClr val="lt1"/>
+          </a:fontRef>
+        </p:style>
+        <p:txBody>
+          <a:bodyPr rtlCol="0" anchor="ctr" wrap="square" tIns="54864" bIns="54864"/>
+          <a:lstStyle/>
+          <a:p>
             <a:pPr algn="ctr"/>
             <a:r>
-              <a:rPr sz="1100" b="1">
-                <a:solidFill>
-                  <a:srgbClr val="6B7280"/>
-                </a:solidFill>
-                <a:latin typeface="Noto Sans JP"/>
-              </a:rPr>
-              <a:t>4人 = 各領域の戦略 + 実行  /  戦略・プロダクトAI = リサーチ・分析担当</a:t>
+              <a:rPr sz="2000" b="1">
+                <a:solidFill>
+                  <a:srgbClr val="2563EB"/>
+                </a:solidFill>
+                <a:latin typeface="Noto Sans JP"/>
+              </a:rPr>
+              <a:t>いろんな領域で AI社員 を使い倒している</a:t>
             </a:r>
           </a:p>
         </p:txBody>
@@ -13030,8 +12266,8 @@
         </p:nvSpPr>
         <p:spPr>
           <a:xfrm>
-            <a:off x="10972800" y="274320"/>
-            <a:ext cx="1005840" cy="274320"/>
+            <a:off x="457200" y="365760"/>
+            <a:ext cx="11274552" cy="457200"/>
           </a:xfrm>
           <a:prstGeom prst="rect">
             <a:avLst/>
@@ -13059,15 +12295,15 @@
           <a:bodyPr rtlCol="0" anchor="t" wrap="square" tIns="54864" bIns="54864"/>
           <a:lstStyle/>
           <a:p>
-            <a:pPr algn="r"/>
-            <a:r>
-              <a:rPr sz="1100" b="0">
+            <a:pPr algn="ctr"/>
+            <a:r>
+              <a:rPr sz="1400" b="1">
                 <a:solidFill>
                   <a:srgbClr val="6B7280"/>
                 </a:solidFill>
                 <a:latin typeface="Noto Sans JP"/>
               </a:rPr>
-              <a:t>8 / 14</a:t>
+              <a:t>そして</a:t>
             </a:r>
           </a:p>
         </p:txBody>
@@ -13080,58 +12316,8 @@
         </p:nvSpPr>
         <p:spPr>
           <a:xfrm>
-            <a:off x="457200" y="365760"/>
-            <a:ext cx="10515600" cy="640080"/>
-          </a:xfrm>
-          <a:prstGeom prst="rect">
-            <a:avLst/>
-          </a:prstGeom>
-          <a:noFill/>
-          <a:ln>
-            <a:noFill/>
-          </a:ln>
-        </p:spPr>
-        <p:style>
-          <a:lnRef idx="1">
-            <a:schemeClr val="accent1"/>
-          </a:lnRef>
-          <a:fillRef idx="3">
-            <a:schemeClr val="accent1"/>
-          </a:fillRef>
-          <a:effectRef idx="2">
-            <a:schemeClr val="accent1"/>
-          </a:effectRef>
-          <a:fontRef idx="minor">
-            <a:schemeClr val="lt1"/>
-          </a:fontRef>
-        </p:style>
-        <p:txBody>
-          <a:bodyPr rtlCol="0" anchor="t" wrap="square" tIns="54864" bIns="54864"/>
-          <a:lstStyle/>
-          <a:p>
-            <a:pPr algn="l"/>
-            <a:r>
-              <a:rPr sz="2400" b="1">
-                <a:solidFill>
-                  <a:srgbClr val="1C3557"/>
-                </a:solidFill>
-                <a:latin typeface="Noto Sans JP"/>
-              </a:rPr>
-              <a:t>なんでこれにしたのか</a:t>
-            </a:r>
-          </a:p>
-        </p:txBody>
-      </p:sp>
-      <p:sp>
-        <p:nvSpPr>
-          <p:cNvPr id="5" name="Rectangle 4"/>
-          <p:cNvSpPr/>
-          <p:nvPr/>
-        </p:nvSpPr>
-        <p:spPr>
-          <a:xfrm>
-            <a:off x="457200" y="1051560"/>
-            <a:ext cx="1645920" cy="64008"/>
+            <a:off x="5486400" y="914400"/>
+            <a:ext cx="1216152" cy="54864"/>
           </a:xfrm>
           <a:prstGeom prst="rect">
             <a:avLst/>
@@ -13167,19 +12353,117 @@
       </p:sp>
       <p:sp>
         <p:nvSpPr>
-          <p:cNvPr id="6" name="Rounded Rectangle 5"/>
-          <p:cNvSpPr/>
-          <p:nvPr/>
-        </p:nvSpPr>
-        <p:spPr>
-          <a:xfrm>
-            <a:off x="457200" y="1828800"/>
-            <a:ext cx="2194560" cy="1463040"/>
-          </a:xfrm>
-          <a:prstGeom prst="roundRect">
-            <a:avLst>
-              <a:gd name="adj" fmla="val 5000"/>
-            </a:avLst>
+          <p:cNvPr id="5" name="Rectangle 4"/>
+          <p:cNvSpPr/>
+          <p:nvPr/>
+        </p:nvSpPr>
+        <p:spPr>
+          <a:xfrm>
+            <a:off x="457200" y="2011680"/>
+            <a:ext cx="11274552" cy="1371600"/>
+          </a:xfrm>
+          <a:prstGeom prst="rect">
+            <a:avLst/>
+          </a:prstGeom>
+          <a:noFill/>
+          <a:ln>
+            <a:noFill/>
+          </a:ln>
+        </p:spPr>
+        <p:style>
+          <a:lnRef idx="1">
+            <a:schemeClr val="accent1"/>
+          </a:lnRef>
+          <a:fillRef idx="3">
+            <a:schemeClr val="accent1"/>
+          </a:fillRef>
+          <a:effectRef idx="2">
+            <a:schemeClr val="accent1"/>
+          </a:effectRef>
+          <a:fontRef idx="minor">
+            <a:schemeClr val="lt1"/>
+          </a:fontRef>
+        </p:style>
+        <p:txBody>
+          <a:bodyPr rtlCol="0" anchor="ctr" wrap="square" tIns="54864" bIns="54864"/>
+          <a:lstStyle/>
+          <a:p>
+            <a:pPr algn="ctr"/>
+            <a:r>
+              <a:rPr sz="3200" b="0">
+                <a:solidFill>
+                  <a:srgbClr val="1C3557"/>
+                </a:solidFill>
+                <a:latin typeface="Noto Sans JP"/>
+              </a:rPr>
+              <a:t>これが</a:t>
+            </a:r>
+          </a:p>
+        </p:txBody>
+      </p:sp>
+      <p:sp>
+        <p:nvSpPr>
+          <p:cNvPr id="6" name="Rectangle 5"/>
+          <p:cNvSpPr/>
+          <p:nvPr/>
+        </p:nvSpPr>
+        <p:spPr>
+          <a:xfrm>
+            <a:off x="457200" y="3200400"/>
+            <a:ext cx="11274552" cy="1463040"/>
+          </a:xfrm>
+          <a:prstGeom prst="rect">
+            <a:avLst/>
+          </a:prstGeom>
+          <a:noFill/>
+          <a:ln>
+            <a:noFill/>
+          </a:ln>
+        </p:spPr>
+        <p:style>
+          <a:lnRef idx="1">
+            <a:schemeClr val="accent1"/>
+          </a:lnRef>
+          <a:fillRef idx="3">
+            <a:schemeClr val="accent1"/>
+          </a:fillRef>
+          <a:effectRef idx="2">
+            <a:schemeClr val="accent1"/>
+          </a:effectRef>
+          <a:fontRef idx="minor">
+            <a:schemeClr val="lt1"/>
+          </a:fontRef>
+        </p:style>
+        <p:txBody>
+          <a:bodyPr rtlCol="0" anchor="ctr" wrap="square" tIns="54864" bIns="54864"/>
+          <a:lstStyle/>
+          <a:p>
+            <a:pPr algn="ctr"/>
+            <a:r>
+              <a:rPr sz="5200" b="1">
+                <a:solidFill>
+                  <a:srgbClr val="2563EB"/>
+                </a:solidFill>
+                <a:latin typeface="Noto Sans JP"/>
+              </a:rPr>
+              <a:t>売上に直結している</a:t>
+            </a:r>
+          </a:p>
+        </p:txBody>
+      </p:sp>
+      <p:sp>
+        <p:nvSpPr>
+          <p:cNvPr id="7" name="Down Arrow 6"/>
+          <p:cNvSpPr/>
+          <p:nvPr/>
+        </p:nvSpPr>
+        <p:spPr>
+          <a:xfrm>
+            <a:off x="5870448" y="5029200"/>
+            <a:ext cx="457200" cy="548640"/>
+          </a:xfrm>
+          <a:prstGeom prst="downArrow">
+            <a:avLst/>
           </a:prstGeom>
           <a:solidFill>
             <a:srgbClr val="2563EB"/>
@@ -13203,558 +12487,59 @@
           </a:fontRef>
         </p:style>
         <p:txBody>
-          <a:bodyPr rtlCol="0" anchor="ctr" wrap="square" tIns="54864" bIns="54864"/>
+          <a:bodyPr rtlCol="0" anchor="ctr"/>
           <a:lstStyle/>
           <a:p>
             <a:pPr algn="ctr"/>
-            <a:r>
-              <a:rPr sz="2200" b="1">
-                <a:solidFill>
-                  <a:srgbClr val="FFFFFF"/>
-                </a:solidFill>
-                <a:latin typeface="Noto Sans JP"/>
-              </a:rPr>
-              <a:t>マーケ</a:t>
-            </a:r>
-          </a:p>
-        </p:txBody>
-      </p:sp>
-      <p:sp>
-        <p:nvSpPr>
-          <p:cNvPr id="7" name="Rounded Rectangle 6"/>
-          <p:cNvSpPr/>
-          <p:nvPr/>
-        </p:nvSpPr>
-        <p:spPr>
-          <a:xfrm>
-            <a:off x="457200" y="3337560"/>
-            <a:ext cx="2194560" cy="731520"/>
-          </a:xfrm>
-          <a:prstGeom prst="roundRect">
-            <a:avLst>
-              <a:gd name="adj" fmla="val 5000"/>
-            </a:avLst>
-          </a:prstGeom>
-          <a:solidFill>
-            <a:srgbClr val="F3F4F6"/>
-          </a:solidFill>
-          <a:ln>
-            <a:noFill/>
-          </a:ln>
-        </p:spPr>
-        <p:style>
-          <a:lnRef idx="1">
-            <a:schemeClr val="accent1"/>
-          </a:lnRef>
-          <a:fillRef idx="3">
-            <a:schemeClr val="accent1"/>
-          </a:fillRef>
-          <a:effectRef idx="2">
-            <a:schemeClr val="accent1"/>
-          </a:effectRef>
-          <a:fontRef idx="minor">
-            <a:schemeClr val="lt1"/>
-          </a:fontRef>
-        </p:style>
-        <p:txBody>
-          <a:bodyPr rtlCol="0" anchor="ctr" wrap="square" tIns="54864" bIns="54864"/>
-          <a:lstStyle/>
-          <a:p>
-            <a:pPr algn="ctr"/>
-            <a:r>
-              <a:rPr sz="1400" b="0">
-                <a:solidFill>
-                  <a:srgbClr val="1C3557"/>
-                </a:solidFill>
-                <a:latin typeface="Noto Sans JP"/>
-              </a:rPr>
-              <a:t>認知獲得</a:t>
-            </a:r>
-          </a:p>
-        </p:txBody>
-      </p:sp>
-      <p:sp>
-        <p:nvSpPr>
-          <p:cNvPr id="8" name="Rounded Rectangle 7"/>
-          <p:cNvSpPr/>
-          <p:nvPr/>
-        </p:nvSpPr>
-        <p:spPr>
-          <a:xfrm>
-            <a:off x="2715768" y="1828800"/>
-            <a:ext cx="2194560" cy="1463040"/>
-          </a:xfrm>
-          <a:prstGeom prst="roundRect">
-            <a:avLst>
-              <a:gd name="adj" fmla="val 5000"/>
-            </a:avLst>
-          </a:prstGeom>
-          <a:solidFill>
-            <a:srgbClr val="2563EB"/>
-          </a:solidFill>
-          <a:ln>
-            <a:noFill/>
-          </a:ln>
-        </p:spPr>
-        <p:style>
-          <a:lnRef idx="1">
-            <a:schemeClr val="accent1"/>
-          </a:lnRef>
-          <a:fillRef idx="3">
-            <a:schemeClr val="accent1"/>
-          </a:fillRef>
-          <a:effectRef idx="2">
-            <a:schemeClr val="accent1"/>
-          </a:effectRef>
-          <a:fontRef idx="minor">
-            <a:schemeClr val="lt1"/>
-          </a:fontRef>
-        </p:style>
-        <p:txBody>
-          <a:bodyPr rtlCol="0" anchor="ctr" wrap="square" tIns="54864" bIns="54864"/>
-          <a:lstStyle/>
-          <a:p>
-            <a:pPr algn="ctr"/>
-            <a:r>
-              <a:rPr sz="2200" b="1">
-                <a:solidFill>
-                  <a:srgbClr val="FFFFFF"/>
-                </a:solidFill>
-                <a:latin typeface="Noto Sans JP"/>
-              </a:rPr>
-              <a:t>営業</a:t>
-            </a:r>
-          </a:p>
-        </p:txBody>
-      </p:sp>
-      <p:sp>
-        <p:nvSpPr>
-          <p:cNvPr id="9" name="Rounded Rectangle 8"/>
-          <p:cNvSpPr/>
-          <p:nvPr/>
-        </p:nvSpPr>
-        <p:spPr>
-          <a:xfrm>
-            <a:off x="2715768" y="3337560"/>
-            <a:ext cx="2194560" cy="731520"/>
-          </a:xfrm>
-          <a:prstGeom prst="roundRect">
-            <a:avLst>
-              <a:gd name="adj" fmla="val 5000"/>
-            </a:avLst>
-          </a:prstGeom>
-          <a:solidFill>
-            <a:srgbClr val="F3F4F6"/>
-          </a:solidFill>
-          <a:ln>
-            <a:noFill/>
-          </a:ln>
-        </p:spPr>
-        <p:style>
-          <a:lnRef idx="1">
-            <a:schemeClr val="accent1"/>
-          </a:lnRef>
-          <a:fillRef idx="3">
-            <a:schemeClr val="accent1"/>
-          </a:fillRef>
-          <a:effectRef idx="2">
-            <a:schemeClr val="accent1"/>
-          </a:effectRef>
-          <a:fontRef idx="minor">
-            <a:schemeClr val="lt1"/>
-          </a:fontRef>
-        </p:style>
-        <p:txBody>
-          <a:bodyPr rtlCol="0" anchor="ctr" wrap="square" tIns="54864" bIns="54864"/>
-          <a:lstStyle/>
-          <a:p>
-            <a:pPr algn="ctr"/>
-            <a:r>
-              <a:rPr sz="1400" b="0">
-                <a:solidFill>
-                  <a:srgbClr val="1C3557"/>
-                </a:solidFill>
-                <a:latin typeface="Noto Sans JP"/>
-              </a:rPr>
-              <a:t>商談・受注</a:t>
-            </a:r>
-          </a:p>
-        </p:txBody>
-      </p:sp>
-      <p:sp>
-        <p:nvSpPr>
-          <p:cNvPr id="10" name="Rounded Rectangle 9"/>
-          <p:cNvSpPr/>
-          <p:nvPr/>
-        </p:nvSpPr>
-        <p:spPr>
-          <a:xfrm>
-            <a:off x="4974336" y="1828800"/>
-            <a:ext cx="2194560" cy="1463040"/>
-          </a:xfrm>
-          <a:prstGeom prst="roundRect">
-            <a:avLst>
-              <a:gd name="adj" fmla="val 5000"/>
-            </a:avLst>
-          </a:prstGeom>
-          <a:solidFill>
-            <a:srgbClr val="2563EB"/>
-          </a:solidFill>
-          <a:ln>
-            <a:noFill/>
-          </a:ln>
-        </p:spPr>
-        <p:style>
-          <a:lnRef idx="1">
-            <a:schemeClr val="accent1"/>
-          </a:lnRef>
-          <a:fillRef idx="3">
-            <a:schemeClr val="accent1"/>
-          </a:fillRef>
-          <a:effectRef idx="2">
-            <a:schemeClr val="accent1"/>
-          </a:effectRef>
-          <a:fontRef idx="minor">
-            <a:schemeClr val="lt1"/>
-          </a:fontRef>
-        </p:style>
-        <p:txBody>
-          <a:bodyPr rtlCol="0" anchor="ctr" wrap="square" tIns="54864" bIns="54864"/>
-          <a:lstStyle/>
-          <a:p>
-            <a:pPr algn="ctr"/>
-            <a:r>
-              <a:rPr sz="2200" b="1">
-                <a:solidFill>
-                  <a:srgbClr val="FFFFFF"/>
-                </a:solidFill>
-                <a:latin typeface="Noto Sans JP"/>
-              </a:rPr>
-              <a:t>デリバリー</a:t>
-            </a:r>
-          </a:p>
-        </p:txBody>
-      </p:sp>
-      <p:sp>
-        <p:nvSpPr>
-          <p:cNvPr id="11" name="Rounded Rectangle 10"/>
-          <p:cNvSpPr/>
-          <p:nvPr/>
-        </p:nvSpPr>
-        <p:spPr>
-          <a:xfrm>
-            <a:off x="4974336" y="3337560"/>
-            <a:ext cx="2194560" cy="731520"/>
-          </a:xfrm>
-          <a:prstGeom prst="roundRect">
-            <a:avLst>
-              <a:gd name="adj" fmla="val 5000"/>
-            </a:avLst>
-          </a:prstGeom>
-          <a:solidFill>
-            <a:srgbClr val="F3F4F6"/>
-          </a:solidFill>
-          <a:ln>
-            <a:noFill/>
-          </a:ln>
-        </p:spPr>
-        <p:style>
-          <a:lnRef idx="1">
-            <a:schemeClr val="accent1"/>
-          </a:lnRef>
-          <a:fillRef idx="3">
-            <a:schemeClr val="accent1"/>
-          </a:fillRef>
-          <a:effectRef idx="2">
-            <a:schemeClr val="accent1"/>
-          </a:effectRef>
-          <a:fontRef idx="minor">
-            <a:schemeClr val="lt1"/>
-          </a:fontRef>
-        </p:style>
-        <p:txBody>
-          <a:bodyPr rtlCol="0" anchor="ctr" wrap="square" tIns="54864" bIns="54864"/>
-          <a:lstStyle/>
-          <a:p>
-            <a:pPr algn="ctr"/>
-            <a:r>
-              <a:rPr sz="1400" b="0">
-                <a:solidFill>
-                  <a:srgbClr val="1C3557"/>
-                </a:solidFill>
-                <a:latin typeface="Noto Sans JP"/>
-              </a:rPr>
-              <a:t>納品</a:t>
-            </a:r>
-          </a:p>
-        </p:txBody>
-      </p:sp>
-      <p:sp>
-        <p:nvSpPr>
-          <p:cNvPr id="12" name="Rounded Rectangle 11"/>
-          <p:cNvSpPr/>
-          <p:nvPr/>
-        </p:nvSpPr>
-        <p:spPr>
-          <a:xfrm>
-            <a:off x="7232903" y="1828800"/>
-            <a:ext cx="2194560" cy="1463040"/>
-          </a:xfrm>
-          <a:prstGeom prst="roundRect">
-            <a:avLst>
-              <a:gd name="adj" fmla="val 5000"/>
-            </a:avLst>
-          </a:prstGeom>
-          <a:solidFill>
-            <a:srgbClr val="2563EB"/>
-          </a:solidFill>
-          <a:ln>
-            <a:noFill/>
-          </a:ln>
-        </p:spPr>
-        <p:style>
-          <a:lnRef idx="1">
-            <a:schemeClr val="accent1"/>
-          </a:lnRef>
-          <a:fillRef idx="3">
-            <a:schemeClr val="accent1"/>
-          </a:fillRef>
-          <a:effectRef idx="2">
-            <a:schemeClr val="accent1"/>
-          </a:effectRef>
-          <a:fontRef idx="minor">
-            <a:schemeClr val="lt1"/>
-          </a:fontRef>
-        </p:style>
-        <p:txBody>
-          <a:bodyPr rtlCol="0" anchor="ctr" wrap="square" tIns="54864" bIns="54864"/>
-          <a:lstStyle/>
-          <a:p>
-            <a:pPr algn="ctr"/>
-            <a:r>
-              <a:rPr sz="2200" b="1">
-                <a:solidFill>
-                  <a:srgbClr val="FFFFFF"/>
-                </a:solidFill>
-                <a:latin typeface="Noto Sans JP"/>
-              </a:rPr>
-              <a:t>事務・法務</a:t>
-            </a:r>
-          </a:p>
-        </p:txBody>
-      </p:sp>
-      <p:sp>
-        <p:nvSpPr>
-          <p:cNvPr id="13" name="Rounded Rectangle 12"/>
-          <p:cNvSpPr/>
-          <p:nvPr/>
-        </p:nvSpPr>
-        <p:spPr>
-          <a:xfrm>
-            <a:off x="7232903" y="3337560"/>
-            <a:ext cx="2194560" cy="731520"/>
-          </a:xfrm>
-          <a:prstGeom prst="roundRect">
-            <a:avLst>
-              <a:gd name="adj" fmla="val 5000"/>
-            </a:avLst>
-          </a:prstGeom>
-          <a:solidFill>
-            <a:srgbClr val="F3F4F6"/>
-          </a:solidFill>
-          <a:ln>
-            <a:noFill/>
-          </a:ln>
-        </p:spPr>
-        <p:style>
-          <a:lnRef idx="1">
-            <a:schemeClr val="accent1"/>
-          </a:lnRef>
-          <a:fillRef idx="3">
-            <a:schemeClr val="accent1"/>
-          </a:fillRef>
-          <a:effectRef idx="2">
-            <a:schemeClr val="accent1"/>
-          </a:effectRef>
-          <a:fontRef idx="minor">
-            <a:schemeClr val="lt1"/>
-          </a:fontRef>
-        </p:style>
-        <p:txBody>
-          <a:bodyPr rtlCol="0" anchor="ctr" wrap="square" tIns="54864" bIns="54864"/>
-          <a:lstStyle/>
-          <a:p>
-            <a:pPr algn="ctr"/>
-            <a:r>
-              <a:rPr sz="1400" b="0">
-                <a:solidFill>
-                  <a:srgbClr val="1C3557"/>
-                </a:solidFill>
-                <a:latin typeface="Noto Sans JP"/>
-              </a:rPr>
-              <a:t>管理・記録</a:t>
-            </a:r>
-          </a:p>
-        </p:txBody>
-      </p:sp>
-      <p:sp>
-        <p:nvSpPr>
-          <p:cNvPr id="14" name="Rounded Rectangle 13"/>
-          <p:cNvSpPr/>
-          <p:nvPr/>
-        </p:nvSpPr>
-        <p:spPr>
-          <a:xfrm>
-            <a:off x="9491472" y="1828800"/>
-            <a:ext cx="2194560" cy="1463040"/>
-          </a:xfrm>
-          <a:prstGeom prst="roundRect">
-            <a:avLst>
-              <a:gd name="adj" fmla="val 5000"/>
-            </a:avLst>
-          </a:prstGeom>
-          <a:solidFill>
-            <a:srgbClr val="2563EB"/>
-          </a:solidFill>
-          <a:ln>
-            <a:noFill/>
-          </a:ln>
-        </p:spPr>
-        <p:style>
-          <a:lnRef idx="1">
-            <a:schemeClr val="accent1"/>
-          </a:lnRef>
-          <a:fillRef idx="3">
-            <a:schemeClr val="accent1"/>
-          </a:fillRef>
-          <a:effectRef idx="2">
-            <a:schemeClr val="accent1"/>
-          </a:effectRef>
-          <a:fontRef idx="minor">
-            <a:schemeClr val="lt1"/>
-          </a:fontRef>
-        </p:style>
-        <p:txBody>
-          <a:bodyPr rtlCol="0" anchor="ctr" wrap="square" tIns="54864" bIns="54864"/>
-          <a:lstStyle/>
-          <a:p>
-            <a:pPr algn="ctr"/>
-            <a:r>
-              <a:rPr sz="2200" b="1">
-                <a:solidFill>
-                  <a:srgbClr val="FFFFFF"/>
-                </a:solidFill>
-                <a:latin typeface="Noto Sans JP"/>
-              </a:rPr>
-              <a:t>戦略</a:t>
-            </a:r>
-          </a:p>
-        </p:txBody>
-      </p:sp>
-      <p:sp>
-        <p:nvSpPr>
-          <p:cNvPr id="15" name="Rounded Rectangle 14"/>
-          <p:cNvSpPr/>
-          <p:nvPr/>
-        </p:nvSpPr>
-        <p:spPr>
-          <a:xfrm>
-            <a:off x="9491472" y="3337560"/>
-            <a:ext cx="2194560" cy="731520"/>
-          </a:xfrm>
-          <a:prstGeom prst="roundRect">
-            <a:avLst>
-              <a:gd name="adj" fmla="val 5000"/>
-            </a:avLst>
-          </a:prstGeom>
-          <a:solidFill>
-            <a:srgbClr val="F3F4F6"/>
-          </a:solidFill>
-          <a:ln>
-            <a:noFill/>
-          </a:ln>
-        </p:spPr>
-        <p:style>
-          <a:lnRef idx="1">
-            <a:schemeClr val="accent1"/>
-          </a:lnRef>
-          <a:fillRef idx="3">
-            <a:schemeClr val="accent1"/>
-          </a:fillRef>
-          <a:effectRef idx="2">
-            <a:schemeClr val="accent1"/>
-          </a:effectRef>
-          <a:fontRef idx="minor">
-            <a:schemeClr val="lt1"/>
-          </a:fontRef>
-        </p:style>
-        <p:txBody>
-          <a:bodyPr rtlCol="0" anchor="ctr" wrap="square" tIns="54864" bIns="54864"/>
-          <a:lstStyle/>
-          <a:p>
-            <a:pPr algn="ctr"/>
-            <a:r>
-              <a:rPr sz="1400" b="0">
-                <a:solidFill>
-                  <a:srgbClr val="1C3557"/>
-                </a:solidFill>
-                <a:latin typeface="Noto Sans JP"/>
-              </a:rPr>
-              <a:t>リサーチ・分析</a:t>
-            </a:r>
-          </a:p>
-        </p:txBody>
-      </p:sp>
-      <p:sp>
-        <p:nvSpPr>
-          <p:cNvPr id="16" name="Rounded Rectangle 15"/>
-          <p:cNvSpPr/>
-          <p:nvPr/>
-        </p:nvSpPr>
-        <p:spPr>
-          <a:xfrm>
-            <a:off x="457200" y="4572000"/>
-            <a:ext cx="11274552" cy="1463040"/>
-          </a:xfrm>
-          <a:prstGeom prst="roundRect">
-            <a:avLst>
-              <a:gd name="adj" fmla="val 5000"/>
-            </a:avLst>
-          </a:prstGeom>
-          <a:solidFill>
-            <a:srgbClr val="DBEAFE"/>
-          </a:solidFill>
-          <a:ln>
-            <a:noFill/>
-          </a:ln>
-        </p:spPr>
-        <p:style>
-          <a:lnRef idx="1">
-            <a:schemeClr val="accent1"/>
-          </a:lnRef>
-          <a:fillRef idx="3">
-            <a:schemeClr val="accent1"/>
-          </a:fillRef>
-          <a:effectRef idx="2">
-            <a:schemeClr val="accent1"/>
-          </a:effectRef>
-          <a:fontRef idx="minor">
-            <a:schemeClr val="lt1"/>
-          </a:fontRef>
-        </p:style>
-        <p:txBody>
-          <a:bodyPr rtlCol="0" anchor="ctr" wrap="square" tIns="54864" bIns="54864"/>
-          <a:lstStyle/>
-          <a:p>
-            <a:pPr algn="ctr"/>
-            <a:r>
-              <a:rPr sz="2600" b="1">
-                <a:solidFill>
-                  <a:srgbClr val="2563EB"/>
-                </a:solidFill>
-                <a:latin typeface="Noto Sans JP"/>
-              </a:rPr>
-              <a:t>事業の全部の仕事を 5人で網羅している</a:t>
+          </a:p>
+        </p:txBody>
+      </p:sp>
+      <p:sp>
+        <p:nvSpPr>
+          <p:cNvPr id="8" name="Rectangle 7"/>
+          <p:cNvSpPr/>
+          <p:nvPr/>
+        </p:nvSpPr>
+        <p:spPr>
+          <a:xfrm>
+            <a:off x="10972800" y="6492240"/>
+            <a:ext cx="1005840" cy="274320"/>
+          </a:xfrm>
+          <a:prstGeom prst="rect">
+            <a:avLst/>
+          </a:prstGeom>
+          <a:noFill/>
+          <a:ln>
+            <a:noFill/>
+          </a:ln>
+        </p:spPr>
+        <p:style>
+          <a:lnRef idx="1">
+            <a:schemeClr val="accent1"/>
+          </a:lnRef>
+          <a:fillRef idx="3">
+            <a:schemeClr val="accent1"/>
+          </a:fillRef>
+          <a:effectRef idx="2">
+            <a:schemeClr val="accent1"/>
+          </a:effectRef>
+          <a:fontRef idx="minor">
+            <a:schemeClr val="lt1"/>
+          </a:fontRef>
+        </p:style>
+        <p:txBody>
+          <a:bodyPr rtlCol="0" anchor="t" wrap="square" tIns="54864" bIns="54864"/>
+          <a:lstStyle/>
+          <a:p>
+            <a:pPr algn="r"/>
+            <a:r>
+              <a:rPr sz="1100" b="0">
+                <a:solidFill>
+                  <a:srgbClr val="6B7280"/>
+                </a:solidFill>
+                <a:latin typeface="Noto Sans JP"/>
+              </a:rPr>
+              <a:t>8 / 12</a:t>
             </a:r>
           </a:p>
         </p:txBody>
@@ -13865,7 +12650,7 @@
                 </a:solidFill>
                 <a:latin typeface="Noto Sans JP"/>
               </a:rPr>
-              <a:t>9 / 14</a:t>
+              <a:t>9 / 12</a:t>
             </a:r>
           </a:p>
         </p:txBody>
@@ -13915,7 +12700,7 @@
                 </a:solidFill>
                 <a:latin typeface="Noto Sans JP"/>
               </a:rPr>
-              <a:t>今こう使ってます</a:t>
+              <a:t>半期 ¥6,710,000、4案件すべてにAI社員が動いている</a:t>
             </a:r>
           </a:p>
         </p:txBody>
@@ -13965,14 +12750,638 @@
       </p:sp>
       <p:sp>
         <p:nvSpPr>
-          <p:cNvPr id="6" name="Rounded Rectangle 5"/>
-          <p:cNvSpPr/>
-          <p:nvPr/>
-        </p:nvSpPr>
-        <p:spPr>
-          <a:xfrm>
-            <a:off x="457200" y="1371600"/>
-            <a:ext cx="2194560" cy="4297680"/>
+          <p:cNvPr id="6" name="Rectangle 5"/>
+          <p:cNvSpPr/>
+          <p:nvPr/>
+        </p:nvSpPr>
+        <p:spPr>
+          <a:xfrm>
+            <a:off x="457200" y="1554480"/>
+            <a:ext cx="4572000" cy="640080"/>
+          </a:xfrm>
+          <a:prstGeom prst="rect">
+            <a:avLst/>
+          </a:prstGeom>
+          <a:solidFill>
+            <a:srgbClr val="1C3557"/>
+          </a:solidFill>
+          <a:ln>
+            <a:noFill/>
+          </a:ln>
+        </p:spPr>
+        <p:style>
+          <a:lnRef idx="1">
+            <a:schemeClr val="accent1"/>
+          </a:lnRef>
+          <a:fillRef idx="3">
+            <a:schemeClr val="accent1"/>
+          </a:fillRef>
+          <a:effectRef idx="2">
+            <a:schemeClr val="accent1"/>
+          </a:effectRef>
+          <a:fontRef idx="minor">
+            <a:schemeClr val="lt1"/>
+          </a:fontRef>
+        </p:style>
+        <p:txBody>
+          <a:bodyPr rtlCol="0" anchor="ctr" wrap="square" tIns="54864" bIns="54864"/>
+          <a:lstStyle/>
+          <a:p>
+            <a:pPr algn="ctr"/>
+            <a:r>
+              <a:rPr sz="1600" b="1">
+                <a:solidFill>
+                  <a:srgbClr val="FFFFFF"/>
+                </a:solidFill>
+                <a:latin typeface="Noto Sans JP"/>
+              </a:rPr>
+              <a:t>案件</a:t>
+            </a:r>
+          </a:p>
+        </p:txBody>
+      </p:sp>
+      <p:sp>
+        <p:nvSpPr>
+          <p:cNvPr id="7" name="Rectangle 6"/>
+          <p:cNvSpPr/>
+          <p:nvPr/>
+        </p:nvSpPr>
+        <p:spPr>
+          <a:xfrm>
+            <a:off x="5074920" y="1554480"/>
+            <a:ext cx="2743200" cy="640080"/>
+          </a:xfrm>
+          <a:prstGeom prst="rect">
+            <a:avLst/>
+          </a:prstGeom>
+          <a:solidFill>
+            <a:srgbClr val="1C3557"/>
+          </a:solidFill>
+          <a:ln>
+            <a:noFill/>
+          </a:ln>
+        </p:spPr>
+        <p:style>
+          <a:lnRef idx="1">
+            <a:schemeClr val="accent1"/>
+          </a:lnRef>
+          <a:fillRef idx="3">
+            <a:schemeClr val="accent1"/>
+          </a:fillRef>
+          <a:effectRef idx="2">
+            <a:schemeClr val="accent1"/>
+          </a:effectRef>
+          <a:fontRef idx="minor">
+            <a:schemeClr val="lt1"/>
+          </a:fontRef>
+        </p:style>
+        <p:txBody>
+          <a:bodyPr rtlCol="0" anchor="ctr" wrap="square" tIns="54864" bIns="54864"/>
+          <a:lstStyle/>
+          <a:p>
+            <a:pPr algn="ctr"/>
+            <a:r>
+              <a:rPr sz="1600" b="1">
+                <a:solidFill>
+                  <a:srgbClr val="FFFFFF"/>
+                </a:solidFill>
+                <a:latin typeface="Noto Sans JP"/>
+              </a:rPr>
+              <a:t>売上 (税抜)</a:t>
+            </a:r>
+          </a:p>
+        </p:txBody>
+      </p:sp>
+      <p:sp>
+        <p:nvSpPr>
+          <p:cNvPr id="8" name="Rectangle 7"/>
+          <p:cNvSpPr/>
+          <p:nvPr/>
+        </p:nvSpPr>
+        <p:spPr>
+          <a:xfrm>
+            <a:off x="457200" y="2267712"/>
+            <a:ext cx="4572000" cy="640080"/>
+          </a:xfrm>
+          <a:prstGeom prst="rect">
+            <a:avLst/>
+          </a:prstGeom>
+          <a:solidFill>
+            <a:srgbClr val="F3F4F6"/>
+          </a:solidFill>
+          <a:ln>
+            <a:noFill/>
+          </a:ln>
+        </p:spPr>
+        <p:style>
+          <a:lnRef idx="1">
+            <a:schemeClr val="accent1"/>
+          </a:lnRef>
+          <a:fillRef idx="3">
+            <a:schemeClr val="accent1"/>
+          </a:fillRef>
+          <a:effectRef idx="2">
+            <a:schemeClr val="accent1"/>
+          </a:effectRef>
+          <a:fontRef idx="minor">
+            <a:schemeClr val="lt1"/>
+          </a:fontRef>
+        </p:style>
+        <p:txBody>
+          <a:bodyPr rtlCol="0" anchor="ctr" wrap="square" tIns="54864" bIns="54864"/>
+          <a:lstStyle/>
+          <a:p>
+            <a:pPr algn="l"/>
+            <a:r>
+              <a:rPr sz="1600" b="0">
+                <a:solidFill>
+                  <a:srgbClr val="1C3557"/>
+                </a:solidFill>
+                <a:latin typeface="Noto Sans JP"/>
+              </a:rPr>
+              <a:t>NTTネクシア</a:t>
+            </a:r>
+          </a:p>
+        </p:txBody>
+      </p:sp>
+      <p:sp>
+        <p:nvSpPr>
+          <p:cNvPr id="9" name="Rectangle 8"/>
+          <p:cNvSpPr/>
+          <p:nvPr/>
+        </p:nvSpPr>
+        <p:spPr>
+          <a:xfrm>
+            <a:off x="5074920" y="2267712"/>
+            <a:ext cx="2743200" cy="640080"/>
+          </a:xfrm>
+          <a:prstGeom prst="rect">
+            <a:avLst/>
+          </a:prstGeom>
+          <a:solidFill>
+            <a:srgbClr val="F3F4F6"/>
+          </a:solidFill>
+          <a:ln>
+            <a:noFill/>
+          </a:ln>
+        </p:spPr>
+        <p:style>
+          <a:lnRef idx="1">
+            <a:schemeClr val="accent1"/>
+          </a:lnRef>
+          <a:fillRef idx="3">
+            <a:schemeClr val="accent1"/>
+          </a:fillRef>
+          <a:effectRef idx="2">
+            <a:schemeClr val="accent1"/>
+          </a:effectRef>
+          <a:fontRef idx="minor">
+            <a:schemeClr val="lt1"/>
+          </a:fontRef>
+        </p:style>
+        <p:txBody>
+          <a:bodyPr rtlCol="0" anchor="ctr" wrap="square" tIns="54864" bIns="54864"/>
+          <a:lstStyle/>
+          <a:p>
+            <a:pPr algn="r"/>
+            <a:r>
+              <a:rPr sz="1600" b="0">
+                <a:solidFill>
+                  <a:srgbClr val="1C3557"/>
+                </a:solidFill>
+                <a:latin typeface="Noto Sans JP"/>
+              </a:rPr>
+              <a:t>¥5,000,000</a:t>
+            </a:r>
+          </a:p>
+        </p:txBody>
+      </p:sp>
+      <p:sp>
+        <p:nvSpPr>
+          <p:cNvPr id="10" name="Rectangle 9"/>
+          <p:cNvSpPr/>
+          <p:nvPr/>
+        </p:nvSpPr>
+        <p:spPr>
+          <a:xfrm>
+            <a:off x="457200" y="2980944"/>
+            <a:ext cx="4572000" cy="640080"/>
+          </a:xfrm>
+          <a:prstGeom prst="rect">
+            <a:avLst/>
+          </a:prstGeom>
+          <a:solidFill>
+            <a:srgbClr val="F3F4F6"/>
+          </a:solidFill>
+          <a:ln>
+            <a:noFill/>
+          </a:ln>
+        </p:spPr>
+        <p:style>
+          <a:lnRef idx="1">
+            <a:schemeClr val="accent1"/>
+          </a:lnRef>
+          <a:fillRef idx="3">
+            <a:schemeClr val="accent1"/>
+          </a:fillRef>
+          <a:effectRef idx="2">
+            <a:schemeClr val="accent1"/>
+          </a:effectRef>
+          <a:fontRef idx="minor">
+            <a:schemeClr val="lt1"/>
+          </a:fontRef>
+        </p:style>
+        <p:txBody>
+          <a:bodyPr rtlCol="0" anchor="ctr" wrap="square" tIns="54864" bIns="54864"/>
+          <a:lstStyle/>
+          <a:p>
+            <a:pPr algn="l"/>
+            <a:r>
+              <a:rPr sz="1600" b="0">
+                <a:solidFill>
+                  <a:srgbClr val="1C3557"/>
+                </a:solidFill>
+                <a:latin typeface="Noto Sans JP"/>
+              </a:rPr>
+              <a:t>中西製作所</a:t>
+            </a:r>
+          </a:p>
+        </p:txBody>
+      </p:sp>
+      <p:sp>
+        <p:nvSpPr>
+          <p:cNvPr id="11" name="Rectangle 10"/>
+          <p:cNvSpPr/>
+          <p:nvPr/>
+        </p:nvSpPr>
+        <p:spPr>
+          <a:xfrm>
+            <a:off x="5074920" y="2980944"/>
+            <a:ext cx="2743200" cy="640080"/>
+          </a:xfrm>
+          <a:prstGeom prst="rect">
+            <a:avLst/>
+          </a:prstGeom>
+          <a:solidFill>
+            <a:srgbClr val="F3F4F6"/>
+          </a:solidFill>
+          <a:ln>
+            <a:noFill/>
+          </a:ln>
+        </p:spPr>
+        <p:style>
+          <a:lnRef idx="1">
+            <a:schemeClr val="accent1"/>
+          </a:lnRef>
+          <a:fillRef idx="3">
+            <a:schemeClr val="accent1"/>
+          </a:fillRef>
+          <a:effectRef idx="2">
+            <a:schemeClr val="accent1"/>
+          </a:effectRef>
+          <a:fontRef idx="minor">
+            <a:schemeClr val="lt1"/>
+          </a:fontRef>
+        </p:style>
+        <p:txBody>
+          <a:bodyPr rtlCol="0" anchor="ctr" wrap="square" tIns="54864" bIns="54864"/>
+          <a:lstStyle/>
+          <a:p>
+            <a:pPr algn="r"/>
+            <a:r>
+              <a:rPr sz="1600" b="0">
+                <a:solidFill>
+                  <a:srgbClr val="1C3557"/>
+                </a:solidFill>
+                <a:latin typeface="Noto Sans JP"/>
+              </a:rPr>
+              <a:t>¥1,000,000</a:t>
+            </a:r>
+          </a:p>
+        </p:txBody>
+      </p:sp>
+      <p:sp>
+        <p:nvSpPr>
+          <p:cNvPr id="12" name="Rectangle 11"/>
+          <p:cNvSpPr/>
+          <p:nvPr/>
+        </p:nvSpPr>
+        <p:spPr>
+          <a:xfrm>
+            <a:off x="457200" y="3694176"/>
+            <a:ext cx="4572000" cy="640080"/>
+          </a:xfrm>
+          <a:prstGeom prst="rect">
+            <a:avLst/>
+          </a:prstGeom>
+          <a:solidFill>
+            <a:srgbClr val="F3F4F6"/>
+          </a:solidFill>
+          <a:ln>
+            <a:noFill/>
+          </a:ln>
+        </p:spPr>
+        <p:style>
+          <a:lnRef idx="1">
+            <a:schemeClr val="accent1"/>
+          </a:lnRef>
+          <a:fillRef idx="3">
+            <a:schemeClr val="accent1"/>
+          </a:fillRef>
+          <a:effectRef idx="2">
+            <a:schemeClr val="accent1"/>
+          </a:effectRef>
+          <a:fontRef idx="minor">
+            <a:schemeClr val="lt1"/>
+          </a:fontRef>
+        </p:style>
+        <p:txBody>
+          <a:bodyPr rtlCol="0" anchor="ctr" wrap="square" tIns="54864" bIns="54864"/>
+          <a:lstStyle/>
+          <a:p>
+            <a:pPr algn="l"/>
+            <a:r>
+              <a:rPr sz="1600" b="0">
+                <a:solidFill>
+                  <a:srgbClr val="1C3557"/>
+                </a:solidFill>
+                <a:latin typeface="Noto Sans JP"/>
+              </a:rPr>
+              <a:t>中部キリンビバレッジ</a:t>
+            </a:r>
+          </a:p>
+        </p:txBody>
+      </p:sp>
+      <p:sp>
+        <p:nvSpPr>
+          <p:cNvPr id="13" name="Rectangle 12"/>
+          <p:cNvSpPr/>
+          <p:nvPr/>
+        </p:nvSpPr>
+        <p:spPr>
+          <a:xfrm>
+            <a:off x="5074920" y="3694176"/>
+            <a:ext cx="2743200" cy="640080"/>
+          </a:xfrm>
+          <a:prstGeom prst="rect">
+            <a:avLst/>
+          </a:prstGeom>
+          <a:solidFill>
+            <a:srgbClr val="F3F4F6"/>
+          </a:solidFill>
+          <a:ln>
+            <a:noFill/>
+          </a:ln>
+        </p:spPr>
+        <p:style>
+          <a:lnRef idx="1">
+            <a:schemeClr val="accent1"/>
+          </a:lnRef>
+          <a:fillRef idx="3">
+            <a:schemeClr val="accent1"/>
+          </a:fillRef>
+          <a:effectRef idx="2">
+            <a:schemeClr val="accent1"/>
+          </a:effectRef>
+          <a:fontRef idx="minor">
+            <a:schemeClr val="lt1"/>
+          </a:fontRef>
+        </p:style>
+        <p:txBody>
+          <a:bodyPr rtlCol="0" anchor="ctr" wrap="square" tIns="54864" bIns="54864"/>
+          <a:lstStyle/>
+          <a:p>
+            <a:pPr algn="r"/>
+            <a:r>
+              <a:rPr sz="1600" b="0">
+                <a:solidFill>
+                  <a:srgbClr val="1C3557"/>
+                </a:solidFill>
+                <a:latin typeface="Noto Sans JP"/>
+              </a:rPr>
+              <a:t>¥450,000</a:t>
+            </a:r>
+          </a:p>
+        </p:txBody>
+      </p:sp>
+      <p:sp>
+        <p:nvSpPr>
+          <p:cNvPr id="14" name="Rectangle 13"/>
+          <p:cNvSpPr/>
+          <p:nvPr/>
+        </p:nvSpPr>
+        <p:spPr>
+          <a:xfrm>
+            <a:off x="457200" y="4407408"/>
+            <a:ext cx="4572000" cy="640080"/>
+          </a:xfrm>
+          <a:prstGeom prst="rect">
+            <a:avLst/>
+          </a:prstGeom>
+          <a:solidFill>
+            <a:srgbClr val="F3F4F6"/>
+          </a:solidFill>
+          <a:ln>
+            <a:noFill/>
+          </a:ln>
+        </p:spPr>
+        <p:style>
+          <a:lnRef idx="1">
+            <a:schemeClr val="accent1"/>
+          </a:lnRef>
+          <a:fillRef idx="3">
+            <a:schemeClr val="accent1"/>
+          </a:fillRef>
+          <a:effectRef idx="2">
+            <a:schemeClr val="accent1"/>
+          </a:effectRef>
+          <a:fontRef idx="minor">
+            <a:schemeClr val="lt1"/>
+          </a:fontRef>
+        </p:style>
+        <p:txBody>
+          <a:bodyPr rtlCol="0" anchor="ctr" wrap="square" tIns="54864" bIns="54864"/>
+          <a:lstStyle/>
+          <a:p>
+            <a:pPr algn="l"/>
+            <a:r>
+              <a:rPr sz="1600" b="0">
+                <a:solidFill>
+                  <a:srgbClr val="1C3557"/>
+                </a:solidFill>
+                <a:latin typeface="Noto Sans JP"/>
+              </a:rPr>
+              <a:t>ブロードリンク</a:t>
+            </a:r>
+          </a:p>
+        </p:txBody>
+      </p:sp>
+      <p:sp>
+        <p:nvSpPr>
+          <p:cNvPr id="15" name="Rectangle 14"/>
+          <p:cNvSpPr/>
+          <p:nvPr/>
+        </p:nvSpPr>
+        <p:spPr>
+          <a:xfrm>
+            <a:off x="5074920" y="4407408"/>
+            <a:ext cx="2743200" cy="640080"/>
+          </a:xfrm>
+          <a:prstGeom prst="rect">
+            <a:avLst/>
+          </a:prstGeom>
+          <a:solidFill>
+            <a:srgbClr val="F3F4F6"/>
+          </a:solidFill>
+          <a:ln>
+            <a:noFill/>
+          </a:ln>
+        </p:spPr>
+        <p:style>
+          <a:lnRef idx="1">
+            <a:schemeClr val="accent1"/>
+          </a:lnRef>
+          <a:fillRef idx="3">
+            <a:schemeClr val="accent1"/>
+          </a:fillRef>
+          <a:effectRef idx="2">
+            <a:schemeClr val="accent1"/>
+          </a:effectRef>
+          <a:fontRef idx="minor">
+            <a:schemeClr val="lt1"/>
+          </a:fontRef>
+        </p:style>
+        <p:txBody>
+          <a:bodyPr rtlCol="0" anchor="ctr" wrap="square" tIns="54864" bIns="54864"/>
+          <a:lstStyle/>
+          <a:p>
+            <a:pPr algn="r"/>
+            <a:r>
+              <a:rPr sz="1600" b="0">
+                <a:solidFill>
+                  <a:srgbClr val="1C3557"/>
+                </a:solidFill>
+                <a:latin typeface="Noto Sans JP"/>
+              </a:rPr>
+              <a:t>¥260,000</a:t>
+            </a:r>
+          </a:p>
+        </p:txBody>
+      </p:sp>
+      <p:sp>
+        <p:nvSpPr>
+          <p:cNvPr id="16" name="Rectangle 15"/>
+          <p:cNvSpPr/>
+          <p:nvPr/>
+        </p:nvSpPr>
+        <p:spPr>
+          <a:xfrm>
+            <a:off x="457200" y="5120640"/>
+            <a:ext cx="4572000" cy="640080"/>
+          </a:xfrm>
+          <a:prstGeom prst="rect">
+            <a:avLst/>
+          </a:prstGeom>
+          <a:solidFill>
+            <a:srgbClr val="2563EB"/>
+          </a:solidFill>
+          <a:ln>
+            <a:noFill/>
+          </a:ln>
+        </p:spPr>
+        <p:style>
+          <a:lnRef idx="1">
+            <a:schemeClr val="accent1"/>
+          </a:lnRef>
+          <a:fillRef idx="3">
+            <a:schemeClr val="accent1"/>
+          </a:fillRef>
+          <a:effectRef idx="2">
+            <a:schemeClr val="accent1"/>
+          </a:effectRef>
+          <a:fontRef idx="minor">
+            <a:schemeClr val="lt1"/>
+          </a:fontRef>
+        </p:style>
+        <p:txBody>
+          <a:bodyPr rtlCol="0" anchor="ctr" wrap="square" tIns="54864" bIns="54864"/>
+          <a:lstStyle/>
+          <a:p>
+            <a:pPr algn="l"/>
+            <a:r>
+              <a:rPr sz="1800" b="1">
+                <a:solidFill>
+                  <a:srgbClr val="FFFFFF"/>
+                </a:solidFill>
+                <a:latin typeface="Noto Sans JP"/>
+              </a:rPr>
+              <a:t>半期合計</a:t>
+            </a:r>
+          </a:p>
+        </p:txBody>
+      </p:sp>
+      <p:sp>
+        <p:nvSpPr>
+          <p:cNvPr id="17" name="Rectangle 16"/>
+          <p:cNvSpPr/>
+          <p:nvPr/>
+        </p:nvSpPr>
+        <p:spPr>
+          <a:xfrm>
+            <a:off x="5074920" y="5120640"/>
+            <a:ext cx="2743200" cy="640080"/>
+          </a:xfrm>
+          <a:prstGeom prst="rect">
+            <a:avLst/>
+          </a:prstGeom>
+          <a:solidFill>
+            <a:srgbClr val="2563EB"/>
+          </a:solidFill>
+          <a:ln>
+            <a:noFill/>
+          </a:ln>
+        </p:spPr>
+        <p:style>
+          <a:lnRef idx="1">
+            <a:schemeClr val="accent1"/>
+          </a:lnRef>
+          <a:fillRef idx="3">
+            <a:schemeClr val="accent1"/>
+          </a:fillRef>
+          <a:effectRef idx="2">
+            <a:schemeClr val="accent1"/>
+          </a:effectRef>
+          <a:fontRef idx="minor">
+            <a:schemeClr val="lt1"/>
+          </a:fontRef>
+        </p:style>
+        <p:txBody>
+          <a:bodyPr rtlCol="0" anchor="ctr" wrap="square" tIns="54864" bIns="54864"/>
+          <a:lstStyle/>
+          <a:p>
+            <a:pPr algn="r"/>
+            <a:r>
+              <a:rPr sz="1800" b="1">
+                <a:solidFill>
+                  <a:srgbClr val="FFFFFF"/>
+                </a:solidFill>
+                <a:latin typeface="Noto Sans JP"/>
+              </a:rPr>
+              <a:t>¥6,710,000</a:t>
+            </a:r>
+          </a:p>
+        </p:txBody>
+      </p:sp>
+      <p:sp>
+        <p:nvSpPr>
+          <p:cNvPr id="18" name="Rounded Rectangle 17"/>
+          <p:cNvSpPr/>
+          <p:nvPr/>
+        </p:nvSpPr>
+        <p:spPr>
+          <a:xfrm>
+            <a:off x="8229600" y="1554480"/>
+            <a:ext cx="3502152" cy="4206240"/>
           </a:xfrm>
           <a:prstGeom prst="roundRect">
             <a:avLst>
@@ -13980,60 +13389,6 @@
             </a:avLst>
           </a:prstGeom>
           <a:solidFill>
-            <a:srgbClr val="F3F4F6"/>
-          </a:solidFill>
-          <a:ln>
-            <a:noFill/>
-          </a:ln>
-        </p:spPr>
-        <p:style>
-          <a:lnRef idx="1">
-            <a:schemeClr val="accent1"/>
-          </a:lnRef>
-          <a:fillRef idx="3">
-            <a:schemeClr val="accent1"/>
-          </a:fillRef>
-          <a:effectRef idx="2">
-            <a:schemeClr val="accent1"/>
-          </a:effectRef>
-          <a:fontRef idx="minor">
-            <a:schemeClr val="lt1"/>
-          </a:fontRef>
-        </p:style>
-        <p:txBody>
-          <a:bodyPr rtlCol="0" anchor="t" wrap="square" tIns="54864" bIns="54864"/>
-          <a:lstStyle/>
-          <a:p>
-            <a:pPr algn="l"/>
-            <a:r>
-              <a:rPr sz="1100" b="0">
-                <a:solidFill>
-                  <a:srgbClr val="1C3557"/>
-                </a:solidFill>
-                <a:latin typeface="Noto Sans JP"/>
-              </a:rPr>
-              <a:t/>
-            </a:r>
-          </a:p>
-        </p:txBody>
-      </p:sp>
-      <p:sp>
-        <p:nvSpPr>
-          <p:cNvPr id="7" name="Rounded Rectangle 6"/>
-          <p:cNvSpPr/>
-          <p:nvPr/>
-        </p:nvSpPr>
-        <p:spPr>
-          <a:xfrm>
-            <a:off x="548640" y="1463040"/>
-            <a:ext cx="2011679" cy="640080"/>
-          </a:xfrm>
-          <a:prstGeom prst="roundRect">
-            <a:avLst>
-              <a:gd name="adj" fmla="val 5000"/>
-            </a:avLst>
-          </a:prstGeom>
-          <a:solidFill>
             <a:srgbClr val="2563EB"/>
           </a:solidFill>
           <a:ln>
@@ -14060,985 +13415,109 @@
           <a:p>
             <a:pPr algn="ctr"/>
             <a:r>
-              <a:rPr sz="1400" b="1">
+              <a:rPr sz="2200" b="1">
                 <a:solidFill>
                   <a:srgbClr val="FFFFFF"/>
                 </a:solidFill>
                 <a:latin typeface="Noto Sans JP"/>
               </a:rPr>
-              <a:t>マーケAI</a:t>
-            </a:r>
-          </a:p>
-        </p:txBody>
-      </p:sp>
-      <p:sp>
-        <p:nvSpPr>
-          <p:cNvPr id="8" name="Rectangle 7"/>
-          <p:cNvSpPr/>
-          <p:nvPr/>
-        </p:nvSpPr>
-        <p:spPr>
-          <a:xfrm>
-            <a:off x="594360" y="2240280"/>
-            <a:ext cx="1920240" cy="3337560"/>
-          </a:xfrm>
-          <a:prstGeom prst="rect">
-            <a:avLst/>
-          </a:prstGeom>
-          <a:noFill/>
-          <a:ln>
-            <a:noFill/>
-          </a:ln>
-        </p:spPr>
-        <p:style>
-          <a:lnRef idx="1">
-            <a:schemeClr val="accent1"/>
-          </a:lnRef>
-          <a:fillRef idx="3">
-            <a:schemeClr val="accent1"/>
-          </a:fillRef>
-          <a:effectRef idx="2">
-            <a:schemeClr val="accent1"/>
-          </a:effectRef>
-          <a:fontRef idx="minor">
-            <a:schemeClr val="lt1"/>
-          </a:fontRef>
-        </p:style>
-        <p:txBody>
-          <a:bodyPr rtlCol="0" anchor="t" wrap="square" tIns="54864" bIns="54864"/>
-          <a:lstStyle/>
-          <a:p>
-            <a:pPr algn="l"/>
-            <a:r>
-              <a:rPr sz="1100" b="0">
-                <a:solidFill>
-                  <a:srgbClr val="1C3557"/>
-                </a:solidFill>
-                <a:latin typeface="Noto Sans JP"/>
-              </a:rPr>
-              <a:t>✓ 展示会クリエイティブ</a:t>
-            </a:r>
-          </a:p>
-          <a:p>
-            <a:pPr algn="l"/>
-            <a:r>
-              <a:rPr sz="1100" b="0">
-                <a:solidFill>
-                  <a:srgbClr val="1C3557"/>
-                </a:solidFill>
-                <a:latin typeface="Noto Sans JP"/>
-              </a:rPr>
-              <a:t>✓ LINE配信シナリオ</a:t>
-            </a:r>
-          </a:p>
-          <a:p>
-            <a:pPr algn="l"/>
-            <a:r>
-              <a:rPr sz="1100" b="0">
-                <a:solidFill>
-                  <a:srgbClr val="1C3557"/>
-                </a:solidFill>
-                <a:latin typeface="Noto Sans JP"/>
-              </a:rPr>
-              <a:t>✓ SNS投稿生成</a:t>
-            </a:r>
-          </a:p>
-          <a:p>
-            <a:pPr algn="l"/>
-            <a:r>
-              <a:rPr sz="1100" b="0">
-                <a:solidFill>
-                  <a:srgbClr val="1C3557"/>
-                </a:solidFill>
-                <a:latin typeface="Noto Sans JP"/>
-              </a:rPr>
-              <a:t>✓ LP構成案・コピー</a:t>
-            </a:r>
-          </a:p>
-          <a:p>
-            <a:pPr algn="l"/>
-            <a:r>
-              <a:rPr sz="1100" b="0">
-                <a:solidFill>
-                  <a:srgbClr val="1C3557"/>
-                </a:solidFill>
-                <a:latin typeface="Noto Sans JP"/>
-              </a:rPr>
-              <a:t>✓ YouTube → SNS転記</a:t>
-            </a:r>
-          </a:p>
-        </p:txBody>
-      </p:sp>
-      <p:sp>
-        <p:nvSpPr>
-          <p:cNvPr id="9" name="Rounded Rectangle 8"/>
-          <p:cNvSpPr/>
-          <p:nvPr/>
-        </p:nvSpPr>
-        <p:spPr>
-          <a:xfrm>
-            <a:off x="2743200" y="1371600"/>
-            <a:ext cx="2194560" cy="4297680"/>
-          </a:xfrm>
-          <a:prstGeom prst="roundRect">
-            <a:avLst>
-              <a:gd name="adj" fmla="val 5000"/>
-            </a:avLst>
-          </a:prstGeom>
-          <a:solidFill>
-            <a:srgbClr val="F3F4F6"/>
-          </a:solidFill>
-          <a:ln>
-            <a:noFill/>
-          </a:ln>
-        </p:spPr>
-        <p:style>
-          <a:lnRef idx="1">
-            <a:schemeClr val="accent1"/>
-          </a:lnRef>
-          <a:fillRef idx="3">
-            <a:schemeClr val="accent1"/>
-          </a:fillRef>
-          <a:effectRef idx="2">
-            <a:schemeClr val="accent1"/>
-          </a:effectRef>
-          <a:fontRef idx="minor">
-            <a:schemeClr val="lt1"/>
-          </a:fontRef>
-        </p:style>
-        <p:txBody>
-          <a:bodyPr rtlCol="0" anchor="t" wrap="square" tIns="54864" bIns="54864"/>
-          <a:lstStyle/>
-          <a:p>
-            <a:pPr algn="l"/>
-            <a:r>
-              <a:rPr sz="1100" b="0">
-                <a:solidFill>
-                  <a:srgbClr val="1C3557"/>
+              <a:t>月換算</a:t>
+            </a:r>
+          </a:p>
+          <a:p>
+            <a:pPr algn="ctr"/>
+            <a:r>
+              <a:rPr sz="2200" b="1">
+                <a:solidFill>
+                  <a:srgbClr val="FFFFFF"/>
                 </a:solidFill>
                 <a:latin typeface="Noto Sans JP"/>
               </a:rPr>
               <a:t/>
             </a:r>
           </a:p>
-        </p:txBody>
-      </p:sp>
-      <p:sp>
-        <p:nvSpPr>
-          <p:cNvPr id="10" name="Rounded Rectangle 9"/>
-          <p:cNvSpPr/>
-          <p:nvPr/>
-        </p:nvSpPr>
-        <p:spPr>
-          <a:xfrm>
-            <a:off x="2834640" y="1463040"/>
-            <a:ext cx="2011679" cy="640080"/>
-          </a:xfrm>
-          <a:prstGeom prst="roundRect">
-            <a:avLst>
-              <a:gd name="adj" fmla="val 5000"/>
-            </a:avLst>
-          </a:prstGeom>
-          <a:solidFill>
-            <a:srgbClr val="2563EB"/>
-          </a:solidFill>
-          <a:ln>
-            <a:noFill/>
-          </a:ln>
-        </p:spPr>
-        <p:style>
-          <a:lnRef idx="1">
-            <a:schemeClr val="accent1"/>
-          </a:lnRef>
-          <a:fillRef idx="3">
-            <a:schemeClr val="accent1"/>
-          </a:fillRef>
-          <a:effectRef idx="2">
-            <a:schemeClr val="accent1"/>
-          </a:effectRef>
-          <a:fontRef idx="minor">
-            <a:schemeClr val="lt1"/>
-          </a:fontRef>
-        </p:style>
-        <p:txBody>
-          <a:bodyPr rtlCol="0" anchor="ctr" wrap="square" tIns="54864" bIns="54864"/>
-          <a:lstStyle/>
           <a:p>
             <a:pPr algn="ctr"/>
             <a:r>
-              <a:rPr sz="1400" b="1">
+              <a:rPr sz="2200" b="1">
                 <a:solidFill>
                   <a:srgbClr val="FFFFFF"/>
                 </a:solidFill>
                 <a:latin typeface="Noto Sans JP"/>
               </a:rPr>
-              <a:t>営業AI</a:t>
-            </a:r>
-          </a:p>
-        </p:txBody>
-      </p:sp>
-      <p:sp>
-        <p:nvSpPr>
-          <p:cNvPr id="11" name="Rectangle 10"/>
-          <p:cNvSpPr/>
-          <p:nvPr/>
-        </p:nvSpPr>
-        <p:spPr>
-          <a:xfrm>
-            <a:off x="2880360" y="2240280"/>
-            <a:ext cx="1920240" cy="3337560"/>
-          </a:xfrm>
-          <a:prstGeom prst="rect">
-            <a:avLst/>
-          </a:prstGeom>
-          <a:noFill/>
-          <a:ln>
-            <a:noFill/>
-          </a:ln>
-        </p:spPr>
-        <p:style>
-          <a:lnRef idx="1">
-            <a:schemeClr val="accent1"/>
-          </a:lnRef>
-          <a:fillRef idx="3">
-            <a:schemeClr val="accent1"/>
-          </a:fillRef>
-          <a:effectRef idx="2">
-            <a:schemeClr val="accent1"/>
-          </a:effectRef>
-          <a:fontRef idx="minor">
-            <a:schemeClr val="lt1"/>
-          </a:fontRef>
-        </p:style>
-        <p:txBody>
-          <a:bodyPr rtlCol="0" anchor="t" wrap="square" tIns="54864" bIns="54864"/>
-          <a:lstStyle/>
-          <a:p>
-            <a:pPr algn="l"/>
-            <a:r>
-              <a:rPr sz="1100" b="0">
-                <a:solidFill>
-                  <a:srgbClr val="1C3557"/>
-                </a:solidFill>
-                <a:latin typeface="Noto Sans JP"/>
-              </a:rPr>
-              <a:t>✓ 商談前ブリーフィング</a:t>
-            </a:r>
-          </a:p>
-          <a:p>
-            <a:pPr algn="l"/>
-            <a:r>
-              <a:rPr sz="1100" b="0">
-                <a:solidFill>
-                  <a:srgbClr val="1C3557"/>
-                </a:solidFill>
-                <a:latin typeface="Noto Sans JP"/>
-              </a:rPr>
-              <a:t>✓ 提案書骨子</a:t>
-            </a:r>
-          </a:p>
-          <a:p>
-            <a:pPr algn="l"/>
-            <a:r>
-              <a:rPr sz="1100" b="0">
-                <a:solidFill>
-                  <a:srgbClr val="1C3557"/>
-                </a:solidFill>
-                <a:latin typeface="Noto Sans JP"/>
-              </a:rPr>
-              <a:t>✓ フォローメール</a:t>
-            </a:r>
-          </a:p>
-          <a:p>
-            <a:pPr algn="l"/>
-            <a:r>
-              <a:rPr sz="1100" b="0">
-                <a:solidFill>
-                  <a:srgbClr val="1C3557"/>
-                </a:solidFill>
-                <a:latin typeface="Noto Sans JP"/>
-              </a:rPr>
-              <a:t>✓ 要件ヒアリング整理</a:t>
-            </a:r>
-          </a:p>
-          <a:p>
-            <a:pPr algn="l"/>
-            <a:r>
-              <a:rPr sz="1100" b="0">
-                <a:solidFill>
-                  <a:srgbClr val="1C3557"/>
-                </a:solidFill>
-                <a:latin typeface="Noto Sans JP"/>
-              </a:rPr>
-              <a:t>✓ 見積書作成</a:t>
-            </a:r>
-          </a:p>
-        </p:txBody>
-      </p:sp>
-      <p:sp>
-        <p:nvSpPr>
-          <p:cNvPr id="12" name="Rounded Rectangle 11"/>
-          <p:cNvSpPr/>
-          <p:nvPr/>
-        </p:nvSpPr>
-        <p:spPr>
-          <a:xfrm>
-            <a:off x="5029200" y="1371600"/>
-            <a:ext cx="2194560" cy="4297680"/>
-          </a:xfrm>
-          <a:prstGeom prst="roundRect">
-            <a:avLst>
-              <a:gd name="adj" fmla="val 5000"/>
-            </a:avLst>
-          </a:prstGeom>
-          <a:solidFill>
-            <a:srgbClr val="F3F4F6"/>
-          </a:solidFill>
-          <a:ln>
-            <a:noFill/>
-          </a:ln>
-        </p:spPr>
-        <p:style>
-          <a:lnRef idx="1">
-            <a:schemeClr val="accent1"/>
-          </a:lnRef>
-          <a:fillRef idx="3">
-            <a:schemeClr val="accent1"/>
-          </a:fillRef>
-          <a:effectRef idx="2">
-            <a:schemeClr val="accent1"/>
-          </a:effectRef>
-          <a:fontRef idx="minor">
-            <a:schemeClr val="lt1"/>
-          </a:fontRef>
-        </p:style>
-        <p:txBody>
-          <a:bodyPr rtlCol="0" anchor="t" wrap="square" tIns="54864" bIns="54864"/>
-          <a:lstStyle/>
-          <a:p>
-            <a:pPr algn="l"/>
-            <a:r>
-              <a:rPr sz="1100" b="0">
-                <a:solidFill>
-                  <a:srgbClr val="1C3557"/>
+              <a:t>¥464,000</a:t>
+            </a:r>
+          </a:p>
+          <a:p>
+            <a:pPr algn="ctr"/>
+            <a:r>
+              <a:rPr sz="2200" b="1">
+                <a:solidFill>
+                  <a:srgbClr val="FFFFFF"/>
                 </a:solidFill>
                 <a:latin typeface="Noto Sans JP"/>
               </a:rPr>
               <a:t/>
             </a:r>
           </a:p>
-        </p:txBody>
-      </p:sp>
-      <p:sp>
-        <p:nvSpPr>
-          <p:cNvPr id="13" name="Rounded Rectangle 12"/>
-          <p:cNvSpPr/>
-          <p:nvPr/>
-        </p:nvSpPr>
-        <p:spPr>
-          <a:xfrm>
-            <a:off x="5120640" y="1463040"/>
-            <a:ext cx="2011679" cy="640080"/>
-          </a:xfrm>
-          <a:prstGeom prst="roundRect">
-            <a:avLst>
-              <a:gd name="adj" fmla="val 5000"/>
-            </a:avLst>
-          </a:prstGeom>
-          <a:solidFill>
-            <a:srgbClr val="2563EB"/>
-          </a:solidFill>
-          <a:ln>
-            <a:noFill/>
-          </a:ln>
-        </p:spPr>
-        <p:style>
-          <a:lnRef idx="1">
-            <a:schemeClr val="accent1"/>
-          </a:lnRef>
-          <a:fillRef idx="3">
-            <a:schemeClr val="accent1"/>
-          </a:fillRef>
-          <a:effectRef idx="2">
-            <a:schemeClr val="accent1"/>
-          </a:effectRef>
-          <a:fontRef idx="minor">
-            <a:schemeClr val="lt1"/>
-          </a:fontRef>
-        </p:style>
-        <p:txBody>
-          <a:bodyPr rtlCol="0" anchor="ctr" wrap="square" tIns="54864" bIns="54864"/>
-          <a:lstStyle/>
           <a:p>
             <a:pPr algn="ctr"/>
             <a:r>
-              <a:rPr sz="1400" b="1">
+              <a:rPr sz="2200" b="1">
                 <a:solidFill>
                   <a:srgbClr val="FFFFFF"/>
                 </a:solidFill>
                 <a:latin typeface="Noto Sans JP"/>
               </a:rPr>
-              <a:t>デリバリーAI</a:t>
-            </a:r>
-          </a:p>
-        </p:txBody>
-      </p:sp>
-      <p:sp>
-        <p:nvSpPr>
-          <p:cNvPr id="14" name="Rectangle 13"/>
-          <p:cNvSpPr/>
-          <p:nvPr/>
-        </p:nvSpPr>
-        <p:spPr>
-          <a:xfrm>
-            <a:off x="5166360" y="2240280"/>
-            <a:ext cx="1920240" cy="3337560"/>
-          </a:xfrm>
-          <a:prstGeom prst="rect">
-            <a:avLst/>
-          </a:prstGeom>
-          <a:noFill/>
-          <a:ln>
-            <a:noFill/>
-          </a:ln>
-        </p:spPr>
-        <p:style>
-          <a:lnRef idx="1">
-            <a:schemeClr val="accent1"/>
-          </a:lnRef>
-          <a:fillRef idx="3">
-            <a:schemeClr val="accent1"/>
-          </a:fillRef>
-          <a:effectRef idx="2">
-            <a:schemeClr val="accent1"/>
-          </a:effectRef>
-          <a:fontRef idx="minor">
-            <a:schemeClr val="lt1"/>
-          </a:fontRef>
-        </p:style>
-        <p:txBody>
-          <a:bodyPr rtlCol="0" anchor="t" wrap="square" tIns="54864" bIns="54864"/>
-          <a:lstStyle/>
-          <a:p>
-            <a:pPr algn="l"/>
-            <a:r>
-              <a:rPr sz="1100" b="0">
-                <a:solidFill>
-                  <a:srgbClr val="1C3557"/>
-                </a:solidFill>
-                <a:latin typeface="Noto Sans JP"/>
-              </a:rPr>
-              <a:t>✓ NTT 研修200枚</a:t>
-            </a:r>
-          </a:p>
-          <a:p>
-            <a:pPr algn="l"/>
-            <a:r>
-              <a:rPr sz="1100" b="0">
-                <a:solidFill>
-                  <a:srgbClr val="1C3557"/>
-                </a:solidFill>
-                <a:latin typeface="Noto Sans JP"/>
-              </a:rPr>
-              <a:t>✓ 中西 Dify構築 (5h)</a:t>
-            </a:r>
-          </a:p>
-          <a:p>
-            <a:pPr algn="l"/>
-            <a:r>
-              <a:rPr sz="1100" b="0">
-                <a:solidFill>
-                  <a:srgbClr val="1C3557"/>
-                </a:solidFill>
-                <a:latin typeface="Noto Sans JP"/>
-              </a:rPr>
-              <a:t>✓ キリン 研修PM</a:t>
-            </a:r>
-          </a:p>
-          <a:p>
-            <a:pPr algn="l"/>
-            <a:r>
-              <a:rPr sz="1100" b="0">
-                <a:solidFill>
-                  <a:srgbClr val="1C3557"/>
-                </a:solidFill>
-                <a:latin typeface="Noto Sans JP"/>
-              </a:rPr>
-              <a:t>✓ ブロードリンク 省エネ</a:t>
-            </a:r>
-          </a:p>
-          <a:p>
-            <a:pPr algn="l"/>
-            <a:r>
-              <a:rPr sz="1100" b="0">
-                <a:solidFill>
-                  <a:srgbClr val="1C3557"/>
-                </a:solidFill>
-                <a:latin typeface="Noto Sans JP"/>
-              </a:rPr>
-              <a:t>✓ カリキュラム設計</a:t>
-            </a:r>
-          </a:p>
-        </p:txBody>
-      </p:sp>
-      <p:sp>
-        <p:nvSpPr>
-          <p:cNvPr id="15" name="Rounded Rectangle 14"/>
-          <p:cNvSpPr/>
-          <p:nvPr/>
-        </p:nvSpPr>
-        <p:spPr>
-          <a:xfrm>
-            <a:off x="7315200" y="1371600"/>
-            <a:ext cx="2194560" cy="4297680"/>
-          </a:xfrm>
-          <a:prstGeom prst="roundRect">
-            <a:avLst>
-              <a:gd name="adj" fmla="val 5000"/>
-            </a:avLst>
-          </a:prstGeom>
-          <a:solidFill>
-            <a:srgbClr val="F3F4F6"/>
-          </a:solidFill>
-          <a:ln>
-            <a:noFill/>
-          </a:ln>
-        </p:spPr>
-        <p:style>
-          <a:lnRef idx="1">
-            <a:schemeClr val="accent1"/>
-          </a:lnRef>
-          <a:fillRef idx="3">
-            <a:schemeClr val="accent1"/>
-          </a:fillRef>
-          <a:effectRef idx="2">
-            <a:schemeClr val="accent1"/>
-          </a:effectRef>
-          <a:fontRef idx="minor">
-            <a:schemeClr val="lt1"/>
-          </a:fontRef>
-        </p:style>
-        <p:txBody>
-          <a:bodyPr rtlCol="0" anchor="t" wrap="square" tIns="54864" bIns="54864"/>
-          <a:lstStyle/>
-          <a:p>
-            <a:pPr algn="l"/>
-            <a:r>
-              <a:rPr sz="1100" b="0">
-                <a:solidFill>
-                  <a:srgbClr val="1C3557"/>
+              <a:t>=</a:t>
+            </a:r>
+          </a:p>
+          <a:p>
+            <a:pPr algn="ctr"/>
+            <a:r>
+              <a:rPr sz="2200" b="1">
+                <a:solidFill>
+                  <a:srgbClr val="FFFFFF"/>
                 </a:solidFill>
                 <a:latin typeface="Noto Sans JP"/>
               </a:rPr>
               <a:t/>
             </a:r>
           </a:p>
-        </p:txBody>
-      </p:sp>
-      <p:sp>
-        <p:nvSpPr>
-          <p:cNvPr id="16" name="Rounded Rectangle 15"/>
-          <p:cNvSpPr/>
-          <p:nvPr/>
-        </p:nvSpPr>
-        <p:spPr>
-          <a:xfrm>
-            <a:off x="7406640" y="1463040"/>
-            <a:ext cx="2011679" cy="640080"/>
-          </a:xfrm>
-          <a:prstGeom prst="roundRect">
-            <a:avLst>
-              <a:gd name="adj" fmla="val 5000"/>
-            </a:avLst>
-          </a:prstGeom>
-          <a:solidFill>
-            <a:srgbClr val="2563EB"/>
-          </a:solidFill>
-          <a:ln>
-            <a:noFill/>
-          </a:ln>
-        </p:spPr>
-        <p:style>
-          <a:lnRef idx="1">
-            <a:schemeClr val="accent1"/>
-          </a:lnRef>
-          <a:fillRef idx="3">
-            <a:schemeClr val="accent1"/>
-          </a:fillRef>
-          <a:effectRef idx="2">
-            <a:schemeClr val="accent1"/>
-          </a:effectRef>
-          <a:fontRef idx="minor">
-            <a:schemeClr val="lt1"/>
-          </a:fontRef>
-        </p:style>
-        <p:txBody>
-          <a:bodyPr rtlCol="0" anchor="ctr" wrap="square" tIns="54864" bIns="54864"/>
-          <a:lstStyle/>
           <a:p>
             <a:pPr algn="ctr"/>
             <a:r>
-              <a:rPr sz="1400" b="1">
+              <a:rPr sz="2200" b="1">
                 <a:solidFill>
                   <a:srgbClr val="FFFFFF"/>
                 </a:solidFill>
                 <a:latin typeface="Noto Sans JP"/>
               </a:rPr>
-              <a:t>事務・法務AI</a:t>
-            </a:r>
-          </a:p>
-        </p:txBody>
-      </p:sp>
-      <p:sp>
-        <p:nvSpPr>
-          <p:cNvPr id="17" name="Rectangle 16"/>
-          <p:cNvSpPr/>
-          <p:nvPr/>
-        </p:nvSpPr>
-        <p:spPr>
-          <a:xfrm>
-            <a:off x="7452360" y="2240280"/>
-            <a:ext cx="1920240" cy="3337560"/>
-          </a:xfrm>
-          <a:prstGeom prst="rect">
-            <a:avLst/>
-          </a:prstGeom>
-          <a:noFill/>
-          <a:ln>
-            <a:noFill/>
-          </a:ln>
-        </p:spPr>
-        <p:style>
-          <a:lnRef idx="1">
-            <a:schemeClr val="accent1"/>
-          </a:lnRef>
-          <a:fillRef idx="3">
-            <a:schemeClr val="accent1"/>
-          </a:fillRef>
-          <a:effectRef idx="2">
-            <a:schemeClr val="accent1"/>
-          </a:effectRef>
-          <a:fontRef idx="minor">
-            <a:schemeClr val="lt1"/>
-          </a:fontRef>
-        </p:style>
-        <p:txBody>
-          <a:bodyPr rtlCol="0" anchor="t" wrap="square" tIns="54864" bIns="54864"/>
-          <a:lstStyle/>
-          <a:p>
-            <a:pPr algn="l"/>
-            <a:r>
-              <a:rPr sz="1100" b="0">
-                <a:solidFill>
-                  <a:srgbClr val="1C3557"/>
-                </a:solidFill>
-                <a:latin typeface="Noto Sans JP"/>
-              </a:rPr>
-              <a:t>✓ 契約書チェック</a:t>
-            </a:r>
-          </a:p>
-          <a:p>
-            <a:pPr algn="l"/>
-            <a:r>
-              <a:rPr sz="1100" b="0">
-                <a:solidFill>
-                  <a:srgbClr val="1C3557"/>
-                </a:solidFill>
-                <a:latin typeface="Noto Sans JP"/>
-              </a:rPr>
-              <a:t>✓ PL自動更新</a:t>
-            </a:r>
-          </a:p>
-          <a:p>
-            <a:pPr algn="l"/>
-            <a:r>
-              <a:rPr sz="1100" b="0">
-                <a:solidFill>
-                  <a:srgbClr val="1C3557"/>
-                </a:solidFill>
-                <a:latin typeface="Noto Sans JP"/>
-              </a:rPr>
-              <a:t>✓ 受信トレイ整理</a:t>
-            </a:r>
-          </a:p>
-          <a:p>
-            <a:pPr algn="l"/>
-            <a:r>
-              <a:rPr sz="1100" b="0">
-                <a:solidFill>
-                  <a:srgbClr val="1C3557"/>
-                </a:solidFill>
-                <a:latin typeface="Noto Sans JP"/>
-              </a:rPr>
-              <a:t>✓ 月次レポート</a:t>
-            </a:r>
-          </a:p>
-          <a:p>
-            <a:pPr algn="l"/>
-            <a:r>
-              <a:rPr sz="1100" b="0">
-                <a:solidFill>
-                  <a:srgbClr val="1C3557"/>
-                </a:solidFill>
-                <a:latin typeface="Noto Sans JP"/>
-              </a:rPr>
-              <a:t>✓ ツールコスト最適化</a:t>
-            </a:r>
-          </a:p>
-        </p:txBody>
-      </p:sp>
-      <p:sp>
-        <p:nvSpPr>
-          <p:cNvPr id="18" name="Rounded Rectangle 17"/>
-          <p:cNvSpPr/>
-          <p:nvPr/>
-        </p:nvSpPr>
-        <p:spPr>
-          <a:xfrm>
-            <a:off x="9601200" y="1371600"/>
-            <a:ext cx="2194560" cy="4297680"/>
-          </a:xfrm>
-          <a:prstGeom prst="roundRect">
-            <a:avLst>
-              <a:gd name="adj" fmla="val 5000"/>
-            </a:avLst>
-          </a:prstGeom>
-          <a:solidFill>
-            <a:srgbClr val="F3F4F6"/>
-          </a:solidFill>
-          <a:ln>
-            <a:noFill/>
-          </a:ln>
-        </p:spPr>
-        <p:style>
-          <a:lnRef idx="1">
-            <a:schemeClr val="accent1"/>
-          </a:lnRef>
-          <a:fillRef idx="3">
-            <a:schemeClr val="accent1"/>
-          </a:fillRef>
-          <a:effectRef idx="2">
-            <a:schemeClr val="accent1"/>
-          </a:effectRef>
-          <a:fontRef idx="minor">
-            <a:schemeClr val="lt1"/>
-          </a:fontRef>
-        </p:style>
-        <p:txBody>
-          <a:bodyPr rtlCol="0" anchor="t" wrap="square" tIns="54864" bIns="54864"/>
-          <a:lstStyle/>
-          <a:p>
-            <a:pPr algn="l"/>
-            <a:r>
-              <a:rPr sz="1100" b="0">
-                <a:solidFill>
-                  <a:srgbClr val="1C3557"/>
-                </a:solidFill>
-                <a:latin typeface="Noto Sans JP"/>
-              </a:rPr>
-              <a:t/>
-            </a:r>
-          </a:p>
-        </p:txBody>
-      </p:sp>
-      <p:sp>
-        <p:nvSpPr>
-          <p:cNvPr id="19" name="Rounded Rectangle 18"/>
-          <p:cNvSpPr/>
-          <p:nvPr/>
-        </p:nvSpPr>
-        <p:spPr>
-          <a:xfrm>
-            <a:off x="9692640" y="1463040"/>
-            <a:ext cx="2011679" cy="640080"/>
-          </a:xfrm>
-          <a:prstGeom prst="roundRect">
-            <a:avLst>
-              <a:gd name="adj" fmla="val 5000"/>
-            </a:avLst>
-          </a:prstGeom>
-          <a:solidFill>
-            <a:srgbClr val="2563EB"/>
-          </a:solidFill>
-          <a:ln>
-            <a:noFill/>
-          </a:ln>
-        </p:spPr>
-        <p:style>
-          <a:lnRef idx="1">
-            <a:schemeClr val="accent1"/>
-          </a:lnRef>
-          <a:fillRef idx="3">
-            <a:schemeClr val="accent1"/>
-          </a:fillRef>
-          <a:effectRef idx="2">
-            <a:schemeClr val="accent1"/>
-          </a:effectRef>
-          <a:fontRef idx="minor">
-            <a:schemeClr val="lt1"/>
-          </a:fontRef>
-        </p:style>
-        <p:txBody>
-          <a:bodyPr rtlCol="0" anchor="ctr" wrap="square" tIns="54864" bIns="54864"/>
-          <a:lstStyle/>
+              <a:t>AI社員</a:t>
+            </a:r>
+          </a:p>
           <a:p>
             <a:pPr algn="ctr"/>
             <a:r>
-              <a:rPr sz="1400" b="1">
+              <a:rPr sz="2200" b="1">
                 <a:solidFill>
                   <a:srgbClr val="FFFFFF"/>
                 </a:solidFill>
                 <a:latin typeface="Noto Sans JP"/>
               </a:rPr>
-              <a:t>戦略AI</a:t>
-            </a:r>
-          </a:p>
-        </p:txBody>
-      </p:sp>
-      <p:sp>
-        <p:nvSpPr>
-          <p:cNvPr id="20" name="Rectangle 19"/>
-          <p:cNvSpPr/>
-          <p:nvPr/>
-        </p:nvSpPr>
-        <p:spPr>
-          <a:xfrm>
-            <a:off x="9738360" y="2240280"/>
-            <a:ext cx="1920240" cy="3337560"/>
-          </a:xfrm>
-          <a:prstGeom prst="rect">
-            <a:avLst/>
-          </a:prstGeom>
-          <a:noFill/>
-          <a:ln>
-            <a:noFill/>
-          </a:ln>
-        </p:spPr>
-        <p:style>
-          <a:lnRef idx="1">
-            <a:schemeClr val="accent1"/>
-          </a:lnRef>
-          <a:fillRef idx="3">
-            <a:schemeClr val="accent1"/>
-          </a:fillRef>
-          <a:effectRef idx="2">
-            <a:schemeClr val="accent1"/>
-          </a:effectRef>
-          <a:fontRef idx="minor">
-            <a:schemeClr val="lt1"/>
-          </a:fontRef>
-        </p:style>
-        <p:txBody>
-          <a:bodyPr rtlCol="0" anchor="t" wrap="square" tIns="54864" bIns="54864"/>
-          <a:lstStyle/>
-          <a:p>
-            <a:pPr algn="l"/>
-            <a:r>
-              <a:rPr sz="1100" b="0">
-                <a:solidFill>
-                  <a:srgbClr val="1C3557"/>
-                </a:solidFill>
-                <a:latin typeface="Noto Sans JP"/>
-              </a:rPr>
-              <a:t>✓ 競合調査</a:t>
-            </a:r>
-          </a:p>
-          <a:p>
-            <a:pPr algn="l"/>
-            <a:r>
-              <a:rPr sz="1100" b="0">
-                <a:solidFill>
-                  <a:srgbClr val="1C3557"/>
-                </a:solidFill>
-                <a:latin typeface="Noto Sans JP"/>
-              </a:rPr>
-              <a:t>✓ 料金設計試算</a:t>
-            </a:r>
-          </a:p>
-          <a:p>
-            <a:pPr algn="l"/>
-            <a:r>
-              <a:rPr sz="1100" b="0">
-                <a:solidFill>
-                  <a:srgbClr val="1C3557"/>
-                </a:solidFill>
-                <a:latin typeface="Noto Sans JP"/>
-              </a:rPr>
-              <a:t>✓ データ分析</a:t>
-            </a:r>
-          </a:p>
-          <a:p>
-            <a:pPr algn="l"/>
-            <a:r>
-              <a:rPr sz="1100" b="0">
-                <a:solidFill>
-                  <a:srgbClr val="1C3557"/>
-                </a:solidFill>
-                <a:latin typeface="Noto Sans JP"/>
-              </a:rPr>
-              <a:t>✓ プロダクト改善提案</a:t>
-            </a:r>
-          </a:p>
-          <a:p>
-            <a:pPr algn="l"/>
-            <a:r>
-              <a:rPr sz="1100" b="0">
-                <a:solidFill>
-                  <a:srgbClr val="1C3557"/>
-                </a:solidFill>
-                <a:latin typeface="Noto Sans JP"/>
-              </a:rPr>
-              <a:t>✓ 朝の工程表</a:t>
-            </a:r>
-          </a:p>
-        </p:txBody>
-      </p:sp>
-      <p:sp>
-        <p:nvSpPr>
-          <p:cNvPr id="21" name="Rectangle 20"/>
-          <p:cNvSpPr/>
-          <p:nvPr/>
-        </p:nvSpPr>
-        <p:spPr>
-          <a:xfrm>
-            <a:off x="457200" y="5852160"/>
-            <a:ext cx="11274552" cy="731520"/>
-          </a:xfrm>
-          <a:prstGeom prst="rect">
-            <a:avLst/>
-          </a:prstGeom>
-          <a:noFill/>
-          <a:ln>
-            <a:noFill/>
-          </a:ln>
-        </p:spPr>
-        <p:style>
-          <a:lnRef idx="1">
-            <a:schemeClr val="accent1"/>
-          </a:lnRef>
-          <a:fillRef idx="3">
-            <a:schemeClr val="accent1"/>
-          </a:fillRef>
-          <a:effectRef idx="2">
-            <a:schemeClr val="accent1"/>
-          </a:effectRef>
-          <a:fontRef idx="minor">
-            <a:schemeClr val="lt1"/>
-          </a:fontRef>
-        </p:style>
-        <p:txBody>
-          <a:bodyPr rtlCol="0" anchor="ctr" wrap="square" tIns="54864" bIns="54864"/>
-          <a:lstStyle/>
+              <a:t>1.3人分</a:t>
+            </a:r>
+          </a:p>
           <a:p>
             <a:pPr algn="ctr"/>
             <a:r>
-              <a:rPr sz="2000" b="1">
-                <a:solidFill>
-                  <a:srgbClr val="2563EB"/>
-                </a:solidFill>
-                <a:latin typeface="Noto Sans JP"/>
-              </a:rPr>
-              <a:t>いろんな領域で AI社員 を使い倒している</a:t>
+              <a:rPr sz="2200" b="1">
+                <a:solidFill>
+                  <a:srgbClr val="FFFFFF"/>
+                </a:solidFill>
+                <a:latin typeface="Noto Sans JP"/>
+              </a:rPr>
+              <a:t>稼働中</a:t>
             </a:r>
           </a:p>
         </p:txBody>
